--- a/modulo_nc/Panel_No_Conformidades.pptx
+++ b/modulo_nc/Panel_No_Conformidades.pptx
@@ -220,19 +220,19 @@
                     <c:v>3 sem.</c:v>
                   </c:pt>
                   <c:pt idx="1">
-                    <c:v>03-08</c:v>
+                    <c:v>10-08</c:v>
                   </c:pt>
                   <c:pt idx="2">
-                    <c:v>10-08</c:v>
+                    <c:v>17-08</c:v>
                   </c:pt>
                   <c:pt idx="3">
-                    <c:v>17-08</c:v>
+                    <c:v>24-08</c:v>
                   </c:pt>
                   <c:pt idx="4">
-                    <c:v>24-08</c:v>
+                    <c:v>31-08</c:v>
                   </c:pt>
                   <c:pt idx="5">
-                    <c:v>31-08</c:v>
+                    <c:v>07-09</c:v>
                   </c:pt>
                 </c:lvl>
               </c:multiLvlStrCache>
@@ -251,16 +251,16 @@
                   <c:v/>
                 </c:pt>
                 <c:pt idx="2">
-                  <c:v/>
+                  <c:v>2</c:v>
                 </c:pt>
                 <c:pt idx="3">
-                  <c:v>2</c:v>
+                  <c:v>1</c:v>
                 </c:pt>
                 <c:pt idx="4">
-                  <c:v>1</c:v>
+                  <c:v>7</c:v>
                 </c:pt>
                 <c:pt idx="5">
-                  <c:v>7</c:v>
+                  <c:v/>
                 </c:pt>
               </c:numCache>
             </c:numRef>
@@ -322,19 +322,19 @@
                     <c:v>3 sem.</c:v>
                   </c:pt>
                   <c:pt idx="1">
-                    <c:v>03-08</c:v>
+                    <c:v>10-08</c:v>
                   </c:pt>
                   <c:pt idx="2">
-                    <c:v>10-08</c:v>
+                    <c:v>17-08</c:v>
                   </c:pt>
                   <c:pt idx="3">
-                    <c:v>17-08</c:v>
+                    <c:v>24-08</c:v>
                   </c:pt>
                   <c:pt idx="4">
-                    <c:v>24-08</c:v>
+                    <c:v>31-08</c:v>
                   </c:pt>
                   <c:pt idx="5">
-                    <c:v>31-08</c:v>
+                    <c:v>07-09</c:v>
                   </c:pt>
                 </c:lvl>
               </c:multiLvlStrCache>
@@ -347,16 +347,16 @@
                 <c:formatCode>General</c:formatCode>
                 <c:ptCount val="6"/>
                 <c:pt idx="0">
-                  <c:v>5</c:v>
+                  <c:v>6</c:v>
                 </c:pt>
                 <c:pt idx="1">
+                  <c:v>3</c:v>
+                </c:pt>
+                <c:pt idx="2">
                   <c:v>1</c:v>
                 </c:pt>
-                <c:pt idx="2">
-                  <c:v>3</c:v>
-                </c:pt>
                 <c:pt idx="3">
-                  <c:v>1</c:v>
+                  <c:v/>
                 </c:pt>
                 <c:pt idx="4">
                   <c:v/>
@@ -1199,7 +1199,7 @@
                 <c:formatCode>General</c:formatCode>
                 <c:ptCount val="4"/>
                 <c:pt idx="0">
-                  <c:v>292</c:v>
+                  <c:v>293</c:v>
                 </c:pt>
                 <c:pt idx="1">
                   <c:v>121</c:v>
@@ -1289,7 +1289,7 @@
                 <c:formatCode>General</c:formatCode>
                 <c:ptCount val="4"/>
                 <c:pt idx="0">
-                  <c:v>33</c:v>
+                  <c:v>32</c:v>
                 </c:pt>
                 <c:pt idx="1">
                   <c:v>2</c:v>
@@ -1487,7 +1487,7 @@
                 </a:solidFill>
                 <a:latin typeface="Calibri"/>
               </a:rPr>
-              <a:t>Antigüedad de los 46 hallazgos abiertos</a:t>
+              <a:t>Antigüedad de los 45 hallazgos abiertos</a:t>
             </a:r>
           </a:p>
         </c:rich>
@@ -1640,7 +1640,7 @@
                 <c:formatCode>General</c:formatCode>
                 <c:ptCount val="1"/>
                 <c:pt idx="0">
-                  <c:v>4</c:v>
+                  <c:v>3</c:v>
                 </c:pt>
               </c:numCache>
             </c:numRef>
@@ -1712,7 +1712,7 @@
                 <c:formatCode>General</c:formatCode>
                 <c:ptCount val="1"/>
                 <c:pt idx="0">
-                  <c:v>15</c:v>
+                  <c:v>14</c:v>
                 </c:pt>
               </c:numCache>
             </c:numRef>
@@ -1784,7 +1784,7 @@
                 <c:formatCode>General</c:formatCode>
                 <c:ptCount val="1"/>
                 <c:pt idx="0">
-                  <c:v>17</c:v>
+                  <c:v>18</c:v>
                 </c:pt>
               </c:numCache>
             </c:numRef>
@@ -2927,7 +2927,7 @@
                 <c:formatCode>General</c:formatCode>
                 <c:ptCount val="8"/>
                 <c:pt idx="0">
-                  <c:v>40</c:v>
+                  <c:v>41</c:v>
                 </c:pt>
                 <c:pt idx="1">
                   <c:v>37</c:v>
@@ -3041,7 +3041,7 @@
                 <c:formatCode>General</c:formatCode>
                 <c:ptCount val="8"/>
                 <c:pt idx="0">
-                  <c:v>37</c:v>
+                  <c:v>36</c:v>
                 </c:pt>
                 <c:pt idx="1">
                   <c:v/>
@@ -5697,7 +5697,7 @@
                 <a:ea typeface="Cambria" pitchFamily="34" charset="-122"/>
                 <a:cs typeface="Cambria" pitchFamily="34" charset="-120"/>
               </a:rPr>
-              <a:t>91%</a:t>
+              <a:t>91,2%</a:t>
             </a:r>
             <a:endParaRPr lang="en-US" sz="3400" dirty="0"/>
           </a:p>
@@ -5775,7 +5775,7 @@
                 <a:ea typeface="Cambria" pitchFamily="34" charset="-122"/>
                 <a:cs typeface="Cambria" pitchFamily="34" charset="-120"/>
               </a:rPr>
-              <a:t>46</a:t>
+              <a:t>45</a:t>
             </a:r>
             <a:endParaRPr lang="en-US" sz="3400" dirty="0"/>
           </a:p>
@@ -6009,7 +6009,7 @@
                 <a:ea typeface="Calibri" pitchFamily="34" charset="-122"/>
                 <a:cs typeface="Calibri" pitchFamily="34" charset="-120"/>
               </a:rPr>
-              <a:t>Corte: 07-09-2026</a:t>
+              <a:t>Corte: 13-09-2026</a:t>
             </a:r>
             <a:endParaRPr lang="en-US" sz="1100" dirty="0"/>
           </a:p>
@@ -6048,7 +6048,7 @@
                 <a:ea typeface="Calibri" pitchFamily="34" charset="-122"/>
                 <a:cs typeface="Calibri" pitchFamily="34" charset="-120"/>
               </a:rPr>
-              <a:t>Fuente: Data_NCR07092026.xlsx — hoja «Observaciones» · Corte 07-09-2026 · 509 registros desde 10-02-2023</a:t>
+              <a:t>Fuente: Data_NCR-13092026.xlsx — hoja «Observaciones» · Corte 13-09-2026 · 509 registros desde 10-02-2023</a:t>
             </a:r>
             <a:endParaRPr lang="en-US" sz="850" dirty="0"/>
           </a:p>
@@ -6641,7 +6641,7 @@
                 <a:ea typeface="Calibri" pitchFamily="34" charset="-122"/>
                 <a:cs typeface="Calibri" pitchFamily="34" charset="-120"/>
               </a:rPr>
-              <a:t>Global del módulo: 91%</a:t>
+              <a:t>Global del módulo: 91,2%</a:t>
             </a:r>
             <a:endParaRPr lang="en-US" sz="950" dirty="0"/>
           </a:p>
@@ -7849,7 +7849,7 @@
                 <a:ea typeface="Calibri" pitchFamily="34" charset="-122"/>
                 <a:cs typeface="Calibri" pitchFamily="34" charset="-120"/>
               </a:rPr>
-              <a:t>Fuente: Data_NCR07092026.xlsx — hoja «Observaciones» · Corte 07-09-2026 · 509 registros desde 10-02-2023</a:t>
+              <a:t>Fuente: Data_NCR-13092026.xlsx — hoja «Observaciones» · Corte 13-09-2026 · 509 registros desde 10-02-2023</a:t>
             </a:r>
             <a:endParaRPr lang="en-US" sz="850" dirty="0"/>
           </a:p>
@@ -8708,7 +8708,7 @@
                 <a:ea typeface="Calibri" pitchFamily="34" charset="-122"/>
                 <a:cs typeface="Calibri" pitchFamily="34" charset="-120"/>
               </a:rPr>
-              <a:t>118</a:t>
+              <a:t>124</a:t>
             </a:r>
             <a:endParaRPr lang="en-US" sz="1050" dirty="0"/>
           </a:p>
@@ -8831,7 +8831,7 @@
                 <a:ea typeface="Calibri" pitchFamily="34" charset="-122"/>
                 <a:cs typeface="Calibri" pitchFamily="34" charset="-120"/>
               </a:rPr>
-              <a:t>SEMANA 31-08-2026 — 06-09-2026</a:t>
+              <a:t>SEMANA 07-09-2026 — 13-09-2026</a:t>
             </a:r>
             <a:endParaRPr lang="en-US" sz="1000" dirty="0"/>
           </a:p>
@@ -8909,7 +8909,7 @@
                 <a:ea typeface="Calibri" pitchFamily="34" charset="-122"/>
                 <a:cs typeface="Calibri" pitchFamily="34" charset="-120"/>
               </a:rPr>
-              <a:t>Fuente: Data_NCR07092026.xlsx — hoja «Observaciones» · Corte 07-09-2026 · 509 registros desde 10-02-2023</a:t>
+              <a:t>Fuente: Data_NCR-13092026.xlsx — hoja «Observaciones» · Corte 13-09-2026 · 509 registros desde 10-02-2023</a:t>
             </a:r>
             <a:endParaRPr lang="en-US" sz="850" dirty="0"/>
           </a:p>
@@ -9633,7 +9633,7 @@
                 <a:ea typeface="Calibri" pitchFamily="34" charset="-122"/>
                 <a:cs typeface="Calibri" pitchFamily="34" charset="-120"/>
               </a:rPr>
-              <a:t>Corte: 07-09-2026</a:t>
+              <a:t>Corte: 13-09-2026</a:t>
             </a:r>
             <a:endParaRPr lang="en-US" sz="1100" dirty="0"/>
           </a:p>
@@ -9672,7 +9672,7 @@
                 <a:ea typeface="Calibri" pitchFamily="34" charset="-122"/>
                 <a:cs typeface="Calibri" pitchFamily="34" charset="-120"/>
               </a:rPr>
-              <a:t>Fuente: Data_NCR07092026.xlsx — hoja «Observaciones» · Corte 07-09-2026 · 509 registros desde 10-02-2023</a:t>
+              <a:t>Fuente: Data_NCR-13092026.xlsx — hoja «Observaciones» · Corte 13-09-2026 · 509 registros desde 10-02-2023</a:t>
             </a:r>
             <a:endParaRPr lang="en-US" sz="850" dirty="0"/>
           </a:p>
@@ -10265,7 +10265,7 @@
                 <a:ea typeface="Calibri" pitchFamily="34" charset="-122"/>
                 <a:cs typeface="Calibri" pitchFamily="34" charset="-120"/>
               </a:rPr>
-              <a:t>Global del módulo: 91%</a:t>
+              <a:t>Global del módulo: 91,2%</a:t>
             </a:r>
             <a:endParaRPr lang="en-US" sz="950" dirty="0"/>
           </a:p>
@@ -11199,7 +11199,7 @@
                 <a:ea typeface="Calibri" pitchFamily="34" charset="-122"/>
                 <a:cs typeface="Calibri" pitchFamily="34" charset="-120"/>
               </a:rPr>
-              <a:t>Fuente: Data_NCR07092026.xlsx — hoja «Observaciones» · Corte 07-09-2026 · 509 registros desde 10-02-2023</a:t>
+              <a:t>Fuente: Data_NCR-13092026.xlsx — hoja «Observaciones» · Corte 13-09-2026 · 509 registros desde 10-02-2023</a:t>
             </a:r>
             <a:endParaRPr lang="en-US" sz="850" dirty="0"/>
           </a:p>
@@ -12058,7 +12058,7 @@
                 <a:ea typeface="Calibri" pitchFamily="34" charset="-122"/>
                 <a:cs typeface="Calibri" pitchFamily="34" charset="-120"/>
               </a:rPr>
-              <a:t>168</a:t>
+              <a:t>174</a:t>
             </a:r>
             <a:endParaRPr lang="en-US" sz="1050" dirty="0"/>
           </a:p>
@@ -12413,7 +12413,7 @@
                 <a:ea typeface="Calibri" pitchFamily="34" charset="-122"/>
                 <a:cs typeface="Calibri" pitchFamily="34" charset="-120"/>
               </a:rPr>
-              <a:t>69</a:t>
+              <a:t>75</a:t>
             </a:r>
             <a:endParaRPr lang="en-US" sz="1050" dirty="0"/>
           </a:p>
@@ -12748,7 +12748,7 @@
                 <a:ea typeface="Calibri" pitchFamily="34" charset="-122"/>
                 <a:cs typeface="Calibri" pitchFamily="34" charset="-120"/>
               </a:rPr>
-              <a:t>41</a:t>
+              <a:t>47</a:t>
             </a:r>
             <a:endParaRPr lang="en-US" sz="1050" dirty="0"/>
           </a:p>
@@ -13103,7 +13103,7 @@
                 <a:ea typeface="Calibri" pitchFamily="34" charset="-122"/>
                 <a:cs typeface="Calibri" pitchFamily="34" charset="-120"/>
               </a:rPr>
-              <a:t>19</a:t>
+              <a:t>25</a:t>
             </a:r>
             <a:endParaRPr lang="en-US" sz="1050" dirty="0"/>
           </a:p>
@@ -13438,7 +13438,7 @@
                 <a:ea typeface="Calibri" pitchFamily="34" charset="-122"/>
                 <a:cs typeface="Calibri" pitchFamily="34" charset="-120"/>
               </a:rPr>
-              <a:t>19</a:t>
+              <a:t>25</a:t>
             </a:r>
             <a:endParaRPr lang="en-US" sz="1050" dirty="0"/>
           </a:p>
@@ -13793,7 +13793,7 @@
                 <a:ea typeface="Calibri" pitchFamily="34" charset="-122"/>
                 <a:cs typeface="Calibri" pitchFamily="34" charset="-120"/>
               </a:rPr>
-              <a:t>14</a:t>
+              <a:t>20</a:t>
             </a:r>
             <a:endParaRPr lang="en-US" sz="1050" dirty="0"/>
           </a:p>
@@ -14128,7 +14128,7 @@
                 <a:ea typeface="Calibri" pitchFamily="34" charset="-122"/>
                 <a:cs typeface="Calibri" pitchFamily="34" charset="-120"/>
               </a:rPr>
-              <a:t>4</a:t>
+              <a:t>10</a:t>
             </a:r>
             <a:endParaRPr lang="en-US" sz="1050" dirty="0"/>
           </a:p>
@@ -14213,7 +14213,7 @@
             </a:avLst>
           </a:prstGeom>
           <a:solidFill>
-            <a:srgbClr val="12233B"/>
+            <a:srgbClr val="E9EDF2"/>
           </a:solidFill>
           <a:ln/>
         </p:spPr>
@@ -14245,13 +14245,13 @@
             <a:r>
               <a:rPr lang="en-US" sz="1000" b="1" spc="100" kern="0" dirty="0">
                 <a:solidFill>
-                  <a:srgbClr val="E3A55B"/>
-                </a:solidFill>
-                <a:latin typeface="Calibri" pitchFamily="34" charset="0"/>
-                <a:ea typeface="Calibri" pitchFamily="34" charset="-122"/>
-                <a:cs typeface="Calibri" pitchFamily="34" charset="-120"/>
-              </a:rPr>
-              <a:t>SEMANA 31-08-2026 — 06-09-2026</a:t>
+                  <a:srgbClr val="56606E"/>
+                </a:solidFill>
+                <a:latin typeface="Calibri" pitchFamily="34" charset="0"/>
+                <a:ea typeface="Calibri" pitchFamily="34" charset="-122"/>
+                <a:cs typeface="Calibri" pitchFamily="34" charset="-120"/>
+              </a:rPr>
+              <a:t>SEMANA 07-09-2026 — 13-09-2026</a:t>
             </a:r>
             <a:endParaRPr lang="en-US" sz="1000" dirty="0"/>
           </a:p>
@@ -14284,13 +14284,13 @@
             <a:r>
               <a:rPr lang="en-US" sz="1150" dirty="0">
                 <a:solidFill>
-                  <a:srgbClr val="FFFFFF"/>
-                </a:solidFill>
-                <a:latin typeface="Calibri" pitchFamily="34" charset="0"/>
-                <a:ea typeface="Calibri" pitchFamily="34" charset="-122"/>
-                <a:cs typeface="Calibri" pitchFamily="34" charset="-120"/>
-              </a:rPr>
-              <a:t>1 hallazgo nuevo · 0 internas · 1 del cliente · OO.CC 1 · 1 sigue abierto</a:t>
+                  <a:srgbClr val="56606E"/>
+                </a:solidFill>
+                <a:latin typeface="Calibri" pitchFamily="34" charset="0"/>
+                <a:ea typeface="Calibri" pitchFamily="34" charset="-122"/>
+                <a:cs typeface="Calibri" pitchFamily="34" charset="-120"/>
+              </a:rPr>
+              <a:t>Sin hallazgos nuevos en el período.</a:t>
             </a:r>
             <a:endParaRPr lang="en-US" sz="1150" dirty="0"/>
           </a:p>
@@ -14329,7 +14329,7 @@
                 <a:ea typeface="Calibri" pitchFamily="34" charset="-122"/>
                 <a:cs typeface="Calibri" pitchFamily="34" charset="-120"/>
               </a:rPr>
-              <a:t>Fuente: Data_NCR07092026.xlsx — hoja «Observaciones» · Corte 07-09-2026 · 509 registros desde 10-02-2023</a:t>
+              <a:t>Fuente: Data_NCR-13092026.xlsx — hoja «Observaciones» · Corte 13-09-2026 · 509 registros desde 10-02-2023</a:t>
             </a:r>
             <a:endParaRPr lang="en-US" sz="850" dirty="0"/>
           </a:p>
@@ -14741,7 +14741,7 @@
                 <a:ea typeface="Cambria" pitchFamily="34" charset="-122"/>
                 <a:cs typeface="Cambria" pitchFamily="34" charset="-120"/>
               </a:rPr>
-              <a:t>77,6%</a:t>
+              <a:t>78,2%</a:t>
             </a:r>
             <a:endParaRPr lang="en-US" sz="3400" dirty="0"/>
           </a:p>
@@ -14819,7 +14819,7 @@
                 <a:ea typeface="Cambria" pitchFamily="34" charset="-122"/>
                 <a:cs typeface="Cambria" pitchFamily="34" charset="-120"/>
               </a:rPr>
-              <a:t>38</a:t>
+              <a:t>37</a:t>
             </a:r>
             <a:endParaRPr lang="en-US" sz="3400" dirty="0"/>
           </a:p>
@@ -15053,7 +15053,7 @@
                 <a:ea typeface="Calibri" pitchFamily="34" charset="-122"/>
                 <a:cs typeface="Calibri" pitchFamily="34" charset="-120"/>
               </a:rPr>
-              <a:t>Corte: 07-09-2026</a:t>
+              <a:t>Corte: 13-09-2026</a:t>
             </a:r>
             <a:endParaRPr lang="en-US" sz="1100" dirty="0"/>
           </a:p>
@@ -15092,7 +15092,7 @@
                 <a:ea typeface="Calibri" pitchFamily="34" charset="-122"/>
                 <a:cs typeface="Calibri" pitchFamily="34" charset="-120"/>
               </a:rPr>
-              <a:t>Fuente: Data_NCR07092026.xlsx — hoja «Observaciones» · Corte 07-09-2026 · 509 registros desde 10-02-2023</a:t>
+              <a:t>Fuente: Data_NCR-13092026.xlsx — hoja «Observaciones» · Corte 13-09-2026 · 509 registros desde 10-02-2023</a:t>
             </a:r>
             <a:endParaRPr lang="en-US" sz="850" dirty="0"/>
           </a:p>
@@ -15397,7 +15397,7 @@
                 <a:ea typeface="Calibri" pitchFamily="34" charset="-122"/>
                 <a:cs typeface="Calibri" pitchFamily="34" charset="-120"/>
               </a:rPr>
-              <a:t>132 cerrados</a:t>
+              <a:t>133 cerrados</a:t>
             </a:r>
             <a:endParaRPr lang="en-US" sz="1400" dirty="0"/>
           </a:p>
@@ -15568,7 +15568,7 @@
                 <a:ea typeface="Cambria" pitchFamily="34" charset="-122"/>
                 <a:cs typeface="Cambria" pitchFamily="34" charset="-120"/>
               </a:rPr>
-              <a:t>77,6%</a:t>
+              <a:t>78,2%</a:t>
             </a:r>
             <a:endParaRPr lang="en-US" sz="4000" dirty="0"/>
           </a:p>
@@ -15607,7 +15607,7 @@
                 <a:ea typeface="Calibri" pitchFamily="34" charset="-122"/>
                 <a:cs typeface="Calibri" pitchFamily="34" charset="-120"/>
               </a:rPr>
-              <a:t>132/170</a:t>
+              <a:t>133/170</a:t>
             </a:r>
             <a:endParaRPr lang="en-US" sz="1400" dirty="0"/>
           </a:p>
@@ -15685,7 +15685,7 @@
                 <a:ea typeface="Calibri" pitchFamily="34" charset="-122"/>
                 <a:cs typeface="Calibri" pitchFamily="34" charset="-120"/>
               </a:rPr>
-              <a:t>Global del módulo: 91%</a:t>
+              <a:t>Global del módulo: 91,2%</a:t>
             </a:r>
             <a:endParaRPr lang="en-US" sz="950" dirty="0"/>
           </a:p>
@@ -15778,7 +15778,7 @@
                 <a:ea typeface="Cambria" pitchFamily="34" charset="-122"/>
                 <a:cs typeface="Cambria" pitchFamily="34" charset="-120"/>
               </a:rPr>
-              <a:t>38</a:t>
+              <a:t>37</a:t>
             </a:r>
             <a:endParaRPr lang="en-US" sz="4000" dirty="0"/>
           </a:p>
@@ -15895,7 +15895,7 @@
                 <a:ea typeface="Calibri" pitchFamily="34" charset="-122"/>
                 <a:cs typeface="Calibri" pitchFamily="34" charset="-120"/>
               </a:rPr>
-              <a:t>1 iniciado · 21 listo para revisión · 9 stand by · 1 observada · 6 pendiente</a:t>
+              <a:t>1 iniciado · 25 listo para revisión · 9 stand by · 1 observada · 1 pendiente</a:t>
             </a:r>
             <a:endParaRPr lang="en-US" sz="950" dirty="0"/>
           </a:p>
@@ -16541,7 +16541,7 @@
                 <a:ea typeface="Calibri" pitchFamily="34" charset="-122"/>
                 <a:cs typeface="Calibri" pitchFamily="34" charset="-120"/>
               </a:rPr>
-              <a:t>37 ab.</a:t>
+              <a:t>36 ab.</a:t>
             </a:r>
             <a:endParaRPr lang="en-US" sz="950" dirty="0"/>
           </a:p>
@@ -16756,7 +16756,7 @@
                 <a:ea typeface="Calibri" pitchFamily="34" charset="-122"/>
                 <a:cs typeface="Calibri" pitchFamily="34" charset="-120"/>
               </a:rPr>
-              <a:t>Fuente: Data_NCR07092026.xlsx — hoja «Observaciones» · Corte 07-09-2026 · 509 registros desde 10-02-2023</a:t>
+              <a:t>Fuente: Data_NCR-13092026.xlsx — hoja «Observaciones» · Corte 13-09-2026 · 509 registros desde 10-02-2023</a:t>
             </a:r>
             <a:endParaRPr lang="en-US" sz="850" dirty="0"/>
           </a:p>
@@ -17007,7 +17007,7 @@
                 <a:ea typeface="Calibri" pitchFamily="34" charset="-122"/>
                 <a:cs typeface="Calibri" pitchFamily="34" charset="-120"/>
               </a:rPr>
-              <a:t>38 hallazgos siguen abiertos; 17 con más de 180 días. Se listan del más antiguo al más reciente.</a:t>
+              <a:t>37 hallazgos siguen abiertos; 18 con más de 180 días. Se listan del más antiguo al más reciente.</a:t>
             </a:r>
             <a:endParaRPr lang="en-US" sz="1350" dirty="0"/>
           </a:p>
@@ -17615,7 +17615,7 @@
                 <a:ea typeface="Calibri" pitchFamily="34" charset="-122"/>
                 <a:cs typeface="Calibri" pitchFamily="34" charset="-120"/>
               </a:rPr>
-              <a:t>326</a:t>
+              <a:t>332</a:t>
             </a:r>
             <a:endParaRPr lang="en-US" sz="1050" dirty="0"/>
           </a:p>
@@ -17970,7 +17970,7 @@
                 <a:ea typeface="Calibri" pitchFamily="34" charset="-122"/>
                 <a:cs typeface="Calibri" pitchFamily="34" charset="-120"/>
               </a:rPr>
-              <a:t>326</a:t>
+              <a:t>332</a:t>
             </a:r>
             <a:endParaRPr lang="en-US" sz="1050" dirty="0"/>
           </a:p>
@@ -18305,7 +18305,7 @@
                 <a:ea typeface="Calibri" pitchFamily="34" charset="-122"/>
                 <a:cs typeface="Calibri" pitchFamily="34" charset="-120"/>
               </a:rPr>
-              <a:t>305</a:t>
+              <a:t>311</a:t>
             </a:r>
             <a:endParaRPr lang="en-US" sz="1050" dirty="0"/>
           </a:p>
@@ -18660,7 +18660,7 @@
                 <a:ea typeface="Calibri" pitchFamily="34" charset="-122"/>
                 <a:cs typeface="Calibri" pitchFamily="34" charset="-120"/>
               </a:rPr>
-              <a:t>301</a:t>
+              <a:t>307</a:t>
             </a:r>
             <a:endParaRPr lang="en-US" sz="1050" dirty="0"/>
           </a:p>
@@ -18995,7 +18995,7 @@
                 <a:ea typeface="Calibri" pitchFamily="34" charset="-122"/>
                 <a:cs typeface="Calibri" pitchFamily="34" charset="-120"/>
               </a:rPr>
-              <a:t>264</a:t>
+              <a:t>270</a:t>
             </a:r>
             <a:endParaRPr lang="en-US" sz="1050" dirty="0"/>
           </a:p>
@@ -19350,7 +19350,7 @@
                 <a:ea typeface="Calibri" pitchFamily="34" charset="-122"/>
                 <a:cs typeface="Calibri" pitchFamily="34" charset="-120"/>
               </a:rPr>
-              <a:t>235</a:t>
+              <a:t>241</a:t>
             </a:r>
             <a:endParaRPr lang="en-US" sz="1050" dirty="0"/>
           </a:p>
@@ -19685,7 +19685,7 @@
                 <a:ea typeface="Calibri" pitchFamily="34" charset="-122"/>
                 <a:cs typeface="Calibri" pitchFamily="34" charset="-120"/>
               </a:rPr>
-              <a:t>235</a:t>
+              <a:t>241</a:t>
             </a:r>
             <a:endParaRPr lang="en-US" sz="1050" dirty="0"/>
           </a:p>
@@ -20040,7 +20040,7 @@
                 <a:ea typeface="Calibri" pitchFamily="34" charset="-122"/>
                 <a:cs typeface="Calibri" pitchFamily="34" charset="-120"/>
               </a:rPr>
-              <a:t>235</a:t>
+              <a:t>241</a:t>
             </a:r>
             <a:endParaRPr lang="en-US" sz="1050" dirty="0"/>
           </a:p>
@@ -20375,7 +20375,7 @@
                 <a:ea typeface="Calibri" pitchFamily="34" charset="-122"/>
                 <a:cs typeface="Calibri" pitchFamily="34" charset="-120"/>
               </a:rPr>
-              <a:t>235</a:t>
+              <a:t>241</a:t>
             </a:r>
             <a:endParaRPr lang="en-US" sz="1050" dirty="0"/>
           </a:p>
@@ -20476,7 +20476,7 @@
                 <a:ea typeface="Calibri" pitchFamily="34" charset="-122"/>
                 <a:cs typeface="Calibri" pitchFamily="34" charset="-120"/>
               </a:rPr>
-              <a:t>Se listan los 9 más antiguos de 38 abiertos; el detalle completo está en el panel.</a:t>
+              <a:t>Se listan los 9 más antiguos de 37 abiertos; el detalle completo está en el panel.</a:t>
             </a:r>
             <a:endParaRPr lang="en-US" sz="950" dirty="0"/>
           </a:p>
@@ -20499,7 +20499,7 @@
             </a:avLst>
           </a:prstGeom>
           <a:solidFill>
-            <a:srgbClr val="12233B"/>
+            <a:srgbClr val="E9EDF2"/>
           </a:solidFill>
           <a:ln/>
         </p:spPr>
@@ -20531,13 +20531,13 @@
             <a:r>
               <a:rPr lang="en-US" sz="1000" b="1" spc="100" kern="0" dirty="0">
                 <a:solidFill>
-                  <a:srgbClr val="E3A55B"/>
-                </a:solidFill>
-                <a:latin typeface="Calibri" pitchFamily="34" charset="0"/>
-                <a:ea typeface="Calibri" pitchFamily="34" charset="-122"/>
-                <a:cs typeface="Calibri" pitchFamily="34" charset="-120"/>
-              </a:rPr>
-              <a:t>SEMANA 31-08-2026 — 06-09-2026</a:t>
+                  <a:srgbClr val="56606E"/>
+                </a:solidFill>
+                <a:latin typeface="Calibri" pitchFamily="34" charset="0"/>
+                <a:ea typeface="Calibri" pitchFamily="34" charset="-122"/>
+                <a:cs typeface="Calibri" pitchFamily="34" charset="-120"/>
+              </a:rPr>
+              <a:t>SEMANA 07-09-2026 — 13-09-2026</a:t>
             </a:r>
             <a:endParaRPr lang="en-US" sz="1000" dirty="0"/>
           </a:p>
@@ -20570,13 +20570,13 @@
             <a:r>
               <a:rPr lang="en-US" sz="1150" dirty="0">
                 <a:solidFill>
-                  <a:srgbClr val="FFFFFF"/>
-                </a:solidFill>
-                <a:latin typeface="Calibri" pitchFamily="34" charset="0"/>
-                <a:ea typeface="Calibri" pitchFamily="34" charset="-122"/>
-                <a:cs typeface="Calibri" pitchFamily="34" charset="-120"/>
-              </a:rPr>
-              <a:t>6 hallazgos nuevos · 0 internas · 6 del cliente · Sin especialidad 6 · 6 siguen abiertos</a:t>
+                  <a:srgbClr val="56606E"/>
+                </a:solidFill>
+                <a:latin typeface="Calibri" pitchFamily="34" charset="0"/>
+                <a:ea typeface="Calibri" pitchFamily="34" charset="-122"/>
+                <a:cs typeface="Calibri" pitchFamily="34" charset="-120"/>
+              </a:rPr>
+              <a:t>Sin hallazgos nuevos en el período.</a:t>
             </a:r>
             <a:endParaRPr lang="en-US" sz="1150" dirty="0"/>
           </a:p>
@@ -20615,7 +20615,7 @@
                 <a:ea typeface="Calibri" pitchFamily="34" charset="-122"/>
                 <a:cs typeface="Calibri" pitchFamily="34" charset="-120"/>
               </a:rPr>
-              <a:t>Fuente: Data_NCR07092026.xlsx — hoja «Observaciones» · Corte 07-09-2026 · 509 registros desde 10-02-2023</a:t>
+              <a:t>Fuente: Data_NCR-13092026.xlsx — hoja «Observaciones» · Corte 13-09-2026 · 509 registros desde 10-02-2023</a:t>
             </a:r>
             <a:endParaRPr lang="en-US" sz="850" dirty="0"/>
           </a:p>
@@ -20920,7 +20920,7 @@
                 <a:ea typeface="Cambria" pitchFamily="34" charset="-122"/>
                 <a:cs typeface="Cambria" pitchFamily="34" charset="-120"/>
               </a:rPr>
-              <a:t>91%</a:t>
+              <a:t>91,2%</a:t>
             </a:r>
             <a:endParaRPr lang="en-US" sz="4000" dirty="0"/>
           </a:p>
@@ -20959,7 +20959,7 @@
                 <a:ea typeface="Calibri" pitchFamily="34" charset="-122"/>
                 <a:cs typeface="Calibri" pitchFamily="34" charset="-120"/>
               </a:rPr>
-              <a:t>463/509</a:t>
+              <a:t>464/509</a:t>
             </a:r>
             <a:endParaRPr lang="en-US" sz="1400" dirty="0"/>
           </a:p>
@@ -21037,7 +21037,7 @@
                 <a:ea typeface="Calibri" pitchFamily="34" charset="-122"/>
                 <a:cs typeface="Calibri" pitchFamily="34" charset="-120"/>
               </a:rPr>
-              <a:t>46 abiertos · 17 con más de 180 días</a:t>
+              <a:t>45 abiertos · 18 con más de 180 días</a:t>
             </a:r>
             <a:endParaRPr lang="en-US" sz="950" dirty="0"/>
           </a:p>
@@ -21130,7 +21130,7 @@
                 <a:ea typeface="Cambria" pitchFamily="34" charset="-122"/>
                 <a:cs typeface="Cambria" pitchFamily="34" charset="-120"/>
               </a:rPr>
-              <a:t>46</a:t>
+              <a:t>45</a:t>
             </a:r>
             <a:endParaRPr lang="en-US" sz="4000" dirty="0"/>
           </a:p>
@@ -21247,7 +21247,7 @@
                 <a:ea typeface="Calibri" pitchFamily="34" charset="-122"/>
                 <a:cs typeface="Calibri" pitchFamily="34" charset="-120"/>
               </a:rPr>
-              <a:t>7 iniciado · 23 listo para revisión · 9 stand by · 1 observada · 6 pendiente</a:t>
+              <a:t>7 iniciado · 27 listo para revisión · 9 stand by · 1 observada · 1 pendiente</a:t>
             </a:r>
             <a:endParaRPr lang="en-US" sz="950" dirty="0"/>
           </a:p>
@@ -21807,7 +21807,7 @@
                 <a:ea typeface="Calibri" pitchFamily="34" charset="-122"/>
                 <a:cs typeface="Calibri" pitchFamily="34" charset="-120"/>
               </a:rPr>
-              <a:t>38 de los 46 hallazgos abiertos (82,6%), y es uno de los frentes donde el cliente levanta más de lo que detecta Besalco (77 del cliente contra 53 internas).</a:t>
+              <a:t>37 de los 45 hallazgos abiertos (82,2%), y es uno de los frentes donde el cliente levanta más de lo que detecta Besalco (77 del cliente contra 53 internas).</a:t>
             </a:r>
             <a:endParaRPr lang="en-US" sz="1250" dirty="0"/>
           </a:p>
@@ -21869,7 +21869,7 @@
                 <a:ea typeface="Calibri" pitchFamily="34" charset="-122"/>
                 <a:cs typeface="Calibri" pitchFamily="34" charset="-120"/>
               </a:rPr>
-              <a:t>La semana trajo 7 hallazgos nuevos, ninguno de autodetección.  </a:t>
+              <a:t>La semana cerró sin hallazgos nuevos.  </a:t>
             </a:r>
             <a:pPr indent="0" marL="0">
               <a:lnSpc>
@@ -21886,7 +21886,7 @@
                 <a:ea typeface="Calibri" pitchFamily="34" charset="-122"/>
                 <a:cs typeface="Calibri" pitchFamily="34" charset="-120"/>
               </a:rPr>
-              <a:t>31-08-2026 al 06-09-2026: 7 del cliente en Sin especialidad (6) y OO.CC (1). Todos siguen abiertos; la semana anterior entraron 1.</a:t>
+              <a:t>Entre el 07-09-2026 y el 13-09-2026 no se levantó ningún hallazgo en ningún frente.</a:t>
             </a:r>
             <a:endParaRPr lang="en-US" sz="1250" dirty="0"/>
           </a:p>
@@ -21948,7 +21948,7 @@
                 <a:ea typeface="Calibri" pitchFamily="34" charset="-122"/>
                 <a:cs typeface="Calibri" pitchFamily="34" charset="-120"/>
               </a:rPr>
-              <a:t>39 de los 46 abiertos están fuera del plazo de respuesta.  </a:t>
+              <a:t>44 de los 45 abiertos están fuera del plazo de respuesta.  </a:t>
             </a:r>
             <a:pPr indent="0" marL="0">
               <a:lnSpc>
@@ -21965,7 +21965,7 @@
                 <a:ea typeface="Calibri" pitchFamily="34" charset="-122"/>
                 <a:cs typeface="Calibri" pitchFamily="34" charset="-120"/>
               </a:rPr>
-              <a:t>El plazo es de 10 días desde que se emite la NC. De los atrasados, 17 llevan más de 180 días abiertos y 0 más de un año: no es atraso de días, es deuda vieja.</a:t>
+              <a:t>El plazo es de 10 días desde que se emite la NC. De los atrasados, 18 llevan más de 180 días abiertos y 0 más de un año: no es atraso de días, es deuda vieja.</a:t>
             </a:r>
             <a:endParaRPr lang="en-US" sz="1250" dirty="0"/>
           </a:p>
@@ -22004,7 +22004,7 @@
                 <a:ea typeface="Calibri" pitchFamily="34" charset="-122"/>
                 <a:cs typeface="Calibri" pitchFamily="34" charset="-120"/>
               </a:rPr>
-              <a:t>Fuente: Data_NCR07092026.xlsx — hoja «Observaciones» · Corte 07-09-2026 · 509 registros desde 10-02-2023</a:t>
+              <a:t>Fuente: Data_NCR-13092026.xlsx — hoja «Observaciones» · Corte 13-09-2026 · 509 registros desde 10-02-2023</a:t>
             </a:r>
             <a:endParaRPr lang="en-US" sz="850" dirty="0"/>
           </a:p>
@@ -23792,7 +23792,7 @@
                 <a:ea typeface="Calibri" pitchFamily="34" charset="-122"/>
                 <a:cs typeface="Calibri" pitchFamily="34" charset="-120"/>
               </a:rPr>
-              <a:t>132</a:t>
+              <a:t>133</a:t>
             </a:r>
             <a:endParaRPr lang="en-US" sz="1300" dirty="0"/>
           </a:p>
@@ -23831,7 +23831,7 @@
                 <a:ea typeface="Calibri" pitchFamily="34" charset="-122"/>
                 <a:cs typeface="Calibri" pitchFamily="34" charset="-120"/>
               </a:rPr>
-              <a:t>38</a:t>
+              <a:t>37</a:t>
             </a:r>
             <a:endParaRPr lang="en-US" sz="1300" dirty="0"/>
           </a:p>
@@ -23870,7 +23870,7 @@
                 <a:ea typeface="Calibri" pitchFamily="34" charset="-122"/>
                 <a:cs typeface="Calibri" pitchFamily="34" charset="-120"/>
               </a:rPr>
-              <a:t>77,6%</a:t>
+              <a:t>78,2%</a:t>
             </a:r>
             <a:endParaRPr lang="en-US" sz="1300" dirty="0"/>
           </a:p>
@@ -24760,7 +24760,7 @@
                 <a:ea typeface="Calibri" pitchFamily="34" charset="-122"/>
                 <a:cs typeface="Calibri" pitchFamily="34" charset="-120"/>
               </a:rPr>
-              <a:t>455</a:t>
+              <a:t>456</a:t>
             </a:r>
             <a:endParaRPr lang="en-US" sz="1300" dirty="0"/>
           </a:p>
@@ -24799,7 +24799,7 @@
                 <a:ea typeface="Calibri" pitchFamily="34" charset="-122"/>
                 <a:cs typeface="Calibri" pitchFamily="34" charset="-120"/>
               </a:rPr>
-              <a:t>46</a:t>
+              <a:t>45</a:t>
             </a:r>
             <a:endParaRPr lang="en-US" sz="1300" dirty="0"/>
           </a:p>
@@ -24838,7 +24838,7 @@
                 <a:ea typeface="Calibri" pitchFamily="34" charset="-122"/>
                 <a:cs typeface="Calibri" pitchFamily="34" charset="-120"/>
               </a:rPr>
-              <a:t>90,8%</a:t>
+              <a:t>91%</a:t>
             </a:r>
             <a:endParaRPr lang="en-US" sz="1300" dirty="0"/>
           </a:p>
@@ -25072,7 +25072,7 @@
                 <a:ea typeface="Calibri" pitchFamily="34" charset="-122"/>
                 <a:cs typeface="Calibri" pitchFamily="34" charset="-120"/>
               </a:rPr>
-              <a:t>Fuente: Data_NCR07092026.xlsx — hoja «Observaciones» · Corte 07-09-2026 · 509 registros desde 10-02-2023</a:t>
+              <a:t>Fuente: Data_NCR-13092026.xlsx — hoja «Observaciones» · Corte 13-09-2026 · 509 registros desde 10-02-2023</a:t>
             </a:r>
             <a:endParaRPr lang="en-US" sz="850" dirty="0"/>
           </a:p>
@@ -25323,7 +25323,7 @@
                 <a:ea typeface="Calibri" pitchFamily="34" charset="-122"/>
                 <a:cs typeface="Calibri" pitchFamily="34" charset="-120"/>
               </a:rPr>
-              <a:t>Entre el 31-08-2026 y el 06-09-2026 se levantaron 7 hallazgos: 0 internas · 7 del cliente. Todos siguen abiertos.</a:t>
+              <a:t>Entre el 07-09-2026 y el 13-09-2026 no se levantó ningún hallazgo en ningún frente.</a:t>
             </a:r>
             <a:endParaRPr lang="en-US" sz="1350" dirty="0"/>
           </a:p>
@@ -25478,7 +25478,7 @@
                 <a:ea typeface="Calibri" pitchFamily="34" charset="-122"/>
                 <a:cs typeface="Calibri" pitchFamily="34" charset="-120"/>
               </a:rPr>
-              <a:t>Sin especialidad 6  ·  OO.CC 1</a:t>
+              <a:t>—</a:t>
             </a:r>
             <a:endParaRPr lang="en-US" sz="1100" dirty="0"/>
           </a:p>
@@ -25556,7 +25556,7 @@
                 <a:ea typeface="Calibri" pitchFamily="34" charset="-122"/>
                 <a:cs typeface="Calibri" pitchFamily="34" charset="-120"/>
               </a:rPr>
-              <a:t>Arqueros 6  ·  Talabre 1</a:t>
+              <a:t>—</a:t>
             </a:r>
             <a:endParaRPr lang="en-US" sz="1100" dirty="0"/>
           </a:p>
@@ -25634,7 +25634,7 @@
                 <a:ea typeface="Calibri" pitchFamily="34" charset="-122"/>
                 <a:cs typeface="Calibri" pitchFamily="34" charset="-120"/>
               </a:rPr>
-              <a:t>Externa · Cliente 7</a:t>
+              <a:t>—</a:t>
             </a:r>
             <a:endParaRPr lang="en-US" sz="1100" dirty="0"/>
           </a:p>
@@ -25712,7 +25712,7 @@
                 <a:ea typeface="Calibri" pitchFamily="34" charset="-122"/>
                 <a:cs typeface="Calibri" pitchFamily="34" charset="-120"/>
               </a:rPr>
-              <a:t>No Conformidad 7</a:t>
+              <a:t>—</a:t>
             </a:r>
             <a:endParaRPr lang="en-US" sz="1100" dirty="0"/>
           </a:p>
@@ -25751,7 +25751,7 @@
                 <a:ea typeface="Calibri" pitchFamily="34" charset="-122"/>
                 <a:cs typeface="Calibri" pitchFamily="34" charset="-120"/>
               </a:rPr>
-              <a:t>DETALLE DE LOS HALLAZGOS NUEVOS — SE LISTAN 6 DE 7; EL RESTO ESTÁ EN EL PANEL</a:t>
+              <a:t>SIN HALLAZGOS NUEVOS EN EL PERÍODO</a:t>
             </a:r>
             <a:endParaRPr lang="en-US" sz="1050" dirty="0"/>
           </a:p>
@@ -25765,24 +25765,24 @@
         </p:nvSpPr>
         <p:spPr>
           <a:xfrm>
-            <a:off x="502920" y="3986784"/>
-            <a:ext cx="822960" cy="274320"/>
-          </a:xfrm>
-          <a:prstGeom prst="rect">
-            <a:avLst/>
-          </a:prstGeom>
-          <a:noFill/>
-          <a:ln/>
-        </p:spPr>
-        <p:txBody>
-          <a:bodyPr wrap="square" lIns="0" tIns="0" rIns="0" bIns="0" rtlCol="0" anchor="ctr"/>
-          <a:lstStyle/>
-          <a:p>
-            <a:pPr algn="l" indent="0" marL="0">
-              <a:buNone/>
-            </a:pPr>
-            <a:r>
-              <a:rPr lang="en-US" sz="950" b="1" spc="50" kern="0" dirty="0">
+            <a:off x="502920" y="4069080"/>
+            <a:ext cx="9144000" cy="365760"/>
+          </a:xfrm>
+          <a:prstGeom prst="rect">
+            <a:avLst/>
+          </a:prstGeom>
+          <a:noFill/>
+          <a:ln/>
+        </p:spPr>
+        <p:txBody>
+          <a:bodyPr wrap="square" lIns="0" tIns="0" rIns="0" bIns="0" rtlCol="0" anchor="ctr"/>
+          <a:lstStyle/>
+          <a:p>
+            <a:pPr indent="0" marL="0">
+              <a:buNone/>
+            </a:pPr>
+            <a:r>
+              <a:rPr lang="en-US" sz="1300" dirty="0">
                 <a:solidFill>
                   <a:srgbClr val="56606E"/>
                 </a:solidFill>
@@ -25790,2654 +25790,15 @@
                 <a:ea typeface="Calibri" pitchFamily="34" charset="-122"/>
                 <a:cs typeface="Calibri" pitchFamily="34" charset="-120"/>
               </a:rPr>
-              <a:t>FECHA</a:t>
-            </a:r>
-            <a:endParaRPr lang="en-US" sz="950" dirty="0"/>
+              <a:t>No se levantó ningún hallazgo entre el 07-09-2026 y el 13-09-2026 en ningún frente.</a:t>
+            </a:r>
+            <a:endParaRPr lang="en-US" sz="1300" dirty="0"/>
           </a:p>
         </p:txBody>
       </p:sp>
       <p:sp>
         <p:nvSpPr>
           <p:cNvPr id="19" name="Text 15"/>
-          <p:cNvSpPr/>
-          <p:nvPr/>
-        </p:nvSpPr>
-        <p:spPr>
-          <a:xfrm>
-            <a:off x="1371600" y="3986784"/>
-            <a:ext cx="1051560" cy="274320"/>
-          </a:xfrm>
-          <a:prstGeom prst="rect">
-            <a:avLst/>
-          </a:prstGeom>
-          <a:noFill/>
-          <a:ln/>
-        </p:spPr>
-        <p:txBody>
-          <a:bodyPr wrap="square" lIns="0" tIns="0" rIns="0" bIns="0" rtlCol="0" anchor="ctr"/>
-          <a:lstStyle/>
-          <a:p>
-            <a:pPr algn="l" indent="0" marL="0">
-              <a:buNone/>
-            </a:pPr>
-            <a:r>
-              <a:rPr lang="en-US" sz="950" b="1" spc="50" kern="0" dirty="0">
-                <a:solidFill>
-                  <a:srgbClr val="56606E"/>
-                </a:solidFill>
-                <a:latin typeface="Calibri" pitchFamily="34" charset="0"/>
-                <a:ea typeface="Calibri" pitchFamily="34" charset="-122"/>
-                <a:cs typeface="Calibri" pitchFamily="34" charset="-120"/>
-              </a:rPr>
-              <a:t>FRENTE</a:t>
-            </a:r>
-            <a:endParaRPr lang="en-US" sz="950" dirty="0"/>
-          </a:p>
-        </p:txBody>
-      </p:sp>
-      <p:sp>
-        <p:nvSpPr>
-          <p:cNvPr id="20" name="Text 16"/>
-          <p:cNvSpPr/>
-          <p:nvPr/>
-        </p:nvSpPr>
-        <p:spPr>
-          <a:xfrm>
-            <a:off x="2468880" y="3986784"/>
-            <a:ext cx="1051560" cy="274320"/>
-          </a:xfrm>
-          <a:prstGeom prst="rect">
-            <a:avLst/>
-          </a:prstGeom>
-          <a:noFill/>
-          <a:ln/>
-        </p:spPr>
-        <p:txBody>
-          <a:bodyPr wrap="square" lIns="0" tIns="0" rIns="0" bIns="0" rtlCol="0" anchor="ctr"/>
-          <a:lstStyle/>
-          <a:p>
-            <a:pPr algn="l" indent="0" marL="0">
-              <a:buNone/>
-            </a:pPr>
-            <a:r>
-              <a:rPr lang="en-US" sz="950" b="1" spc="50" kern="0" dirty="0">
-                <a:solidFill>
-                  <a:srgbClr val="56606E"/>
-                </a:solidFill>
-                <a:latin typeface="Calibri" pitchFamily="34" charset="0"/>
-                <a:ea typeface="Calibri" pitchFamily="34" charset="-122"/>
-                <a:cs typeface="Calibri" pitchFamily="34" charset="-120"/>
-              </a:rPr>
-              <a:t>N°</a:t>
-            </a:r>
-            <a:endParaRPr lang="en-US" sz="950" dirty="0"/>
-          </a:p>
-        </p:txBody>
-      </p:sp>
-      <p:sp>
-        <p:nvSpPr>
-          <p:cNvPr id="21" name="Text 17"/>
-          <p:cNvSpPr/>
-          <p:nvPr/>
-        </p:nvSpPr>
-        <p:spPr>
-          <a:xfrm>
-            <a:off x="3566160" y="3986784"/>
-            <a:ext cx="1371600" cy="274320"/>
-          </a:xfrm>
-          <a:prstGeom prst="rect">
-            <a:avLst/>
-          </a:prstGeom>
-          <a:noFill/>
-          <a:ln/>
-        </p:spPr>
-        <p:txBody>
-          <a:bodyPr wrap="square" lIns="0" tIns="0" rIns="0" bIns="0" rtlCol="0" anchor="ctr"/>
-          <a:lstStyle/>
-          <a:p>
-            <a:pPr algn="l" indent="0" marL="0">
-              <a:buNone/>
-            </a:pPr>
-            <a:r>
-              <a:rPr lang="en-US" sz="950" b="1" spc="50" kern="0" dirty="0">
-                <a:solidFill>
-                  <a:srgbClr val="56606E"/>
-                </a:solidFill>
-                <a:latin typeface="Calibri" pitchFamily="34" charset="0"/>
-                <a:ea typeface="Calibri" pitchFamily="34" charset="-122"/>
-                <a:cs typeface="Calibri" pitchFamily="34" charset="-120"/>
-              </a:rPr>
-              <a:t>TIPO</a:t>
-            </a:r>
-            <a:endParaRPr lang="en-US" sz="950" dirty="0"/>
-          </a:p>
-        </p:txBody>
-      </p:sp>
-      <p:sp>
-        <p:nvSpPr>
-          <p:cNvPr id="22" name="Text 18"/>
-          <p:cNvSpPr/>
-          <p:nvPr/>
-        </p:nvSpPr>
-        <p:spPr>
-          <a:xfrm>
-            <a:off x="4983480" y="3986784"/>
-            <a:ext cx="1417320" cy="274320"/>
-          </a:xfrm>
-          <a:prstGeom prst="rect">
-            <a:avLst/>
-          </a:prstGeom>
-          <a:noFill/>
-          <a:ln/>
-        </p:spPr>
-        <p:txBody>
-          <a:bodyPr wrap="square" lIns="0" tIns="0" rIns="0" bIns="0" rtlCol="0" anchor="ctr"/>
-          <a:lstStyle/>
-          <a:p>
-            <a:pPr algn="l" indent="0" marL="0">
-              <a:buNone/>
-            </a:pPr>
-            <a:r>
-              <a:rPr lang="en-US" sz="950" b="1" spc="50" kern="0" dirty="0">
-                <a:solidFill>
-                  <a:srgbClr val="56606E"/>
-                </a:solidFill>
-                <a:latin typeface="Calibri" pitchFamily="34" charset="0"/>
-                <a:ea typeface="Calibri" pitchFamily="34" charset="-122"/>
-                <a:cs typeface="Calibri" pitchFamily="34" charset="-120"/>
-              </a:rPr>
-              <a:t>ORIGEN</a:t>
-            </a:r>
-            <a:endParaRPr lang="en-US" sz="950" dirty="0"/>
-          </a:p>
-        </p:txBody>
-      </p:sp>
-      <p:sp>
-        <p:nvSpPr>
-          <p:cNvPr id="23" name="Text 19"/>
-          <p:cNvSpPr/>
-          <p:nvPr/>
-        </p:nvSpPr>
-        <p:spPr>
-          <a:xfrm>
-            <a:off x="6446520" y="3986784"/>
-            <a:ext cx="1097280" cy="274320"/>
-          </a:xfrm>
-          <a:prstGeom prst="rect">
-            <a:avLst/>
-          </a:prstGeom>
-          <a:noFill/>
-          <a:ln/>
-        </p:spPr>
-        <p:txBody>
-          <a:bodyPr wrap="square" lIns="0" tIns="0" rIns="0" bIns="0" rtlCol="0" anchor="ctr"/>
-          <a:lstStyle/>
-          <a:p>
-            <a:pPr algn="l" indent="0" marL="0">
-              <a:buNone/>
-            </a:pPr>
-            <a:r>
-              <a:rPr lang="en-US" sz="950" b="1" spc="50" kern="0" dirty="0">
-                <a:solidFill>
-                  <a:srgbClr val="56606E"/>
-                </a:solidFill>
-                <a:latin typeface="Calibri" pitchFamily="34" charset="0"/>
-                <a:ea typeface="Calibri" pitchFamily="34" charset="-122"/>
-                <a:cs typeface="Calibri" pitchFamily="34" charset="-120"/>
-              </a:rPr>
-              <a:t>DISCIPLINA</a:t>
-            </a:r>
-            <a:endParaRPr lang="en-US" sz="950" dirty="0"/>
-          </a:p>
-        </p:txBody>
-      </p:sp>
-      <p:sp>
-        <p:nvSpPr>
-          <p:cNvPr id="24" name="Text 20"/>
-          <p:cNvSpPr/>
-          <p:nvPr/>
-        </p:nvSpPr>
-        <p:spPr>
-          <a:xfrm>
-            <a:off x="7589520" y="3986784"/>
-            <a:ext cx="1371600" cy="274320"/>
-          </a:xfrm>
-          <a:prstGeom prst="rect">
-            <a:avLst/>
-          </a:prstGeom>
-          <a:noFill/>
-          <a:ln/>
-        </p:spPr>
-        <p:txBody>
-          <a:bodyPr wrap="square" lIns="0" tIns="0" rIns="0" bIns="0" rtlCol="0" anchor="ctr"/>
-          <a:lstStyle/>
-          <a:p>
-            <a:pPr algn="l" indent="0" marL="0">
-              <a:buNone/>
-            </a:pPr>
-            <a:r>
-              <a:rPr lang="en-US" sz="950" b="1" spc="50" kern="0" dirty="0">
-                <a:solidFill>
-                  <a:srgbClr val="56606E"/>
-                </a:solidFill>
-                <a:latin typeface="Calibri" pitchFamily="34" charset="0"/>
-                <a:ea typeface="Calibri" pitchFamily="34" charset="-122"/>
-                <a:cs typeface="Calibri" pitchFamily="34" charset="-120"/>
-              </a:rPr>
-              <a:t>RESPONSABLE</a:t>
-            </a:r>
-            <a:endParaRPr lang="en-US" sz="950" dirty="0"/>
-          </a:p>
-        </p:txBody>
-      </p:sp>
-      <p:sp>
-        <p:nvSpPr>
-          <p:cNvPr id="25" name="Text 21"/>
-          <p:cNvSpPr/>
-          <p:nvPr/>
-        </p:nvSpPr>
-        <p:spPr>
-          <a:xfrm>
-            <a:off x="9006840" y="3986784"/>
-            <a:ext cx="868680" cy="274320"/>
-          </a:xfrm>
-          <a:prstGeom prst="rect">
-            <a:avLst/>
-          </a:prstGeom>
-          <a:noFill/>
-          <a:ln/>
-        </p:spPr>
-        <p:txBody>
-          <a:bodyPr wrap="square" lIns="0" tIns="0" rIns="0" bIns="0" rtlCol="0" anchor="ctr"/>
-          <a:lstStyle/>
-          <a:p>
-            <a:pPr algn="l" indent="0" marL="0">
-              <a:buNone/>
-            </a:pPr>
-            <a:r>
-              <a:rPr lang="en-US" sz="950" b="1" spc="50" kern="0" dirty="0">
-                <a:solidFill>
-                  <a:srgbClr val="56606E"/>
-                </a:solidFill>
-                <a:latin typeface="Calibri" pitchFamily="34" charset="0"/>
-                <a:ea typeface="Calibri" pitchFamily="34" charset="-122"/>
-                <a:cs typeface="Calibri" pitchFamily="34" charset="-120"/>
-              </a:rPr>
-              <a:t>ESTADO</a:t>
-            </a:r>
-            <a:endParaRPr lang="en-US" sz="950" dirty="0"/>
-          </a:p>
-        </p:txBody>
-      </p:sp>
-      <p:sp>
-        <p:nvSpPr>
-          <p:cNvPr id="26" name="Text 22"/>
-          <p:cNvSpPr/>
-          <p:nvPr/>
-        </p:nvSpPr>
-        <p:spPr>
-          <a:xfrm>
-            <a:off x="9921240" y="3986784"/>
-            <a:ext cx="1828800" cy="274320"/>
-          </a:xfrm>
-          <a:prstGeom prst="rect">
-            <a:avLst/>
-          </a:prstGeom>
-          <a:noFill/>
-          <a:ln/>
-        </p:spPr>
-        <p:txBody>
-          <a:bodyPr wrap="square" lIns="0" tIns="0" rIns="0" bIns="0" rtlCol="0" anchor="ctr"/>
-          <a:lstStyle/>
-          <a:p>
-            <a:pPr algn="l" indent="0" marL="0">
-              <a:buNone/>
-            </a:pPr>
-            <a:r>
-              <a:rPr lang="en-US" sz="950" b="1" spc="50" kern="0" dirty="0">
-                <a:solidFill>
-                  <a:srgbClr val="56606E"/>
-                </a:solidFill>
-                <a:latin typeface="Calibri" pitchFamily="34" charset="0"/>
-                <a:ea typeface="Calibri" pitchFamily="34" charset="-122"/>
-                <a:cs typeface="Calibri" pitchFamily="34" charset="-120"/>
-              </a:rPr>
-              <a:t>TÍTULO</a:t>
-            </a:r>
-            <a:endParaRPr lang="en-US" sz="950" dirty="0"/>
-          </a:p>
-        </p:txBody>
-      </p:sp>
-      <p:sp>
-        <p:nvSpPr>
-          <p:cNvPr id="27" name="Shape 23"/>
-          <p:cNvSpPr/>
-          <p:nvPr/>
-        </p:nvSpPr>
-        <p:spPr>
-          <a:xfrm>
-            <a:off x="502920" y="4297680"/>
-            <a:ext cx="11247120" cy="0"/>
-          </a:xfrm>
-          <a:prstGeom prst="line">
-            <a:avLst/>
-          </a:prstGeom>
-          <a:noFill/>
-          <a:ln w="12700">
-            <a:solidFill>
-              <a:srgbClr val="6E8CA8"/>
-            </a:solidFill>
-            <a:prstDash val="solid"/>
-          </a:ln>
-        </p:spPr>
-      </p:sp>
-      <p:sp>
-        <p:nvSpPr>
-          <p:cNvPr id="28" name="Text 24"/>
-          <p:cNvSpPr/>
-          <p:nvPr/>
-        </p:nvSpPr>
-        <p:spPr>
-          <a:xfrm>
-            <a:off x="502920" y="4425696"/>
-            <a:ext cx="822960" cy="237744"/>
-          </a:xfrm>
-          <a:prstGeom prst="rect">
-            <a:avLst/>
-          </a:prstGeom>
-          <a:noFill/>
-          <a:ln/>
-        </p:spPr>
-        <p:txBody>
-          <a:bodyPr wrap="square" lIns="0" tIns="0" rIns="0" bIns="0" rtlCol="0" anchor="ctr"/>
-          <a:lstStyle/>
-          <a:p>
-            <a:pPr algn="l" indent="0" marL="0">
-              <a:buNone/>
-            </a:pPr>
-            <a:r>
-              <a:rPr lang="en-US" sz="1050" dirty="0">
-                <a:solidFill>
-                  <a:srgbClr val="1A2433"/>
-                </a:solidFill>
-                <a:latin typeface="Calibri" pitchFamily="34" charset="0"/>
-                <a:ea typeface="Calibri" pitchFamily="34" charset="-122"/>
-                <a:cs typeface="Calibri" pitchFamily="34" charset="-120"/>
-              </a:rPr>
-              <a:t>01-09-2026</a:t>
-            </a:r>
-            <a:endParaRPr lang="en-US" sz="1050" dirty="0"/>
-          </a:p>
-        </p:txBody>
-      </p:sp>
-      <p:sp>
-        <p:nvSpPr>
-          <p:cNvPr id="29" name="Text 25"/>
-          <p:cNvSpPr/>
-          <p:nvPr/>
-        </p:nvSpPr>
-        <p:spPr>
-          <a:xfrm>
-            <a:off x="1371600" y="4425696"/>
-            <a:ext cx="1051560" cy="237744"/>
-          </a:xfrm>
-          <a:prstGeom prst="rect">
-            <a:avLst/>
-          </a:prstGeom>
-          <a:noFill/>
-          <a:ln/>
-        </p:spPr>
-        <p:txBody>
-          <a:bodyPr wrap="square" lIns="0" tIns="0" rIns="0" bIns="0" rtlCol="0" anchor="ctr"/>
-          <a:lstStyle/>
-          <a:p>
-            <a:pPr algn="l" indent="0" marL="0">
-              <a:buNone/>
-            </a:pPr>
-            <a:r>
-              <a:rPr lang="en-US" sz="1050" dirty="0">
-                <a:solidFill>
-                  <a:srgbClr val="1A2433"/>
-                </a:solidFill>
-                <a:latin typeface="Calibri" pitchFamily="34" charset="0"/>
-                <a:ea typeface="Calibri" pitchFamily="34" charset="-122"/>
-                <a:cs typeface="Calibri" pitchFamily="34" charset="-120"/>
-              </a:rPr>
-              <a:t>Arqueros</a:t>
-            </a:r>
-            <a:endParaRPr lang="en-US" sz="1050" dirty="0"/>
-          </a:p>
-        </p:txBody>
-      </p:sp>
-      <p:sp>
-        <p:nvSpPr>
-          <p:cNvPr id="30" name="Text 26"/>
-          <p:cNvSpPr/>
-          <p:nvPr/>
-        </p:nvSpPr>
-        <p:spPr>
-          <a:xfrm>
-            <a:off x="2468880" y="4425696"/>
-            <a:ext cx="1051560" cy="237744"/>
-          </a:xfrm>
-          <a:prstGeom prst="rect">
-            <a:avLst/>
-          </a:prstGeom>
-          <a:noFill/>
-          <a:ln/>
-        </p:spPr>
-        <p:txBody>
-          <a:bodyPr wrap="square" lIns="0" tIns="0" rIns="0" bIns="0" rtlCol="0" anchor="ctr"/>
-          <a:lstStyle/>
-          <a:p>
-            <a:pPr algn="l" indent="0" marL="0">
-              <a:buNone/>
-            </a:pPr>
-            <a:r>
-              <a:rPr lang="en-US" sz="1050" dirty="0">
-                <a:solidFill>
-                  <a:srgbClr val="1A2433"/>
-                </a:solidFill>
-                <a:latin typeface="Calibri" pitchFamily="34" charset="0"/>
-                <a:ea typeface="Calibri" pitchFamily="34" charset="-122"/>
-                <a:cs typeface="Calibri" pitchFamily="34" charset="-120"/>
-              </a:rPr>
-              <a:t>MASA-86 · EB-NE-1412</a:t>
-            </a:r>
-            <a:endParaRPr lang="en-US" sz="1050" dirty="0"/>
-          </a:p>
-        </p:txBody>
-      </p:sp>
-      <p:sp>
-        <p:nvSpPr>
-          <p:cNvPr id="31" name="Text 27"/>
-          <p:cNvSpPr/>
-          <p:nvPr/>
-        </p:nvSpPr>
-        <p:spPr>
-          <a:xfrm>
-            <a:off x="3566160" y="4425696"/>
-            <a:ext cx="1371600" cy="237744"/>
-          </a:xfrm>
-          <a:prstGeom prst="rect">
-            <a:avLst/>
-          </a:prstGeom>
-          <a:noFill/>
-          <a:ln/>
-        </p:spPr>
-        <p:txBody>
-          <a:bodyPr wrap="square" lIns="0" tIns="0" rIns="0" bIns="0" rtlCol="0" anchor="ctr"/>
-          <a:lstStyle/>
-          <a:p>
-            <a:pPr algn="l" indent="0" marL="0">
-              <a:buNone/>
-            </a:pPr>
-            <a:r>
-              <a:rPr lang="en-US" sz="1050" dirty="0">
-                <a:solidFill>
-                  <a:srgbClr val="1A2433"/>
-                </a:solidFill>
-                <a:latin typeface="Calibri" pitchFamily="34" charset="0"/>
-                <a:ea typeface="Calibri" pitchFamily="34" charset="-122"/>
-                <a:cs typeface="Calibri" pitchFamily="34" charset="-120"/>
-              </a:rPr>
-              <a:t>No Conformidad</a:t>
-            </a:r>
-            <a:endParaRPr lang="en-US" sz="1050" dirty="0"/>
-          </a:p>
-        </p:txBody>
-      </p:sp>
-      <p:sp>
-        <p:nvSpPr>
-          <p:cNvPr id="32" name="Text 28"/>
-          <p:cNvSpPr/>
-          <p:nvPr/>
-        </p:nvSpPr>
-        <p:spPr>
-          <a:xfrm>
-            <a:off x="4983480" y="4425696"/>
-            <a:ext cx="1417320" cy="237744"/>
-          </a:xfrm>
-          <a:prstGeom prst="rect">
-            <a:avLst/>
-          </a:prstGeom>
-          <a:noFill/>
-          <a:ln/>
-        </p:spPr>
-        <p:txBody>
-          <a:bodyPr wrap="square" lIns="0" tIns="0" rIns="0" bIns="0" rtlCol="0" anchor="ctr"/>
-          <a:lstStyle/>
-          <a:p>
-            <a:pPr algn="l" indent="0" marL="0">
-              <a:buNone/>
-            </a:pPr>
-            <a:r>
-              <a:rPr lang="en-US" sz="1050" b="1" dirty="0">
-                <a:solidFill>
-                  <a:srgbClr val="C87A32"/>
-                </a:solidFill>
-                <a:latin typeface="Calibri" pitchFamily="34" charset="0"/>
-                <a:ea typeface="Calibri" pitchFamily="34" charset="-122"/>
-                <a:cs typeface="Calibri" pitchFamily="34" charset="-120"/>
-              </a:rPr>
-              <a:t>Externa · Cliente</a:t>
-            </a:r>
-            <a:endParaRPr lang="en-US" sz="1050" dirty="0"/>
-          </a:p>
-        </p:txBody>
-      </p:sp>
-      <p:sp>
-        <p:nvSpPr>
-          <p:cNvPr id="33" name="Text 29"/>
-          <p:cNvSpPr/>
-          <p:nvPr/>
-        </p:nvSpPr>
-        <p:spPr>
-          <a:xfrm>
-            <a:off x="6446520" y="4425696"/>
-            <a:ext cx="1097280" cy="237744"/>
-          </a:xfrm>
-          <a:prstGeom prst="rect">
-            <a:avLst/>
-          </a:prstGeom>
-          <a:noFill/>
-          <a:ln/>
-        </p:spPr>
-        <p:txBody>
-          <a:bodyPr wrap="square" lIns="0" tIns="0" rIns="0" bIns="0" rtlCol="0" anchor="ctr"/>
-          <a:lstStyle/>
-          <a:p>
-            <a:pPr algn="l" indent="0" marL="0">
-              <a:buNone/>
-            </a:pPr>
-            <a:r>
-              <a:rPr lang="en-US" sz="1050" dirty="0">
-                <a:solidFill>
-                  <a:srgbClr val="1A2433"/>
-                </a:solidFill>
-                <a:latin typeface="Calibri" pitchFamily="34" charset="0"/>
-                <a:ea typeface="Calibri" pitchFamily="34" charset="-122"/>
-                <a:cs typeface="Calibri" pitchFamily="34" charset="-120"/>
-              </a:rPr>
-              <a:t>Sin especial…</a:t>
-            </a:r>
-            <a:endParaRPr lang="en-US" sz="1050" dirty="0"/>
-          </a:p>
-        </p:txBody>
-      </p:sp>
-      <p:sp>
-        <p:nvSpPr>
-          <p:cNvPr id="34" name="Text 30"/>
-          <p:cNvSpPr/>
-          <p:nvPr/>
-        </p:nvSpPr>
-        <p:spPr>
-          <a:xfrm>
-            <a:off x="7589520" y="4425696"/>
-            <a:ext cx="1371600" cy="237744"/>
-          </a:xfrm>
-          <a:prstGeom prst="rect">
-            <a:avLst/>
-          </a:prstGeom>
-          <a:noFill/>
-          <a:ln/>
-        </p:spPr>
-        <p:txBody>
-          <a:bodyPr wrap="square" lIns="0" tIns="0" rIns="0" bIns="0" rtlCol="0" anchor="ctr"/>
-          <a:lstStyle/>
-          <a:p>
-            <a:pPr algn="l" indent="0" marL="0">
-              <a:buNone/>
-            </a:pPr>
-            <a:r>
-              <a:rPr lang="en-US" sz="1050" dirty="0">
-                <a:solidFill>
-                  <a:srgbClr val="1A2433"/>
-                </a:solidFill>
-                <a:latin typeface="Calibri" pitchFamily="34" charset="0"/>
-                <a:ea typeface="Calibri" pitchFamily="34" charset="-122"/>
-                <a:cs typeface="Calibri" pitchFamily="34" charset="-120"/>
-              </a:rPr>
-              <a:t>Sin asignar</a:t>
-            </a:r>
-            <a:endParaRPr lang="en-US" sz="1050" dirty="0"/>
-          </a:p>
-        </p:txBody>
-      </p:sp>
-      <p:sp>
-        <p:nvSpPr>
-          <p:cNvPr id="35" name="Text 31"/>
-          <p:cNvSpPr/>
-          <p:nvPr/>
-        </p:nvSpPr>
-        <p:spPr>
-          <a:xfrm>
-            <a:off x="9006840" y="4425696"/>
-            <a:ext cx="868680" cy="237744"/>
-          </a:xfrm>
-          <a:prstGeom prst="rect">
-            <a:avLst/>
-          </a:prstGeom>
-          <a:noFill/>
-          <a:ln/>
-        </p:spPr>
-        <p:txBody>
-          <a:bodyPr wrap="square" lIns="0" tIns="0" rIns="0" bIns="0" rtlCol="0" anchor="ctr"/>
-          <a:lstStyle/>
-          <a:p>
-            <a:pPr algn="l" indent="0" marL="0">
-              <a:buNone/>
-            </a:pPr>
-            <a:r>
-              <a:rPr lang="en-US" sz="1050" dirty="0">
-                <a:solidFill>
-                  <a:srgbClr val="C0392B"/>
-                </a:solidFill>
-                <a:latin typeface="Calibri" pitchFamily="34" charset="0"/>
-                <a:ea typeface="Calibri" pitchFamily="34" charset="-122"/>
-                <a:cs typeface="Calibri" pitchFamily="34" charset="-120"/>
-              </a:rPr>
-              <a:t>Pendiente</a:t>
-            </a:r>
-            <a:endParaRPr lang="en-US" sz="1050" dirty="0"/>
-          </a:p>
-        </p:txBody>
-      </p:sp>
-      <p:sp>
-        <p:nvSpPr>
-          <p:cNvPr id="36" name="Text 32"/>
-          <p:cNvSpPr/>
-          <p:nvPr/>
-        </p:nvSpPr>
-        <p:spPr>
-          <a:xfrm>
-            <a:off x="9921240" y="4425696"/>
-            <a:ext cx="1828800" cy="237744"/>
-          </a:xfrm>
-          <a:prstGeom prst="rect">
-            <a:avLst/>
-          </a:prstGeom>
-          <a:noFill/>
-          <a:ln/>
-        </p:spPr>
-        <p:txBody>
-          <a:bodyPr wrap="square" lIns="0" tIns="0" rIns="0" bIns="0" rtlCol="0" anchor="ctr"/>
-          <a:lstStyle/>
-          <a:p>
-            <a:pPr algn="l" indent="0" marL="0">
-              <a:buNone/>
-            </a:pPr>
-            <a:r>
-              <a:rPr lang="en-US" sz="1000" dirty="0">
-                <a:solidFill>
-                  <a:srgbClr val="1A2433"/>
-                </a:solidFill>
-                <a:latin typeface="Calibri" pitchFamily="34" charset="0"/>
-                <a:ea typeface="Calibri" pitchFamily="34" charset="-122"/>
-                <a:cs typeface="Calibri" pitchFamily="34" charset="-120"/>
-              </a:rPr>
-              <a:t>Perdida de torque en pernos</a:t>
-            </a:r>
-            <a:endParaRPr lang="en-US" sz="1000" dirty="0"/>
-          </a:p>
-        </p:txBody>
-      </p:sp>
-      <p:sp>
-        <p:nvSpPr>
-          <p:cNvPr id="37" name="Shape 33"/>
-          <p:cNvSpPr/>
-          <p:nvPr/>
-        </p:nvSpPr>
-        <p:spPr>
-          <a:xfrm>
-            <a:off x="502920" y="4700016"/>
-            <a:ext cx="11247120" cy="0"/>
-          </a:xfrm>
-          <a:prstGeom prst="line">
-            <a:avLst/>
-          </a:prstGeom>
-          <a:noFill/>
-          <a:ln w="9525">
-            <a:solidFill>
-              <a:srgbClr val="D9DFE6"/>
-            </a:solidFill>
-            <a:prstDash val="solid"/>
-          </a:ln>
-        </p:spPr>
-      </p:sp>
-      <p:sp>
-        <p:nvSpPr>
-          <p:cNvPr id="38" name="Shape 34"/>
-          <p:cNvSpPr/>
-          <p:nvPr/>
-        </p:nvSpPr>
-        <p:spPr>
-          <a:xfrm>
-            <a:off x="457200" y="4709160"/>
-            <a:ext cx="11292840" cy="329184"/>
-          </a:xfrm>
-          <a:prstGeom prst="rect">
-            <a:avLst/>
-          </a:prstGeom>
-          <a:solidFill>
-            <a:srgbClr val="FFFFFF"/>
-          </a:solidFill>
-          <a:ln/>
-        </p:spPr>
-      </p:sp>
-      <p:sp>
-        <p:nvSpPr>
-          <p:cNvPr id="39" name="Text 35"/>
-          <p:cNvSpPr/>
-          <p:nvPr/>
-        </p:nvSpPr>
-        <p:spPr>
-          <a:xfrm>
-            <a:off x="502920" y="4754880"/>
-            <a:ext cx="822960" cy="237744"/>
-          </a:xfrm>
-          <a:prstGeom prst="rect">
-            <a:avLst/>
-          </a:prstGeom>
-          <a:noFill/>
-          <a:ln/>
-        </p:spPr>
-        <p:txBody>
-          <a:bodyPr wrap="square" lIns="0" tIns="0" rIns="0" bIns="0" rtlCol="0" anchor="ctr"/>
-          <a:lstStyle/>
-          <a:p>
-            <a:pPr algn="l" indent="0" marL="0">
-              <a:buNone/>
-            </a:pPr>
-            <a:r>
-              <a:rPr lang="en-US" sz="1050" dirty="0">
-                <a:solidFill>
-                  <a:srgbClr val="1A2433"/>
-                </a:solidFill>
-                <a:latin typeface="Calibri" pitchFamily="34" charset="0"/>
-                <a:ea typeface="Calibri" pitchFamily="34" charset="-122"/>
-                <a:cs typeface="Calibri" pitchFamily="34" charset="-120"/>
-              </a:rPr>
-              <a:t>01-09-2026</a:t>
-            </a:r>
-            <a:endParaRPr lang="en-US" sz="1050" dirty="0"/>
-          </a:p>
-        </p:txBody>
-      </p:sp>
-      <p:sp>
-        <p:nvSpPr>
-          <p:cNvPr id="40" name="Text 36"/>
-          <p:cNvSpPr/>
-          <p:nvPr/>
-        </p:nvSpPr>
-        <p:spPr>
-          <a:xfrm>
-            <a:off x="1371600" y="4754880"/>
-            <a:ext cx="1051560" cy="237744"/>
-          </a:xfrm>
-          <a:prstGeom prst="rect">
-            <a:avLst/>
-          </a:prstGeom>
-          <a:noFill/>
-          <a:ln/>
-        </p:spPr>
-        <p:txBody>
-          <a:bodyPr wrap="square" lIns="0" tIns="0" rIns="0" bIns="0" rtlCol="0" anchor="ctr"/>
-          <a:lstStyle/>
-          <a:p>
-            <a:pPr algn="l" indent="0" marL="0">
-              <a:buNone/>
-            </a:pPr>
-            <a:r>
-              <a:rPr lang="en-US" sz="1050" dirty="0">
-                <a:solidFill>
-                  <a:srgbClr val="1A2433"/>
-                </a:solidFill>
-                <a:latin typeface="Calibri" pitchFamily="34" charset="0"/>
-                <a:ea typeface="Calibri" pitchFamily="34" charset="-122"/>
-                <a:cs typeface="Calibri" pitchFamily="34" charset="-120"/>
-              </a:rPr>
-              <a:t>Arqueros</a:t>
-            </a:r>
-            <a:endParaRPr lang="en-US" sz="1050" dirty="0"/>
-          </a:p>
-        </p:txBody>
-      </p:sp>
-      <p:sp>
-        <p:nvSpPr>
-          <p:cNvPr id="41" name="Text 37"/>
-          <p:cNvSpPr/>
-          <p:nvPr/>
-        </p:nvSpPr>
-        <p:spPr>
-          <a:xfrm>
-            <a:off x="2468880" y="4754880"/>
-            <a:ext cx="1051560" cy="237744"/>
-          </a:xfrm>
-          <a:prstGeom prst="rect">
-            <a:avLst/>
-          </a:prstGeom>
-          <a:noFill/>
-          <a:ln/>
-        </p:spPr>
-        <p:txBody>
-          <a:bodyPr wrap="square" lIns="0" tIns="0" rIns="0" bIns="0" rtlCol="0" anchor="ctr"/>
-          <a:lstStyle/>
-          <a:p>
-            <a:pPr algn="l" indent="0" marL="0">
-              <a:buNone/>
-            </a:pPr>
-            <a:r>
-              <a:rPr lang="en-US" sz="1050" dirty="0">
-                <a:solidFill>
-                  <a:srgbClr val="1A2433"/>
-                </a:solidFill>
-                <a:latin typeface="Calibri" pitchFamily="34" charset="0"/>
-                <a:ea typeface="Calibri" pitchFamily="34" charset="-122"/>
-                <a:cs typeface="Calibri" pitchFamily="34" charset="-120"/>
-              </a:rPr>
-              <a:t>MASA-87 · EB-NE-1412</a:t>
-            </a:r>
-            <a:endParaRPr lang="en-US" sz="1050" dirty="0"/>
-          </a:p>
-        </p:txBody>
-      </p:sp>
-      <p:sp>
-        <p:nvSpPr>
-          <p:cNvPr id="42" name="Text 38"/>
-          <p:cNvSpPr/>
-          <p:nvPr/>
-        </p:nvSpPr>
-        <p:spPr>
-          <a:xfrm>
-            <a:off x="3566160" y="4754880"/>
-            <a:ext cx="1371600" cy="237744"/>
-          </a:xfrm>
-          <a:prstGeom prst="rect">
-            <a:avLst/>
-          </a:prstGeom>
-          <a:noFill/>
-          <a:ln/>
-        </p:spPr>
-        <p:txBody>
-          <a:bodyPr wrap="square" lIns="0" tIns="0" rIns="0" bIns="0" rtlCol="0" anchor="ctr"/>
-          <a:lstStyle/>
-          <a:p>
-            <a:pPr algn="l" indent="0" marL="0">
-              <a:buNone/>
-            </a:pPr>
-            <a:r>
-              <a:rPr lang="en-US" sz="1050" dirty="0">
-                <a:solidFill>
-                  <a:srgbClr val="1A2433"/>
-                </a:solidFill>
-                <a:latin typeface="Calibri" pitchFamily="34" charset="0"/>
-                <a:ea typeface="Calibri" pitchFamily="34" charset="-122"/>
-                <a:cs typeface="Calibri" pitchFamily="34" charset="-120"/>
-              </a:rPr>
-              <a:t>No Conformidad</a:t>
-            </a:r>
-            <a:endParaRPr lang="en-US" sz="1050" dirty="0"/>
-          </a:p>
-        </p:txBody>
-      </p:sp>
-      <p:sp>
-        <p:nvSpPr>
-          <p:cNvPr id="43" name="Text 39"/>
-          <p:cNvSpPr/>
-          <p:nvPr/>
-        </p:nvSpPr>
-        <p:spPr>
-          <a:xfrm>
-            <a:off x="4983480" y="4754880"/>
-            <a:ext cx="1417320" cy="237744"/>
-          </a:xfrm>
-          <a:prstGeom prst="rect">
-            <a:avLst/>
-          </a:prstGeom>
-          <a:noFill/>
-          <a:ln/>
-        </p:spPr>
-        <p:txBody>
-          <a:bodyPr wrap="square" lIns="0" tIns="0" rIns="0" bIns="0" rtlCol="0" anchor="ctr"/>
-          <a:lstStyle/>
-          <a:p>
-            <a:pPr algn="l" indent="0" marL="0">
-              <a:buNone/>
-            </a:pPr>
-            <a:r>
-              <a:rPr lang="en-US" sz="1050" b="1" dirty="0">
-                <a:solidFill>
-                  <a:srgbClr val="C87A32"/>
-                </a:solidFill>
-                <a:latin typeface="Calibri" pitchFamily="34" charset="0"/>
-                <a:ea typeface="Calibri" pitchFamily="34" charset="-122"/>
-                <a:cs typeface="Calibri" pitchFamily="34" charset="-120"/>
-              </a:rPr>
-              <a:t>Externa · Cliente</a:t>
-            </a:r>
-            <a:endParaRPr lang="en-US" sz="1050" dirty="0"/>
-          </a:p>
-        </p:txBody>
-      </p:sp>
-      <p:sp>
-        <p:nvSpPr>
-          <p:cNvPr id="44" name="Text 40"/>
-          <p:cNvSpPr/>
-          <p:nvPr/>
-        </p:nvSpPr>
-        <p:spPr>
-          <a:xfrm>
-            <a:off x="6446520" y="4754880"/>
-            <a:ext cx="1097280" cy="237744"/>
-          </a:xfrm>
-          <a:prstGeom prst="rect">
-            <a:avLst/>
-          </a:prstGeom>
-          <a:noFill/>
-          <a:ln/>
-        </p:spPr>
-        <p:txBody>
-          <a:bodyPr wrap="square" lIns="0" tIns="0" rIns="0" bIns="0" rtlCol="0" anchor="ctr"/>
-          <a:lstStyle/>
-          <a:p>
-            <a:pPr algn="l" indent="0" marL="0">
-              <a:buNone/>
-            </a:pPr>
-            <a:r>
-              <a:rPr lang="en-US" sz="1050" dirty="0">
-                <a:solidFill>
-                  <a:srgbClr val="1A2433"/>
-                </a:solidFill>
-                <a:latin typeface="Calibri" pitchFamily="34" charset="0"/>
-                <a:ea typeface="Calibri" pitchFamily="34" charset="-122"/>
-                <a:cs typeface="Calibri" pitchFamily="34" charset="-120"/>
-              </a:rPr>
-              <a:t>Sin especial…</a:t>
-            </a:r>
-            <a:endParaRPr lang="en-US" sz="1050" dirty="0"/>
-          </a:p>
-        </p:txBody>
-      </p:sp>
-      <p:sp>
-        <p:nvSpPr>
-          <p:cNvPr id="45" name="Text 41"/>
-          <p:cNvSpPr/>
-          <p:nvPr/>
-        </p:nvSpPr>
-        <p:spPr>
-          <a:xfrm>
-            <a:off x="7589520" y="4754880"/>
-            <a:ext cx="1371600" cy="237744"/>
-          </a:xfrm>
-          <a:prstGeom prst="rect">
-            <a:avLst/>
-          </a:prstGeom>
-          <a:noFill/>
-          <a:ln/>
-        </p:spPr>
-        <p:txBody>
-          <a:bodyPr wrap="square" lIns="0" tIns="0" rIns="0" bIns="0" rtlCol="0" anchor="ctr"/>
-          <a:lstStyle/>
-          <a:p>
-            <a:pPr algn="l" indent="0" marL="0">
-              <a:buNone/>
-            </a:pPr>
-            <a:r>
-              <a:rPr lang="en-US" sz="1050" dirty="0">
-                <a:solidFill>
-                  <a:srgbClr val="1A2433"/>
-                </a:solidFill>
-                <a:latin typeface="Calibri" pitchFamily="34" charset="0"/>
-                <a:ea typeface="Calibri" pitchFamily="34" charset="-122"/>
-                <a:cs typeface="Calibri" pitchFamily="34" charset="-120"/>
-              </a:rPr>
-              <a:t>Sin asignar</a:t>
-            </a:r>
-            <a:endParaRPr lang="en-US" sz="1050" dirty="0"/>
-          </a:p>
-        </p:txBody>
-      </p:sp>
-      <p:sp>
-        <p:nvSpPr>
-          <p:cNvPr id="46" name="Text 42"/>
-          <p:cNvSpPr/>
-          <p:nvPr/>
-        </p:nvSpPr>
-        <p:spPr>
-          <a:xfrm>
-            <a:off x="9006840" y="4754880"/>
-            <a:ext cx="868680" cy="237744"/>
-          </a:xfrm>
-          <a:prstGeom prst="rect">
-            <a:avLst/>
-          </a:prstGeom>
-          <a:noFill/>
-          <a:ln/>
-        </p:spPr>
-        <p:txBody>
-          <a:bodyPr wrap="square" lIns="0" tIns="0" rIns="0" bIns="0" rtlCol="0" anchor="ctr"/>
-          <a:lstStyle/>
-          <a:p>
-            <a:pPr algn="l" indent="0" marL="0">
-              <a:buNone/>
-            </a:pPr>
-            <a:r>
-              <a:rPr lang="en-US" sz="1050" dirty="0">
-                <a:solidFill>
-                  <a:srgbClr val="C0392B"/>
-                </a:solidFill>
-                <a:latin typeface="Calibri" pitchFamily="34" charset="0"/>
-                <a:ea typeface="Calibri" pitchFamily="34" charset="-122"/>
-                <a:cs typeface="Calibri" pitchFamily="34" charset="-120"/>
-              </a:rPr>
-              <a:t>Pendiente</a:t>
-            </a:r>
-            <a:endParaRPr lang="en-US" sz="1050" dirty="0"/>
-          </a:p>
-        </p:txBody>
-      </p:sp>
-      <p:sp>
-        <p:nvSpPr>
-          <p:cNvPr id="47" name="Text 43"/>
-          <p:cNvSpPr/>
-          <p:nvPr/>
-        </p:nvSpPr>
-        <p:spPr>
-          <a:xfrm>
-            <a:off x="9921240" y="4754880"/>
-            <a:ext cx="1828800" cy="237744"/>
-          </a:xfrm>
-          <a:prstGeom prst="rect">
-            <a:avLst/>
-          </a:prstGeom>
-          <a:noFill/>
-          <a:ln/>
-        </p:spPr>
-        <p:txBody>
-          <a:bodyPr wrap="square" lIns="0" tIns="0" rIns="0" bIns="0" rtlCol="0" anchor="ctr"/>
-          <a:lstStyle/>
-          <a:p>
-            <a:pPr algn="l" indent="0" marL="0">
-              <a:buNone/>
-            </a:pPr>
-            <a:r>
-              <a:rPr lang="en-US" sz="1000" dirty="0">
-                <a:solidFill>
-                  <a:srgbClr val="1A2433"/>
-                </a:solidFill>
-                <a:latin typeface="Calibri" pitchFamily="34" charset="0"/>
-                <a:ea typeface="Calibri" pitchFamily="34" charset="-122"/>
-                <a:cs typeface="Calibri" pitchFamily="34" charset="-120"/>
-              </a:rPr>
-              <a:t>Elevación bomba de cizalle.…</a:t>
-            </a:r>
-            <a:endParaRPr lang="en-US" sz="1000" dirty="0"/>
-          </a:p>
-        </p:txBody>
-      </p:sp>
-      <p:sp>
-        <p:nvSpPr>
-          <p:cNvPr id="48" name="Shape 44"/>
-          <p:cNvSpPr/>
-          <p:nvPr/>
-        </p:nvSpPr>
-        <p:spPr>
-          <a:xfrm>
-            <a:off x="502920" y="5029200"/>
-            <a:ext cx="11247120" cy="0"/>
-          </a:xfrm>
-          <a:prstGeom prst="line">
-            <a:avLst/>
-          </a:prstGeom>
-          <a:noFill/>
-          <a:ln w="9525">
-            <a:solidFill>
-              <a:srgbClr val="D9DFE6"/>
-            </a:solidFill>
-            <a:prstDash val="solid"/>
-          </a:ln>
-        </p:spPr>
-      </p:sp>
-      <p:sp>
-        <p:nvSpPr>
-          <p:cNvPr id="49" name="Text 45"/>
-          <p:cNvSpPr/>
-          <p:nvPr/>
-        </p:nvSpPr>
-        <p:spPr>
-          <a:xfrm>
-            <a:off x="502920" y="5084064"/>
-            <a:ext cx="822960" cy="237744"/>
-          </a:xfrm>
-          <a:prstGeom prst="rect">
-            <a:avLst/>
-          </a:prstGeom>
-          <a:noFill/>
-          <a:ln/>
-        </p:spPr>
-        <p:txBody>
-          <a:bodyPr wrap="square" lIns="0" tIns="0" rIns="0" bIns="0" rtlCol="0" anchor="ctr"/>
-          <a:lstStyle/>
-          <a:p>
-            <a:pPr algn="l" indent="0" marL="0">
-              <a:buNone/>
-            </a:pPr>
-            <a:r>
-              <a:rPr lang="en-US" sz="1050" dirty="0">
-                <a:solidFill>
-                  <a:srgbClr val="1A2433"/>
-                </a:solidFill>
-                <a:latin typeface="Calibri" pitchFamily="34" charset="0"/>
-                <a:ea typeface="Calibri" pitchFamily="34" charset="-122"/>
-                <a:cs typeface="Calibri" pitchFamily="34" charset="-120"/>
-              </a:rPr>
-              <a:t>01-09-2026</a:t>
-            </a:r>
-            <a:endParaRPr lang="en-US" sz="1050" dirty="0"/>
-          </a:p>
-        </p:txBody>
-      </p:sp>
-      <p:sp>
-        <p:nvSpPr>
-          <p:cNvPr id="50" name="Text 46"/>
-          <p:cNvSpPr/>
-          <p:nvPr/>
-        </p:nvSpPr>
-        <p:spPr>
-          <a:xfrm>
-            <a:off x="1371600" y="5084064"/>
-            <a:ext cx="1051560" cy="237744"/>
-          </a:xfrm>
-          <a:prstGeom prst="rect">
-            <a:avLst/>
-          </a:prstGeom>
-          <a:noFill/>
-          <a:ln/>
-        </p:spPr>
-        <p:txBody>
-          <a:bodyPr wrap="square" lIns="0" tIns="0" rIns="0" bIns="0" rtlCol="0" anchor="ctr"/>
-          <a:lstStyle/>
-          <a:p>
-            <a:pPr algn="l" indent="0" marL="0">
-              <a:buNone/>
-            </a:pPr>
-            <a:r>
-              <a:rPr lang="en-US" sz="1050" dirty="0">
-                <a:solidFill>
-                  <a:srgbClr val="1A2433"/>
-                </a:solidFill>
-                <a:latin typeface="Calibri" pitchFamily="34" charset="0"/>
-                <a:ea typeface="Calibri" pitchFamily="34" charset="-122"/>
-                <a:cs typeface="Calibri" pitchFamily="34" charset="-120"/>
-              </a:rPr>
-              <a:t>Arqueros</a:t>
-            </a:r>
-            <a:endParaRPr lang="en-US" sz="1050" dirty="0"/>
-          </a:p>
-        </p:txBody>
-      </p:sp>
-      <p:sp>
-        <p:nvSpPr>
-          <p:cNvPr id="51" name="Text 47"/>
-          <p:cNvSpPr/>
-          <p:nvPr/>
-        </p:nvSpPr>
-        <p:spPr>
-          <a:xfrm>
-            <a:off x="2468880" y="5084064"/>
-            <a:ext cx="1051560" cy="237744"/>
-          </a:xfrm>
-          <a:prstGeom prst="rect">
-            <a:avLst/>
-          </a:prstGeom>
-          <a:noFill/>
-          <a:ln/>
-        </p:spPr>
-        <p:txBody>
-          <a:bodyPr wrap="square" lIns="0" tIns="0" rIns="0" bIns="0" rtlCol="0" anchor="ctr"/>
-          <a:lstStyle/>
-          <a:p>
-            <a:pPr algn="l" indent="0" marL="0">
-              <a:buNone/>
-            </a:pPr>
-            <a:r>
-              <a:rPr lang="en-US" sz="1050" dirty="0">
-                <a:solidFill>
-                  <a:srgbClr val="1A2433"/>
-                </a:solidFill>
-                <a:latin typeface="Calibri" pitchFamily="34" charset="0"/>
-                <a:ea typeface="Calibri" pitchFamily="34" charset="-122"/>
-                <a:cs typeface="Calibri" pitchFamily="34" charset="-120"/>
-              </a:rPr>
-              <a:t>MASA-88 · EB-NE-1412</a:t>
-            </a:r>
-            <a:endParaRPr lang="en-US" sz="1050" dirty="0"/>
-          </a:p>
-        </p:txBody>
-      </p:sp>
-      <p:sp>
-        <p:nvSpPr>
-          <p:cNvPr id="52" name="Text 48"/>
-          <p:cNvSpPr/>
-          <p:nvPr/>
-        </p:nvSpPr>
-        <p:spPr>
-          <a:xfrm>
-            <a:off x="3566160" y="5084064"/>
-            <a:ext cx="1371600" cy="237744"/>
-          </a:xfrm>
-          <a:prstGeom prst="rect">
-            <a:avLst/>
-          </a:prstGeom>
-          <a:noFill/>
-          <a:ln/>
-        </p:spPr>
-        <p:txBody>
-          <a:bodyPr wrap="square" lIns="0" tIns="0" rIns="0" bIns="0" rtlCol="0" anchor="ctr"/>
-          <a:lstStyle/>
-          <a:p>
-            <a:pPr algn="l" indent="0" marL="0">
-              <a:buNone/>
-            </a:pPr>
-            <a:r>
-              <a:rPr lang="en-US" sz="1050" dirty="0">
-                <a:solidFill>
-                  <a:srgbClr val="1A2433"/>
-                </a:solidFill>
-                <a:latin typeface="Calibri" pitchFamily="34" charset="0"/>
-                <a:ea typeface="Calibri" pitchFamily="34" charset="-122"/>
-                <a:cs typeface="Calibri" pitchFamily="34" charset="-120"/>
-              </a:rPr>
-              <a:t>No Conformidad</a:t>
-            </a:r>
-            <a:endParaRPr lang="en-US" sz="1050" dirty="0"/>
-          </a:p>
-        </p:txBody>
-      </p:sp>
-      <p:sp>
-        <p:nvSpPr>
-          <p:cNvPr id="53" name="Text 49"/>
-          <p:cNvSpPr/>
-          <p:nvPr/>
-        </p:nvSpPr>
-        <p:spPr>
-          <a:xfrm>
-            <a:off x="4983480" y="5084064"/>
-            <a:ext cx="1417320" cy="237744"/>
-          </a:xfrm>
-          <a:prstGeom prst="rect">
-            <a:avLst/>
-          </a:prstGeom>
-          <a:noFill/>
-          <a:ln/>
-        </p:spPr>
-        <p:txBody>
-          <a:bodyPr wrap="square" lIns="0" tIns="0" rIns="0" bIns="0" rtlCol="0" anchor="ctr"/>
-          <a:lstStyle/>
-          <a:p>
-            <a:pPr algn="l" indent="0" marL="0">
-              <a:buNone/>
-            </a:pPr>
-            <a:r>
-              <a:rPr lang="en-US" sz="1050" b="1" dirty="0">
-                <a:solidFill>
-                  <a:srgbClr val="C87A32"/>
-                </a:solidFill>
-                <a:latin typeface="Calibri" pitchFamily="34" charset="0"/>
-                <a:ea typeface="Calibri" pitchFamily="34" charset="-122"/>
-                <a:cs typeface="Calibri" pitchFamily="34" charset="-120"/>
-              </a:rPr>
-              <a:t>Externa · Cliente</a:t>
-            </a:r>
-            <a:endParaRPr lang="en-US" sz="1050" dirty="0"/>
-          </a:p>
-        </p:txBody>
-      </p:sp>
-      <p:sp>
-        <p:nvSpPr>
-          <p:cNvPr id="54" name="Text 50"/>
-          <p:cNvSpPr/>
-          <p:nvPr/>
-        </p:nvSpPr>
-        <p:spPr>
-          <a:xfrm>
-            <a:off x="6446520" y="5084064"/>
-            <a:ext cx="1097280" cy="237744"/>
-          </a:xfrm>
-          <a:prstGeom prst="rect">
-            <a:avLst/>
-          </a:prstGeom>
-          <a:noFill/>
-          <a:ln/>
-        </p:spPr>
-        <p:txBody>
-          <a:bodyPr wrap="square" lIns="0" tIns="0" rIns="0" bIns="0" rtlCol="0" anchor="ctr"/>
-          <a:lstStyle/>
-          <a:p>
-            <a:pPr algn="l" indent="0" marL="0">
-              <a:buNone/>
-            </a:pPr>
-            <a:r>
-              <a:rPr lang="en-US" sz="1050" dirty="0">
-                <a:solidFill>
-                  <a:srgbClr val="1A2433"/>
-                </a:solidFill>
-                <a:latin typeface="Calibri" pitchFamily="34" charset="0"/>
-                <a:ea typeface="Calibri" pitchFamily="34" charset="-122"/>
-                <a:cs typeface="Calibri" pitchFamily="34" charset="-120"/>
-              </a:rPr>
-              <a:t>Sin especial…</a:t>
-            </a:r>
-            <a:endParaRPr lang="en-US" sz="1050" dirty="0"/>
-          </a:p>
-        </p:txBody>
-      </p:sp>
-      <p:sp>
-        <p:nvSpPr>
-          <p:cNvPr id="55" name="Text 51"/>
-          <p:cNvSpPr/>
-          <p:nvPr/>
-        </p:nvSpPr>
-        <p:spPr>
-          <a:xfrm>
-            <a:off x="7589520" y="5084064"/>
-            <a:ext cx="1371600" cy="237744"/>
-          </a:xfrm>
-          <a:prstGeom prst="rect">
-            <a:avLst/>
-          </a:prstGeom>
-          <a:noFill/>
-          <a:ln/>
-        </p:spPr>
-        <p:txBody>
-          <a:bodyPr wrap="square" lIns="0" tIns="0" rIns="0" bIns="0" rtlCol="0" anchor="ctr"/>
-          <a:lstStyle/>
-          <a:p>
-            <a:pPr algn="l" indent="0" marL="0">
-              <a:buNone/>
-            </a:pPr>
-            <a:r>
-              <a:rPr lang="en-US" sz="1050" dirty="0">
-                <a:solidFill>
-                  <a:srgbClr val="1A2433"/>
-                </a:solidFill>
-                <a:latin typeface="Calibri" pitchFamily="34" charset="0"/>
-                <a:ea typeface="Calibri" pitchFamily="34" charset="-122"/>
-                <a:cs typeface="Calibri" pitchFamily="34" charset="-120"/>
-              </a:rPr>
-              <a:t>Sin asignar</a:t>
-            </a:r>
-            <a:endParaRPr lang="en-US" sz="1050" dirty="0"/>
-          </a:p>
-        </p:txBody>
-      </p:sp>
-      <p:sp>
-        <p:nvSpPr>
-          <p:cNvPr id="56" name="Text 52"/>
-          <p:cNvSpPr/>
-          <p:nvPr/>
-        </p:nvSpPr>
-        <p:spPr>
-          <a:xfrm>
-            <a:off x="9006840" y="5084064"/>
-            <a:ext cx="868680" cy="237744"/>
-          </a:xfrm>
-          <a:prstGeom prst="rect">
-            <a:avLst/>
-          </a:prstGeom>
-          <a:noFill/>
-          <a:ln/>
-        </p:spPr>
-        <p:txBody>
-          <a:bodyPr wrap="square" lIns="0" tIns="0" rIns="0" bIns="0" rtlCol="0" anchor="ctr"/>
-          <a:lstStyle/>
-          <a:p>
-            <a:pPr algn="l" indent="0" marL="0">
-              <a:buNone/>
-            </a:pPr>
-            <a:r>
-              <a:rPr lang="en-US" sz="1050" dirty="0">
-                <a:solidFill>
-                  <a:srgbClr val="C0392B"/>
-                </a:solidFill>
-                <a:latin typeface="Calibri" pitchFamily="34" charset="0"/>
-                <a:ea typeface="Calibri" pitchFamily="34" charset="-122"/>
-                <a:cs typeface="Calibri" pitchFamily="34" charset="-120"/>
-              </a:rPr>
-              <a:t>Pendiente</a:t>
-            </a:r>
-            <a:endParaRPr lang="en-US" sz="1050" dirty="0"/>
-          </a:p>
-        </p:txBody>
-      </p:sp>
-      <p:sp>
-        <p:nvSpPr>
-          <p:cNvPr id="57" name="Text 53"/>
-          <p:cNvSpPr/>
-          <p:nvPr/>
-        </p:nvSpPr>
-        <p:spPr>
-          <a:xfrm>
-            <a:off x="9921240" y="5084064"/>
-            <a:ext cx="1828800" cy="237744"/>
-          </a:xfrm>
-          <a:prstGeom prst="rect">
-            <a:avLst/>
-          </a:prstGeom>
-          <a:noFill/>
-          <a:ln/>
-        </p:spPr>
-        <p:txBody>
-          <a:bodyPr wrap="square" lIns="0" tIns="0" rIns="0" bIns="0" rtlCol="0" anchor="ctr"/>
-          <a:lstStyle/>
-          <a:p>
-            <a:pPr algn="l" indent="0" marL="0">
-              <a:buNone/>
-            </a:pPr>
-            <a:r>
-              <a:rPr lang="en-US" sz="1000" dirty="0">
-                <a:solidFill>
-                  <a:srgbClr val="1A2433"/>
-                </a:solidFill>
-                <a:latin typeface="Calibri" pitchFamily="34" charset="0"/>
-                <a:ea typeface="Calibri" pitchFamily="34" charset="-122"/>
-                <a:cs typeface="Calibri" pitchFamily="34" charset="-120"/>
-              </a:rPr>
-              <a:t>Desviación en línea de succ…</a:t>
-            </a:r>
-            <a:endParaRPr lang="en-US" sz="1000" dirty="0"/>
-          </a:p>
-        </p:txBody>
-      </p:sp>
-      <p:sp>
-        <p:nvSpPr>
-          <p:cNvPr id="58" name="Shape 54"/>
-          <p:cNvSpPr/>
-          <p:nvPr/>
-        </p:nvSpPr>
-        <p:spPr>
-          <a:xfrm>
-            <a:off x="502920" y="5358384"/>
-            <a:ext cx="11247120" cy="0"/>
-          </a:xfrm>
-          <a:prstGeom prst="line">
-            <a:avLst/>
-          </a:prstGeom>
-          <a:noFill/>
-          <a:ln w="9525">
-            <a:solidFill>
-              <a:srgbClr val="D9DFE6"/>
-            </a:solidFill>
-            <a:prstDash val="solid"/>
-          </a:ln>
-        </p:spPr>
-      </p:sp>
-      <p:sp>
-        <p:nvSpPr>
-          <p:cNvPr id="59" name="Shape 55"/>
-          <p:cNvSpPr/>
-          <p:nvPr/>
-        </p:nvSpPr>
-        <p:spPr>
-          <a:xfrm>
-            <a:off x="457200" y="5367528"/>
-            <a:ext cx="11292840" cy="329184"/>
-          </a:xfrm>
-          <a:prstGeom prst="rect">
-            <a:avLst/>
-          </a:prstGeom>
-          <a:solidFill>
-            <a:srgbClr val="FFFFFF"/>
-          </a:solidFill>
-          <a:ln/>
-        </p:spPr>
-      </p:sp>
-      <p:sp>
-        <p:nvSpPr>
-          <p:cNvPr id="60" name="Text 56"/>
-          <p:cNvSpPr/>
-          <p:nvPr/>
-        </p:nvSpPr>
-        <p:spPr>
-          <a:xfrm>
-            <a:off x="502920" y="5413248"/>
-            <a:ext cx="822960" cy="237744"/>
-          </a:xfrm>
-          <a:prstGeom prst="rect">
-            <a:avLst/>
-          </a:prstGeom>
-          <a:noFill/>
-          <a:ln/>
-        </p:spPr>
-        <p:txBody>
-          <a:bodyPr wrap="square" lIns="0" tIns="0" rIns="0" bIns="0" rtlCol="0" anchor="ctr"/>
-          <a:lstStyle/>
-          <a:p>
-            <a:pPr algn="l" indent="0" marL="0">
-              <a:buNone/>
-            </a:pPr>
-            <a:r>
-              <a:rPr lang="en-US" sz="1050" dirty="0">
-                <a:solidFill>
-                  <a:srgbClr val="1A2433"/>
-                </a:solidFill>
-                <a:latin typeface="Calibri" pitchFamily="34" charset="0"/>
-                <a:ea typeface="Calibri" pitchFamily="34" charset="-122"/>
-                <a:cs typeface="Calibri" pitchFamily="34" charset="-120"/>
-              </a:rPr>
-              <a:t>01-09-2026</a:t>
-            </a:r>
-            <a:endParaRPr lang="en-US" sz="1050" dirty="0"/>
-          </a:p>
-        </p:txBody>
-      </p:sp>
-      <p:sp>
-        <p:nvSpPr>
-          <p:cNvPr id="61" name="Text 57"/>
-          <p:cNvSpPr/>
-          <p:nvPr/>
-        </p:nvSpPr>
-        <p:spPr>
-          <a:xfrm>
-            <a:off x="1371600" y="5413248"/>
-            <a:ext cx="1051560" cy="237744"/>
-          </a:xfrm>
-          <a:prstGeom prst="rect">
-            <a:avLst/>
-          </a:prstGeom>
-          <a:noFill/>
-          <a:ln/>
-        </p:spPr>
-        <p:txBody>
-          <a:bodyPr wrap="square" lIns="0" tIns="0" rIns="0" bIns="0" rtlCol="0" anchor="ctr"/>
-          <a:lstStyle/>
-          <a:p>
-            <a:pPr algn="l" indent="0" marL="0">
-              <a:buNone/>
-            </a:pPr>
-            <a:r>
-              <a:rPr lang="en-US" sz="1050" dirty="0">
-                <a:solidFill>
-                  <a:srgbClr val="1A2433"/>
-                </a:solidFill>
-                <a:latin typeface="Calibri" pitchFamily="34" charset="0"/>
-                <a:ea typeface="Calibri" pitchFamily="34" charset="-122"/>
-                <a:cs typeface="Calibri" pitchFamily="34" charset="-120"/>
-              </a:rPr>
-              <a:t>Arqueros</a:t>
-            </a:r>
-            <a:endParaRPr lang="en-US" sz="1050" dirty="0"/>
-          </a:p>
-        </p:txBody>
-      </p:sp>
-      <p:sp>
-        <p:nvSpPr>
-          <p:cNvPr id="62" name="Text 58"/>
-          <p:cNvSpPr/>
-          <p:nvPr/>
-        </p:nvSpPr>
-        <p:spPr>
-          <a:xfrm>
-            <a:off x="2468880" y="5413248"/>
-            <a:ext cx="1051560" cy="237744"/>
-          </a:xfrm>
-          <a:prstGeom prst="rect">
-            <a:avLst/>
-          </a:prstGeom>
-          <a:noFill/>
-          <a:ln/>
-        </p:spPr>
-        <p:txBody>
-          <a:bodyPr wrap="square" lIns="0" tIns="0" rIns="0" bIns="0" rtlCol="0" anchor="ctr"/>
-          <a:lstStyle/>
-          <a:p>
-            <a:pPr algn="l" indent="0" marL="0">
-              <a:buNone/>
-            </a:pPr>
-            <a:r>
-              <a:rPr lang="en-US" sz="1050" dirty="0">
-                <a:solidFill>
-                  <a:srgbClr val="1A2433"/>
-                </a:solidFill>
-                <a:latin typeface="Calibri" pitchFamily="34" charset="0"/>
-                <a:ea typeface="Calibri" pitchFamily="34" charset="-122"/>
-                <a:cs typeface="Calibri" pitchFamily="34" charset="-120"/>
-              </a:rPr>
-              <a:t>MASA-89 · EB-NE-1412</a:t>
-            </a:r>
-            <a:endParaRPr lang="en-US" sz="1050" dirty="0"/>
-          </a:p>
-        </p:txBody>
-      </p:sp>
-      <p:sp>
-        <p:nvSpPr>
-          <p:cNvPr id="63" name="Text 59"/>
-          <p:cNvSpPr/>
-          <p:nvPr/>
-        </p:nvSpPr>
-        <p:spPr>
-          <a:xfrm>
-            <a:off x="3566160" y="5413248"/>
-            <a:ext cx="1371600" cy="237744"/>
-          </a:xfrm>
-          <a:prstGeom prst="rect">
-            <a:avLst/>
-          </a:prstGeom>
-          <a:noFill/>
-          <a:ln/>
-        </p:spPr>
-        <p:txBody>
-          <a:bodyPr wrap="square" lIns="0" tIns="0" rIns="0" bIns="0" rtlCol="0" anchor="ctr"/>
-          <a:lstStyle/>
-          <a:p>
-            <a:pPr algn="l" indent="0" marL="0">
-              <a:buNone/>
-            </a:pPr>
-            <a:r>
-              <a:rPr lang="en-US" sz="1050" dirty="0">
-                <a:solidFill>
-                  <a:srgbClr val="1A2433"/>
-                </a:solidFill>
-                <a:latin typeface="Calibri" pitchFamily="34" charset="0"/>
-                <a:ea typeface="Calibri" pitchFamily="34" charset="-122"/>
-                <a:cs typeface="Calibri" pitchFamily="34" charset="-120"/>
-              </a:rPr>
-              <a:t>No Conformidad</a:t>
-            </a:r>
-            <a:endParaRPr lang="en-US" sz="1050" dirty="0"/>
-          </a:p>
-        </p:txBody>
-      </p:sp>
-      <p:sp>
-        <p:nvSpPr>
-          <p:cNvPr id="64" name="Text 60"/>
-          <p:cNvSpPr/>
-          <p:nvPr/>
-        </p:nvSpPr>
-        <p:spPr>
-          <a:xfrm>
-            <a:off x="4983480" y="5413248"/>
-            <a:ext cx="1417320" cy="237744"/>
-          </a:xfrm>
-          <a:prstGeom prst="rect">
-            <a:avLst/>
-          </a:prstGeom>
-          <a:noFill/>
-          <a:ln/>
-        </p:spPr>
-        <p:txBody>
-          <a:bodyPr wrap="square" lIns="0" tIns="0" rIns="0" bIns="0" rtlCol="0" anchor="ctr"/>
-          <a:lstStyle/>
-          <a:p>
-            <a:pPr algn="l" indent="0" marL="0">
-              <a:buNone/>
-            </a:pPr>
-            <a:r>
-              <a:rPr lang="en-US" sz="1050" b="1" dirty="0">
-                <a:solidFill>
-                  <a:srgbClr val="C87A32"/>
-                </a:solidFill>
-                <a:latin typeface="Calibri" pitchFamily="34" charset="0"/>
-                <a:ea typeface="Calibri" pitchFamily="34" charset="-122"/>
-                <a:cs typeface="Calibri" pitchFamily="34" charset="-120"/>
-              </a:rPr>
-              <a:t>Externa · Cliente</a:t>
-            </a:r>
-            <a:endParaRPr lang="en-US" sz="1050" dirty="0"/>
-          </a:p>
-        </p:txBody>
-      </p:sp>
-      <p:sp>
-        <p:nvSpPr>
-          <p:cNvPr id="65" name="Text 61"/>
-          <p:cNvSpPr/>
-          <p:nvPr/>
-        </p:nvSpPr>
-        <p:spPr>
-          <a:xfrm>
-            <a:off x="6446520" y="5413248"/>
-            <a:ext cx="1097280" cy="237744"/>
-          </a:xfrm>
-          <a:prstGeom prst="rect">
-            <a:avLst/>
-          </a:prstGeom>
-          <a:noFill/>
-          <a:ln/>
-        </p:spPr>
-        <p:txBody>
-          <a:bodyPr wrap="square" lIns="0" tIns="0" rIns="0" bIns="0" rtlCol="0" anchor="ctr"/>
-          <a:lstStyle/>
-          <a:p>
-            <a:pPr algn="l" indent="0" marL="0">
-              <a:buNone/>
-            </a:pPr>
-            <a:r>
-              <a:rPr lang="en-US" sz="1050" dirty="0">
-                <a:solidFill>
-                  <a:srgbClr val="1A2433"/>
-                </a:solidFill>
-                <a:latin typeface="Calibri" pitchFamily="34" charset="0"/>
-                <a:ea typeface="Calibri" pitchFamily="34" charset="-122"/>
-                <a:cs typeface="Calibri" pitchFamily="34" charset="-120"/>
-              </a:rPr>
-              <a:t>Sin especial…</a:t>
-            </a:r>
-            <a:endParaRPr lang="en-US" sz="1050" dirty="0"/>
-          </a:p>
-        </p:txBody>
-      </p:sp>
-      <p:sp>
-        <p:nvSpPr>
-          <p:cNvPr id="66" name="Text 62"/>
-          <p:cNvSpPr/>
-          <p:nvPr/>
-        </p:nvSpPr>
-        <p:spPr>
-          <a:xfrm>
-            <a:off x="7589520" y="5413248"/>
-            <a:ext cx="1371600" cy="237744"/>
-          </a:xfrm>
-          <a:prstGeom prst="rect">
-            <a:avLst/>
-          </a:prstGeom>
-          <a:noFill/>
-          <a:ln/>
-        </p:spPr>
-        <p:txBody>
-          <a:bodyPr wrap="square" lIns="0" tIns="0" rIns="0" bIns="0" rtlCol="0" anchor="ctr"/>
-          <a:lstStyle/>
-          <a:p>
-            <a:pPr algn="l" indent="0" marL="0">
-              <a:buNone/>
-            </a:pPr>
-            <a:r>
-              <a:rPr lang="en-US" sz="1050" dirty="0">
-                <a:solidFill>
-                  <a:srgbClr val="1A2433"/>
-                </a:solidFill>
-                <a:latin typeface="Calibri" pitchFamily="34" charset="0"/>
-                <a:ea typeface="Calibri" pitchFamily="34" charset="-122"/>
-                <a:cs typeface="Calibri" pitchFamily="34" charset="-120"/>
-              </a:rPr>
-              <a:t>Sin asignar</a:t>
-            </a:r>
-            <a:endParaRPr lang="en-US" sz="1050" dirty="0"/>
-          </a:p>
-        </p:txBody>
-      </p:sp>
-      <p:sp>
-        <p:nvSpPr>
-          <p:cNvPr id="67" name="Text 63"/>
-          <p:cNvSpPr/>
-          <p:nvPr/>
-        </p:nvSpPr>
-        <p:spPr>
-          <a:xfrm>
-            <a:off x="9006840" y="5413248"/>
-            <a:ext cx="868680" cy="237744"/>
-          </a:xfrm>
-          <a:prstGeom prst="rect">
-            <a:avLst/>
-          </a:prstGeom>
-          <a:noFill/>
-          <a:ln/>
-        </p:spPr>
-        <p:txBody>
-          <a:bodyPr wrap="square" lIns="0" tIns="0" rIns="0" bIns="0" rtlCol="0" anchor="ctr"/>
-          <a:lstStyle/>
-          <a:p>
-            <a:pPr algn="l" indent="0" marL="0">
-              <a:buNone/>
-            </a:pPr>
-            <a:r>
-              <a:rPr lang="en-US" sz="1050" dirty="0">
-                <a:solidFill>
-                  <a:srgbClr val="C0392B"/>
-                </a:solidFill>
-                <a:latin typeface="Calibri" pitchFamily="34" charset="0"/>
-                <a:ea typeface="Calibri" pitchFamily="34" charset="-122"/>
-                <a:cs typeface="Calibri" pitchFamily="34" charset="-120"/>
-              </a:rPr>
-              <a:t>Pendiente</a:t>
-            </a:r>
-            <a:endParaRPr lang="en-US" sz="1050" dirty="0"/>
-          </a:p>
-        </p:txBody>
-      </p:sp>
-      <p:sp>
-        <p:nvSpPr>
-          <p:cNvPr id="68" name="Text 64"/>
-          <p:cNvSpPr/>
-          <p:nvPr/>
-        </p:nvSpPr>
-        <p:spPr>
-          <a:xfrm>
-            <a:off x="9921240" y="5413248"/>
-            <a:ext cx="1828800" cy="237744"/>
-          </a:xfrm>
-          <a:prstGeom prst="rect">
-            <a:avLst/>
-          </a:prstGeom>
-          <a:noFill/>
-          <a:ln/>
-        </p:spPr>
-        <p:txBody>
-          <a:bodyPr wrap="square" lIns="0" tIns="0" rIns="0" bIns="0" rtlCol="0" anchor="ctr"/>
-          <a:lstStyle/>
-          <a:p>
-            <a:pPr algn="l" indent="0" marL="0">
-              <a:buNone/>
-            </a:pPr>
-            <a:r>
-              <a:rPr lang="en-US" sz="1000" dirty="0">
-                <a:solidFill>
-                  <a:srgbClr val="1A2433"/>
-                </a:solidFill>
-                <a:latin typeface="Calibri" pitchFamily="34" charset="0"/>
-                <a:ea typeface="Calibri" pitchFamily="34" charset="-122"/>
-                <a:cs typeface="Calibri" pitchFamily="34" charset="-120"/>
-              </a:rPr>
-              <a:t>Desviación en alturagrado d…</a:t>
-            </a:r>
-            <a:endParaRPr lang="en-US" sz="1000" dirty="0"/>
-          </a:p>
-        </p:txBody>
-      </p:sp>
-      <p:sp>
-        <p:nvSpPr>
-          <p:cNvPr id="69" name="Shape 65"/>
-          <p:cNvSpPr/>
-          <p:nvPr/>
-        </p:nvSpPr>
-        <p:spPr>
-          <a:xfrm>
-            <a:off x="502920" y="5687568"/>
-            <a:ext cx="11247120" cy="0"/>
-          </a:xfrm>
-          <a:prstGeom prst="line">
-            <a:avLst/>
-          </a:prstGeom>
-          <a:noFill/>
-          <a:ln w="9525">
-            <a:solidFill>
-              <a:srgbClr val="D9DFE6"/>
-            </a:solidFill>
-            <a:prstDash val="solid"/>
-          </a:ln>
-        </p:spPr>
-      </p:sp>
-      <p:sp>
-        <p:nvSpPr>
-          <p:cNvPr id="70" name="Text 66"/>
-          <p:cNvSpPr/>
-          <p:nvPr/>
-        </p:nvSpPr>
-        <p:spPr>
-          <a:xfrm>
-            <a:off x="502920" y="5742432"/>
-            <a:ext cx="822960" cy="237744"/>
-          </a:xfrm>
-          <a:prstGeom prst="rect">
-            <a:avLst/>
-          </a:prstGeom>
-          <a:noFill/>
-          <a:ln/>
-        </p:spPr>
-        <p:txBody>
-          <a:bodyPr wrap="square" lIns="0" tIns="0" rIns="0" bIns="0" rtlCol="0" anchor="ctr"/>
-          <a:lstStyle/>
-          <a:p>
-            <a:pPr algn="l" indent="0" marL="0">
-              <a:buNone/>
-            </a:pPr>
-            <a:r>
-              <a:rPr lang="en-US" sz="1050" dirty="0">
-                <a:solidFill>
-                  <a:srgbClr val="1A2433"/>
-                </a:solidFill>
-                <a:latin typeface="Calibri" pitchFamily="34" charset="0"/>
-                <a:ea typeface="Calibri" pitchFamily="34" charset="-122"/>
-                <a:cs typeface="Calibri" pitchFamily="34" charset="-120"/>
-              </a:rPr>
-              <a:t>01-09-2026</a:t>
-            </a:r>
-            <a:endParaRPr lang="en-US" sz="1050" dirty="0"/>
-          </a:p>
-        </p:txBody>
-      </p:sp>
-      <p:sp>
-        <p:nvSpPr>
-          <p:cNvPr id="71" name="Text 67"/>
-          <p:cNvSpPr/>
-          <p:nvPr/>
-        </p:nvSpPr>
-        <p:spPr>
-          <a:xfrm>
-            <a:off x="1371600" y="5742432"/>
-            <a:ext cx="1051560" cy="237744"/>
-          </a:xfrm>
-          <a:prstGeom prst="rect">
-            <a:avLst/>
-          </a:prstGeom>
-          <a:noFill/>
-          <a:ln/>
-        </p:spPr>
-        <p:txBody>
-          <a:bodyPr wrap="square" lIns="0" tIns="0" rIns="0" bIns="0" rtlCol="0" anchor="ctr"/>
-          <a:lstStyle/>
-          <a:p>
-            <a:pPr algn="l" indent="0" marL="0">
-              <a:buNone/>
-            </a:pPr>
-            <a:r>
-              <a:rPr lang="en-US" sz="1050" dirty="0">
-                <a:solidFill>
-                  <a:srgbClr val="1A2433"/>
-                </a:solidFill>
-                <a:latin typeface="Calibri" pitchFamily="34" charset="0"/>
-                <a:ea typeface="Calibri" pitchFamily="34" charset="-122"/>
-                <a:cs typeface="Calibri" pitchFamily="34" charset="-120"/>
-              </a:rPr>
-              <a:t>Arqueros</a:t>
-            </a:r>
-            <a:endParaRPr lang="en-US" sz="1050" dirty="0"/>
-          </a:p>
-        </p:txBody>
-      </p:sp>
-      <p:sp>
-        <p:nvSpPr>
-          <p:cNvPr id="72" name="Text 68"/>
-          <p:cNvSpPr/>
-          <p:nvPr/>
-        </p:nvSpPr>
-        <p:spPr>
-          <a:xfrm>
-            <a:off x="2468880" y="5742432"/>
-            <a:ext cx="1051560" cy="237744"/>
-          </a:xfrm>
-          <a:prstGeom prst="rect">
-            <a:avLst/>
-          </a:prstGeom>
-          <a:noFill/>
-          <a:ln/>
-        </p:spPr>
-        <p:txBody>
-          <a:bodyPr wrap="square" lIns="0" tIns="0" rIns="0" bIns="0" rtlCol="0" anchor="ctr"/>
-          <a:lstStyle/>
-          <a:p>
-            <a:pPr algn="l" indent="0" marL="0">
-              <a:buNone/>
-            </a:pPr>
-            <a:r>
-              <a:rPr lang="en-US" sz="1050" dirty="0">
-                <a:solidFill>
-                  <a:srgbClr val="1A2433"/>
-                </a:solidFill>
-                <a:latin typeface="Calibri" pitchFamily="34" charset="0"/>
-                <a:ea typeface="Calibri" pitchFamily="34" charset="-122"/>
-                <a:cs typeface="Calibri" pitchFamily="34" charset="-120"/>
-              </a:rPr>
-              <a:t>MASA-90 · EB-NE-1412</a:t>
-            </a:r>
-            <a:endParaRPr lang="en-US" sz="1050" dirty="0"/>
-          </a:p>
-        </p:txBody>
-      </p:sp>
-      <p:sp>
-        <p:nvSpPr>
-          <p:cNvPr id="73" name="Text 69"/>
-          <p:cNvSpPr/>
-          <p:nvPr/>
-        </p:nvSpPr>
-        <p:spPr>
-          <a:xfrm>
-            <a:off x="3566160" y="5742432"/>
-            <a:ext cx="1371600" cy="237744"/>
-          </a:xfrm>
-          <a:prstGeom prst="rect">
-            <a:avLst/>
-          </a:prstGeom>
-          <a:noFill/>
-          <a:ln/>
-        </p:spPr>
-        <p:txBody>
-          <a:bodyPr wrap="square" lIns="0" tIns="0" rIns="0" bIns="0" rtlCol="0" anchor="ctr"/>
-          <a:lstStyle/>
-          <a:p>
-            <a:pPr algn="l" indent="0" marL="0">
-              <a:buNone/>
-            </a:pPr>
-            <a:r>
-              <a:rPr lang="en-US" sz="1050" dirty="0">
-                <a:solidFill>
-                  <a:srgbClr val="1A2433"/>
-                </a:solidFill>
-                <a:latin typeface="Calibri" pitchFamily="34" charset="0"/>
-                <a:ea typeface="Calibri" pitchFamily="34" charset="-122"/>
-                <a:cs typeface="Calibri" pitchFamily="34" charset="-120"/>
-              </a:rPr>
-              <a:t>No Conformidad</a:t>
-            </a:r>
-            <a:endParaRPr lang="en-US" sz="1050" dirty="0"/>
-          </a:p>
-        </p:txBody>
-      </p:sp>
-      <p:sp>
-        <p:nvSpPr>
-          <p:cNvPr id="74" name="Text 70"/>
-          <p:cNvSpPr/>
-          <p:nvPr/>
-        </p:nvSpPr>
-        <p:spPr>
-          <a:xfrm>
-            <a:off x="4983480" y="5742432"/>
-            <a:ext cx="1417320" cy="237744"/>
-          </a:xfrm>
-          <a:prstGeom prst="rect">
-            <a:avLst/>
-          </a:prstGeom>
-          <a:noFill/>
-          <a:ln/>
-        </p:spPr>
-        <p:txBody>
-          <a:bodyPr wrap="square" lIns="0" tIns="0" rIns="0" bIns="0" rtlCol="0" anchor="ctr"/>
-          <a:lstStyle/>
-          <a:p>
-            <a:pPr algn="l" indent="0" marL="0">
-              <a:buNone/>
-            </a:pPr>
-            <a:r>
-              <a:rPr lang="en-US" sz="1050" b="1" dirty="0">
-                <a:solidFill>
-                  <a:srgbClr val="C87A32"/>
-                </a:solidFill>
-                <a:latin typeface="Calibri" pitchFamily="34" charset="0"/>
-                <a:ea typeface="Calibri" pitchFamily="34" charset="-122"/>
-                <a:cs typeface="Calibri" pitchFamily="34" charset="-120"/>
-              </a:rPr>
-              <a:t>Externa · Cliente</a:t>
-            </a:r>
-            <a:endParaRPr lang="en-US" sz="1050" dirty="0"/>
-          </a:p>
-        </p:txBody>
-      </p:sp>
-      <p:sp>
-        <p:nvSpPr>
-          <p:cNvPr id="75" name="Text 71"/>
-          <p:cNvSpPr/>
-          <p:nvPr/>
-        </p:nvSpPr>
-        <p:spPr>
-          <a:xfrm>
-            <a:off x="6446520" y="5742432"/>
-            <a:ext cx="1097280" cy="237744"/>
-          </a:xfrm>
-          <a:prstGeom prst="rect">
-            <a:avLst/>
-          </a:prstGeom>
-          <a:noFill/>
-          <a:ln/>
-        </p:spPr>
-        <p:txBody>
-          <a:bodyPr wrap="square" lIns="0" tIns="0" rIns="0" bIns="0" rtlCol="0" anchor="ctr"/>
-          <a:lstStyle/>
-          <a:p>
-            <a:pPr algn="l" indent="0" marL="0">
-              <a:buNone/>
-            </a:pPr>
-            <a:r>
-              <a:rPr lang="en-US" sz="1050" dirty="0">
-                <a:solidFill>
-                  <a:srgbClr val="1A2433"/>
-                </a:solidFill>
-                <a:latin typeface="Calibri" pitchFamily="34" charset="0"/>
-                <a:ea typeface="Calibri" pitchFamily="34" charset="-122"/>
-                <a:cs typeface="Calibri" pitchFamily="34" charset="-120"/>
-              </a:rPr>
-              <a:t>Sin especial…</a:t>
-            </a:r>
-            <a:endParaRPr lang="en-US" sz="1050" dirty="0"/>
-          </a:p>
-        </p:txBody>
-      </p:sp>
-      <p:sp>
-        <p:nvSpPr>
-          <p:cNvPr id="76" name="Text 72"/>
-          <p:cNvSpPr/>
-          <p:nvPr/>
-        </p:nvSpPr>
-        <p:spPr>
-          <a:xfrm>
-            <a:off x="7589520" y="5742432"/>
-            <a:ext cx="1371600" cy="237744"/>
-          </a:xfrm>
-          <a:prstGeom prst="rect">
-            <a:avLst/>
-          </a:prstGeom>
-          <a:noFill/>
-          <a:ln/>
-        </p:spPr>
-        <p:txBody>
-          <a:bodyPr wrap="square" lIns="0" tIns="0" rIns="0" bIns="0" rtlCol="0" anchor="ctr"/>
-          <a:lstStyle/>
-          <a:p>
-            <a:pPr algn="l" indent="0" marL="0">
-              <a:buNone/>
-            </a:pPr>
-            <a:r>
-              <a:rPr lang="en-US" sz="1050" dirty="0">
-                <a:solidFill>
-                  <a:srgbClr val="1A2433"/>
-                </a:solidFill>
-                <a:latin typeface="Calibri" pitchFamily="34" charset="0"/>
-                <a:ea typeface="Calibri" pitchFamily="34" charset="-122"/>
-                <a:cs typeface="Calibri" pitchFamily="34" charset="-120"/>
-              </a:rPr>
-              <a:t>Sin asignar</a:t>
-            </a:r>
-            <a:endParaRPr lang="en-US" sz="1050" dirty="0"/>
-          </a:p>
-        </p:txBody>
-      </p:sp>
-      <p:sp>
-        <p:nvSpPr>
-          <p:cNvPr id="77" name="Text 73"/>
-          <p:cNvSpPr/>
-          <p:nvPr/>
-        </p:nvSpPr>
-        <p:spPr>
-          <a:xfrm>
-            <a:off x="9006840" y="5742432"/>
-            <a:ext cx="868680" cy="237744"/>
-          </a:xfrm>
-          <a:prstGeom prst="rect">
-            <a:avLst/>
-          </a:prstGeom>
-          <a:noFill/>
-          <a:ln/>
-        </p:spPr>
-        <p:txBody>
-          <a:bodyPr wrap="square" lIns="0" tIns="0" rIns="0" bIns="0" rtlCol="0" anchor="ctr"/>
-          <a:lstStyle/>
-          <a:p>
-            <a:pPr algn="l" indent="0" marL="0">
-              <a:buNone/>
-            </a:pPr>
-            <a:r>
-              <a:rPr lang="en-US" sz="1050" dirty="0">
-                <a:solidFill>
-                  <a:srgbClr val="C0392B"/>
-                </a:solidFill>
-                <a:latin typeface="Calibri" pitchFamily="34" charset="0"/>
-                <a:ea typeface="Calibri" pitchFamily="34" charset="-122"/>
-                <a:cs typeface="Calibri" pitchFamily="34" charset="-120"/>
-              </a:rPr>
-              <a:t>Pendiente</a:t>
-            </a:r>
-            <a:endParaRPr lang="en-US" sz="1050" dirty="0"/>
-          </a:p>
-        </p:txBody>
-      </p:sp>
-      <p:sp>
-        <p:nvSpPr>
-          <p:cNvPr id="78" name="Text 74"/>
-          <p:cNvSpPr/>
-          <p:nvPr/>
-        </p:nvSpPr>
-        <p:spPr>
-          <a:xfrm>
-            <a:off x="9921240" y="5742432"/>
-            <a:ext cx="1828800" cy="237744"/>
-          </a:xfrm>
-          <a:prstGeom prst="rect">
-            <a:avLst/>
-          </a:prstGeom>
-          <a:noFill/>
-          <a:ln/>
-        </p:spPr>
-        <p:txBody>
-          <a:bodyPr wrap="square" lIns="0" tIns="0" rIns="0" bIns="0" rtlCol="0" anchor="ctr"/>
-          <a:lstStyle/>
-          <a:p>
-            <a:pPr algn="l" indent="0" marL="0">
-              <a:buNone/>
-            </a:pPr>
-            <a:r>
-              <a:rPr lang="en-US" sz="1000" dirty="0">
-                <a:solidFill>
-                  <a:srgbClr val="1A2433"/>
-                </a:solidFill>
-                <a:latin typeface="Calibri" pitchFamily="34" charset="0"/>
-                <a:ea typeface="Calibri" pitchFamily="34" charset="-122"/>
-                <a:cs typeface="Calibri" pitchFamily="34" charset="-120"/>
-              </a:rPr>
-              <a:t>Desviación en soportación d…</a:t>
-            </a:r>
-            <a:endParaRPr lang="en-US" sz="1000" dirty="0"/>
-          </a:p>
-        </p:txBody>
-      </p:sp>
-      <p:sp>
-        <p:nvSpPr>
-          <p:cNvPr id="79" name="Shape 75"/>
-          <p:cNvSpPr/>
-          <p:nvPr/>
-        </p:nvSpPr>
-        <p:spPr>
-          <a:xfrm>
-            <a:off x="502920" y="6016752"/>
-            <a:ext cx="11247120" cy="0"/>
-          </a:xfrm>
-          <a:prstGeom prst="line">
-            <a:avLst/>
-          </a:prstGeom>
-          <a:noFill/>
-          <a:ln w="9525">
-            <a:solidFill>
-              <a:srgbClr val="D9DFE6"/>
-            </a:solidFill>
-            <a:prstDash val="solid"/>
-          </a:ln>
-        </p:spPr>
-      </p:sp>
-      <p:sp>
-        <p:nvSpPr>
-          <p:cNvPr id="80" name="Shape 76"/>
-          <p:cNvSpPr/>
-          <p:nvPr/>
-        </p:nvSpPr>
-        <p:spPr>
-          <a:xfrm>
-            <a:off x="457200" y="6025896"/>
-            <a:ext cx="11292840" cy="329184"/>
-          </a:xfrm>
-          <a:prstGeom prst="rect">
-            <a:avLst/>
-          </a:prstGeom>
-          <a:solidFill>
-            <a:srgbClr val="FFFFFF"/>
-          </a:solidFill>
-          <a:ln/>
-        </p:spPr>
-      </p:sp>
-      <p:sp>
-        <p:nvSpPr>
-          <p:cNvPr id="81" name="Text 77"/>
-          <p:cNvSpPr/>
-          <p:nvPr/>
-        </p:nvSpPr>
-        <p:spPr>
-          <a:xfrm>
-            <a:off x="502920" y="6071616"/>
-            <a:ext cx="822960" cy="237744"/>
-          </a:xfrm>
-          <a:prstGeom prst="rect">
-            <a:avLst/>
-          </a:prstGeom>
-          <a:noFill/>
-          <a:ln/>
-        </p:spPr>
-        <p:txBody>
-          <a:bodyPr wrap="square" lIns="0" tIns="0" rIns="0" bIns="0" rtlCol="0" anchor="ctr"/>
-          <a:lstStyle/>
-          <a:p>
-            <a:pPr algn="l" indent="0" marL="0">
-              <a:buNone/>
-            </a:pPr>
-            <a:r>
-              <a:rPr lang="en-US" sz="1050" dirty="0">
-                <a:solidFill>
-                  <a:srgbClr val="1A2433"/>
-                </a:solidFill>
-                <a:latin typeface="Calibri" pitchFamily="34" charset="0"/>
-                <a:ea typeface="Calibri" pitchFamily="34" charset="-122"/>
-                <a:cs typeface="Calibri" pitchFamily="34" charset="-120"/>
-              </a:rPr>
-              <a:t>01-09-2026</a:t>
-            </a:r>
-            <a:endParaRPr lang="en-US" sz="1050" dirty="0"/>
-          </a:p>
-        </p:txBody>
-      </p:sp>
-      <p:sp>
-        <p:nvSpPr>
-          <p:cNvPr id="82" name="Text 78"/>
-          <p:cNvSpPr/>
-          <p:nvPr/>
-        </p:nvSpPr>
-        <p:spPr>
-          <a:xfrm>
-            <a:off x="1371600" y="6071616"/>
-            <a:ext cx="1051560" cy="237744"/>
-          </a:xfrm>
-          <a:prstGeom prst="rect">
-            <a:avLst/>
-          </a:prstGeom>
-          <a:noFill/>
-          <a:ln/>
-        </p:spPr>
-        <p:txBody>
-          <a:bodyPr wrap="square" lIns="0" tIns="0" rIns="0" bIns="0" rtlCol="0" anchor="ctr"/>
-          <a:lstStyle/>
-          <a:p>
-            <a:pPr algn="l" indent="0" marL="0">
-              <a:buNone/>
-            </a:pPr>
-            <a:r>
-              <a:rPr lang="en-US" sz="1050" dirty="0">
-                <a:solidFill>
-                  <a:srgbClr val="1A2433"/>
-                </a:solidFill>
-                <a:latin typeface="Calibri" pitchFamily="34" charset="0"/>
-                <a:ea typeface="Calibri" pitchFamily="34" charset="-122"/>
-                <a:cs typeface="Calibri" pitchFamily="34" charset="-120"/>
-              </a:rPr>
-              <a:t>Arqueros</a:t>
-            </a:r>
-            <a:endParaRPr lang="en-US" sz="1050" dirty="0"/>
-          </a:p>
-        </p:txBody>
-      </p:sp>
-      <p:sp>
-        <p:nvSpPr>
-          <p:cNvPr id="83" name="Text 79"/>
-          <p:cNvSpPr/>
-          <p:nvPr/>
-        </p:nvSpPr>
-        <p:spPr>
-          <a:xfrm>
-            <a:off x="2468880" y="6071616"/>
-            <a:ext cx="1051560" cy="237744"/>
-          </a:xfrm>
-          <a:prstGeom prst="rect">
-            <a:avLst/>
-          </a:prstGeom>
-          <a:noFill/>
-          <a:ln/>
-        </p:spPr>
-        <p:txBody>
-          <a:bodyPr wrap="square" lIns="0" tIns="0" rIns="0" bIns="0" rtlCol="0" anchor="ctr"/>
-          <a:lstStyle/>
-          <a:p>
-            <a:pPr algn="l" indent="0" marL="0">
-              <a:buNone/>
-            </a:pPr>
-            <a:r>
-              <a:rPr lang="en-US" sz="1050" dirty="0">
-                <a:solidFill>
-                  <a:srgbClr val="1A2433"/>
-                </a:solidFill>
-                <a:latin typeface="Calibri" pitchFamily="34" charset="0"/>
-                <a:ea typeface="Calibri" pitchFamily="34" charset="-122"/>
-                <a:cs typeface="Calibri" pitchFamily="34" charset="-120"/>
-              </a:rPr>
-              <a:t>MASA-91 · EB-NE-1412</a:t>
-            </a:r>
-            <a:endParaRPr lang="en-US" sz="1050" dirty="0"/>
-          </a:p>
-        </p:txBody>
-      </p:sp>
-      <p:sp>
-        <p:nvSpPr>
-          <p:cNvPr id="84" name="Text 80"/>
-          <p:cNvSpPr/>
-          <p:nvPr/>
-        </p:nvSpPr>
-        <p:spPr>
-          <a:xfrm>
-            <a:off x="3566160" y="6071616"/>
-            <a:ext cx="1371600" cy="237744"/>
-          </a:xfrm>
-          <a:prstGeom prst="rect">
-            <a:avLst/>
-          </a:prstGeom>
-          <a:noFill/>
-          <a:ln/>
-        </p:spPr>
-        <p:txBody>
-          <a:bodyPr wrap="square" lIns="0" tIns="0" rIns="0" bIns="0" rtlCol="0" anchor="ctr"/>
-          <a:lstStyle/>
-          <a:p>
-            <a:pPr algn="l" indent="0" marL="0">
-              <a:buNone/>
-            </a:pPr>
-            <a:r>
-              <a:rPr lang="en-US" sz="1050" dirty="0">
-                <a:solidFill>
-                  <a:srgbClr val="1A2433"/>
-                </a:solidFill>
-                <a:latin typeface="Calibri" pitchFamily="34" charset="0"/>
-                <a:ea typeface="Calibri" pitchFamily="34" charset="-122"/>
-                <a:cs typeface="Calibri" pitchFamily="34" charset="-120"/>
-              </a:rPr>
-              <a:t>No Conformidad</a:t>
-            </a:r>
-            <a:endParaRPr lang="en-US" sz="1050" dirty="0"/>
-          </a:p>
-        </p:txBody>
-      </p:sp>
-      <p:sp>
-        <p:nvSpPr>
-          <p:cNvPr id="85" name="Text 81"/>
-          <p:cNvSpPr/>
-          <p:nvPr/>
-        </p:nvSpPr>
-        <p:spPr>
-          <a:xfrm>
-            <a:off x="4983480" y="6071616"/>
-            <a:ext cx="1417320" cy="237744"/>
-          </a:xfrm>
-          <a:prstGeom prst="rect">
-            <a:avLst/>
-          </a:prstGeom>
-          <a:noFill/>
-          <a:ln/>
-        </p:spPr>
-        <p:txBody>
-          <a:bodyPr wrap="square" lIns="0" tIns="0" rIns="0" bIns="0" rtlCol="0" anchor="ctr"/>
-          <a:lstStyle/>
-          <a:p>
-            <a:pPr algn="l" indent="0" marL="0">
-              <a:buNone/>
-            </a:pPr>
-            <a:r>
-              <a:rPr lang="en-US" sz="1050" b="1" dirty="0">
-                <a:solidFill>
-                  <a:srgbClr val="C87A32"/>
-                </a:solidFill>
-                <a:latin typeface="Calibri" pitchFamily="34" charset="0"/>
-                <a:ea typeface="Calibri" pitchFamily="34" charset="-122"/>
-                <a:cs typeface="Calibri" pitchFamily="34" charset="-120"/>
-              </a:rPr>
-              <a:t>Externa · Cliente</a:t>
-            </a:r>
-            <a:endParaRPr lang="en-US" sz="1050" dirty="0"/>
-          </a:p>
-        </p:txBody>
-      </p:sp>
-      <p:sp>
-        <p:nvSpPr>
-          <p:cNvPr id="86" name="Text 82"/>
-          <p:cNvSpPr/>
-          <p:nvPr/>
-        </p:nvSpPr>
-        <p:spPr>
-          <a:xfrm>
-            <a:off x="6446520" y="6071616"/>
-            <a:ext cx="1097280" cy="237744"/>
-          </a:xfrm>
-          <a:prstGeom prst="rect">
-            <a:avLst/>
-          </a:prstGeom>
-          <a:noFill/>
-          <a:ln/>
-        </p:spPr>
-        <p:txBody>
-          <a:bodyPr wrap="square" lIns="0" tIns="0" rIns="0" bIns="0" rtlCol="0" anchor="ctr"/>
-          <a:lstStyle/>
-          <a:p>
-            <a:pPr algn="l" indent="0" marL="0">
-              <a:buNone/>
-            </a:pPr>
-            <a:r>
-              <a:rPr lang="en-US" sz="1050" dirty="0">
-                <a:solidFill>
-                  <a:srgbClr val="1A2433"/>
-                </a:solidFill>
-                <a:latin typeface="Calibri" pitchFamily="34" charset="0"/>
-                <a:ea typeface="Calibri" pitchFamily="34" charset="-122"/>
-                <a:cs typeface="Calibri" pitchFamily="34" charset="-120"/>
-              </a:rPr>
-              <a:t>Sin especial…</a:t>
-            </a:r>
-            <a:endParaRPr lang="en-US" sz="1050" dirty="0"/>
-          </a:p>
-        </p:txBody>
-      </p:sp>
-      <p:sp>
-        <p:nvSpPr>
-          <p:cNvPr id="87" name="Text 83"/>
-          <p:cNvSpPr/>
-          <p:nvPr/>
-        </p:nvSpPr>
-        <p:spPr>
-          <a:xfrm>
-            <a:off x="7589520" y="6071616"/>
-            <a:ext cx="1371600" cy="237744"/>
-          </a:xfrm>
-          <a:prstGeom prst="rect">
-            <a:avLst/>
-          </a:prstGeom>
-          <a:noFill/>
-          <a:ln/>
-        </p:spPr>
-        <p:txBody>
-          <a:bodyPr wrap="square" lIns="0" tIns="0" rIns="0" bIns="0" rtlCol="0" anchor="ctr"/>
-          <a:lstStyle/>
-          <a:p>
-            <a:pPr algn="l" indent="0" marL="0">
-              <a:buNone/>
-            </a:pPr>
-            <a:r>
-              <a:rPr lang="en-US" sz="1050" dirty="0">
-                <a:solidFill>
-                  <a:srgbClr val="1A2433"/>
-                </a:solidFill>
-                <a:latin typeface="Calibri" pitchFamily="34" charset="0"/>
-                <a:ea typeface="Calibri" pitchFamily="34" charset="-122"/>
-                <a:cs typeface="Calibri" pitchFamily="34" charset="-120"/>
-              </a:rPr>
-              <a:t>Sin asignar</a:t>
-            </a:r>
-            <a:endParaRPr lang="en-US" sz="1050" dirty="0"/>
-          </a:p>
-        </p:txBody>
-      </p:sp>
-      <p:sp>
-        <p:nvSpPr>
-          <p:cNvPr id="88" name="Text 84"/>
-          <p:cNvSpPr/>
-          <p:nvPr/>
-        </p:nvSpPr>
-        <p:spPr>
-          <a:xfrm>
-            <a:off x="9006840" y="6071616"/>
-            <a:ext cx="868680" cy="237744"/>
-          </a:xfrm>
-          <a:prstGeom prst="rect">
-            <a:avLst/>
-          </a:prstGeom>
-          <a:noFill/>
-          <a:ln/>
-        </p:spPr>
-        <p:txBody>
-          <a:bodyPr wrap="square" lIns="0" tIns="0" rIns="0" bIns="0" rtlCol="0" anchor="ctr"/>
-          <a:lstStyle/>
-          <a:p>
-            <a:pPr algn="l" indent="0" marL="0">
-              <a:buNone/>
-            </a:pPr>
-            <a:r>
-              <a:rPr lang="en-US" sz="1050" dirty="0">
-                <a:solidFill>
-                  <a:srgbClr val="C0392B"/>
-                </a:solidFill>
-                <a:latin typeface="Calibri" pitchFamily="34" charset="0"/>
-                <a:ea typeface="Calibri" pitchFamily="34" charset="-122"/>
-                <a:cs typeface="Calibri" pitchFamily="34" charset="-120"/>
-              </a:rPr>
-              <a:t>Pendiente</a:t>
-            </a:r>
-            <a:endParaRPr lang="en-US" sz="1050" dirty="0"/>
-          </a:p>
-        </p:txBody>
-      </p:sp>
-      <p:sp>
-        <p:nvSpPr>
-          <p:cNvPr id="89" name="Text 85"/>
-          <p:cNvSpPr/>
-          <p:nvPr/>
-        </p:nvSpPr>
-        <p:spPr>
-          <a:xfrm>
-            <a:off x="9921240" y="6071616"/>
-            <a:ext cx="1828800" cy="237744"/>
-          </a:xfrm>
-          <a:prstGeom prst="rect">
-            <a:avLst/>
-          </a:prstGeom>
-          <a:noFill/>
-          <a:ln/>
-        </p:spPr>
-        <p:txBody>
-          <a:bodyPr wrap="square" lIns="0" tIns="0" rIns="0" bIns="0" rtlCol="0" anchor="ctr"/>
-          <a:lstStyle/>
-          <a:p>
-            <a:pPr algn="l" indent="0" marL="0">
-              <a:buNone/>
-            </a:pPr>
-            <a:r>
-              <a:rPr lang="en-US" sz="1000" dirty="0">
-                <a:solidFill>
-                  <a:srgbClr val="1A2433"/>
-                </a:solidFill>
-                <a:latin typeface="Calibri" pitchFamily="34" charset="0"/>
-                <a:ea typeface="Calibri" pitchFamily="34" charset="-122"/>
-                <a:cs typeface="Calibri" pitchFamily="34" charset="-120"/>
-              </a:rPr>
-              <a:t>gap en piping bombas celdas…</a:t>
-            </a:r>
-            <a:endParaRPr lang="en-US" sz="1000" dirty="0"/>
-          </a:p>
-        </p:txBody>
-      </p:sp>
-      <p:sp>
-        <p:nvSpPr>
-          <p:cNvPr id="90" name="Shape 86"/>
-          <p:cNvSpPr/>
-          <p:nvPr/>
-        </p:nvSpPr>
-        <p:spPr>
-          <a:xfrm>
-            <a:off x="502920" y="6345936"/>
-            <a:ext cx="11247120" cy="0"/>
-          </a:xfrm>
-          <a:prstGeom prst="line">
-            <a:avLst/>
-          </a:prstGeom>
-          <a:noFill/>
-          <a:ln w="9525">
-            <a:solidFill>
-              <a:srgbClr val="D9DFE6"/>
-            </a:solidFill>
-            <a:prstDash val="solid"/>
-          </a:ln>
-        </p:spPr>
-      </p:sp>
-      <p:sp>
-        <p:nvSpPr>
-          <p:cNvPr id="91" name="Text 87"/>
           <p:cNvSpPr/>
           <p:nvPr/>
         </p:nvSpPr>
@@ -28468,7 +25829,7 @@
                 <a:ea typeface="Calibri" pitchFamily="34" charset="-122"/>
                 <a:cs typeface="Calibri" pitchFamily="34" charset="-120"/>
               </a:rPr>
-              <a:t>Fuente: Data_NCR07092026.xlsx — hoja «Observaciones» · Corte 07-09-2026 · 509 registros desde 10-02-2023</a:t>
+              <a:t>Fuente: Data_NCR-13092026.xlsx — hoja «Observaciones» · Corte 13-09-2026 · 509 registros desde 10-02-2023</a:t>
             </a:r>
             <a:endParaRPr lang="en-US" sz="850" dirty="0"/>
           </a:p>
@@ -28476,7 +25837,7 @@
       </p:sp>
       <p:sp>
         <p:nvSpPr>
-          <p:cNvPr id="92" name="Text 88"/>
+          <p:cNvPr id="20" name="Text 16"/>
           <p:cNvSpPr/>
           <p:nvPr/>
         </p:nvSpPr>
@@ -28515,7 +25876,7 @@
       </p:sp>
       <p:sp>
         <p:nvSpPr>
-          <p:cNvPr id="93" name="Text 89"/>
+          <p:cNvPr id="21" name="Text 17"/>
           <p:cNvSpPr/>
           <p:nvPr/>
         </p:nvSpPr>
@@ -29503,7 +26864,7 @@
                 <a:ea typeface="Calibri" pitchFamily="34" charset="-122"/>
                 <a:cs typeface="Calibri" pitchFamily="34" charset="-120"/>
               </a:rPr>
-              <a:t>249</a:t>
+              <a:t>250</a:t>
             </a:r>
             <a:endParaRPr lang="en-US" sz="1050" dirty="0"/>
           </a:p>
@@ -29542,7 +26903,7 @@
                 <a:ea typeface="Calibri" pitchFamily="34" charset="-122"/>
                 <a:cs typeface="Calibri" pitchFamily="34" charset="-120"/>
               </a:rPr>
-              <a:t>85%</a:t>
+              <a:t>85,3%</a:t>
             </a:r>
             <a:endParaRPr lang="en-US" sz="1050" dirty="0"/>
           </a:p>
@@ -29581,7 +26942,7 @@
                 <a:ea typeface="Calibri" pitchFamily="34" charset="-122"/>
                 <a:cs typeface="Calibri" pitchFamily="34" charset="-120"/>
               </a:rPr>
-              <a:t>44</a:t>
+              <a:t>43</a:t>
             </a:r>
             <a:endParaRPr lang="en-US" sz="1050" dirty="0"/>
           </a:p>
@@ -29620,7 +26981,7 @@
                 <a:ea typeface="Calibri" pitchFamily="34" charset="-122"/>
                 <a:cs typeface="Calibri" pitchFamily="34" charset="-120"/>
               </a:rPr>
-              <a:t>37</a:t>
+              <a:t>42</a:t>
             </a:r>
             <a:endParaRPr lang="en-US" sz="1050" dirty="0"/>
           </a:p>
@@ -30411,7 +27772,7 @@
                 <a:ea typeface="Calibri" pitchFamily="34" charset="-122"/>
                 <a:cs typeface="Calibri" pitchFamily="34" charset="-120"/>
               </a:rPr>
-              <a:t>463</a:t>
+              <a:t>464</a:t>
             </a:r>
             <a:endParaRPr lang="en-US" sz="1050" dirty="0"/>
           </a:p>
@@ -30450,7 +27811,7 @@
                 <a:ea typeface="Calibri" pitchFamily="34" charset="-122"/>
                 <a:cs typeface="Calibri" pitchFamily="34" charset="-120"/>
               </a:rPr>
-              <a:t>91%</a:t>
+              <a:t>91,2%</a:t>
             </a:r>
             <a:endParaRPr lang="en-US" sz="1050" dirty="0"/>
           </a:p>
@@ -30489,7 +27850,7 @@
                 <a:ea typeface="Calibri" pitchFamily="34" charset="-122"/>
                 <a:cs typeface="Calibri" pitchFamily="34" charset="-120"/>
               </a:rPr>
-              <a:t>46</a:t>
+              <a:t>45</a:t>
             </a:r>
             <a:endParaRPr lang="en-US" sz="1050" dirty="0"/>
           </a:p>
@@ -30528,7 +27889,7 @@
                 <a:ea typeface="Calibri" pitchFamily="34" charset="-122"/>
                 <a:cs typeface="Calibri" pitchFamily="34" charset="-120"/>
               </a:rPr>
-              <a:t>39</a:t>
+              <a:t>44</a:t>
             </a:r>
             <a:endParaRPr lang="en-US" sz="1050" dirty="0"/>
           </a:p>
@@ -30940,7 +28301,7 @@
                 <a:ea typeface="Calibri" pitchFamily="34" charset="-122"/>
                 <a:cs typeface="Calibri" pitchFamily="34" charset="-120"/>
               </a:rPr>
-              <a:t>Fuente: Data_NCR07092026.xlsx — hoja «Observaciones» · Corte 07-09-2026 · 509 registros desde 10-02-2023</a:t>
+              <a:t>Fuente: Data_NCR-13092026.xlsx — hoja «Observaciones» · Corte 13-09-2026 · 509 registros desde 10-02-2023</a:t>
             </a:r>
             <a:endParaRPr lang="en-US" sz="850" dirty="0"/>
           </a:p>
@@ -31191,7 +28552,7 @@
                 <a:ea typeface="Calibri" pitchFamily="34" charset="-122"/>
                 <a:cs typeface="Calibri" pitchFamily="34" charset="-120"/>
               </a:rPr>
-              <a:t>De los 46 hallazgos abiertos, 17 llevan más de 180 días desde que se levantaron y 0 más de un año. La mediana de cierre global es de 30 días.</a:t>
+              <a:t>De los 45 hallazgos abiertos, 18 llevan más de 180 días desde que se levantaron y 0 más de un año. La mediana de cierre global es de 30 días.</a:t>
             </a:r>
             <a:endParaRPr lang="en-US" sz="1350" dirty="0"/>
           </a:p>
@@ -31328,7 +28689,7 @@
                 <a:ea typeface="Calibri" pitchFamily="34" charset="-122"/>
                 <a:cs typeface="Calibri" pitchFamily="34" charset="-120"/>
               </a:rPr>
-              <a:t>Al corte hay 39 hallazgos fuera de plazo de los 46 abiertos.</a:t>
+              <a:t>Al corte hay 44 hallazgos fuera de plazo de los 45 abiertos.</a:t>
             </a:r>
             <a:endParaRPr lang="en-US" sz="1150" dirty="0"/>
           </a:p>
@@ -32253,7 +29614,7 @@
                 <a:ea typeface="Calibri" pitchFamily="34" charset="-122"/>
                 <a:cs typeface="Calibri" pitchFamily="34" charset="-120"/>
               </a:rPr>
-              <a:t>132</a:t>
+              <a:t>133</a:t>
             </a:r>
             <a:endParaRPr lang="en-US" sz="1150" dirty="0"/>
           </a:p>
@@ -32370,7 +29731,7 @@
                 <a:ea typeface="Calibri" pitchFamily="34" charset="-122"/>
                 <a:cs typeface="Calibri" pitchFamily="34" charset="-120"/>
               </a:rPr>
-              <a:t>38</a:t>
+              <a:t>37</a:t>
             </a:r>
             <a:endParaRPr lang="en-US" sz="1150" dirty="0"/>
           </a:p>
@@ -32748,7 +30109,7 @@
                 <a:ea typeface="Calibri" pitchFamily="34" charset="-122"/>
                 <a:cs typeface="Calibri" pitchFamily="34" charset="-120"/>
               </a:rPr>
-              <a:t>Fuente: Data_NCR07092026.xlsx — hoja «Observaciones» · Corte 07-09-2026 · 509 registros desde 10-02-2023</a:t>
+              <a:t>Fuente: Data_NCR-13092026.xlsx — hoja «Observaciones» · Corte 13-09-2026 · 509 registros desde 10-02-2023</a:t>
             </a:r>
             <a:endParaRPr lang="en-US" sz="850" dirty="0"/>
           </a:p>
@@ -51349,7 +48710,7 @@
                 <a:ea typeface="Calibri" pitchFamily="34" charset="-122"/>
                 <a:cs typeface="Calibri" pitchFamily="34" charset="-120"/>
               </a:rPr>
-              <a:t>Fuente: Data_NCR07092026.xlsx — hoja «Observaciones» · Corte 07-09-2026 · 509 registros desde 10-02-2023</a:t>
+              <a:t>Fuente: Data_NCR-13092026.xlsx — hoja «Observaciones» · Corte 13-09-2026 · 509 registros desde 10-02-2023</a:t>
             </a:r>
             <a:endParaRPr lang="en-US" sz="850" dirty="0"/>
           </a:p>
@@ -51723,7 +49084,7 @@
                 <a:ea typeface="Calibri" pitchFamily="34" charset="-122"/>
                 <a:cs typeface="Calibri" pitchFamily="34" charset="-120"/>
               </a:rPr>
-              <a:t>38 de los 46 hallazgos abiertos (82,6%) y 77,6% de cierre, contra 91% global. Es la ruta crítica del módulo.</a:t>
+              <a:t>37 de los 45 hallazgos abiertos (82,2%) y 78,2% de cierre, contra 91,2% global. Es la ruta crítica del módulo.</a:t>
             </a:r>
             <a:endParaRPr lang="en-US" sz="1100" dirty="0"/>
           </a:p>
@@ -51965,7 +49326,7 @@
                 <a:ea typeface="Calibri" pitchFamily="34" charset="-122"/>
                 <a:cs typeface="Calibri" pitchFamily="34" charset="-120"/>
               </a:rPr>
-              <a:t>Sacar los 17 hallazgos sobre 180 días</a:t>
+              <a:t>Sacar los 18 hallazgos sobre 180 días</a:t>
             </a:r>
             <a:endParaRPr lang="en-US" sz="1400" dirty="0"/>
           </a:p>
@@ -52007,7 +49368,7 @@
                 <a:ea typeface="Calibri" pitchFamily="34" charset="-122"/>
                 <a:cs typeface="Calibri" pitchFamily="34" charset="-120"/>
               </a:rPr>
-              <a:t>0 de ellos superan el año abiertos. Los tienen a cargo Sin asignar (17). Es deuda antigua que no se cierra sola.</a:t>
+              <a:t>0 de ellos superan el año abiertos. Los tienen a cargo Sin asignar (18). Es deuda antigua que no se cierra sola.</a:t>
             </a:r>
             <a:endParaRPr lang="en-US" sz="1100" dirty="0"/>
           </a:p>
@@ -52107,7 +49468,7 @@
                 <a:ea typeface="Calibri" pitchFamily="34" charset="-122"/>
                 <a:cs typeface="Calibri" pitchFamily="34" charset="-120"/>
               </a:rPr>
-              <a:t>Responder las 39 que pasaron el plazo</a:t>
+              <a:t>Responder las 44 que pasaron el plazo</a:t>
             </a:r>
             <a:endParaRPr lang="en-US" sz="1400" dirty="0"/>
           </a:p>
@@ -52149,7 +49510,7 @@
                 <a:ea typeface="Calibri" pitchFamily="34" charset="-122"/>
                 <a:cs typeface="Calibri" pitchFamily="34" charset="-120"/>
               </a:rPr>
-              <a:t>El plazo es de 10 días desde la emisión y hoy lo incumplen 84,8% de los abiertos. Solo 7 siguen dentro de plazo.</a:t>
+              <a:t>El plazo es de 10 días desde la emisión y hoy lo incumplen 97,8% de los abiertos. Solo 1 siguen dentro de plazo.</a:t>
             </a:r>
             <a:endParaRPr lang="en-US" sz="1100" dirty="0"/>
           </a:p>
@@ -52188,7 +49549,7 @@
                 <a:ea typeface="Calibri" pitchFamily="34" charset="-122"/>
                 <a:cs typeface="Calibri" pitchFamily="34" charset="-120"/>
               </a:rPr>
-              <a:t>Fuente: Data_NCR07092026.xlsx — hoja «Observaciones» · Corte 07-09-2026 · 509 registros desde 10-02-2023</a:t>
+              <a:t>Fuente: Data_NCR-13092026.xlsx — hoja «Observaciones» · Corte 13-09-2026 · 509 registros desde 10-02-2023</a:t>
             </a:r>
             <a:endParaRPr lang="en-US" sz="850" dirty="0"/>
           </a:p>
@@ -52912,7 +50273,7 @@
                 <a:ea typeface="Calibri" pitchFamily="34" charset="-122"/>
                 <a:cs typeface="Calibri" pitchFamily="34" charset="-120"/>
               </a:rPr>
-              <a:t>Corte: 07-09-2026</a:t>
+              <a:t>Corte: 13-09-2026</a:t>
             </a:r>
             <a:endParaRPr lang="en-US" sz="1100" dirty="0"/>
           </a:p>
@@ -52951,7 +50312,7 @@
                 <a:ea typeface="Calibri" pitchFamily="34" charset="-122"/>
                 <a:cs typeface="Calibri" pitchFamily="34" charset="-120"/>
               </a:rPr>
-              <a:t>Fuente: Data_NCR07092026.xlsx — hoja «Observaciones» · Corte 07-09-2026 · 509 registros desde 10-02-2023</a:t>
+              <a:t>Fuente: Data_NCR-13092026.xlsx — hoja «Observaciones» · Corte 13-09-2026 · 509 registros desde 10-02-2023</a:t>
             </a:r>
             <a:endParaRPr lang="en-US" sz="850" dirty="0"/>
           </a:p>

--- a/modulo_nc/Panel_No_Conformidades.pptx
+++ b/modulo_nc/Panel_No_Conformidades.pptx
@@ -220,19 +220,19 @@
                     <c:v>3 sem.</c:v>
                   </c:pt>
                   <c:pt idx="1">
-                    <c:v>10-08</c:v>
+                    <c:v>17-08</c:v>
                   </c:pt>
                   <c:pt idx="2">
-                    <c:v>17-08</c:v>
+                    <c:v>24-08</c:v>
                   </c:pt>
                   <c:pt idx="3">
-                    <c:v>24-08</c:v>
+                    <c:v>31-08</c:v>
                   </c:pt>
                   <c:pt idx="4">
-                    <c:v>31-08</c:v>
+                    <c:v>07-09</c:v>
                   </c:pt>
                   <c:pt idx="5">
-                    <c:v>07-09</c:v>
+                    <c:v>14-09</c:v>
                   </c:pt>
                 </c:lvl>
               </c:multiLvlStrCache>
@@ -248,19 +248,19 @@
                   <c:v>2</c:v>
                 </c:pt>
                 <c:pt idx="1">
+                  <c:v>2</c:v>
+                </c:pt>
+                <c:pt idx="2">
                   <c:v/>
                 </c:pt>
-                <c:pt idx="2">
-                  <c:v>2</c:v>
-                </c:pt>
                 <c:pt idx="3">
-                  <c:v>1</c:v>
+                  <c:v>6</c:v>
                 </c:pt>
                 <c:pt idx="4">
-                  <c:v>7</c:v>
+                  <c:v/>
                 </c:pt>
                 <c:pt idx="5">
-                  <c:v/>
+                  <c:v>4</c:v>
                 </c:pt>
               </c:numCache>
             </c:numRef>
@@ -322,19 +322,19 @@
                     <c:v>3 sem.</c:v>
                   </c:pt>
                   <c:pt idx="1">
-                    <c:v>10-08</c:v>
+                    <c:v>17-08</c:v>
                   </c:pt>
                   <c:pt idx="2">
-                    <c:v>17-08</c:v>
+                    <c:v>24-08</c:v>
                   </c:pt>
                   <c:pt idx="3">
-                    <c:v>24-08</c:v>
+                    <c:v>31-08</c:v>
                   </c:pt>
                   <c:pt idx="4">
-                    <c:v>31-08</c:v>
+                    <c:v>07-09</c:v>
                   </c:pt>
                   <c:pt idx="5">
-                    <c:v>07-09</c:v>
+                    <c:v>14-09</c:v>
                   </c:pt>
                 </c:lvl>
               </c:multiLvlStrCache>
@@ -350,13 +350,13 @@
                   <c:v>6</c:v>
                 </c:pt>
                 <c:pt idx="1">
-                  <c:v>3</c:v>
+                  <c:v>1</c:v>
                 </c:pt>
                 <c:pt idx="2">
                   <c:v>1</c:v>
                 </c:pt>
                 <c:pt idx="3">
-                  <c:v/>
+                  <c:v>1</c:v>
                 </c:pt>
                 <c:pt idx="4">
                   <c:v/>
@@ -734,10 +734,10 @@
                   <c:v>19</c:v>
                 </c:pt>
                 <c:pt idx="1">
-                  <c:v>197</c:v>
+                  <c:v>199</c:v>
                 </c:pt>
                 <c:pt idx="2">
-                  <c:v>77</c:v>
+                  <c:v>79</c:v>
                 </c:pt>
                 <c:pt idx="3">
                   <c:v/>
@@ -1199,13 +1199,13 @@
                 <c:formatCode>General</c:formatCode>
                 <c:ptCount val="4"/>
                 <c:pt idx="0">
-                  <c:v>293</c:v>
+                  <c:v>294</c:v>
                 </c:pt>
                 <c:pt idx="1">
-                  <c:v>121</c:v>
+                  <c:v>122</c:v>
                 </c:pt>
                 <c:pt idx="2">
-                  <c:v>49</c:v>
+                  <c:v>51</c:v>
                 </c:pt>
                 <c:pt idx="3">
                   <c:v>1</c:v>
@@ -1289,13 +1289,13 @@
                 <c:formatCode>General</c:formatCode>
                 <c:ptCount val="4"/>
                 <c:pt idx="0">
-                  <c:v>32</c:v>
+                  <c:v>33</c:v>
                 </c:pt>
                 <c:pt idx="1">
-                  <c:v>2</c:v>
+                  <c:v>3</c:v>
                 </c:pt>
                 <c:pt idx="2">
-                  <c:v>11</c:v>
+                  <c:v>9</c:v>
                 </c:pt>
                 <c:pt idx="3">
                   <c:v/>
@@ -1640,7 +1640,7 @@
                 <c:formatCode>General</c:formatCode>
                 <c:ptCount val="1"/>
                 <c:pt idx="0">
-                  <c:v>3</c:v>
+                  <c:v>5</c:v>
                 </c:pt>
               </c:numCache>
             </c:numRef>
@@ -1712,7 +1712,7 @@
                 <c:formatCode>General</c:formatCode>
                 <c:ptCount val="1"/>
                 <c:pt idx="0">
-                  <c:v>14</c:v>
+                  <c:v>13</c:v>
                 </c:pt>
               </c:numCache>
             </c:numRef>
@@ -1784,7 +1784,7 @@
                 <c:formatCode>General</c:formatCode>
                 <c:ptCount val="1"/>
                 <c:pt idx="0">
-                  <c:v>18</c:v>
+                  <c:v>17</c:v>
                 </c:pt>
               </c:numCache>
             </c:numRef>
@@ -2501,7 +2501,7 @@
                 <c:formatCode>General</c:formatCode>
                 <c:ptCount val="8"/>
                 <c:pt idx="0">
-                  <c:v>142</c:v>
+                  <c:v>144</c:v>
                 </c:pt>
                 <c:pt idx="1">
                   <c:v>25</c:v>
@@ -2615,13 +2615,13 @@
                 <c:formatCode>General</c:formatCode>
                 <c:ptCount val="8"/>
                 <c:pt idx="0">
-                  <c:v>5</c:v>
+                  <c:v>3</c:v>
                 </c:pt>
                 <c:pt idx="1">
                   <c:v>1</c:v>
                 </c:pt>
                 <c:pt idx="2">
-                  <c:v>1</c:v>
+                  <c:v>3</c:v>
                 </c:pt>
                 <c:pt idx="3">
                   <c:v/>
@@ -2825,7 +2825,7 @@
                 </a:solidFill>
                 <a:latin typeface="Calibri"/>
               </a:rPr>
-              <a:t>Especialidades con más hallazgos (8 de 18)</a:t>
+              <a:t>Especialidades con más hallazgos (8 de 19)</a:t>
             </a:r>
           </a:p>
         </c:rich>
@@ -2893,28 +2893,28 @@
                 <c:ptCount val="8"/>
                 <c:lvl>
                   <c:pt idx="0">
-                    <c:v>Sin especialidad</c:v>
+                    <c:v>EXPEDITORÍA</c:v>
                   </c:pt>
                   <c:pt idx="1">
-                    <c:v>EXPEDITORÍA</c:v>
+                    <c:v>OO.CC</c:v>
                   </c:pt>
                   <c:pt idx="2">
-                    <c:v>OO.CC</c:v>
+                    <c:v>MECÁNICA</c:v>
                   </c:pt>
                   <c:pt idx="3">
+                    <c:v>ESTRUCTURA</c:v>
+                  </c:pt>
+                  <c:pt idx="4">
+                    <c:v>PIPING</c:v>
+                  </c:pt>
+                  <c:pt idx="5">
                     <c:v>BODEGA</c:v>
                   </c:pt>
-                  <c:pt idx="4">
+                  <c:pt idx="6">
                     <c:v>SUBCONTRATO</c:v>
                   </c:pt>
-                  <c:pt idx="5">
-                    <c:v>TOPOGRAFÍA</c:v>
-                  </c:pt>
-                  <c:pt idx="6">
-                    <c:v>ESTRUCTURA</c:v>
-                  </c:pt>
                   <c:pt idx="7">
-                    <c:v>LOGÍSTICA</c:v>
+                    <c:v>EE.II</c:v>
                   </c:pt>
                 </c:lvl>
               </c:multiLvlStrCache>
@@ -2927,28 +2927,28 @@
                 <c:formatCode>General</c:formatCode>
                 <c:ptCount val="8"/>
                 <c:pt idx="0">
-                  <c:v>41</c:v>
+                  <c:v>38</c:v>
                 </c:pt>
                 <c:pt idx="1">
-                  <c:v>37</c:v>
+                  <c:v>28</c:v>
                 </c:pt>
                 <c:pt idx="2">
-                  <c:v>15</c:v>
+                  <c:v>13</c:v>
                 </c:pt>
                 <c:pt idx="3">
+                  <c:v>16</c:v>
+                </c:pt>
+                <c:pt idx="4">
+                  <c:v>3</c:v>
+                </c:pt>
+                <c:pt idx="5">
                   <c:v>7</c:v>
                 </c:pt>
-                <c:pt idx="4">
+                <c:pt idx="6">
                   <c:v>6</c:v>
                 </c:pt>
-                <c:pt idx="5">
+                <c:pt idx="7">
                   <c:v>4</c:v>
-                </c:pt>
-                <c:pt idx="6">
-                  <c:v>4</c:v>
-                </c:pt>
-                <c:pt idx="7">
-                  <c:v>3</c:v>
                 </c:pt>
               </c:numCache>
             </c:numRef>
@@ -3007,28 +3007,28 @@
                 <c:ptCount val="8"/>
                 <c:lvl>
                   <c:pt idx="0">
-                    <c:v>Sin especialidad</c:v>
+                    <c:v>EXPEDITORÍA</c:v>
                   </c:pt>
                   <c:pt idx="1">
-                    <c:v>EXPEDITORÍA</c:v>
+                    <c:v>OO.CC</c:v>
                   </c:pt>
                   <c:pt idx="2">
-                    <c:v>OO.CC</c:v>
+                    <c:v>MECÁNICA</c:v>
                   </c:pt>
                   <c:pt idx="3">
+                    <c:v>ESTRUCTURA</c:v>
+                  </c:pt>
+                  <c:pt idx="4">
+                    <c:v>PIPING</c:v>
+                  </c:pt>
+                  <c:pt idx="5">
                     <c:v>BODEGA</c:v>
                   </c:pt>
-                  <c:pt idx="4">
+                  <c:pt idx="6">
                     <c:v>SUBCONTRATO</c:v>
                   </c:pt>
-                  <c:pt idx="5">
-                    <c:v>TOPOGRAFÍA</c:v>
-                  </c:pt>
-                  <c:pt idx="6">
-                    <c:v>ESTRUCTURA</c:v>
-                  </c:pt>
                   <c:pt idx="7">
-                    <c:v>LOGÍSTICA</c:v>
+                    <c:v>EE.II</c:v>
                   </c:pt>
                 </c:lvl>
               </c:multiLvlStrCache>
@@ -3041,19 +3041,19 @@
                 <c:formatCode>General</c:formatCode>
                 <c:ptCount val="8"/>
                 <c:pt idx="0">
-                  <c:v>36</c:v>
+                  <c:v/>
                 </c:pt>
                 <c:pt idx="1">
-                  <c:v/>
+                  <c:v>9</c:v>
                 </c:pt>
                 <c:pt idx="2">
-                  <c:v>1</c:v>
+                  <c:v>13</c:v>
                 </c:pt>
                 <c:pt idx="3">
-                  <c:v/>
+                  <c:v>3</c:v>
                 </c:pt>
                 <c:pt idx="4">
-                  <c:v/>
+                  <c:v>11</c:v>
                 </c:pt>
                 <c:pt idx="5">
                   <c:v/>
@@ -3062,7 +3062,7 @@
                   <c:v/>
                 </c:pt>
                 <c:pt idx="7">
-                  <c:v/>
+                  <c:v>1</c:v>
                 </c:pt>
               </c:numCache>
             </c:numRef>
@@ -5638,7 +5638,7 @@
                 <a:ea typeface="Calibri" pitchFamily="34" charset="-122"/>
                 <a:cs typeface="Calibri" pitchFamily="34" charset="-120"/>
               </a:rPr>
-              <a:t>509 hallazgos levantados entre 10-02-2023 y 03-09-2026 (Desaladora 82 · Talabre 249 · Arqueros 170 · Oficina Central 8).</a:t>
+              <a:t>513 hallazgos levantados entre 10-02-2023 y 16-09-2026 (Desaladora 82 · Talabre 251 · Arqueros 172 · Oficina Central 8).</a:t>
             </a:r>
             <a:endParaRPr lang="en-US" sz="1350" dirty="0"/>
           </a:p>
@@ -6009,7 +6009,7 @@
                 <a:ea typeface="Calibri" pitchFamily="34" charset="-122"/>
                 <a:cs typeface="Calibri" pitchFamily="34" charset="-120"/>
               </a:rPr>
-              <a:t>Corte: 13-09-2026</a:t>
+              <a:t>Corte: 21-09-2026</a:t>
             </a:r>
             <a:endParaRPr lang="en-US" sz="1100" dirty="0"/>
           </a:p>
@@ -6048,7 +6048,7 @@
                 <a:ea typeface="Calibri" pitchFamily="34" charset="-122"/>
                 <a:cs typeface="Calibri" pitchFamily="34" charset="-120"/>
               </a:rPr>
-              <a:t>Fuente: Data_NCR-13092026.xlsx — hoja «Observaciones» · Corte 13-09-2026 · 509 registros desde 10-02-2023</a:t>
+              <a:t>Fuente: Data_NCR-21092026.xlsx — hoja «Observaciones» · Corte 21-09-2026 · 513 registros desde 10-02-2023</a:t>
             </a:r>
             <a:endParaRPr lang="en-US" sz="850" dirty="0"/>
           </a:p>
@@ -7239,7 +7239,7 @@
                 <a:ea typeface="Calibri" pitchFamily="34" charset="-122"/>
                 <a:cs typeface="Calibri" pitchFamily="34" charset="-120"/>
               </a:rPr>
-              <a:t>global del módulo 31,8%</a:t>
+              <a:t>global del módulo 31,5%</a:t>
             </a:r>
             <a:endParaRPr lang="en-US" sz="1000" dirty="0"/>
           </a:p>
@@ -7849,7 +7849,7 @@
                 <a:ea typeface="Calibri" pitchFamily="34" charset="-122"/>
                 <a:cs typeface="Calibri" pitchFamily="34" charset="-120"/>
               </a:rPr>
-              <a:t>Fuente: Data_NCR-13092026.xlsx — hoja «Observaciones» · Corte 13-09-2026 · 509 registros desde 10-02-2023</a:t>
+              <a:t>Fuente: Data_NCR-21092026.xlsx — hoja «Observaciones» · Corte 21-09-2026 · 513 registros desde 10-02-2023</a:t>
             </a:r>
             <a:endParaRPr lang="en-US" sz="850" dirty="0"/>
           </a:p>
@@ -8708,7 +8708,7 @@
                 <a:ea typeface="Calibri" pitchFamily="34" charset="-122"/>
                 <a:cs typeface="Calibri" pitchFamily="34" charset="-120"/>
               </a:rPr>
-              <a:t>124</a:t>
+              <a:t>132</a:t>
             </a:r>
             <a:endParaRPr lang="en-US" sz="1050" dirty="0"/>
           </a:p>
@@ -8831,7 +8831,7 @@
                 <a:ea typeface="Calibri" pitchFamily="34" charset="-122"/>
                 <a:cs typeface="Calibri" pitchFamily="34" charset="-120"/>
               </a:rPr>
-              <a:t>SEMANA 07-09-2026 — 13-09-2026</a:t>
+              <a:t>SEMANA 14-09-2026 — 20-09-2026</a:t>
             </a:r>
             <a:endParaRPr lang="en-US" sz="1000" dirty="0"/>
           </a:p>
@@ -8909,7 +8909,7 @@
                 <a:ea typeface="Calibri" pitchFamily="34" charset="-122"/>
                 <a:cs typeface="Calibri" pitchFamily="34" charset="-120"/>
               </a:rPr>
-              <a:t>Fuente: Data_NCR-13092026.xlsx — hoja «Observaciones» · Corte 13-09-2026 · 509 registros desde 10-02-2023</a:t>
+              <a:t>Fuente: Data_NCR-21092026.xlsx — hoja «Observaciones» · Corte 21-09-2026 · 513 registros desde 10-02-2023</a:t>
             </a:r>
             <a:endParaRPr lang="en-US" sz="850" dirty="0"/>
           </a:p>
@@ -9262,7 +9262,7 @@
                 <a:ea typeface="Calibri" pitchFamily="34" charset="-122"/>
                 <a:cs typeface="Calibri" pitchFamily="34" charset="-120"/>
               </a:rPr>
-              <a:t>249 hallazgos levantados · 52 internas · 197 del cliente · 12 especialidades involucradas.</a:t>
+              <a:t>251 hallazgos levantados · 52 internas · 199 del cliente · 12 especialidades involucradas.</a:t>
             </a:r>
             <a:endParaRPr lang="en-US" sz="1350" dirty="0"/>
           </a:p>
@@ -9555,7 +9555,7 @@
                 <a:ea typeface="Cambria" pitchFamily="34" charset="-122"/>
                 <a:cs typeface="Cambria" pitchFamily="34" charset="-120"/>
               </a:rPr>
-              <a:t>20,9%</a:t>
+              <a:t>20,7%</a:t>
             </a:r>
             <a:endParaRPr lang="en-US" sz="3400" dirty="0"/>
           </a:p>
@@ -9633,7 +9633,7 @@
                 <a:ea typeface="Calibri" pitchFamily="34" charset="-122"/>
                 <a:cs typeface="Calibri" pitchFamily="34" charset="-120"/>
               </a:rPr>
-              <a:t>Corte: 13-09-2026</a:t>
+              <a:t>Corte: 21-09-2026</a:t>
             </a:r>
             <a:endParaRPr lang="en-US" sz="1100" dirty="0"/>
           </a:p>
@@ -9672,7 +9672,7 @@
                 <a:ea typeface="Calibri" pitchFamily="34" charset="-122"/>
                 <a:cs typeface="Calibri" pitchFamily="34" charset="-120"/>
               </a:rPr>
-              <a:t>Fuente: Data_NCR-13092026.xlsx — hoja «Observaciones» · Corte 13-09-2026 · 509 registros desde 10-02-2023</a:t>
+              <a:t>Fuente: Data_NCR-21092026.xlsx — hoja «Observaciones» · Corte 21-09-2026 · 513 registros desde 10-02-2023</a:t>
             </a:r>
             <a:endParaRPr lang="en-US" sz="850" dirty="0"/>
           </a:p>
@@ -9938,7 +9938,7 @@
                 <a:ea typeface="Cambria" pitchFamily="34" charset="-122"/>
                 <a:cs typeface="Cambria" pitchFamily="34" charset="-120"/>
               </a:rPr>
-              <a:t>249</a:t>
+              <a:t>251</a:t>
             </a:r>
             <a:endParaRPr lang="en-US" sz="4000" dirty="0"/>
           </a:p>
@@ -9977,7 +9977,7 @@
                 <a:ea typeface="Calibri" pitchFamily="34" charset="-122"/>
                 <a:cs typeface="Calibri" pitchFamily="34" charset="-120"/>
               </a:rPr>
-              <a:t>242 cerrados</a:t>
+              <a:t>244 cerrados</a:t>
             </a:r>
             <a:endParaRPr lang="en-US" sz="1400" dirty="0"/>
           </a:p>
@@ -10055,7 +10055,7 @@
                 <a:ea typeface="Calibri" pitchFamily="34" charset="-122"/>
                 <a:cs typeface="Calibri" pitchFamily="34" charset="-120"/>
               </a:rPr>
-              <a:t>52 internas · 197 del cliente</a:t>
+              <a:t>52 internas · 199 del cliente</a:t>
             </a:r>
             <a:endParaRPr lang="en-US" sz="950" dirty="0"/>
           </a:p>
@@ -10187,7 +10187,7 @@
                 <a:ea typeface="Calibri" pitchFamily="34" charset="-122"/>
                 <a:cs typeface="Calibri" pitchFamily="34" charset="-120"/>
               </a:rPr>
-              <a:t>242/249</a:t>
+              <a:t>244/251</a:t>
             </a:r>
             <a:endParaRPr lang="en-US" sz="1400" dirty="0"/>
           </a:p>
@@ -10475,7 +10475,7 @@
                 <a:ea typeface="Calibri" pitchFamily="34" charset="-122"/>
                 <a:cs typeface="Calibri" pitchFamily="34" charset="-120"/>
               </a:rPr>
-              <a:t>6 iniciado · 1 listo para revisión</a:t>
+              <a:t>5 iniciado · 2 listo para revisión</a:t>
             </a:r>
             <a:endParaRPr lang="en-US" sz="950" dirty="0"/>
           </a:p>
@@ -10801,7 +10801,7 @@
                 <a:ea typeface="Cambria" pitchFamily="34" charset="-122"/>
                 <a:cs typeface="Cambria" pitchFamily="34" charset="-120"/>
               </a:rPr>
-              <a:t>20,9%</a:t>
+              <a:t>20,7%</a:t>
             </a:r>
             <a:endParaRPr lang="en-US" sz="2600" dirty="0"/>
           </a:p>
@@ -10863,7 +10863,7 @@
                 <a:ea typeface="Calibri" pitchFamily="34" charset="-122"/>
                 <a:cs typeface="Calibri" pitchFamily="34" charset="-120"/>
               </a:rPr>
-              <a:t>global del módulo 31,8%</a:t>
+              <a:t>global del módulo 31,5%</a:t>
             </a:r>
             <a:endParaRPr lang="en-US" sz="1000" dirty="0"/>
           </a:p>
@@ -11160,7 +11160,7 @@
                 <a:ea typeface="Cambria" pitchFamily="34" charset="-122"/>
                 <a:cs typeface="Cambria" pitchFamily="34" charset="-120"/>
               </a:rPr>
-              <a:t>197</a:t>
+              <a:t>199</a:t>
             </a:r>
             <a:endParaRPr lang="en-US" sz="1600" dirty="0"/>
           </a:p>
@@ -11199,7 +11199,7 @@
                 <a:ea typeface="Calibri" pitchFamily="34" charset="-122"/>
                 <a:cs typeface="Calibri" pitchFamily="34" charset="-120"/>
               </a:rPr>
-              <a:t>Fuente: Data_NCR-13092026.xlsx — hoja «Observaciones» · Corte 13-09-2026 · 509 registros desde 10-02-2023</a:t>
+              <a:t>Fuente: Data_NCR-21092026.xlsx — hoja «Observaciones» · Corte 21-09-2026 · 513 registros desde 10-02-2023</a:t>
             </a:r>
             <a:endParaRPr lang="en-US" sz="850" dirty="0"/>
           </a:p>
@@ -11450,7 +11450,7 @@
                 <a:ea typeface="Calibri" pitchFamily="34" charset="-122"/>
                 <a:cs typeface="Calibri" pitchFamily="34" charset="-120"/>
               </a:rPr>
-              <a:t>7 hallazgos siguen abiertos; 0 con más de 180 días. Se listan del más antiguo al más reciente.</a:t>
+              <a:t>7 hallazgos siguen abiertos; 1 con más de 180 días. Se listan del más antiguo al más reciente.</a:t>
             </a:r>
             <a:endParaRPr lang="en-US" sz="1350" dirty="0"/>
           </a:p>
@@ -12050,15 +12050,15 @@
               <a:buNone/>
             </a:pPr>
             <a:r>
-              <a:rPr lang="en-US" sz="1050" dirty="0">
-                <a:solidFill>
-                  <a:srgbClr val="1A2433"/>
-                </a:solidFill>
-                <a:latin typeface="Calibri" pitchFamily="34" charset="0"/>
-                <a:ea typeface="Calibri" pitchFamily="34" charset="-122"/>
-                <a:cs typeface="Calibri" pitchFamily="34" charset="-120"/>
-              </a:rPr>
-              <a:t>174</a:t>
+              <a:rPr lang="en-US" sz="1050" b="1" dirty="0">
+                <a:solidFill>
+                  <a:srgbClr val="C0392B"/>
+                </a:solidFill>
+                <a:latin typeface="Calibri" pitchFamily="34" charset="0"/>
+                <a:ea typeface="Calibri" pitchFamily="34" charset="-122"/>
+                <a:cs typeface="Calibri" pitchFamily="34" charset="-120"/>
+              </a:rPr>
+              <a:t>182</a:t>
             </a:r>
             <a:endParaRPr lang="en-US" sz="1050" dirty="0"/>
           </a:p>
@@ -12413,7 +12413,7 @@
                 <a:ea typeface="Calibri" pitchFamily="34" charset="-122"/>
                 <a:cs typeface="Calibri" pitchFamily="34" charset="-120"/>
               </a:rPr>
-              <a:t>75</a:t>
+              <a:t>83</a:t>
             </a:r>
             <a:endParaRPr lang="en-US" sz="1050" dirty="0"/>
           </a:p>
@@ -12748,7 +12748,7 @@
                 <a:ea typeface="Calibri" pitchFamily="34" charset="-122"/>
                 <a:cs typeface="Calibri" pitchFamily="34" charset="-120"/>
               </a:rPr>
-              <a:t>47</a:t>
+              <a:t>55</a:t>
             </a:r>
             <a:endParaRPr lang="en-US" sz="1050" dirty="0"/>
           </a:p>
@@ -13103,7 +13103,7 @@
                 <a:ea typeface="Calibri" pitchFamily="34" charset="-122"/>
                 <a:cs typeface="Calibri" pitchFamily="34" charset="-120"/>
               </a:rPr>
-              <a:t>25</a:t>
+              <a:t>33</a:t>
             </a:r>
             <a:endParaRPr lang="en-US" sz="1050" dirty="0"/>
           </a:p>
@@ -13399,7 +13399,7 @@
                 <a:ea typeface="Calibri" pitchFamily="34" charset="-122"/>
                 <a:cs typeface="Calibri" pitchFamily="34" charset="-120"/>
               </a:rPr>
-              <a:t>Iniciado</a:t>
+              <a:t>Listo para revisi…</a:t>
             </a:r>
             <a:endParaRPr lang="en-US" sz="1050" dirty="0"/>
           </a:p>
@@ -13438,7 +13438,7 @@
                 <a:ea typeface="Calibri" pitchFamily="34" charset="-122"/>
                 <a:cs typeface="Calibri" pitchFamily="34" charset="-120"/>
               </a:rPr>
-              <a:t>25</a:t>
+              <a:t>33</a:t>
             </a:r>
             <a:endParaRPr lang="en-US" sz="1050" dirty="0"/>
           </a:p>
@@ -13559,7 +13559,7 @@
                 <a:ea typeface="Calibri" pitchFamily="34" charset="-122"/>
                 <a:cs typeface="Calibri" pitchFamily="34" charset="-120"/>
               </a:rPr>
-              <a:t>249</a:t>
+              <a:t>251</a:t>
             </a:r>
             <a:endParaRPr lang="en-US" sz="1050" dirty="0"/>
           </a:p>
@@ -13676,7 +13676,7 @@
                 <a:ea typeface="Calibri" pitchFamily="34" charset="-122"/>
                 <a:cs typeface="Calibri" pitchFamily="34" charset="-120"/>
               </a:rPr>
-              <a:t>OO.CC</a:t>
+              <a:t>PIPING</a:t>
             </a:r>
             <a:endParaRPr lang="en-US" sz="1050" dirty="0"/>
           </a:p>
@@ -13715,7 +13715,7 @@
                 <a:ea typeface="Calibri" pitchFamily="34" charset="-122"/>
                 <a:cs typeface="Calibri" pitchFamily="34" charset="-120"/>
               </a:rPr>
-              <a:t>Mauricio Rocha A.</a:t>
+              <a:t>Oscar Nahuel P.</a:t>
             </a:r>
             <a:endParaRPr lang="en-US" sz="1050" dirty="0"/>
           </a:p>
@@ -13793,7 +13793,7 @@
                 <a:ea typeface="Calibri" pitchFamily="34" charset="-122"/>
                 <a:cs typeface="Calibri" pitchFamily="34" charset="-120"/>
               </a:rPr>
-              <a:t>20</a:t>
+              <a:t>6</a:t>
             </a:r>
             <a:endParaRPr lang="en-US" sz="1050" dirty="0"/>
           </a:p>
@@ -13832,7 +13832,7 @@
                 <a:ea typeface="Calibri" pitchFamily="34" charset="-122"/>
                 <a:cs typeface="Calibri" pitchFamily="34" charset="-120"/>
               </a:rPr>
-              <a:t>Se evidencia daño físico en la geom…</a:t>
+              <a:t>Filtración de agua considerable en …</a:t>
             </a:r>
             <a:endParaRPr lang="en-US" sz="1000" dirty="0"/>
           </a:p>
@@ -13894,7 +13894,7 @@
                 <a:ea typeface="Calibri" pitchFamily="34" charset="-122"/>
                 <a:cs typeface="Calibri" pitchFamily="34" charset="-120"/>
               </a:rPr>
-              <a:t>250</a:t>
+              <a:t>252</a:t>
             </a:r>
             <a:endParaRPr lang="en-US" sz="1050" dirty="0"/>
           </a:p>
@@ -13933,7 +13933,7 @@
                 <a:ea typeface="Calibri" pitchFamily="34" charset="-122"/>
                 <a:cs typeface="Calibri" pitchFamily="34" charset="-120"/>
               </a:rPr>
-              <a:t>No Conformidad</a:t>
+              <a:t>Producto No Conforme</a:t>
             </a:r>
             <a:endParaRPr lang="en-US" sz="1050" dirty="0"/>
           </a:p>
@@ -14011,7 +14011,7 @@
                 <a:ea typeface="Calibri" pitchFamily="34" charset="-122"/>
                 <a:cs typeface="Calibri" pitchFamily="34" charset="-120"/>
               </a:rPr>
-              <a:t>OO.CC</a:t>
+              <a:t>PIPING</a:t>
             </a:r>
             <a:endParaRPr lang="en-US" sz="1050" dirty="0"/>
           </a:p>
@@ -14050,7 +14050,7 @@
                 <a:ea typeface="Calibri" pitchFamily="34" charset="-122"/>
                 <a:cs typeface="Calibri" pitchFamily="34" charset="-120"/>
               </a:rPr>
-              <a:t>Daniel Ramirez B.</a:t>
+              <a:t>Oscar Nahuel P.</a:t>
             </a:r>
             <a:endParaRPr lang="en-US" sz="1050" dirty="0"/>
           </a:p>
@@ -14128,7 +14128,7 @@
                 <a:ea typeface="Calibri" pitchFamily="34" charset="-122"/>
                 <a:cs typeface="Calibri" pitchFamily="34" charset="-120"/>
               </a:rPr>
-              <a:t>10</a:t>
+              <a:t>5</a:t>
             </a:r>
             <a:endParaRPr lang="en-US" sz="1050" dirty="0"/>
           </a:p>
@@ -14167,7 +14167,7 @@
                 <a:ea typeface="Calibri" pitchFamily="34" charset="-122"/>
                 <a:cs typeface="Calibri" pitchFamily="34" charset="-120"/>
               </a:rPr>
-              <a:t>Determinadas actas de liberación y …</a:t>
+              <a:t>Filtración en la unión mecánica que…</a:t>
             </a:r>
             <a:endParaRPr lang="en-US" sz="1000" dirty="0"/>
           </a:p>
@@ -14213,7 +14213,7 @@
             </a:avLst>
           </a:prstGeom>
           <a:solidFill>
-            <a:srgbClr val="E9EDF2"/>
+            <a:srgbClr val="12233B"/>
           </a:solidFill>
           <a:ln/>
         </p:spPr>
@@ -14245,13 +14245,13 @@
             <a:r>
               <a:rPr lang="en-US" sz="1000" b="1" spc="100" kern="0" dirty="0">
                 <a:solidFill>
-                  <a:srgbClr val="56606E"/>
-                </a:solidFill>
-                <a:latin typeface="Calibri" pitchFamily="34" charset="0"/>
-                <a:ea typeface="Calibri" pitchFamily="34" charset="-122"/>
-                <a:cs typeface="Calibri" pitchFamily="34" charset="-120"/>
-              </a:rPr>
-              <a:t>SEMANA 07-09-2026 — 13-09-2026</a:t>
+                  <a:srgbClr val="E3A55B"/>
+                </a:solidFill>
+                <a:latin typeface="Calibri" pitchFamily="34" charset="0"/>
+                <a:ea typeface="Calibri" pitchFamily="34" charset="-122"/>
+                <a:cs typeface="Calibri" pitchFamily="34" charset="-120"/>
+              </a:rPr>
+              <a:t>SEMANA 14-09-2026 — 20-09-2026</a:t>
             </a:r>
             <a:endParaRPr lang="en-US" sz="1000" dirty="0"/>
           </a:p>
@@ -14284,13 +14284,13 @@
             <a:r>
               <a:rPr lang="en-US" sz="1150" dirty="0">
                 <a:solidFill>
-                  <a:srgbClr val="56606E"/>
-                </a:solidFill>
-                <a:latin typeface="Calibri" pitchFamily="34" charset="0"/>
-                <a:ea typeface="Calibri" pitchFamily="34" charset="-122"/>
-                <a:cs typeface="Calibri" pitchFamily="34" charset="-120"/>
-              </a:rPr>
-              <a:t>Sin hallazgos nuevos en el período.</a:t>
+                  <a:srgbClr val="FFFFFF"/>
+                </a:solidFill>
+                <a:latin typeface="Calibri" pitchFamily="34" charset="0"/>
+                <a:ea typeface="Calibri" pitchFamily="34" charset="-122"/>
+                <a:cs typeface="Calibri" pitchFamily="34" charset="-120"/>
+              </a:rPr>
+              <a:t>2 hallazgos nuevos · 0 internas · 2 del cliente · PIPING 2 · 2 siguen abiertos</a:t>
             </a:r>
             <a:endParaRPr lang="en-US" sz="1150" dirty="0"/>
           </a:p>
@@ -14329,7 +14329,7 @@
                 <a:ea typeface="Calibri" pitchFamily="34" charset="-122"/>
                 <a:cs typeface="Calibri" pitchFamily="34" charset="-120"/>
               </a:rPr>
-              <a:t>Fuente: Data_NCR-13092026.xlsx — hoja «Observaciones» · Corte 13-09-2026 · 509 registros desde 10-02-2023</a:t>
+              <a:t>Fuente: Data_NCR-21092026.xlsx — hoja «Observaciones» · Corte 21-09-2026 · 513 registros desde 10-02-2023</a:t>
             </a:r>
             <a:endParaRPr lang="en-US" sz="850" dirty="0"/>
           </a:p>
@@ -14682,7 +14682,7 @@
                 <a:ea typeface="Calibri" pitchFamily="34" charset="-122"/>
                 <a:cs typeface="Calibri" pitchFamily="34" charset="-120"/>
               </a:rPr>
-              <a:t>170 hallazgos levantados · 53 internas · 77 del cliente · 40 de subcontrato · 18 especialidades involucradas.</a:t>
+              <a:t>172 hallazgos levantados · 53 internas · 79 del cliente · 40 de subcontrato · 19 especialidades involucradas.</a:t>
             </a:r>
             <a:endParaRPr lang="en-US" sz="1350" dirty="0"/>
           </a:p>
@@ -14741,7 +14741,7 @@
                 <a:ea typeface="Cambria" pitchFamily="34" charset="-122"/>
                 <a:cs typeface="Cambria" pitchFamily="34" charset="-120"/>
               </a:rPr>
-              <a:t>78,2%</a:t>
+              <a:t>78,5%</a:t>
             </a:r>
             <a:endParaRPr lang="en-US" sz="3400" dirty="0"/>
           </a:p>
@@ -14897,7 +14897,7 @@
                 <a:ea typeface="Cambria" pitchFamily="34" charset="-122"/>
                 <a:cs typeface="Cambria" pitchFamily="34" charset="-120"/>
               </a:rPr>
-              <a:t>139 d</a:t>
+              <a:t>140 d</a:t>
             </a:r>
             <a:endParaRPr lang="en-US" sz="3400" dirty="0"/>
           </a:p>
@@ -14975,7 +14975,7 @@
                 <a:ea typeface="Cambria" pitchFamily="34" charset="-122"/>
                 <a:cs typeface="Cambria" pitchFamily="34" charset="-120"/>
               </a:rPr>
-              <a:t>31,2%</a:t>
+              <a:t>30,8%</a:t>
             </a:r>
             <a:endParaRPr lang="en-US" sz="3400" dirty="0"/>
           </a:p>
@@ -15053,7 +15053,7 @@
                 <a:ea typeface="Calibri" pitchFamily="34" charset="-122"/>
                 <a:cs typeface="Calibri" pitchFamily="34" charset="-120"/>
               </a:rPr>
-              <a:t>Corte: 13-09-2026</a:t>
+              <a:t>Corte: 21-09-2026</a:t>
             </a:r>
             <a:endParaRPr lang="en-US" sz="1100" dirty="0"/>
           </a:p>
@@ -15092,7 +15092,7 @@
                 <a:ea typeface="Calibri" pitchFamily="34" charset="-122"/>
                 <a:cs typeface="Calibri" pitchFamily="34" charset="-120"/>
               </a:rPr>
-              <a:t>Fuente: Data_NCR-13092026.xlsx — hoja «Observaciones» · Corte 13-09-2026 · 509 registros desde 10-02-2023</a:t>
+              <a:t>Fuente: Data_NCR-21092026.xlsx — hoja «Observaciones» · Corte 21-09-2026 · 513 registros desde 10-02-2023</a:t>
             </a:r>
             <a:endParaRPr lang="en-US" sz="850" dirty="0"/>
           </a:p>
@@ -15358,7 +15358,7 @@
                 <a:ea typeface="Cambria" pitchFamily="34" charset="-122"/>
                 <a:cs typeface="Cambria" pitchFamily="34" charset="-120"/>
               </a:rPr>
-              <a:t>170</a:t>
+              <a:t>172</a:t>
             </a:r>
             <a:endParaRPr lang="en-US" sz="4000" dirty="0"/>
           </a:p>
@@ -15397,7 +15397,7 @@
                 <a:ea typeface="Calibri" pitchFamily="34" charset="-122"/>
                 <a:cs typeface="Calibri" pitchFamily="34" charset="-120"/>
               </a:rPr>
-              <a:t>133 cerrados</a:t>
+              <a:t>135 cerrados</a:t>
             </a:r>
             <a:endParaRPr lang="en-US" sz="1400" dirty="0"/>
           </a:p>
@@ -15475,7 +15475,7 @@
                 <a:ea typeface="Calibri" pitchFamily="34" charset="-122"/>
                 <a:cs typeface="Calibri" pitchFamily="34" charset="-120"/>
               </a:rPr>
-              <a:t>53 internas · 77 del cliente · 40 de subcontrato</a:t>
+              <a:t>53 internas · 79 del cliente · 40 de subcontrato</a:t>
             </a:r>
             <a:endParaRPr lang="en-US" sz="950" dirty="0"/>
           </a:p>
@@ -15568,7 +15568,7 @@
                 <a:ea typeface="Cambria" pitchFamily="34" charset="-122"/>
                 <a:cs typeface="Cambria" pitchFamily="34" charset="-120"/>
               </a:rPr>
-              <a:t>78,2%</a:t>
+              <a:t>78,5%</a:t>
             </a:r>
             <a:endParaRPr lang="en-US" sz="4000" dirty="0"/>
           </a:p>
@@ -15607,7 +15607,7 @@
                 <a:ea typeface="Calibri" pitchFamily="34" charset="-122"/>
                 <a:cs typeface="Calibri" pitchFamily="34" charset="-120"/>
               </a:rPr>
-              <a:t>133/170</a:t>
+              <a:t>135/172</a:t>
             </a:r>
             <a:endParaRPr lang="en-US" sz="1400" dirty="0"/>
           </a:p>
@@ -15895,7 +15895,7 @@
                 <a:ea typeface="Calibri" pitchFamily="34" charset="-122"/>
                 <a:cs typeface="Calibri" pitchFamily="34" charset="-120"/>
               </a:rPr>
-              <a:t>1 iniciado · 25 listo para revisión · 9 stand by · 1 observada · 1 pendiente</a:t>
+              <a:t>1 iniciado · 28 listo para revisión · 6 stand by · 1 observada · 1 pendiente</a:t>
             </a:r>
             <a:endParaRPr lang="en-US" sz="950" dirty="0"/>
           </a:p>
@@ -15988,7 +15988,7 @@
                 <a:ea typeface="Cambria" pitchFamily="34" charset="-122"/>
                 <a:cs typeface="Cambria" pitchFamily="34" charset="-120"/>
               </a:rPr>
-              <a:t>139</a:t>
+              <a:t>140</a:t>
             </a:r>
             <a:endParaRPr lang="en-US" sz="4000" dirty="0"/>
           </a:p>
@@ -16221,7 +16221,7 @@
                 <a:ea typeface="Cambria" pitchFamily="34" charset="-122"/>
                 <a:cs typeface="Cambria" pitchFamily="34" charset="-120"/>
               </a:rPr>
-              <a:t>31,2%</a:t>
+              <a:t>30,8%</a:t>
             </a:r>
             <a:endParaRPr lang="en-US" sz="2600" dirty="0"/>
           </a:p>
@@ -16283,7 +16283,7 @@
                 <a:ea typeface="Calibri" pitchFamily="34" charset="-122"/>
                 <a:cs typeface="Calibri" pitchFamily="34" charset="-120"/>
               </a:rPr>
-              <a:t>global del módulo 31,8%</a:t>
+              <a:t>global del módulo 31,5%</a:t>
             </a:r>
             <a:endParaRPr lang="en-US" sz="1000" dirty="0"/>
           </a:p>
@@ -16580,7 +16580,7 @@
                 <a:ea typeface="Cambria" pitchFamily="34" charset="-122"/>
                 <a:cs typeface="Cambria" pitchFamily="34" charset="-120"/>
               </a:rPr>
-              <a:t>77</a:t>
+              <a:t>79</a:t>
             </a:r>
             <a:endParaRPr lang="en-US" sz="1600" dirty="0"/>
           </a:p>
@@ -16756,7 +16756,7 @@
                 <a:ea typeface="Calibri" pitchFamily="34" charset="-122"/>
                 <a:cs typeface="Calibri" pitchFamily="34" charset="-120"/>
               </a:rPr>
-              <a:t>Fuente: Data_NCR-13092026.xlsx — hoja «Observaciones» · Corte 13-09-2026 · 509 registros desde 10-02-2023</a:t>
+              <a:t>Fuente: Data_NCR-21092026.xlsx — hoja «Observaciones» · Corte 21-09-2026 · 513 registros desde 10-02-2023</a:t>
             </a:r>
             <a:endParaRPr lang="en-US" sz="850" dirty="0"/>
           </a:p>
@@ -17007,7 +17007,7 @@
                 <a:ea typeface="Calibri" pitchFamily="34" charset="-122"/>
                 <a:cs typeface="Calibri" pitchFamily="34" charset="-120"/>
               </a:rPr>
-              <a:t>37 hallazgos siguen abiertos; 18 con más de 180 días. Se listan del más antiguo al más reciente.</a:t>
+              <a:t>37 hallazgos siguen abiertos; 16 con más de 180 días. Se listan del más antiguo al más reciente.</a:t>
             </a:r>
             <a:endParaRPr lang="en-US" sz="1350" dirty="0"/>
           </a:p>
@@ -17498,7 +17498,7 @@
                 <a:ea typeface="Calibri" pitchFamily="34" charset="-122"/>
                 <a:cs typeface="Calibri" pitchFamily="34" charset="-120"/>
               </a:rPr>
-              <a:t>Sin especialidad</a:t>
+              <a:t>OO.CC</a:t>
             </a:r>
             <a:endParaRPr lang="en-US" sz="1050" dirty="0"/>
           </a:p>
@@ -17615,7 +17615,7 @@
                 <a:ea typeface="Calibri" pitchFamily="34" charset="-122"/>
                 <a:cs typeface="Calibri" pitchFamily="34" charset="-120"/>
               </a:rPr>
-              <a:t>332</a:t>
+              <a:t>340</a:t>
             </a:r>
             <a:endParaRPr lang="en-US" sz="1050" dirty="0"/>
           </a:p>
@@ -17853,7 +17853,7 @@
                 <a:ea typeface="Calibri" pitchFamily="34" charset="-122"/>
                 <a:cs typeface="Calibri" pitchFamily="34" charset="-120"/>
               </a:rPr>
-              <a:t>Sin especialidad</a:t>
+              <a:t>OO.CC</a:t>
             </a:r>
             <a:endParaRPr lang="en-US" sz="1050" dirty="0"/>
           </a:p>
@@ -17970,7 +17970,7 @@
                 <a:ea typeface="Calibri" pitchFamily="34" charset="-122"/>
                 <a:cs typeface="Calibri" pitchFamily="34" charset="-120"/>
               </a:rPr>
-              <a:t>332</a:t>
+              <a:t>340</a:t>
             </a:r>
             <a:endParaRPr lang="en-US" sz="1050" dirty="0"/>
           </a:p>
@@ -18071,7 +18071,7 @@
                 <a:ea typeface="Calibri" pitchFamily="34" charset="-122"/>
                 <a:cs typeface="Calibri" pitchFamily="34" charset="-120"/>
               </a:rPr>
-              <a:t>MASA-28</a:t>
+              <a:t>MASA-37</a:t>
             </a:r>
             <a:endParaRPr lang="en-US" sz="1050" dirty="0"/>
           </a:p>
@@ -18110,7 +18110,7 @@
                 <a:ea typeface="Calibri" pitchFamily="34" charset="-122"/>
                 <a:cs typeface="Calibri" pitchFamily="34" charset="-120"/>
               </a:rPr>
-              <a:t>Observación</a:t>
+              <a:t>No Conformidad</a:t>
             </a:r>
             <a:endParaRPr lang="en-US" sz="1050" dirty="0"/>
           </a:p>
@@ -18188,7 +18188,7 @@
                 <a:ea typeface="Calibri" pitchFamily="34" charset="-122"/>
                 <a:cs typeface="Calibri" pitchFamily="34" charset="-120"/>
               </a:rPr>
-              <a:t>Sin especialidad</a:t>
+              <a:t>MECÁNICA</a:t>
             </a:r>
             <a:endParaRPr lang="en-US" sz="1050" dirty="0"/>
           </a:p>
@@ -18305,7 +18305,7 @@
                 <a:ea typeface="Calibri" pitchFamily="34" charset="-122"/>
                 <a:cs typeface="Calibri" pitchFamily="34" charset="-120"/>
               </a:rPr>
-              <a:t>311</a:t>
+              <a:t>278</a:t>
             </a:r>
             <a:endParaRPr lang="en-US" sz="1050" dirty="0"/>
           </a:p>
@@ -18344,7 +18344,7 @@
                 <a:ea typeface="Calibri" pitchFamily="34" charset="-122"/>
                 <a:cs typeface="Calibri" pitchFamily="34" charset="-120"/>
               </a:rPr>
-              <a:t>Cámara 3700-MH-002, salida sala elé…</a:t>
+              <a:t>Tolerancia transversal en chutes de…</a:t>
             </a:r>
             <a:endParaRPr lang="en-US" sz="1000" dirty="0"/>
           </a:p>
@@ -18426,7 +18426,7 @@
                 <a:ea typeface="Calibri" pitchFamily="34" charset="-122"/>
                 <a:cs typeface="Calibri" pitchFamily="34" charset="-120"/>
               </a:rPr>
-              <a:t>MASA-30</a:t>
+              <a:t>MASA-42</a:t>
             </a:r>
             <a:endParaRPr lang="en-US" sz="1050" dirty="0"/>
           </a:p>
@@ -18543,7 +18543,7 @@
                 <a:ea typeface="Calibri" pitchFamily="34" charset="-122"/>
                 <a:cs typeface="Calibri" pitchFamily="34" charset="-120"/>
               </a:rPr>
-              <a:t>Sin especialidad</a:t>
+              <a:t>OO.CC</a:t>
             </a:r>
             <a:endParaRPr lang="en-US" sz="1050" dirty="0"/>
           </a:p>
@@ -18660,7 +18660,7 @@
                 <a:ea typeface="Calibri" pitchFamily="34" charset="-122"/>
                 <a:cs typeface="Calibri" pitchFamily="34" charset="-120"/>
               </a:rPr>
-              <a:t>307</a:t>
+              <a:t>249</a:t>
             </a:r>
             <a:endParaRPr lang="en-US" sz="1050" dirty="0"/>
           </a:p>
@@ -18699,7 +18699,7 @@
                 <a:ea typeface="Calibri" pitchFamily="34" charset="-122"/>
                 <a:cs typeface="Calibri" pitchFamily="34" charset="-120"/>
               </a:rPr>
-              <a:t>Fundaciones faltantes para apoyo de…</a:t>
+              <a:t>Estructura de correa 2100-CV-001 mo…</a:t>
             </a:r>
             <a:endParaRPr lang="en-US" sz="1000" dirty="0"/>
           </a:p>
@@ -18761,7 +18761,7 @@
                 <a:ea typeface="Calibri" pitchFamily="34" charset="-122"/>
                 <a:cs typeface="Calibri" pitchFamily="34" charset="-120"/>
               </a:rPr>
-              <a:t>MASA-37</a:t>
+              <a:t>MASA-43</a:t>
             </a:r>
             <a:endParaRPr lang="en-US" sz="1050" dirty="0"/>
           </a:p>
@@ -18878,7 +18878,7 @@
                 <a:ea typeface="Calibri" pitchFamily="34" charset="-122"/>
                 <a:cs typeface="Calibri" pitchFamily="34" charset="-120"/>
               </a:rPr>
-              <a:t>Sin especialidad</a:t>
+              <a:t>ESTRUCTURA</a:t>
             </a:r>
             <a:endParaRPr lang="en-US" sz="1050" dirty="0"/>
           </a:p>
@@ -18995,7 +18995,7 @@
                 <a:ea typeface="Calibri" pitchFamily="34" charset="-122"/>
                 <a:cs typeface="Calibri" pitchFamily="34" charset="-120"/>
               </a:rPr>
-              <a:t>270</a:t>
+              <a:t>249</a:t>
             </a:r>
             <a:endParaRPr lang="en-US" sz="1050" dirty="0"/>
           </a:p>
@@ -19034,7 +19034,7 @@
                 <a:ea typeface="Calibri" pitchFamily="34" charset="-122"/>
                 <a:cs typeface="Calibri" pitchFamily="34" charset="-120"/>
               </a:rPr>
-              <a:t>Tolerancia transversal en chutes de…</a:t>
+              <a:t>Perforaciones faltantes en estructu…</a:t>
             </a:r>
             <a:endParaRPr lang="en-US" sz="1000" dirty="0"/>
           </a:p>
@@ -19116,7 +19116,7 @@
                 <a:ea typeface="Calibri" pitchFamily="34" charset="-122"/>
                 <a:cs typeface="Calibri" pitchFamily="34" charset="-120"/>
               </a:rPr>
-              <a:t>MASA-42</a:t>
+              <a:t>MASA-45</a:t>
             </a:r>
             <a:endParaRPr lang="en-US" sz="1050" dirty="0"/>
           </a:p>
@@ -19233,7 +19233,7 @@
                 <a:ea typeface="Calibri" pitchFamily="34" charset="-122"/>
                 <a:cs typeface="Calibri" pitchFamily="34" charset="-120"/>
               </a:rPr>
-              <a:t>Sin especialidad</a:t>
+              <a:t>EE.II</a:t>
             </a:r>
             <a:endParaRPr lang="en-US" sz="1050" dirty="0"/>
           </a:p>
@@ -19311,7 +19311,7 @@
                 <a:ea typeface="Calibri" pitchFamily="34" charset="-122"/>
                 <a:cs typeface="Calibri" pitchFamily="34" charset="-120"/>
               </a:rPr>
-              <a:t>Stand By</a:t>
+              <a:t>Listo para revisi…</a:t>
             </a:r>
             <a:endParaRPr lang="en-US" sz="1050" dirty="0"/>
           </a:p>
@@ -19350,7 +19350,7 @@
                 <a:ea typeface="Calibri" pitchFamily="34" charset="-122"/>
                 <a:cs typeface="Calibri" pitchFamily="34" charset="-120"/>
               </a:rPr>
-              <a:t>241</a:t>
+              <a:t>249</a:t>
             </a:r>
             <a:endParaRPr lang="en-US" sz="1050" dirty="0"/>
           </a:p>
@@ -19389,7 +19389,7 @@
                 <a:ea typeface="Calibri" pitchFamily="34" charset="-122"/>
                 <a:cs typeface="Calibri" pitchFamily="34" charset="-120"/>
               </a:rPr>
-              <a:t>Estructura de correa 2100-CV-001 mo…</a:t>
+              <a:t>(i) Cable de comunicación dañado - …</a:t>
             </a:r>
             <a:endParaRPr lang="en-US" sz="1000" dirty="0"/>
           </a:p>
@@ -19451,7 +19451,7 @@
                 <a:ea typeface="Calibri" pitchFamily="34" charset="-122"/>
                 <a:cs typeface="Calibri" pitchFamily="34" charset="-120"/>
               </a:rPr>
-              <a:t>MASA-43</a:t>
+              <a:t>MASA-48</a:t>
             </a:r>
             <a:endParaRPr lang="en-US" sz="1050" dirty="0"/>
           </a:p>
@@ -19568,7 +19568,7 @@
                 <a:ea typeface="Calibri" pitchFamily="34" charset="-122"/>
                 <a:cs typeface="Calibri" pitchFamily="34" charset="-120"/>
               </a:rPr>
-              <a:t>Sin especialidad</a:t>
+              <a:t>OO.CC</a:t>
             </a:r>
             <a:endParaRPr lang="en-US" sz="1050" dirty="0"/>
           </a:p>
@@ -19646,7 +19646,7 @@
                 <a:ea typeface="Calibri" pitchFamily="34" charset="-122"/>
                 <a:cs typeface="Calibri" pitchFamily="34" charset="-120"/>
               </a:rPr>
-              <a:t>Listo para revisi…</a:t>
+              <a:t>Stand By</a:t>
             </a:r>
             <a:endParaRPr lang="en-US" sz="1050" dirty="0"/>
           </a:p>
@@ -19685,7 +19685,7 @@
                 <a:ea typeface="Calibri" pitchFamily="34" charset="-122"/>
                 <a:cs typeface="Calibri" pitchFamily="34" charset="-120"/>
               </a:rPr>
-              <a:t>241</a:t>
+              <a:t>249</a:t>
             </a:r>
             <a:endParaRPr lang="en-US" sz="1050" dirty="0"/>
           </a:p>
@@ -19724,7 +19724,7 @@
                 <a:ea typeface="Calibri" pitchFamily="34" charset="-122"/>
                 <a:cs typeface="Calibri" pitchFamily="34" charset="-120"/>
               </a:rPr>
-              <a:t>Perforaciones faltantes en estructu…</a:t>
+              <a:t>FISURACIÓN DE RADIER CELDAS COLUMNA…</a:t>
             </a:r>
             <a:endParaRPr lang="en-US" sz="1000" dirty="0"/>
           </a:p>
@@ -19806,7 +19806,7 @@
                 <a:ea typeface="Calibri" pitchFamily="34" charset="-122"/>
                 <a:cs typeface="Calibri" pitchFamily="34" charset="-120"/>
               </a:rPr>
-              <a:t>MASA-45</a:t>
+              <a:t>MASA-55</a:t>
             </a:r>
             <a:endParaRPr lang="en-US" sz="1050" dirty="0"/>
           </a:p>
@@ -19845,7 +19845,7 @@
                 <a:ea typeface="Calibri" pitchFamily="34" charset="-122"/>
                 <a:cs typeface="Calibri" pitchFamily="34" charset="-120"/>
               </a:rPr>
-              <a:t>Observación</a:t>
+              <a:t>No Conformidad</a:t>
             </a:r>
             <a:endParaRPr lang="en-US" sz="1050" dirty="0"/>
           </a:p>
@@ -19923,7 +19923,7 @@
                 <a:ea typeface="Calibri" pitchFamily="34" charset="-122"/>
                 <a:cs typeface="Calibri" pitchFamily="34" charset="-120"/>
               </a:rPr>
-              <a:t>Sin especialidad</a:t>
+              <a:t>MECÁNICA</a:t>
             </a:r>
             <a:endParaRPr lang="en-US" sz="1050" dirty="0"/>
           </a:p>
@@ -20040,7 +20040,7 @@
                 <a:ea typeface="Calibri" pitchFamily="34" charset="-122"/>
                 <a:cs typeface="Calibri" pitchFamily="34" charset="-120"/>
               </a:rPr>
-              <a:t>241</a:t>
+              <a:t>228</a:t>
             </a:r>
             <a:endParaRPr lang="en-US" sz="1050" dirty="0"/>
           </a:p>
@@ -20079,7 +20079,7 @@
                 <a:ea typeface="Calibri" pitchFamily="34" charset="-122"/>
                 <a:cs typeface="Calibri" pitchFamily="34" charset="-120"/>
               </a:rPr>
-              <a:t>(i) Cable de comunicación dañado - …</a:t>
+              <a:t>Alineamiento bombas 4210-PU-001 /00…</a:t>
             </a:r>
             <a:endParaRPr lang="en-US" sz="1000" dirty="0"/>
           </a:p>
@@ -20141,7 +20141,7 @@
                 <a:ea typeface="Calibri" pitchFamily="34" charset="-122"/>
                 <a:cs typeface="Calibri" pitchFamily="34" charset="-120"/>
               </a:rPr>
-              <a:t>MASA-48</a:t>
+              <a:t>MASA-56</a:t>
             </a:r>
             <a:endParaRPr lang="en-US" sz="1050" dirty="0"/>
           </a:p>
@@ -20180,7 +20180,7 @@
                 <a:ea typeface="Calibri" pitchFamily="34" charset="-122"/>
                 <a:cs typeface="Calibri" pitchFamily="34" charset="-120"/>
               </a:rPr>
-              <a:t>No Conformidad</a:t>
+              <a:t>Observación</a:t>
             </a:r>
             <a:endParaRPr lang="en-US" sz="1050" dirty="0"/>
           </a:p>
@@ -20258,7 +20258,7 @@
                 <a:ea typeface="Calibri" pitchFamily="34" charset="-122"/>
                 <a:cs typeface="Calibri" pitchFamily="34" charset="-120"/>
               </a:rPr>
-              <a:t>Sin especialidad</a:t>
+              <a:t>PIPING</a:t>
             </a:r>
             <a:endParaRPr lang="en-US" sz="1050" dirty="0"/>
           </a:p>
@@ -20375,7 +20375,7 @@
                 <a:ea typeface="Calibri" pitchFamily="34" charset="-122"/>
                 <a:cs typeface="Calibri" pitchFamily="34" charset="-120"/>
               </a:rPr>
-              <a:t>241</a:t>
+              <a:t>228</a:t>
             </a:r>
             <a:endParaRPr lang="en-US" sz="1050" dirty="0"/>
           </a:p>
@@ -20414,7 +20414,7 @@
                 <a:ea typeface="Calibri" pitchFamily="34" charset="-122"/>
                 <a:cs typeface="Calibri" pitchFamily="34" charset="-120"/>
               </a:rPr>
-              <a:t>FISURACIÓN DE RADIER CELDAS COLUMNA…</a:t>
+              <a:t>Interferencia línea de cañería en P…</a:t>
             </a:r>
             <a:endParaRPr lang="en-US" sz="1000" dirty="0"/>
           </a:p>
@@ -20499,7 +20499,7 @@
             </a:avLst>
           </a:prstGeom>
           <a:solidFill>
-            <a:srgbClr val="E9EDF2"/>
+            <a:srgbClr val="12233B"/>
           </a:solidFill>
           <a:ln/>
         </p:spPr>
@@ -20531,13 +20531,13 @@
             <a:r>
               <a:rPr lang="en-US" sz="1000" b="1" spc="100" kern="0" dirty="0">
                 <a:solidFill>
-                  <a:srgbClr val="56606E"/>
-                </a:solidFill>
-                <a:latin typeface="Calibri" pitchFamily="34" charset="0"/>
-                <a:ea typeface="Calibri" pitchFamily="34" charset="-122"/>
-                <a:cs typeface="Calibri" pitchFamily="34" charset="-120"/>
-              </a:rPr>
-              <a:t>SEMANA 07-09-2026 — 13-09-2026</a:t>
+                  <a:srgbClr val="E3A55B"/>
+                </a:solidFill>
+                <a:latin typeface="Calibri" pitchFamily="34" charset="0"/>
+                <a:ea typeface="Calibri" pitchFamily="34" charset="-122"/>
+                <a:cs typeface="Calibri" pitchFamily="34" charset="-120"/>
+              </a:rPr>
+              <a:t>SEMANA 14-09-2026 — 20-09-2026</a:t>
             </a:r>
             <a:endParaRPr lang="en-US" sz="1000" dirty="0"/>
           </a:p>
@@ -20570,13 +20570,13 @@
             <a:r>
               <a:rPr lang="en-US" sz="1150" dirty="0">
                 <a:solidFill>
-                  <a:srgbClr val="56606E"/>
-                </a:solidFill>
-                <a:latin typeface="Calibri" pitchFamily="34" charset="0"/>
-                <a:ea typeface="Calibri" pitchFamily="34" charset="-122"/>
-                <a:cs typeface="Calibri" pitchFamily="34" charset="-120"/>
-              </a:rPr>
-              <a:t>Sin hallazgos nuevos en el período.</a:t>
+                  <a:srgbClr val="FFFFFF"/>
+                </a:solidFill>
+                <a:latin typeface="Calibri" pitchFamily="34" charset="0"/>
+                <a:ea typeface="Calibri" pitchFamily="34" charset="-122"/>
+                <a:cs typeface="Calibri" pitchFamily="34" charset="-120"/>
+              </a:rPr>
+              <a:t>2 hallazgos nuevos · 0 internas · 2 del cliente · OO.CC 1 · MECÁNICA 1 · 2 siguen abiertos</a:t>
             </a:r>
             <a:endParaRPr lang="en-US" sz="1150" dirty="0"/>
           </a:p>
@@ -20615,7 +20615,7 @@
                 <a:ea typeface="Calibri" pitchFamily="34" charset="-122"/>
                 <a:cs typeface="Calibri" pitchFamily="34" charset="-120"/>
               </a:rPr>
-              <a:t>Fuente: Data_NCR-13092026.xlsx — hoja «Observaciones» · Corte 13-09-2026 · 509 registros desde 10-02-2023</a:t>
+              <a:t>Fuente: Data_NCR-21092026.xlsx — hoja «Observaciones» · Corte 21-09-2026 · 513 registros desde 10-02-2023</a:t>
             </a:r>
             <a:endParaRPr lang="en-US" sz="850" dirty="0"/>
           </a:p>
@@ -20959,7 +20959,7 @@
                 <a:ea typeface="Calibri" pitchFamily="34" charset="-122"/>
                 <a:cs typeface="Calibri" pitchFamily="34" charset="-120"/>
               </a:rPr>
-              <a:t>464/509</a:t>
+              <a:t>468/513</a:t>
             </a:r>
             <a:endParaRPr lang="en-US" sz="1400" dirty="0"/>
           </a:p>
@@ -21037,7 +21037,7 @@
                 <a:ea typeface="Calibri" pitchFamily="34" charset="-122"/>
                 <a:cs typeface="Calibri" pitchFamily="34" charset="-120"/>
               </a:rPr>
-              <a:t>45 abiertos · 18 con más de 180 días</a:t>
+              <a:t>45 abiertos · 17 con más de 180 días</a:t>
             </a:r>
             <a:endParaRPr lang="en-US" sz="950" dirty="0"/>
           </a:p>
@@ -21169,7 +21169,7 @@
                 <a:ea typeface="Calibri" pitchFamily="34" charset="-122"/>
                 <a:cs typeface="Calibri" pitchFamily="34" charset="-120"/>
               </a:rPr>
-              <a:t>de 509 levantados</a:t>
+              <a:t>de 513 levantados</a:t>
             </a:r>
             <a:endParaRPr lang="en-US" sz="1400" dirty="0"/>
           </a:p>
@@ -21247,7 +21247,7 @@
                 <a:ea typeface="Calibri" pitchFamily="34" charset="-122"/>
                 <a:cs typeface="Calibri" pitchFamily="34" charset="-120"/>
               </a:rPr>
-              <a:t>7 iniciado · 27 listo para revisión · 9 stand by · 1 observada · 1 pendiente</a:t>
+              <a:t>6 iniciado · 31 listo para revisión · 6 stand by · 1 observada · 1 pendiente</a:t>
             </a:r>
             <a:endParaRPr lang="en-US" sz="950" dirty="0"/>
           </a:p>
@@ -21340,7 +21340,7 @@
                 <a:ea typeface="Cambria" pitchFamily="34" charset="-122"/>
                 <a:cs typeface="Cambria" pitchFamily="34" charset="-120"/>
               </a:rPr>
-              <a:t>31,8%</a:t>
+              <a:t>31,5%</a:t>
             </a:r>
             <a:endParaRPr lang="en-US" sz="4000" dirty="0"/>
           </a:p>
@@ -21379,7 +21379,7 @@
                 <a:ea typeface="Calibri" pitchFamily="34" charset="-122"/>
                 <a:cs typeface="Calibri" pitchFamily="34" charset="-120"/>
               </a:rPr>
-              <a:t>159/500 clasificados</a:t>
+              <a:t>159/504 clasificados</a:t>
             </a:r>
             <a:endParaRPr lang="en-US" sz="1400" dirty="0"/>
           </a:p>
@@ -21589,7 +21589,7 @@
                 <a:ea typeface="Calibri" pitchFamily="34" charset="-122"/>
                 <a:cs typeface="Calibri" pitchFamily="34" charset="-120"/>
               </a:rPr>
-              <a:t>251 de 509 con costo</a:t>
+              <a:t>251 de 513 con costo</a:t>
             </a:r>
             <a:endParaRPr lang="en-US" sz="1400" dirty="0"/>
           </a:p>
@@ -21667,7 +21667,7 @@
                 <a:ea typeface="Calibri" pitchFamily="34" charset="-122"/>
                 <a:cs typeface="Calibri" pitchFamily="34" charset="-120"/>
               </a:rPr>
-              <a:t>258 hallazgos no declaran costo: la cifra es un piso</a:t>
+              <a:t>262 hallazgos no declaran costo: la cifra es un piso</a:t>
             </a:r>
             <a:endParaRPr lang="en-US" sz="950" dirty="0"/>
           </a:p>
@@ -21807,7 +21807,7 @@
                 <a:ea typeface="Calibri" pitchFamily="34" charset="-122"/>
                 <a:cs typeface="Calibri" pitchFamily="34" charset="-120"/>
               </a:rPr>
-              <a:t>37 de los 45 hallazgos abiertos (82,2%), y es uno de los frentes donde el cliente levanta más de lo que detecta Besalco (77 del cliente contra 53 internas).</a:t>
+              <a:t>37 de los 45 hallazgos abiertos (82,2%), y es uno de los frentes donde el cliente levanta más de lo que detecta Besalco (79 del cliente contra 53 internas).</a:t>
             </a:r>
             <a:endParaRPr lang="en-US" sz="1250" dirty="0"/>
           </a:p>
@@ -21869,7 +21869,7 @@
                 <a:ea typeface="Calibri" pitchFamily="34" charset="-122"/>
                 <a:cs typeface="Calibri" pitchFamily="34" charset="-120"/>
               </a:rPr>
-              <a:t>La semana cerró sin hallazgos nuevos.  </a:t>
+              <a:t>La semana trajo 4 hallazgos nuevos, ninguno de autodetección.  </a:t>
             </a:r>
             <a:pPr indent="0" marL="0">
               <a:lnSpc>
@@ -21886,7 +21886,7 @@
                 <a:ea typeface="Calibri" pitchFamily="34" charset="-122"/>
                 <a:cs typeface="Calibri" pitchFamily="34" charset="-120"/>
               </a:rPr>
-              <a:t>Entre el 07-09-2026 y el 13-09-2026 no se levantó ningún hallazgo en ningún frente.</a:t>
+              <a:t>14-09-2026 al 20-09-2026: 4 del cliente en PIPING (2) y OO.CC (1) y MECÁNICA (1). Todos siguen abiertos; la semana anterior entraron 0.</a:t>
             </a:r>
             <a:endParaRPr lang="en-US" sz="1250" dirty="0"/>
           </a:p>
@@ -21948,7 +21948,7 @@
                 <a:ea typeface="Calibri" pitchFamily="34" charset="-122"/>
                 <a:cs typeface="Calibri" pitchFamily="34" charset="-120"/>
               </a:rPr>
-              <a:t>44 de los 45 abiertos están fuera del plazo de respuesta.  </a:t>
+              <a:t>41 de los 45 abiertos están fuera del plazo de respuesta.  </a:t>
             </a:r>
             <a:pPr indent="0" marL="0">
               <a:lnSpc>
@@ -21965,7 +21965,7 @@
                 <a:ea typeface="Calibri" pitchFamily="34" charset="-122"/>
                 <a:cs typeface="Calibri" pitchFamily="34" charset="-120"/>
               </a:rPr>
-              <a:t>El plazo es de 10 días desde que se emite la NC. De los atrasados, 18 llevan más de 180 días abiertos y 0 más de un año: no es atraso de días, es deuda vieja.</a:t>
+              <a:t>El plazo es de 10 días desde que se emite la NC. De los atrasados, 17 llevan más de 180 días abiertos y 0 más de un año: no es atraso de días, es deuda vieja.</a:t>
             </a:r>
             <a:endParaRPr lang="en-US" sz="1250" dirty="0"/>
           </a:p>
@@ -22004,7 +22004,7 @@
                 <a:ea typeface="Calibri" pitchFamily="34" charset="-122"/>
                 <a:cs typeface="Calibri" pitchFamily="34" charset="-120"/>
               </a:rPr>
-              <a:t>Fuente: Data_NCR-13092026.xlsx — hoja «Observaciones» · Corte 13-09-2026 · 509 registros desde 10-02-2023</a:t>
+              <a:t>Fuente: Data_NCR-21092026.xlsx — hoja «Observaciones» · Corte 21-09-2026 · 513 registros desde 10-02-2023</a:t>
             </a:r>
             <a:endParaRPr lang="en-US" sz="850" dirty="0"/>
           </a:p>
@@ -23279,7 +23279,7 @@
                 <a:ea typeface="Calibri" pitchFamily="34" charset="-122"/>
                 <a:cs typeface="Calibri" pitchFamily="34" charset="-120"/>
               </a:rPr>
-              <a:t>249</a:t>
+              <a:t>251</a:t>
             </a:r>
             <a:endParaRPr lang="en-US" sz="1300" dirty="0"/>
           </a:p>
@@ -23318,7 +23318,7 @@
                 <a:ea typeface="Calibri" pitchFamily="34" charset="-122"/>
                 <a:cs typeface="Calibri" pitchFamily="34" charset="-120"/>
               </a:rPr>
-              <a:t>242</a:t>
+              <a:t>244</a:t>
             </a:r>
             <a:endParaRPr lang="en-US" sz="1300" dirty="0"/>
           </a:p>
@@ -23474,7 +23474,7 @@
                 <a:ea typeface="Calibri" pitchFamily="34" charset="-122"/>
                 <a:cs typeface="Calibri" pitchFamily="34" charset="-120"/>
               </a:rPr>
-              <a:t>197</a:t>
+              <a:t>199</a:t>
             </a:r>
             <a:endParaRPr lang="en-US" sz="1300" dirty="0"/>
           </a:p>
@@ -23753,7 +23753,7 @@
                 <a:ea typeface="Calibri" pitchFamily="34" charset="-122"/>
                 <a:cs typeface="Calibri" pitchFamily="34" charset="-120"/>
               </a:rPr>
-              <a:t>170</a:t>
+              <a:t>172</a:t>
             </a:r>
             <a:endParaRPr lang="en-US" sz="1300" dirty="0"/>
           </a:p>
@@ -23792,7 +23792,7 @@
                 <a:ea typeface="Calibri" pitchFamily="34" charset="-122"/>
                 <a:cs typeface="Calibri" pitchFamily="34" charset="-120"/>
               </a:rPr>
-              <a:t>133</a:t>
+              <a:t>135</a:t>
             </a:r>
             <a:endParaRPr lang="en-US" sz="1300" dirty="0"/>
           </a:p>
@@ -23870,7 +23870,7 @@
                 <a:ea typeface="Calibri" pitchFamily="34" charset="-122"/>
                 <a:cs typeface="Calibri" pitchFamily="34" charset="-120"/>
               </a:rPr>
-              <a:t>78,2%</a:t>
+              <a:t>78,5%</a:t>
             </a:r>
             <a:endParaRPr lang="en-US" sz="1300" dirty="0"/>
           </a:p>
@@ -23948,7 +23948,7 @@
                 <a:ea typeface="Calibri" pitchFamily="34" charset="-122"/>
                 <a:cs typeface="Calibri" pitchFamily="34" charset="-120"/>
               </a:rPr>
-              <a:t>77</a:t>
+              <a:t>79</a:t>
             </a:r>
             <a:endParaRPr lang="en-US" sz="1300" dirty="0"/>
           </a:p>
@@ -24721,7 +24721,7 @@
                 <a:ea typeface="Calibri" pitchFamily="34" charset="-122"/>
                 <a:cs typeface="Calibri" pitchFamily="34" charset="-120"/>
               </a:rPr>
-              <a:t>501</a:t>
+              <a:t>505</a:t>
             </a:r>
             <a:endParaRPr lang="en-US" sz="1300" dirty="0"/>
           </a:p>
@@ -24760,7 +24760,7 @@
                 <a:ea typeface="Calibri" pitchFamily="34" charset="-122"/>
                 <a:cs typeface="Calibri" pitchFamily="34" charset="-120"/>
               </a:rPr>
-              <a:t>456</a:t>
+              <a:t>460</a:t>
             </a:r>
             <a:endParaRPr lang="en-US" sz="1300" dirty="0"/>
           </a:p>
@@ -24838,7 +24838,7 @@
                 <a:ea typeface="Calibri" pitchFamily="34" charset="-122"/>
                 <a:cs typeface="Calibri" pitchFamily="34" charset="-120"/>
               </a:rPr>
-              <a:t>91%</a:t>
+              <a:t>91,1%</a:t>
             </a:r>
             <a:endParaRPr lang="en-US" sz="1300" dirty="0"/>
           </a:p>
@@ -24916,7 +24916,7 @@
                 <a:ea typeface="Calibri" pitchFamily="34" charset="-122"/>
                 <a:cs typeface="Calibri" pitchFamily="34" charset="-120"/>
               </a:rPr>
-              <a:t>293</a:t>
+              <a:t>297</a:t>
             </a:r>
             <a:endParaRPr lang="en-US" sz="1300" dirty="0"/>
           </a:p>
@@ -25033,7 +25033,7 @@
                 <a:ea typeface="Calibri" pitchFamily="34" charset="-122"/>
                 <a:cs typeface="Calibri" pitchFamily="34" charset="-120"/>
               </a:rPr>
-              <a:t>Mediana de cierre global 30 días · el hallazgo más lento tomó 419 días · 85 hallazgos sin especialidad declarada.</a:t>
+              <a:t>Mediana de cierre global 30 días · el hallazgo más lento tomó 419 días · 8 hallazgos sin especialidad declarada.</a:t>
             </a:r>
             <a:endParaRPr lang="en-US" sz="950" dirty="0"/>
           </a:p>
@@ -25072,7 +25072,7 @@
                 <a:ea typeface="Calibri" pitchFamily="34" charset="-122"/>
                 <a:cs typeface="Calibri" pitchFamily="34" charset="-120"/>
               </a:rPr>
-              <a:t>Fuente: Data_NCR-13092026.xlsx — hoja «Observaciones» · Corte 13-09-2026 · 509 registros desde 10-02-2023</a:t>
+              <a:t>Fuente: Data_NCR-21092026.xlsx — hoja «Observaciones» · Corte 21-09-2026 · 513 registros desde 10-02-2023</a:t>
             </a:r>
             <a:endParaRPr lang="en-US" sz="850" dirty="0"/>
           </a:p>
@@ -25323,7 +25323,7 @@
                 <a:ea typeface="Calibri" pitchFamily="34" charset="-122"/>
                 <a:cs typeface="Calibri" pitchFamily="34" charset="-120"/>
               </a:rPr>
-              <a:t>Entre el 07-09-2026 y el 13-09-2026 no se levantó ningún hallazgo en ningún frente.</a:t>
+              <a:t>Entre el 14-09-2026 y el 20-09-2026 se levantaron 4 hallazgos: 0 internas · 4 del cliente. Todos siguen abiertos.</a:t>
             </a:r>
             <a:endParaRPr lang="en-US" sz="1350" dirty="0"/>
           </a:p>
@@ -25478,7 +25478,7 @@
                 <a:ea typeface="Calibri" pitchFamily="34" charset="-122"/>
                 <a:cs typeface="Calibri" pitchFamily="34" charset="-120"/>
               </a:rPr>
-              <a:t>—</a:t>
+              <a:t>PIPING 2  ·  OO.CC 1  ·  MECÁNICA 1</a:t>
             </a:r>
             <a:endParaRPr lang="en-US" sz="1100" dirty="0"/>
           </a:p>
@@ -25556,7 +25556,7 @@
                 <a:ea typeface="Calibri" pitchFamily="34" charset="-122"/>
                 <a:cs typeface="Calibri" pitchFamily="34" charset="-120"/>
               </a:rPr>
-              <a:t>—</a:t>
+              <a:t>Talabre 2  ·  Arqueros 2</a:t>
             </a:r>
             <a:endParaRPr lang="en-US" sz="1100" dirty="0"/>
           </a:p>
@@ -25634,7 +25634,7 @@
                 <a:ea typeface="Calibri" pitchFamily="34" charset="-122"/>
                 <a:cs typeface="Calibri" pitchFamily="34" charset="-120"/>
               </a:rPr>
-              <a:t>—</a:t>
+              <a:t>Externa · Cliente 4</a:t>
             </a:r>
             <a:endParaRPr lang="en-US" sz="1100" dirty="0"/>
           </a:p>
@@ -25712,7 +25712,7 @@
                 <a:ea typeface="Calibri" pitchFamily="34" charset="-122"/>
                 <a:cs typeface="Calibri" pitchFamily="34" charset="-120"/>
               </a:rPr>
-              <a:t>—</a:t>
+              <a:t>Producto No Conforme 2  ·  No Conformidad 2</a:t>
             </a:r>
             <a:endParaRPr lang="en-US" sz="1100" dirty="0"/>
           </a:p>
@@ -25751,7 +25751,7 @@
                 <a:ea typeface="Calibri" pitchFamily="34" charset="-122"/>
                 <a:cs typeface="Calibri" pitchFamily="34" charset="-120"/>
               </a:rPr>
-              <a:t>SIN HALLAZGOS NUEVOS EN EL PERÍODO</a:t>
+              <a:t>DETALLE DE LOS HALLAZGOS NUEVOS</a:t>
             </a:r>
             <a:endParaRPr lang="en-US" sz="1050" dirty="0"/>
           </a:p>
@@ -25765,24 +25765,24 @@
         </p:nvSpPr>
         <p:spPr>
           <a:xfrm>
-            <a:off x="502920" y="4069080"/>
-            <a:ext cx="9144000" cy="365760"/>
-          </a:xfrm>
-          <a:prstGeom prst="rect">
-            <a:avLst/>
-          </a:prstGeom>
-          <a:noFill/>
-          <a:ln/>
-        </p:spPr>
-        <p:txBody>
-          <a:bodyPr wrap="square" lIns="0" tIns="0" rIns="0" bIns="0" rtlCol="0" anchor="ctr"/>
-          <a:lstStyle/>
-          <a:p>
-            <a:pPr indent="0" marL="0">
-              <a:buNone/>
-            </a:pPr>
-            <a:r>
-              <a:rPr lang="en-US" sz="1300" dirty="0">
+            <a:off x="502920" y="3986784"/>
+            <a:ext cx="822960" cy="274320"/>
+          </a:xfrm>
+          <a:prstGeom prst="rect">
+            <a:avLst/>
+          </a:prstGeom>
+          <a:noFill/>
+          <a:ln/>
+        </p:spPr>
+        <p:txBody>
+          <a:bodyPr wrap="square" lIns="0" tIns="0" rIns="0" bIns="0" rtlCol="0" anchor="ctr"/>
+          <a:lstStyle/>
+          <a:p>
+            <a:pPr algn="l" indent="0" marL="0">
+              <a:buNone/>
+            </a:pPr>
+            <a:r>
+              <a:rPr lang="en-US" sz="950" b="1" spc="50" kern="0" dirty="0">
                 <a:solidFill>
                   <a:srgbClr val="56606E"/>
                 </a:solidFill>
@@ -25790,15 +25790,1886 @@
                 <a:ea typeface="Calibri" pitchFamily="34" charset="-122"/>
                 <a:cs typeface="Calibri" pitchFamily="34" charset="-120"/>
               </a:rPr>
-              <a:t>No se levantó ningún hallazgo entre el 07-09-2026 y el 13-09-2026 en ningún frente.</a:t>
-            </a:r>
-            <a:endParaRPr lang="en-US" sz="1300" dirty="0"/>
+              <a:t>FECHA</a:t>
+            </a:r>
+            <a:endParaRPr lang="en-US" sz="950" dirty="0"/>
           </a:p>
         </p:txBody>
       </p:sp>
       <p:sp>
         <p:nvSpPr>
           <p:cNvPr id="19" name="Text 15"/>
+          <p:cNvSpPr/>
+          <p:nvPr/>
+        </p:nvSpPr>
+        <p:spPr>
+          <a:xfrm>
+            <a:off x="1371600" y="3986784"/>
+            <a:ext cx="1051560" cy="274320"/>
+          </a:xfrm>
+          <a:prstGeom prst="rect">
+            <a:avLst/>
+          </a:prstGeom>
+          <a:noFill/>
+          <a:ln/>
+        </p:spPr>
+        <p:txBody>
+          <a:bodyPr wrap="square" lIns="0" tIns="0" rIns="0" bIns="0" rtlCol="0" anchor="ctr"/>
+          <a:lstStyle/>
+          <a:p>
+            <a:pPr algn="l" indent="0" marL="0">
+              <a:buNone/>
+            </a:pPr>
+            <a:r>
+              <a:rPr lang="en-US" sz="950" b="1" spc="50" kern="0" dirty="0">
+                <a:solidFill>
+                  <a:srgbClr val="56606E"/>
+                </a:solidFill>
+                <a:latin typeface="Calibri" pitchFamily="34" charset="0"/>
+                <a:ea typeface="Calibri" pitchFamily="34" charset="-122"/>
+                <a:cs typeface="Calibri" pitchFamily="34" charset="-120"/>
+              </a:rPr>
+              <a:t>FRENTE</a:t>
+            </a:r>
+            <a:endParaRPr lang="en-US" sz="950" dirty="0"/>
+          </a:p>
+        </p:txBody>
+      </p:sp>
+      <p:sp>
+        <p:nvSpPr>
+          <p:cNvPr id="20" name="Text 16"/>
+          <p:cNvSpPr/>
+          <p:nvPr/>
+        </p:nvSpPr>
+        <p:spPr>
+          <a:xfrm>
+            <a:off x="2468880" y="3986784"/>
+            <a:ext cx="1051560" cy="274320"/>
+          </a:xfrm>
+          <a:prstGeom prst="rect">
+            <a:avLst/>
+          </a:prstGeom>
+          <a:noFill/>
+          <a:ln/>
+        </p:spPr>
+        <p:txBody>
+          <a:bodyPr wrap="square" lIns="0" tIns="0" rIns="0" bIns="0" rtlCol="0" anchor="ctr"/>
+          <a:lstStyle/>
+          <a:p>
+            <a:pPr algn="l" indent="0" marL="0">
+              <a:buNone/>
+            </a:pPr>
+            <a:r>
+              <a:rPr lang="en-US" sz="950" b="1" spc="50" kern="0" dirty="0">
+                <a:solidFill>
+                  <a:srgbClr val="56606E"/>
+                </a:solidFill>
+                <a:latin typeface="Calibri" pitchFamily="34" charset="0"/>
+                <a:ea typeface="Calibri" pitchFamily="34" charset="-122"/>
+                <a:cs typeface="Calibri" pitchFamily="34" charset="-120"/>
+              </a:rPr>
+              <a:t>N°</a:t>
+            </a:r>
+            <a:endParaRPr lang="en-US" sz="950" dirty="0"/>
+          </a:p>
+        </p:txBody>
+      </p:sp>
+      <p:sp>
+        <p:nvSpPr>
+          <p:cNvPr id="21" name="Text 17"/>
+          <p:cNvSpPr/>
+          <p:nvPr/>
+        </p:nvSpPr>
+        <p:spPr>
+          <a:xfrm>
+            <a:off x="3566160" y="3986784"/>
+            <a:ext cx="1371600" cy="274320"/>
+          </a:xfrm>
+          <a:prstGeom prst="rect">
+            <a:avLst/>
+          </a:prstGeom>
+          <a:noFill/>
+          <a:ln/>
+        </p:spPr>
+        <p:txBody>
+          <a:bodyPr wrap="square" lIns="0" tIns="0" rIns="0" bIns="0" rtlCol="0" anchor="ctr"/>
+          <a:lstStyle/>
+          <a:p>
+            <a:pPr algn="l" indent="0" marL="0">
+              <a:buNone/>
+            </a:pPr>
+            <a:r>
+              <a:rPr lang="en-US" sz="950" b="1" spc="50" kern="0" dirty="0">
+                <a:solidFill>
+                  <a:srgbClr val="56606E"/>
+                </a:solidFill>
+                <a:latin typeface="Calibri" pitchFamily="34" charset="0"/>
+                <a:ea typeface="Calibri" pitchFamily="34" charset="-122"/>
+                <a:cs typeface="Calibri" pitchFamily="34" charset="-120"/>
+              </a:rPr>
+              <a:t>TIPO</a:t>
+            </a:r>
+            <a:endParaRPr lang="en-US" sz="950" dirty="0"/>
+          </a:p>
+        </p:txBody>
+      </p:sp>
+      <p:sp>
+        <p:nvSpPr>
+          <p:cNvPr id="22" name="Text 18"/>
+          <p:cNvSpPr/>
+          <p:nvPr/>
+        </p:nvSpPr>
+        <p:spPr>
+          <a:xfrm>
+            <a:off x="4983480" y="3986784"/>
+            <a:ext cx="1417320" cy="274320"/>
+          </a:xfrm>
+          <a:prstGeom prst="rect">
+            <a:avLst/>
+          </a:prstGeom>
+          <a:noFill/>
+          <a:ln/>
+        </p:spPr>
+        <p:txBody>
+          <a:bodyPr wrap="square" lIns="0" tIns="0" rIns="0" bIns="0" rtlCol="0" anchor="ctr"/>
+          <a:lstStyle/>
+          <a:p>
+            <a:pPr algn="l" indent="0" marL="0">
+              <a:buNone/>
+            </a:pPr>
+            <a:r>
+              <a:rPr lang="en-US" sz="950" b="1" spc="50" kern="0" dirty="0">
+                <a:solidFill>
+                  <a:srgbClr val="56606E"/>
+                </a:solidFill>
+                <a:latin typeface="Calibri" pitchFamily="34" charset="0"/>
+                <a:ea typeface="Calibri" pitchFamily="34" charset="-122"/>
+                <a:cs typeface="Calibri" pitchFamily="34" charset="-120"/>
+              </a:rPr>
+              <a:t>ORIGEN</a:t>
+            </a:r>
+            <a:endParaRPr lang="en-US" sz="950" dirty="0"/>
+          </a:p>
+        </p:txBody>
+      </p:sp>
+      <p:sp>
+        <p:nvSpPr>
+          <p:cNvPr id="23" name="Text 19"/>
+          <p:cNvSpPr/>
+          <p:nvPr/>
+        </p:nvSpPr>
+        <p:spPr>
+          <a:xfrm>
+            <a:off x="6446520" y="3986784"/>
+            <a:ext cx="1097280" cy="274320"/>
+          </a:xfrm>
+          <a:prstGeom prst="rect">
+            <a:avLst/>
+          </a:prstGeom>
+          <a:noFill/>
+          <a:ln/>
+        </p:spPr>
+        <p:txBody>
+          <a:bodyPr wrap="square" lIns="0" tIns="0" rIns="0" bIns="0" rtlCol="0" anchor="ctr"/>
+          <a:lstStyle/>
+          <a:p>
+            <a:pPr algn="l" indent="0" marL="0">
+              <a:buNone/>
+            </a:pPr>
+            <a:r>
+              <a:rPr lang="en-US" sz="950" b="1" spc="50" kern="0" dirty="0">
+                <a:solidFill>
+                  <a:srgbClr val="56606E"/>
+                </a:solidFill>
+                <a:latin typeface="Calibri" pitchFamily="34" charset="0"/>
+                <a:ea typeface="Calibri" pitchFamily="34" charset="-122"/>
+                <a:cs typeface="Calibri" pitchFamily="34" charset="-120"/>
+              </a:rPr>
+              <a:t>DISCIPLINA</a:t>
+            </a:r>
+            <a:endParaRPr lang="en-US" sz="950" dirty="0"/>
+          </a:p>
+        </p:txBody>
+      </p:sp>
+      <p:sp>
+        <p:nvSpPr>
+          <p:cNvPr id="24" name="Text 20"/>
+          <p:cNvSpPr/>
+          <p:nvPr/>
+        </p:nvSpPr>
+        <p:spPr>
+          <a:xfrm>
+            <a:off x="7589520" y="3986784"/>
+            <a:ext cx="1371600" cy="274320"/>
+          </a:xfrm>
+          <a:prstGeom prst="rect">
+            <a:avLst/>
+          </a:prstGeom>
+          <a:noFill/>
+          <a:ln/>
+        </p:spPr>
+        <p:txBody>
+          <a:bodyPr wrap="square" lIns="0" tIns="0" rIns="0" bIns="0" rtlCol="0" anchor="ctr"/>
+          <a:lstStyle/>
+          <a:p>
+            <a:pPr algn="l" indent="0" marL="0">
+              <a:buNone/>
+            </a:pPr>
+            <a:r>
+              <a:rPr lang="en-US" sz="950" b="1" spc="50" kern="0" dirty="0">
+                <a:solidFill>
+                  <a:srgbClr val="56606E"/>
+                </a:solidFill>
+                <a:latin typeface="Calibri" pitchFamily="34" charset="0"/>
+                <a:ea typeface="Calibri" pitchFamily="34" charset="-122"/>
+                <a:cs typeface="Calibri" pitchFamily="34" charset="-120"/>
+              </a:rPr>
+              <a:t>RESPONSABLE</a:t>
+            </a:r>
+            <a:endParaRPr lang="en-US" sz="950" dirty="0"/>
+          </a:p>
+        </p:txBody>
+      </p:sp>
+      <p:sp>
+        <p:nvSpPr>
+          <p:cNvPr id="25" name="Text 21"/>
+          <p:cNvSpPr/>
+          <p:nvPr/>
+        </p:nvSpPr>
+        <p:spPr>
+          <a:xfrm>
+            <a:off x="9006840" y="3986784"/>
+            <a:ext cx="868680" cy="274320"/>
+          </a:xfrm>
+          <a:prstGeom prst="rect">
+            <a:avLst/>
+          </a:prstGeom>
+          <a:noFill/>
+          <a:ln/>
+        </p:spPr>
+        <p:txBody>
+          <a:bodyPr wrap="square" lIns="0" tIns="0" rIns="0" bIns="0" rtlCol="0" anchor="ctr"/>
+          <a:lstStyle/>
+          <a:p>
+            <a:pPr algn="l" indent="0" marL="0">
+              <a:buNone/>
+            </a:pPr>
+            <a:r>
+              <a:rPr lang="en-US" sz="950" b="1" spc="50" kern="0" dirty="0">
+                <a:solidFill>
+                  <a:srgbClr val="56606E"/>
+                </a:solidFill>
+                <a:latin typeface="Calibri" pitchFamily="34" charset="0"/>
+                <a:ea typeface="Calibri" pitchFamily="34" charset="-122"/>
+                <a:cs typeface="Calibri" pitchFamily="34" charset="-120"/>
+              </a:rPr>
+              <a:t>ESTADO</a:t>
+            </a:r>
+            <a:endParaRPr lang="en-US" sz="950" dirty="0"/>
+          </a:p>
+        </p:txBody>
+      </p:sp>
+      <p:sp>
+        <p:nvSpPr>
+          <p:cNvPr id="26" name="Text 22"/>
+          <p:cNvSpPr/>
+          <p:nvPr/>
+        </p:nvSpPr>
+        <p:spPr>
+          <a:xfrm>
+            <a:off x="9921240" y="3986784"/>
+            <a:ext cx="1828800" cy="274320"/>
+          </a:xfrm>
+          <a:prstGeom prst="rect">
+            <a:avLst/>
+          </a:prstGeom>
+          <a:noFill/>
+          <a:ln/>
+        </p:spPr>
+        <p:txBody>
+          <a:bodyPr wrap="square" lIns="0" tIns="0" rIns="0" bIns="0" rtlCol="0" anchor="ctr"/>
+          <a:lstStyle/>
+          <a:p>
+            <a:pPr algn="l" indent="0" marL="0">
+              <a:buNone/>
+            </a:pPr>
+            <a:r>
+              <a:rPr lang="en-US" sz="950" b="1" spc="50" kern="0" dirty="0">
+                <a:solidFill>
+                  <a:srgbClr val="56606E"/>
+                </a:solidFill>
+                <a:latin typeface="Calibri" pitchFamily="34" charset="0"/>
+                <a:ea typeface="Calibri" pitchFamily="34" charset="-122"/>
+                <a:cs typeface="Calibri" pitchFamily="34" charset="-120"/>
+              </a:rPr>
+              <a:t>TÍTULO</a:t>
+            </a:r>
+            <a:endParaRPr lang="en-US" sz="950" dirty="0"/>
+          </a:p>
+        </p:txBody>
+      </p:sp>
+      <p:sp>
+        <p:nvSpPr>
+          <p:cNvPr id="27" name="Shape 23"/>
+          <p:cNvSpPr/>
+          <p:nvPr/>
+        </p:nvSpPr>
+        <p:spPr>
+          <a:xfrm>
+            <a:off x="502920" y="4297680"/>
+            <a:ext cx="11247120" cy="0"/>
+          </a:xfrm>
+          <a:prstGeom prst="line">
+            <a:avLst/>
+          </a:prstGeom>
+          <a:noFill/>
+          <a:ln w="12700">
+            <a:solidFill>
+              <a:srgbClr val="6E8CA8"/>
+            </a:solidFill>
+            <a:prstDash val="solid"/>
+          </a:ln>
+        </p:spPr>
+      </p:sp>
+      <p:sp>
+        <p:nvSpPr>
+          <p:cNvPr id="28" name="Text 24"/>
+          <p:cNvSpPr/>
+          <p:nvPr/>
+        </p:nvSpPr>
+        <p:spPr>
+          <a:xfrm>
+            <a:off x="502920" y="4425696"/>
+            <a:ext cx="822960" cy="237744"/>
+          </a:xfrm>
+          <a:prstGeom prst="rect">
+            <a:avLst/>
+          </a:prstGeom>
+          <a:noFill/>
+          <a:ln/>
+        </p:spPr>
+        <p:txBody>
+          <a:bodyPr wrap="square" lIns="0" tIns="0" rIns="0" bIns="0" rtlCol="0" anchor="ctr"/>
+          <a:lstStyle/>
+          <a:p>
+            <a:pPr algn="l" indent="0" marL="0">
+              <a:buNone/>
+            </a:pPr>
+            <a:r>
+              <a:rPr lang="en-US" sz="1050" dirty="0">
+                <a:solidFill>
+                  <a:srgbClr val="1A2433"/>
+                </a:solidFill>
+                <a:latin typeface="Calibri" pitchFamily="34" charset="0"/>
+                <a:ea typeface="Calibri" pitchFamily="34" charset="-122"/>
+                <a:cs typeface="Calibri" pitchFamily="34" charset="-120"/>
+              </a:rPr>
+              <a:t>15-09-2026</a:t>
+            </a:r>
+            <a:endParaRPr lang="en-US" sz="1050" dirty="0"/>
+          </a:p>
+        </p:txBody>
+      </p:sp>
+      <p:sp>
+        <p:nvSpPr>
+          <p:cNvPr id="29" name="Text 25"/>
+          <p:cNvSpPr/>
+          <p:nvPr/>
+        </p:nvSpPr>
+        <p:spPr>
+          <a:xfrm>
+            <a:off x="1371600" y="4425696"/>
+            <a:ext cx="1051560" cy="237744"/>
+          </a:xfrm>
+          <a:prstGeom prst="rect">
+            <a:avLst/>
+          </a:prstGeom>
+          <a:noFill/>
+          <a:ln/>
+        </p:spPr>
+        <p:txBody>
+          <a:bodyPr wrap="square" lIns="0" tIns="0" rIns="0" bIns="0" rtlCol="0" anchor="ctr"/>
+          <a:lstStyle/>
+          <a:p>
+            <a:pPr algn="l" indent="0" marL="0">
+              <a:buNone/>
+            </a:pPr>
+            <a:r>
+              <a:rPr lang="en-US" sz="1050" dirty="0">
+                <a:solidFill>
+                  <a:srgbClr val="1A2433"/>
+                </a:solidFill>
+                <a:latin typeface="Calibri" pitchFamily="34" charset="0"/>
+                <a:ea typeface="Calibri" pitchFamily="34" charset="-122"/>
+                <a:cs typeface="Calibri" pitchFamily="34" charset="-120"/>
+              </a:rPr>
+              <a:t>Talabre</a:t>
+            </a:r>
+            <a:endParaRPr lang="en-US" sz="1050" dirty="0"/>
+          </a:p>
+        </p:txBody>
+      </p:sp>
+      <p:sp>
+        <p:nvSpPr>
+          <p:cNvPr id="30" name="Text 26"/>
+          <p:cNvSpPr/>
+          <p:nvPr/>
+        </p:nvSpPr>
+        <p:spPr>
+          <a:xfrm>
+            <a:off x="2468880" y="4425696"/>
+            <a:ext cx="1051560" cy="237744"/>
+          </a:xfrm>
+          <a:prstGeom prst="rect">
+            <a:avLst/>
+          </a:prstGeom>
+          <a:noFill/>
+          <a:ln/>
+        </p:spPr>
+        <p:txBody>
+          <a:bodyPr wrap="square" lIns="0" tIns="0" rIns="0" bIns="0" rtlCol="0" anchor="ctr"/>
+          <a:lstStyle/>
+          <a:p>
+            <a:pPr algn="l" indent="0" marL="0">
+              <a:buNone/>
+            </a:pPr>
+            <a:r>
+              <a:rPr lang="en-US" sz="1050" dirty="0">
+                <a:solidFill>
+                  <a:srgbClr val="1A2433"/>
+                </a:solidFill>
+                <a:latin typeface="Calibri" pitchFamily="34" charset="0"/>
+                <a:ea typeface="Calibri" pitchFamily="34" charset="-122"/>
+                <a:cs typeface="Calibri" pitchFamily="34" charset="-120"/>
+              </a:rPr>
+              <a:t>251 · PNC N°196</a:t>
+            </a:r>
+            <a:endParaRPr lang="en-US" sz="1050" dirty="0"/>
+          </a:p>
+        </p:txBody>
+      </p:sp>
+      <p:sp>
+        <p:nvSpPr>
+          <p:cNvPr id="31" name="Text 27"/>
+          <p:cNvSpPr/>
+          <p:nvPr/>
+        </p:nvSpPr>
+        <p:spPr>
+          <a:xfrm>
+            <a:off x="3566160" y="4425696"/>
+            <a:ext cx="1371600" cy="237744"/>
+          </a:xfrm>
+          <a:prstGeom prst="rect">
+            <a:avLst/>
+          </a:prstGeom>
+          <a:noFill/>
+          <a:ln/>
+        </p:spPr>
+        <p:txBody>
+          <a:bodyPr wrap="square" lIns="0" tIns="0" rIns="0" bIns="0" rtlCol="0" anchor="ctr"/>
+          <a:lstStyle/>
+          <a:p>
+            <a:pPr algn="l" indent="0" marL="0">
+              <a:buNone/>
+            </a:pPr>
+            <a:r>
+              <a:rPr lang="en-US" sz="1050" dirty="0">
+                <a:solidFill>
+                  <a:srgbClr val="1A2433"/>
+                </a:solidFill>
+                <a:latin typeface="Calibri" pitchFamily="34" charset="0"/>
+                <a:ea typeface="Calibri" pitchFamily="34" charset="-122"/>
+                <a:cs typeface="Calibri" pitchFamily="34" charset="-120"/>
+              </a:rPr>
+              <a:t>Producto No Confor…</a:t>
+            </a:r>
+            <a:endParaRPr lang="en-US" sz="1050" dirty="0"/>
+          </a:p>
+        </p:txBody>
+      </p:sp>
+      <p:sp>
+        <p:nvSpPr>
+          <p:cNvPr id="32" name="Text 28"/>
+          <p:cNvSpPr/>
+          <p:nvPr/>
+        </p:nvSpPr>
+        <p:spPr>
+          <a:xfrm>
+            <a:off x="4983480" y="4425696"/>
+            <a:ext cx="1417320" cy="237744"/>
+          </a:xfrm>
+          <a:prstGeom prst="rect">
+            <a:avLst/>
+          </a:prstGeom>
+          <a:noFill/>
+          <a:ln/>
+        </p:spPr>
+        <p:txBody>
+          <a:bodyPr wrap="square" lIns="0" tIns="0" rIns="0" bIns="0" rtlCol="0" anchor="ctr"/>
+          <a:lstStyle/>
+          <a:p>
+            <a:pPr algn="l" indent="0" marL="0">
+              <a:buNone/>
+            </a:pPr>
+            <a:r>
+              <a:rPr lang="en-US" sz="1050" b="1" dirty="0">
+                <a:solidFill>
+                  <a:srgbClr val="C87A32"/>
+                </a:solidFill>
+                <a:latin typeface="Calibri" pitchFamily="34" charset="0"/>
+                <a:ea typeface="Calibri" pitchFamily="34" charset="-122"/>
+                <a:cs typeface="Calibri" pitchFamily="34" charset="-120"/>
+              </a:rPr>
+              <a:t>Externa · Cliente</a:t>
+            </a:r>
+            <a:endParaRPr lang="en-US" sz="1050" dirty="0"/>
+          </a:p>
+        </p:txBody>
+      </p:sp>
+      <p:sp>
+        <p:nvSpPr>
+          <p:cNvPr id="33" name="Text 29"/>
+          <p:cNvSpPr/>
+          <p:nvPr/>
+        </p:nvSpPr>
+        <p:spPr>
+          <a:xfrm>
+            <a:off x="6446520" y="4425696"/>
+            <a:ext cx="1097280" cy="237744"/>
+          </a:xfrm>
+          <a:prstGeom prst="rect">
+            <a:avLst/>
+          </a:prstGeom>
+          <a:noFill/>
+          <a:ln/>
+        </p:spPr>
+        <p:txBody>
+          <a:bodyPr wrap="square" lIns="0" tIns="0" rIns="0" bIns="0" rtlCol="0" anchor="ctr"/>
+          <a:lstStyle/>
+          <a:p>
+            <a:pPr algn="l" indent="0" marL="0">
+              <a:buNone/>
+            </a:pPr>
+            <a:r>
+              <a:rPr lang="en-US" sz="1050" dirty="0">
+                <a:solidFill>
+                  <a:srgbClr val="1A2433"/>
+                </a:solidFill>
+                <a:latin typeface="Calibri" pitchFamily="34" charset="0"/>
+                <a:ea typeface="Calibri" pitchFamily="34" charset="-122"/>
+                <a:cs typeface="Calibri" pitchFamily="34" charset="-120"/>
+              </a:rPr>
+              <a:t>PIPING</a:t>
+            </a:r>
+            <a:endParaRPr lang="en-US" sz="1050" dirty="0"/>
+          </a:p>
+        </p:txBody>
+      </p:sp>
+      <p:sp>
+        <p:nvSpPr>
+          <p:cNvPr id="34" name="Text 30"/>
+          <p:cNvSpPr/>
+          <p:nvPr/>
+        </p:nvSpPr>
+        <p:spPr>
+          <a:xfrm>
+            <a:off x="7589520" y="4425696"/>
+            <a:ext cx="1371600" cy="237744"/>
+          </a:xfrm>
+          <a:prstGeom prst="rect">
+            <a:avLst/>
+          </a:prstGeom>
+          <a:noFill/>
+          <a:ln/>
+        </p:spPr>
+        <p:txBody>
+          <a:bodyPr wrap="square" lIns="0" tIns="0" rIns="0" bIns="0" rtlCol="0" anchor="ctr"/>
+          <a:lstStyle/>
+          <a:p>
+            <a:pPr algn="l" indent="0" marL="0">
+              <a:buNone/>
+            </a:pPr>
+            <a:r>
+              <a:rPr lang="en-US" sz="1050" dirty="0">
+                <a:solidFill>
+                  <a:srgbClr val="1A2433"/>
+                </a:solidFill>
+                <a:latin typeface="Calibri" pitchFamily="34" charset="0"/>
+                <a:ea typeface="Calibri" pitchFamily="34" charset="-122"/>
+                <a:cs typeface="Calibri" pitchFamily="34" charset="-120"/>
+              </a:rPr>
+              <a:t>Oscar Nahuel P.</a:t>
+            </a:r>
+            <a:endParaRPr lang="en-US" sz="1050" dirty="0"/>
+          </a:p>
+        </p:txBody>
+      </p:sp>
+      <p:sp>
+        <p:nvSpPr>
+          <p:cNvPr id="35" name="Text 31"/>
+          <p:cNvSpPr/>
+          <p:nvPr/>
+        </p:nvSpPr>
+        <p:spPr>
+          <a:xfrm>
+            <a:off x="9006840" y="4425696"/>
+            <a:ext cx="868680" cy="237744"/>
+          </a:xfrm>
+          <a:prstGeom prst="rect">
+            <a:avLst/>
+          </a:prstGeom>
+          <a:noFill/>
+          <a:ln/>
+        </p:spPr>
+        <p:txBody>
+          <a:bodyPr wrap="square" lIns="0" tIns="0" rIns="0" bIns="0" rtlCol="0" anchor="ctr"/>
+          <a:lstStyle/>
+          <a:p>
+            <a:pPr algn="l" indent="0" marL="0">
+              <a:buNone/>
+            </a:pPr>
+            <a:r>
+              <a:rPr lang="en-US" sz="1050" dirty="0">
+                <a:solidFill>
+                  <a:srgbClr val="C0392B"/>
+                </a:solidFill>
+                <a:latin typeface="Calibri" pitchFamily="34" charset="0"/>
+                <a:ea typeface="Calibri" pitchFamily="34" charset="-122"/>
+                <a:cs typeface="Calibri" pitchFamily="34" charset="-120"/>
+              </a:rPr>
+              <a:t>Iniciado</a:t>
+            </a:r>
+            <a:endParaRPr lang="en-US" sz="1050" dirty="0"/>
+          </a:p>
+        </p:txBody>
+      </p:sp>
+      <p:sp>
+        <p:nvSpPr>
+          <p:cNvPr id="36" name="Text 32"/>
+          <p:cNvSpPr/>
+          <p:nvPr/>
+        </p:nvSpPr>
+        <p:spPr>
+          <a:xfrm>
+            <a:off x="9921240" y="4425696"/>
+            <a:ext cx="1828800" cy="237744"/>
+          </a:xfrm>
+          <a:prstGeom prst="rect">
+            <a:avLst/>
+          </a:prstGeom>
+          <a:noFill/>
+          <a:ln/>
+        </p:spPr>
+        <p:txBody>
+          <a:bodyPr wrap="square" lIns="0" tIns="0" rIns="0" bIns="0" rtlCol="0" anchor="ctr"/>
+          <a:lstStyle/>
+          <a:p>
+            <a:pPr algn="l" indent="0" marL="0">
+              <a:buNone/>
+            </a:pPr>
+            <a:r>
+              <a:rPr lang="en-US" sz="1000" dirty="0">
+                <a:solidFill>
+                  <a:srgbClr val="1A2433"/>
+                </a:solidFill>
+                <a:latin typeface="Calibri" pitchFamily="34" charset="0"/>
+                <a:ea typeface="Calibri" pitchFamily="34" charset="-122"/>
+                <a:cs typeface="Calibri" pitchFamily="34" charset="-120"/>
+              </a:rPr>
+              <a:t>Filtración de agua consider…</a:t>
+            </a:r>
+            <a:endParaRPr lang="en-US" sz="1000" dirty="0"/>
+          </a:p>
+        </p:txBody>
+      </p:sp>
+      <p:sp>
+        <p:nvSpPr>
+          <p:cNvPr id="37" name="Shape 33"/>
+          <p:cNvSpPr/>
+          <p:nvPr/>
+        </p:nvSpPr>
+        <p:spPr>
+          <a:xfrm>
+            <a:off x="502920" y="4700016"/>
+            <a:ext cx="11247120" cy="0"/>
+          </a:xfrm>
+          <a:prstGeom prst="line">
+            <a:avLst/>
+          </a:prstGeom>
+          <a:noFill/>
+          <a:ln w="9525">
+            <a:solidFill>
+              <a:srgbClr val="D9DFE6"/>
+            </a:solidFill>
+            <a:prstDash val="solid"/>
+          </a:ln>
+        </p:spPr>
+      </p:sp>
+      <p:sp>
+        <p:nvSpPr>
+          <p:cNvPr id="38" name="Shape 34"/>
+          <p:cNvSpPr/>
+          <p:nvPr/>
+        </p:nvSpPr>
+        <p:spPr>
+          <a:xfrm>
+            <a:off x="457200" y="4709160"/>
+            <a:ext cx="11292840" cy="329184"/>
+          </a:xfrm>
+          <a:prstGeom prst="rect">
+            <a:avLst/>
+          </a:prstGeom>
+          <a:solidFill>
+            <a:srgbClr val="FFFFFF"/>
+          </a:solidFill>
+          <a:ln/>
+        </p:spPr>
+      </p:sp>
+      <p:sp>
+        <p:nvSpPr>
+          <p:cNvPr id="39" name="Text 35"/>
+          <p:cNvSpPr/>
+          <p:nvPr/>
+        </p:nvSpPr>
+        <p:spPr>
+          <a:xfrm>
+            <a:off x="502920" y="4754880"/>
+            <a:ext cx="822960" cy="237744"/>
+          </a:xfrm>
+          <a:prstGeom prst="rect">
+            <a:avLst/>
+          </a:prstGeom>
+          <a:noFill/>
+          <a:ln/>
+        </p:spPr>
+        <p:txBody>
+          <a:bodyPr wrap="square" lIns="0" tIns="0" rIns="0" bIns="0" rtlCol="0" anchor="ctr"/>
+          <a:lstStyle/>
+          <a:p>
+            <a:pPr algn="l" indent="0" marL="0">
+              <a:buNone/>
+            </a:pPr>
+            <a:r>
+              <a:rPr lang="en-US" sz="1050" dirty="0">
+                <a:solidFill>
+                  <a:srgbClr val="1A2433"/>
+                </a:solidFill>
+                <a:latin typeface="Calibri" pitchFamily="34" charset="0"/>
+                <a:ea typeface="Calibri" pitchFamily="34" charset="-122"/>
+                <a:cs typeface="Calibri" pitchFamily="34" charset="-120"/>
+              </a:rPr>
+              <a:t>16-09-2026</a:t>
+            </a:r>
+            <a:endParaRPr lang="en-US" sz="1050" dirty="0"/>
+          </a:p>
+        </p:txBody>
+      </p:sp>
+      <p:sp>
+        <p:nvSpPr>
+          <p:cNvPr id="40" name="Text 36"/>
+          <p:cNvSpPr/>
+          <p:nvPr/>
+        </p:nvSpPr>
+        <p:spPr>
+          <a:xfrm>
+            <a:off x="1371600" y="4754880"/>
+            <a:ext cx="1051560" cy="237744"/>
+          </a:xfrm>
+          <a:prstGeom prst="rect">
+            <a:avLst/>
+          </a:prstGeom>
+          <a:noFill/>
+          <a:ln/>
+        </p:spPr>
+        <p:txBody>
+          <a:bodyPr wrap="square" lIns="0" tIns="0" rIns="0" bIns="0" rtlCol="0" anchor="ctr"/>
+          <a:lstStyle/>
+          <a:p>
+            <a:pPr algn="l" indent="0" marL="0">
+              <a:buNone/>
+            </a:pPr>
+            <a:r>
+              <a:rPr lang="en-US" sz="1050" dirty="0">
+                <a:solidFill>
+                  <a:srgbClr val="1A2433"/>
+                </a:solidFill>
+                <a:latin typeface="Calibri" pitchFamily="34" charset="0"/>
+                <a:ea typeface="Calibri" pitchFamily="34" charset="-122"/>
+                <a:cs typeface="Calibri" pitchFamily="34" charset="-120"/>
+              </a:rPr>
+              <a:t>Arqueros</a:t>
+            </a:r>
+            <a:endParaRPr lang="en-US" sz="1050" dirty="0"/>
+          </a:p>
+        </p:txBody>
+      </p:sp>
+      <p:sp>
+        <p:nvSpPr>
+          <p:cNvPr id="41" name="Text 37"/>
+          <p:cNvSpPr/>
+          <p:nvPr/>
+        </p:nvSpPr>
+        <p:spPr>
+          <a:xfrm>
+            <a:off x="2468880" y="4754880"/>
+            <a:ext cx="1051560" cy="237744"/>
+          </a:xfrm>
+          <a:prstGeom prst="rect">
+            <a:avLst/>
+          </a:prstGeom>
+          <a:noFill/>
+          <a:ln/>
+        </p:spPr>
+        <p:txBody>
+          <a:bodyPr wrap="square" lIns="0" tIns="0" rIns="0" bIns="0" rtlCol="0" anchor="ctr"/>
+          <a:lstStyle/>
+          <a:p>
+            <a:pPr algn="l" indent="0" marL="0">
+              <a:buNone/>
+            </a:pPr>
+            <a:r>
+              <a:rPr lang="en-US" sz="1050" dirty="0">
+                <a:solidFill>
+                  <a:srgbClr val="1A2433"/>
+                </a:solidFill>
+                <a:latin typeface="Calibri" pitchFamily="34" charset="0"/>
+                <a:ea typeface="Calibri" pitchFamily="34" charset="-122"/>
+                <a:cs typeface="Calibri" pitchFamily="34" charset="-120"/>
+              </a:rPr>
+              <a:t>MASA-92</a:t>
+            </a:r>
+            <a:endParaRPr lang="en-US" sz="1050" dirty="0"/>
+          </a:p>
+        </p:txBody>
+      </p:sp>
+      <p:sp>
+        <p:nvSpPr>
+          <p:cNvPr id="42" name="Text 38"/>
+          <p:cNvSpPr/>
+          <p:nvPr/>
+        </p:nvSpPr>
+        <p:spPr>
+          <a:xfrm>
+            <a:off x="3566160" y="4754880"/>
+            <a:ext cx="1371600" cy="237744"/>
+          </a:xfrm>
+          <a:prstGeom prst="rect">
+            <a:avLst/>
+          </a:prstGeom>
+          <a:noFill/>
+          <a:ln/>
+        </p:spPr>
+        <p:txBody>
+          <a:bodyPr wrap="square" lIns="0" tIns="0" rIns="0" bIns="0" rtlCol="0" anchor="ctr"/>
+          <a:lstStyle/>
+          <a:p>
+            <a:pPr algn="l" indent="0" marL="0">
+              <a:buNone/>
+            </a:pPr>
+            <a:r>
+              <a:rPr lang="en-US" sz="1050" dirty="0">
+                <a:solidFill>
+                  <a:srgbClr val="1A2433"/>
+                </a:solidFill>
+                <a:latin typeface="Calibri" pitchFamily="34" charset="0"/>
+                <a:ea typeface="Calibri" pitchFamily="34" charset="-122"/>
+                <a:cs typeface="Calibri" pitchFamily="34" charset="-120"/>
+              </a:rPr>
+              <a:t>No Conformidad</a:t>
+            </a:r>
+            <a:endParaRPr lang="en-US" sz="1050" dirty="0"/>
+          </a:p>
+        </p:txBody>
+      </p:sp>
+      <p:sp>
+        <p:nvSpPr>
+          <p:cNvPr id="43" name="Text 39"/>
+          <p:cNvSpPr/>
+          <p:nvPr/>
+        </p:nvSpPr>
+        <p:spPr>
+          <a:xfrm>
+            <a:off x="4983480" y="4754880"/>
+            <a:ext cx="1417320" cy="237744"/>
+          </a:xfrm>
+          <a:prstGeom prst="rect">
+            <a:avLst/>
+          </a:prstGeom>
+          <a:noFill/>
+          <a:ln/>
+        </p:spPr>
+        <p:txBody>
+          <a:bodyPr wrap="square" lIns="0" tIns="0" rIns="0" bIns="0" rtlCol="0" anchor="ctr"/>
+          <a:lstStyle/>
+          <a:p>
+            <a:pPr algn="l" indent="0" marL="0">
+              <a:buNone/>
+            </a:pPr>
+            <a:r>
+              <a:rPr lang="en-US" sz="1050" b="1" dirty="0">
+                <a:solidFill>
+                  <a:srgbClr val="C87A32"/>
+                </a:solidFill>
+                <a:latin typeface="Calibri" pitchFamily="34" charset="0"/>
+                <a:ea typeface="Calibri" pitchFamily="34" charset="-122"/>
+                <a:cs typeface="Calibri" pitchFamily="34" charset="-120"/>
+              </a:rPr>
+              <a:t>Externa · Cliente</a:t>
+            </a:r>
+            <a:endParaRPr lang="en-US" sz="1050" dirty="0"/>
+          </a:p>
+        </p:txBody>
+      </p:sp>
+      <p:sp>
+        <p:nvSpPr>
+          <p:cNvPr id="44" name="Text 40"/>
+          <p:cNvSpPr/>
+          <p:nvPr/>
+        </p:nvSpPr>
+        <p:spPr>
+          <a:xfrm>
+            <a:off x="6446520" y="4754880"/>
+            <a:ext cx="1097280" cy="237744"/>
+          </a:xfrm>
+          <a:prstGeom prst="rect">
+            <a:avLst/>
+          </a:prstGeom>
+          <a:noFill/>
+          <a:ln/>
+        </p:spPr>
+        <p:txBody>
+          <a:bodyPr wrap="square" lIns="0" tIns="0" rIns="0" bIns="0" rtlCol="0" anchor="ctr"/>
+          <a:lstStyle/>
+          <a:p>
+            <a:pPr algn="l" indent="0" marL="0">
+              <a:buNone/>
+            </a:pPr>
+            <a:r>
+              <a:rPr lang="en-US" sz="1050" dirty="0">
+                <a:solidFill>
+                  <a:srgbClr val="1A2433"/>
+                </a:solidFill>
+                <a:latin typeface="Calibri" pitchFamily="34" charset="0"/>
+                <a:ea typeface="Calibri" pitchFamily="34" charset="-122"/>
+                <a:cs typeface="Calibri" pitchFamily="34" charset="-120"/>
+              </a:rPr>
+              <a:t>OO.CC</a:t>
+            </a:r>
+            <a:endParaRPr lang="en-US" sz="1050" dirty="0"/>
+          </a:p>
+        </p:txBody>
+      </p:sp>
+      <p:sp>
+        <p:nvSpPr>
+          <p:cNvPr id="45" name="Text 41"/>
+          <p:cNvSpPr/>
+          <p:nvPr/>
+        </p:nvSpPr>
+        <p:spPr>
+          <a:xfrm>
+            <a:off x="7589520" y="4754880"/>
+            <a:ext cx="1371600" cy="237744"/>
+          </a:xfrm>
+          <a:prstGeom prst="rect">
+            <a:avLst/>
+          </a:prstGeom>
+          <a:noFill/>
+          <a:ln/>
+        </p:spPr>
+        <p:txBody>
+          <a:bodyPr wrap="square" lIns="0" tIns="0" rIns="0" bIns="0" rtlCol="0" anchor="ctr"/>
+          <a:lstStyle/>
+          <a:p>
+            <a:pPr algn="l" indent="0" marL="0">
+              <a:buNone/>
+            </a:pPr>
+            <a:r>
+              <a:rPr lang="en-US" sz="1050" dirty="0">
+                <a:solidFill>
+                  <a:srgbClr val="1A2433"/>
+                </a:solidFill>
+                <a:latin typeface="Calibri" pitchFamily="34" charset="0"/>
+                <a:ea typeface="Calibri" pitchFamily="34" charset="-122"/>
+                <a:cs typeface="Calibri" pitchFamily="34" charset="-120"/>
+              </a:rPr>
+              <a:t>Sin asignar</a:t>
+            </a:r>
+            <a:endParaRPr lang="en-US" sz="1050" dirty="0"/>
+          </a:p>
+        </p:txBody>
+      </p:sp>
+      <p:sp>
+        <p:nvSpPr>
+          <p:cNvPr id="46" name="Text 42"/>
+          <p:cNvSpPr/>
+          <p:nvPr/>
+        </p:nvSpPr>
+        <p:spPr>
+          <a:xfrm>
+            <a:off x="9006840" y="4754880"/>
+            <a:ext cx="868680" cy="237744"/>
+          </a:xfrm>
+          <a:prstGeom prst="rect">
+            <a:avLst/>
+          </a:prstGeom>
+          <a:noFill/>
+          <a:ln/>
+        </p:spPr>
+        <p:txBody>
+          <a:bodyPr wrap="square" lIns="0" tIns="0" rIns="0" bIns="0" rtlCol="0" anchor="ctr"/>
+          <a:lstStyle/>
+          <a:p>
+            <a:pPr algn="l" indent="0" marL="0">
+              <a:buNone/>
+            </a:pPr>
+            <a:r>
+              <a:rPr lang="en-US" sz="1050" dirty="0">
+                <a:solidFill>
+                  <a:srgbClr val="C0392B"/>
+                </a:solidFill>
+                <a:latin typeface="Calibri" pitchFamily="34" charset="0"/>
+                <a:ea typeface="Calibri" pitchFamily="34" charset="-122"/>
+                <a:cs typeface="Calibri" pitchFamily="34" charset="-120"/>
+              </a:rPr>
+              <a:t>Listo para…</a:t>
+            </a:r>
+            <a:endParaRPr lang="en-US" sz="1050" dirty="0"/>
+          </a:p>
+        </p:txBody>
+      </p:sp>
+      <p:sp>
+        <p:nvSpPr>
+          <p:cNvPr id="47" name="Text 43"/>
+          <p:cNvSpPr/>
+          <p:nvPr/>
+        </p:nvSpPr>
+        <p:spPr>
+          <a:xfrm>
+            <a:off x="9921240" y="4754880"/>
+            <a:ext cx="1828800" cy="237744"/>
+          </a:xfrm>
+          <a:prstGeom prst="rect">
+            <a:avLst/>
+          </a:prstGeom>
+          <a:noFill/>
+          <a:ln/>
+        </p:spPr>
+        <p:txBody>
+          <a:bodyPr wrap="square" lIns="0" tIns="0" rIns="0" bIns="0" rtlCol="0" anchor="ctr"/>
+          <a:lstStyle/>
+          <a:p>
+            <a:pPr algn="l" indent="0" marL="0">
+              <a:buNone/>
+            </a:pPr>
+            <a:r>
+              <a:rPr lang="en-US" sz="1000" dirty="0">
+                <a:solidFill>
+                  <a:srgbClr val="1A2433"/>
+                </a:solidFill>
+                <a:latin typeface="Calibri" pitchFamily="34" charset="0"/>
+                <a:ea typeface="Calibri" pitchFamily="34" charset="-122"/>
+                <a:cs typeface="Calibri" pitchFamily="34" charset="-120"/>
+              </a:rPr>
+              <a:t>Cota plataforma de flotación</a:t>
+            </a:r>
+            <a:endParaRPr lang="en-US" sz="1000" dirty="0"/>
+          </a:p>
+        </p:txBody>
+      </p:sp>
+      <p:sp>
+        <p:nvSpPr>
+          <p:cNvPr id="48" name="Shape 44"/>
+          <p:cNvSpPr/>
+          <p:nvPr/>
+        </p:nvSpPr>
+        <p:spPr>
+          <a:xfrm>
+            <a:off x="502920" y="5029200"/>
+            <a:ext cx="11247120" cy="0"/>
+          </a:xfrm>
+          <a:prstGeom prst="line">
+            <a:avLst/>
+          </a:prstGeom>
+          <a:noFill/>
+          <a:ln w="9525">
+            <a:solidFill>
+              <a:srgbClr val="D9DFE6"/>
+            </a:solidFill>
+            <a:prstDash val="solid"/>
+          </a:ln>
+        </p:spPr>
+      </p:sp>
+      <p:sp>
+        <p:nvSpPr>
+          <p:cNvPr id="49" name="Text 45"/>
+          <p:cNvSpPr/>
+          <p:nvPr/>
+        </p:nvSpPr>
+        <p:spPr>
+          <a:xfrm>
+            <a:off x="502920" y="5084064"/>
+            <a:ext cx="822960" cy="237744"/>
+          </a:xfrm>
+          <a:prstGeom prst="rect">
+            <a:avLst/>
+          </a:prstGeom>
+          <a:noFill/>
+          <a:ln/>
+        </p:spPr>
+        <p:txBody>
+          <a:bodyPr wrap="square" lIns="0" tIns="0" rIns="0" bIns="0" rtlCol="0" anchor="ctr"/>
+          <a:lstStyle/>
+          <a:p>
+            <a:pPr algn="l" indent="0" marL="0">
+              <a:buNone/>
+            </a:pPr>
+            <a:r>
+              <a:rPr lang="en-US" sz="1050" dirty="0">
+                <a:solidFill>
+                  <a:srgbClr val="1A2433"/>
+                </a:solidFill>
+                <a:latin typeface="Calibri" pitchFamily="34" charset="0"/>
+                <a:ea typeface="Calibri" pitchFamily="34" charset="-122"/>
+                <a:cs typeface="Calibri" pitchFamily="34" charset="-120"/>
+              </a:rPr>
+              <a:t>16-09-2026</a:t>
+            </a:r>
+            <a:endParaRPr lang="en-US" sz="1050" dirty="0"/>
+          </a:p>
+        </p:txBody>
+      </p:sp>
+      <p:sp>
+        <p:nvSpPr>
+          <p:cNvPr id="50" name="Text 46"/>
+          <p:cNvSpPr/>
+          <p:nvPr/>
+        </p:nvSpPr>
+        <p:spPr>
+          <a:xfrm>
+            <a:off x="1371600" y="5084064"/>
+            <a:ext cx="1051560" cy="237744"/>
+          </a:xfrm>
+          <a:prstGeom prst="rect">
+            <a:avLst/>
+          </a:prstGeom>
+          <a:noFill/>
+          <a:ln/>
+        </p:spPr>
+        <p:txBody>
+          <a:bodyPr wrap="square" lIns="0" tIns="0" rIns="0" bIns="0" rtlCol="0" anchor="ctr"/>
+          <a:lstStyle/>
+          <a:p>
+            <a:pPr algn="l" indent="0" marL="0">
+              <a:buNone/>
+            </a:pPr>
+            <a:r>
+              <a:rPr lang="en-US" sz="1050" dirty="0">
+                <a:solidFill>
+                  <a:srgbClr val="1A2433"/>
+                </a:solidFill>
+                <a:latin typeface="Calibri" pitchFamily="34" charset="0"/>
+                <a:ea typeface="Calibri" pitchFamily="34" charset="-122"/>
+                <a:cs typeface="Calibri" pitchFamily="34" charset="-120"/>
+              </a:rPr>
+              <a:t>Arqueros</a:t>
+            </a:r>
+            <a:endParaRPr lang="en-US" sz="1050" dirty="0"/>
+          </a:p>
+        </p:txBody>
+      </p:sp>
+      <p:sp>
+        <p:nvSpPr>
+          <p:cNvPr id="51" name="Text 47"/>
+          <p:cNvSpPr/>
+          <p:nvPr/>
+        </p:nvSpPr>
+        <p:spPr>
+          <a:xfrm>
+            <a:off x="2468880" y="5084064"/>
+            <a:ext cx="1051560" cy="237744"/>
+          </a:xfrm>
+          <a:prstGeom prst="rect">
+            <a:avLst/>
+          </a:prstGeom>
+          <a:noFill/>
+          <a:ln/>
+        </p:spPr>
+        <p:txBody>
+          <a:bodyPr wrap="square" lIns="0" tIns="0" rIns="0" bIns="0" rtlCol="0" anchor="ctr"/>
+          <a:lstStyle/>
+          <a:p>
+            <a:pPr algn="l" indent="0" marL="0">
+              <a:buNone/>
+            </a:pPr>
+            <a:r>
+              <a:rPr lang="en-US" sz="1050" dirty="0">
+                <a:solidFill>
+                  <a:srgbClr val="1A2433"/>
+                </a:solidFill>
+                <a:latin typeface="Calibri" pitchFamily="34" charset="0"/>
+                <a:ea typeface="Calibri" pitchFamily="34" charset="-122"/>
+                <a:cs typeface="Calibri" pitchFamily="34" charset="-120"/>
+              </a:rPr>
+              <a:t>MASA-93</a:t>
+            </a:r>
+            <a:endParaRPr lang="en-US" sz="1050" dirty="0"/>
+          </a:p>
+        </p:txBody>
+      </p:sp>
+      <p:sp>
+        <p:nvSpPr>
+          <p:cNvPr id="52" name="Text 48"/>
+          <p:cNvSpPr/>
+          <p:nvPr/>
+        </p:nvSpPr>
+        <p:spPr>
+          <a:xfrm>
+            <a:off x="3566160" y="5084064"/>
+            <a:ext cx="1371600" cy="237744"/>
+          </a:xfrm>
+          <a:prstGeom prst="rect">
+            <a:avLst/>
+          </a:prstGeom>
+          <a:noFill/>
+          <a:ln/>
+        </p:spPr>
+        <p:txBody>
+          <a:bodyPr wrap="square" lIns="0" tIns="0" rIns="0" bIns="0" rtlCol="0" anchor="ctr"/>
+          <a:lstStyle/>
+          <a:p>
+            <a:pPr algn="l" indent="0" marL="0">
+              <a:buNone/>
+            </a:pPr>
+            <a:r>
+              <a:rPr lang="en-US" sz="1050" dirty="0">
+                <a:solidFill>
+                  <a:srgbClr val="1A2433"/>
+                </a:solidFill>
+                <a:latin typeface="Calibri" pitchFamily="34" charset="0"/>
+                <a:ea typeface="Calibri" pitchFamily="34" charset="-122"/>
+                <a:cs typeface="Calibri" pitchFamily="34" charset="-120"/>
+              </a:rPr>
+              <a:t>No Conformidad</a:t>
+            </a:r>
+            <a:endParaRPr lang="en-US" sz="1050" dirty="0"/>
+          </a:p>
+        </p:txBody>
+      </p:sp>
+      <p:sp>
+        <p:nvSpPr>
+          <p:cNvPr id="53" name="Text 49"/>
+          <p:cNvSpPr/>
+          <p:nvPr/>
+        </p:nvSpPr>
+        <p:spPr>
+          <a:xfrm>
+            <a:off x="4983480" y="5084064"/>
+            <a:ext cx="1417320" cy="237744"/>
+          </a:xfrm>
+          <a:prstGeom prst="rect">
+            <a:avLst/>
+          </a:prstGeom>
+          <a:noFill/>
+          <a:ln/>
+        </p:spPr>
+        <p:txBody>
+          <a:bodyPr wrap="square" lIns="0" tIns="0" rIns="0" bIns="0" rtlCol="0" anchor="ctr"/>
+          <a:lstStyle/>
+          <a:p>
+            <a:pPr algn="l" indent="0" marL="0">
+              <a:buNone/>
+            </a:pPr>
+            <a:r>
+              <a:rPr lang="en-US" sz="1050" b="1" dirty="0">
+                <a:solidFill>
+                  <a:srgbClr val="C87A32"/>
+                </a:solidFill>
+                <a:latin typeface="Calibri" pitchFamily="34" charset="0"/>
+                <a:ea typeface="Calibri" pitchFamily="34" charset="-122"/>
+                <a:cs typeface="Calibri" pitchFamily="34" charset="-120"/>
+              </a:rPr>
+              <a:t>Externa · Cliente</a:t>
+            </a:r>
+            <a:endParaRPr lang="en-US" sz="1050" dirty="0"/>
+          </a:p>
+        </p:txBody>
+      </p:sp>
+      <p:sp>
+        <p:nvSpPr>
+          <p:cNvPr id="54" name="Text 50"/>
+          <p:cNvSpPr/>
+          <p:nvPr/>
+        </p:nvSpPr>
+        <p:spPr>
+          <a:xfrm>
+            <a:off x="6446520" y="5084064"/>
+            <a:ext cx="1097280" cy="237744"/>
+          </a:xfrm>
+          <a:prstGeom prst="rect">
+            <a:avLst/>
+          </a:prstGeom>
+          <a:noFill/>
+          <a:ln/>
+        </p:spPr>
+        <p:txBody>
+          <a:bodyPr wrap="square" lIns="0" tIns="0" rIns="0" bIns="0" rtlCol="0" anchor="ctr"/>
+          <a:lstStyle/>
+          <a:p>
+            <a:pPr algn="l" indent="0" marL="0">
+              <a:buNone/>
+            </a:pPr>
+            <a:r>
+              <a:rPr lang="en-US" sz="1050" dirty="0">
+                <a:solidFill>
+                  <a:srgbClr val="1A2433"/>
+                </a:solidFill>
+                <a:latin typeface="Calibri" pitchFamily="34" charset="0"/>
+                <a:ea typeface="Calibri" pitchFamily="34" charset="-122"/>
+                <a:cs typeface="Calibri" pitchFamily="34" charset="-120"/>
+              </a:rPr>
+              <a:t>MECÁNICA</a:t>
+            </a:r>
+            <a:endParaRPr lang="en-US" sz="1050" dirty="0"/>
+          </a:p>
+        </p:txBody>
+      </p:sp>
+      <p:sp>
+        <p:nvSpPr>
+          <p:cNvPr id="55" name="Text 51"/>
+          <p:cNvSpPr/>
+          <p:nvPr/>
+        </p:nvSpPr>
+        <p:spPr>
+          <a:xfrm>
+            <a:off x="7589520" y="5084064"/>
+            <a:ext cx="1371600" cy="237744"/>
+          </a:xfrm>
+          <a:prstGeom prst="rect">
+            <a:avLst/>
+          </a:prstGeom>
+          <a:noFill/>
+          <a:ln/>
+        </p:spPr>
+        <p:txBody>
+          <a:bodyPr wrap="square" lIns="0" tIns="0" rIns="0" bIns="0" rtlCol="0" anchor="ctr"/>
+          <a:lstStyle/>
+          <a:p>
+            <a:pPr algn="l" indent="0" marL="0">
+              <a:buNone/>
+            </a:pPr>
+            <a:r>
+              <a:rPr lang="en-US" sz="1050" dirty="0">
+                <a:solidFill>
+                  <a:srgbClr val="1A2433"/>
+                </a:solidFill>
+                <a:latin typeface="Calibri" pitchFamily="34" charset="0"/>
+                <a:ea typeface="Calibri" pitchFamily="34" charset="-122"/>
+                <a:cs typeface="Calibri" pitchFamily="34" charset="-120"/>
+              </a:rPr>
+              <a:t>Sin asignar</a:t>
+            </a:r>
+            <a:endParaRPr lang="en-US" sz="1050" dirty="0"/>
+          </a:p>
+        </p:txBody>
+      </p:sp>
+      <p:sp>
+        <p:nvSpPr>
+          <p:cNvPr id="56" name="Text 52"/>
+          <p:cNvSpPr/>
+          <p:nvPr/>
+        </p:nvSpPr>
+        <p:spPr>
+          <a:xfrm>
+            <a:off x="9006840" y="5084064"/>
+            <a:ext cx="868680" cy="237744"/>
+          </a:xfrm>
+          <a:prstGeom prst="rect">
+            <a:avLst/>
+          </a:prstGeom>
+          <a:noFill/>
+          <a:ln/>
+        </p:spPr>
+        <p:txBody>
+          <a:bodyPr wrap="square" lIns="0" tIns="0" rIns="0" bIns="0" rtlCol="0" anchor="ctr"/>
+          <a:lstStyle/>
+          <a:p>
+            <a:pPr algn="l" indent="0" marL="0">
+              <a:buNone/>
+            </a:pPr>
+            <a:r>
+              <a:rPr lang="en-US" sz="1050" dirty="0">
+                <a:solidFill>
+                  <a:srgbClr val="C0392B"/>
+                </a:solidFill>
+                <a:latin typeface="Calibri" pitchFamily="34" charset="0"/>
+                <a:ea typeface="Calibri" pitchFamily="34" charset="-122"/>
+                <a:cs typeface="Calibri" pitchFamily="34" charset="-120"/>
+              </a:rPr>
+              <a:t>Listo para…</a:t>
+            </a:r>
+            <a:endParaRPr lang="en-US" sz="1050" dirty="0"/>
+          </a:p>
+        </p:txBody>
+      </p:sp>
+      <p:sp>
+        <p:nvSpPr>
+          <p:cNvPr id="57" name="Text 53"/>
+          <p:cNvSpPr/>
+          <p:nvPr/>
+        </p:nvSpPr>
+        <p:spPr>
+          <a:xfrm>
+            <a:off x="9921240" y="5084064"/>
+            <a:ext cx="1828800" cy="237744"/>
+          </a:xfrm>
+          <a:prstGeom prst="rect">
+            <a:avLst/>
+          </a:prstGeom>
+          <a:noFill/>
+          <a:ln/>
+        </p:spPr>
+        <p:txBody>
+          <a:bodyPr wrap="square" lIns="0" tIns="0" rIns="0" bIns="0" rtlCol="0" anchor="ctr"/>
+          <a:lstStyle/>
+          <a:p>
+            <a:pPr algn="l" indent="0" marL="0">
+              <a:buNone/>
+            </a:pPr>
+            <a:r>
+              <a:rPr lang="en-US" sz="1000" dirty="0">
+                <a:solidFill>
+                  <a:srgbClr val="1A2433"/>
+                </a:solidFill>
+                <a:latin typeface="Calibri" pitchFamily="34" charset="0"/>
+                <a:ea typeface="Calibri" pitchFamily="34" charset="-122"/>
+                <a:cs typeface="Calibri" pitchFamily="34" charset="-120"/>
+              </a:rPr>
+              <a:t>Daño a PAD del molino de bo…</a:t>
+            </a:r>
+            <a:endParaRPr lang="en-US" sz="1000" dirty="0"/>
+          </a:p>
+        </p:txBody>
+      </p:sp>
+      <p:sp>
+        <p:nvSpPr>
+          <p:cNvPr id="58" name="Shape 54"/>
+          <p:cNvSpPr/>
+          <p:nvPr/>
+        </p:nvSpPr>
+        <p:spPr>
+          <a:xfrm>
+            <a:off x="502920" y="5358384"/>
+            <a:ext cx="11247120" cy="0"/>
+          </a:xfrm>
+          <a:prstGeom prst="line">
+            <a:avLst/>
+          </a:prstGeom>
+          <a:noFill/>
+          <a:ln w="9525">
+            <a:solidFill>
+              <a:srgbClr val="D9DFE6"/>
+            </a:solidFill>
+            <a:prstDash val="solid"/>
+          </a:ln>
+        </p:spPr>
+      </p:sp>
+      <p:sp>
+        <p:nvSpPr>
+          <p:cNvPr id="59" name="Shape 55"/>
+          <p:cNvSpPr/>
+          <p:nvPr/>
+        </p:nvSpPr>
+        <p:spPr>
+          <a:xfrm>
+            <a:off x="457200" y="5367528"/>
+            <a:ext cx="11292840" cy="329184"/>
+          </a:xfrm>
+          <a:prstGeom prst="rect">
+            <a:avLst/>
+          </a:prstGeom>
+          <a:solidFill>
+            <a:srgbClr val="FFFFFF"/>
+          </a:solidFill>
+          <a:ln/>
+        </p:spPr>
+      </p:sp>
+      <p:sp>
+        <p:nvSpPr>
+          <p:cNvPr id="60" name="Text 56"/>
+          <p:cNvSpPr/>
+          <p:nvPr/>
+        </p:nvSpPr>
+        <p:spPr>
+          <a:xfrm>
+            <a:off x="502920" y="5413248"/>
+            <a:ext cx="822960" cy="237744"/>
+          </a:xfrm>
+          <a:prstGeom prst="rect">
+            <a:avLst/>
+          </a:prstGeom>
+          <a:noFill/>
+          <a:ln/>
+        </p:spPr>
+        <p:txBody>
+          <a:bodyPr wrap="square" lIns="0" tIns="0" rIns="0" bIns="0" rtlCol="0" anchor="ctr"/>
+          <a:lstStyle/>
+          <a:p>
+            <a:pPr algn="l" indent="0" marL="0">
+              <a:buNone/>
+            </a:pPr>
+            <a:r>
+              <a:rPr lang="en-US" sz="1050" dirty="0">
+                <a:solidFill>
+                  <a:srgbClr val="1A2433"/>
+                </a:solidFill>
+                <a:latin typeface="Calibri" pitchFamily="34" charset="0"/>
+                <a:ea typeface="Calibri" pitchFamily="34" charset="-122"/>
+                <a:cs typeface="Calibri" pitchFamily="34" charset="-120"/>
+              </a:rPr>
+              <a:t>16-09-2026</a:t>
+            </a:r>
+            <a:endParaRPr lang="en-US" sz="1050" dirty="0"/>
+          </a:p>
+        </p:txBody>
+      </p:sp>
+      <p:sp>
+        <p:nvSpPr>
+          <p:cNvPr id="61" name="Text 57"/>
+          <p:cNvSpPr/>
+          <p:nvPr/>
+        </p:nvSpPr>
+        <p:spPr>
+          <a:xfrm>
+            <a:off x="1371600" y="5413248"/>
+            <a:ext cx="1051560" cy="237744"/>
+          </a:xfrm>
+          <a:prstGeom prst="rect">
+            <a:avLst/>
+          </a:prstGeom>
+          <a:noFill/>
+          <a:ln/>
+        </p:spPr>
+        <p:txBody>
+          <a:bodyPr wrap="square" lIns="0" tIns="0" rIns="0" bIns="0" rtlCol="0" anchor="ctr"/>
+          <a:lstStyle/>
+          <a:p>
+            <a:pPr algn="l" indent="0" marL="0">
+              <a:buNone/>
+            </a:pPr>
+            <a:r>
+              <a:rPr lang="en-US" sz="1050" dirty="0">
+                <a:solidFill>
+                  <a:srgbClr val="1A2433"/>
+                </a:solidFill>
+                <a:latin typeface="Calibri" pitchFamily="34" charset="0"/>
+                <a:ea typeface="Calibri" pitchFamily="34" charset="-122"/>
+                <a:cs typeface="Calibri" pitchFamily="34" charset="-120"/>
+              </a:rPr>
+              <a:t>Talabre</a:t>
+            </a:r>
+            <a:endParaRPr lang="en-US" sz="1050" dirty="0"/>
+          </a:p>
+        </p:txBody>
+      </p:sp>
+      <p:sp>
+        <p:nvSpPr>
+          <p:cNvPr id="62" name="Text 58"/>
+          <p:cNvSpPr/>
+          <p:nvPr/>
+        </p:nvSpPr>
+        <p:spPr>
+          <a:xfrm>
+            <a:off x="2468880" y="5413248"/>
+            <a:ext cx="1051560" cy="237744"/>
+          </a:xfrm>
+          <a:prstGeom prst="rect">
+            <a:avLst/>
+          </a:prstGeom>
+          <a:noFill/>
+          <a:ln/>
+        </p:spPr>
+        <p:txBody>
+          <a:bodyPr wrap="square" lIns="0" tIns="0" rIns="0" bIns="0" rtlCol="0" anchor="ctr"/>
+          <a:lstStyle/>
+          <a:p>
+            <a:pPr algn="l" indent="0" marL="0">
+              <a:buNone/>
+            </a:pPr>
+            <a:r>
+              <a:rPr lang="en-US" sz="1050" dirty="0">
+                <a:solidFill>
+                  <a:srgbClr val="1A2433"/>
+                </a:solidFill>
+                <a:latin typeface="Calibri" pitchFamily="34" charset="0"/>
+                <a:ea typeface="Calibri" pitchFamily="34" charset="-122"/>
+                <a:cs typeface="Calibri" pitchFamily="34" charset="-120"/>
+              </a:rPr>
+              <a:t>252 · PNC N°197</a:t>
+            </a:r>
+            <a:endParaRPr lang="en-US" sz="1050" dirty="0"/>
+          </a:p>
+        </p:txBody>
+      </p:sp>
+      <p:sp>
+        <p:nvSpPr>
+          <p:cNvPr id="63" name="Text 59"/>
+          <p:cNvSpPr/>
+          <p:nvPr/>
+        </p:nvSpPr>
+        <p:spPr>
+          <a:xfrm>
+            <a:off x="3566160" y="5413248"/>
+            <a:ext cx="1371600" cy="237744"/>
+          </a:xfrm>
+          <a:prstGeom prst="rect">
+            <a:avLst/>
+          </a:prstGeom>
+          <a:noFill/>
+          <a:ln/>
+        </p:spPr>
+        <p:txBody>
+          <a:bodyPr wrap="square" lIns="0" tIns="0" rIns="0" bIns="0" rtlCol="0" anchor="ctr"/>
+          <a:lstStyle/>
+          <a:p>
+            <a:pPr algn="l" indent="0" marL="0">
+              <a:buNone/>
+            </a:pPr>
+            <a:r>
+              <a:rPr lang="en-US" sz="1050" dirty="0">
+                <a:solidFill>
+                  <a:srgbClr val="1A2433"/>
+                </a:solidFill>
+                <a:latin typeface="Calibri" pitchFamily="34" charset="0"/>
+                <a:ea typeface="Calibri" pitchFamily="34" charset="-122"/>
+                <a:cs typeface="Calibri" pitchFamily="34" charset="-120"/>
+              </a:rPr>
+              <a:t>Producto No Confor…</a:t>
+            </a:r>
+            <a:endParaRPr lang="en-US" sz="1050" dirty="0"/>
+          </a:p>
+        </p:txBody>
+      </p:sp>
+      <p:sp>
+        <p:nvSpPr>
+          <p:cNvPr id="64" name="Text 60"/>
+          <p:cNvSpPr/>
+          <p:nvPr/>
+        </p:nvSpPr>
+        <p:spPr>
+          <a:xfrm>
+            <a:off x="4983480" y="5413248"/>
+            <a:ext cx="1417320" cy="237744"/>
+          </a:xfrm>
+          <a:prstGeom prst="rect">
+            <a:avLst/>
+          </a:prstGeom>
+          <a:noFill/>
+          <a:ln/>
+        </p:spPr>
+        <p:txBody>
+          <a:bodyPr wrap="square" lIns="0" tIns="0" rIns="0" bIns="0" rtlCol="0" anchor="ctr"/>
+          <a:lstStyle/>
+          <a:p>
+            <a:pPr algn="l" indent="0" marL="0">
+              <a:buNone/>
+            </a:pPr>
+            <a:r>
+              <a:rPr lang="en-US" sz="1050" b="1" dirty="0">
+                <a:solidFill>
+                  <a:srgbClr val="C87A32"/>
+                </a:solidFill>
+                <a:latin typeface="Calibri" pitchFamily="34" charset="0"/>
+                <a:ea typeface="Calibri" pitchFamily="34" charset="-122"/>
+                <a:cs typeface="Calibri" pitchFamily="34" charset="-120"/>
+              </a:rPr>
+              <a:t>Externa · Cliente</a:t>
+            </a:r>
+            <a:endParaRPr lang="en-US" sz="1050" dirty="0"/>
+          </a:p>
+        </p:txBody>
+      </p:sp>
+      <p:sp>
+        <p:nvSpPr>
+          <p:cNvPr id="65" name="Text 61"/>
+          <p:cNvSpPr/>
+          <p:nvPr/>
+        </p:nvSpPr>
+        <p:spPr>
+          <a:xfrm>
+            <a:off x="6446520" y="5413248"/>
+            <a:ext cx="1097280" cy="237744"/>
+          </a:xfrm>
+          <a:prstGeom prst="rect">
+            <a:avLst/>
+          </a:prstGeom>
+          <a:noFill/>
+          <a:ln/>
+        </p:spPr>
+        <p:txBody>
+          <a:bodyPr wrap="square" lIns="0" tIns="0" rIns="0" bIns="0" rtlCol="0" anchor="ctr"/>
+          <a:lstStyle/>
+          <a:p>
+            <a:pPr algn="l" indent="0" marL="0">
+              <a:buNone/>
+            </a:pPr>
+            <a:r>
+              <a:rPr lang="en-US" sz="1050" dirty="0">
+                <a:solidFill>
+                  <a:srgbClr val="1A2433"/>
+                </a:solidFill>
+                <a:latin typeface="Calibri" pitchFamily="34" charset="0"/>
+                <a:ea typeface="Calibri" pitchFamily="34" charset="-122"/>
+                <a:cs typeface="Calibri" pitchFamily="34" charset="-120"/>
+              </a:rPr>
+              <a:t>PIPING</a:t>
+            </a:r>
+            <a:endParaRPr lang="en-US" sz="1050" dirty="0"/>
+          </a:p>
+        </p:txBody>
+      </p:sp>
+      <p:sp>
+        <p:nvSpPr>
+          <p:cNvPr id="66" name="Text 62"/>
+          <p:cNvSpPr/>
+          <p:nvPr/>
+        </p:nvSpPr>
+        <p:spPr>
+          <a:xfrm>
+            <a:off x="7589520" y="5413248"/>
+            <a:ext cx="1371600" cy="237744"/>
+          </a:xfrm>
+          <a:prstGeom prst="rect">
+            <a:avLst/>
+          </a:prstGeom>
+          <a:noFill/>
+          <a:ln/>
+        </p:spPr>
+        <p:txBody>
+          <a:bodyPr wrap="square" lIns="0" tIns="0" rIns="0" bIns="0" rtlCol="0" anchor="ctr"/>
+          <a:lstStyle/>
+          <a:p>
+            <a:pPr algn="l" indent="0" marL="0">
+              <a:buNone/>
+            </a:pPr>
+            <a:r>
+              <a:rPr lang="en-US" sz="1050" dirty="0">
+                <a:solidFill>
+                  <a:srgbClr val="1A2433"/>
+                </a:solidFill>
+                <a:latin typeface="Calibri" pitchFamily="34" charset="0"/>
+                <a:ea typeface="Calibri" pitchFamily="34" charset="-122"/>
+                <a:cs typeface="Calibri" pitchFamily="34" charset="-120"/>
+              </a:rPr>
+              <a:t>Oscar Nahuel P.</a:t>
+            </a:r>
+            <a:endParaRPr lang="en-US" sz="1050" dirty="0"/>
+          </a:p>
+        </p:txBody>
+      </p:sp>
+      <p:sp>
+        <p:nvSpPr>
+          <p:cNvPr id="67" name="Text 63"/>
+          <p:cNvSpPr/>
+          <p:nvPr/>
+        </p:nvSpPr>
+        <p:spPr>
+          <a:xfrm>
+            <a:off x="9006840" y="5413248"/>
+            <a:ext cx="868680" cy="237744"/>
+          </a:xfrm>
+          <a:prstGeom prst="rect">
+            <a:avLst/>
+          </a:prstGeom>
+          <a:noFill/>
+          <a:ln/>
+        </p:spPr>
+        <p:txBody>
+          <a:bodyPr wrap="square" lIns="0" tIns="0" rIns="0" bIns="0" rtlCol="0" anchor="ctr"/>
+          <a:lstStyle/>
+          <a:p>
+            <a:pPr algn="l" indent="0" marL="0">
+              <a:buNone/>
+            </a:pPr>
+            <a:r>
+              <a:rPr lang="en-US" sz="1050" dirty="0">
+                <a:solidFill>
+                  <a:srgbClr val="C0392B"/>
+                </a:solidFill>
+                <a:latin typeface="Calibri" pitchFamily="34" charset="0"/>
+                <a:ea typeface="Calibri" pitchFamily="34" charset="-122"/>
+                <a:cs typeface="Calibri" pitchFamily="34" charset="-120"/>
+              </a:rPr>
+              <a:t>Iniciado</a:t>
+            </a:r>
+            <a:endParaRPr lang="en-US" sz="1050" dirty="0"/>
+          </a:p>
+        </p:txBody>
+      </p:sp>
+      <p:sp>
+        <p:nvSpPr>
+          <p:cNvPr id="68" name="Text 64"/>
+          <p:cNvSpPr/>
+          <p:nvPr/>
+        </p:nvSpPr>
+        <p:spPr>
+          <a:xfrm>
+            <a:off x="9921240" y="5413248"/>
+            <a:ext cx="1828800" cy="237744"/>
+          </a:xfrm>
+          <a:prstGeom prst="rect">
+            <a:avLst/>
+          </a:prstGeom>
+          <a:noFill/>
+          <a:ln/>
+        </p:spPr>
+        <p:txBody>
+          <a:bodyPr wrap="square" lIns="0" tIns="0" rIns="0" bIns="0" rtlCol="0" anchor="ctr"/>
+          <a:lstStyle/>
+          <a:p>
+            <a:pPr algn="l" indent="0" marL="0">
+              <a:buNone/>
+            </a:pPr>
+            <a:r>
+              <a:rPr lang="en-US" sz="1000" dirty="0">
+                <a:solidFill>
+                  <a:srgbClr val="1A2433"/>
+                </a:solidFill>
+                <a:latin typeface="Calibri" pitchFamily="34" charset="0"/>
+                <a:ea typeface="Calibri" pitchFamily="34" charset="-122"/>
+                <a:cs typeface="Calibri" pitchFamily="34" charset="-120"/>
+              </a:rPr>
+              <a:t>Filtración en la unión mecá…</a:t>
+            </a:r>
+            <a:endParaRPr lang="en-US" sz="1000" dirty="0"/>
+          </a:p>
+        </p:txBody>
+      </p:sp>
+      <p:sp>
+        <p:nvSpPr>
+          <p:cNvPr id="69" name="Shape 65"/>
+          <p:cNvSpPr/>
+          <p:nvPr/>
+        </p:nvSpPr>
+        <p:spPr>
+          <a:xfrm>
+            <a:off x="502920" y="5687568"/>
+            <a:ext cx="11247120" cy="0"/>
+          </a:xfrm>
+          <a:prstGeom prst="line">
+            <a:avLst/>
+          </a:prstGeom>
+          <a:noFill/>
+          <a:ln w="9525">
+            <a:solidFill>
+              <a:srgbClr val="D9DFE6"/>
+            </a:solidFill>
+            <a:prstDash val="solid"/>
+          </a:ln>
+        </p:spPr>
+      </p:sp>
+      <p:sp>
+        <p:nvSpPr>
+          <p:cNvPr id="70" name="Text 66"/>
           <p:cNvSpPr/>
           <p:nvPr/>
         </p:nvSpPr>
@@ -25829,7 +27700,7 @@
                 <a:ea typeface="Calibri" pitchFamily="34" charset="-122"/>
                 <a:cs typeface="Calibri" pitchFamily="34" charset="-120"/>
               </a:rPr>
-              <a:t>Fuente: Data_NCR-13092026.xlsx — hoja «Observaciones» · Corte 13-09-2026 · 509 registros desde 10-02-2023</a:t>
+              <a:t>Fuente: Data_NCR-21092026.xlsx — hoja «Observaciones» · Corte 21-09-2026 · 513 registros desde 10-02-2023</a:t>
             </a:r>
             <a:endParaRPr lang="en-US" sz="850" dirty="0"/>
           </a:p>
@@ -25837,7 +27708,7 @@
       </p:sp>
       <p:sp>
         <p:nvSpPr>
-          <p:cNvPr id="20" name="Text 16"/>
+          <p:cNvPr id="71" name="Text 67"/>
           <p:cNvSpPr/>
           <p:nvPr/>
         </p:nvSpPr>
@@ -25876,7 +27747,7 @@
       </p:sp>
       <p:sp>
         <p:nvSpPr>
-          <p:cNvPr id="21" name="Text 17"/>
+          <p:cNvPr id="72" name="Text 68"/>
           <p:cNvSpPr/>
           <p:nvPr/>
         </p:nvSpPr>
@@ -26080,7 +27951,7 @@
                 <a:ea typeface="Calibri" pitchFamily="34" charset="-122"/>
                 <a:cs typeface="Calibri" pitchFamily="34" charset="-120"/>
               </a:rPr>
-              <a:t>Interna es autodetección: la levanta Besalco antes que nadie. Externa la levanta el cliente —compromete el contrato— o un subcontrato. Autodetección global: 31,8%.</a:t>
+              <a:t>Interna es autodetección: la levanta Besalco antes que nadie. Externa la levanta el cliente —compromete el contrato— o un subcontrato. Autodetección global: 31,5%.</a:t>
             </a:r>
             <a:endParaRPr lang="en-US" sz="1350" dirty="0"/>
           </a:p>
@@ -26825,7 +28696,7 @@
                 <a:ea typeface="Calibri" pitchFamily="34" charset="-122"/>
                 <a:cs typeface="Calibri" pitchFamily="34" charset="-120"/>
               </a:rPr>
-              <a:t>293</a:t>
+              <a:t>297</a:t>
             </a:r>
             <a:endParaRPr lang="en-US" sz="1050" dirty="0"/>
           </a:p>
@@ -26864,7 +28735,7 @@
                 <a:ea typeface="Calibri" pitchFamily="34" charset="-122"/>
                 <a:cs typeface="Calibri" pitchFamily="34" charset="-120"/>
               </a:rPr>
-              <a:t>250</a:t>
+              <a:t>254</a:t>
             </a:r>
             <a:endParaRPr lang="en-US" sz="1050" dirty="0"/>
           </a:p>
@@ -26903,7 +28774,7 @@
                 <a:ea typeface="Calibri" pitchFamily="34" charset="-122"/>
                 <a:cs typeface="Calibri" pitchFamily="34" charset="-120"/>
               </a:rPr>
-              <a:t>85,3%</a:t>
+              <a:t>85,5%</a:t>
             </a:r>
             <a:endParaRPr lang="en-US" sz="1050" dirty="0"/>
           </a:p>
@@ -26981,7 +28852,7 @@
                 <a:ea typeface="Calibri" pitchFamily="34" charset="-122"/>
                 <a:cs typeface="Calibri" pitchFamily="34" charset="-120"/>
               </a:rPr>
-              <a:t>42</a:t>
+              <a:t>39</a:t>
             </a:r>
             <a:endParaRPr lang="en-US" sz="1050" dirty="0"/>
           </a:p>
@@ -27020,7 +28891,7 @@
                 <a:ea typeface="Calibri" pitchFamily="34" charset="-122"/>
                 <a:cs typeface="Calibri" pitchFamily="34" charset="-120"/>
               </a:rPr>
-              <a:t>57 días</a:t>
+              <a:t>59 días</a:t>
             </a:r>
             <a:endParaRPr lang="en-US" sz="1050" dirty="0"/>
           </a:p>
@@ -27733,7 +29604,7 @@
                 <a:ea typeface="Calibri" pitchFamily="34" charset="-122"/>
                 <a:cs typeface="Calibri" pitchFamily="34" charset="-120"/>
               </a:rPr>
-              <a:t>509</a:t>
+              <a:t>513</a:t>
             </a:r>
             <a:endParaRPr lang="en-US" sz="1050" dirty="0"/>
           </a:p>
@@ -27772,7 +29643,7 @@
                 <a:ea typeface="Calibri" pitchFamily="34" charset="-122"/>
                 <a:cs typeface="Calibri" pitchFamily="34" charset="-120"/>
               </a:rPr>
-              <a:t>464</a:t>
+              <a:t>468</a:t>
             </a:r>
             <a:endParaRPr lang="en-US" sz="1050" dirty="0"/>
           </a:p>
@@ -27889,7 +29760,7 @@
                 <a:ea typeface="Calibri" pitchFamily="34" charset="-122"/>
                 <a:cs typeface="Calibri" pitchFamily="34" charset="-120"/>
               </a:rPr>
-              <a:t>44</a:t>
+              <a:t>41</a:t>
             </a:r>
             <a:endParaRPr lang="en-US" sz="1050" dirty="0"/>
           </a:p>
@@ -27928,7 +29799,7 @@
                 <a:ea typeface="Calibri" pitchFamily="34" charset="-122"/>
                 <a:cs typeface="Calibri" pitchFamily="34" charset="-120"/>
               </a:rPr>
-              <a:t>74 días</a:t>
+              <a:t>75 días</a:t>
             </a:r>
             <a:endParaRPr lang="en-US" sz="1050" dirty="0"/>
           </a:p>
@@ -28145,7 +30016,7 @@
                 <a:ea typeface="Cambria" pitchFamily="34" charset="-122"/>
                 <a:cs typeface="Cambria" pitchFamily="34" charset="-120"/>
               </a:rPr>
-              <a:t>20,9%</a:t>
+              <a:t>20,7%</a:t>
             </a:r>
             <a:endParaRPr lang="en-US" sz="2400" dirty="0"/>
           </a:p>
@@ -28223,7 +30094,7 @@
                 <a:ea typeface="Cambria" pitchFamily="34" charset="-122"/>
                 <a:cs typeface="Cambria" pitchFamily="34" charset="-120"/>
               </a:rPr>
-              <a:t>31,2%</a:t>
+              <a:t>30,8%</a:t>
             </a:r>
             <a:endParaRPr lang="en-US" sz="2400" dirty="0"/>
           </a:p>
@@ -28301,7 +30172,7 @@
                 <a:ea typeface="Calibri" pitchFamily="34" charset="-122"/>
                 <a:cs typeface="Calibri" pitchFamily="34" charset="-120"/>
               </a:rPr>
-              <a:t>Fuente: Data_NCR-13092026.xlsx — hoja «Observaciones» · Corte 13-09-2026 · 509 registros desde 10-02-2023</a:t>
+              <a:t>Fuente: Data_NCR-21092026.xlsx — hoja «Observaciones» · Corte 21-09-2026 · 513 registros desde 10-02-2023</a:t>
             </a:r>
             <a:endParaRPr lang="en-US" sz="850" dirty="0"/>
           </a:p>
@@ -28552,7 +30423,7 @@
                 <a:ea typeface="Calibri" pitchFamily="34" charset="-122"/>
                 <a:cs typeface="Calibri" pitchFamily="34" charset="-120"/>
               </a:rPr>
-              <a:t>De los 45 hallazgos abiertos, 18 llevan más de 180 días desde que se levantaron y 0 más de un año. La mediana de cierre global es de 30 días.</a:t>
+              <a:t>De los 45 hallazgos abiertos, 17 llevan más de 180 días desde que se levantaron y 0 más de un año. La mediana de cierre global es de 30 días.</a:t>
             </a:r>
             <a:endParaRPr lang="en-US" sz="1350" dirty="0"/>
           </a:p>
@@ -28689,7 +30560,7 @@
                 <a:ea typeface="Calibri" pitchFamily="34" charset="-122"/>
                 <a:cs typeface="Calibri" pitchFamily="34" charset="-120"/>
               </a:rPr>
-              <a:t>Al corte hay 44 hallazgos fuera de plazo de los 45 abiertos.</a:t>
+              <a:t>Al corte hay 41 hallazgos fuera de plazo de los 45 abiertos.</a:t>
             </a:r>
             <a:endParaRPr lang="en-US" sz="1150" dirty="0"/>
           </a:p>
@@ -29368,7 +31239,7 @@
                 <a:ea typeface="Calibri" pitchFamily="34" charset="-122"/>
                 <a:cs typeface="Calibri" pitchFamily="34" charset="-120"/>
               </a:rPr>
-              <a:t>242</a:t>
+              <a:t>244</a:t>
             </a:r>
             <a:endParaRPr lang="en-US" sz="1150" dirty="0"/>
           </a:p>
@@ -29614,7 +31485,7 @@
                 <a:ea typeface="Calibri" pitchFamily="34" charset="-122"/>
                 <a:cs typeface="Calibri" pitchFamily="34" charset="-120"/>
               </a:rPr>
-              <a:t>133</a:t>
+              <a:t>135</a:t>
             </a:r>
             <a:endParaRPr lang="en-US" sz="1150" dirty="0"/>
           </a:p>
@@ -29653,7 +31524,7 @@
                 <a:ea typeface="Calibri" pitchFamily="34" charset="-122"/>
                 <a:cs typeface="Calibri" pitchFamily="34" charset="-120"/>
               </a:rPr>
-              <a:t>139 d</a:t>
+              <a:t>140 d</a:t>
             </a:r>
             <a:endParaRPr lang="en-US" sz="1150" dirty="0"/>
           </a:p>
@@ -30109,7 +31980,7 @@
                 <a:ea typeface="Calibri" pitchFamily="34" charset="-122"/>
                 <a:cs typeface="Calibri" pitchFamily="34" charset="-120"/>
               </a:rPr>
-              <a:t>Fuente: Data_NCR-13092026.xlsx — hoja «Observaciones» · Corte 13-09-2026 · 509 registros desde 10-02-2023</a:t>
+              <a:t>Fuente: Data_NCR-21092026.xlsx — hoja «Observaciones» · Corte 21-09-2026 · 513 registros desde 10-02-2023</a:t>
             </a:r>
             <a:endParaRPr lang="en-US" sz="850" dirty="0"/>
           </a:p>
@@ -30360,7 +32231,7 @@
                 <a:ea typeface="Calibri" pitchFamily="34" charset="-122"/>
                 <a:cs typeface="Calibri" pitchFamily="34" charset="-120"/>
               </a:rPr>
-              <a:t>10.613 UF declaradas entre nov-24 y sep-26, imputadas al mes en que se levantó cada hallazgo. Las declaran 108 de 498 hallazgos del período.</a:t>
+              <a:t>10.613 UF declaradas entre nov-24 y sep-26, imputadas al mes en que se levantó cada hallazgo. Las declaran 108 de 502 hallazgos del período.</a:t>
             </a:r>
             <a:endParaRPr lang="en-US" sz="1350" dirty="0"/>
           </a:p>
@@ -47861,7 +49732,7 @@
                           <a:ea typeface="Calibri" pitchFamily="34" charset="-122"/>
                           <a:cs typeface="Calibri" pitchFamily="34" charset="-120"/>
                         </a:rPr>
-                        <a:t>0/7</a:t>
+                        <a:t>0/11</a:t>
                       </a:r>
                       <a:endParaRPr lang="en-US" sz="750" dirty="0">
                         <a:latin typeface="Calibri" charset="0"/>
@@ -47929,7 +49800,7 @@
                           <a:ea typeface="Calibri" pitchFamily="34" charset="-122"/>
                           <a:cs typeface="Calibri" pitchFamily="34" charset="-120"/>
                         </a:rPr>
-                        <a:t>108/498</a:t>
+                        <a:t>108/502</a:t>
                       </a:r>
                       <a:endParaRPr lang="en-US" sz="750" dirty="0">
                         <a:latin typeface="Calibri" charset="0"/>
@@ -48593,7 +50464,7 @@
                 <a:ea typeface="Cambria" pitchFamily="34" charset="-122"/>
                 <a:cs typeface="Cambria" pitchFamily="34" charset="-120"/>
               </a:rPr>
-              <a:t>258</a:t>
+              <a:t>262</a:t>
             </a:r>
             <a:endParaRPr lang="en-US" sz="2100" dirty="0"/>
           </a:p>
@@ -48710,7 +50581,7 @@
                 <a:ea typeface="Calibri" pitchFamily="34" charset="-122"/>
                 <a:cs typeface="Calibri" pitchFamily="34" charset="-120"/>
               </a:rPr>
-              <a:t>Fuente: Data_NCR-13092026.xlsx — hoja «Observaciones» · Corte 13-09-2026 · 509 registros desde 10-02-2023</a:t>
+              <a:t>Fuente: Data_NCR-21092026.xlsx — hoja «Observaciones» · Corte 21-09-2026 · 513 registros desde 10-02-2023</a:t>
             </a:r>
             <a:endParaRPr lang="en-US" sz="850" dirty="0"/>
           </a:p>
@@ -49084,7 +50955,7 @@
                 <a:ea typeface="Calibri" pitchFamily="34" charset="-122"/>
                 <a:cs typeface="Calibri" pitchFamily="34" charset="-120"/>
               </a:rPr>
-              <a:t>37 de los 45 hallazgos abiertos (82,2%) y 78,2% de cierre, contra 91,2% global. Es la ruta crítica del módulo.</a:t>
+              <a:t>37 de los 45 hallazgos abiertos (82,2%) y 78,5% de cierre, contra 91,2% global. Es la ruta crítica del módulo.</a:t>
             </a:r>
             <a:endParaRPr lang="en-US" sz="1100" dirty="0"/>
           </a:p>
@@ -49226,7 +51097,7 @@
                 <a:ea typeface="Calibri" pitchFamily="34" charset="-122"/>
                 <a:cs typeface="Calibri" pitchFamily="34" charset="-120"/>
               </a:rPr>
-              <a:t>Solo 20,9% de sus hallazgos los detecta Besalco; el mejor frente va en 66,7%. Lo que no se detecta adentro llega como observación del cliente.</a:t>
+              <a:t>Solo 20,7% de sus hallazgos los detecta Besalco; el mejor frente va en 66,7%. Lo que no se detecta adentro llega como observación del cliente.</a:t>
             </a:r>
             <a:endParaRPr lang="en-US" sz="1100" dirty="0"/>
           </a:p>
@@ -49326,7 +51197,7 @@
                 <a:ea typeface="Calibri" pitchFamily="34" charset="-122"/>
                 <a:cs typeface="Calibri" pitchFamily="34" charset="-120"/>
               </a:rPr>
-              <a:t>Sacar los 18 hallazgos sobre 180 días</a:t>
+              <a:t>Sacar los 17 hallazgos sobre 180 días</a:t>
             </a:r>
             <a:endParaRPr lang="en-US" sz="1400" dirty="0"/>
           </a:p>
@@ -49368,7 +51239,7 @@
                 <a:ea typeface="Calibri" pitchFamily="34" charset="-122"/>
                 <a:cs typeface="Calibri" pitchFamily="34" charset="-120"/>
               </a:rPr>
-              <a:t>0 de ellos superan el año abiertos. Los tienen a cargo Sin asignar (18). Es deuda antigua que no se cierra sola.</a:t>
+              <a:t>0 de ellos superan el año abiertos. Los tienen a cargo Sin asignar (16), Wladimir Carvajal P. (1). Es deuda antigua que no se cierra sola.</a:t>
             </a:r>
             <a:endParaRPr lang="en-US" sz="1100" dirty="0"/>
           </a:p>
@@ -49468,7 +51339,7 @@
                 <a:ea typeface="Calibri" pitchFamily="34" charset="-122"/>
                 <a:cs typeface="Calibri" pitchFamily="34" charset="-120"/>
               </a:rPr>
-              <a:t>Responder las 44 que pasaron el plazo</a:t>
+              <a:t>Responder las 41 que pasaron el plazo</a:t>
             </a:r>
             <a:endParaRPr lang="en-US" sz="1400" dirty="0"/>
           </a:p>
@@ -49510,7 +51381,7 @@
                 <a:ea typeface="Calibri" pitchFamily="34" charset="-122"/>
                 <a:cs typeface="Calibri" pitchFamily="34" charset="-120"/>
               </a:rPr>
-              <a:t>El plazo es de 10 días desde la emisión y hoy lo incumplen 97,8% de los abiertos. Solo 1 siguen dentro de plazo.</a:t>
+              <a:t>El plazo es de 10 días desde la emisión y hoy lo incumplen 91,1% de los abiertos. Solo 4 siguen dentro de plazo.</a:t>
             </a:r>
             <a:endParaRPr lang="en-US" sz="1100" dirty="0"/>
           </a:p>
@@ -49549,7 +51420,7 @@
                 <a:ea typeface="Calibri" pitchFamily="34" charset="-122"/>
                 <a:cs typeface="Calibri" pitchFamily="34" charset="-120"/>
               </a:rPr>
-              <a:t>Fuente: Data_NCR-13092026.xlsx — hoja «Observaciones» · Corte 13-09-2026 · 509 registros desde 10-02-2023</a:t>
+              <a:t>Fuente: Data_NCR-21092026.xlsx — hoja «Observaciones» · Corte 21-09-2026 · 513 registros desde 10-02-2023</a:t>
             </a:r>
             <a:endParaRPr lang="en-US" sz="850" dirty="0"/>
           </a:p>
@@ -50273,7 +52144,7 @@
                 <a:ea typeface="Calibri" pitchFamily="34" charset="-122"/>
                 <a:cs typeface="Calibri" pitchFamily="34" charset="-120"/>
               </a:rPr>
-              <a:t>Corte: 13-09-2026</a:t>
+              <a:t>Corte: 21-09-2026</a:t>
             </a:r>
             <a:endParaRPr lang="en-US" sz="1100" dirty="0"/>
           </a:p>
@@ -50312,7 +52183,7 @@
                 <a:ea typeface="Calibri" pitchFamily="34" charset="-122"/>
                 <a:cs typeface="Calibri" pitchFamily="34" charset="-120"/>
               </a:rPr>
-              <a:t>Fuente: Data_NCR-13092026.xlsx — hoja «Observaciones» · Corte 13-09-2026 · 509 registros desde 10-02-2023</a:t>
+              <a:t>Fuente: Data_NCR-21092026.xlsx — hoja «Observaciones» · Corte 21-09-2026 · 513 registros desde 10-02-2023</a:t>
             </a:r>
             <a:endParaRPr lang="en-US" sz="850" dirty="0"/>
           </a:p>

--- a/modulo_nc/Panel_No_Conformidades.pptx
+++ b/modulo_nc/Panel_No_Conformidades.pptx
@@ -220,19 +220,19 @@
                     <c:v>3 sem.</c:v>
                   </c:pt>
                   <c:pt idx="1">
-                    <c:v>17-08</c:v>
+                    <c:v>24-08</c:v>
                   </c:pt>
                   <c:pt idx="2">
-                    <c:v>24-08</c:v>
+                    <c:v>31-08</c:v>
                   </c:pt>
                   <c:pt idx="3">
-                    <c:v>31-08</c:v>
+                    <c:v>07-09</c:v>
                   </c:pt>
                   <c:pt idx="4">
-                    <c:v>07-09</c:v>
+                    <c:v>14-09</c:v>
                   </c:pt>
                   <c:pt idx="5">
-                    <c:v>14-09</c:v>
+                    <c:v>21-09</c:v>
                   </c:pt>
                 </c:lvl>
               </c:multiLvlStrCache>
@@ -245,22 +245,22 @@
                 <c:formatCode>General</c:formatCode>
                 <c:ptCount val="6"/>
                 <c:pt idx="0">
+                  <c:v/>
+                </c:pt>
+                <c:pt idx="1">
+                  <c:v/>
+                </c:pt>
+                <c:pt idx="2">
+                  <c:v>6</c:v>
+                </c:pt>
+                <c:pt idx="3">
+                  <c:v/>
+                </c:pt>
+                <c:pt idx="4">
                   <c:v>2</c:v>
                 </c:pt>
-                <c:pt idx="1">
-                  <c:v>2</c:v>
-                </c:pt>
-                <c:pt idx="2">
-                  <c:v/>
-                </c:pt>
-                <c:pt idx="3">
-                  <c:v>6</c:v>
-                </c:pt>
-                <c:pt idx="4">
-                  <c:v/>
-                </c:pt>
                 <c:pt idx="5">
-                  <c:v>4</c:v>
+                  <c:v>1</c:v>
                 </c:pt>
               </c:numCache>
             </c:numRef>
@@ -322,19 +322,19 @@
                     <c:v>3 sem.</c:v>
                   </c:pt>
                   <c:pt idx="1">
-                    <c:v>17-08</c:v>
+                    <c:v>24-08</c:v>
                   </c:pt>
                   <c:pt idx="2">
-                    <c:v>24-08</c:v>
+                    <c:v>31-08</c:v>
                   </c:pt>
                   <c:pt idx="3">
-                    <c:v>31-08</c:v>
+                    <c:v>07-09</c:v>
                   </c:pt>
                   <c:pt idx="4">
-                    <c:v>07-09</c:v>
+                    <c:v>14-09</c:v>
                   </c:pt>
                   <c:pt idx="5">
-                    <c:v>14-09</c:v>
+                    <c:v>21-09</c:v>
                   </c:pt>
                 </c:lvl>
               </c:multiLvlStrCache>
@@ -347,7 +347,7 @@
                 <c:formatCode>General</c:formatCode>
                 <c:ptCount val="6"/>
                 <c:pt idx="0">
-                  <c:v>6</c:v>
+                  <c:v>7</c:v>
                 </c:pt>
                 <c:pt idx="1">
                   <c:v>1</c:v>
@@ -356,10 +356,10 @@
                   <c:v>1</c:v>
                 </c:pt>
                 <c:pt idx="3">
-                  <c:v>1</c:v>
+                  <c:v/>
                 </c:pt>
                 <c:pt idx="4">
-                  <c:v/>
+                  <c:v>2</c:v>
                 </c:pt>
                 <c:pt idx="5">
                   <c:v/>
@@ -734,7 +734,7 @@
                   <c:v>19</c:v>
                 </c:pt>
                 <c:pt idx="1">
-                  <c:v>199</c:v>
+                  <c:v>200</c:v>
                 </c:pt>
                 <c:pt idx="2">
                   <c:v>79</c:v>
@@ -1199,13 +1199,13 @@
                 <c:formatCode>General</c:formatCode>
                 <c:ptCount val="4"/>
                 <c:pt idx="0">
-                  <c:v>294</c:v>
+                  <c:v>301</c:v>
                 </c:pt>
                 <c:pt idx="1">
-                  <c:v>122</c:v>
+                  <c:v>125</c:v>
                 </c:pt>
                 <c:pt idx="2">
-                  <c:v>51</c:v>
+                  <c:v>54</c:v>
                 </c:pt>
                 <c:pt idx="3">
                   <c:v>1</c:v>
@@ -1289,13 +1289,13 @@
                 <c:formatCode>General</c:formatCode>
                 <c:ptCount val="4"/>
                 <c:pt idx="0">
-                  <c:v>33</c:v>
+                  <c:v>27</c:v>
                 </c:pt>
                 <c:pt idx="1">
-                  <c:v>3</c:v>
+                  <c:v/>
                 </c:pt>
                 <c:pt idx="2">
-                  <c:v>9</c:v>
+                  <c:v>6</c:v>
                 </c:pt>
                 <c:pt idx="3">
                   <c:v/>
@@ -1487,7 +1487,7 @@
                 </a:solidFill>
                 <a:latin typeface="Calibri"/>
               </a:rPr>
-              <a:t>Antigüedad de los 45 hallazgos abiertos</a:t>
+              <a:t>Antigüedad de los 33 hallazgos abiertos</a:t>
             </a:r>
           </a:p>
         </c:rich>
@@ -1568,7 +1568,7 @@
                 <c:formatCode>General</c:formatCode>
                 <c:ptCount val="1"/>
                 <c:pt idx="0">
-                  <c:v>10</c:v>
+                  <c:v>9</c:v>
                 </c:pt>
               </c:numCache>
             </c:numRef>
@@ -1640,7 +1640,7 @@
                 <c:formatCode>General</c:formatCode>
                 <c:ptCount val="1"/>
                 <c:pt idx="0">
-                  <c:v>5</c:v>
+                  <c:v>2</c:v>
                 </c:pt>
               </c:numCache>
             </c:numRef>
@@ -1784,7 +1784,7 @@
                 <c:formatCode>General</c:formatCode>
                 <c:ptCount val="1"/>
                 <c:pt idx="0">
-                  <c:v>17</c:v>
+                  <c:v>9</c:v>
                 </c:pt>
               </c:numCache>
             </c:numRef>
@@ -2501,13 +2501,13 @@
                 <c:formatCode>General</c:formatCode>
                 <c:ptCount val="8"/>
                 <c:pt idx="0">
-                  <c:v>144</c:v>
+                  <c:v>146</c:v>
                 </c:pt>
                 <c:pt idx="1">
-                  <c:v>25</c:v>
+                  <c:v>26</c:v>
                 </c:pt>
                 <c:pt idx="2">
-                  <c:v>16</c:v>
+                  <c:v>19</c:v>
                 </c:pt>
                 <c:pt idx="3">
                   <c:v>11</c:v>
@@ -2615,13 +2615,13 @@
                 <c:formatCode>General</c:formatCode>
                 <c:ptCount val="8"/>
                 <c:pt idx="0">
-                  <c:v>3</c:v>
+                  <c:v>1</c:v>
                 </c:pt>
                 <c:pt idx="1">
                   <c:v>1</c:v>
                 </c:pt>
                 <c:pt idx="2">
-                  <c:v>3</c:v>
+                  <c:v/>
                 </c:pt>
                 <c:pt idx="3">
                   <c:v/>
@@ -2930,16 +2930,16 @@
                   <c:v>38</c:v>
                 </c:pt>
                 <c:pt idx="1">
-                  <c:v>28</c:v>
+                  <c:v>30</c:v>
                 </c:pt>
                 <c:pt idx="2">
-                  <c:v>13</c:v>
+                  <c:v>16</c:v>
                 </c:pt>
                 <c:pt idx="3">
                   <c:v>16</c:v>
                 </c:pt>
                 <c:pt idx="4">
-                  <c:v>3</c:v>
+                  <c:v>4</c:v>
                 </c:pt>
                 <c:pt idx="5">
                   <c:v>7</c:v>
@@ -2948,7 +2948,7 @@
                   <c:v>6</c:v>
                 </c:pt>
                 <c:pt idx="7">
-                  <c:v>4</c:v>
+                  <c:v>5</c:v>
                 </c:pt>
               </c:numCache>
             </c:numRef>
@@ -3044,16 +3044,16 @@
                   <c:v/>
                 </c:pt>
                 <c:pt idx="1">
-                  <c:v>9</c:v>
+                  <c:v>7</c:v>
                 </c:pt>
                 <c:pt idx="2">
-                  <c:v>13</c:v>
+                  <c:v>10</c:v>
                 </c:pt>
                 <c:pt idx="3">
                   <c:v>3</c:v>
                 </c:pt>
                 <c:pt idx="4">
-                  <c:v>11</c:v>
+                  <c:v>10</c:v>
                 </c:pt>
                 <c:pt idx="5">
                   <c:v/>
@@ -3062,7 +3062,7 @@
                   <c:v/>
                 </c:pt>
                 <c:pt idx="7">
-                  <c:v>1</c:v>
+                  <c:v/>
                 </c:pt>
               </c:numCache>
             </c:numRef>
@@ -5638,7 +5638,7 @@
                 <a:ea typeface="Calibri" pitchFamily="34" charset="-122"/>
                 <a:cs typeface="Calibri" pitchFamily="34" charset="-120"/>
               </a:rPr>
-              <a:t>513 hallazgos levantados entre 10-02-2023 y 16-09-2026 (Desaladora 82 · Talabre 251 · Arqueros 172 · Oficina Central 8).</a:t>
+              <a:t>514 hallazgos levantados entre 10-02-2023 y 23-09-2026 (Desaladora 82 · Talabre 252 · Arqueros 172 · Oficina Central 8).</a:t>
             </a:r>
             <a:endParaRPr lang="en-US" sz="1350" dirty="0"/>
           </a:p>
@@ -5697,7 +5697,7 @@
                 <a:ea typeface="Cambria" pitchFamily="34" charset="-122"/>
                 <a:cs typeface="Cambria" pitchFamily="34" charset="-120"/>
               </a:rPr>
-              <a:t>91,2%</a:t>
+              <a:t>93,6%</a:t>
             </a:r>
             <a:endParaRPr lang="en-US" sz="3400" dirty="0"/>
           </a:p>
@@ -5775,7 +5775,7 @@
                 <a:ea typeface="Cambria" pitchFamily="34" charset="-122"/>
                 <a:cs typeface="Cambria" pitchFamily="34" charset="-120"/>
               </a:rPr>
-              <a:t>45</a:t>
+              <a:t>33</a:t>
             </a:r>
             <a:endParaRPr lang="en-US" sz="3400" dirty="0"/>
           </a:p>
@@ -5853,7 +5853,7 @@
                 <a:ea typeface="Cambria" pitchFamily="34" charset="-122"/>
                 <a:cs typeface="Cambria" pitchFamily="34" charset="-120"/>
               </a:rPr>
-              <a:t>30 d</a:t>
+              <a:t>31 d</a:t>
             </a:r>
             <a:endParaRPr lang="en-US" sz="3400" dirty="0"/>
           </a:p>
@@ -6009,7 +6009,7 @@
                 <a:ea typeface="Calibri" pitchFamily="34" charset="-122"/>
                 <a:cs typeface="Calibri" pitchFamily="34" charset="-120"/>
               </a:rPr>
-              <a:t>Corte: 21-09-2026</a:t>
+              <a:t>Corte: 28-09-2026</a:t>
             </a:r>
             <a:endParaRPr lang="en-US" sz="1100" dirty="0"/>
           </a:p>
@@ -6048,7 +6048,7 @@
                 <a:ea typeface="Calibri" pitchFamily="34" charset="-122"/>
                 <a:cs typeface="Calibri" pitchFamily="34" charset="-120"/>
               </a:rPr>
-              <a:t>Fuente: Data_NCR-21092026.xlsx — hoja «Observaciones» · Corte 21-09-2026 · 513 registros desde 10-02-2023</a:t>
+              <a:t>Fuente: Data_NCR.xlsx — hoja «Observaciones» · Corte 28-09-2026 · 514 registros desde 10-02-2023</a:t>
             </a:r>
             <a:endParaRPr lang="en-US" sz="850" dirty="0"/>
           </a:p>
@@ -6641,7 +6641,7 @@
                 <a:ea typeface="Calibri" pitchFamily="34" charset="-122"/>
                 <a:cs typeface="Calibri" pitchFamily="34" charset="-120"/>
               </a:rPr>
-              <a:t>Global del módulo: 91,2%</a:t>
+              <a:t>Global del módulo: 93,6%</a:t>
             </a:r>
             <a:endParaRPr lang="en-US" sz="950" dirty="0"/>
           </a:p>
@@ -7849,7 +7849,7 @@
                 <a:ea typeface="Calibri" pitchFamily="34" charset="-122"/>
                 <a:cs typeface="Calibri" pitchFamily="34" charset="-120"/>
               </a:rPr>
-              <a:t>Fuente: Data_NCR-21092026.xlsx — hoja «Observaciones» · Corte 21-09-2026 · 513 registros desde 10-02-2023</a:t>
+              <a:t>Fuente: Data_NCR.xlsx — hoja «Observaciones» · Corte 28-09-2026 · 514 registros desde 10-02-2023</a:t>
             </a:r>
             <a:endParaRPr lang="en-US" sz="850" dirty="0"/>
           </a:p>
@@ -8708,7 +8708,7 @@
                 <a:ea typeface="Calibri" pitchFamily="34" charset="-122"/>
                 <a:cs typeface="Calibri" pitchFamily="34" charset="-120"/>
               </a:rPr>
-              <a:t>132</a:t>
+              <a:t>139</a:t>
             </a:r>
             <a:endParaRPr lang="en-US" sz="1050" dirty="0"/>
           </a:p>
@@ -8831,7 +8831,7 @@
                 <a:ea typeface="Calibri" pitchFamily="34" charset="-122"/>
                 <a:cs typeface="Calibri" pitchFamily="34" charset="-120"/>
               </a:rPr>
-              <a:t>SEMANA 14-09-2026 — 20-09-2026</a:t>
+              <a:t>SEMANA 21-09-2026 — 27-09-2026</a:t>
             </a:r>
             <a:endParaRPr lang="en-US" sz="1000" dirty="0"/>
           </a:p>
@@ -8909,7 +8909,7 @@
                 <a:ea typeface="Calibri" pitchFamily="34" charset="-122"/>
                 <a:cs typeface="Calibri" pitchFamily="34" charset="-120"/>
               </a:rPr>
-              <a:t>Fuente: Data_NCR-21092026.xlsx — hoja «Observaciones» · Corte 21-09-2026 · 513 registros desde 10-02-2023</a:t>
+              <a:t>Fuente: Data_NCR.xlsx — hoja «Observaciones» · Corte 28-09-2026 · 514 registros desde 10-02-2023</a:t>
             </a:r>
             <a:endParaRPr lang="en-US" sz="850" dirty="0"/>
           </a:p>
@@ -9262,7 +9262,7 @@
                 <a:ea typeface="Calibri" pitchFamily="34" charset="-122"/>
                 <a:cs typeface="Calibri" pitchFamily="34" charset="-120"/>
               </a:rPr>
-              <a:t>251 hallazgos levantados · 52 internas · 199 del cliente · 12 especialidades involucradas.</a:t>
+              <a:t>252 hallazgos levantados · 52 internas · 200 del cliente · 12 especialidades involucradas.</a:t>
             </a:r>
             <a:endParaRPr lang="en-US" sz="1350" dirty="0"/>
           </a:p>
@@ -9321,7 +9321,7 @@
                 <a:ea typeface="Cambria" pitchFamily="34" charset="-122"/>
                 <a:cs typeface="Cambria" pitchFamily="34" charset="-120"/>
               </a:rPr>
-              <a:t>97,2%</a:t>
+              <a:t>99,2%</a:t>
             </a:r>
             <a:endParaRPr lang="en-US" sz="3400" dirty="0"/>
           </a:p>
@@ -9399,7 +9399,7 @@
                 <a:ea typeface="Cambria" pitchFamily="34" charset="-122"/>
                 <a:cs typeface="Cambria" pitchFamily="34" charset="-120"/>
               </a:rPr>
-              <a:t>7</a:t>
+              <a:t>2</a:t>
             </a:r>
             <a:endParaRPr lang="en-US" sz="3400" dirty="0"/>
           </a:p>
@@ -9555,7 +9555,7 @@
                 <a:ea typeface="Cambria" pitchFamily="34" charset="-122"/>
                 <a:cs typeface="Cambria" pitchFamily="34" charset="-120"/>
               </a:rPr>
-              <a:t>20,7%</a:t>
+              <a:t>20,6%</a:t>
             </a:r>
             <a:endParaRPr lang="en-US" sz="3400" dirty="0"/>
           </a:p>
@@ -9633,7 +9633,7 @@
                 <a:ea typeface="Calibri" pitchFamily="34" charset="-122"/>
                 <a:cs typeface="Calibri" pitchFamily="34" charset="-120"/>
               </a:rPr>
-              <a:t>Corte: 21-09-2026</a:t>
+              <a:t>Corte: 28-09-2026</a:t>
             </a:r>
             <a:endParaRPr lang="en-US" sz="1100" dirty="0"/>
           </a:p>
@@ -9672,7 +9672,7 @@
                 <a:ea typeface="Calibri" pitchFamily="34" charset="-122"/>
                 <a:cs typeface="Calibri" pitchFamily="34" charset="-120"/>
               </a:rPr>
-              <a:t>Fuente: Data_NCR-21092026.xlsx — hoja «Observaciones» · Corte 21-09-2026 · 513 registros desde 10-02-2023</a:t>
+              <a:t>Fuente: Data_NCR.xlsx — hoja «Observaciones» · Corte 28-09-2026 · 514 registros desde 10-02-2023</a:t>
             </a:r>
             <a:endParaRPr lang="en-US" sz="850" dirty="0"/>
           </a:p>
@@ -9938,7 +9938,7 @@
                 <a:ea typeface="Cambria" pitchFamily="34" charset="-122"/>
                 <a:cs typeface="Cambria" pitchFamily="34" charset="-120"/>
               </a:rPr>
-              <a:t>251</a:t>
+              <a:t>252</a:t>
             </a:r>
             <a:endParaRPr lang="en-US" sz="4000" dirty="0"/>
           </a:p>
@@ -9977,7 +9977,7 @@
                 <a:ea typeface="Calibri" pitchFamily="34" charset="-122"/>
                 <a:cs typeface="Calibri" pitchFamily="34" charset="-120"/>
               </a:rPr>
-              <a:t>244 cerrados</a:t>
+              <a:t>250 cerrados</a:t>
             </a:r>
             <a:endParaRPr lang="en-US" sz="1400" dirty="0"/>
           </a:p>
@@ -10055,7 +10055,7 @@
                 <a:ea typeface="Calibri" pitchFamily="34" charset="-122"/>
                 <a:cs typeface="Calibri" pitchFamily="34" charset="-120"/>
               </a:rPr>
-              <a:t>52 internas · 199 del cliente</a:t>
+              <a:t>52 internas · 200 del cliente</a:t>
             </a:r>
             <a:endParaRPr lang="en-US" sz="950" dirty="0"/>
           </a:p>
@@ -10148,7 +10148,7 @@
                 <a:ea typeface="Cambria" pitchFamily="34" charset="-122"/>
                 <a:cs typeface="Cambria" pitchFamily="34" charset="-120"/>
               </a:rPr>
-              <a:t>97,2%</a:t>
+              <a:t>99,2%</a:t>
             </a:r>
             <a:endParaRPr lang="en-US" sz="4000" dirty="0"/>
           </a:p>
@@ -10187,7 +10187,7 @@
                 <a:ea typeface="Calibri" pitchFamily="34" charset="-122"/>
                 <a:cs typeface="Calibri" pitchFamily="34" charset="-120"/>
               </a:rPr>
-              <a:t>244/251</a:t>
+              <a:t>250/252</a:t>
             </a:r>
             <a:endParaRPr lang="en-US" sz="1400" dirty="0"/>
           </a:p>
@@ -10265,7 +10265,7 @@
                 <a:ea typeface="Calibri" pitchFamily="34" charset="-122"/>
                 <a:cs typeface="Calibri" pitchFamily="34" charset="-120"/>
               </a:rPr>
-              <a:t>Global del módulo: 91,2%</a:t>
+              <a:t>Global del módulo: 93,6%</a:t>
             </a:r>
             <a:endParaRPr lang="en-US" sz="950" dirty="0"/>
           </a:p>
@@ -10358,7 +10358,7 @@
                 <a:ea typeface="Cambria" pitchFamily="34" charset="-122"/>
                 <a:cs typeface="Cambria" pitchFamily="34" charset="-120"/>
               </a:rPr>
-              <a:t>7</a:t>
+              <a:t>2</a:t>
             </a:r>
             <a:endParaRPr lang="en-US" sz="4000" dirty="0"/>
           </a:p>
@@ -10475,7 +10475,7 @@
                 <a:ea typeface="Calibri" pitchFamily="34" charset="-122"/>
                 <a:cs typeface="Calibri" pitchFamily="34" charset="-120"/>
               </a:rPr>
-              <a:t>5 iniciado · 2 listo para revisión</a:t>
+              <a:t>2 iniciado</a:t>
             </a:r>
             <a:endParaRPr lang="en-US" sz="950" dirty="0"/>
           </a:p>
@@ -10801,7 +10801,7 @@
                 <a:ea typeface="Cambria" pitchFamily="34" charset="-122"/>
                 <a:cs typeface="Cambria" pitchFamily="34" charset="-120"/>
               </a:rPr>
-              <a:t>20,7%</a:t>
+              <a:t>20,6%</a:t>
             </a:r>
             <a:endParaRPr lang="en-US" sz="2600" dirty="0"/>
           </a:p>
@@ -11121,7 +11121,7 @@
                 <a:ea typeface="Calibri" pitchFamily="34" charset="-122"/>
                 <a:cs typeface="Calibri" pitchFamily="34" charset="-120"/>
               </a:rPr>
-              <a:t>7 ab.</a:t>
+              <a:t>2 ab.</a:t>
             </a:r>
             <a:endParaRPr lang="en-US" sz="950" dirty="0"/>
           </a:p>
@@ -11160,7 +11160,7 @@
                 <a:ea typeface="Cambria" pitchFamily="34" charset="-122"/>
                 <a:cs typeface="Cambria" pitchFamily="34" charset="-120"/>
               </a:rPr>
-              <a:t>199</a:t>
+              <a:t>200</a:t>
             </a:r>
             <a:endParaRPr lang="en-US" sz="1600" dirty="0"/>
           </a:p>
@@ -11199,7 +11199,7 @@
                 <a:ea typeface="Calibri" pitchFamily="34" charset="-122"/>
                 <a:cs typeface="Calibri" pitchFamily="34" charset="-120"/>
               </a:rPr>
-              <a:t>Fuente: Data_NCR-21092026.xlsx — hoja «Observaciones» · Corte 21-09-2026 · 513 registros desde 10-02-2023</a:t>
+              <a:t>Fuente: Data_NCR.xlsx — hoja «Observaciones» · Corte 28-09-2026 · 514 registros desde 10-02-2023</a:t>
             </a:r>
             <a:endParaRPr lang="en-US" sz="850" dirty="0"/>
           </a:p>
@@ -11450,7 +11450,7 @@
                 <a:ea typeface="Calibri" pitchFamily="34" charset="-122"/>
                 <a:cs typeface="Calibri" pitchFamily="34" charset="-120"/>
               </a:rPr>
-              <a:t>7 hallazgos siguen abiertos; 1 con más de 180 días. Se listan del más antiguo al más reciente.</a:t>
+              <a:t>2 hallazgos siguen abiertos; 0 con más de 180 días. Se listan del más antiguo al más reciente.</a:t>
             </a:r>
             <a:endParaRPr lang="en-US" sz="1350" dirty="0"/>
           </a:p>
@@ -11824,7 +11824,7 @@
                 <a:ea typeface="Calibri" pitchFamily="34" charset="-122"/>
                 <a:cs typeface="Calibri" pitchFamily="34" charset="-120"/>
               </a:rPr>
-              <a:t>198</a:t>
+              <a:t>235</a:t>
             </a:r>
             <a:endParaRPr lang="en-US" sz="1050" dirty="0"/>
           </a:p>
@@ -11863,7 +11863,7 @@
                 <a:ea typeface="Calibri" pitchFamily="34" charset="-122"/>
                 <a:cs typeface="Calibri" pitchFamily="34" charset="-120"/>
               </a:rPr>
-              <a:t>Producto No Conforme</a:t>
+              <a:t>No Conformidad</a:t>
             </a:r>
             <a:endParaRPr lang="en-US" sz="1050" dirty="0"/>
           </a:p>
@@ -11980,7 +11980,7 @@
                 <a:ea typeface="Calibri" pitchFamily="34" charset="-122"/>
                 <a:cs typeface="Calibri" pitchFamily="34" charset="-120"/>
               </a:rPr>
-              <a:t>Wladimir Carvajal …</a:t>
+              <a:t>Mauricio Rocha A.</a:t>
             </a:r>
             <a:endParaRPr lang="en-US" sz="1050" dirty="0"/>
           </a:p>
@@ -12050,15 +12050,15 @@
               <a:buNone/>
             </a:pPr>
             <a:r>
-              <a:rPr lang="en-US" sz="1050" b="1" dirty="0">
-                <a:solidFill>
-                  <a:srgbClr val="C0392B"/>
-                </a:solidFill>
-                <a:latin typeface="Calibri" pitchFamily="34" charset="0"/>
-                <a:ea typeface="Calibri" pitchFamily="34" charset="-122"/>
-                <a:cs typeface="Calibri" pitchFamily="34" charset="-120"/>
-              </a:rPr>
-              <a:t>182</a:t>
+              <a:rPr lang="en-US" sz="1050" dirty="0">
+                <a:solidFill>
+                  <a:srgbClr val="1A2433"/>
+                </a:solidFill>
+                <a:latin typeface="Calibri" pitchFamily="34" charset="0"/>
+                <a:ea typeface="Calibri" pitchFamily="34" charset="-122"/>
+                <a:cs typeface="Calibri" pitchFamily="34" charset="-120"/>
+              </a:rPr>
+              <a:t>90</a:t>
             </a:r>
             <a:endParaRPr lang="en-US" sz="1050" dirty="0"/>
           </a:p>
@@ -12097,7 +12097,7 @@
                 <a:ea typeface="Calibri" pitchFamily="34" charset="-122"/>
                 <a:cs typeface="Calibri" pitchFamily="34" charset="-120"/>
               </a:rPr>
-              <a:t>Corte en geomembrana HDPE instalada…</a:t>
+              <a:t>Geomembrana presenta sectores en lo…</a:t>
             </a:r>
             <a:endParaRPr lang="en-US" sz="1000" dirty="0"/>
           </a:p>
@@ -12179,7 +12179,7 @@
                 <a:ea typeface="Calibri" pitchFamily="34" charset="-122"/>
                 <a:cs typeface="Calibri" pitchFamily="34" charset="-120"/>
               </a:rPr>
-              <a:t>235</a:t>
+              <a:t>253</a:t>
             </a:r>
             <a:endParaRPr lang="en-US" sz="1050" dirty="0"/>
           </a:p>
@@ -12296,7 +12296,7 @@
                 <a:ea typeface="Calibri" pitchFamily="34" charset="-122"/>
                 <a:cs typeface="Calibri" pitchFamily="34" charset="-120"/>
               </a:rPr>
-              <a:t>OO.CC</a:t>
+              <a:t>CALIDAD</a:t>
             </a:r>
             <a:endParaRPr lang="en-US" sz="1050" dirty="0"/>
           </a:p>
@@ -12335,7 +12335,7 @@
                 <a:ea typeface="Calibri" pitchFamily="34" charset="-122"/>
                 <a:cs typeface="Calibri" pitchFamily="34" charset="-120"/>
               </a:rPr>
-              <a:t>Mauricio Rocha A.</a:t>
+              <a:t>Mauricio Soto B.</a:t>
             </a:r>
             <a:endParaRPr lang="en-US" sz="1050" dirty="0"/>
           </a:p>
@@ -12413,7 +12413,7 @@
                 <a:ea typeface="Calibri" pitchFamily="34" charset="-122"/>
                 <a:cs typeface="Calibri" pitchFamily="34" charset="-120"/>
               </a:rPr>
-              <a:t>83</a:t>
+              <a:t>5</a:t>
             </a:r>
             <a:endParaRPr lang="en-US" sz="1050" dirty="0"/>
           </a:p>
@@ -12452,7 +12452,7 @@
                 <a:ea typeface="Calibri" pitchFamily="34" charset="-122"/>
                 <a:cs typeface="Calibri" pitchFamily="34" charset="-120"/>
               </a:rPr>
-              <a:t>Geomembrana presenta sectores en lo…</a:t>
+              <a:t>No se dispone de una planificación …</a:t>
             </a:r>
             <a:endParaRPr lang="en-US" sz="1000" dirty="0"/>
           </a:p>
@@ -12483,1722 +12483,7 @@
       </p:sp>
       <p:sp>
         <p:nvSpPr>
-          <p:cNvPr id="34" name="Text 31"/>
-          <p:cNvSpPr/>
-          <p:nvPr/>
-        </p:nvSpPr>
-        <p:spPr>
-          <a:xfrm>
-            <a:off x="502920" y="3008376"/>
-            <a:ext cx="822960" cy="256032"/>
-          </a:xfrm>
-          <a:prstGeom prst="rect">
-            <a:avLst/>
-          </a:prstGeom>
-          <a:noFill/>
-          <a:ln/>
-        </p:spPr>
-        <p:txBody>
-          <a:bodyPr wrap="square" lIns="0" tIns="0" rIns="0" bIns="0" rtlCol="0" anchor="ctr"/>
-          <a:lstStyle/>
-          <a:p>
-            <a:pPr algn="l" indent="0" marL="0">
-              <a:buNone/>
-            </a:pPr>
-            <a:r>
-              <a:rPr lang="en-US" sz="1050" dirty="0">
-                <a:solidFill>
-                  <a:srgbClr val="1A2433"/>
-                </a:solidFill>
-                <a:latin typeface="Calibri" pitchFamily="34" charset="0"/>
-                <a:ea typeface="Calibri" pitchFamily="34" charset="-122"/>
-                <a:cs typeface="Calibri" pitchFamily="34" charset="-120"/>
-              </a:rPr>
-              <a:t>241</a:t>
-            </a:r>
-            <a:endParaRPr lang="en-US" sz="1050" dirty="0"/>
-          </a:p>
-        </p:txBody>
-      </p:sp>
-      <p:sp>
-        <p:nvSpPr>
-          <p:cNvPr id="35" name="Text 32"/>
-          <p:cNvSpPr/>
-          <p:nvPr/>
-        </p:nvSpPr>
-        <p:spPr>
-          <a:xfrm>
-            <a:off x="1371600" y="3008376"/>
-            <a:ext cx="1508760" cy="256032"/>
-          </a:xfrm>
-          <a:prstGeom prst="rect">
-            <a:avLst/>
-          </a:prstGeom>
-          <a:noFill/>
-          <a:ln/>
-        </p:spPr>
-        <p:txBody>
-          <a:bodyPr wrap="square" lIns="0" tIns="0" rIns="0" bIns="0" rtlCol="0" anchor="ctr"/>
-          <a:lstStyle/>
-          <a:p>
-            <a:pPr algn="l" indent="0" marL="0">
-              <a:buNone/>
-            </a:pPr>
-            <a:r>
-              <a:rPr lang="en-US" sz="1050" dirty="0">
-                <a:solidFill>
-                  <a:srgbClr val="1A2433"/>
-                </a:solidFill>
-                <a:latin typeface="Calibri" pitchFamily="34" charset="0"/>
-                <a:ea typeface="Calibri" pitchFamily="34" charset="-122"/>
-                <a:cs typeface="Calibri" pitchFamily="34" charset="-120"/>
-              </a:rPr>
-              <a:t>No Conformidad</a:t>
-            </a:r>
-            <a:endParaRPr lang="en-US" sz="1050" dirty="0"/>
-          </a:p>
-        </p:txBody>
-      </p:sp>
-      <p:sp>
-        <p:nvSpPr>
-          <p:cNvPr id="36" name="Text 33"/>
-          <p:cNvSpPr/>
-          <p:nvPr/>
-        </p:nvSpPr>
-        <p:spPr>
-          <a:xfrm>
-            <a:off x="2926080" y="3008376"/>
-            <a:ext cx="1463040" cy="256032"/>
-          </a:xfrm>
-          <a:prstGeom prst="rect">
-            <a:avLst/>
-          </a:prstGeom>
-          <a:noFill/>
-          <a:ln/>
-        </p:spPr>
-        <p:txBody>
-          <a:bodyPr wrap="square" lIns="0" tIns="0" rIns="0" bIns="0" rtlCol="0" anchor="ctr"/>
-          <a:lstStyle/>
-          <a:p>
-            <a:pPr algn="l" indent="0" marL="0">
-              <a:buNone/>
-            </a:pPr>
-            <a:r>
-              <a:rPr lang="en-US" sz="1050" b="1" dirty="0">
-                <a:solidFill>
-                  <a:srgbClr val="C87A32"/>
-                </a:solidFill>
-                <a:latin typeface="Calibri" pitchFamily="34" charset="0"/>
-                <a:ea typeface="Calibri" pitchFamily="34" charset="-122"/>
-                <a:cs typeface="Calibri" pitchFamily="34" charset="-120"/>
-              </a:rPr>
-              <a:t>Externa · Cliente</a:t>
-            </a:r>
-            <a:endParaRPr lang="en-US" sz="1050" dirty="0"/>
-          </a:p>
-        </p:txBody>
-      </p:sp>
-      <p:sp>
-        <p:nvSpPr>
-          <p:cNvPr id="37" name="Text 34"/>
-          <p:cNvSpPr/>
-          <p:nvPr/>
-        </p:nvSpPr>
-        <p:spPr>
-          <a:xfrm>
-            <a:off x="4434840" y="3008376"/>
-            <a:ext cx="1280160" cy="256032"/>
-          </a:xfrm>
-          <a:prstGeom prst="rect">
-            <a:avLst/>
-          </a:prstGeom>
-          <a:noFill/>
-          <a:ln/>
-        </p:spPr>
-        <p:txBody>
-          <a:bodyPr wrap="square" lIns="0" tIns="0" rIns="0" bIns="0" rtlCol="0" anchor="ctr"/>
-          <a:lstStyle/>
-          <a:p>
-            <a:pPr algn="l" indent="0" marL="0">
-              <a:buNone/>
-            </a:pPr>
-            <a:r>
-              <a:rPr lang="en-US" sz="1050" dirty="0">
-                <a:solidFill>
-                  <a:srgbClr val="1A2433"/>
-                </a:solidFill>
-                <a:latin typeface="Calibri" pitchFamily="34" charset="0"/>
-                <a:ea typeface="Calibri" pitchFamily="34" charset="-122"/>
-                <a:cs typeface="Calibri" pitchFamily="34" charset="-120"/>
-              </a:rPr>
-              <a:t>CALIDAD</a:t>
-            </a:r>
-            <a:endParaRPr lang="en-US" sz="1050" dirty="0"/>
-          </a:p>
-        </p:txBody>
-      </p:sp>
-      <p:sp>
-        <p:nvSpPr>
-          <p:cNvPr id="38" name="Text 35"/>
-          <p:cNvSpPr/>
-          <p:nvPr/>
-        </p:nvSpPr>
-        <p:spPr>
-          <a:xfrm>
-            <a:off x="5760720" y="3008376"/>
-            <a:ext cx="1508760" cy="256032"/>
-          </a:xfrm>
-          <a:prstGeom prst="rect">
-            <a:avLst/>
-          </a:prstGeom>
-          <a:noFill/>
-          <a:ln/>
-        </p:spPr>
-        <p:txBody>
-          <a:bodyPr wrap="square" lIns="0" tIns="0" rIns="0" bIns="0" rtlCol="0" anchor="ctr"/>
-          <a:lstStyle/>
-          <a:p>
-            <a:pPr algn="l" indent="0" marL="0">
-              <a:buNone/>
-            </a:pPr>
-            <a:r>
-              <a:rPr lang="en-US" sz="1050" dirty="0">
-                <a:solidFill>
-                  <a:srgbClr val="1A2433"/>
-                </a:solidFill>
-                <a:latin typeface="Calibri" pitchFamily="34" charset="0"/>
-                <a:ea typeface="Calibri" pitchFamily="34" charset="-122"/>
-                <a:cs typeface="Calibri" pitchFamily="34" charset="-120"/>
-              </a:rPr>
-              <a:t>Daniel Ramirez B.</a:t>
-            </a:r>
-            <a:endParaRPr lang="en-US" sz="1050" dirty="0"/>
-          </a:p>
-        </p:txBody>
-      </p:sp>
-      <p:sp>
-        <p:nvSpPr>
-          <p:cNvPr id="39" name="Text 36"/>
-          <p:cNvSpPr/>
-          <p:nvPr/>
-        </p:nvSpPr>
-        <p:spPr>
-          <a:xfrm>
-            <a:off x="7315200" y="3008376"/>
-            <a:ext cx="1325880" cy="256032"/>
-          </a:xfrm>
-          <a:prstGeom prst="rect">
-            <a:avLst/>
-          </a:prstGeom>
-          <a:noFill/>
-          <a:ln/>
-        </p:spPr>
-        <p:txBody>
-          <a:bodyPr wrap="square" lIns="0" tIns="0" rIns="0" bIns="0" rtlCol="0" anchor="ctr"/>
-          <a:lstStyle/>
-          <a:p>
-            <a:pPr algn="l" indent="0" marL="0">
-              <a:buNone/>
-            </a:pPr>
-            <a:r>
-              <a:rPr lang="en-US" sz="1050" dirty="0">
-                <a:solidFill>
-                  <a:srgbClr val="1A2433"/>
-                </a:solidFill>
-                <a:latin typeface="Calibri" pitchFamily="34" charset="0"/>
-                <a:ea typeface="Calibri" pitchFamily="34" charset="-122"/>
-                <a:cs typeface="Calibri" pitchFamily="34" charset="-120"/>
-              </a:rPr>
-              <a:t>Listo para revisi…</a:t>
-            </a:r>
-            <a:endParaRPr lang="en-US" sz="1050" dirty="0"/>
-          </a:p>
-        </p:txBody>
-      </p:sp>
-      <p:sp>
-        <p:nvSpPr>
-          <p:cNvPr id="40" name="Text 37"/>
-          <p:cNvSpPr/>
-          <p:nvPr/>
-        </p:nvSpPr>
-        <p:spPr>
-          <a:xfrm>
-            <a:off x="8686800" y="3008376"/>
-            <a:ext cx="640080" cy="256032"/>
-          </a:xfrm>
-          <a:prstGeom prst="rect">
-            <a:avLst/>
-          </a:prstGeom>
-          <a:noFill/>
-          <a:ln/>
-        </p:spPr>
-        <p:txBody>
-          <a:bodyPr wrap="square" lIns="0" tIns="0" rIns="0" bIns="0" rtlCol="0" anchor="ctr"/>
-          <a:lstStyle/>
-          <a:p>
-            <a:pPr algn="r" indent="0" marL="0">
-              <a:buNone/>
-            </a:pPr>
-            <a:r>
-              <a:rPr lang="en-US" sz="1050" dirty="0">
-                <a:solidFill>
-                  <a:srgbClr val="1A2433"/>
-                </a:solidFill>
-                <a:latin typeface="Calibri" pitchFamily="34" charset="0"/>
-                <a:ea typeface="Calibri" pitchFamily="34" charset="-122"/>
-                <a:cs typeface="Calibri" pitchFamily="34" charset="-120"/>
-              </a:rPr>
-              <a:t>55</a:t>
-            </a:r>
-            <a:endParaRPr lang="en-US" sz="1050" dirty="0"/>
-          </a:p>
-        </p:txBody>
-      </p:sp>
-      <p:sp>
-        <p:nvSpPr>
-          <p:cNvPr id="41" name="Text 38"/>
-          <p:cNvSpPr/>
-          <p:nvPr/>
-        </p:nvSpPr>
-        <p:spPr>
-          <a:xfrm>
-            <a:off x="9464040" y="3008376"/>
-            <a:ext cx="2286000" cy="256032"/>
-          </a:xfrm>
-          <a:prstGeom prst="rect">
-            <a:avLst/>
-          </a:prstGeom>
-          <a:noFill/>
-          <a:ln/>
-        </p:spPr>
-        <p:txBody>
-          <a:bodyPr wrap="square" lIns="0" tIns="0" rIns="0" bIns="0" rtlCol="0" anchor="ctr"/>
-          <a:lstStyle/>
-          <a:p>
-            <a:pPr algn="l" indent="0" marL="0">
-              <a:buNone/>
-            </a:pPr>
-            <a:r>
-              <a:rPr lang="en-US" sz="1000" dirty="0">
-                <a:solidFill>
-                  <a:srgbClr val="1A2433"/>
-                </a:solidFill>
-                <a:latin typeface="Calibri" pitchFamily="34" charset="0"/>
-                <a:ea typeface="Calibri" pitchFamily="34" charset="-122"/>
-                <a:cs typeface="Calibri" pitchFamily="34" charset="-120"/>
-              </a:rPr>
-              <a:t>Registros de construcción no contie…</a:t>
-            </a:r>
-            <a:endParaRPr lang="en-US" sz="1000" dirty="0"/>
-          </a:p>
-        </p:txBody>
-      </p:sp>
-      <p:sp>
-        <p:nvSpPr>
-          <p:cNvPr id="42" name="Shape 39"/>
-          <p:cNvSpPr/>
-          <p:nvPr/>
-        </p:nvSpPr>
-        <p:spPr>
-          <a:xfrm>
-            <a:off x="502920" y="3300984"/>
-            <a:ext cx="11247120" cy="0"/>
-          </a:xfrm>
-          <a:prstGeom prst="line">
-            <a:avLst/>
-          </a:prstGeom>
-          <a:noFill/>
-          <a:ln w="9525">
-            <a:solidFill>
-              <a:srgbClr val="D9DFE6"/>
-            </a:solidFill>
-            <a:prstDash val="solid"/>
-          </a:ln>
-        </p:spPr>
-      </p:sp>
-      <p:sp>
-        <p:nvSpPr>
-          <p:cNvPr id="43" name="Shape 40"/>
-          <p:cNvSpPr/>
-          <p:nvPr/>
-        </p:nvSpPr>
-        <p:spPr>
-          <a:xfrm>
-            <a:off x="457200" y="3310128"/>
-            <a:ext cx="11292840" cy="347472"/>
-          </a:xfrm>
-          <a:prstGeom prst="rect">
-            <a:avLst/>
-          </a:prstGeom>
-          <a:solidFill>
-            <a:srgbClr val="FFFFFF"/>
-          </a:solidFill>
-          <a:ln/>
-        </p:spPr>
-      </p:sp>
-      <p:sp>
-        <p:nvSpPr>
-          <p:cNvPr id="44" name="Text 41"/>
-          <p:cNvSpPr/>
-          <p:nvPr/>
-        </p:nvSpPr>
-        <p:spPr>
-          <a:xfrm>
-            <a:off x="502920" y="3355848"/>
-            <a:ext cx="822960" cy="256032"/>
-          </a:xfrm>
-          <a:prstGeom prst="rect">
-            <a:avLst/>
-          </a:prstGeom>
-          <a:noFill/>
-          <a:ln/>
-        </p:spPr>
-        <p:txBody>
-          <a:bodyPr wrap="square" lIns="0" tIns="0" rIns="0" bIns="0" rtlCol="0" anchor="ctr"/>
-          <a:lstStyle/>
-          <a:p>
-            <a:pPr algn="l" indent="0" marL="0">
-              <a:buNone/>
-            </a:pPr>
-            <a:r>
-              <a:rPr lang="en-US" sz="1050" dirty="0">
-                <a:solidFill>
-                  <a:srgbClr val="1A2433"/>
-                </a:solidFill>
-                <a:latin typeface="Calibri" pitchFamily="34" charset="0"/>
-                <a:ea typeface="Calibri" pitchFamily="34" charset="-122"/>
-                <a:cs typeface="Calibri" pitchFamily="34" charset="-120"/>
-              </a:rPr>
-              <a:t>247</a:t>
-            </a:r>
-            <a:endParaRPr lang="en-US" sz="1050" dirty="0"/>
-          </a:p>
-        </p:txBody>
-      </p:sp>
-      <p:sp>
-        <p:nvSpPr>
-          <p:cNvPr id="45" name="Text 42"/>
-          <p:cNvSpPr/>
-          <p:nvPr/>
-        </p:nvSpPr>
-        <p:spPr>
-          <a:xfrm>
-            <a:off x="1371600" y="3355848"/>
-            <a:ext cx="1508760" cy="256032"/>
-          </a:xfrm>
-          <a:prstGeom prst="rect">
-            <a:avLst/>
-          </a:prstGeom>
-          <a:noFill/>
-          <a:ln/>
-        </p:spPr>
-        <p:txBody>
-          <a:bodyPr wrap="square" lIns="0" tIns="0" rIns="0" bIns="0" rtlCol="0" anchor="ctr"/>
-          <a:lstStyle/>
-          <a:p>
-            <a:pPr algn="l" indent="0" marL="0">
-              <a:buNone/>
-            </a:pPr>
-            <a:r>
-              <a:rPr lang="en-US" sz="1050" dirty="0">
-                <a:solidFill>
-                  <a:srgbClr val="1A2433"/>
-                </a:solidFill>
-                <a:latin typeface="Calibri" pitchFamily="34" charset="0"/>
-                <a:ea typeface="Calibri" pitchFamily="34" charset="-122"/>
-                <a:cs typeface="Calibri" pitchFamily="34" charset="-120"/>
-              </a:rPr>
-              <a:t>No Conformidad</a:t>
-            </a:r>
-            <a:endParaRPr lang="en-US" sz="1050" dirty="0"/>
-          </a:p>
-        </p:txBody>
-      </p:sp>
-      <p:sp>
-        <p:nvSpPr>
-          <p:cNvPr id="46" name="Text 43"/>
-          <p:cNvSpPr/>
-          <p:nvPr/>
-        </p:nvSpPr>
-        <p:spPr>
-          <a:xfrm>
-            <a:off x="2926080" y="3355848"/>
-            <a:ext cx="1463040" cy="256032"/>
-          </a:xfrm>
-          <a:prstGeom prst="rect">
-            <a:avLst/>
-          </a:prstGeom>
-          <a:noFill/>
-          <a:ln/>
-        </p:spPr>
-        <p:txBody>
-          <a:bodyPr wrap="square" lIns="0" tIns="0" rIns="0" bIns="0" rtlCol="0" anchor="ctr"/>
-          <a:lstStyle/>
-          <a:p>
-            <a:pPr algn="l" indent="0" marL="0">
-              <a:buNone/>
-            </a:pPr>
-            <a:r>
-              <a:rPr lang="en-US" sz="1050" b="1" dirty="0">
-                <a:solidFill>
-                  <a:srgbClr val="C87A32"/>
-                </a:solidFill>
-                <a:latin typeface="Calibri" pitchFamily="34" charset="0"/>
-                <a:ea typeface="Calibri" pitchFamily="34" charset="-122"/>
-                <a:cs typeface="Calibri" pitchFamily="34" charset="-120"/>
-              </a:rPr>
-              <a:t>Externa · Cliente</a:t>
-            </a:r>
-            <a:endParaRPr lang="en-US" sz="1050" dirty="0"/>
-          </a:p>
-        </p:txBody>
-      </p:sp>
-      <p:sp>
-        <p:nvSpPr>
-          <p:cNvPr id="47" name="Text 44"/>
-          <p:cNvSpPr/>
-          <p:nvPr/>
-        </p:nvSpPr>
-        <p:spPr>
-          <a:xfrm>
-            <a:off x="4434840" y="3355848"/>
-            <a:ext cx="1280160" cy="256032"/>
-          </a:xfrm>
-          <a:prstGeom prst="rect">
-            <a:avLst/>
-          </a:prstGeom>
-          <a:noFill/>
-          <a:ln/>
-        </p:spPr>
-        <p:txBody>
-          <a:bodyPr wrap="square" lIns="0" tIns="0" rIns="0" bIns="0" rtlCol="0" anchor="ctr"/>
-          <a:lstStyle/>
-          <a:p>
-            <a:pPr algn="l" indent="0" marL="0">
-              <a:buNone/>
-            </a:pPr>
-            <a:r>
-              <a:rPr lang="en-US" sz="1050" dirty="0">
-                <a:solidFill>
-                  <a:srgbClr val="1A2433"/>
-                </a:solidFill>
-                <a:latin typeface="Calibri" pitchFamily="34" charset="0"/>
-                <a:ea typeface="Calibri" pitchFamily="34" charset="-122"/>
-                <a:cs typeface="Calibri" pitchFamily="34" charset="-120"/>
-              </a:rPr>
-              <a:t>OO.CC</a:t>
-            </a:r>
-            <a:endParaRPr lang="en-US" sz="1050" dirty="0"/>
-          </a:p>
-        </p:txBody>
-      </p:sp>
-      <p:sp>
-        <p:nvSpPr>
-          <p:cNvPr id="48" name="Text 45"/>
-          <p:cNvSpPr/>
-          <p:nvPr/>
-        </p:nvSpPr>
-        <p:spPr>
-          <a:xfrm>
-            <a:off x="5760720" y="3355848"/>
-            <a:ext cx="1508760" cy="256032"/>
-          </a:xfrm>
-          <a:prstGeom prst="rect">
-            <a:avLst/>
-          </a:prstGeom>
-          <a:noFill/>
-          <a:ln/>
-        </p:spPr>
-        <p:txBody>
-          <a:bodyPr wrap="square" lIns="0" tIns="0" rIns="0" bIns="0" rtlCol="0" anchor="ctr"/>
-          <a:lstStyle/>
-          <a:p>
-            <a:pPr algn="l" indent="0" marL="0">
-              <a:buNone/>
-            </a:pPr>
-            <a:r>
-              <a:rPr lang="en-US" sz="1050" dirty="0">
-                <a:solidFill>
-                  <a:srgbClr val="1A2433"/>
-                </a:solidFill>
-                <a:latin typeface="Calibri" pitchFamily="34" charset="0"/>
-                <a:ea typeface="Calibri" pitchFamily="34" charset="-122"/>
-                <a:cs typeface="Calibri" pitchFamily="34" charset="-120"/>
-              </a:rPr>
-              <a:t>Luis Ogalde H.</a:t>
-            </a:r>
-            <a:endParaRPr lang="en-US" sz="1050" dirty="0"/>
-          </a:p>
-        </p:txBody>
-      </p:sp>
-      <p:sp>
-        <p:nvSpPr>
-          <p:cNvPr id="49" name="Text 46"/>
-          <p:cNvSpPr/>
-          <p:nvPr/>
-        </p:nvSpPr>
-        <p:spPr>
-          <a:xfrm>
-            <a:off x="7315200" y="3355848"/>
-            <a:ext cx="1325880" cy="256032"/>
-          </a:xfrm>
-          <a:prstGeom prst="rect">
-            <a:avLst/>
-          </a:prstGeom>
-          <a:noFill/>
-          <a:ln/>
-        </p:spPr>
-        <p:txBody>
-          <a:bodyPr wrap="square" lIns="0" tIns="0" rIns="0" bIns="0" rtlCol="0" anchor="ctr"/>
-          <a:lstStyle/>
-          <a:p>
-            <a:pPr algn="l" indent="0" marL="0">
-              <a:buNone/>
-            </a:pPr>
-            <a:r>
-              <a:rPr lang="en-US" sz="1050" dirty="0">
-                <a:solidFill>
-                  <a:srgbClr val="1A2433"/>
-                </a:solidFill>
-                <a:latin typeface="Calibri" pitchFamily="34" charset="0"/>
-                <a:ea typeface="Calibri" pitchFamily="34" charset="-122"/>
-                <a:cs typeface="Calibri" pitchFamily="34" charset="-120"/>
-              </a:rPr>
-              <a:t>Iniciado</a:t>
-            </a:r>
-            <a:endParaRPr lang="en-US" sz="1050" dirty="0"/>
-          </a:p>
-        </p:txBody>
-      </p:sp>
-      <p:sp>
-        <p:nvSpPr>
-          <p:cNvPr id="50" name="Text 47"/>
-          <p:cNvSpPr/>
-          <p:nvPr/>
-        </p:nvSpPr>
-        <p:spPr>
-          <a:xfrm>
-            <a:off x="8686800" y="3355848"/>
-            <a:ext cx="640080" cy="256032"/>
-          </a:xfrm>
-          <a:prstGeom prst="rect">
-            <a:avLst/>
-          </a:prstGeom>
-          <a:noFill/>
-          <a:ln/>
-        </p:spPr>
-        <p:txBody>
-          <a:bodyPr wrap="square" lIns="0" tIns="0" rIns="0" bIns="0" rtlCol="0" anchor="ctr"/>
-          <a:lstStyle/>
-          <a:p>
-            <a:pPr algn="r" indent="0" marL="0">
-              <a:buNone/>
-            </a:pPr>
-            <a:r>
-              <a:rPr lang="en-US" sz="1050" dirty="0">
-                <a:solidFill>
-                  <a:srgbClr val="1A2433"/>
-                </a:solidFill>
-                <a:latin typeface="Calibri" pitchFamily="34" charset="0"/>
-                <a:ea typeface="Calibri" pitchFamily="34" charset="-122"/>
-                <a:cs typeface="Calibri" pitchFamily="34" charset="-120"/>
-              </a:rPr>
-              <a:t>33</a:t>
-            </a:r>
-            <a:endParaRPr lang="en-US" sz="1050" dirty="0"/>
-          </a:p>
-        </p:txBody>
-      </p:sp>
-      <p:sp>
-        <p:nvSpPr>
-          <p:cNvPr id="51" name="Text 48"/>
-          <p:cNvSpPr/>
-          <p:nvPr/>
-        </p:nvSpPr>
-        <p:spPr>
-          <a:xfrm>
-            <a:off x="9464040" y="3355848"/>
-            <a:ext cx="2286000" cy="256032"/>
-          </a:xfrm>
-          <a:prstGeom prst="rect">
-            <a:avLst/>
-          </a:prstGeom>
-          <a:noFill/>
-          <a:ln/>
-        </p:spPr>
-        <p:txBody>
-          <a:bodyPr wrap="square" lIns="0" tIns="0" rIns="0" bIns="0" rtlCol="0" anchor="ctr"/>
-          <a:lstStyle/>
-          <a:p>
-            <a:pPr algn="l" indent="0" marL="0">
-              <a:buNone/>
-            </a:pPr>
-            <a:r>
-              <a:rPr lang="en-US" sz="1000" dirty="0">
-                <a:solidFill>
-                  <a:srgbClr val="1A2433"/>
-                </a:solidFill>
-                <a:latin typeface="Calibri" pitchFamily="34" charset="0"/>
-                <a:ea typeface="Calibri" pitchFamily="34" charset="-122"/>
-                <a:cs typeface="Calibri" pitchFamily="34" charset="-120"/>
-              </a:rPr>
-              <a:t>Fundaciones FS-01 (10 elementos) no…</a:t>
-            </a:r>
-            <a:endParaRPr lang="en-US" sz="1000" dirty="0"/>
-          </a:p>
-        </p:txBody>
-      </p:sp>
-      <p:sp>
-        <p:nvSpPr>
-          <p:cNvPr id="52" name="Shape 49"/>
-          <p:cNvSpPr/>
-          <p:nvPr/>
-        </p:nvSpPr>
-        <p:spPr>
-          <a:xfrm>
-            <a:off x="502920" y="3648456"/>
-            <a:ext cx="11247120" cy="0"/>
-          </a:xfrm>
-          <a:prstGeom prst="line">
-            <a:avLst/>
-          </a:prstGeom>
-          <a:noFill/>
-          <a:ln w="9525">
-            <a:solidFill>
-              <a:srgbClr val="D9DFE6"/>
-            </a:solidFill>
-            <a:prstDash val="solid"/>
-          </a:ln>
-        </p:spPr>
-      </p:sp>
-      <p:sp>
-        <p:nvSpPr>
-          <p:cNvPr id="53" name="Text 50"/>
-          <p:cNvSpPr/>
-          <p:nvPr/>
-        </p:nvSpPr>
-        <p:spPr>
-          <a:xfrm>
-            <a:off x="502920" y="3703320"/>
-            <a:ext cx="822960" cy="256032"/>
-          </a:xfrm>
-          <a:prstGeom prst="rect">
-            <a:avLst/>
-          </a:prstGeom>
-          <a:noFill/>
-          <a:ln/>
-        </p:spPr>
-        <p:txBody>
-          <a:bodyPr wrap="square" lIns="0" tIns="0" rIns="0" bIns="0" rtlCol="0" anchor="ctr"/>
-          <a:lstStyle/>
-          <a:p>
-            <a:pPr algn="l" indent="0" marL="0">
-              <a:buNone/>
-            </a:pPr>
-            <a:r>
-              <a:rPr lang="en-US" sz="1050" dirty="0">
-                <a:solidFill>
-                  <a:srgbClr val="1A2433"/>
-                </a:solidFill>
-                <a:latin typeface="Calibri" pitchFamily="34" charset="0"/>
-                <a:ea typeface="Calibri" pitchFamily="34" charset="-122"/>
-                <a:cs typeface="Calibri" pitchFamily="34" charset="-120"/>
-              </a:rPr>
-              <a:t>248</a:t>
-            </a:r>
-            <a:endParaRPr lang="en-US" sz="1050" dirty="0"/>
-          </a:p>
-        </p:txBody>
-      </p:sp>
-      <p:sp>
-        <p:nvSpPr>
-          <p:cNvPr id="54" name="Text 51"/>
-          <p:cNvSpPr/>
-          <p:nvPr/>
-        </p:nvSpPr>
-        <p:spPr>
-          <a:xfrm>
-            <a:off x="1371600" y="3703320"/>
-            <a:ext cx="1508760" cy="256032"/>
-          </a:xfrm>
-          <a:prstGeom prst="rect">
-            <a:avLst/>
-          </a:prstGeom>
-          <a:noFill/>
-          <a:ln/>
-        </p:spPr>
-        <p:txBody>
-          <a:bodyPr wrap="square" lIns="0" tIns="0" rIns="0" bIns="0" rtlCol="0" anchor="ctr"/>
-          <a:lstStyle/>
-          <a:p>
-            <a:pPr algn="l" indent="0" marL="0">
-              <a:buNone/>
-            </a:pPr>
-            <a:r>
-              <a:rPr lang="en-US" sz="1050" dirty="0">
-                <a:solidFill>
-                  <a:srgbClr val="1A2433"/>
-                </a:solidFill>
-                <a:latin typeface="Calibri" pitchFamily="34" charset="0"/>
-                <a:ea typeface="Calibri" pitchFamily="34" charset="-122"/>
-                <a:cs typeface="Calibri" pitchFamily="34" charset="-120"/>
-              </a:rPr>
-              <a:t>No Conformidad</a:t>
-            </a:r>
-            <a:endParaRPr lang="en-US" sz="1050" dirty="0"/>
-          </a:p>
-        </p:txBody>
-      </p:sp>
-      <p:sp>
-        <p:nvSpPr>
-          <p:cNvPr id="55" name="Text 52"/>
-          <p:cNvSpPr/>
-          <p:nvPr/>
-        </p:nvSpPr>
-        <p:spPr>
-          <a:xfrm>
-            <a:off x="2926080" y="3703320"/>
-            <a:ext cx="1463040" cy="256032"/>
-          </a:xfrm>
-          <a:prstGeom prst="rect">
-            <a:avLst/>
-          </a:prstGeom>
-          <a:noFill/>
-          <a:ln/>
-        </p:spPr>
-        <p:txBody>
-          <a:bodyPr wrap="square" lIns="0" tIns="0" rIns="0" bIns="0" rtlCol="0" anchor="ctr"/>
-          <a:lstStyle/>
-          <a:p>
-            <a:pPr algn="l" indent="0" marL="0">
-              <a:buNone/>
-            </a:pPr>
-            <a:r>
-              <a:rPr lang="en-US" sz="1050" b="1" dirty="0">
-                <a:solidFill>
-                  <a:srgbClr val="C87A32"/>
-                </a:solidFill>
-                <a:latin typeface="Calibri" pitchFamily="34" charset="0"/>
-                <a:ea typeface="Calibri" pitchFamily="34" charset="-122"/>
-                <a:cs typeface="Calibri" pitchFamily="34" charset="-120"/>
-              </a:rPr>
-              <a:t>Externa · Cliente</a:t>
-            </a:r>
-            <a:endParaRPr lang="en-US" sz="1050" dirty="0"/>
-          </a:p>
-        </p:txBody>
-      </p:sp>
-      <p:sp>
-        <p:nvSpPr>
-          <p:cNvPr id="56" name="Text 53"/>
-          <p:cNvSpPr/>
-          <p:nvPr/>
-        </p:nvSpPr>
-        <p:spPr>
-          <a:xfrm>
-            <a:off x="4434840" y="3703320"/>
-            <a:ext cx="1280160" cy="256032"/>
-          </a:xfrm>
-          <a:prstGeom prst="rect">
-            <a:avLst/>
-          </a:prstGeom>
-          <a:noFill/>
-          <a:ln/>
-        </p:spPr>
-        <p:txBody>
-          <a:bodyPr wrap="square" lIns="0" tIns="0" rIns="0" bIns="0" rtlCol="0" anchor="ctr"/>
-          <a:lstStyle/>
-          <a:p>
-            <a:pPr algn="l" indent="0" marL="0">
-              <a:buNone/>
-            </a:pPr>
-            <a:r>
-              <a:rPr lang="en-US" sz="1050" dirty="0">
-                <a:solidFill>
-                  <a:srgbClr val="1A2433"/>
-                </a:solidFill>
-                <a:latin typeface="Calibri" pitchFamily="34" charset="0"/>
-                <a:ea typeface="Calibri" pitchFamily="34" charset="-122"/>
-                <a:cs typeface="Calibri" pitchFamily="34" charset="-120"/>
-              </a:rPr>
-              <a:t>PIPING</a:t>
-            </a:r>
-            <a:endParaRPr lang="en-US" sz="1050" dirty="0"/>
-          </a:p>
-        </p:txBody>
-      </p:sp>
-      <p:sp>
-        <p:nvSpPr>
-          <p:cNvPr id="57" name="Text 54"/>
-          <p:cNvSpPr/>
-          <p:nvPr/>
-        </p:nvSpPr>
-        <p:spPr>
-          <a:xfrm>
-            <a:off x="5760720" y="3703320"/>
-            <a:ext cx="1508760" cy="256032"/>
-          </a:xfrm>
-          <a:prstGeom prst="rect">
-            <a:avLst/>
-          </a:prstGeom>
-          <a:noFill/>
-          <a:ln/>
-        </p:spPr>
-        <p:txBody>
-          <a:bodyPr wrap="square" lIns="0" tIns="0" rIns="0" bIns="0" rtlCol="0" anchor="ctr"/>
-          <a:lstStyle/>
-          <a:p>
-            <a:pPr algn="l" indent="0" marL="0">
-              <a:buNone/>
-            </a:pPr>
-            <a:r>
-              <a:rPr lang="en-US" sz="1050" dirty="0">
-                <a:solidFill>
-                  <a:srgbClr val="1A2433"/>
-                </a:solidFill>
-                <a:latin typeface="Calibri" pitchFamily="34" charset="0"/>
-                <a:ea typeface="Calibri" pitchFamily="34" charset="-122"/>
-                <a:cs typeface="Calibri" pitchFamily="34" charset="-120"/>
-              </a:rPr>
-              <a:t>Oscar Nahuel P.</a:t>
-            </a:r>
-            <a:endParaRPr lang="en-US" sz="1050" dirty="0"/>
-          </a:p>
-        </p:txBody>
-      </p:sp>
-      <p:sp>
-        <p:nvSpPr>
-          <p:cNvPr id="58" name="Text 55"/>
-          <p:cNvSpPr/>
-          <p:nvPr/>
-        </p:nvSpPr>
-        <p:spPr>
-          <a:xfrm>
-            <a:off x="7315200" y="3703320"/>
-            <a:ext cx="1325880" cy="256032"/>
-          </a:xfrm>
-          <a:prstGeom prst="rect">
-            <a:avLst/>
-          </a:prstGeom>
-          <a:noFill/>
-          <a:ln/>
-        </p:spPr>
-        <p:txBody>
-          <a:bodyPr wrap="square" lIns="0" tIns="0" rIns="0" bIns="0" rtlCol="0" anchor="ctr"/>
-          <a:lstStyle/>
-          <a:p>
-            <a:pPr algn="l" indent="0" marL="0">
-              <a:buNone/>
-            </a:pPr>
-            <a:r>
-              <a:rPr lang="en-US" sz="1050" dirty="0">
-                <a:solidFill>
-                  <a:srgbClr val="1A2433"/>
-                </a:solidFill>
-                <a:latin typeface="Calibri" pitchFamily="34" charset="0"/>
-                <a:ea typeface="Calibri" pitchFamily="34" charset="-122"/>
-                <a:cs typeface="Calibri" pitchFamily="34" charset="-120"/>
-              </a:rPr>
-              <a:t>Listo para revisi…</a:t>
-            </a:r>
-            <a:endParaRPr lang="en-US" sz="1050" dirty="0"/>
-          </a:p>
-        </p:txBody>
-      </p:sp>
-      <p:sp>
-        <p:nvSpPr>
-          <p:cNvPr id="59" name="Text 56"/>
-          <p:cNvSpPr/>
-          <p:nvPr/>
-        </p:nvSpPr>
-        <p:spPr>
-          <a:xfrm>
-            <a:off x="8686800" y="3703320"/>
-            <a:ext cx="640080" cy="256032"/>
-          </a:xfrm>
-          <a:prstGeom prst="rect">
-            <a:avLst/>
-          </a:prstGeom>
-          <a:noFill/>
-          <a:ln/>
-        </p:spPr>
-        <p:txBody>
-          <a:bodyPr wrap="square" lIns="0" tIns="0" rIns="0" bIns="0" rtlCol="0" anchor="ctr"/>
-          <a:lstStyle/>
-          <a:p>
-            <a:pPr algn="r" indent="0" marL="0">
-              <a:buNone/>
-            </a:pPr>
-            <a:r>
-              <a:rPr lang="en-US" sz="1050" dirty="0">
-                <a:solidFill>
-                  <a:srgbClr val="1A2433"/>
-                </a:solidFill>
-                <a:latin typeface="Calibri" pitchFamily="34" charset="0"/>
-                <a:ea typeface="Calibri" pitchFamily="34" charset="-122"/>
-                <a:cs typeface="Calibri" pitchFamily="34" charset="-120"/>
-              </a:rPr>
-              <a:t>33</a:t>
-            </a:r>
-            <a:endParaRPr lang="en-US" sz="1050" dirty="0"/>
-          </a:p>
-        </p:txBody>
-      </p:sp>
-      <p:sp>
-        <p:nvSpPr>
-          <p:cNvPr id="60" name="Text 57"/>
-          <p:cNvSpPr/>
-          <p:nvPr/>
-        </p:nvSpPr>
-        <p:spPr>
-          <a:xfrm>
-            <a:off x="9464040" y="3703320"/>
-            <a:ext cx="2286000" cy="256032"/>
-          </a:xfrm>
-          <a:prstGeom prst="rect">
-            <a:avLst/>
-          </a:prstGeom>
-          <a:noFill/>
-          <a:ln/>
-        </p:spPr>
-        <p:txBody>
-          <a:bodyPr wrap="square" lIns="0" tIns="0" rIns="0" bIns="0" rtlCol="0" anchor="ctr"/>
-          <a:lstStyle/>
-          <a:p>
-            <a:pPr algn="l" indent="0" marL="0">
-              <a:buNone/>
-            </a:pPr>
-            <a:r>
-              <a:rPr lang="en-US" sz="1000" dirty="0">
-                <a:solidFill>
-                  <a:srgbClr val="1A2433"/>
-                </a:solidFill>
-                <a:latin typeface="Calibri" pitchFamily="34" charset="0"/>
-                <a:ea typeface="Calibri" pitchFamily="34" charset="-122"/>
-                <a:cs typeface="Calibri" pitchFamily="34" charset="-120"/>
-              </a:rPr>
-              <a:t>Línea TAG N° 3716D-RW-24-H1-0425-N …</a:t>
-            </a:r>
-            <a:endParaRPr lang="en-US" sz="1000" dirty="0"/>
-          </a:p>
-        </p:txBody>
-      </p:sp>
-      <p:sp>
-        <p:nvSpPr>
-          <p:cNvPr id="61" name="Shape 58"/>
-          <p:cNvSpPr/>
-          <p:nvPr/>
-        </p:nvSpPr>
-        <p:spPr>
-          <a:xfrm>
-            <a:off x="502920" y="3995928"/>
-            <a:ext cx="11247120" cy="0"/>
-          </a:xfrm>
-          <a:prstGeom prst="line">
-            <a:avLst/>
-          </a:prstGeom>
-          <a:noFill/>
-          <a:ln w="9525">
-            <a:solidFill>
-              <a:srgbClr val="D9DFE6"/>
-            </a:solidFill>
-            <a:prstDash val="solid"/>
-          </a:ln>
-        </p:spPr>
-      </p:sp>
-      <p:sp>
-        <p:nvSpPr>
-          <p:cNvPr id="62" name="Shape 59"/>
-          <p:cNvSpPr/>
-          <p:nvPr/>
-        </p:nvSpPr>
-        <p:spPr>
-          <a:xfrm>
-            <a:off x="457200" y="4005072"/>
-            <a:ext cx="11292840" cy="347472"/>
-          </a:xfrm>
-          <a:prstGeom prst="rect">
-            <a:avLst/>
-          </a:prstGeom>
-          <a:solidFill>
-            <a:srgbClr val="FFFFFF"/>
-          </a:solidFill>
-          <a:ln/>
-        </p:spPr>
-      </p:sp>
-      <p:sp>
-        <p:nvSpPr>
-          <p:cNvPr id="63" name="Text 60"/>
-          <p:cNvSpPr/>
-          <p:nvPr/>
-        </p:nvSpPr>
-        <p:spPr>
-          <a:xfrm>
-            <a:off x="502920" y="4050792"/>
-            <a:ext cx="822960" cy="256032"/>
-          </a:xfrm>
-          <a:prstGeom prst="rect">
-            <a:avLst/>
-          </a:prstGeom>
-          <a:noFill/>
-          <a:ln/>
-        </p:spPr>
-        <p:txBody>
-          <a:bodyPr wrap="square" lIns="0" tIns="0" rIns="0" bIns="0" rtlCol="0" anchor="ctr"/>
-          <a:lstStyle/>
-          <a:p>
-            <a:pPr algn="l" indent="0" marL="0">
-              <a:buNone/>
-            </a:pPr>
-            <a:r>
-              <a:rPr lang="en-US" sz="1050" dirty="0">
-                <a:solidFill>
-                  <a:srgbClr val="1A2433"/>
-                </a:solidFill>
-                <a:latin typeface="Calibri" pitchFamily="34" charset="0"/>
-                <a:ea typeface="Calibri" pitchFamily="34" charset="-122"/>
-                <a:cs typeface="Calibri" pitchFamily="34" charset="-120"/>
-              </a:rPr>
-              <a:t>251</a:t>
-            </a:r>
-            <a:endParaRPr lang="en-US" sz="1050" dirty="0"/>
-          </a:p>
-        </p:txBody>
-      </p:sp>
-      <p:sp>
-        <p:nvSpPr>
-          <p:cNvPr id="64" name="Text 61"/>
-          <p:cNvSpPr/>
-          <p:nvPr/>
-        </p:nvSpPr>
-        <p:spPr>
-          <a:xfrm>
-            <a:off x="1371600" y="4050792"/>
-            <a:ext cx="1508760" cy="256032"/>
-          </a:xfrm>
-          <a:prstGeom prst="rect">
-            <a:avLst/>
-          </a:prstGeom>
-          <a:noFill/>
-          <a:ln/>
-        </p:spPr>
-        <p:txBody>
-          <a:bodyPr wrap="square" lIns="0" tIns="0" rIns="0" bIns="0" rtlCol="0" anchor="ctr"/>
-          <a:lstStyle/>
-          <a:p>
-            <a:pPr algn="l" indent="0" marL="0">
-              <a:buNone/>
-            </a:pPr>
-            <a:r>
-              <a:rPr lang="en-US" sz="1050" dirty="0">
-                <a:solidFill>
-                  <a:srgbClr val="1A2433"/>
-                </a:solidFill>
-                <a:latin typeface="Calibri" pitchFamily="34" charset="0"/>
-                <a:ea typeface="Calibri" pitchFamily="34" charset="-122"/>
-                <a:cs typeface="Calibri" pitchFamily="34" charset="-120"/>
-              </a:rPr>
-              <a:t>Producto No Conforme</a:t>
-            </a:r>
-            <a:endParaRPr lang="en-US" sz="1050" dirty="0"/>
-          </a:p>
-        </p:txBody>
-      </p:sp>
-      <p:sp>
-        <p:nvSpPr>
-          <p:cNvPr id="65" name="Text 62"/>
-          <p:cNvSpPr/>
-          <p:nvPr/>
-        </p:nvSpPr>
-        <p:spPr>
-          <a:xfrm>
-            <a:off x="2926080" y="4050792"/>
-            <a:ext cx="1463040" cy="256032"/>
-          </a:xfrm>
-          <a:prstGeom prst="rect">
-            <a:avLst/>
-          </a:prstGeom>
-          <a:noFill/>
-          <a:ln/>
-        </p:spPr>
-        <p:txBody>
-          <a:bodyPr wrap="square" lIns="0" tIns="0" rIns="0" bIns="0" rtlCol="0" anchor="ctr"/>
-          <a:lstStyle/>
-          <a:p>
-            <a:pPr algn="l" indent="0" marL="0">
-              <a:buNone/>
-            </a:pPr>
-            <a:r>
-              <a:rPr lang="en-US" sz="1050" b="1" dirty="0">
-                <a:solidFill>
-                  <a:srgbClr val="C87A32"/>
-                </a:solidFill>
-                <a:latin typeface="Calibri" pitchFamily="34" charset="0"/>
-                <a:ea typeface="Calibri" pitchFamily="34" charset="-122"/>
-                <a:cs typeface="Calibri" pitchFamily="34" charset="-120"/>
-              </a:rPr>
-              <a:t>Externa · Cliente</a:t>
-            </a:r>
-            <a:endParaRPr lang="en-US" sz="1050" dirty="0"/>
-          </a:p>
-        </p:txBody>
-      </p:sp>
-      <p:sp>
-        <p:nvSpPr>
-          <p:cNvPr id="66" name="Text 63"/>
-          <p:cNvSpPr/>
-          <p:nvPr/>
-        </p:nvSpPr>
-        <p:spPr>
-          <a:xfrm>
-            <a:off x="4434840" y="4050792"/>
-            <a:ext cx="1280160" cy="256032"/>
-          </a:xfrm>
-          <a:prstGeom prst="rect">
-            <a:avLst/>
-          </a:prstGeom>
-          <a:noFill/>
-          <a:ln/>
-        </p:spPr>
-        <p:txBody>
-          <a:bodyPr wrap="square" lIns="0" tIns="0" rIns="0" bIns="0" rtlCol="0" anchor="ctr"/>
-          <a:lstStyle/>
-          <a:p>
-            <a:pPr algn="l" indent="0" marL="0">
-              <a:buNone/>
-            </a:pPr>
-            <a:r>
-              <a:rPr lang="en-US" sz="1050" dirty="0">
-                <a:solidFill>
-                  <a:srgbClr val="1A2433"/>
-                </a:solidFill>
-                <a:latin typeface="Calibri" pitchFamily="34" charset="0"/>
-                <a:ea typeface="Calibri" pitchFamily="34" charset="-122"/>
-                <a:cs typeface="Calibri" pitchFamily="34" charset="-120"/>
-              </a:rPr>
-              <a:t>PIPING</a:t>
-            </a:r>
-            <a:endParaRPr lang="en-US" sz="1050" dirty="0"/>
-          </a:p>
-        </p:txBody>
-      </p:sp>
-      <p:sp>
-        <p:nvSpPr>
-          <p:cNvPr id="67" name="Text 64"/>
-          <p:cNvSpPr/>
-          <p:nvPr/>
-        </p:nvSpPr>
-        <p:spPr>
-          <a:xfrm>
-            <a:off x="5760720" y="4050792"/>
-            <a:ext cx="1508760" cy="256032"/>
-          </a:xfrm>
-          <a:prstGeom prst="rect">
-            <a:avLst/>
-          </a:prstGeom>
-          <a:noFill/>
-          <a:ln/>
-        </p:spPr>
-        <p:txBody>
-          <a:bodyPr wrap="square" lIns="0" tIns="0" rIns="0" bIns="0" rtlCol="0" anchor="ctr"/>
-          <a:lstStyle/>
-          <a:p>
-            <a:pPr algn="l" indent="0" marL="0">
-              <a:buNone/>
-            </a:pPr>
-            <a:r>
-              <a:rPr lang="en-US" sz="1050" dirty="0">
-                <a:solidFill>
-                  <a:srgbClr val="1A2433"/>
-                </a:solidFill>
-                <a:latin typeface="Calibri" pitchFamily="34" charset="0"/>
-                <a:ea typeface="Calibri" pitchFamily="34" charset="-122"/>
-                <a:cs typeface="Calibri" pitchFamily="34" charset="-120"/>
-              </a:rPr>
-              <a:t>Oscar Nahuel P.</a:t>
-            </a:r>
-            <a:endParaRPr lang="en-US" sz="1050" dirty="0"/>
-          </a:p>
-        </p:txBody>
-      </p:sp>
-      <p:sp>
-        <p:nvSpPr>
-          <p:cNvPr id="68" name="Text 65"/>
-          <p:cNvSpPr/>
-          <p:nvPr/>
-        </p:nvSpPr>
-        <p:spPr>
-          <a:xfrm>
-            <a:off x="7315200" y="4050792"/>
-            <a:ext cx="1325880" cy="256032"/>
-          </a:xfrm>
-          <a:prstGeom prst="rect">
-            <a:avLst/>
-          </a:prstGeom>
-          <a:noFill/>
-          <a:ln/>
-        </p:spPr>
-        <p:txBody>
-          <a:bodyPr wrap="square" lIns="0" tIns="0" rIns="0" bIns="0" rtlCol="0" anchor="ctr"/>
-          <a:lstStyle/>
-          <a:p>
-            <a:pPr algn="l" indent="0" marL="0">
-              <a:buNone/>
-            </a:pPr>
-            <a:r>
-              <a:rPr lang="en-US" sz="1050" dirty="0">
-                <a:solidFill>
-                  <a:srgbClr val="1A2433"/>
-                </a:solidFill>
-                <a:latin typeface="Calibri" pitchFamily="34" charset="0"/>
-                <a:ea typeface="Calibri" pitchFamily="34" charset="-122"/>
-                <a:cs typeface="Calibri" pitchFamily="34" charset="-120"/>
-              </a:rPr>
-              <a:t>Iniciado</a:t>
-            </a:r>
-            <a:endParaRPr lang="en-US" sz="1050" dirty="0"/>
-          </a:p>
-        </p:txBody>
-      </p:sp>
-      <p:sp>
-        <p:nvSpPr>
-          <p:cNvPr id="69" name="Text 66"/>
-          <p:cNvSpPr/>
-          <p:nvPr/>
-        </p:nvSpPr>
-        <p:spPr>
-          <a:xfrm>
-            <a:off x="8686800" y="4050792"/>
-            <a:ext cx="640080" cy="256032"/>
-          </a:xfrm>
-          <a:prstGeom prst="rect">
-            <a:avLst/>
-          </a:prstGeom>
-          <a:noFill/>
-          <a:ln/>
-        </p:spPr>
-        <p:txBody>
-          <a:bodyPr wrap="square" lIns="0" tIns="0" rIns="0" bIns="0" rtlCol="0" anchor="ctr"/>
-          <a:lstStyle/>
-          <a:p>
-            <a:pPr algn="r" indent="0" marL="0">
-              <a:buNone/>
-            </a:pPr>
-            <a:r>
-              <a:rPr lang="en-US" sz="1050" dirty="0">
-                <a:solidFill>
-                  <a:srgbClr val="1A2433"/>
-                </a:solidFill>
-                <a:latin typeface="Calibri" pitchFamily="34" charset="0"/>
-                <a:ea typeface="Calibri" pitchFamily="34" charset="-122"/>
-                <a:cs typeface="Calibri" pitchFamily="34" charset="-120"/>
-              </a:rPr>
-              <a:t>6</a:t>
-            </a:r>
-            <a:endParaRPr lang="en-US" sz="1050" dirty="0"/>
-          </a:p>
-        </p:txBody>
-      </p:sp>
-      <p:sp>
-        <p:nvSpPr>
-          <p:cNvPr id="70" name="Text 67"/>
-          <p:cNvSpPr/>
-          <p:nvPr/>
-        </p:nvSpPr>
-        <p:spPr>
-          <a:xfrm>
-            <a:off x="9464040" y="4050792"/>
-            <a:ext cx="2286000" cy="256032"/>
-          </a:xfrm>
-          <a:prstGeom prst="rect">
-            <a:avLst/>
-          </a:prstGeom>
-          <a:noFill/>
-          <a:ln/>
-        </p:spPr>
-        <p:txBody>
-          <a:bodyPr wrap="square" lIns="0" tIns="0" rIns="0" bIns="0" rtlCol="0" anchor="ctr"/>
-          <a:lstStyle/>
-          <a:p>
-            <a:pPr algn="l" indent="0" marL="0">
-              <a:buNone/>
-            </a:pPr>
-            <a:r>
-              <a:rPr lang="en-US" sz="1000" dirty="0">
-                <a:solidFill>
-                  <a:srgbClr val="1A2433"/>
-                </a:solidFill>
-                <a:latin typeface="Calibri" pitchFamily="34" charset="0"/>
-                <a:ea typeface="Calibri" pitchFamily="34" charset="-122"/>
-                <a:cs typeface="Calibri" pitchFamily="34" charset="-120"/>
-              </a:rPr>
-              <a:t>Filtración de agua considerable en …</a:t>
-            </a:r>
-            <a:endParaRPr lang="en-US" sz="1000" dirty="0"/>
-          </a:p>
-        </p:txBody>
-      </p:sp>
-      <p:sp>
-        <p:nvSpPr>
-          <p:cNvPr id="71" name="Shape 68"/>
-          <p:cNvSpPr/>
-          <p:nvPr/>
-        </p:nvSpPr>
-        <p:spPr>
-          <a:xfrm>
-            <a:off x="502920" y="4343400"/>
-            <a:ext cx="11247120" cy="0"/>
-          </a:xfrm>
-          <a:prstGeom prst="line">
-            <a:avLst/>
-          </a:prstGeom>
-          <a:noFill/>
-          <a:ln w="9525">
-            <a:solidFill>
-              <a:srgbClr val="D9DFE6"/>
-            </a:solidFill>
-            <a:prstDash val="solid"/>
-          </a:ln>
-        </p:spPr>
-      </p:sp>
-      <p:sp>
-        <p:nvSpPr>
-          <p:cNvPr id="72" name="Text 69"/>
-          <p:cNvSpPr/>
-          <p:nvPr/>
-        </p:nvSpPr>
-        <p:spPr>
-          <a:xfrm>
-            <a:off x="502920" y="4398264"/>
-            <a:ext cx="822960" cy="256032"/>
-          </a:xfrm>
-          <a:prstGeom prst="rect">
-            <a:avLst/>
-          </a:prstGeom>
-          <a:noFill/>
-          <a:ln/>
-        </p:spPr>
-        <p:txBody>
-          <a:bodyPr wrap="square" lIns="0" tIns="0" rIns="0" bIns="0" rtlCol="0" anchor="ctr"/>
-          <a:lstStyle/>
-          <a:p>
-            <a:pPr algn="l" indent="0" marL="0">
-              <a:buNone/>
-            </a:pPr>
-            <a:r>
-              <a:rPr lang="en-US" sz="1050" dirty="0">
-                <a:solidFill>
-                  <a:srgbClr val="1A2433"/>
-                </a:solidFill>
-                <a:latin typeface="Calibri" pitchFamily="34" charset="0"/>
-                <a:ea typeface="Calibri" pitchFamily="34" charset="-122"/>
-                <a:cs typeface="Calibri" pitchFamily="34" charset="-120"/>
-              </a:rPr>
-              <a:t>252</a:t>
-            </a:r>
-            <a:endParaRPr lang="en-US" sz="1050" dirty="0"/>
-          </a:p>
-        </p:txBody>
-      </p:sp>
-      <p:sp>
-        <p:nvSpPr>
-          <p:cNvPr id="73" name="Text 70"/>
-          <p:cNvSpPr/>
-          <p:nvPr/>
-        </p:nvSpPr>
-        <p:spPr>
-          <a:xfrm>
-            <a:off x="1371600" y="4398264"/>
-            <a:ext cx="1508760" cy="256032"/>
-          </a:xfrm>
-          <a:prstGeom prst="rect">
-            <a:avLst/>
-          </a:prstGeom>
-          <a:noFill/>
-          <a:ln/>
-        </p:spPr>
-        <p:txBody>
-          <a:bodyPr wrap="square" lIns="0" tIns="0" rIns="0" bIns="0" rtlCol="0" anchor="ctr"/>
-          <a:lstStyle/>
-          <a:p>
-            <a:pPr algn="l" indent="0" marL="0">
-              <a:buNone/>
-            </a:pPr>
-            <a:r>
-              <a:rPr lang="en-US" sz="1050" dirty="0">
-                <a:solidFill>
-                  <a:srgbClr val="1A2433"/>
-                </a:solidFill>
-                <a:latin typeface="Calibri" pitchFamily="34" charset="0"/>
-                <a:ea typeface="Calibri" pitchFamily="34" charset="-122"/>
-                <a:cs typeface="Calibri" pitchFamily="34" charset="-120"/>
-              </a:rPr>
-              <a:t>Producto No Conforme</a:t>
-            </a:r>
-            <a:endParaRPr lang="en-US" sz="1050" dirty="0"/>
-          </a:p>
-        </p:txBody>
-      </p:sp>
-      <p:sp>
-        <p:nvSpPr>
-          <p:cNvPr id="74" name="Text 71"/>
-          <p:cNvSpPr/>
-          <p:nvPr/>
-        </p:nvSpPr>
-        <p:spPr>
-          <a:xfrm>
-            <a:off x="2926080" y="4398264"/>
-            <a:ext cx="1463040" cy="256032"/>
-          </a:xfrm>
-          <a:prstGeom prst="rect">
-            <a:avLst/>
-          </a:prstGeom>
-          <a:noFill/>
-          <a:ln/>
-        </p:spPr>
-        <p:txBody>
-          <a:bodyPr wrap="square" lIns="0" tIns="0" rIns="0" bIns="0" rtlCol="0" anchor="ctr"/>
-          <a:lstStyle/>
-          <a:p>
-            <a:pPr algn="l" indent="0" marL="0">
-              <a:buNone/>
-            </a:pPr>
-            <a:r>
-              <a:rPr lang="en-US" sz="1050" b="1" dirty="0">
-                <a:solidFill>
-                  <a:srgbClr val="C87A32"/>
-                </a:solidFill>
-                <a:latin typeface="Calibri" pitchFamily="34" charset="0"/>
-                <a:ea typeface="Calibri" pitchFamily="34" charset="-122"/>
-                <a:cs typeface="Calibri" pitchFamily="34" charset="-120"/>
-              </a:rPr>
-              <a:t>Externa · Cliente</a:t>
-            </a:r>
-            <a:endParaRPr lang="en-US" sz="1050" dirty="0"/>
-          </a:p>
-        </p:txBody>
-      </p:sp>
-      <p:sp>
-        <p:nvSpPr>
-          <p:cNvPr id="75" name="Text 72"/>
-          <p:cNvSpPr/>
-          <p:nvPr/>
-        </p:nvSpPr>
-        <p:spPr>
-          <a:xfrm>
-            <a:off x="4434840" y="4398264"/>
-            <a:ext cx="1280160" cy="256032"/>
-          </a:xfrm>
-          <a:prstGeom prst="rect">
-            <a:avLst/>
-          </a:prstGeom>
-          <a:noFill/>
-          <a:ln/>
-        </p:spPr>
-        <p:txBody>
-          <a:bodyPr wrap="square" lIns="0" tIns="0" rIns="0" bIns="0" rtlCol="0" anchor="ctr"/>
-          <a:lstStyle/>
-          <a:p>
-            <a:pPr algn="l" indent="0" marL="0">
-              <a:buNone/>
-            </a:pPr>
-            <a:r>
-              <a:rPr lang="en-US" sz="1050" dirty="0">
-                <a:solidFill>
-                  <a:srgbClr val="1A2433"/>
-                </a:solidFill>
-                <a:latin typeface="Calibri" pitchFamily="34" charset="0"/>
-                <a:ea typeface="Calibri" pitchFamily="34" charset="-122"/>
-                <a:cs typeface="Calibri" pitchFamily="34" charset="-120"/>
-              </a:rPr>
-              <a:t>PIPING</a:t>
-            </a:r>
-            <a:endParaRPr lang="en-US" sz="1050" dirty="0"/>
-          </a:p>
-        </p:txBody>
-      </p:sp>
-      <p:sp>
-        <p:nvSpPr>
-          <p:cNvPr id="76" name="Text 73"/>
-          <p:cNvSpPr/>
-          <p:nvPr/>
-        </p:nvSpPr>
-        <p:spPr>
-          <a:xfrm>
-            <a:off x="5760720" y="4398264"/>
-            <a:ext cx="1508760" cy="256032"/>
-          </a:xfrm>
-          <a:prstGeom prst="rect">
-            <a:avLst/>
-          </a:prstGeom>
-          <a:noFill/>
-          <a:ln/>
-        </p:spPr>
-        <p:txBody>
-          <a:bodyPr wrap="square" lIns="0" tIns="0" rIns="0" bIns="0" rtlCol="0" anchor="ctr"/>
-          <a:lstStyle/>
-          <a:p>
-            <a:pPr algn="l" indent="0" marL="0">
-              <a:buNone/>
-            </a:pPr>
-            <a:r>
-              <a:rPr lang="en-US" sz="1050" dirty="0">
-                <a:solidFill>
-                  <a:srgbClr val="1A2433"/>
-                </a:solidFill>
-                <a:latin typeface="Calibri" pitchFamily="34" charset="0"/>
-                <a:ea typeface="Calibri" pitchFamily="34" charset="-122"/>
-                <a:cs typeface="Calibri" pitchFamily="34" charset="-120"/>
-              </a:rPr>
-              <a:t>Oscar Nahuel P.</a:t>
-            </a:r>
-            <a:endParaRPr lang="en-US" sz="1050" dirty="0"/>
-          </a:p>
-        </p:txBody>
-      </p:sp>
-      <p:sp>
-        <p:nvSpPr>
-          <p:cNvPr id="77" name="Text 74"/>
-          <p:cNvSpPr/>
-          <p:nvPr/>
-        </p:nvSpPr>
-        <p:spPr>
-          <a:xfrm>
-            <a:off x="7315200" y="4398264"/>
-            <a:ext cx="1325880" cy="256032"/>
-          </a:xfrm>
-          <a:prstGeom prst="rect">
-            <a:avLst/>
-          </a:prstGeom>
-          <a:noFill/>
-          <a:ln/>
-        </p:spPr>
-        <p:txBody>
-          <a:bodyPr wrap="square" lIns="0" tIns="0" rIns="0" bIns="0" rtlCol="0" anchor="ctr"/>
-          <a:lstStyle/>
-          <a:p>
-            <a:pPr algn="l" indent="0" marL="0">
-              <a:buNone/>
-            </a:pPr>
-            <a:r>
-              <a:rPr lang="en-US" sz="1050" dirty="0">
-                <a:solidFill>
-                  <a:srgbClr val="1A2433"/>
-                </a:solidFill>
-                <a:latin typeface="Calibri" pitchFamily="34" charset="0"/>
-                <a:ea typeface="Calibri" pitchFamily="34" charset="-122"/>
-                <a:cs typeface="Calibri" pitchFamily="34" charset="-120"/>
-              </a:rPr>
-              <a:t>Iniciado</a:t>
-            </a:r>
-            <a:endParaRPr lang="en-US" sz="1050" dirty="0"/>
-          </a:p>
-        </p:txBody>
-      </p:sp>
-      <p:sp>
-        <p:nvSpPr>
-          <p:cNvPr id="78" name="Text 75"/>
-          <p:cNvSpPr/>
-          <p:nvPr/>
-        </p:nvSpPr>
-        <p:spPr>
-          <a:xfrm>
-            <a:off x="8686800" y="4398264"/>
-            <a:ext cx="640080" cy="256032"/>
-          </a:xfrm>
-          <a:prstGeom prst="rect">
-            <a:avLst/>
-          </a:prstGeom>
-          <a:noFill/>
-          <a:ln/>
-        </p:spPr>
-        <p:txBody>
-          <a:bodyPr wrap="square" lIns="0" tIns="0" rIns="0" bIns="0" rtlCol="0" anchor="ctr"/>
-          <a:lstStyle/>
-          <a:p>
-            <a:pPr algn="r" indent="0" marL="0">
-              <a:buNone/>
-            </a:pPr>
-            <a:r>
-              <a:rPr lang="en-US" sz="1050" dirty="0">
-                <a:solidFill>
-                  <a:srgbClr val="1A2433"/>
-                </a:solidFill>
-                <a:latin typeface="Calibri" pitchFamily="34" charset="0"/>
-                <a:ea typeface="Calibri" pitchFamily="34" charset="-122"/>
-                <a:cs typeface="Calibri" pitchFamily="34" charset="-120"/>
-              </a:rPr>
-              <a:t>5</a:t>
-            </a:r>
-            <a:endParaRPr lang="en-US" sz="1050" dirty="0"/>
-          </a:p>
-        </p:txBody>
-      </p:sp>
-      <p:sp>
-        <p:nvSpPr>
-          <p:cNvPr id="79" name="Text 76"/>
-          <p:cNvSpPr/>
-          <p:nvPr/>
-        </p:nvSpPr>
-        <p:spPr>
-          <a:xfrm>
-            <a:off x="9464040" y="4398264"/>
-            <a:ext cx="2286000" cy="256032"/>
-          </a:xfrm>
-          <a:prstGeom prst="rect">
-            <a:avLst/>
-          </a:prstGeom>
-          <a:noFill/>
-          <a:ln/>
-        </p:spPr>
-        <p:txBody>
-          <a:bodyPr wrap="square" lIns="0" tIns="0" rIns="0" bIns="0" rtlCol="0" anchor="ctr"/>
-          <a:lstStyle/>
-          <a:p>
-            <a:pPr algn="l" indent="0" marL="0">
-              <a:buNone/>
-            </a:pPr>
-            <a:r>
-              <a:rPr lang="en-US" sz="1000" dirty="0">
-                <a:solidFill>
-                  <a:srgbClr val="1A2433"/>
-                </a:solidFill>
-                <a:latin typeface="Calibri" pitchFamily="34" charset="0"/>
-                <a:ea typeface="Calibri" pitchFamily="34" charset="-122"/>
-                <a:cs typeface="Calibri" pitchFamily="34" charset="-120"/>
-              </a:rPr>
-              <a:t>Filtración en la unión mecánica que…</a:t>
-            </a:r>
-            <a:endParaRPr lang="en-US" sz="1000" dirty="0"/>
-          </a:p>
-        </p:txBody>
-      </p:sp>
-      <p:sp>
-        <p:nvSpPr>
-          <p:cNvPr id="80" name="Shape 77"/>
-          <p:cNvSpPr/>
-          <p:nvPr/>
-        </p:nvSpPr>
-        <p:spPr>
-          <a:xfrm>
-            <a:off x="502920" y="4690872"/>
-            <a:ext cx="11247120" cy="0"/>
-          </a:xfrm>
-          <a:prstGeom prst="line">
-            <a:avLst/>
-          </a:prstGeom>
-          <a:noFill/>
-          <a:ln w="9525">
-            <a:solidFill>
-              <a:srgbClr val="D9DFE6"/>
-            </a:solidFill>
-            <a:prstDash val="solid"/>
-          </a:ln>
-        </p:spPr>
-      </p:sp>
-      <p:sp>
-        <p:nvSpPr>
-          <p:cNvPr id="81" name="Shape 78"/>
+          <p:cNvPr id="34" name="Shape 31"/>
           <p:cNvSpPr/>
           <p:nvPr/>
         </p:nvSpPr>
@@ -14220,7 +12505,7 @@
       </p:sp>
       <p:sp>
         <p:nvSpPr>
-          <p:cNvPr id="82" name="Text 79"/>
+          <p:cNvPr id="35" name="Text 32"/>
           <p:cNvSpPr/>
           <p:nvPr/>
         </p:nvSpPr>
@@ -14251,7 +12536,7 @@
                 <a:ea typeface="Calibri" pitchFamily="34" charset="-122"/>
                 <a:cs typeface="Calibri" pitchFamily="34" charset="-120"/>
               </a:rPr>
-              <a:t>SEMANA 14-09-2026 — 20-09-2026</a:t>
+              <a:t>SEMANA 21-09-2026 — 27-09-2026</a:t>
             </a:r>
             <a:endParaRPr lang="en-US" sz="1000" dirty="0"/>
           </a:p>
@@ -14259,7 +12544,7 @@
       </p:sp>
       <p:sp>
         <p:nvSpPr>
-          <p:cNvPr id="83" name="Text 80"/>
+          <p:cNvPr id="36" name="Text 33"/>
           <p:cNvSpPr/>
           <p:nvPr/>
         </p:nvSpPr>
@@ -14290,7 +12575,7 @@
                 <a:ea typeface="Calibri" pitchFamily="34" charset="-122"/>
                 <a:cs typeface="Calibri" pitchFamily="34" charset="-120"/>
               </a:rPr>
-              <a:t>2 hallazgos nuevos · 0 internas · 2 del cliente · PIPING 2 · 2 siguen abiertos</a:t>
+              <a:t>1 hallazgo nuevo · 0 internas · 1 del cliente · CALIDAD 1 · 1 sigue abierto</a:t>
             </a:r>
             <a:endParaRPr lang="en-US" sz="1150" dirty="0"/>
           </a:p>
@@ -14298,7 +12583,7 @@
       </p:sp>
       <p:sp>
         <p:nvSpPr>
-          <p:cNvPr id="84" name="Text 81"/>
+          <p:cNvPr id="37" name="Text 34"/>
           <p:cNvSpPr/>
           <p:nvPr/>
         </p:nvSpPr>
@@ -14329,7 +12614,7 @@
                 <a:ea typeface="Calibri" pitchFamily="34" charset="-122"/>
                 <a:cs typeface="Calibri" pitchFamily="34" charset="-120"/>
               </a:rPr>
-              <a:t>Fuente: Data_NCR-21092026.xlsx — hoja «Observaciones» · Corte 21-09-2026 · 513 registros desde 10-02-2023</a:t>
+              <a:t>Fuente: Data_NCR.xlsx — hoja «Observaciones» · Corte 28-09-2026 · 514 registros desde 10-02-2023</a:t>
             </a:r>
             <a:endParaRPr lang="en-US" sz="850" dirty="0"/>
           </a:p>
@@ -14337,7 +12622,7 @@
       </p:sp>
       <p:sp>
         <p:nvSpPr>
-          <p:cNvPr id="85" name="Text 82"/>
+          <p:cNvPr id="38" name="Text 35"/>
           <p:cNvSpPr/>
           <p:nvPr/>
         </p:nvSpPr>
@@ -14376,7 +12661,7 @@
       </p:sp>
       <p:sp>
         <p:nvSpPr>
-          <p:cNvPr id="86" name="Text 83"/>
+          <p:cNvPr id="39" name="Text 36"/>
           <p:cNvSpPr/>
           <p:nvPr/>
         </p:nvSpPr>
@@ -14741,7 +13026,7 @@
                 <a:ea typeface="Cambria" pitchFamily="34" charset="-122"/>
                 <a:cs typeface="Cambria" pitchFamily="34" charset="-120"/>
               </a:rPr>
-              <a:t>78,5%</a:t>
+              <a:t>82,6%</a:t>
             </a:r>
             <a:endParaRPr lang="en-US" sz="3400" dirty="0"/>
           </a:p>
@@ -14819,7 +13104,7 @@
                 <a:ea typeface="Cambria" pitchFamily="34" charset="-122"/>
                 <a:cs typeface="Cambria" pitchFamily="34" charset="-120"/>
               </a:rPr>
-              <a:t>37</a:t>
+              <a:t>30</a:t>
             </a:r>
             <a:endParaRPr lang="en-US" sz="3400" dirty="0"/>
           </a:p>
@@ -14897,7 +13182,7 @@
                 <a:ea typeface="Cambria" pitchFamily="34" charset="-122"/>
                 <a:cs typeface="Cambria" pitchFamily="34" charset="-120"/>
               </a:rPr>
-              <a:t>140 d</a:t>
+              <a:t>142 d</a:t>
             </a:r>
             <a:endParaRPr lang="en-US" sz="3400" dirty="0"/>
           </a:p>
@@ -15053,7 +13338,7 @@
                 <a:ea typeface="Calibri" pitchFamily="34" charset="-122"/>
                 <a:cs typeface="Calibri" pitchFamily="34" charset="-120"/>
               </a:rPr>
-              <a:t>Corte: 21-09-2026</a:t>
+              <a:t>Corte: 28-09-2026</a:t>
             </a:r>
             <a:endParaRPr lang="en-US" sz="1100" dirty="0"/>
           </a:p>
@@ -15092,7 +13377,7 @@
                 <a:ea typeface="Calibri" pitchFamily="34" charset="-122"/>
                 <a:cs typeface="Calibri" pitchFamily="34" charset="-120"/>
               </a:rPr>
-              <a:t>Fuente: Data_NCR-21092026.xlsx — hoja «Observaciones» · Corte 21-09-2026 · 513 registros desde 10-02-2023</a:t>
+              <a:t>Fuente: Data_NCR.xlsx — hoja «Observaciones» · Corte 28-09-2026 · 514 registros desde 10-02-2023</a:t>
             </a:r>
             <a:endParaRPr lang="en-US" sz="850" dirty="0"/>
           </a:p>
@@ -15397,7 +13682,7 @@
                 <a:ea typeface="Calibri" pitchFamily="34" charset="-122"/>
                 <a:cs typeface="Calibri" pitchFamily="34" charset="-120"/>
               </a:rPr>
-              <a:t>135 cerrados</a:t>
+              <a:t>142 cerrados</a:t>
             </a:r>
             <a:endParaRPr lang="en-US" sz="1400" dirty="0"/>
           </a:p>
@@ -15568,7 +13853,7 @@
                 <a:ea typeface="Cambria" pitchFamily="34" charset="-122"/>
                 <a:cs typeface="Cambria" pitchFamily="34" charset="-120"/>
               </a:rPr>
-              <a:t>78,5%</a:t>
+              <a:t>82,6%</a:t>
             </a:r>
             <a:endParaRPr lang="en-US" sz="4000" dirty="0"/>
           </a:p>
@@ -15607,7 +13892,7 @@
                 <a:ea typeface="Calibri" pitchFamily="34" charset="-122"/>
                 <a:cs typeface="Calibri" pitchFamily="34" charset="-120"/>
               </a:rPr>
-              <a:t>135/172</a:t>
+              <a:t>142/172</a:t>
             </a:r>
             <a:endParaRPr lang="en-US" sz="1400" dirty="0"/>
           </a:p>
@@ -15685,7 +13970,7 @@
                 <a:ea typeface="Calibri" pitchFamily="34" charset="-122"/>
                 <a:cs typeface="Calibri" pitchFamily="34" charset="-120"/>
               </a:rPr>
-              <a:t>Global del módulo: 91,2%</a:t>
+              <a:t>Global del módulo: 93,6%</a:t>
             </a:r>
             <a:endParaRPr lang="en-US" sz="950" dirty="0"/>
           </a:p>
@@ -15778,7 +14063,7 @@
                 <a:ea typeface="Cambria" pitchFamily="34" charset="-122"/>
                 <a:cs typeface="Cambria" pitchFamily="34" charset="-120"/>
               </a:rPr>
-              <a:t>37</a:t>
+              <a:t>30</a:t>
             </a:r>
             <a:endParaRPr lang="en-US" sz="4000" dirty="0"/>
           </a:p>
@@ -15895,7 +14180,7 @@
                 <a:ea typeface="Calibri" pitchFamily="34" charset="-122"/>
                 <a:cs typeface="Calibri" pitchFamily="34" charset="-120"/>
               </a:rPr>
-              <a:t>1 iniciado · 28 listo para revisión · 6 stand by · 1 observada · 1 pendiente</a:t>
+              <a:t>1 iniciado · 5 observada · 22 listo para revisión · 2 pendiente</a:t>
             </a:r>
             <a:endParaRPr lang="en-US" sz="950" dirty="0"/>
           </a:p>
@@ -15988,7 +14273,7 @@
                 <a:ea typeface="Cambria" pitchFamily="34" charset="-122"/>
                 <a:cs typeface="Cambria" pitchFamily="34" charset="-120"/>
               </a:rPr>
-              <a:t>140</a:t>
+              <a:t>142</a:t>
             </a:r>
             <a:endParaRPr lang="en-US" sz="4000" dirty="0"/>
           </a:p>
@@ -16541,7 +14826,7 @@
                 <a:ea typeface="Calibri" pitchFamily="34" charset="-122"/>
                 <a:cs typeface="Calibri" pitchFamily="34" charset="-120"/>
               </a:rPr>
-              <a:t>36 ab.</a:t>
+              <a:t>29 ab.</a:t>
             </a:r>
             <a:endParaRPr lang="en-US" sz="950" dirty="0"/>
           </a:p>
@@ -16756,7 +15041,7 @@
                 <a:ea typeface="Calibri" pitchFamily="34" charset="-122"/>
                 <a:cs typeface="Calibri" pitchFamily="34" charset="-120"/>
               </a:rPr>
-              <a:t>Fuente: Data_NCR-21092026.xlsx — hoja «Observaciones» · Corte 21-09-2026 · 513 registros desde 10-02-2023</a:t>
+              <a:t>Fuente: Data_NCR.xlsx — hoja «Observaciones» · Corte 28-09-2026 · 514 registros desde 10-02-2023</a:t>
             </a:r>
             <a:endParaRPr lang="en-US" sz="850" dirty="0"/>
           </a:p>
@@ -17007,7 +15292,7 @@
                 <a:ea typeface="Calibri" pitchFamily="34" charset="-122"/>
                 <a:cs typeface="Calibri" pitchFamily="34" charset="-120"/>
               </a:rPr>
-              <a:t>37 hallazgos siguen abiertos; 16 con más de 180 días. Se listan del más antiguo al más reciente.</a:t>
+              <a:t>30 hallazgos siguen abiertos; 9 con más de 180 días. Se listan del más antiguo al más reciente.</a:t>
             </a:r>
             <a:endParaRPr lang="en-US" sz="1350" dirty="0"/>
           </a:p>
@@ -17381,7 +15666,7 @@
                 <a:ea typeface="Calibri" pitchFamily="34" charset="-122"/>
                 <a:cs typeface="Calibri" pitchFamily="34" charset="-120"/>
               </a:rPr>
-              <a:t>MASA-21</a:t>
+              <a:t>MASA-24</a:t>
             </a:r>
             <a:endParaRPr lang="en-US" sz="1050" dirty="0"/>
           </a:p>
@@ -17576,7 +15861,7 @@
                 <a:ea typeface="Calibri" pitchFamily="34" charset="-122"/>
                 <a:cs typeface="Calibri" pitchFamily="34" charset="-120"/>
               </a:rPr>
-              <a:t>Listo para revisi…</a:t>
+              <a:t>Observada</a:t>
             </a:r>
             <a:endParaRPr lang="en-US" sz="1050" dirty="0"/>
           </a:p>
@@ -17615,7 +15900,7 @@
                 <a:ea typeface="Calibri" pitchFamily="34" charset="-122"/>
                 <a:cs typeface="Calibri" pitchFamily="34" charset="-120"/>
               </a:rPr>
-              <a:t>340</a:t>
+              <a:t>347</a:t>
             </a:r>
             <a:endParaRPr lang="en-US" sz="1050" dirty="0"/>
           </a:p>
@@ -17654,7 +15939,7 @@
                 <a:ea typeface="Calibri" pitchFamily="34" charset="-122"/>
                 <a:cs typeface="Calibri" pitchFamily="34" charset="-120"/>
               </a:rPr>
-              <a:t>Informe Técnico de Inspección – Fis…</a:t>
+              <a:t>Inspección grout de los recesos de …</a:t>
             </a:r>
             <a:endParaRPr lang="en-US" sz="1000" dirty="0"/>
           </a:p>
@@ -17736,7 +16021,7 @@
                 <a:ea typeface="Calibri" pitchFamily="34" charset="-122"/>
                 <a:cs typeface="Calibri" pitchFamily="34" charset="-120"/>
               </a:rPr>
-              <a:t>MASA-24</a:t>
+              <a:t>MASA-37</a:t>
             </a:r>
             <a:endParaRPr lang="en-US" sz="1050" dirty="0"/>
           </a:p>
@@ -17853,7 +16138,7 @@
                 <a:ea typeface="Calibri" pitchFamily="34" charset="-122"/>
                 <a:cs typeface="Calibri" pitchFamily="34" charset="-120"/>
               </a:rPr>
-              <a:t>OO.CC</a:t>
+              <a:t>MECÁNICA</a:t>
             </a:r>
             <a:endParaRPr lang="en-US" sz="1050" dirty="0"/>
           </a:p>
@@ -17931,7 +16216,7 @@
                 <a:ea typeface="Calibri" pitchFamily="34" charset="-122"/>
                 <a:cs typeface="Calibri" pitchFamily="34" charset="-120"/>
               </a:rPr>
-              <a:t>Stand By</a:t>
+              <a:t>Listo para revisi…</a:t>
             </a:r>
             <a:endParaRPr lang="en-US" sz="1050" dirty="0"/>
           </a:p>
@@ -17970,7 +16255,7 @@
                 <a:ea typeface="Calibri" pitchFamily="34" charset="-122"/>
                 <a:cs typeface="Calibri" pitchFamily="34" charset="-120"/>
               </a:rPr>
-              <a:t>340</a:t>
+              <a:t>285</a:t>
             </a:r>
             <a:endParaRPr lang="en-US" sz="1050" dirty="0"/>
           </a:p>
@@ -18009,7 +16294,7 @@
                 <a:ea typeface="Calibri" pitchFamily="34" charset="-122"/>
                 <a:cs typeface="Calibri" pitchFamily="34" charset="-120"/>
               </a:rPr>
-              <a:t>Inspección grout de los recesos de …</a:t>
+              <a:t>Tolerancia transversal en chutes de…</a:t>
             </a:r>
             <a:endParaRPr lang="en-US" sz="1000" dirty="0"/>
           </a:p>
@@ -18071,7 +16356,7 @@
                 <a:ea typeface="Calibri" pitchFamily="34" charset="-122"/>
                 <a:cs typeface="Calibri" pitchFamily="34" charset="-120"/>
               </a:rPr>
-              <a:t>MASA-37</a:t>
+              <a:t>MASA-43</a:t>
             </a:r>
             <a:endParaRPr lang="en-US" sz="1050" dirty="0"/>
           </a:p>
@@ -18188,7 +16473,7 @@
                 <a:ea typeface="Calibri" pitchFamily="34" charset="-122"/>
                 <a:cs typeface="Calibri" pitchFamily="34" charset="-120"/>
               </a:rPr>
-              <a:t>MECÁNICA</a:t>
+              <a:t>ESTRUCTURA</a:t>
             </a:r>
             <a:endParaRPr lang="en-US" sz="1050" dirty="0"/>
           </a:p>
@@ -18266,7 +16551,7 @@
                 <a:ea typeface="Calibri" pitchFamily="34" charset="-122"/>
                 <a:cs typeface="Calibri" pitchFamily="34" charset="-120"/>
               </a:rPr>
-              <a:t>Listo para revisi…</a:t>
+              <a:t>Observada</a:t>
             </a:r>
             <a:endParaRPr lang="en-US" sz="1050" dirty="0"/>
           </a:p>
@@ -18305,7 +16590,7 @@
                 <a:ea typeface="Calibri" pitchFamily="34" charset="-122"/>
                 <a:cs typeface="Calibri" pitchFamily="34" charset="-120"/>
               </a:rPr>
-              <a:t>278</a:t>
+              <a:t>256</a:t>
             </a:r>
             <a:endParaRPr lang="en-US" sz="1050" dirty="0"/>
           </a:p>
@@ -18344,7 +16629,7 @@
                 <a:ea typeface="Calibri" pitchFamily="34" charset="-122"/>
                 <a:cs typeface="Calibri" pitchFamily="34" charset="-120"/>
               </a:rPr>
-              <a:t>Tolerancia transversal en chutes de…</a:t>
+              <a:t>Perforaciones faltantes en estructu…</a:t>
             </a:r>
             <a:endParaRPr lang="en-US" sz="1000" dirty="0"/>
           </a:p>
@@ -18426,7 +16711,7 @@
                 <a:ea typeface="Calibri" pitchFamily="34" charset="-122"/>
                 <a:cs typeface="Calibri" pitchFamily="34" charset="-120"/>
               </a:rPr>
-              <a:t>MASA-42</a:t>
+              <a:t>MASA-48</a:t>
             </a:r>
             <a:endParaRPr lang="en-US" sz="1050" dirty="0"/>
           </a:p>
@@ -18465,7 +16750,7 @@
                 <a:ea typeface="Calibri" pitchFamily="34" charset="-122"/>
                 <a:cs typeface="Calibri" pitchFamily="34" charset="-120"/>
               </a:rPr>
-              <a:t>Observación</a:t>
+              <a:t>No Conformidad</a:t>
             </a:r>
             <a:endParaRPr lang="en-US" sz="1050" dirty="0"/>
           </a:p>
@@ -18621,7 +16906,7 @@
                 <a:ea typeface="Calibri" pitchFamily="34" charset="-122"/>
                 <a:cs typeface="Calibri" pitchFamily="34" charset="-120"/>
               </a:rPr>
-              <a:t>Listo para revisi…</a:t>
+              <a:t>Observada</a:t>
             </a:r>
             <a:endParaRPr lang="en-US" sz="1050" dirty="0"/>
           </a:p>
@@ -18660,7 +16945,7 @@
                 <a:ea typeface="Calibri" pitchFamily="34" charset="-122"/>
                 <a:cs typeface="Calibri" pitchFamily="34" charset="-120"/>
               </a:rPr>
-              <a:t>249</a:t>
+              <a:t>256</a:t>
             </a:r>
             <a:endParaRPr lang="en-US" sz="1050" dirty="0"/>
           </a:p>
@@ -18699,7 +16984,7 @@
                 <a:ea typeface="Calibri" pitchFamily="34" charset="-122"/>
                 <a:cs typeface="Calibri" pitchFamily="34" charset="-120"/>
               </a:rPr>
-              <a:t>Estructura de correa 2100-CV-001 mo…</a:t>
+              <a:t>FISURACIÓN DE RADIER CELDAS COLUMNA…</a:t>
             </a:r>
             <a:endParaRPr lang="en-US" sz="1000" dirty="0"/>
           </a:p>
@@ -18761,7 +17046,7 @@
                 <a:ea typeface="Calibri" pitchFamily="34" charset="-122"/>
                 <a:cs typeface="Calibri" pitchFamily="34" charset="-120"/>
               </a:rPr>
-              <a:t>MASA-43</a:t>
+              <a:t>MASA-56</a:t>
             </a:r>
             <a:endParaRPr lang="en-US" sz="1050" dirty="0"/>
           </a:p>
@@ -18800,7 +17085,7 @@
                 <a:ea typeface="Calibri" pitchFamily="34" charset="-122"/>
                 <a:cs typeface="Calibri" pitchFamily="34" charset="-120"/>
               </a:rPr>
-              <a:t>No Conformidad</a:t>
+              <a:t>Observación</a:t>
             </a:r>
             <a:endParaRPr lang="en-US" sz="1050" dirty="0"/>
           </a:p>
@@ -18878,7 +17163,7 @@
                 <a:ea typeface="Calibri" pitchFamily="34" charset="-122"/>
                 <a:cs typeface="Calibri" pitchFamily="34" charset="-120"/>
               </a:rPr>
-              <a:t>ESTRUCTURA</a:t>
+              <a:t>PIPING</a:t>
             </a:r>
             <a:endParaRPr lang="en-US" sz="1050" dirty="0"/>
           </a:p>
@@ -18995,7 +17280,7 @@
                 <a:ea typeface="Calibri" pitchFamily="34" charset="-122"/>
                 <a:cs typeface="Calibri" pitchFamily="34" charset="-120"/>
               </a:rPr>
-              <a:t>249</a:t>
+              <a:t>235</a:t>
             </a:r>
             <a:endParaRPr lang="en-US" sz="1050" dirty="0"/>
           </a:p>
@@ -19034,7 +17319,7 @@
                 <a:ea typeface="Calibri" pitchFamily="34" charset="-122"/>
                 <a:cs typeface="Calibri" pitchFamily="34" charset="-120"/>
               </a:rPr>
-              <a:t>Perforaciones faltantes en estructu…</a:t>
+              <a:t>Interferencia línea de cañería en P…</a:t>
             </a:r>
             <a:endParaRPr lang="en-US" sz="1000" dirty="0"/>
           </a:p>
@@ -19116,7 +17401,7 @@
                 <a:ea typeface="Calibri" pitchFamily="34" charset="-122"/>
                 <a:cs typeface="Calibri" pitchFamily="34" charset="-120"/>
               </a:rPr>
-              <a:t>MASA-45</a:t>
+              <a:t>MASA-66</a:t>
             </a:r>
             <a:endParaRPr lang="en-US" sz="1050" dirty="0"/>
           </a:p>
@@ -19155,7 +17440,7 @@
                 <a:ea typeface="Calibri" pitchFamily="34" charset="-122"/>
                 <a:cs typeface="Calibri" pitchFamily="34" charset="-120"/>
               </a:rPr>
-              <a:t>Observación</a:t>
+              <a:t>No Conformidad</a:t>
             </a:r>
             <a:endParaRPr lang="en-US" sz="1050" dirty="0"/>
           </a:p>
@@ -19233,7 +17518,7 @@
                 <a:ea typeface="Calibri" pitchFamily="34" charset="-122"/>
                 <a:cs typeface="Calibri" pitchFamily="34" charset="-120"/>
               </a:rPr>
-              <a:t>EE.II</a:t>
+              <a:t>OO.CC</a:t>
             </a:r>
             <a:endParaRPr lang="en-US" sz="1050" dirty="0"/>
           </a:p>
@@ -19311,7 +17596,7 @@
                 <a:ea typeface="Calibri" pitchFamily="34" charset="-122"/>
                 <a:cs typeface="Calibri" pitchFamily="34" charset="-120"/>
               </a:rPr>
-              <a:t>Listo para revisi…</a:t>
+              <a:t>Observada</a:t>
             </a:r>
             <a:endParaRPr lang="en-US" sz="1050" dirty="0"/>
           </a:p>
@@ -19350,7 +17635,7 @@
                 <a:ea typeface="Calibri" pitchFamily="34" charset="-122"/>
                 <a:cs typeface="Calibri" pitchFamily="34" charset="-120"/>
               </a:rPr>
-              <a:t>249</a:t>
+              <a:t>206</a:t>
             </a:r>
             <a:endParaRPr lang="en-US" sz="1050" dirty="0"/>
           </a:p>
@@ -19389,7 +17674,7 @@
                 <a:ea typeface="Calibri" pitchFamily="34" charset="-122"/>
                 <a:cs typeface="Calibri" pitchFamily="34" charset="-120"/>
               </a:rPr>
-              <a:t>(i) Cable de comunicación dañado - …</a:t>
+              <a:t>Interferencia estructura con red de…</a:t>
             </a:r>
             <a:endParaRPr lang="en-US" sz="1000" dirty="0"/>
           </a:p>
@@ -19451,7 +17736,7 @@
                 <a:ea typeface="Calibri" pitchFamily="34" charset="-122"/>
                 <a:cs typeface="Calibri" pitchFamily="34" charset="-120"/>
               </a:rPr>
-              <a:t>MASA-48</a:t>
+              <a:t>MASA-68</a:t>
             </a:r>
             <a:endParaRPr lang="en-US" sz="1050" dirty="0"/>
           </a:p>
@@ -19490,7 +17775,7 @@
                 <a:ea typeface="Calibri" pitchFamily="34" charset="-122"/>
                 <a:cs typeface="Calibri" pitchFamily="34" charset="-120"/>
               </a:rPr>
-              <a:t>No Conformidad</a:t>
+              <a:t>Observación</a:t>
             </a:r>
             <a:endParaRPr lang="en-US" sz="1050" dirty="0"/>
           </a:p>
@@ -19568,7 +17853,7 @@
                 <a:ea typeface="Calibri" pitchFamily="34" charset="-122"/>
                 <a:cs typeface="Calibri" pitchFamily="34" charset="-120"/>
               </a:rPr>
-              <a:t>OO.CC</a:t>
+              <a:t>MECÁNICA</a:t>
             </a:r>
             <a:endParaRPr lang="en-US" sz="1050" dirty="0"/>
           </a:p>
@@ -19646,7 +17931,7 @@
                 <a:ea typeface="Calibri" pitchFamily="34" charset="-122"/>
                 <a:cs typeface="Calibri" pitchFamily="34" charset="-120"/>
               </a:rPr>
-              <a:t>Stand By</a:t>
+              <a:t>Listo para revisi…</a:t>
             </a:r>
             <a:endParaRPr lang="en-US" sz="1050" dirty="0"/>
           </a:p>
@@ -19685,7 +17970,7 @@
                 <a:ea typeface="Calibri" pitchFamily="34" charset="-122"/>
                 <a:cs typeface="Calibri" pitchFamily="34" charset="-120"/>
               </a:rPr>
-              <a:t>249</a:t>
+              <a:t>202</a:t>
             </a:r>
             <a:endParaRPr lang="en-US" sz="1050" dirty="0"/>
           </a:p>
@@ -19724,7 +18009,7 @@
                 <a:ea typeface="Calibri" pitchFamily="34" charset="-122"/>
                 <a:cs typeface="Calibri" pitchFamily="34" charset="-120"/>
               </a:rPr>
-              <a:t>FISURACIÓN DE RADIER CELDAS COLUMNA…</a:t>
+              <a:t>NIVELACIÓN DE LAS PLACAS BASE DE LO…</a:t>
             </a:r>
             <a:endParaRPr lang="en-US" sz="1000" dirty="0"/>
           </a:p>
@@ -19806,7 +18091,7 @@
                 <a:ea typeface="Calibri" pitchFamily="34" charset="-122"/>
                 <a:cs typeface="Calibri" pitchFamily="34" charset="-120"/>
               </a:rPr>
-              <a:t>MASA-55</a:t>
+              <a:t>MASA-70</a:t>
             </a:r>
             <a:endParaRPr lang="en-US" sz="1050" dirty="0"/>
           </a:p>
@@ -19923,7 +18208,7 @@
                 <a:ea typeface="Calibri" pitchFamily="34" charset="-122"/>
                 <a:cs typeface="Calibri" pitchFamily="34" charset="-120"/>
               </a:rPr>
-              <a:t>MECÁNICA</a:t>
+              <a:t>PIPING</a:t>
             </a:r>
             <a:endParaRPr lang="en-US" sz="1050" dirty="0"/>
           </a:p>
@@ -20040,7 +18325,7 @@
                 <a:ea typeface="Calibri" pitchFamily="34" charset="-122"/>
                 <a:cs typeface="Calibri" pitchFamily="34" charset="-120"/>
               </a:rPr>
-              <a:t>228</a:t>
+              <a:t>202</a:t>
             </a:r>
             <a:endParaRPr lang="en-US" sz="1050" dirty="0"/>
           </a:p>
@@ -20079,7 +18364,7 @@
                 <a:ea typeface="Calibri" pitchFamily="34" charset="-122"/>
                 <a:cs typeface="Calibri" pitchFamily="34" charset="-120"/>
               </a:rPr>
-              <a:t>Alineamiento bombas 4210-PU-001 /00…</a:t>
+              <a:t>DESCARGAS DE TUBERÍAS CELDAS DE FLO…</a:t>
             </a:r>
             <a:endParaRPr lang="en-US" sz="1000" dirty="0"/>
           </a:p>
@@ -20141,7 +18426,7 @@
                 <a:ea typeface="Calibri" pitchFamily="34" charset="-122"/>
                 <a:cs typeface="Calibri" pitchFamily="34" charset="-120"/>
               </a:rPr>
-              <a:t>MASA-56</a:t>
+              <a:t>MASA-71</a:t>
             </a:r>
             <a:endParaRPr lang="en-US" sz="1050" dirty="0"/>
           </a:p>
@@ -20258,7 +18543,7 @@
                 <a:ea typeface="Calibri" pitchFamily="34" charset="-122"/>
                 <a:cs typeface="Calibri" pitchFamily="34" charset="-120"/>
               </a:rPr>
-              <a:t>PIPING</a:t>
+              <a:t>OO.CC</a:t>
             </a:r>
             <a:endParaRPr lang="en-US" sz="1050" dirty="0"/>
           </a:p>
@@ -20336,7 +18621,7 @@
                 <a:ea typeface="Calibri" pitchFamily="34" charset="-122"/>
                 <a:cs typeface="Calibri" pitchFamily="34" charset="-120"/>
               </a:rPr>
-              <a:t>Stand By</a:t>
+              <a:t>Listo para revisi…</a:t>
             </a:r>
             <a:endParaRPr lang="en-US" sz="1050" dirty="0"/>
           </a:p>
@@ -20375,7 +18660,7 @@
                 <a:ea typeface="Calibri" pitchFamily="34" charset="-122"/>
                 <a:cs typeface="Calibri" pitchFamily="34" charset="-120"/>
               </a:rPr>
-              <a:t>228</a:t>
+              <a:t>196</a:t>
             </a:r>
             <a:endParaRPr lang="en-US" sz="1050" dirty="0"/>
           </a:p>
@@ -20414,7 +18699,7 @@
                 <a:ea typeface="Calibri" pitchFamily="34" charset="-122"/>
                 <a:cs typeface="Calibri" pitchFamily="34" charset="-120"/>
               </a:rPr>
-              <a:t>Interferencia línea de cañería en P…</a:t>
+              <a:t>RETRABAJOS CIVILES EN SISTEMA MOTRI…</a:t>
             </a:r>
             <a:endParaRPr lang="en-US" sz="1000" dirty="0"/>
           </a:p>
@@ -20476,7 +18761,7 @@
                 <a:ea typeface="Calibri" pitchFamily="34" charset="-122"/>
                 <a:cs typeface="Calibri" pitchFamily="34" charset="-120"/>
               </a:rPr>
-              <a:t>Se listan los 9 más antiguos de 37 abiertos; el detalle completo está en el panel.</a:t>
+              <a:t>Se listan los 9 más antiguos de 30 abiertos; el detalle completo está en el panel.</a:t>
             </a:r>
             <a:endParaRPr lang="en-US" sz="950" dirty="0"/>
           </a:p>
@@ -20499,7 +18784,7 @@
             </a:avLst>
           </a:prstGeom>
           <a:solidFill>
-            <a:srgbClr val="12233B"/>
+            <a:srgbClr val="E9EDF2"/>
           </a:solidFill>
           <a:ln/>
         </p:spPr>
@@ -20531,13 +18816,13 @@
             <a:r>
               <a:rPr lang="en-US" sz="1000" b="1" spc="100" kern="0" dirty="0">
                 <a:solidFill>
-                  <a:srgbClr val="E3A55B"/>
-                </a:solidFill>
-                <a:latin typeface="Calibri" pitchFamily="34" charset="0"/>
-                <a:ea typeface="Calibri" pitchFamily="34" charset="-122"/>
-                <a:cs typeface="Calibri" pitchFamily="34" charset="-120"/>
-              </a:rPr>
-              <a:t>SEMANA 14-09-2026 — 20-09-2026</a:t>
+                  <a:srgbClr val="56606E"/>
+                </a:solidFill>
+                <a:latin typeface="Calibri" pitchFamily="34" charset="0"/>
+                <a:ea typeface="Calibri" pitchFamily="34" charset="-122"/>
+                <a:cs typeface="Calibri" pitchFamily="34" charset="-120"/>
+              </a:rPr>
+              <a:t>SEMANA 21-09-2026 — 27-09-2026</a:t>
             </a:r>
             <a:endParaRPr lang="en-US" sz="1000" dirty="0"/>
           </a:p>
@@ -20570,13 +18855,13 @@
             <a:r>
               <a:rPr lang="en-US" sz="1150" dirty="0">
                 <a:solidFill>
-                  <a:srgbClr val="FFFFFF"/>
-                </a:solidFill>
-                <a:latin typeface="Calibri" pitchFamily="34" charset="0"/>
-                <a:ea typeface="Calibri" pitchFamily="34" charset="-122"/>
-                <a:cs typeface="Calibri" pitchFamily="34" charset="-120"/>
-              </a:rPr>
-              <a:t>2 hallazgos nuevos · 0 internas · 2 del cliente · OO.CC 1 · MECÁNICA 1 · 2 siguen abiertos</a:t>
+                  <a:srgbClr val="56606E"/>
+                </a:solidFill>
+                <a:latin typeface="Calibri" pitchFamily="34" charset="0"/>
+                <a:ea typeface="Calibri" pitchFamily="34" charset="-122"/>
+                <a:cs typeface="Calibri" pitchFamily="34" charset="-120"/>
+              </a:rPr>
+              <a:t>Sin hallazgos nuevos en el período.</a:t>
             </a:r>
             <a:endParaRPr lang="en-US" sz="1150" dirty="0"/>
           </a:p>
@@ -20615,7 +18900,7 @@
                 <a:ea typeface="Calibri" pitchFamily="34" charset="-122"/>
                 <a:cs typeface="Calibri" pitchFamily="34" charset="-120"/>
               </a:rPr>
-              <a:t>Fuente: Data_NCR-21092026.xlsx — hoja «Observaciones» · Corte 21-09-2026 · 513 registros desde 10-02-2023</a:t>
+              <a:t>Fuente: Data_NCR.xlsx — hoja «Observaciones» · Corte 28-09-2026 · 514 registros desde 10-02-2023</a:t>
             </a:r>
             <a:endParaRPr lang="en-US" sz="850" dirty="0"/>
           </a:p>
@@ -20920,7 +19205,7 @@
                 <a:ea typeface="Cambria" pitchFamily="34" charset="-122"/>
                 <a:cs typeface="Cambria" pitchFamily="34" charset="-120"/>
               </a:rPr>
-              <a:t>91,2%</a:t>
+              <a:t>93,6%</a:t>
             </a:r>
             <a:endParaRPr lang="en-US" sz="4000" dirty="0"/>
           </a:p>
@@ -20959,7 +19244,7 @@
                 <a:ea typeface="Calibri" pitchFamily="34" charset="-122"/>
                 <a:cs typeface="Calibri" pitchFamily="34" charset="-120"/>
               </a:rPr>
-              <a:t>468/513</a:t>
+              <a:t>481/514</a:t>
             </a:r>
             <a:endParaRPr lang="en-US" sz="1400" dirty="0"/>
           </a:p>
@@ -21037,7 +19322,7 @@
                 <a:ea typeface="Calibri" pitchFamily="34" charset="-122"/>
                 <a:cs typeface="Calibri" pitchFamily="34" charset="-120"/>
               </a:rPr>
-              <a:t>45 abiertos · 17 con más de 180 días</a:t>
+              <a:t>33 abiertos · 9 con más de 180 días</a:t>
             </a:r>
             <a:endParaRPr lang="en-US" sz="950" dirty="0"/>
           </a:p>
@@ -21130,7 +19415,7 @@
                 <a:ea typeface="Cambria" pitchFamily="34" charset="-122"/>
                 <a:cs typeface="Cambria" pitchFamily="34" charset="-120"/>
               </a:rPr>
-              <a:t>45</a:t>
+              <a:t>33</a:t>
             </a:r>
             <a:endParaRPr lang="en-US" sz="4000" dirty="0"/>
           </a:p>
@@ -21169,7 +19454,7 @@
                 <a:ea typeface="Calibri" pitchFamily="34" charset="-122"/>
                 <a:cs typeface="Calibri" pitchFamily="34" charset="-120"/>
               </a:rPr>
-              <a:t>de 513 levantados</a:t>
+              <a:t>de 514 levantados</a:t>
             </a:r>
             <a:endParaRPr lang="en-US" sz="1400" dirty="0"/>
           </a:p>
@@ -21247,7 +19532,7 @@
                 <a:ea typeface="Calibri" pitchFamily="34" charset="-122"/>
                 <a:cs typeface="Calibri" pitchFamily="34" charset="-120"/>
               </a:rPr>
-              <a:t>6 iniciado · 31 listo para revisión · 6 stand by · 1 observada · 1 pendiente</a:t>
+              <a:t>3 iniciado · 23 listo para revisión · 5 observada · 2 pendiente</a:t>
             </a:r>
             <a:endParaRPr lang="en-US" sz="950" dirty="0"/>
           </a:p>
@@ -21379,7 +19664,7 @@
                 <a:ea typeface="Calibri" pitchFamily="34" charset="-122"/>
                 <a:cs typeface="Calibri" pitchFamily="34" charset="-120"/>
               </a:rPr>
-              <a:t>159/504 clasificados</a:t>
+              <a:t>159/505 clasificados</a:t>
             </a:r>
             <a:endParaRPr lang="en-US" sz="1400" dirty="0"/>
           </a:p>
@@ -21589,7 +19874,7 @@
                 <a:ea typeface="Calibri" pitchFamily="34" charset="-122"/>
                 <a:cs typeface="Calibri" pitchFamily="34" charset="-120"/>
               </a:rPr>
-              <a:t>251 de 513 con costo</a:t>
+              <a:t>251 de 514 con costo</a:t>
             </a:r>
             <a:endParaRPr lang="en-US" sz="1400" dirty="0"/>
           </a:p>
@@ -21667,7 +19952,7 @@
                 <a:ea typeface="Calibri" pitchFamily="34" charset="-122"/>
                 <a:cs typeface="Calibri" pitchFamily="34" charset="-120"/>
               </a:rPr>
-              <a:t>262 hallazgos no declaran costo: la cifra es un piso</a:t>
+              <a:t>263 hallazgos no declaran costo: la cifra es un piso</a:t>
             </a:r>
             <a:endParaRPr lang="en-US" sz="950" dirty="0"/>
           </a:p>
@@ -21807,7 +20092,7 @@
                 <a:ea typeface="Calibri" pitchFamily="34" charset="-122"/>
                 <a:cs typeface="Calibri" pitchFamily="34" charset="-120"/>
               </a:rPr>
-              <a:t>37 de los 45 hallazgos abiertos (82,2%), y es uno de los frentes donde el cliente levanta más de lo que detecta Besalco (79 del cliente contra 53 internas).</a:t>
+              <a:t>30 de los 33 hallazgos abiertos (90,9%), y es uno de los frentes donde el cliente levanta más de lo que detecta Besalco (79 del cliente contra 53 internas).</a:t>
             </a:r>
             <a:endParaRPr lang="en-US" sz="1250" dirty="0"/>
           </a:p>
@@ -21869,7 +20154,7 @@
                 <a:ea typeface="Calibri" pitchFamily="34" charset="-122"/>
                 <a:cs typeface="Calibri" pitchFamily="34" charset="-120"/>
               </a:rPr>
-              <a:t>La semana trajo 4 hallazgos nuevos, ninguno de autodetección.  </a:t>
+              <a:t>La semana trajo 1 hallazgo nuevo, ninguno de autodetección.  </a:t>
             </a:r>
             <a:pPr indent="0" marL="0">
               <a:lnSpc>
@@ -21886,7 +20171,7 @@
                 <a:ea typeface="Calibri" pitchFamily="34" charset="-122"/>
                 <a:cs typeface="Calibri" pitchFamily="34" charset="-120"/>
               </a:rPr>
-              <a:t>14-09-2026 al 20-09-2026: 4 del cliente en PIPING (2) y OO.CC (1) y MECÁNICA (1). Todos siguen abiertos; la semana anterior entraron 0.</a:t>
+              <a:t>21-09-2026 al 27-09-2026: 1 del cliente en CALIDAD (1). Todos siguen abiertos; la semana anterior entraron 4.</a:t>
             </a:r>
             <a:endParaRPr lang="en-US" sz="1250" dirty="0"/>
           </a:p>
@@ -21948,7 +20233,7 @@
                 <a:ea typeface="Calibri" pitchFamily="34" charset="-122"/>
                 <a:cs typeface="Calibri" pitchFamily="34" charset="-120"/>
               </a:rPr>
-              <a:t>41 de los 45 abiertos están fuera del plazo de respuesta.  </a:t>
+              <a:t>32 de los 33 abiertos están fuera del plazo de respuesta.  </a:t>
             </a:r>
             <a:pPr indent="0" marL="0">
               <a:lnSpc>
@@ -21965,7 +20250,7 @@
                 <a:ea typeface="Calibri" pitchFamily="34" charset="-122"/>
                 <a:cs typeface="Calibri" pitchFamily="34" charset="-120"/>
               </a:rPr>
-              <a:t>El plazo es de 10 días desde que se emite la NC. De los atrasados, 17 llevan más de 180 días abiertos y 0 más de un año: no es atraso de días, es deuda vieja.</a:t>
+              <a:t>El plazo es de 10 días desde que se emite la NC. De los atrasados, 9 llevan más de 180 días abiertos y 0 más de un año: no es atraso de días, es deuda vieja.</a:t>
             </a:r>
             <a:endParaRPr lang="en-US" sz="1250" dirty="0"/>
           </a:p>
@@ -22004,7 +20289,7 @@
                 <a:ea typeface="Calibri" pitchFamily="34" charset="-122"/>
                 <a:cs typeface="Calibri" pitchFamily="34" charset="-120"/>
               </a:rPr>
-              <a:t>Fuente: Data_NCR-21092026.xlsx — hoja «Observaciones» · Corte 21-09-2026 · 513 registros desde 10-02-2023</a:t>
+              <a:t>Fuente: Data_NCR.xlsx — hoja «Observaciones» · Corte 28-09-2026 · 514 registros desde 10-02-2023</a:t>
             </a:r>
             <a:endParaRPr lang="en-US" sz="850" dirty="0"/>
           </a:p>
@@ -23279,7 +21564,7 @@
                 <a:ea typeface="Calibri" pitchFamily="34" charset="-122"/>
                 <a:cs typeface="Calibri" pitchFamily="34" charset="-120"/>
               </a:rPr>
-              <a:t>251</a:t>
+              <a:t>252</a:t>
             </a:r>
             <a:endParaRPr lang="en-US" sz="1300" dirty="0"/>
           </a:p>
@@ -23318,7 +21603,7 @@
                 <a:ea typeface="Calibri" pitchFamily="34" charset="-122"/>
                 <a:cs typeface="Calibri" pitchFamily="34" charset="-120"/>
               </a:rPr>
-              <a:t>244</a:t>
+              <a:t>250</a:t>
             </a:r>
             <a:endParaRPr lang="en-US" sz="1300" dirty="0"/>
           </a:p>
@@ -23357,7 +21642,7 @@
                 <a:ea typeface="Calibri" pitchFamily="34" charset="-122"/>
                 <a:cs typeface="Calibri" pitchFamily="34" charset="-120"/>
               </a:rPr>
-              <a:t>7</a:t>
+              <a:t>2</a:t>
             </a:r>
             <a:endParaRPr lang="en-US" sz="1300" dirty="0"/>
           </a:p>
@@ -23396,7 +21681,7 @@
                 <a:ea typeface="Calibri" pitchFamily="34" charset="-122"/>
                 <a:cs typeface="Calibri" pitchFamily="34" charset="-120"/>
               </a:rPr>
-              <a:t>97,2%</a:t>
+              <a:t>99,2%</a:t>
             </a:r>
             <a:endParaRPr lang="en-US" sz="1300" dirty="0"/>
           </a:p>
@@ -23474,7 +21759,7 @@
                 <a:ea typeface="Calibri" pitchFamily="34" charset="-122"/>
                 <a:cs typeface="Calibri" pitchFamily="34" charset="-120"/>
               </a:rPr>
-              <a:t>199</a:t>
+              <a:t>200</a:t>
             </a:r>
             <a:endParaRPr lang="en-US" sz="1300" dirty="0"/>
           </a:p>
@@ -23575,7 +21860,7 @@
             </a:avLst>
           </a:prstGeom>
           <a:solidFill>
-            <a:srgbClr val="E0A32E"/>
+            <a:srgbClr val="2E9E5B"/>
           </a:solidFill>
           <a:ln/>
         </p:spPr>
@@ -23613,7 +21898,7 @@
                 <a:ea typeface="Calibri" pitchFamily="34" charset="-122"/>
                 <a:cs typeface="Calibri" pitchFamily="34" charset="-120"/>
               </a:rPr>
-              <a:t>Atención</a:t>
+              <a:t>Al día</a:t>
             </a:r>
             <a:endParaRPr lang="en-US" sz="1050" dirty="0"/>
           </a:p>
@@ -23792,7 +22077,7 @@
                 <a:ea typeface="Calibri" pitchFamily="34" charset="-122"/>
                 <a:cs typeface="Calibri" pitchFamily="34" charset="-120"/>
               </a:rPr>
-              <a:t>135</a:t>
+              <a:t>142</a:t>
             </a:r>
             <a:endParaRPr lang="en-US" sz="1300" dirty="0"/>
           </a:p>
@@ -23831,7 +22116,7 @@
                 <a:ea typeface="Calibri" pitchFamily="34" charset="-122"/>
                 <a:cs typeface="Calibri" pitchFamily="34" charset="-120"/>
               </a:rPr>
-              <a:t>37</a:t>
+              <a:t>30</a:t>
             </a:r>
             <a:endParaRPr lang="en-US" sz="1300" dirty="0"/>
           </a:p>
@@ -23870,7 +22155,7 @@
                 <a:ea typeface="Calibri" pitchFamily="34" charset="-122"/>
                 <a:cs typeface="Calibri" pitchFamily="34" charset="-120"/>
               </a:rPr>
-              <a:t>78,5%</a:t>
+              <a:t>82,6%</a:t>
             </a:r>
             <a:endParaRPr lang="en-US" sz="1300" dirty="0"/>
           </a:p>
@@ -24721,7 +23006,7 @@
                 <a:ea typeface="Calibri" pitchFamily="34" charset="-122"/>
                 <a:cs typeface="Calibri" pitchFamily="34" charset="-120"/>
               </a:rPr>
-              <a:t>505</a:t>
+              <a:t>506</a:t>
             </a:r>
             <a:endParaRPr lang="en-US" sz="1300" dirty="0"/>
           </a:p>
@@ -24760,7 +23045,7 @@
                 <a:ea typeface="Calibri" pitchFamily="34" charset="-122"/>
                 <a:cs typeface="Calibri" pitchFamily="34" charset="-120"/>
               </a:rPr>
-              <a:t>460</a:t>
+              <a:t>473</a:t>
             </a:r>
             <a:endParaRPr lang="en-US" sz="1300" dirty="0"/>
           </a:p>
@@ -24799,7 +23084,7 @@
                 <a:ea typeface="Calibri" pitchFamily="34" charset="-122"/>
                 <a:cs typeface="Calibri" pitchFamily="34" charset="-120"/>
               </a:rPr>
-              <a:t>45</a:t>
+              <a:t>33</a:t>
             </a:r>
             <a:endParaRPr lang="en-US" sz="1300" dirty="0"/>
           </a:p>
@@ -24838,7 +23123,7 @@
                 <a:ea typeface="Calibri" pitchFamily="34" charset="-122"/>
                 <a:cs typeface="Calibri" pitchFamily="34" charset="-120"/>
               </a:rPr>
-              <a:t>91,1%</a:t>
+              <a:t>93,5%</a:t>
             </a:r>
             <a:endParaRPr lang="en-US" sz="1300" dirty="0"/>
           </a:p>
@@ -24916,7 +23201,7 @@
                 <a:ea typeface="Calibri" pitchFamily="34" charset="-122"/>
                 <a:cs typeface="Calibri" pitchFamily="34" charset="-120"/>
               </a:rPr>
-              <a:t>297</a:t>
+              <a:t>298</a:t>
             </a:r>
             <a:endParaRPr lang="en-US" sz="1300" dirty="0"/>
           </a:p>
@@ -25033,7 +23318,7 @@
                 <a:ea typeface="Calibri" pitchFamily="34" charset="-122"/>
                 <a:cs typeface="Calibri" pitchFamily="34" charset="-120"/>
               </a:rPr>
-              <a:t>Mediana de cierre global 30 días · el hallazgo más lento tomó 419 días · 8 hallazgos sin especialidad declarada.</a:t>
+              <a:t>Mediana de cierre global 31 días · el hallazgo más lento tomó 419 días · 8 hallazgos sin especialidad declarada.</a:t>
             </a:r>
             <a:endParaRPr lang="en-US" sz="950" dirty="0"/>
           </a:p>
@@ -25072,7 +23357,7 @@
                 <a:ea typeface="Calibri" pitchFamily="34" charset="-122"/>
                 <a:cs typeface="Calibri" pitchFamily="34" charset="-120"/>
               </a:rPr>
-              <a:t>Fuente: Data_NCR-21092026.xlsx — hoja «Observaciones» · Corte 21-09-2026 · 513 registros desde 10-02-2023</a:t>
+              <a:t>Fuente: Data_NCR.xlsx — hoja «Observaciones» · Corte 28-09-2026 · 514 registros desde 10-02-2023</a:t>
             </a:r>
             <a:endParaRPr lang="en-US" sz="850" dirty="0"/>
           </a:p>
@@ -25323,7 +23608,7 @@
                 <a:ea typeface="Calibri" pitchFamily="34" charset="-122"/>
                 <a:cs typeface="Calibri" pitchFamily="34" charset="-120"/>
               </a:rPr>
-              <a:t>Entre el 14-09-2026 y el 20-09-2026 se levantaron 4 hallazgos: 0 internas · 4 del cliente. Todos siguen abiertos.</a:t>
+              <a:t>Entre el 21-09-2026 y el 27-09-2026 se levantó 1 hallazgo: 0 internas · 1 del cliente. Sigue abierto.</a:t>
             </a:r>
             <a:endParaRPr lang="en-US" sz="1350" dirty="0"/>
           </a:p>
@@ -25478,7 +23763,7 @@
                 <a:ea typeface="Calibri" pitchFamily="34" charset="-122"/>
                 <a:cs typeface="Calibri" pitchFamily="34" charset="-120"/>
               </a:rPr>
-              <a:t>PIPING 2  ·  OO.CC 1  ·  MECÁNICA 1</a:t>
+              <a:t>CALIDAD 1</a:t>
             </a:r>
             <a:endParaRPr lang="en-US" sz="1100" dirty="0"/>
           </a:p>
@@ -25556,7 +23841,7 @@
                 <a:ea typeface="Calibri" pitchFamily="34" charset="-122"/>
                 <a:cs typeface="Calibri" pitchFamily="34" charset="-120"/>
               </a:rPr>
-              <a:t>Talabre 2  ·  Arqueros 2</a:t>
+              <a:t>Talabre 1</a:t>
             </a:r>
             <a:endParaRPr lang="en-US" sz="1100" dirty="0"/>
           </a:p>
@@ -25634,7 +23919,7 @@
                 <a:ea typeface="Calibri" pitchFamily="34" charset="-122"/>
                 <a:cs typeface="Calibri" pitchFamily="34" charset="-120"/>
               </a:rPr>
-              <a:t>Externa · Cliente 4</a:t>
+              <a:t>Externa · Cliente 1</a:t>
             </a:r>
             <a:endParaRPr lang="en-US" sz="1100" dirty="0"/>
           </a:p>
@@ -25712,7 +23997,7 @@
                 <a:ea typeface="Calibri" pitchFamily="34" charset="-122"/>
                 <a:cs typeface="Calibri" pitchFamily="34" charset="-120"/>
               </a:rPr>
-              <a:t>Producto No Conforme 2  ·  No Conformidad 2</a:t>
+              <a:t>No Conformidad 1</a:t>
             </a:r>
             <a:endParaRPr lang="en-US" sz="1100" dirty="0"/>
           </a:p>
@@ -26164,7 +24449,7 @@
                 <a:ea typeface="Calibri" pitchFamily="34" charset="-122"/>
                 <a:cs typeface="Calibri" pitchFamily="34" charset="-120"/>
               </a:rPr>
-              <a:t>15-09-2026</a:t>
+              <a:t>23-09-2026</a:t>
             </a:r>
             <a:endParaRPr lang="en-US" sz="1050" dirty="0"/>
           </a:p>
@@ -26242,7 +24527,7 @@
                 <a:ea typeface="Calibri" pitchFamily="34" charset="-122"/>
                 <a:cs typeface="Calibri" pitchFamily="34" charset="-120"/>
               </a:rPr>
-              <a:t>251 · PNC N°196</a:t>
+              <a:t>253 · RNC N°478</a:t>
             </a:r>
             <a:endParaRPr lang="en-US" sz="1050" dirty="0"/>
           </a:p>
@@ -26281,7 +24566,7 @@
                 <a:ea typeface="Calibri" pitchFamily="34" charset="-122"/>
                 <a:cs typeface="Calibri" pitchFamily="34" charset="-120"/>
               </a:rPr>
-              <a:t>Producto No Confor…</a:t>
+              <a:t>No Conformidad</a:t>
             </a:r>
             <a:endParaRPr lang="en-US" sz="1050" dirty="0"/>
           </a:p>
@@ -26359,7 +24644,7 @@
                 <a:ea typeface="Calibri" pitchFamily="34" charset="-122"/>
                 <a:cs typeface="Calibri" pitchFamily="34" charset="-120"/>
               </a:rPr>
-              <a:t>PIPING</a:t>
+              <a:t>CALIDAD</a:t>
             </a:r>
             <a:endParaRPr lang="en-US" sz="1050" dirty="0"/>
           </a:p>
@@ -26398,7 +24683,7 @@
                 <a:ea typeface="Calibri" pitchFamily="34" charset="-122"/>
                 <a:cs typeface="Calibri" pitchFamily="34" charset="-120"/>
               </a:rPr>
-              <a:t>Oscar Nahuel P.</a:t>
+              <a:t>Mauricio Soto B.</a:t>
             </a:r>
             <a:endParaRPr lang="en-US" sz="1050" dirty="0"/>
           </a:p>
@@ -26476,7 +24761,7 @@
                 <a:ea typeface="Calibri" pitchFamily="34" charset="-122"/>
                 <a:cs typeface="Calibri" pitchFamily="34" charset="-120"/>
               </a:rPr>
-              <a:t>Filtración de agua consider…</a:t>
+              <a:t>No se dispone de una planif…</a:t>
             </a:r>
             <a:endParaRPr lang="en-US" sz="1000" dirty="0"/>
           </a:p>
@@ -26507,1169 +24792,7 @@
       </p:sp>
       <p:sp>
         <p:nvSpPr>
-          <p:cNvPr id="38" name="Shape 34"/>
-          <p:cNvSpPr/>
-          <p:nvPr/>
-        </p:nvSpPr>
-        <p:spPr>
-          <a:xfrm>
-            <a:off x="457200" y="4709160"/>
-            <a:ext cx="11292840" cy="329184"/>
-          </a:xfrm>
-          <a:prstGeom prst="rect">
-            <a:avLst/>
-          </a:prstGeom>
-          <a:solidFill>
-            <a:srgbClr val="FFFFFF"/>
-          </a:solidFill>
-          <a:ln/>
-        </p:spPr>
-      </p:sp>
-      <p:sp>
-        <p:nvSpPr>
-          <p:cNvPr id="39" name="Text 35"/>
-          <p:cNvSpPr/>
-          <p:nvPr/>
-        </p:nvSpPr>
-        <p:spPr>
-          <a:xfrm>
-            <a:off x="502920" y="4754880"/>
-            <a:ext cx="822960" cy="237744"/>
-          </a:xfrm>
-          <a:prstGeom prst="rect">
-            <a:avLst/>
-          </a:prstGeom>
-          <a:noFill/>
-          <a:ln/>
-        </p:spPr>
-        <p:txBody>
-          <a:bodyPr wrap="square" lIns="0" tIns="0" rIns="0" bIns="0" rtlCol="0" anchor="ctr"/>
-          <a:lstStyle/>
-          <a:p>
-            <a:pPr algn="l" indent="0" marL="0">
-              <a:buNone/>
-            </a:pPr>
-            <a:r>
-              <a:rPr lang="en-US" sz="1050" dirty="0">
-                <a:solidFill>
-                  <a:srgbClr val="1A2433"/>
-                </a:solidFill>
-                <a:latin typeface="Calibri" pitchFamily="34" charset="0"/>
-                <a:ea typeface="Calibri" pitchFamily="34" charset="-122"/>
-                <a:cs typeface="Calibri" pitchFamily="34" charset="-120"/>
-              </a:rPr>
-              <a:t>16-09-2026</a:t>
-            </a:r>
-            <a:endParaRPr lang="en-US" sz="1050" dirty="0"/>
-          </a:p>
-        </p:txBody>
-      </p:sp>
-      <p:sp>
-        <p:nvSpPr>
-          <p:cNvPr id="40" name="Text 36"/>
-          <p:cNvSpPr/>
-          <p:nvPr/>
-        </p:nvSpPr>
-        <p:spPr>
-          <a:xfrm>
-            <a:off x="1371600" y="4754880"/>
-            <a:ext cx="1051560" cy="237744"/>
-          </a:xfrm>
-          <a:prstGeom prst="rect">
-            <a:avLst/>
-          </a:prstGeom>
-          <a:noFill/>
-          <a:ln/>
-        </p:spPr>
-        <p:txBody>
-          <a:bodyPr wrap="square" lIns="0" tIns="0" rIns="0" bIns="0" rtlCol="0" anchor="ctr"/>
-          <a:lstStyle/>
-          <a:p>
-            <a:pPr algn="l" indent="0" marL="0">
-              <a:buNone/>
-            </a:pPr>
-            <a:r>
-              <a:rPr lang="en-US" sz="1050" dirty="0">
-                <a:solidFill>
-                  <a:srgbClr val="1A2433"/>
-                </a:solidFill>
-                <a:latin typeface="Calibri" pitchFamily="34" charset="0"/>
-                <a:ea typeface="Calibri" pitchFamily="34" charset="-122"/>
-                <a:cs typeface="Calibri" pitchFamily="34" charset="-120"/>
-              </a:rPr>
-              <a:t>Arqueros</a:t>
-            </a:r>
-            <a:endParaRPr lang="en-US" sz="1050" dirty="0"/>
-          </a:p>
-        </p:txBody>
-      </p:sp>
-      <p:sp>
-        <p:nvSpPr>
-          <p:cNvPr id="41" name="Text 37"/>
-          <p:cNvSpPr/>
-          <p:nvPr/>
-        </p:nvSpPr>
-        <p:spPr>
-          <a:xfrm>
-            <a:off x="2468880" y="4754880"/>
-            <a:ext cx="1051560" cy="237744"/>
-          </a:xfrm>
-          <a:prstGeom prst="rect">
-            <a:avLst/>
-          </a:prstGeom>
-          <a:noFill/>
-          <a:ln/>
-        </p:spPr>
-        <p:txBody>
-          <a:bodyPr wrap="square" lIns="0" tIns="0" rIns="0" bIns="0" rtlCol="0" anchor="ctr"/>
-          <a:lstStyle/>
-          <a:p>
-            <a:pPr algn="l" indent="0" marL="0">
-              <a:buNone/>
-            </a:pPr>
-            <a:r>
-              <a:rPr lang="en-US" sz="1050" dirty="0">
-                <a:solidFill>
-                  <a:srgbClr val="1A2433"/>
-                </a:solidFill>
-                <a:latin typeface="Calibri" pitchFamily="34" charset="0"/>
-                <a:ea typeface="Calibri" pitchFamily="34" charset="-122"/>
-                <a:cs typeface="Calibri" pitchFamily="34" charset="-120"/>
-              </a:rPr>
-              <a:t>MASA-92</a:t>
-            </a:r>
-            <a:endParaRPr lang="en-US" sz="1050" dirty="0"/>
-          </a:p>
-        </p:txBody>
-      </p:sp>
-      <p:sp>
-        <p:nvSpPr>
-          <p:cNvPr id="42" name="Text 38"/>
-          <p:cNvSpPr/>
-          <p:nvPr/>
-        </p:nvSpPr>
-        <p:spPr>
-          <a:xfrm>
-            <a:off x="3566160" y="4754880"/>
-            <a:ext cx="1371600" cy="237744"/>
-          </a:xfrm>
-          <a:prstGeom prst="rect">
-            <a:avLst/>
-          </a:prstGeom>
-          <a:noFill/>
-          <a:ln/>
-        </p:spPr>
-        <p:txBody>
-          <a:bodyPr wrap="square" lIns="0" tIns="0" rIns="0" bIns="0" rtlCol="0" anchor="ctr"/>
-          <a:lstStyle/>
-          <a:p>
-            <a:pPr algn="l" indent="0" marL="0">
-              <a:buNone/>
-            </a:pPr>
-            <a:r>
-              <a:rPr lang="en-US" sz="1050" dirty="0">
-                <a:solidFill>
-                  <a:srgbClr val="1A2433"/>
-                </a:solidFill>
-                <a:latin typeface="Calibri" pitchFamily="34" charset="0"/>
-                <a:ea typeface="Calibri" pitchFamily="34" charset="-122"/>
-                <a:cs typeface="Calibri" pitchFamily="34" charset="-120"/>
-              </a:rPr>
-              <a:t>No Conformidad</a:t>
-            </a:r>
-            <a:endParaRPr lang="en-US" sz="1050" dirty="0"/>
-          </a:p>
-        </p:txBody>
-      </p:sp>
-      <p:sp>
-        <p:nvSpPr>
-          <p:cNvPr id="43" name="Text 39"/>
-          <p:cNvSpPr/>
-          <p:nvPr/>
-        </p:nvSpPr>
-        <p:spPr>
-          <a:xfrm>
-            <a:off x="4983480" y="4754880"/>
-            <a:ext cx="1417320" cy="237744"/>
-          </a:xfrm>
-          <a:prstGeom prst="rect">
-            <a:avLst/>
-          </a:prstGeom>
-          <a:noFill/>
-          <a:ln/>
-        </p:spPr>
-        <p:txBody>
-          <a:bodyPr wrap="square" lIns="0" tIns="0" rIns="0" bIns="0" rtlCol="0" anchor="ctr"/>
-          <a:lstStyle/>
-          <a:p>
-            <a:pPr algn="l" indent="0" marL="0">
-              <a:buNone/>
-            </a:pPr>
-            <a:r>
-              <a:rPr lang="en-US" sz="1050" b="1" dirty="0">
-                <a:solidFill>
-                  <a:srgbClr val="C87A32"/>
-                </a:solidFill>
-                <a:latin typeface="Calibri" pitchFamily="34" charset="0"/>
-                <a:ea typeface="Calibri" pitchFamily="34" charset="-122"/>
-                <a:cs typeface="Calibri" pitchFamily="34" charset="-120"/>
-              </a:rPr>
-              <a:t>Externa · Cliente</a:t>
-            </a:r>
-            <a:endParaRPr lang="en-US" sz="1050" dirty="0"/>
-          </a:p>
-        </p:txBody>
-      </p:sp>
-      <p:sp>
-        <p:nvSpPr>
-          <p:cNvPr id="44" name="Text 40"/>
-          <p:cNvSpPr/>
-          <p:nvPr/>
-        </p:nvSpPr>
-        <p:spPr>
-          <a:xfrm>
-            <a:off x="6446520" y="4754880"/>
-            <a:ext cx="1097280" cy="237744"/>
-          </a:xfrm>
-          <a:prstGeom prst="rect">
-            <a:avLst/>
-          </a:prstGeom>
-          <a:noFill/>
-          <a:ln/>
-        </p:spPr>
-        <p:txBody>
-          <a:bodyPr wrap="square" lIns="0" tIns="0" rIns="0" bIns="0" rtlCol="0" anchor="ctr"/>
-          <a:lstStyle/>
-          <a:p>
-            <a:pPr algn="l" indent="0" marL="0">
-              <a:buNone/>
-            </a:pPr>
-            <a:r>
-              <a:rPr lang="en-US" sz="1050" dirty="0">
-                <a:solidFill>
-                  <a:srgbClr val="1A2433"/>
-                </a:solidFill>
-                <a:latin typeface="Calibri" pitchFamily="34" charset="0"/>
-                <a:ea typeface="Calibri" pitchFamily="34" charset="-122"/>
-                <a:cs typeface="Calibri" pitchFamily="34" charset="-120"/>
-              </a:rPr>
-              <a:t>OO.CC</a:t>
-            </a:r>
-            <a:endParaRPr lang="en-US" sz="1050" dirty="0"/>
-          </a:p>
-        </p:txBody>
-      </p:sp>
-      <p:sp>
-        <p:nvSpPr>
-          <p:cNvPr id="45" name="Text 41"/>
-          <p:cNvSpPr/>
-          <p:nvPr/>
-        </p:nvSpPr>
-        <p:spPr>
-          <a:xfrm>
-            <a:off x="7589520" y="4754880"/>
-            <a:ext cx="1371600" cy="237744"/>
-          </a:xfrm>
-          <a:prstGeom prst="rect">
-            <a:avLst/>
-          </a:prstGeom>
-          <a:noFill/>
-          <a:ln/>
-        </p:spPr>
-        <p:txBody>
-          <a:bodyPr wrap="square" lIns="0" tIns="0" rIns="0" bIns="0" rtlCol="0" anchor="ctr"/>
-          <a:lstStyle/>
-          <a:p>
-            <a:pPr algn="l" indent="0" marL="0">
-              <a:buNone/>
-            </a:pPr>
-            <a:r>
-              <a:rPr lang="en-US" sz="1050" dirty="0">
-                <a:solidFill>
-                  <a:srgbClr val="1A2433"/>
-                </a:solidFill>
-                <a:latin typeface="Calibri" pitchFamily="34" charset="0"/>
-                <a:ea typeface="Calibri" pitchFamily="34" charset="-122"/>
-                <a:cs typeface="Calibri" pitchFamily="34" charset="-120"/>
-              </a:rPr>
-              <a:t>Sin asignar</a:t>
-            </a:r>
-            <a:endParaRPr lang="en-US" sz="1050" dirty="0"/>
-          </a:p>
-        </p:txBody>
-      </p:sp>
-      <p:sp>
-        <p:nvSpPr>
-          <p:cNvPr id="46" name="Text 42"/>
-          <p:cNvSpPr/>
-          <p:nvPr/>
-        </p:nvSpPr>
-        <p:spPr>
-          <a:xfrm>
-            <a:off x="9006840" y="4754880"/>
-            <a:ext cx="868680" cy="237744"/>
-          </a:xfrm>
-          <a:prstGeom prst="rect">
-            <a:avLst/>
-          </a:prstGeom>
-          <a:noFill/>
-          <a:ln/>
-        </p:spPr>
-        <p:txBody>
-          <a:bodyPr wrap="square" lIns="0" tIns="0" rIns="0" bIns="0" rtlCol="0" anchor="ctr"/>
-          <a:lstStyle/>
-          <a:p>
-            <a:pPr algn="l" indent="0" marL="0">
-              <a:buNone/>
-            </a:pPr>
-            <a:r>
-              <a:rPr lang="en-US" sz="1050" dirty="0">
-                <a:solidFill>
-                  <a:srgbClr val="C0392B"/>
-                </a:solidFill>
-                <a:latin typeface="Calibri" pitchFamily="34" charset="0"/>
-                <a:ea typeface="Calibri" pitchFamily="34" charset="-122"/>
-                <a:cs typeface="Calibri" pitchFamily="34" charset="-120"/>
-              </a:rPr>
-              <a:t>Listo para…</a:t>
-            </a:r>
-            <a:endParaRPr lang="en-US" sz="1050" dirty="0"/>
-          </a:p>
-        </p:txBody>
-      </p:sp>
-      <p:sp>
-        <p:nvSpPr>
-          <p:cNvPr id="47" name="Text 43"/>
-          <p:cNvSpPr/>
-          <p:nvPr/>
-        </p:nvSpPr>
-        <p:spPr>
-          <a:xfrm>
-            <a:off x="9921240" y="4754880"/>
-            <a:ext cx="1828800" cy="237744"/>
-          </a:xfrm>
-          <a:prstGeom prst="rect">
-            <a:avLst/>
-          </a:prstGeom>
-          <a:noFill/>
-          <a:ln/>
-        </p:spPr>
-        <p:txBody>
-          <a:bodyPr wrap="square" lIns="0" tIns="0" rIns="0" bIns="0" rtlCol="0" anchor="ctr"/>
-          <a:lstStyle/>
-          <a:p>
-            <a:pPr algn="l" indent="0" marL="0">
-              <a:buNone/>
-            </a:pPr>
-            <a:r>
-              <a:rPr lang="en-US" sz="1000" dirty="0">
-                <a:solidFill>
-                  <a:srgbClr val="1A2433"/>
-                </a:solidFill>
-                <a:latin typeface="Calibri" pitchFamily="34" charset="0"/>
-                <a:ea typeface="Calibri" pitchFamily="34" charset="-122"/>
-                <a:cs typeface="Calibri" pitchFamily="34" charset="-120"/>
-              </a:rPr>
-              <a:t>Cota plataforma de flotación</a:t>
-            </a:r>
-            <a:endParaRPr lang="en-US" sz="1000" dirty="0"/>
-          </a:p>
-        </p:txBody>
-      </p:sp>
-      <p:sp>
-        <p:nvSpPr>
-          <p:cNvPr id="48" name="Shape 44"/>
-          <p:cNvSpPr/>
-          <p:nvPr/>
-        </p:nvSpPr>
-        <p:spPr>
-          <a:xfrm>
-            <a:off x="502920" y="5029200"/>
-            <a:ext cx="11247120" cy="0"/>
-          </a:xfrm>
-          <a:prstGeom prst="line">
-            <a:avLst/>
-          </a:prstGeom>
-          <a:noFill/>
-          <a:ln w="9525">
-            <a:solidFill>
-              <a:srgbClr val="D9DFE6"/>
-            </a:solidFill>
-            <a:prstDash val="solid"/>
-          </a:ln>
-        </p:spPr>
-      </p:sp>
-      <p:sp>
-        <p:nvSpPr>
-          <p:cNvPr id="49" name="Text 45"/>
-          <p:cNvSpPr/>
-          <p:nvPr/>
-        </p:nvSpPr>
-        <p:spPr>
-          <a:xfrm>
-            <a:off x="502920" y="5084064"/>
-            <a:ext cx="822960" cy="237744"/>
-          </a:xfrm>
-          <a:prstGeom prst="rect">
-            <a:avLst/>
-          </a:prstGeom>
-          <a:noFill/>
-          <a:ln/>
-        </p:spPr>
-        <p:txBody>
-          <a:bodyPr wrap="square" lIns="0" tIns="0" rIns="0" bIns="0" rtlCol="0" anchor="ctr"/>
-          <a:lstStyle/>
-          <a:p>
-            <a:pPr algn="l" indent="0" marL="0">
-              <a:buNone/>
-            </a:pPr>
-            <a:r>
-              <a:rPr lang="en-US" sz="1050" dirty="0">
-                <a:solidFill>
-                  <a:srgbClr val="1A2433"/>
-                </a:solidFill>
-                <a:latin typeface="Calibri" pitchFamily="34" charset="0"/>
-                <a:ea typeface="Calibri" pitchFamily="34" charset="-122"/>
-                <a:cs typeface="Calibri" pitchFamily="34" charset="-120"/>
-              </a:rPr>
-              <a:t>16-09-2026</a:t>
-            </a:r>
-            <a:endParaRPr lang="en-US" sz="1050" dirty="0"/>
-          </a:p>
-        </p:txBody>
-      </p:sp>
-      <p:sp>
-        <p:nvSpPr>
-          <p:cNvPr id="50" name="Text 46"/>
-          <p:cNvSpPr/>
-          <p:nvPr/>
-        </p:nvSpPr>
-        <p:spPr>
-          <a:xfrm>
-            <a:off x="1371600" y="5084064"/>
-            <a:ext cx="1051560" cy="237744"/>
-          </a:xfrm>
-          <a:prstGeom prst="rect">
-            <a:avLst/>
-          </a:prstGeom>
-          <a:noFill/>
-          <a:ln/>
-        </p:spPr>
-        <p:txBody>
-          <a:bodyPr wrap="square" lIns="0" tIns="0" rIns="0" bIns="0" rtlCol="0" anchor="ctr"/>
-          <a:lstStyle/>
-          <a:p>
-            <a:pPr algn="l" indent="0" marL="0">
-              <a:buNone/>
-            </a:pPr>
-            <a:r>
-              <a:rPr lang="en-US" sz="1050" dirty="0">
-                <a:solidFill>
-                  <a:srgbClr val="1A2433"/>
-                </a:solidFill>
-                <a:latin typeface="Calibri" pitchFamily="34" charset="0"/>
-                <a:ea typeface="Calibri" pitchFamily="34" charset="-122"/>
-                <a:cs typeface="Calibri" pitchFamily="34" charset="-120"/>
-              </a:rPr>
-              <a:t>Arqueros</a:t>
-            </a:r>
-            <a:endParaRPr lang="en-US" sz="1050" dirty="0"/>
-          </a:p>
-        </p:txBody>
-      </p:sp>
-      <p:sp>
-        <p:nvSpPr>
-          <p:cNvPr id="51" name="Text 47"/>
-          <p:cNvSpPr/>
-          <p:nvPr/>
-        </p:nvSpPr>
-        <p:spPr>
-          <a:xfrm>
-            <a:off x="2468880" y="5084064"/>
-            <a:ext cx="1051560" cy="237744"/>
-          </a:xfrm>
-          <a:prstGeom prst="rect">
-            <a:avLst/>
-          </a:prstGeom>
-          <a:noFill/>
-          <a:ln/>
-        </p:spPr>
-        <p:txBody>
-          <a:bodyPr wrap="square" lIns="0" tIns="0" rIns="0" bIns="0" rtlCol="0" anchor="ctr"/>
-          <a:lstStyle/>
-          <a:p>
-            <a:pPr algn="l" indent="0" marL="0">
-              <a:buNone/>
-            </a:pPr>
-            <a:r>
-              <a:rPr lang="en-US" sz="1050" dirty="0">
-                <a:solidFill>
-                  <a:srgbClr val="1A2433"/>
-                </a:solidFill>
-                <a:latin typeface="Calibri" pitchFamily="34" charset="0"/>
-                <a:ea typeface="Calibri" pitchFamily="34" charset="-122"/>
-                <a:cs typeface="Calibri" pitchFamily="34" charset="-120"/>
-              </a:rPr>
-              <a:t>MASA-93</a:t>
-            </a:r>
-            <a:endParaRPr lang="en-US" sz="1050" dirty="0"/>
-          </a:p>
-        </p:txBody>
-      </p:sp>
-      <p:sp>
-        <p:nvSpPr>
-          <p:cNvPr id="52" name="Text 48"/>
-          <p:cNvSpPr/>
-          <p:nvPr/>
-        </p:nvSpPr>
-        <p:spPr>
-          <a:xfrm>
-            <a:off x="3566160" y="5084064"/>
-            <a:ext cx="1371600" cy="237744"/>
-          </a:xfrm>
-          <a:prstGeom prst="rect">
-            <a:avLst/>
-          </a:prstGeom>
-          <a:noFill/>
-          <a:ln/>
-        </p:spPr>
-        <p:txBody>
-          <a:bodyPr wrap="square" lIns="0" tIns="0" rIns="0" bIns="0" rtlCol="0" anchor="ctr"/>
-          <a:lstStyle/>
-          <a:p>
-            <a:pPr algn="l" indent="0" marL="0">
-              <a:buNone/>
-            </a:pPr>
-            <a:r>
-              <a:rPr lang="en-US" sz="1050" dirty="0">
-                <a:solidFill>
-                  <a:srgbClr val="1A2433"/>
-                </a:solidFill>
-                <a:latin typeface="Calibri" pitchFamily="34" charset="0"/>
-                <a:ea typeface="Calibri" pitchFamily="34" charset="-122"/>
-                <a:cs typeface="Calibri" pitchFamily="34" charset="-120"/>
-              </a:rPr>
-              <a:t>No Conformidad</a:t>
-            </a:r>
-            <a:endParaRPr lang="en-US" sz="1050" dirty="0"/>
-          </a:p>
-        </p:txBody>
-      </p:sp>
-      <p:sp>
-        <p:nvSpPr>
-          <p:cNvPr id="53" name="Text 49"/>
-          <p:cNvSpPr/>
-          <p:nvPr/>
-        </p:nvSpPr>
-        <p:spPr>
-          <a:xfrm>
-            <a:off x="4983480" y="5084064"/>
-            <a:ext cx="1417320" cy="237744"/>
-          </a:xfrm>
-          <a:prstGeom prst="rect">
-            <a:avLst/>
-          </a:prstGeom>
-          <a:noFill/>
-          <a:ln/>
-        </p:spPr>
-        <p:txBody>
-          <a:bodyPr wrap="square" lIns="0" tIns="0" rIns="0" bIns="0" rtlCol="0" anchor="ctr"/>
-          <a:lstStyle/>
-          <a:p>
-            <a:pPr algn="l" indent="0" marL="0">
-              <a:buNone/>
-            </a:pPr>
-            <a:r>
-              <a:rPr lang="en-US" sz="1050" b="1" dirty="0">
-                <a:solidFill>
-                  <a:srgbClr val="C87A32"/>
-                </a:solidFill>
-                <a:latin typeface="Calibri" pitchFamily="34" charset="0"/>
-                <a:ea typeface="Calibri" pitchFamily="34" charset="-122"/>
-                <a:cs typeface="Calibri" pitchFamily="34" charset="-120"/>
-              </a:rPr>
-              <a:t>Externa · Cliente</a:t>
-            </a:r>
-            <a:endParaRPr lang="en-US" sz="1050" dirty="0"/>
-          </a:p>
-        </p:txBody>
-      </p:sp>
-      <p:sp>
-        <p:nvSpPr>
-          <p:cNvPr id="54" name="Text 50"/>
-          <p:cNvSpPr/>
-          <p:nvPr/>
-        </p:nvSpPr>
-        <p:spPr>
-          <a:xfrm>
-            <a:off x="6446520" y="5084064"/>
-            <a:ext cx="1097280" cy="237744"/>
-          </a:xfrm>
-          <a:prstGeom prst="rect">
-            <a:avLst/>
-          </a:prstGeom>
-          <a:noFill/>
-          <a:ln/>
-        </p:spPr>
-        <p:txBody>
-          <a:bodyPr wrap="square" lIns="0" tIns="0" rIns="0" bIns="0" rtlCol="0" anchor="ctr"/>
-          <a:lstStyle/>
-          <a:p>
-            <a:pPr algn="l" indent="0" marL="0">
-              <a:buNone/>
-            </a:pPr>
-            <a:r>
-              <a:rPr lang="en-US" sz="1050" dirty="0">
-                <a:solidFill>
-                  <a:srgbClr val="1A2433"/>
-                </a:solidFill>
-                <a:latin typeface="Calibri" pitchFamily="34" charset="0"/>
-                <a:ea typeface="Calibri" pitchFamily="34" charset="-122"/>
-                <a:cs typeface="Calibri" pitchFamily="34" charset="-120"/>
-              </a:rPr>
-              <a:t>MECÁNICA</a:t>
-            </a:r>
-            <a:endParaRPr lang="en-US" sz="1050" dirty="0"/>
-          </a:p>
-        </p:txBody>
-      </p:sp>
-      <p:sp>
-        <p:nvSpPr>
-          <p:cNvPr id="55" name="Text 51"/>
-          <p:cNvSpPr/>
-          <p:nvPr/>
-        </p:nvSpPr>
-        <p:spPr>
-          <a:xfrm>
-            <a:off x="7589520" y="5084064"/>
-            <a:ext cx="1371600" cy="237744"/>
-          </a:xfrm>
-          <a:prstGeom prst="rect">
-            <a:avLst/>
-          </a:prstGeom>
-          <a:noFill/>
-          <a:ln/>
-        </p:spPr>
-        <p:txBody>
-          <a:bodyPr wrap="square" lIns="0" tIns="0" rIns="0" bIns="0" rtlCol="0" anchor="ctr"/>
-          <a:lstStyle/>
-          <a:p>
-            <a:pPr algn="l" indent="0" marL="0">
-              <a:buNone/>
-            </a:pPr>
-            <a:r>
-              <a:rPr lang="en-US" sz="1050" dirty="0">
-                <a:solidFill>
-                  <a:srgbClr val="1A2433"/>
-                </a:solidFill>
-                <a:latin typeface="Calibri" pitchFamily="34" charset="0"/>
-                <a:ea typeface="Calibri" pitchFamily="34" charset="-122"/>
-                <a:cs typeface="Calibri" pitchFamily="34" charset="-120"/>
-              </a:rPr>
-              <a:t>Sin asignar</a:t>
-            </a:r>
-            <a:endParaRPr lang="en-US" sz="1050" dirty="0"/>
-          </a:p>
-        </p:txBody>
-      </p:sp>
-      <p:sp>
-        <p:nvSpPr>
-          <p:cNvPr id="56" name="Text 52"/>
-          <p:cNvSpPr/>
-          <p:nvPr/>
-        </p:nvSpPr>
-        <p:spPr>
-          <a:xfrm>
-            <a:off x="9006840" y="5084064"/>
-            <a:ext cx="868680" cy="237744"/>
-          </a:xfrm>
-          <a:prstGeom prst="rect">
-            <a:avLst/>
-          </a:prstGeom>
-          <a:noFill/>
-          <a:ln/>
-        </p:spPr>
-        <p:txBody>
-          <a:bodyPr wrap="square" lIns="0" tIns="0" rIns="0" bIns="0" rtlCol="0" anchor="ctr"/>
-          <a:lstStyle/>
-          <a:p>
-            <a:pPr algn="l" indent="0" marL="0">
-              <a:buNone/>
-            </a:pPr>
-            <a:r>
-              <a:rPr lang="en-US" sz="1050" dirty="0">
-                <a:solidFill>
-                  <a:srgbClr val="C0392B"/>
-                </a:solidFill>
-                <a:latin typeface="Calibri" pitchFamily="34" charset="0"/>
-                <a:ea typeface="Calibri" pitchFamily="34" charset="-122"/>
-                <a:cs typeface="Calibri" pitchFamily="34" charset="-120"/>
-              </a:rPr>
-              <a:t>Listo para…</a:t>
-            </a:r>
-            <a:endParaRPr lang="en-US" sz="1050" dirty="0"/>
-          </a:p>
-        </p:txBody>
-      </p:sp>
-      <p:sp>
-        <p:nvSpPr>
-          <p:cNvPr id="57" name="Text 53"/>
-          <p:cNvSpPr/>
-          <p:nvPr/>
-        </p:nvSpPr>
-        <p:spPr>
-          <a:xfrm>
-            <a:off x="9921240" y="5084064"/>
-            <a:ext cx="1828800" cy="237744"/>
-          </a:xfrm>
-          <a:prstGeom prst="rect">
-            <a:avLst/>
-          </a:prstGeom>
-          <a:noFill/>
-          <a:ln/>
-        </p:spPr>
-        <p:txBody>
-          <a:bodyPr wrap="square" lIns="0" tIns="0" rIns="0" bIns="0" rtlCol="0" anchor="ctr"/>
-          <a:lstStyle/>
-          <a:p>
-            <a:pPr algn="l" indent="0" marL="0">
-              <a:buNone/>
-            </a:pPr>
-            <a:r>
-              <a:rPr lang="en-US" sz="1000" dirty="0">
-                <a:solidFill>
-                  <a:srgbClr val="1A2433"/>
-                </a:solidFill>
-                <a:latin typeface="Calibri" pitchFamily="34" charset="0"/>
-                <a:ea typeface="Calibri" pitchFamily="34" charset="-122"/>
-                <a:cs typeface="Calibri" pitchFamily="34" charset="-120"/>
-              </a:rPr>
-              <a:t>Daño a PAD del molino de bo…</a:t>
-            </a:r>
-            <a:endParaRPr lang="en-US" sz="1000" dirty="0"/>
-          </a:p>
-        </p:txBody>
-      </p:sp>
-      <p:sp>
-        <p:nvSpPr>
-          <p:cNvPr id="58" name="Shape 54"/>
-          <p:cNvSpPr/>
-          <p:nvPr/>
-        </p:nvSpPr>
-        <p:spPr>
-          <a:xfrm>
-            <a:off x="502920" y="5358384"/>
-            <a:ext cx="11247120" cy="0"/>
-          </a:xfrm>
-          <a:prstGeom prst="line">
-            <a:avLst/>
-          </a:prstGeom>
-          <a:noFill/>
-          <a:ln w="9525">
-            <a:solidFill>
-              <a:srgbClr val="D9DFE6"/>
-            </a:solidFill>
-            <a:prstDash val="solid"/>
-          </a:ln>
-        </p:spPr>
-      </p:sp>
-      <p:sp>
-        <p:nvSpPr>
-          <p:cNvPr id="59" name="Shape 55"/>
-          <p:cNvSpPr/>
-          <p:nvPr/>
-        </p:nvSpPr>
-        <p:spPr>
-          <a:xfrm>
-            <a:off x="457200" y="5367528"/>
-            <a:ext cx="11292840" cy="329184"/>
-          </a:xfrm>
-          <a:prstGeom prst="rect">
-            <a:avLst/>
-          </a:prstGeom>
-          <a:solidFill>
-            <a:srgbClr val="FFFFFF"/>
-          </a:solidFill>
-          <a:ln/>
-        </p:spPr>
-      </p:sp>
-      <p:sp>
-        <p:nvSpPr>
-          <p:cNvPr id="60" name="Text 56"/>
-          <p:cNvSpPr/>
-          <p:nvPr/>
-        </p:nvSpPr>
-        <p:spPr>
-          <a:xfrm>
-            <a:off x="502920" y="5413248"/>
-            <a:ext cx="822960" cy="237744"/>
-          </a:xfrm>
-          <a:prstGeom prst="rect">
-            <a:avLst/>
-          </a:prstGeom>
-          <a:noFill/>
-          <a:ln/>
-        </p:spPr>
-        <p:txBody>
-          <a:bodyPr wrap="square" lIns="0" tIns="0" rIns="0" bIns="0" rtlCol="0" anchor="ctr"/>
-          <a:lstStyle/>
-          <a:p>
-            <a:pPr algn="l" indent="0" marL="0">
-              <a:buNone/>
-            </a:pPr>
-            <a:r>
-              <a:rPr lang="en-US" sz="1050" dirty="0">
-                <a:solidFill>
-                  <a:srgbClr val="1A2433"/>
-                </a:solidFill>
-                <a:latin typeface="Calibri" pitchFamily="34" charset="0"/>
-                <a:ea typeface="Calibri" pitchFamily="34" charset="-122"/>
-                <a:cs typeface="Calibri" pitchFamily="34" charset="-120"/>
-              </a:rPr>
-              <a:t>16-09-2026</a:t>
-            </a:r>
-            <a:endParaRPr lang="en-US" sz="1050" dirty="0"/>
-          </a:p>
-        </p:txBody>
-      </p:sp>
-      <p:sp>
-        <p:nvSpPr>
-          <p:cNvPr id="61" name="Text 57"/>
-          <p:cNvSpPr/>
-          <p:nvPr/>
-        </p:nvSpPr>
-        <p:spPr>
-          <a:xfrm>
-            <a:off x="1371600" y="5413248"/>
-            <a:ext cx="1051560" cy="237744"/>
-          </a:xfrm>
-          <a:prstGeom prst="rect">
-            <a:avLst/>
-          </a:prstGeom>
-          <a:noFill/>
-          <a:ln/>
-        </p:spPr>
-        <p:txBody>
-          <a:bodyPr wrap="square" lIns="0" tIns="0" rIns="0" bIns="0" rtlCol="0" anchor="ctr"/>
-          <a:lstStyle/>
-          <a:p>
-            <a:pPr algn="l" indent="0" marL="0">
-              <a:buNone/>
-            </a:pPr>
-            <a:r>
-              <a:rPr lang="en-US" sz="1050" dirty="0">
-                <a:solidFill>
-                  <a:srgbClr val="1A2433"/>
-                </a:solidFill>
-                <a:latin typeface="Calibri" pitchFamily="34" charset="0"/>
-                <a:ea typeface="Calibri" pitchFamily="34" charset="-122"/>
-                <a:cs typeface="Calibri" pitchFamily="34" charset="-120"/>
-              </a:rPr>
-              <a:t>Talabre</a:t>
-            </a:r>
-            <a:endParaRPr lang="en-US" sz="1050" dirty="0"/>
-          </a:p>
-        </p:txBody>
-      </p:sp>
-      <p:sp>
-        <p:nvSpPr>
-          <p:cNvPr id="62" name="Text 58"/>
-          <p:cNvSpPr/>
-          <p:nvPr/>
-        </p:nvSpPr>
-        <p:spPr>
-          <a:xfrm>
-            <a:off x="2468880" y="5413248"/>
-            <a:ext cx="1051560" cy="237744"/>
-          </a:xfrm>
-          <a:prstGeom prst="rect">
-            <a:avLst/>
-          </a:prstGeom>
-          <a:noFill/>
-          <a:ln/>
-        </p:spPr>
-        <p:txBody>
-          <a:bodyPr wrap="square" lIns="0" tIns="0" rIns="0" bIns="0" rtlCol="0" anchor="ctr"/>
-          <a:lstStyle/>
-          <a:p>
-            <a:pPr algn="l" indent="0" marL="0">
-              <a:buNone/>
-            </a:pPr>
-            <a:r>
-              <a:rPr lang="en-US" sz="1050" dirty="0">
-                <a:solidFill>
-                  <a:srgbClr val="1A2433"/>
-                </a:solidFill>
-                <a:latin typeface="Calibri" pitchFamily="34" charset="0"/>
-                <a:ea typeface="Calibri" pitchFamily="34" charset="-122"/>
-                <a:cs typeface="Calibri" pitchFamily="34" charset="-120"/>
-              </a:rPr>
-              <a:t>252 · PNC N°197</a:t>
-            </a:r>
-            <a:endParaRPr lang="en-US" sz="1050" dirty="0"/>
-          </a:p>
-        </p:txBody>
-      </p:sp>
-      <p:sp>
-        <p:nvSpPr>
-          <p:cNvPr id="63" name="Text 59"/>
-          <p:cNvSpPr/>
-          <p:nvPr/>
-        </p:nvSpPr>
-        <p:spPr>
-          <a:xfrm>
-            <a:off x="3566160" y="5413248"/>
-            <a:ext cx="1371600" cy="237744"/>
-          </a:xfrm>
-          <a:prstGeom prst="rect">
-            <a:avLst/>
-          </a:prstGeom>
-          <a:noFill/>
-          <a:ln/>
-        </p:spPr>
-        <p:txBody>
-          <a:bodyPr wrap="square" lIns="0" tIns="0" rIns="0" bIns="0" rtlCol="0" anchor="ctr"/>
-          <a:lstStyle/>
-          <a:p>
-            <a:pPr algn="l" indent="0" marL="0">
-              <a:buNone/>
-            </a:pPr>
-            <a:r>
-              <a:rPr lang="en-US" sz="1050" dirty="0">
-                <a:solidFill>
-                  <a:srgbClr val="1A2433"/>
-                </a:solidFill>
-                <a:latin typeface="Calibri" pitchFamily="34" charset="0"/>
-                <a:ea typeface="Calibri" pitchFamily="34" charset="-122"/>
-                <a:cs typeface="Calibri" pitchFamily="34" charset="-120"/>
-              </a:rPr>
-              <a:t>Producto No Confor…</a:t>
-            </a:r>
-            <a:endParaRPr lang="en-US" sz="1050" dirty="0"/>
-          </a:p>
-        </p:txBody>
-      </p:sp>
-      <p:sp>
-        <p:nvSpPr>
-          <p:cNvPr id="64" name="Text 60"/>
-          <p:cNvSpPr/>
-          <p:nvPr/>
-        </p:nvSpPr>
-        <p:spPr>
-          <a:xfrm>
-            <a:off x="4983480" y="5413248"/>
-            <a:ext cx="1417320" cy="237744"/>
-          </a:xfrm>
-          <a:prstGeom prst="rect">
-            <a:avLst/>
-          </a:prstGeom>
-          <a:noFill/>
-          <a:ln/>
-        </p:spPr>
-        <p:txBody>
-          <a:bodyPr wrap="square" lIns="0" tIns="0" rIns="0" bIns="0" rtlCol="0" anchor="ctr"/>
-          <a:lstStyle/>
-          <a:p>
-            <a:pPr algn="l" indent="0" marL="0">
-              <a:buNone/>
-            </a:pPr>
-            <a:r>
-              <a:rPr lang="en-US" sz="1050" b="1" dirty="0">
-                <a:solidFill>
-                  <a:srgbClr val="C87A32"/>
-                </a:solidFill>
-                <a:latin typeface="Calibri" pitchFamily="34" charset="0"/>
-                <a:ea typeface="Calibri" pitchFamily="34" charset="-122"/>
-                <a:cs typeface="Calibri" pitchFamily="34" charset="-120"/>
-              </a:rPr>
-              <a:t>Externa · Cliente</a:t>
-            </a:r>
-            <a:endParaRPr lang="en-US" sz="1050" dirty="0"/>
-          </a:p>
-        </p:txBody>
-      </p:sp>
-      <p:sp>
-        <p:nvSpPr>
-          <p:cNvPr id="65" name="Text 61"/>
-          <p:cNvSpPr/>
-          <p:nvPr/>
-        </p:nvSpPr>
-        <p:spPr>
-          <a:xfrm>
-            <a:off x="6446520" y="5413248"/>
-            <a:ext cx="1097280" cy="237744"/>
-          </a:xfrm>
-          <a:prstGeom prst="rect">
-            <a:avLst/>
-          </a:prstGeom>
-          <a:noFill/>
-          <a:ln/>
-        </p:spPr>
-        <p:txBody>
-          <a:bodyPr wrap="square" lIns="0" tIns="0" rIns="0" bIns="0" rtlCol="0" anchor="ctr"/>
-          <a:lstStyle/>
-          <a:p>
-            <a:pPr algn="l" indent="0" marL="0">
-              <a:buNone/>
-            </a:pPr>
-            <a:r>
-              <a:rPr lang="en-US" sz="1050" dirty="0">
-                <a:solidFill>
-                  <a:srgbClr val="1A2433"/>
-                </a:solidFill>
-                <a:latin typeface="Calibri" pitchFamily="34" charset="0"/>
-                <a:ea typeface="Calibri" pitchFamily="34" charset="-122"/>
-                <a:cs typeface="Calibri" pitchFamily="34" charset="-120"/>
-              </a:rPr>
-              <a:t>PIPING</a:t>
-            </a:r>
-            <a:endParaRPr lang="en-US" sz="1050" dirty="0"/>
-          </a:p>
-        </p:txBody>
-      </p:sp>
-      <p:sp>
-        <p:nvSpPr>
-          <p:cNvPr id="66" name="Text 62"/>
-          <p:cNvSpPr/>
-          <p:nvPr/>
-        </p:nvSpPr>
-        <p:spPr>
-          <a:xfrm>
-            <a:off x="7589520" y="5413248"/>
-            <a:ext cx="1371600" cy="237744"/>
-          </a:xfrm>
-          <a:prstGeom prst="rect">
-            <a:avLst/>
-          </a:prstGeom>
-          <a:noFill/>
-          <a:ln/>
-        </p:spPr>
-        <p:txBody>
-          <a:bodyPr wrap="square" lIns="0" tIns="0" rIns="0" bIns="0" rtlCol="0" anchor="ctr"/>
-          <a:lstStyle/>
-          <a:p>
-            <a:pPr algn="l" indent="0" marL="0">
-              <a:buNone/>
-            </a:pPr>
-            <a:r>
-              <a:rPr lang="en-US" sz="1050" dirty="0">
-                <a:solidFill>
-                  <a:srgbClr val="1A2433"/>
-                </a:solidFill>
-                <a:latin typeface="Calibri" pitchFamily="34" charset="0"/>
-                <a:ea typeface="Calibri" pitchFamily="34" charset="-122"/>
-                <a:cs typeface="Calibri" pitchFamily="34" charset="-120"/>
-              </a:rPr>
-              <a:t>Oscar Nahuel P.</a:t>
-            </a:r>
-            <a:endParaRPr lang="en-US" sz="1050" dirty="0"/>
-          </a:p>
-        </p:txBody>
-      </p:sp>
-      <p:sp>
-        <p:nvSpPr>
-          <p:cNvPr id="67" name="Text 63"/>
-          <p:cNvSpPr/>
-          <p:nvPr/>
-        </p:nvSpPr>
-        <p:spPr>
-          <a:xfrm>
-            <a:off x="9006840" y="5413248"/>
-            <a:ext cx="868680" cy="237744"/>
-          </a:xfrm>
-          <a:prstGeom prst="rect">
-            <a:avLst/>
-          </a:prstGeom>
-          <a:noFill/>
-          <a:ln/>
-        </p:spPr>
-        <p:txBody>
-          <a:bodyPr wrap="square" lIns="0" tIns="0" rIns="0" bIns="0" rtlCol="0" anchor="ctr"/>
-          <a:lstStyle/>
-          <a:p>
-            <a:pPr algn="l" indent="0" marL="0">
-              <a:buNone/>
-            </a:pPr>
-            <a:r>
-              <a:rPr lang="en-US" sz="1050" dirty="0">
-                <a:solidFill>
-                  <a:srgbClr val="C0392B"/>
-                </a:solidFill>
-                <a:latin typeface="Calibri" pitchFamily="34" charset="0"/>
-                <a:ea typeface="Calibri" pitchFamily="34" charset="-122"/>
-                <a:cs typeface="Calibri" pitchFamily="34" charset="-120"/>
-              </a:rPr>
-              <a:t>Iniciado</a:t>
-            </a:r>
-            <a:endParaRPr lang="en-US" sz="1050" dirty="0"/>
-          </a:p>
-        </p:txBody>
-      </p:sp>
-      <p:sp>
-        <p:nvSpPr>
-          <p:cNvPr id="68" name="Text 64"/>
-          <p:cNvSpPr/>
-          <p:nvPr/>
-        </p:nvSpPr>
-        <p:spPr>
-          <a:xfrm>
-            <a:off x="9921240" y="5413248"/>
-            <a:ext cx="1828800" cy="237744"/>
-          </a:xfrm>
-          <a:prstGeom prst="rect">
-            <a:avLst/>
-          </a:prstGeom>
-          <a:noFill/>
-          <a:ln/>
-        </p:spPr>
-        <p:txBody>
-          <a:bodyPr wrap="square" lIns="0" tIns="0" rIns="0" bIns="0" rtlCol="0" anchor="ctr"/>
-          <a:lstStyle/>
-          <a:p>
-            <a:pPr algn="l" indent="0" marL="0">
-              <a:buNone/>
-            </a:pPr>
-            <a:r>
-              <a:rPr lang="en-US" sz="1000" dirty="0">
-                <a:solidFill>
-                  <a:srgbClr val="1A2433"/>
-                </a:solidFill>
-                <a:latin typeface="Calibri" pitchFamily="34" charset="0"/>
-                <a:ea typeface="Calibri" pitchFamily="34" charset="-122"/>
-                <a:cs typeface="Calibri" pitchFamily="34" charset="-120"/>
-              </a:rPr>
-              <a:t>Filtración en la unión mecá…</a:t>
-            </a:r>
-            <a:endParaRPr lang="en-US" sz="1000" dirty="0"/>
-          </a:p>
-        </p:txBody>
-      </p:sp>
-      <p:sp>
-        <p:nvSpPr>
-          <p:cNvPr id="69" name="Shape 65"/>
-          <p:cNvSpPr/>
-          <p:nvPr/>
-        </p:nvSpPr>
-        <p:spPr>
-          <a:xfrm>
-            <a:off x="502920" y="5687568"/>
-            <a:ext cx="11247120" cy="0"/>
-          </a:xfrm>
-          <a:prstGeom prst="line">
-            <a:avLst/>
-          </a:prstGeom>
-          <a:noFill/>
-          <a:ln w="9525">
-            <a:solidFill>
-              <a:srgbClr val="D9DFE6"/>
-            </a:solidFill>
-            <a:prstDash val="solid"/>
-          </a:ln>
-        </p:spPr>
-      </p:sp>
-      <p:sp>
-        <p:nvSpPr>
-          <p:cNvPr id="70" name="Text 66"/>
+          <p:cNvPr id="38" name="Text 34"/>
           <p:cNvSpPr/>
           <p:nvPr/>
         </p:nvSpPr>
@@ -27700,7 +24823,7 @@
                 <a:ea typeface="Calibri" pitchFamily="34" charset="-122"/>
                 <a:cs typeface="Calibri" pitchFamily="34" charset="-120"/>
               </a:rPr>
-              <a:t>Fuente: Data_NCR-21092026.xlsx — hoja «Observaciones» · Corte 21-09-2026 · 513 registros desde 10-02-2023</a:t>
+              <a:t>Fuente: Data_NCR.xlsx — hoja «Observaciones» · Corte 28-09-2026 · 514 registros desde 10-02-2023</a:t>
             </a:r>
             <a:endParaRPr lang="en-US" sz="850" dirty="0"/>
           </a:p>
@@ -27708,7 +24831,7 @@
       </p:sp>
       <p:sp>
         <p:nvSpPr>
-          <p:cNvPr id="71" name="Text 67"/>
+          <p:cNvPr id="39" name="Text 35"/>
           <p:cNvSpPr/>
           <p:nvPr/>
         </p:nvSpPr>
@@ -27747,7 +24870,7 @@
       </p:sp>
       <p:sp>
         <p:nvSpPr>
-          <p:cNvPr id="72" name="Text 68"/>
+          <p:cNvPr id="40" name="Text 36"/>
           <p:cNvSpPr/>
           <p:nvPr/>
         </p:nvSpPr>
@@ -28696,7 +25819,7 @@
                 <a:ea typeface="Calibri" pitchFamily="34" charset="-122"/>
                 <a:cs typeface="Calibri" pitchFamily="34" charset="-120"/>
               </a:rPr>
-              <a:t>297</a:t>
+              <a:t>298</a:t>
             </a:r>
             <a:endParaRPr lang="en-US" sz="1050" dirty="0"/>
           </a:p>
@@ -28735,7 +25858,7 @@
                 <a:ea typeface="Calibri" pitchFamily="34" charset="-122"/>
                 <a:cs typeface="Calibri" pitchFamily="34" charset="-120"/>
               </a:rPr>
-              <a:t>254</a:t>
+              <a:t>267</a:t>
             </a:r>
             <a:endParaRPr lang="en-US" sz="1050" dirty="0"/>
           </a:p>
@@ -28774,7 +25897,7 @@
                 <a:ea typeface="Calibri" pitchFamily="34" charset="-122"/>
                 <a:cs typeface="Calibri" pitchFamily="34" charset="-120"/>
               </a:rPr>
-              <a:t>85,5%</a:t>
+              <a:t>89,6%</a:t>
             </a:r>
             <a:endParaRPr lang="en-US" sz="1050" dirty="0"/>
           </a:p>
@@ -28813,7 +25936,7 @@
                 <a:ea typeface="Calibri" pitchFamily="34" charset="-122"/>
                 <a:cs typeface="Calibri" pitchFamily="34" charset="-120"/>
               </a:rPr>
-              <a:t>43</a:t>
+              <a:t>31</a:t>
             </a:r>
             <a:endParaRPr lang="en-US" sz="1050" dirty="0"/>
           </a:p>
@@ -28852,7 +25975,7 @@
                 <a:ea typeface="Calibri" pitchFamily="34" charset="-122"/>
                 <a:cs typeface="Calibri" pitchFamily="34" charset="-120"/>
               </a:rPr>
-              <a:t>39</a:t>
+              <a:t>30</a:t>
             </a:r>
             <a:endParaRPr lang="en-US" sz="1050" dirty="0"/>
           </a:p>
@@ -28891,7 +26014,7 @@
                 <a:ea typeface="Calibri" pitchFamily="34" charset="-122"/>
                 <a:cs typeface="Calibri" pitchFamily="34" charset="-120"/>
               </a:rPr>
-              <a:t>59 días</a:t>
+              <a:t>63 días</a:t>
             </a:r>
             <a:endParaRPr lang="en-US" sz="1050" dirty="0"/>
           </a:p>
@@ -29604,7 +26727,7 @@
                 <a:ea typeface="Calibri" pitchFamily="34" charset="-122"/>
                 <a:cs typeface="Calibri" pitchFamily="34" charset="-120"/>
               </a:rPr>
-              <a:t>513</a:t>
+              <a:t>514</a:t>
             </a:r>
             <a:endParaRPr lang="en-US" sz="1050" dirty="0"/>
           </a:p>
@@ -29643,7 +26766,7 @@
                 <a:ea typeface="Calibri" pitchFamily="34" charset="-122"/>
                 <a:cs typeface="Calibri" pitchFamily="34" charset="-120"/>
               </a:rPr>
-              <a:t>468</a:t>
+              <a:t>481</a:t>
             </a:r>
             <a:endParaRPr lang="en-US" sz="1050" dirty="0"/>
           </a:p>
@@ -29682,7 +26805,7 @@
                 <a:ea typeface="Calibri" pitchFamily="34" charset="-122"/>
                 <a:cs typeface="Calibri" pitchFamily="34" charset="-120"/>
               </a:rPr>
-              <a:t>91,2%</a:t>
+              <a:t>93,6%</a:t>
             </a:r>
             <a:endParaRPr lang="en-US" sz="1050" dirty="0"/>
           </a:p>
@@ -29721,7 +26844,7 @@
                 <a:ea typeface="Calibri" pitchFamily="34" charset="-122"/>
                 <a:cs typeface="Calibri" pitchFamily="34" charset="-120"/>
               </a:rPr>
-              <a:t>45</a:t>
+              <a:t>33</a:t>
             </a:r>
             <a:endParaRPr lang="en-US" sz="1050" dirty="0"/>
           </a:p>
@@ -29760,7 +26883,7 @@
                 <a:ea typeface="Calibri" pitchFamily="34" charset="-122"/>
                 <a:cs typeface="Calibri" pitchFamily="34" charset="-120"/>
               </a:rPr>
-              <a:t>41</a:t>
+              <a:t>32</a:t>
             </a:r>
             <a:endParaRPr lang="en-US" sz="1050" dirty="0"/>
           </a:p>
@@ -29799,7 +26922,7 @@
                 <a:ea typeface="Calibri" pitchFamily="34" charset="-122"/>
                 <a:cs typeface="Calibri" pitchFamily="34" charset="-120"/>
               </a:rPr>
-              <a:t>75 días</a:t>
+              <a:t>77 días</a:t>
             </a:r>
             <a:endParaRPr lang="en-US" sz="1050" dirty="0"/>
           </a:p>
@@ -30016,7 +27139,7 @@
                 <a:ea typeface="Cambria" pitchFamily="34" charset="-122"/>
                 <a:cs typeface="Cambria" pitchFamily="34" charset="-120"/>
               </a:rPr>
-              <a:t>20,7%</a:t>
+              <a:t>20,6%</a:t>
             </a:r>
             <a:endParaRPr lang="en-US" sz="2400" dirty="0"/>
           </a:p>
@@ -30172,7 +27295,7 @@
                 <a:ea typeface="Calibri" pitchFamily="34" charset="-122"/>
                 <a:cs typeface="Calibri" pitchFamily="34" charset="-120"/>
               </a:rPr>
-              <a:t>Fuente: Data_NCR-21092026.xlsx — hoja «Observaciones» · Corte 21-09-2026 · 513 registros desde 10-02-2023</a:t>
+              <a:t>Fuente: Data_NCR.xlsx — hoja «Observaciones» · Corte 28-09-2026 · 514 registros desde 10-02-2023</a:t>
             </a:r>
             <a:endParaRPr lang="en-US" sz="850" dirty="0"/>
           </a:p>
@@ -30423,7 +27546,7 @@
                 <a:ea typeface="Calibri" pitchFamily="34" charset="-122"/>
                 <a:cs typeface="Calibri" pitchFamily="34" charset="-120"/>
               </a:rPr>
-              <a:t>De los 45 hallazgos abiertos, 17 llevan más de 180 días desde que se levantaron y 0 más de un año. La mediana de cierre global es de 30 días.</a:t>
+              <a:t>De los 33 hallazgos abiertos, 9 llevan más de 180 días desde que se levantaron y 0 más de un año. La mediana de cierre global es de 31 días.</a:t>
             </a:r>
             <a:endParaRPr lang="en-US" sz="1350" dirty="0"/>
           </a:p>
@@ -30560,7 +27683,7 @@
                 <a:ea typeface="Calibri" pitchFamily="34" charset="-122"/>
                 <a:cs typeface="Calibri" pitchFamily="34" charset="-120"/>
               </a:rPr>
-              <a:t>Al corte hay 41 hallazgos fuera de plazo de los 45 abiertos.</a:t>
+              <a:t>Al corte hay 32 hallazgos fuera de plazo de los 33 abiertos.</a:t>
             </a:r>
             <a:endParaRPr lang="en-US" sz="1150" dirty="0"/>
           </a:p>
@@ -31239,7 +28362,7 @@
                 <a:ea typeface="Calibri" pitchFamily="34" charset="-122"/>
                 <a:cs typeface="Calibri" pitchFamily="34" charset="-120"/>
               </a:rPr>
-              <a:t>244</a:t>
+              <a:t>250</a:t>
             </a:r>
             <a:endParaRPr lang="en-US" sz="1150" dirty="0"/>
           </a:p>
@@ -31356,7 +28479,7 @@
                 <a:ea typeface="Calibri" pitchFamily="34" charset="-122"/>
                 <a:cs typeface="Calibri" pitchFamily="34" charset="-120"/>
               </a:rPr>
-              <a:t>7</a:t>
+              <a:t>2</a:t>
             </a:r>
             <a:endParaRPr lang="en-US" sz="1150" dirty="0"/>
           </a:p>
@@ -31485,7 +28608,7 @@
                 <a:ea typeface="Calibri" pitchFamily="34" charset="-122"/>
                 <a:cs typeface="Calibri" pitchFamily="34" charset="-120"/>
               </a:rPr>
-              <a:t>135</a:t>
+              <a:t>142</a:t>
             </a:r>
             <a:endParaRPr lang="en-US" sz="1150" dirty="0"/>
           </a:p>
@@ -31524,7 +28647,7 @@
                 <a:ea typeface="Calibri" pitchFamily="34" charset="-122"/>
                 <a:cs typeface="Calibri" pitchFamily="34" charset="-120"/>
               </a:rPr>
-              <a:t>140 d</a:t>
+              <a:t>142 d</a:t>
             </a:r>
             <a:endParaRPr lang="en-US" sz="1150" dirty="0"/>
           </a:p>
@@ -31602,7 +28725,7 @@
                 <a:ea typeface="Calibri" pitchFamily="34" charset="-122"/>
                 <a:cs typeface="Calibri" pitchFamily="34" charset="-120"/>
               </a:rPr>
-              <a:t>37</a:t>
+              <a:t>30</a:t>
             </a:r>
             <a:endParaRPr lang="en-US" sz="1150" dirty="0"/>
           </a:p>
@@ -31980,7 +29103,7 @@
                 <a:ea typeface="Calibri" pitchFamily="34" charset="-122"/>
                 <a:cs typeface="Calibri" pitchFamily="34" charset="-120"/>
               </a:rPr>
-              <a:t>Fuente: Data_NCR-21092026.xlsx — hoja «Observaciones» · Corte 21-09-2026 · 513 registros desde 10-02-2023</a:t>
+              <a:t>Fuente: Data_NCR.xlsx — hoja «Observaciones» · Corte 28-09-2026 · 514 registros desde 10-02-2023</a:t>
             </a:r>
             <a:endParaRPr lang="en-US" sz="850" dirty="0"/>
           </a:p>
@@ -32231,7 +29354,7 @@
                 <a:ea typeface="Calibri" pitchFamily="34" charset="-122"/>
                 <a:cs typeface="Calibri" pitchFamily="34" charset="-120"/>
               </a:rPr>
-              <a:t>10.613 UF declaradas entre nov-24 y sep-26, imputadas al mes en que se levantó cada hallazgo. Las declaran 108 de 502 hallazgos del período.</a:t>
+              <a:t>10.613 UF declaradas entre nov-24 y sep-26, imputadas al mes en que se levantó cada hallazgo. Las declaran 108 de 503 hallazgos del período.</a:t>
             </a:r>
             <a:endParaRPr lang="en-US" sz="1350" dirty="0"/>
           </a:p>
@@ -49732,7 +46855,7 @@
                           <a:ea typeface="Calibri" pitchFamily="34" charset="-122"/>
                           <a:cs typeface="Calibri" pitchFamily="34" charset="-120"/>
                         </a:rPr>
-                        <a:t>0/11</a:t>
+                        <a:t>0/12</a:t>
                       </a:r>
                       <a:endParaRPr lang="en-US" sz="750" dirty="0">
                         <a:latin typeface="Calibri" charset="0"/>
@@ -49800,7 +46923,7 @@
                           <a:ea typeface="Calibri" pitchFamily="34" charset="-122"/>
                           <a:cs typeface="Calibri" pitchFamily="34" charset="-120"/>
                         </a:rPr>
-                        <a:t>108/502</a:t>
+                        <a:t>108/503</a:t>
                       </a:r>
                       <a:endParaRPr lang="en-US" sz="750" dirty="0">
                         <a:latin typeface="Calibri" charset="0"/>
@@ -50464,7 +47587,7 @@
                 <a:ea typeface="Cambria" pitchFamily="34" charset="-122"/>
                 <a:cs typeface="Cambria" pitchFamily="34" charset="-120"/>
               </a:rPr>
-              <a:t>262</a:t>
+              <a:t>263</a:t>
             </a:r>
             <a:endParaRPr lang="en-US" sz="2100" dirty="0"/>
           </a:p>
@@ -50581,7 +47704,7 @@
                 <a:ea typeface="Calibri" pitchFamily="34" charset="-122"/>
                 <a:cs typeface="Calibri" pitchFamily="34" charset="-120"/>
               </a:rPr>
-              <a:t>Fuente: Data_NCR-21092026.xlsx — hoja «Observaciones» · Corte 21-09-2026 · 513 registros desde 10-02-2023</a:t>
+              <a:t>Fuente: Data_NCR.xlsx — hoja «Observaciones» · Corte 28-09-2026 · 514 registros desde 10-02-2023</a:t>
             </a:r>
             <a:endParaRPr lang="en-US" sz="850" dirty="0"/>
           </a:p>
@@ -50955,7 +48078,7 @@
                 <a:ea typeface="Calibri" pitchFamily="34" charset="-122"/>
                 <a:cs typeface="Calibri" pitchFamily="34" charset="-120"/>
               </a:rPr>
-              <a:t>37 de los 45 hallazgos abiertos (82,2%) y 78,5% de cierre, contra 91,2% global. Es la ruta crítica del módulo.</a:t>
+              <a:t>30 de los 33 hallazgos abiertos (90,9%) y 82,6% de cierre, contra 93,6% global. Es la ruta crítica del módulo.</a:t>
             </a:r>
             <a:endParaRPr lang="en-US" sz="1100" dirty="0"/>
           </a:p>
@@ -51097,7 +48220,7 @@
                 <a:ea typeface="Calibri" pitchFamily="34" charset="-122"/>
                 <a:cs typeface="Calibri" pitchFamily="34" charset="-120"/>
               </a:rPr>
-              <a:t>Solo 20,7% de sus hallazgos los detecta Besalco; el mejor frente va en 66,7%. Lo que no se detecta adentro llega como observación del cliente.</a:t>
+              <a:t>Solo 20,6% de sus hallazgos los detecta Besalco; el mejor frente va en 66,7%. Lo que no se detecta adentro llega como observación del cliente.</a:t>
             </a:r>
             <a:endParaRPr lang="en-US" sz="1100" dirty="0"/>
           </a:p>
@@ -51197,7 +48320,7 @@
                 <a:ea typeface="Calibri" pitchFamily="34" charset="-122"/>
                 <a:cs typeface="Calibri" pitchFamily="34" charset="-120"/>
               </a:rPr>
-              <a:t>Sacar los 17 hallazgos sobre 180 días</a:t>
+              <a:t>Sacar los 9 hallazgos sobre 180 días</a:t>
             </a:r>
             <a:endParaRPr lang="en-US" sz="1400" dirty="0"/>
           </a:p>
@@ -51239,7 +48362,7 @@
                 <a:ea typeface="Calibri" pitchFamily="34" charset="-122"/>
                 <a:cs typeface="Calibri" pitchFamily="34" charset="-120"/>
               </a:rPr>
-              <a:t>0 de ellos superan el año abiertos. Los tienen a cargo Sin asignar (16), Wladimir Carvajal P. (1). Es deuda antigua que no se cierra sola.</a:t>
+              <a:t>0 de ellos superan el año abiertos. Los tienen a cargo Sin asignar (9). Es deuda antigua que no se cierra sola.</a:t>
             </a:r>
             <a:endParaRPr lang="en-US" sz="1100" dirty="0"/>
           </a:p>
@@ -51339,7 +48462,7 @@
                 <a:ea typeface="Calibri" pitchFamily="34" charset="-122"/>
                 <a:cs typeface="Calibri" pitchFamily="34" charset="-120"/>
               </a:rPr>
-              <a:t>Responder las 41 que pasaron el plazo</a:t>
+              <a:t>Responder las 32 que pasaron el plazo</a:t>
             </a:r>
             <a:endParaRPr lang="en-US" sz="1400" dirty="0"/>
           </a:p>
@@ -51381,7 +48504,7 @@
                 <a:ea typeface="Calibri" pitchFamily="34" charset="-122"/>
                 <a:cs typeface="Calibri" pitchFamily="34" charset="-120"/>
               </a:rPr>
-              <a:t>El plazo es de 10 días desde la emisión y hoy lo incumplen 91,1% de los abiertos. Solo 4 siguen dentro de plazo.</a:t>
+              <a:t>El plazo es de 10 días desde la emisión y hoy lo incumplen 97% de los abiertos. Solo 1 siguen dentro de plazo.</a:t>
             </a:r>
             <a:endParaRPr lang="en-US" sz="1100" dirty="0"/>
           </a:p>
@@ -51420,7 +48543,7 @@
                 <a:ea typeface="Calibri" pitchFamily="34" charset="-122"/>
                 <a:cs typeface="Calibri" pitchFamily="34" charset="-120"/>
               </a:rPr>
-              <a:t>Fuente: Data_NCR-21092026.xlsx — hoja «Observaciones» · Corte 21-09-2026 · 513 registros desde 10-02-2023</a:t>
+              <a:t>Fuente: Data_NCR.xlsx — hoja «Observaciones» · Corte 28-09-2026 · 514 registros desde 10-02-2023</a:t>
             </a:r>
             <a:endParaRPr lang="en-US" sz="850" dirty="0"/>
           </a:p>
@@ -52144,7 +49267,7 @@
                 <a:ea typeface="Calibri" pitchFamily="34" charset="-122"/>
                 <a:cs typeface="Calibri" pitchFamily="34" charset="-120"/>
               </a:rPr>
-              <a:t>Corte: 21-09-2026</a:t>
+              <a:t>Corte: 28-09-2026</a:t>
             </a:r>
             <a:endParaRPr lang="en-US" sz="1100" dirty="0"/>
           </a:p>
@@ -52183,7 +49306,7 @@
                 <a:ea typeface="Calibri" pitchFamily="34" charset="-122"/>
                 <a:cs typeface="Calibri" pitchFamily="34" charset="-120"/>
               </a:rPr>
-              <a:t>Fuente: Data_NCR-21092026.xlsx — hoja «Observaciones» · Corte 21-09-2026 · 513 registros desde 10-02-2023</a:t>
+              <a:t>Fuente: Data_NCR.xlsx — hoja «Observaciones» · Corte 28-09-2026 · 514 registros desde 10-02-2023</a:t>
             </a:r>
             <a:endParaRPr lang="en-US" sz="850" dirty="0"/>
           </a:p>

--- a/modulo_nc/Panel_No_Conformidades.pptx
+++ b/modulo_nc/Panel_No_Conformidades.pptx
@@ -220,19 +220,19 @@
                     <c:v>3 sem.</c:v>
                   </c:pt>
                   <c:pt idx="1">
-                    <c:v>24-08</c:v>
+                    <c:v>31-08</c:v>
                   </c:pt>
                   <c:pt idx="2">
-                    <c:v>31-08</c:v>
+                    <c:v>07-09</c:v>
                   </c:pt>
                   <c:pt idx="3">
-                    <c:v>07-09</c:v>
+                    <c:v>14-09</c:v>
                   </c:pt>
                   <c:pt idx="4">
-                    <c:v>14-09</c:v>
+                    <c:v>21-09</c:v>
                   </c:pt>
                   <c:pt idx="5">
-                    <c:v>21-09</c:v>
+                    <c:v>28-09</c:v>
                   </c:pt>
                 </c:lvl>
               </c:multiLvlStrCache>
@@ -248,16 +248,16 @@
                   <c:v/>
                 </c:pt>
                 <c:pt idx="1">
+                  <c:v>2</c:v>
+                </c:pt>
+                <c:pt idx="2">
                   <c:v/>
                 </c:pt>
-                <c:pt idx="2">
-                  <c:v>6</c:v>
-                </c:pt>
                 <c:pt idx="3">
-                  <c:v/>
+                  <c:v>1</c:v>
                 </c:pt>
                 <c:pt idx="4">
-                  <c:v>2</c:v>
+                  <c:v>1</c:v>
                 </c:pt>
                 <c:pt idx="5">
                   <c:v>1</c:v>
@@ -322,19 +322,19 @@
                     <c:v>3 sem.</c:v>
                   </c:pt>
                   <c:pt idx="1">
-                    <c:v>24-08</c:v>
+                    <c:v>31-08</c:v>
                   </c:pt>
                   <c:pt idx="2">
-                    <c:v>31-08</c:v>
+                    <c:v>07-09</c:v>
                   </c:pt>
                   <c:pt idx="3">
-                    <c:v>07-09</c:v>
+                    <c:v>14-09</c:v>
                   </c:pt>
                   <c:pt idx="4">
-                    <c:v>14-09</c:v>
+                    <c:v>21-09</c:v>
                   </c:pt>
                   <c:pt idx="5">
-                    <c:v>21-09</c:v>
+                    <c:v>28-09</c:v>
                   </c:pt>
                 </c:lvl>
               </c:multiLvlStrCache>
@@ -350,16 +350,16 @@
                   <c:v>7</c:v>
                 </c:pt>
                 <c:pt idx="1">
-                  <c:v>1</c:v>
+                  <c:v>5</c:v>
                 </c:pt>
                 <c:pt idx="2">
-                  <c:v>1</c:v>
+                  <c:v/>
                 </c:pt>
                 <c:pt idx="3">
-                  <c:v/>
+                  <c:v>3</c:v>
                 </c:pt>
                 <c:pt idx="4">
-                  <c:v>2</c:v>
+                  <c:v/>
                 </c:pt>
                 <c:pt idx="5">
                   <c:v/>
@@ -734,7 +734,7 @@
                   <c:v>19</c:v>
                 </c:pt>
                 <c:pt idx="1">
-                  <c:v>200</c:v>
+                  <c:v>201</c:v>
                 </c:pt>
                 <c:pt idx="2">
                   <c:v>79</c:v>
@@ -1199,13 +1199,13 @@
                 <c:formatCode>General</c:formatCode>
                 <c:ptCount val="4"/>
                 <c:pt idx="0">
-                  <c:v>301</c:v>
+                  <c:v>311</c:v>
                 </c:pt>
                 <c:pt idx="1">
                   <c:v>125</c:v>
                 </c:pt>
                 <c:pt idx="2">
-                  <c:v>54</c:v>
+                  <c:v>57</c:v>
                 </c:pt>
                 <c:pt idx="3">
                   <c:v>1</c:v>
@@ -1289,13 +1289,13 @@
                 <c:formatCode>General</c:formatCode>
                 <c:ptCount val="4"/>
                 <c:pt idx="0">
-                  <c:v>27</c:v>
+                  <c:v>17</c:v>
                 </c:pt>
                 <c:pt idx="1">
-                  <c:v/>
+                  <c:v>1</c:v>
                 </c:pt>
                 <c:pt idx="2">
-                  <c:v>6</c:v>
+                  <c:v>3</c:v>
                 </c:pt>
                 <c:pt idx="3">
                   <c:v/>
@@ -1487,7 +1487,7 @@
                 </a:solidFill>
                 <a:latin typeface="Calibri"/>
               </a:rPr>
-              <a:t>Antigüedad de los 33 hallazgos abiertos</a:t>
+              <a:t>Antigüedad de los 21 hallazgos abiertos</a:t>
             </a:r>
           </a:p>
         </c:rich>
@@ -1568,7 +1568,7 @@
                 <c:formatCode>General</c:formatCode>
                 <c:ptCount val="1"/>
                 <c:pt idx="0">
-                  <c:v>9</c:v>
+                  <c:v>3</c:v>
                 </c:pt>
               </c:numCache>
             </c:numRef>
@@ -1640,7 +1640,7 @@
                 <c:formatCode>General</c:formatCode>
                 <c:ptCount val="1"/>
                 <c:pt idx="0">
-                  <c:v>2</c:v>
+                  <c:v>3</c:v>
                 </c:pt>
               </c:numCache>
             </c:numRef>
@@ -1712,7 +1712,7 @@
                 <c:formatCode>General</c:formatCode>
                 <c:ptCount val="1"/>
                 <c:pt idx="0">
-                  <c:v>13</c:v>
+                  <c:v>7</c:v>
                 </c:pt>
               </c:numCache>
             </c:numRef>
@@ -1784,7 +1784,7 @@
                 <c:formatCode>General</c:formatCode>
                 <c:ptCount val="1"/>
                 <c:pt idx="0">
-                  <c:v>9</c:v>
+                  <c:v>8</c:v>
                 </c:pt>
               </c:numCache>
             </c:numRef>
@@ -2615,7 +2615,7 @@
                 <c:formatCode>General</c:formatCode>
                 <c:ptCount val="8"/>
                 <c:pt idx="0">
-                  <c:v>1</c:v>
+                  <c:v>2</c:v>
                 </c:pt>
                 <c:pt idx="1">
                   <c:v>1</c:v>
@@ -2930,16 +2930,16 @@
                   <c:v>38</c:v>
                 </c:pt>
                 <c:pt idx="1">
-                  <c:v>30</c:v>
+                  <c:v>32</c:v>
                 </c:pt>
                 <c:pt idx="2">
-                  <c:v>16</c:v>
+                  <c:v>21</c:v>
                 </c:pt>
                 <c:pt idx="3">
-                  <c:v>16</c:v>
+                  <c:v>18</c:v>
                 </c:pt>
                 <c:pt idx="4">
-                  <c:v>4</c:v>
+                  <c:v>8</c:v>
                 </c:pt>
                 <c:pt idx="5">
                   <c:v>7</c:v>
@@ -3044,16 +3044,16 @@
                   <c:v/>
                 </c:pt>
                 <c:pt idx="1">
-                  <c:v>7</c:v>
+                  <c:v>5</c:v>
                 </c:pt>
                 <c:pt idx="2">
-                  <c:v>10</c:v>
+                  <c:v>5</c:v>
                 </c:pt>
                 <c:pt idx="3">
-                  <c:v>3</c:v>
+                  <c:v>1</c:v>
                 </c:pt>
                 <c:pt idx="4">
-                  <c:v>10</c:v>
+                  <c:v>6</c:v>
                 </c:pt>
                 <c:pt idx="5">
                   <c:v/>
@@ -5638,7 +5638,7 @@
                 <a:ea typeface="Calibri" pitchFamily="34" charset="-122"/>
                 <a:cs typeface="Calibri" pitchFamily="34" charset="-120"/>
               </a:rPr>
-              <a:t>514 hallazgos levantados entre 10-02-2023 y 23-09-2026 (Desaladora 82 · Talabre 252 · Arqueros 172 · Oficina Central 8).</a:t>
+              <a:t>515 hallazgos levantados entre 10-02-2023 y 30-09-2026 (Desaladora 82 · Talabre 253 · Arqueros 172 · Oficina Central 8).</a:t>
             </a:r>
             <a:endParaRPr lang="en-US" sz="1350" dirty="0"/>
           </a:p>
@@ -5697,7 +5697,7 @@
                 <a:ea typeface="Cambria" pitchFamily="34" charset="-122"/>
                 <a:cs typeface="Cambria" pitchFamily="34" charset="-120"/>
               </a:rPr>
-              <a:t>93,6%</a:t>
+              <a:t>95,9%</a:t>
             </a:r>
             <a:endParaRPr lang="en-US" sz="3400" dirty="0"/>
           </a:p>
@@ -5775,7 +5775,7 @@
                 <a:ea typeface="Cambria" pitchFamily="34" charset="-122"/>
                 <a:cs typeface="Cambria" pitchFamily="34" charset="-120"/>
               </a:rPr>
-              <a:t>33</a:t>
+              <a:t>21</a:t>
             </a:r>
             <a:endParaRPr lang="en-US" sz="3400" dirty="0"/>
           </a:p>
@@ -5853,7 +5853,7 @@
                 <a:ea typeface="Cambria" pitchFamily="34" charset="-122"/>
                 <a:cs typeface="Cambria" pitchFamily="34" charset="-120"/>
               </a:rPr>
-              <a:t>31 d</a:t>
+              <a:t>33 d</a:t>
             </a:r>
             <a:endParaRPr lang="en-US" sz="3400" dirty="0"/>
           </a:p>
@@ -6009,7 +6009,7 @@
                 <a:ea typeface="Calibri" pitchFamily="34" charset="-122"/>
                 <a:cs typeface="Calibri" pitchFamily="34" charset="-120"/>
               </a:rPr>
-              <a:t>Corte: 28-09-2026</a:t>
+              <a:t>Corte: 05-10-2026</a:t>
             </a:r>
             <a:endParaRPr lang="en-US" sz="1100" dirty="0"/>
           </a:p>
@@ -6048,7 +6048,7 @@
                 <a:ea typeface="Calibri" pitchFamily="34" charset="-122"/>
                 <a:cs typeface="Calibri" pitchFamily="34" charset="-120"/>
               </a:rPr>
-              <a:t>Fuente: Data_NCR.xlsx — hoja «Observaciones» · Corte 28-09-2026 · 514 registros desde 10-02-2023</a:t>
+              <a:t>Fuente: Data_NCR.xlsx — hoja «Observaciones» · Corte 05-10-2026 · 515 registros desde 10-02-2023</a:t>
             </a:r>
             <a:endParaRPr lang="en-US" sz="850" dirty="0"/>
           </a:p>
@@ -6641,7 +6641,7 @@
                 <a:ea typeface="Calibri" pitchFamily="34" charset="-122"/>
                 <a:cs typeface="Calibri" pitchFamily="34" charset="-120"/>
               </a:rPr>
-              <a:t>Global del módulo: 93,6%</a:t>
+              <a:t>Global del módulo: 95,9%</a:t>
             </a:r>
             <a:endParaRPr lang="en-US" sz="950" dirty="0"/>
           </a:p>
@@ -7239,7 +7239,7 @@
                 <a:ea typeface="Calibri" pitchFamily="34" charset="-122"/>
                 <a:cs typeface="Calibri" pitchFamily="34" charset="-120"/>
               </a:rPr>
-              <a:t>global del módulo 31,5%</a:t>
+              <a:t>global del módulo 31,4%</a:t>
             </a:r>
             <a:endParaRPr lang="en-US" sz="1000" dirty="0"/>
           </a:p>
@@ -7849,7 +7849,7 @@
                 <a:ea typeface="Calibri" pitchFamily="34" charset="-122"/>
                 <a:cs typeface="Calibri" pitchFamily="34" charset="-120"/>
               </a:rPr>
-              <a:t>Fuente: Data_NCR.xlsx — hoja «Observaciones» · Corte 28-09-2026 · 514 registros desde 10-02-2023</a:t>
+              <a:t>Fuente: Data_NCR.xlsx — hoja «Observaciones» · Corte 05-10-2026 · 515 registros desde 10-02-2023</a:t>
             </a:r>
             <a:endParaRPr lang="en-US" sz="850" dirty="0"/>
           </a:p>
@@ -8708,7 +8708,7 @@
                 <a:ea typeface="Calibri" pitchFamily="34" charset="-122"/>
                 <a:cs typeface="Calibri" pitchFamily="34" charset="-120"/>
               </a:rPr>
-              <a:t>139</a:t>
+              <a:t>146</a:t>
             </a:r>
             <a:endParaRPr lang="en-US" sz="1050" dirty="0"/>
           </a:p>
@@ -8831,7 +8831,7 @@
                 <a:ea typeface="Calibri" pitchFamily="34" charset="-122"/>
                 <a:cs typeface="Calibri" pitchFamily="34" charset="-120"/>
               </a:rPr>
-              <a:t>SEMANA 21-09-2026 — 27-09-2026</a:t>
+              <a:t>SEMANA 28-09-2026 — 04-10-2026</a:t>
             </a:r>
             <a:endParaRPr lang="en-US" sz="1000" dirty="0"/>
           </a:p>
@@ -8909,7 +8909,7 @@
                 <a:ea typeface="Calibri" pitchFamily="34" charset="-122"/>
                 <a:cs typeface="Calibri" pitchFamily="34" charset="-120"/>
               </a:rPr>
-              <a:t>Fuente: Data_NCR.xlsx — hoja «Observaciones» · Corte 28-09-2026 · 514 registros desde 10-02-2023</a:t>
+              <a:t>Fuente: Data_NCR.xlsx — hoja «Observaciones» · Corte 05-10-2026 · 515 registros desde 10-02-2023</a:t>
             </a:r>
             <a:endParaRPr lang="en-US" sz="850" dirty="0"/>
           </a:p>
@@ -9262,7 +9262,7 @@
                 <a:ea typeface="Calibri" pitchFamily="34" charset="-122"/>
                 <a:cs typeface="Calibri" pitchFamily="34" charset="-120"/>
               </a:rPr>
-              <a:t>252 hallazgos levantados · 52 internas · 200 del cliente · 12 especialidades involucradas.</a:t>
+              <a:t>253 hallazgos levantados · 52 internas · 201 del cliente · 12 especialidades involucradas.</a:t>
             </a:r>
             <a:endParaRPr lang="en-US" sz="1350" dirty="0"/>
           </a:p>
@@ -9321,7 +9321,7 @@
                 <a:ea typeface="Cambria" pitchFamily="34" charset="-122"/>
                 <a:cs typeface="Cambria" pitchFamily="34" charset="-120"/>
               </a:rPr>
-              <a:t>99,2%</a:t>
+              <a:t>98,8%</a:t>
             </a:r>
             <a:endParaRPr lang="en-US" sz="3400" dirty="0"/>
           </a:p>
@@ -9399,7 +9399,7 @@
                 <a:ea typeface="Cambria" pitchFamily="34" charset="-122"/>
                 <a:cs typeface="Cambria" pitchFamily="34" charset="-120"/>
               </a:rPr>
-              <a:t>2</a:t>
+              <a:t>3</a:t>
             </a:r>
             <a:endParaRPr lang="en-US" sz="3400" dirty="0"/>
           </a:p>
@@ -9633,7 +9633,7 @@
                 <a:ea typeface="Calibri" pitchFamily="34" charset="-122"/>
                 <a:cs typeface="Calibri" pitchFamily="34" charset="-120"/>
               </a:rPr>
-              <a:t>Corte: 28-09-2026</a:t>
+              <a:t>Corte: 05-10-2026</a:t>
             </a:r>
             <a:endParaRPr lang="en-US" sz="1100" dirty="0"/>
           </a:p>
@@ -9672,7 +9672,7 @@
                 <a:ea typeface="Calibri" pitchFamily="34" charset="-122"/>
                 <a:cs typeface="Calibri" pitchFamily="34" charset="-120"/>
               </a:rPr>
-              <a:t>Fuente: Data_NCR.xlsx — hoja «Observaciones» · Corte 28-09-2026 · 514 registros desde 10-02-2023</a:t>
+              <a:t>Fuente: Data_NCR.xlsx — hoja «Observaciones» · Corte 05-10-2026 · 515 registros desde 10-02-2023</a:t>
             </a:r>
             <a:endParaRPr lang="en-US" sz="850" dirty="0"/>
           </a:p>
@@ -9938,7 +9938,7 @@
                 <a:ea typeface="Cambria" pitchFamily="34" charset="-122"/>
                 <a:cs typeface="Cambria" pitchFamily="34" charset="-120"/>
               </a:rPr>
-              <a:t>252</a:t>
+              <a:t>253</a:t>
             </a:r>
             <a:endParaRPr lang="en-US" sz="4000" dirty="0"/>
           </a:p>
@@ -10055,7 +10055,7 @@
                 <a:ea typeface="Calibri" pitchFamily="34" charset="-122"/>
                 <a:cs typeface="Calibri" pitchFamily="34" charset="-120"/>
               </a:rPr>
-              <a:t>52 internas · 200 del cliente</a:t>
+              <a:t>52 internas · 201 del cliente</a:t>
             </a:r>
             <a:endParaRPr lang="en-US" sz="950" dirty="0"/>
           </a:p>
@@ -10148,7 +10148,7 @@
                 <a:ea typeface="Cambria" pitchFamily="34" charset="-122"/>
                 <a:cs typeface="Cambria" pitchFamily="34" charset="-120"/>
               </a:rPr>
-              <a:t>99,2%</a:t>
+              <a:t>98,8%</a:t>
             </a:r>
             <a:endParaRPr lang="en-US" sz="4000" dirty="0"/>
           </a:p>
@@ -10187,7 +10187,7 @@
                 <a:ea typeface="Calibri" pitchFamily="34" charset="-122"/>
                 <a:cs typeface="Calibri" pitchFamily="34" charset="-120"/>
               </a:rPr>
-              <a:t>250/252</a:t>
+              <a:t>250/253</a:t>
             </a:r>
             <a:endParaRPr lang="en-US" sz="1400" dirty="0"/>
           </a:p>
@@ -10265,7 +10265,7 @@
                 <a:ea typeface="Calibri" pitchFamily="34" charset="-122"/>
                 <a:cs typeface="Calibri" pitchFamily="34" charset="-120"/>
               </a:rPr>
-              <a:t>Global del módulo: 93,6%</a:t>
+              <a:t>Global del módulo: 95,9%</a:t>
             </a:r>
             <a:endParaRPr lang="en-US" sz="950" dirty="0"/>
           </a:p>
@@ -10358,7 +10358,7 @@
                 <a:ea typeface="Cambria" pitchFamily="34" charset="-122"/>
                 <a:cs typeface="Cambria" pitchFamily="34" charset="-120"/>
               </a:rPr>
-              <a:t>2</a:t>
+              <a:t>3</a:t>
             </a:r>
             <a:endParaRPr lang="en-US" sz="4000" dirty="0"/>
           </a:p>
@@ -10475,7 +10475,7 @@
                 <a:ea typeface="Calibri" pitchFamily="34" charset="-122"/>
                 <a:cs typeface="Calibri" pitchFamily="34" charset="-120"/>
               </a:rPr>
-              <a:t>2 iniciado</a:t>
+              <a:t>1 listo para revisión · 2 iniciado</a:t>
             </a:r>
             <a:endParaRPr lang="en-US" sz="950" dirty="0"/>
           </a:p>
@@ -10863,7 +10863,7 @@
                 <a:ea typeface="Calibri" pitchFamily="34" charset="-122"/>
                 <a:cs typeface="Calibri" pitchFamily="34" charset="-120"/>
               </a:rPr>
-              <a:t>global del módulo 31,5%</a:t>
+              <a:t>global del módulo 31,4%</a:t>
             </a:r>
             <a:endParaRPr lang="en-US" sz="1000" dirty="0"/>
           </a:p>
@@ -11121,7 +11121,7 @@
                 <a:ea typeface="Calibri" pitchFamily="34" charset="-122"/>
                 <a:cs typeface="Calibri" pitchFamily="34" charset="-120"/>
               </a:rPr>
-              <a:t>2 ab.</a:t>
+              <a:t>3 ab.</a:t>
             </a:r>
             <a:endParaRPr lang="en-US" sz="950" dirty="0"/>
           </a:p>
@@ -11160,7 +11160,7 @@
                 <a:ea typeface="Cambria" pitchFamily="34" charset="-122"/>
                 <a:cs typeface="Cambria" pitchFamily="34" charset="-120"/>
               </a:rPr>
-              <a:t>200</a:t>
+              <a:t>201</a:t>
             </a:r>
             <a:endParaRPr lang="en-US" sz="1600" dirty="0"/>
           </a:p>
@@ -11199,7 +11199,7 @@
                 <a:ea typeface="Calibri" pitchFamily="34" charset="-122"/>
                 <a:cs typeface="Calibri" pitchFamily="34" charset="-120"/>
               </a:rPr>
-              <a:t>Fuente: Data_NCR.xlsx — hoja «Observaciones» · Corte 28-09-2026 · 514 registros desde 10-02-2023</a:t>
+              <a:t>Fuente: Data_NCR.xlsx — hoja «Observaciones» · Corte 05-10-2026 · 515 registros desde 10-02-2023</a:t>
             </a:r>
             <a:endParaRPr lang="en-US" sz="850" dirty="0"/>
           </a:p>
@@ -11450,7 +11450,7 @@
                 <a:ea typeface="Calibri" pitchFamily="34" charset="-122"/>
                 <a:cs typeface="Calibri" pitchFamily="34" charset="-120"/>
               </a:rPr>
-              <a:t>2 hallazgos siguen abiertos; 0 con más de 180 días. Se listan del más antiguo al más reciente.</a:t>
+              <a:t>3 hallazgos siguen abiertos; 0 con más de 180 días. Se listan del más antiguo al más reciente.</a:t>
             </a:r>
             <a:endParaRPr lang="en-US" sz="1350" dirty="0"/>
           </a:p>
@@ -12019,7 +12019,7 @@
                 <a:ea typeface="Calibri" pitchFamily="34" charset="-122"/>
                 <a:cs typeface="Calibri" pitchFamily="34" charset="-120"/>
               </a:rPr>
-              <a:t>Iniciado</a:t>
+              <a:t>Listo para revisi…</a:t>
             </a:r>
             <a:endParaRPr lang="en-US" sz="1050" dirty="0"/>
           </a:p>
@@ -12058,7 +12058,7 @@
                 <a:ea typeface="Calibri" pitchFamily="34" charset="-122"/>
                 <a:cs typeface="Calibri" pitchFamily="34" charset="-120"/>
               </a:rPr>
-              <a:t>90</a:t>
+              <a:t>97</a:t>
             </a:r>
             <a:endParaRPr lang="en-US" sz="1050" dirty="0"/>
           </a:p>
@@ -12413,7 +12413,7 @@
                 <a:ea typeface="Calibri" pitchFamily="34" charset="-122"/>
                 <a:cs typeface="Calibri" pitchFamily="34" charset="-120"/>
               </a:rPr>
-              <a:t>5</a:t>
+              <a:t>12</a:t>
             </a:r>
             <a:endParaRPr lang="en-US" sz="1050" dirty="0"/>
           </a:p>
@@ -12483,7 +12483,342 @@
       </p:sp>
       <p:sp>
         <p:nvSpPr>
-          <p:cNvPr id="34" name="Shape 31"/>
+          <p:cNvPr id="34" name="Text 31"/>
+          <p:cNvSpPr/>
+          <p:nvPr/>
+        </p:nvSpPr>
+        <p:spPr>
+          <a:xfrm>
+            <a:off x="502920" y="3008376"/>
+            <a:ext cx="822960" cy="256032"/>
+          </a:xfrm>
+          <a:prstGeom prst="rect">
+            <a:avLst/>
+          </a:prstGeom>
+          <a:noFill/>
+          <a:ln/>
+        </p:spPr>
+        <p:txBody>
+          <a:bodyPr wrap="square" lIns="0" tIns="0" rIns="0" bIns="0" rtlCol="0" anchor="ctr"/>
+          <a:lstStyle/>
+          <a:p>
+            <a:pPr algn="l" indent="0" marL="0">
+              <a:buNone/>
+            </a:pPr>
+            <a:r>
+              <a:rPr lang="en-US" sz="1050" dirty="0">
+                <a:solidFill>
+                  <a:srgbClr val="1A2433"/>
+                </a:solidFill>
+                <a:latin typeface="Calibri" pitchFamily="34" charset="0"/>
+                <a:ea typeface="Calibri" pitchFamily="34" charset="-122"/>
+                <a:cs typeface="Calibri" pitchFamily="34" charset="-120"/>
+              </a:rPr>
+              <a:t>254</a:t>
+            </a:r>
+            <a:endParaRPr lang="en-US" sz="1050" dirty="0"/>
+          </a:p>
+        </p:txBody>
+      </p:sp>
+      <p:sp>
+        <p:nvSpPr>
+          <p:cNvPr id="35" name="Text 32"/>
+          <p:cNvSpPr/>
+          <p:nvPr/>
+        </p:nvSpPr>
+        <p:spPr>
+          <a:xfrm>
+            <a:off x="1371600" y="3008376"/>
+            <a:ext cx="1508760" cy="256032"/>
+          </a:xfrm>
+          <a:prstGeom prst="rect">
+            <a:avLst/>
+          </a:prstGeom>
+          <a:noFill/>
+          <a:ln/>
+        </p:spPr>
+        <p:txBody>
+          <a:bodyPr wrap="square" lIns="0" tIns="0" rIns="0" bIns="0" rtlCol="0" anchor="ctr"/>
+          <a:lstStyle/>
+          <a:p>
+            <a:pPr algn="l" indent="0" marL="0">
+              <a:buNone/>
+            </a:pPr>
+            <a:r>
+              <a:rPr lang="en-US" sz="1050" dirty="0">
+                <a:solidFill>
+                  <a:srgbClr val="1A2433"/>
+                </a:solidFill>
+                <a:latin typeface="Calibri" pitchFamily="34" charset="0"/>
+                <a:ea typeface="Calibri" pitchFamily="34" charset="-122"/>
+                <a:cs typeface="Calibri" pitchFamily="34" charset="-120"/>
+              </a:rPr>
+              <a:t>Producto No Conforme</a:t>
+            </a:r>
+            <a:endParaRPr lang="en-US" sz="1050" dirty="0"/>
+          </a:p>
+        </p:txBody>
+      </p:sp>
+      <p:sp>
+        <p:nvSpPr>
+          <p:cNvPr id="36" name="Text 33"/>
+          <p:cNvSpPr/>
+          <p:nvPr/>
+        </p:nvSpPr>
+        <p:spPr>
+          <a:xfrm>
+            <a:off x="2926080" y="3008376"/>
+            <a:ext cx="1463040" cy="256032"/>
+          </a:xfrm>
+          <a:prstGeom prst="rect">
+            <a:avLst/>
+          </a:prstGeom>
+          <a:noFill/>
+          <a:ln/>
+        </p:spPr>
+        <p:txBody>
+          <a:bodyPr wrap="square" lIns="0" tIns="0" rIns="0" bIns="0" rtlCol="0" anchor="ctr"/>
+          <a:lstStyle/>
+          <a:p>
+            <a:pPr algn="l" indent="0" marL="0">
+              <a:buNone/>
+            </a:pPr>
+            <a:r>
+              <a:rPr lang="en-US" sz="1050" b="1" dirty="0">
+                <a:solidFill>
+                  <a:srgbClr val="C87A32"/>
+                </a:solidFill>
+                <a:latin typeface="Calibri" pitchFamily="34" charset="0"/>
+                <a:ea typeface="Calibri" pitchFamily="34" charset="-122"/>
+                <a:cs typeface="Calibri" pitchFamily="34" charset="-120"/>
+              </a:rPr>
+              <a:t>Externa · Cliente</a:t>
+            </a:r>
+            <a:endParaRPr lang="en-US" sz="1050" dirty="0"/>
+          </a:p>
+        </p:txBody>
+      </p:sp>
+      <p:sp>
+        <p:nvSpPr>
+          <p:cNvPr id="37" name="Text 34"/>
+          <p:cNvSpPr/>
+          <p:nvPr/>
+        </p:nvSpPr>
+        <p:spPr>
+          <a:xfrm>
+            <a:off x="4434840" y="3008376"/>
+            <a:ext cx="1280160" cy="256032"/>
+          </a:xfrm>
+          <a:prstGeom prst="rect">
+            <a:avLst/>
+          </a:prstGeom>
+          <a:noFill/>
+          <a:ln/>
+        </p:spPr>
+        <p:txBody>
+          <a:bodyPr wrap="square" lIns="0" tIns="0" rIns="0" bIns="0" rtlCol="0" anchor="ctr"/>
+          <a:lstStyle/>
+          <a:p>
+            <a:pPr algn="l" indent="0" marL="0">
+              <a:buNone/>
+            </a:pPr>
+            <a:r>
+              <a:rPr lang="en-US" sz="1050" dirty="0">
+                <a:solidFill>
+                  <a:srgbClr val="1A2433"/>
+                </a:solidFill>
+                <a:latin typeface="Calibri" pitchFamily="34" charset="0"/>
+                <a:ea typeface="Calibri" pitchFamily="34" charset="-122"/>
+                <a:cs typeface="Calibri" pitchFamily="34" charset="-120"/>
+              </a:rPr>
+              <a:t>OO.CC</a:t>
+            </a:r>
+            <a:endParaRPr lang="en-US" sz="1050" dirty="0"/>
+          </a:p>
+        </p:txBody>
+      </p:sp>
+      <p:sp>
+        <p:nvSpPr>
+          <p:cNvPr id="38" name="Text 35"/>
+          <p:cNvSpPr/>
+          <p:nvPr/>
+        </p:nvSpPr>
+        <p:spPr>
+          <a:xfrm>
+            <a:off x="5760720" y="3008376"/>
+            <a:ext cx="1508760" cy="256032"/>
+          </a:xfrm>
+          <a:prstGeom prst="rect">
+            <a:avLst/>
+          </a:prstGeom>
+          <a:noFill/>
+          <a:ln/>
+        </p:spPr>
+        <p:txBody>
+          <a:bodyPr wrap="square" lIns="0" tIns="0" rIns="0" bIns="0" rtlCol="0" anchor="ctr"/>
+          <a:lstStyle/>
+          <a:p>
+            <a:pPr algn="l" indent="0" marL="0">
+              <a:buNone/>
+            </a:pPr>
+            <a:r>
+              <a:rPr lang="en-US" sz="1050" dirty="0">
+                <a:solidFill>
+                  <a:srgbClr val="1A2433"/>
+                </a:solidFill>
+                <a:latin typeface="Calibri" pitchFamily="34" charset="0"/>
+                <a:ea typeface="Calibri" pitchFamily="34" charset="-122"/>
+                <a:cs typeface="Calibri" pitchFamily="34" charset="-120"/>
+              </a:rPr>
+              <a:t>Wladimir Carvajal …</a:t>
+            </a:r>
+            <a:endParaRPr lang="en-US" sz="1050" dirty="0"/>
+          </a:p>
+        </p:txBody>
+      </p:sp>
+      <p:sp>
+        <p:nvSpPr>
+          <p:cNvPr id="39" name="Text 36"/>
+          <p:cNvSpPr/>
+          <p:nvPr/>
+        </p:nvSpPr>
+        <p:spPr>
+          <a:xfrm>
+            <a:off x="7315200" y="3008376"/>
+            <a:ext cx="1325880" cy="256032"/>
+          </a:xfrm>
+          <a:prstGeom prst="rect">
+            <a:avLst/>
+          </a:prstGeom>
+          <a:noFill/>
+          <a:ln/>
+        </p:spPr>
+        <p:txBody>
+          <a:bodyPr wrap="square" lIns="0" tIns="0" rIns="0" bIns="0" rtlCol="0" anchor="ctr"/>
+          <a:lstStyle/>
+          <a:p>
+            <a:pPr algn="l" indent="0" marL="0">
+              <a:buNone/>
+            </a:pPr>
+            <a:r>
+              <a:rPr lang="en-US" sz="1050" dirty="0">
+                <a:solidFill>
+                  <a:srgbClr val="1A2433"/>
+                </a:solidFill>
+                <a:latin typeface="Calibri" pitchFamily="34" charset="0"/>
+                <a:ea typeface="Calibri" pitchFamily="34" charset="-122"/>
+                <a:cs typeface="Calibri" pitchFamily="34" charset="-120"/>
+              </a:rPr>
+              <a:t>Iniciado</a:t>
+            </a:r>
+            <a:endParaRPr lang="en-US" sz="1050" dirty="0"/>
+          </a:p>
+        </p:txBody>
+      </p:sp>
+      <p:sp>
+        <p:nvSpPr>
+          <p:cNvPr id="40" name="Text 37"/>
+          <p:cNvSpPr/>
+          <p:nvPr/>
+        </p:nvSpPr>
+        <p:spPr>
+          <a:xfrm>
+            <a:off x="8686800" y="3008376"/>
+            <a:ext cx="640080" cy="256032"/>
+          </a:xfrm>
+          <a:prstGeom prst="rect">
+            <a:avLst/>
+          </a:prstGeom>
+          <a:noFill/>
+          <a:ln/>
+        </p:spPr>
+        <p:txBody>
+          <a:bodyPr wrap="square" lIns="0" tIns="0" rIns="0" bIns="0" rtlCol="0" anchor="ctr"/>
+          <a:lstStyle/>
+          <a:p>
+            <a:pPr algn="r" indent="0" marL="0">
+              <a:buNone/>
+            </a:pPr>
+            <a:r>
+              <a:rPr lang="en-US" sz="1050" dirty="0">
+                <a:solidFill>
+                  <a:srgbClr val="1A2433"/>
+                </a:solidFill>
+                <a:latin typeface="Calibri" pitchFamily="34" charset="0"/>
+                <a:ea typeface="Calibri" pitchFamily="34" charset="-122"/>
+                <a:cs typeface="Calibri" pitchFamily="34" charset="-120"/>
+              </a:rPr>
+              <a:t>5</a:t>
+            </a:r>
+            <a:endParaRPr lang="en-US" sz="1050" dirty="0"/>
+          </a:p>
+        </p:txBody>
+      </p:sp>
+      <p:sp>
+        <p:nvSpPr>
+          <p:cNvPr id="41" name="Text 38"/>
+          <p:cNvSpPr/>
+          <p:nvPr/>
+        </p:nvSpPr>
+        <p:spPr>
+          <a:xfrm>
+            <a:off x="9464040" y="3008376"/>
+            <a:ext cx="2286000" cy="256032"/>
+          </a:xfrm>
+          <a:prstGeom prst="rect">
+            <a:avLst/>
+          </a:prstGeom>
+          <a:noFill/>
+          <a:ln/>
+        </p:spPr>
+        <p:txBody>
+          <a:bodyPr wrap="square" lIns="0" tIns="0" rIns="0" bIns="0" rtlCol="0" anchor="ctr"/>
+          <a:lstStyle/>
+          <a:p>
+            <a:pPr algn="l" indent="0" marL="0">
+              <a:buNone/>
+            </a:pPr>
+            <a:r>
+              <a:rPr lang="en-US" sz="1000" dirty="0">
+                <a:solidFill>
+                  <a:srgbClr val="1A2433"/>
+                </a:solidFill>
+                <a:latin typeface="Calibri" pitchFamily="34" charset="0"/>
+                <a:ea typeface="Calibri" pitchFamily="34" charset="-122"/>
+                <a:cs typeface="Calibri" pitchFamily="34" charset="-120"/>
+              </a:rPr>
+              <a:t>Cortes no autorizados en la lámina …</a:t>
+            </a:r>
+            <a:endParaRPr lang="en-US" sz="1000" dirty="0"/>
+          </a:p>
+        </p:txBody>
+      </p:sp>
+      <p:sp>
+        <p:nvSpPr>
+          <p:cNvPr id="42" name="Shape 39"/>
+          <p:cNvSpPr/>
+          <p:nvPr/>
+        </p:nvSpPr>
+        <p:spPr>
+          <a:xfrm>
+            <a:off x="502920" y="3300984"/>
+            <a:ext cx="11247120" cy="0"/>
+          </a:xfrm>
+          <a:prstGeom prst="line">
+            <a:avLst/>
+          </a:prstGeom>
+          <a:noFill/>
+          <a:ln w="9525">
+            <a:solidFill>
+              <a:srgbClr val="D9DFE6"/>
+            </a:solidFill>
+            <a:prstDash val="solid"/>
+          </a:ln>
+        </p:spPr>
+      </p:sp>
+      <p:sp>
+        <p:nvSpPr>
+          <p:cNvPr id="43" name="Shape 40"/>
           <p:cNvSpPr/>
           <p:nvPr/>
         </p:nvSpPr>
@@ -12505,7 +12840,7 @@
       </p:sp>
       <p:sp>
         <p:nvSpPr>
-          <p:cNvPr id="35" name="Text 32"/>
+          <p:cNvPr id="44" name="Text 41"/>
           <p:cNvSpPr/>
           <p:nvPr/>
         </p:nvSpPr>
@@ -12536,7 +12871,7 @@
                 <a:ea typeface="Calibri" pitchFamily="34" charset="-122"/>
                 <a:cs typeface="Calibri" pitchFamily="34" charset="-120"/>
               </a:rPr>
-              <a:t>SEMANA 21-09-2026 — 27-09-2026</a:t>
+              <a:t>SEMANA 28-09-2026 — 04-10-2026</a:t>
             </a:r>
             <a:endParaRPr lang="en-US" sz="1000" dirty="0"/>
           </a:p>
@@ -12544,7 +12879,7 @@
       </p:sp>
       <p:sp>
         <p:nvSpPr>
-          <p:cNvPr id="36" name="Text 33"/>
+          <p:cNvPr id="45" name="Text 42"/>
           <p:cNvSpPr/>
           <p:nvPr/>
         </p:nvSpPr>
@@ -12575,7 +12910,7 @@
                 <a:ea typeface="Calibri" pitchFamily="34" charset="-122"/>
                 <a:cs typeface="Calibri" pitchFamily="34" charset="-120"/>
               </a:rPr>
-              <a:t>1 hallazgo nuevo · 0 internas · 1 del cliente · CALIDAD 1 · 1 sigue abierto</a:t>
+              <a:t>1 hallazgo nuevo · 0 internas · 1 del cliente · OO.CC 1 · 1 sigue abierto</a:t>
             </a:r>
             <a:endParaRPr lang="en-US" sz="1150" dirty="0"/>
           </a:p>
@@ -12583,7 +12918,7 @@
       </p:sp>
       <p:sp>
         <p:nvSpPr>
-          <p:cNvPr id="37" name="Text 34"/>
+          <p:cNvPr id="46" name="Text 43"/>
           <p:cNvSpPr/>
           <p:nvPr/>
         </p:nvSpPr>
@@ -12614,7 +12949,7 @@
                 <a:ea typeface="Calibri" pitchFamily="34" charset="-122"/>
                 <a:cs typeface="Calibri" pitchFamily="34" charset="-120"/>
               </a:rPr>
-              <a:t>Fuente: Data_NCR.xlsx — hoja «Observaciones» · Corte 28-09-2026 · 514 registros desde 10-02-2023</a:t>
+              <a:t>Fuente: Data_NCR.xlsx — hoja «Observaciones» · Corte 05-10-2026 · 515 registros desde 10-02-2023</a:t>
             </a:r>
             <a:endParaRPr lang="en-US" sz="850" dirty="0"/>
           </a:p>
@@ -12622,7 +12957,7 @@
       </p:sp>
       <p:sp>
         <p:nvSpPr>
-          <p:cNvPr id="38" name="Text 35"/>
+          <p:cNvPr id="47" name="Text 44"/>
           <p:cNvSpPr/>
           <p:nvPr/>
         </p:nvSpPr>
@@ -12661,7 +12996,7 @@
       </p:sp>
       <p:sp>
         <p:nvSpPr>
-          <p:cNvPr id="39" name="Text 36"/>
+          <p:cNvPr id="48" name="Text 45"/>
           <p:cNvSpPr/>
           <p:nvPr/>
         </p:nvSpPr>
@@ -13026,7 +13361,7 @@
                 <a:ea typeface="Cambria" pitchFamily="34" charset="-122"/>
                 <a:cs typeface="Cambria" pitchFamily="34" charset="-120"/>
               </a:rPr>
-              <a:t>82,6%</a:t>
+              <a:t>90,1%</a:t>
             </a:r>
             <a:endParaRPr lang="en-US" sz="3400" dirty="0"/>
           </a:p>
@@ -13104,7 +13439,7 @@
                 <a:ea typeface="Cambria" pitchFamily="34" charset="-122"/>
                 <a:cs typeface="Cambria" pitchFamily="34" charset="-120"/>
               </a:rPr>
-              <a:t>30</a:t>
+              <a:t>17</a:t>
             </a:r>
             <a:endParaRPr lang="en-US" sz="3400" dirty="0"/>
           </a:p>
@@ -13182,7 +13517,7 @@
                 <a:ea typeface="Cambria" pitchFamily="34" charset="-122"/>
                 <a:cs typeface="Cambria" pitchFamily="34" charset="-120"/>
               </a:rPr>
-              <a:t>142 d</a:t>
+              <a:t>140 d</a:t>
             </a:r>
             <a:endParaRPr lang="en-US" sz="3400" dirty="0"/>
           </a:p>
@@ -13338,7 +13673,7 @@
                 <a:ea typeface="Calibri" pitchFamily="34" charset="-122"/>
                 <a:cs typeface="Calibri" pitchFamily="34" charset="-120"/>
               </a:rPr>
-              <a:t>Corte: 28-09-2026</a:t>
+              <a:t>Corte: 05-10-2026</a:t>
             </a:r>
             <a:endParaRPr lang="en-US" sz="1100" dirty="0"/>
           </a:p>
@@ -13377,7 +13712,7 @@
                 <a:ea typeface="Calibri" pitchFamily="34" charset="-122"/>
                 <a:cs typeface="Calibri" pitchFamily="34" charset="-120"/>
               </a:rPr>
-              <a:t>Fuente: Data_NCR.xlsx — hoja «Observaciones» · Corte 28-09-2026 · 514 registros desde 10-02-2023</a:t>
+              <a:t>Fuente: Data_NCR.xlsx — hoja «Observaciones» · Corte 05-10-2026 · 515 registros desde 10-02-2023</a:t>
             </a:r>
             <a:endParaRPr lang="en-US" sz="850" dirty="0"/>
           </a:p>
@@ -13682,7 +14017,7 @@
                 <a:ea typeface="Calibri" pitchFamily="34" charset="-122"/>
                 <a:cs typeface="Calibri" pitchFamily="34" charset="-120"/>
               </a:rPr>
-              <a:t>142 cerrados</a:t>
+              <a:t>155 cerrados</a:t>
             </a:r>
             <a:endParaRPr lang="en-US" sz="1400" dirty="0"/>
           </a:p>
@@ -13853,7 +14188,7 @@
                 <a:ea typeface="Cambria" pitchFamily="34" charset="-122"/>
                 <a:cs typeface="Cambria" pitchFamily="34" charset="-120"/>
               </a:rPr>
-              <a:t>82,6%</a:t>
+              <a:t>90,1%</a:t>
             </a:r>
             <a:endParaRPr lang="en-US" sz="4000" dirty="0"/>
           </a:p>
@@ -13892,7 +14227,7 @@
                 <a:ea typeface="Calibri" pitchFamily="34" charset="-122"/>
                 <a:cs typeface="Calibri" pitchFamily="34" charset="-120"/>
               </a:rPr>
-              <a:t>142/172</a:t>
+              <a:t>155/172</a:t>
             </a:r>
             <a:endParaRPr lang="en-US" sz="1400" dirty="0"/>
           </a:p>
@@ -13970,7 +14305,7 @@
                 <a:ea typeface="Calibri" pitchFamily="34" charset="-122"/>
                 <a:cs typeface="Calibri" pitchFamily="34" charset="-120"/>
               </a:rPr>
-              <a:t>Global del módulo: 93,6%</a:t>
+              <a:t>Global del módulo: 95,9%</a:t>
             </a:r>
             <a:endParaRPr lang="en-US" sz="950" dirty="0"/>
           </a:p>
@@ -14063,7 +14398,7 @@
                 <a:ea typeface="Cambria" pitchFamily="34" charset="-122"/>
                 <a:cs typeface="Cambria" pitchFamily="34" charset="-120"/>
               </a:rPr>
-              <a:t>30</a:t>
+              <a:t>17</a:t>
             </a:r>
             <a:endParaRPr lang="en-US" sz="4000" dirty="0"/>
           </a:p>
@@ -14180,7 +14515,7 @@
                 <a:ea typeface="Calibri" pitchFamily="34" charset="-122"/>
                 <a:cs typeface="Calibri" pitchFamily="34" charset="-120"/>
               </a:rPr>
-              <a:t>1 iniciado · 5 observada · 22 listo para revisión · 2 pendiente</a:t>
+              <a:t>1 iniciado · 6 observada · 8 listo para revisión · 2 pendiente</a:t>
             </a:r>
             <a:endParaRPr lang="en-US" sz="950" dirty="0"/>
           </a:p>
@@ -14273,7 +14608,7 @@
                 <a:ea typeface="Cambria" pitchFamily="34" charset="-122"/>
                 <a:cs typeface="Cambria" pitchFamily="34" charset="-120"/>
               </a:rPr>
-              <a:t>142</a:t>
+              <a:t>140</a:t>
             </a:r>
             <a:endParaRPr lang="en-US" sz="4000" dirty="0"/>
           </a:p>
@@ -14568,7 +14903,7 @@
                 <a:ea typeface="Calibri" pitchFamily="34" charset="-122"/>
                 <a:cs typeface="Calibri" pitchFamily="34" charset="-120"/>
               </a:rPr>
-              <a:t>global del módulo 31,5%</a:t>
+              <a:t>global del módulo 31,4%</a:t>
             </a:r>
             <a:endParaRPr lang="en-US" sz="1000" dirty="0"/>
           </a:p>
@@ -14826,7 +15161,7 @@
                 <a:ea typeface="Calibri" pitchFamily="34" charset="-122"/>
                 <a:cs typeface="Calibri" pitchFamily="34" charset="-120"/>
               </a:rPr>
-              <a:t>29 ab.</a:t>
+              <a:t>16 ab.</a:t>
             </a:r>
             <a:endParaRPr lang="en-US" sz="950" dirty="0"/>
           </a:p>
@@ -15041,7 +15376,7 @@
                 <a:ea typeface="Calibri" pitchFamily="34" charset="-122"/>
                 <a:cs typeface="Calibri" pitchFamily="34" charset="-120"/>
               </a:rPr>
-              <a:t>Fuente: Data_NCR.xlsx — hoja «Observaciones» · Corte 28-09-2026 · 514 registros desde 10-02-2023</a:t>
+              <a:t>Fuente: Data_NCR.xlsx — hoja «Observaciones» · Corte 05-10-2026 · 515 registros desde 10-02-2023</a:t>
             </a:r>
             <a:endParaRPr lang="en-US" sz="850" dirty="0"/>
           </a:p>
@@ -15292,7 +15627,7 @@
                 <a:ea typeface="Calibri" pitchFamily="34" charset="-122"/>
                 <a:cs typeface="Calibri" pitchFamily="34" charset="-120"/>
               </a:rPr>
-              <a:t>30 hallazgos siguen abiertos; 9 con más de 180 días. Se listan del más antiguo al más reciente.</a:t>
+              <a:t>17 hallazgos siguen abiertos; 8 con más de 180 días. Se listan del más antiguo al más reciente.</a:t>
             </a:r>
             <a:endParaRPr lang="en-US" sz="1350" dirty="0"/>
           </a:p>
@@ -15900,7 +16235,7 @@
                 <a:ea typeface="Calibri" pitchFamily="34" charset="-122"/>
                 <a:cs typeface="Calibri" pitchFamily="34" charset="-120"/>
               </a:rPr>
-              <a:t>347</a:t>
+              <a:t>354</a:t>
             </a:r>
             <a:endParaRPr lang="en-US" sz="1050" dirty="0"/>
           </a:p>
@@ -16255,7 +16590,7 @@
                 <a:ea typeface="Calibri" pitchFamily="34" charset="-122"/>
                 <a:cs typeface="Calibri" pitchFamily="34" charset="-120"/>
               </a:rPr>
-              <a:t>285</a:t>
+              <a:t>292</a:t>
             </a:r>
             <a:endParaRPr lang="en-US" sz="1050" dirty="0"/>
           </a:p>
@@ -16590,7 +16925,7 @@
                 <a:ea typeface="Calibri" pitchFamily="34" charset="-122"/>
                 <a:cs typeface="Calibri" pitchFamily="34" charset="-120"/>
               </a:rPr>
-              <a:t>256</a:t>
+              <a:t>263</a:t>
             </a:r>
             <a:endParaRPr lang="en-US" sz="1050" dirty="0"/>
           </a:p>
@@ -16945,7 +17280,7 @@
                 <a:ea typeface="Calibri" pitchFamily="34" charset="-122"/>
                 <a:cs typeface="Calibri" pitchFamily="34" charset="-120"/>
               </a:rPr>
-              <a:t>256</a:t>
+              <a:t>263</a:t>
             </a:r>
             <a:endParaRPr lang="en-US" sz="1050" dirty="0"/>
           </a:p>
@@ -17280,7 +17615,7 @@
                 <a:ea typeface="Calibri" pitchFamily="34" charset="-122"/>
                 <a:cs typeface="Calibri" pitchFamily="34" charset="-120"/>
               </a:rPr>
-              <a:t>235</a:t>
+              <a:t>242</a:t>
             </a:r>
             <a:endParaRPr lang="en-US" sz="1050" dirty="0"/>
           </a:p>
@@ -17635,7 +17970,7 @@
                 <a:ea typeface="Calibri" pitchFamily="34" charset="-122"/>
                 <a:cs typeface="Calibri" pitchFamily="34" charset="-120"/>
               </a:rPr>
-              <a:t>206</a:t>
+              <a:t>213</a:t>
             </a:r>
             <a:endParaRPr lang="en-US" sz="1050" dirty="0"/>
           </a:p>
@@ -17970,7 +18305,7 @@
                 <a:ea typeface="Calibri" pitchFamily="34" charset="-122"/>
                 <a:cs typeface="Calibri" pitchFamily="34" charset="-120"/>
               </a:rPr>
-              <a:t>202</a:t>
+              <a:t>209</a:t>
             </a:r>
             <a:endParaRPr lang="en-US" sz="1050" dirty="0"/>
           </a:p>
@@ -18325,7 +18660,7 @@
                 <a:ea typeface="Calibri" pitchFamily="34" charset="-122"/>
                 <a:cs typeface="Calibri" pitchFamily="34" charset="-120"/>
               </a:rPr>
-              <a:t>202</a:t>
+              <a:t>209</a:t>
             </a:r>
             <a:endParaRPr lang="en-US" sz="1050" dirty="0"/>
           </a:p>
@@ -18426,7 +18761,7 @@
                 <a:ea typeface="Calibri" pitchFamily="34" charset="-122"/>
                 <a:cs typeface="Calibri" pitchFamily="34" charset="-120"/>
               </a:rPr>
-              <a:t>MASA-71</a:t>
+              <a:t>MASA-73</a:t>
             </a:r>
             <a:endParaRPr lang="en-US" sz="1050" dirty="0"/>
           </a:p>
@@ -18621,7 +18956,7 @@
                 <a:ea typeface="Calibri" pitchFamily="34" charset="-122"/>
                 <a:cs typeface="Calibri" pitchFamily="34" charset="-120"/>
               </a:rPr>
-              <a:t>Listo para revisi…</a:t>
+              <a:t>Pendiente</a:t>
             </a:r>
             <a:endParaRPr lang="en-US" sz="1050" dirty="0"/>
           </a:p>
@@ -18652,15 +18987,15 @@
               <a:buNone/>
             </a:pPr>
             <a:r>
-              <a:rPr lang="en-US" sz="1050" b="1" dirty="0">
-                <a:solidFill>
-                  <a:srgbClr val="C0392B"/>
-                </a:solidFill>
-                <a:latin typeface="Calibri" pitchFamily="34" charset="0"/>
-                <a:ea typeface="Calibri" pitchFamily="34" charset="-122"/>
-                <a:cs typeface="Calibri" pitchFamily="34" charset="-120"/>
-              </a:rPr>
-              <a:t>196</a:t>
+              <a:rPr lang="en-US" sz="1050" dirty="0">
+                <a:solidFill>
+                  <a:srgbClr val="1A2433"/>
+                </a:solidFill>
+                <a:latin typeface="Calibri" pitchFamily="34" charset="0"/>
+                <a:ea typeface="Calibri" pitchFamily="34" charset="-122"/>
+                <a:cs typeface="Calibri" pitchFamily="34" charset="-120"/>
+              </a:rPr>
+              <a:t>179</a:t>
             </a:r>
             <a:endParaRPr lang="en-US" sz="1050" dirty="0"/>
           </a:p>
@@ -18699,7 +19034,7 @@
                 <a:ea typeface="Calibri" pitchFamily="34" charset="-122"/>
                 <a:cs typeface="Calibri" pitchFamily="34" charset="-120"/>
               </a:rPr>
-              <a:t>RETRABAJOS CIVILES EN SISTEMA MOTRI…</a:t>
+              <a:t>Condicioón fundación de riel grúa p…</a:t>
             </a:r>
             <a:endParaRPr lang="en-US" sz="1000" dirty="0"/>
           </a:p>
@@ -18761,7 +19096,7 @@
                 <a:ea typeface="Calibri" pitchFamily="34" charset="-122"/>
                 <a:cs typeface="Calibri" pitchFamily="34" charset="-120"/>
               </a:rPr>
-              <a:t>Se listan los 9 más antiguos de 30 abiertos; el detalle completo está en el panel.</a:t>
+              <a:t>Se listan los 9 más antiguos de 17 abiertos; el detalle completo está en el panel.</a:t>
             </a:r>
             <a:endParaRPr lang="en-US" sz="950" dirty="0"/>
           </a:p>
@@ -18822,7 +19157,7 @@
                 <a:ea typeface="Calibri" pitchFamily="34" charset="-122"/>
                 <a:cs typeface="Calibri" pitchFamily="34" charset="-120"/>
               </a:rPr>
-              <a:t>SEMANA 21-09-2026 — 27-09-2026</a:t>
+              <a:t>SEMANA 28-09-2026 — 04-10-2026</a:t>
             </a:r>
             <a:endParaRPr lang="en-US" sz="1000" dirty="0"/>
           </a:p>
@@ -18900,7 +19235,7 @@
                 <a:ea typeface="Calibri" pitchFamily="34" charset="-122"/>
                 <a:cs typeface="Calibri" pitchFamily="34" charset="-120"/>
               </a:rPr>
-              <a:t>Fuente: Data_NCR.xlsx — hoja «Observaciones» · Corte 28-09-2026 · 514 registros desde 10-02-2023</a:t>
+              <a:t>Fuente: Data_NCR.xlsx — hoja «Observaciones» · Corte 05-10-2026 · 515 registros desde 10-02-2023</a:t>
             </a:r>
             <a:endParaRPr lang="en-US" sz="850" dirty="0"/>
           </a:p>
@@ -19205,7 +19540,7 @@
                 <a:ea typeface="Cambria" pitchFamily="34" charset="-122"/>
                 <a:cs typeface="Cambria" pitchFamily="34" charset="-120"/>
               </a:rPr>
-              <a:t>93,6%</a:t>
+              <a:t>95,9%</a:t>
             </a:r>
             <a:endParaRPr lang="en-US" sz="4000" dirty="0"/>
           </a:p>
@@ -19244,7 +19579,7 @@
                 <a:ea typeface="Calibri" pitchFamily="34" charset="-122"/>
                 <a:cs typeface="Calibri" pitchFamily="34" charset="-120"/>
               </a:rPr>
-              <a:t>481/514</a:t>
+              <a:t>494/515</a:t>
             </a:r>
             <a:endParaRPr lang="en-US" sz="1400" dirty="0"/>
           </a:p>
@@ -19322,7 +19657,7 @@
                 <a:ea typeface="Calibri" pitchFamily="34" charset="-122"/>
                 <a:cs typeface="Calibri" pitchFamily="34" charset="-120"/>
               </a:rPr>
-              <a:t>33 abiertos · 9 con más de 180 días</a:t>
+              <a:t>21 abiertos · 8 con más de 180 días</a:t>
             </a:r>
             <a:endParaRPr lang="en-US" sz="950" dirty="0"/>
           </a:p>
@@ -19415,7 +19750,7 @@
                 <a:ea typeface="Cambria" pitchFamily="34" charset="-122"/>
                 <a:cs typeface="Cambria" pitchFamily="34" charset="-120"/>
               </a:rPr>
-              <a:t>33</a:t>
+              <a:t>21</a:t>
             </a:r>
             <a:endParaRPr lang="en-US" sz="4000" dirty="0"/>
           </a:p>
@@ -19454,7 +19789,7 @@
                 <a:ea typeface="Calibri" pitchFamily="34" charset="-122"/>
                 <a:cs typeface="Calibri" pitchFamily="34" charset="-120"/>
               </a:rPr>
-              <a:t>de 514 levantados</a:t>
+              <a:t>de 515 levantados</a:t>
             </a:r>
             <a:endParaRPr lang="en-US" sz="1400" dirty="0"/>
           </a:p>
@@ -19532,7 +19867,7 @@
                 <a:ea typeface="Calibri" pitchFamily="34" charset="-122"/>
                 <a:cs typeface="Calibri" pitchFamily="34" charset="-120"/>
               </a:rPr>
-              <a:t>3 iniciado · 23 listo para revisión · 5 observada · 2 pendiente</a:t>
+              <a:t>10 listo para revisión · 3 iniciado · 6 observada · 2 pendiente</a:t>
             </a:r>
             <a:endParaRPr lang="en-US" sz="950" dirty="0"/>
           </a:p>
@@ -19625,7 +19960,7 @@
                 <a:ea typeface="Cambria" pitchFamily="34" charset="-122"/>
                 <a:cs typeface="Cambria" pitchFamily="34" charset="-120"/>
               </a:rPr>
-              <a:t>31,5%</a:t>
+              <a:t>31,4%</a:t>
             </a:r>
             <a:endParaRPr lang="en-US" sz="4000" dirty="0"/>
           </a:p>
@@ -19664,7 +19999,7 @@
                 <a:ea typeface="Calibri" pitchFamily="34" charset="-122"/>
                 <a:cs typeface="Calibri" pitchFamily="34" charset="-120"/>
               </a:rPr>
-              <a:t>159/505 clasificados</a:t>
+              <a:t>159/506 clasificados</a:t>
             </a:r>
             <a:endParaRPr lang="en-US" sz="1400" dirty="0"/>
           </a:p>
@@ -19874,7 +20209,7 @@
                 <a:ea typeface="Calibri" pitchFamily="34" charset="-122"/>
                 <a:cs typeface="Calibri" pitchFamily="34" charset="-120"/>
               </a:rPr>
-              <a:t>251 de 514 con costo</a:t>
+              <a:t>251 de 515 con costo</a:t>
             </a:r>
             <a:endParaRPr lang="en-US" sz="1400" dirty="0"/>
           </a:p>
@@ -19952,7 +20287,7 @@
                 <a:ea typeface="Calibri" pitchFamily="34" charset="-122"/>
                 <a:cs typeface="Calibri" pitchFamily="34" charset="-120"/>
               </a:rPr>
-              <a:t>263 hallazgos no declaran costo: la cifra es un piso</a:t>
+              <a:t>264 hallazgos no declaran costo: la cifra es un piso</a:t>
             </a:r>
             <a:endParaRPr lang="en-US" sz="950" dirty="0"/>
           </a:p>
@@ -20092,7 +20427,7 @@
                 <a:ea typeface="Calibri" pitchFamily="34" charset="-122"/>
                 <a:cs typeface="Calibri" pitchFamily="34" charset="-120"/>
               </a:rPr>
-              <a:t>30 de los 33 hallazgos abiertos (90,9%), y es uno de los frentes donde el cliente levanta más de lo que detecta Besalco (79 del cliente contra 53 internas).</a:t>
+              <a:t>17 de los 21 hallazgos abiertos (81%), y es uno de los frentes donde el cliente levanta más de lo que detecta Besalco (79 del cliente contra 53 internas).</a:t>
             </a:r>
             <a:endParaRPr lang="en-US" sz="1250" dirty="0"/>
           </a:p>
@@ -20171,7 +20506,7 @@
                 <a:ea typeface="Calibri" pitchFamily="34" charset="-122"/>
                 <a:cs typeface="Calibri" pitchFamily="34" charset="-120"/>
               </a:rPr>
-              <a:t>21-09-2026 al 27-09-2026: 1 del cliente en CALIDAD (1). Todos siguen abiertos; la semana anterior entraron 4.</a:t>
+              <a:t>28-09-2026 al 04-10-2026: 1 del cliente en OO.CC (1). Todos siguen abiertos; la semana anterior entraron 1.</a:t>
             </a:r>
             <a:endParaRPr lang="en-US" sz="1250" dirty="0"/>
           </a:p>
@@ -20233,7 +20568,7 @@
                 <a:ea typeface="Calibri" pitchFamily="34" charset="-122"/>
                 <a:cs typeface="Calibri" pitchFamily="34" charset="-120"/>
               </a:rPr>
-              <a:t>32 de los 33 abiertos están fuera del plazo de respuesta.  </a:t>
+              <a:t>20 de los 21 abiertos están fuera del plazo de respuesta.  </a:t>
             </a:r>
             <a:pPr indent="0" marL="0">
               <a:lnSpc>
@@ -20250,7 +20585,7 @@
                 <a:ea typeface="Calibri" pitchFamily="34" charset="-122"/>
                 <a:cs typeface="Calibri" pitchFamily="34" charset="-120"/>
               </a:rPr>
-              <a:t>El plazo es de 10 días desde que se emite la NC. De los atrasados, 9 llevan más de 180 días abiertos y 0 más de un año: no es atraso de días, es deuda vieja.</a:t>
+              <a:t>El plazo es de 10 días desde que se emite la NC. De los atrasados, 8 llevan más de 180 días abiertos y 0 más de un año: no es atraso de días, es deuda vieja.</a:t>
             </a:r>
             <a:endParaRPr lang="en-US" sz="1250" dirty="0"/>
           </a:p>
@@ -20289,7 +20624,7 @@
                 <a:ea typeface="Calibri" pitchFamily="34" charset="-122"/>
                 <a:cs typeface="Calibri" pitchFamily="34" charset="-120"/>
               </a:rPr>
-              <a:t>Fuente: Data_NCR.xlsx — hoja «Observaciones» · Corte 28-09-2026 · 514 registros desde 10-02-2023</a:t>
+              <a:t>Fuente: Data_NCR.xlsx — hoja «Observaciones» · Corte 05-10-2026 · 515 registros desde 10-02-2023</a:t>
             </a:r>
             <a:endParaRPr lang="en-US" sz="850" dirty="0"/>
           </a:p>
@@ -21564,7 +21899,7 @@
                 <a:ea typeface="Calibri" pitchFamily="34" charset="-122"/>
                 <a:cs typeface="Calibri" pitchFamily="34" charset="-120"/>
               </a:rPr>
-              <a:t>252</a:t>
+              <a:t>253</a:t>
             </a:r>
             <a:endParaRPr lang="en-US" sz="1300" dirty="0"/>
           </a:p>
@@ -21642,7 +21977,7 @@
                 <a:ea typeface="Calibri" pitchFamily="34" charset="-122"/>
                 <a:cs typeface="Calibri" pitchFamily="34" charset="-120"/>
               </a:rPr>
-              <a:t>2</a:t>
+              <a:t>3</a:t>
             </a:r>
             <a:endParaRPr lang="en-US" sz="1300" dirty="0"/>
           </a:p>
@@ -21681,7 +22016,7 @@
                 <a:ea typeface="Calibri" pitchFamily="34" charset="-122"/>
                 <a:cs typeface="Calibri" pitchFamily="34" charset="-120"/>
               </a:rPr>
-              <a:t>99,2%</a:t>
+              <a:t>98,8%</a:t>
             </a:r>
             <a:endParaRPr lang="en-US" sz="1300" dirty="0"/>
           </a:p>
@@ -21759,7 +22094,7 @@
                 <a:ea typeface="Calibri" pitchFamily="34" charset="-122"/>
                 <a:cs typeface="Calibri" pitchFamily="34" charset="-120"/>
               </a:rPr>
-              <a:t>200</a:t>
+              <a:t>201</a:t>
             </a:r>
             <a:endParaRPr lang="en-US" sz="1300" dirty="0"/>
           </a:p>
@@ -22077,7 +22412,7 @@
                 <a:ea typeface="Calibri" pitchFamily="34" charset="-122"/>
                 <a:cs typeface="Calibri" pitchFamily="34" charset="-120"/>
               </a:rPr>
-              <a:t>142</a:t>
+              <a:t>155</a:t>
             </a:r>
             <a:endParaRPr lang="en-US" sz="1300" dirty="0"/>
           </a:p>
@@ -22116,7 +22451,7 @@
                 <a:ea typeface="Calibri" pitchFamily="34" charset="-122"/>
                 <a:cs typeface="Calibri" pitchFamily="34" charset="-120"/>
               </a:rPr>
-              <a:t>30</a:t>
+              <a:t>17</a:t>
             </a:r>
             <a:endParaRPr lang="en-US" sz="1300" dirty="0"/>
           </a:p>
@@ -22155,7 +22490,7 @@
                 <a:ea typeface="Calibri" pitchFamily="34" charset="-122"/>
                 <a:cs typeface="Calibri" pitchFamily="34" charset="-120"/>
               </a:rPr>
-              <a:t>82,6%</a:t>
+              <a:t>90,1%</a:t>
             </a:r>
             <a:endParaRPr lang="en-US" sz="1300" dirty="0"/>
           </a:p>
@@ -23006,7 +23341,7 @@
                 <a:ea typeface="Calibri" pitchFamily="34" charset="-122"/>
                 <a:cs typeface="Calibri" pitchFamily="34" charset="-120"/>
               </a:rPr>
-              <a:t>506</a:t>
+              <a:t>507</a:t>
             </a:r>
             <a:endParaRPr lang="en-US" sz="1300" dirty="0"/>
           </a:p>
@@ -23045,7 +23380,7 @@
                 <a:ea typeface="Calibri" pitchFamily="34" charset="-122"/>
                 <a:cs typeface="Calibri" pitchFamily="34" charset="-120"/>
               </a:rPr>
-              <a:t>473</a:t>
+              <a:t>486</a:t>
             </a:r>
             <a:endParaRPr lang="en-US" sz="1300" dirty="0"/>
           </a:p>
@@ -23084,7 +23419,7 @@
                 <a:ea typeface="Calibri" pitchFamily="34" charset="-122"/>
                 <a:cs typeface="Calibri" pitchFamily="34" charset="-120"/>
               </a:rPr>
-              <a:t>33</a:t>
+              <a:t>21</a:t>
             </a:r>
             <a:endParaRPr lang="en-US" sz="1300" dirty="0"/>
           </a:p>
@@ -23123,7 +23458,7 @@
                 <a:ea typeface="Calibri" pitchFamily="34" charset="-122"/>
                 <a:cs typeface="Calibri" pitchFamily="34" charset="-120"/>
               </a:rPr>
-              <a:t>93,5%</a:t>
+              <a:t>95,9%</a:t>
             </a:r>
             <a:endParaRPr lang="en-US" sz="1300" dirty="0"/>
           </a:p>
@@ -23201,7 +23536,7 @@
                 <a:ea typeface="Calibri" pitchFamily="34" charset="-122"/>
                 <a:cs typeface="Calibri" pitchFamily="34" charset="-120"/>
               </a:rPr>
-              <a:t>298</a:t>
+              <a:t>299</a:t>
             </a:r>
             <a:endParaRPr lang="en-US" sz="1300" dirty="0"/>
           </a:p>
@@ -23318,7 +23653,7 @@
                 <a:ea typeface="Calibri" pitchFamily="34" charset="-122"/>
                 <a:cs typeface="Calibri" pitchFamily="34" charset="-120"/>
               </a:rPr>
-              <a:t>Mediana de cierre global 31 días · el hallazgo más lento tomó 419 días · 8 hallazgos sin especialidad declarada.</a:t>
+              <a:t>Mediana de cierre global 33 días · el hallazgo más lento tomó 419 días · 8 hallazgos sin especialidad declarada.</a:t>
             </a:r>
             <a:endParaRPr lang="en-US" sz="950" dirty="0"/>
           </a:p>
@@ -23357,7 +23692,7 @@
                 <a:ea typeface="Calibri" pitchFamily="34" charset="-122"/>
                 <a:cs typeface="Calibri" pitchFamily="34" charset="-120"/>
               </a:rPr>
-              <a:t>Fuente: Data_NCR.xlsx — hoja «Observaciones» · Corte 28-09-2026 · 514 registros desde 10-02-2023</a:t>
+              <a:t>Fuente: Data_NCR.xlsx — hoja «Observaciones» · Corte 05-10-2026 · 515 registros desde 10-02-2023</a:t>
             </a:r>
             <a:endParaRPr lang="en-US" sz="850" dirty="0"/>
           </a:p>
@@ -23608,7 +23943,7 @@
                 <a:ea typeface="Calibri" pitchFamily="34" charset="-122"/>
                 <a:cs typeface="Calibri" pitchFamily="34" charset="-120"/>
               </a:rPr>
-              <a:t>Entre el 21-09-2026 y el 27-09-2026 se levantó 1 hallazgo: 0 internas · 1 del cliente. Sigue abierto.</a:t>
+              <a:t>Entre el 28-09-2026 y el 04-10-2026 se levantó 1 hallazgo: 0 internas · 1 del cliente. Sigue abierto.</a:t>
             </a:r>
             <a:endParaRPr lang="en-US" sz="1350" dirty="0"/>
           </a:p>
@@ -23763,7 +24098,7 @@
                 <a:ea typeface="Calibri" pitchFamily="34" charset="-122"/>
                 <a:cs typeface="Calibri" pitchFamily="34" charset="-120"/>
               </a:rPr>
-              <a:t>CALIDAD 1</a:t>
+              <a:t>OO.CC 1</a:t>
             </a:r>
             <a:endParaRPr lang="en-US" sz="1100" dirty="0"/>
           </a:p>
@@ -23997,7 +24332,7 @@
                 <a:ea typeface="Calibri" pitchFamily="34" charset="-122"/>
                 <a:cs typeface="Calibri" pitchFamily="34" charset="-120"/>
               </a:rPr>
-              <a:t>No Conformidad 1</a:t>
+              <a:t>Producto No Conforme 1</a:t>
             </a:r>
             <a:endParaRPr lang="en-US" sz="1100" dirty="0"/>
           </a:p>
@@ -24449,7 +24784,7 @@
                 <a:ea typeface="Calibri" pitchFamily="34" charset="-122"/>
                 <a:cs typeface="Calibri" pitchFamily="34" charset="-120"/>
               </a:rPr>
-              <a:t>23-09-2026</a:t>
+              <a:t>30-09-2026</a:t>
             </a:r>
             <a:endParaRPr lang="en-US" sz="1050" dirty="0"/>
           </a:p>
@@ -24527,7 +24862,7 @@
                 <a:ea typeface="Calibri" pitchFamily="34" charset="-122"/>
                 <a:cs typeface="Calibri" pitchFamily="34" charset="-120"/>
               </a:rPr>
-              <a:t>253 · RNC N°478</a:t>
+              <a:t>254 · PNC N°202</a:t>
             </a:r>
             <a:endParaRPr lang="en-US" sz="1050" dirty="0"/>
           </a:p>
@@ -24566,7 +24901,7 @@
                 <a:ea typeface="Calibri" pitchFamily="34" charset="-122"/>
                 <a:cs typeface="Calibri" pitchFamily="34" charset="-120"/>
               </a:rPr>
-              <a:t>No Conformidad</a:t>
+              <a:t>Producto No Confor…</a:t>
             </a:r>
             <a:endParaRPr lang="en-US" sz="1050" dirty="0"/>
           </a:p>
@@ -24644,7 +24979,7 @@
                 <a:ea typeface="Calibri" pitchFamily="34" charset="-122"/>
                 <a:cs typeface="Calibri" pitchFamily="34" charset="-120"/>
               </a:rPr>
-              <a:t>CALIDAD</a:t>
+              <a:t>OO.CC</a:t>
             </a:r>
             <a:endParaRPr lang="en-US" sz="1050" dirty="0"/>
           </a:p>
@@ -24683,7 +25018,7 @@
                 <a:ea typeface="Calibri" pitchFamily="34" charset="-122"/>
                 <a:cs typeface="Calibri" pitchFamily="34" charset="-120"/>
               </a:rPr>
-              <a:t>Mauricio Soto B.</a:t>
+              <a:t>Wladimir Carvaja…</a:t>
             </a:r>
             <a:endParaRPr lang="en-US" sz="1050" dirty="0"/>
           </a:p>
@@ -24761,7 +25096,7 @@
                 <a:ea typeface="Calibri" pitchFamily="34" charset="-122"/>
                 <a:cs typeface="Calibri" pitchFamily="34" charset="-120"/>
               </a:rPr>
-              <a:t>No se dispone de una planif…</a:t>
+              <a:t>Cortes no autorizados en la…</a:t>
             </a:r>
             <a:endParaRPr lang="en-US" sz="1000" dirty="0"/>
           </a:p>
@@ -24823,7 +25158,7 @@
                 <a:ea typeface="Calibri" pitchFamily="34" charset="-122"/>
                 <a:cs typeface="Calibri" pitchFamily="34" charset="-120"/>
               </a:rPr>
-              <a:t>Fuente: Data_NCR.xlsx — hoja «Observaciones» · Corte 28-09-2026 · 514 registros desde 10-02-2023</a:t>
+              <a:t>Fuente: Data_NCR.xlsx — hoja «Observaciones» · Corte 05-10-2026 · 515 registros desde 10-02-2023</a:t>
             </a:r>
             <a:endParaRPr lang="en-US" sz="850" dirty="0"/>
           </a:p>
@@ -25074,7 +25409,7 @@
                 <a:ea typeface="Calibri" pitchFamily="34" charset="-122"/>
                 <a:cs typeface="Calibri" pitchFamily="34" charset="-120"/>
               </a:rPr>
-              <a:t>Interna es autodetección: la levanta Besalco antes que nadie. Externa la levanta el cliente —compromete el contrato— o un subcontrato. Autodetección global: 31,5%.</a:t>
+              <a:t>Interna es autodetección: la levanta Besalco antes que nadie. Externa la levanta el cliente —compromete el contrato— o un subcontrato. Autodetección global: 31,4%.</a:t>
             </a:r>
             <a:endParaRPr lang="en-US" sz="1350" dirty="0"/>
           </a:p>
@@ -25819,7 +26154,7 @@
                 <a:ea typeface="Calibri" pitchFamily="34" charset="-122"/>
                 <a:cs typeface="Calibri" pitchFamily="34" charset="-120"/>
               </a:rPr>
-              <a:t>298</a:t>
+              <a:t>299</a:t>
             </a:r>
             <a:endParaRPr lang="en-US" sz="1050" dirty="0"/>
           </a:p>
@@ -25858,7 +26193,7 @@
                 <a:ea typeface="Calibri" pitchFamily="34" charset="-122"/>
                 <a:cs typeface="Calibri" pitchFamily="34" charset="-120"/>
               </a:rPr>
-              <a:t>267</a:t>
+              <a:t>280</a:t>
             </a:r>
             <a:endParaRPr lang="en-US" sz="1050" dirty="0"/>
           </a:p>
@@ -25897,7 +26232,7 @@
                 <a:ea typeface="Calibri" pitchFamily="34" charset="-122"/>
                 <a:cs typeface="Calibri" pitchFamily="34" charset="-120"/>
               </a:rPr>
-              <a:t>89,6%</a:t>
+              <a:t>93,6%</a:t>
             </a:r>
             <a:endParaRPr lang="en-US" sz="1050" dirty="0"/>
           </a:p>
@@ -25936,7 +26271,7 @@
                 <a:ea typeface="Calibri" pitchFamily="34" charset="-122"/>
                 <a:cs typeface="Calibri" pitchFamily="34" charset="-120"/>
               </a:rPr>
-              <a:t>31</a:t>
+              <a:t>19</a:t>
             </a:r>
             <a:endParaRPr lang="en-US" sz="1050" dirty="0"/>
           </a:p>
@@ -25975,7 +26310,7 @@
                 <a:ea typeface="Calibri" pitchFamily="34" charset="-122"/>
                 <a:cs typeface="Calibri" pitchFamily="34" charset="-120"/>
               </a:rPr>
-              <a:t>30</a:t>
+              <a:t>18</a:t>
             </a:r>
             <a:endParaRPr lang="en-US" sz="1050" dirty="0"/>
           </a:p>
@@ -26014,7 +26349,7 @@
                 <a:ea typeface="Calibri" pitchFamily="34" charset="-122"/>
                 <a:cs typeface="Calibri" pitchFamily="34" charset="-120"/>
               </a:rPr>
-              <a:t>63 días</a:t>
+              <a:t>65 días</a:t>
             </a:r>
             <a:endParaRPr lang="en-US" sz="1050" dirty="0"/>
           </a:p>
@@ -26727,7 +27062,7 @@
                 <a:ea typeface="Calibri" pitchFamily="34" charset="-122"/>
                 <a:cs typeface="Calibri" pitchFamily="34" charset="-120"/>
               </a:rPr>
-              <a:t>514</a:t>
+              <a:t>515</a:t>
             </a:r>
             <a:endParaRPr lang="en-US" sz="1050" dirty="0"/>
           </a:p>
@@ -26766,7 +27101,7 @@
                 <a:ea typeface="Calibri" pitchFamily="34" charset="-122"/>
                 <a:cs typeface="Calibri" pitchFamily="34" charset="-120"/>
               </a:rPr>
-              <a:t>481</a:t>
+              <a:t>494</a:t>
             </a:r>
             <a:endParaRPr lang="en-US" sz="1050" dirty="0"/>
           </a:p>
@@ -26805,7 +27140,7 @@
                 <a:ea typeface="Calibri" pitchFamily="34" charset="-122"/>
                 <a:cs typeface="Calibri" pitchFamily="34" charset="-120"/>
               </a:rPr>
-              <a:t>93,6%</a:t>
+              <a:t>95,9%</a:t>
             </a:r>
             <a:endParaRPr lang="en-US" sz="1050" dirty="0"/>
           </a:p>
@@ -26844,7 +27179,7 @@
                 <a:ea typeface="Calibri" pitchFamily="34" charset="-122"/>
                 <a:cs typeface="Calibri" pitchFamily="34" charset="-120"/>
               </a:rPr>
-              <a:t>33</a:t>
+              <a:t>21</a:t>
             </a:r>
             <a:endParaRPr lang="en-US" sz="1050" dirty="0"/>
           </a:p>
@@ -26883,7 +27218,7 @@
                 <a:ea typeface="Calibri" pitchFamily="34" charset="-122"/>
                 <a:cs typeface="Calibri" pitchFamily="34" charset="-120"/>
               </a:rPr>
-              <a:t>32</a:t>
+              <a:t>20</a:t>
             </a:r>
             <a:endParaRPr lang="en-US" sz="1050" dirty="0"/>
           </a:p>
@@ -27295,7 +27630,7 @@
                 <a:ea typeface="Calibri" pitchFamily="34" charset="-122"/>
                 <a:cs typeface="Calibri" pitchFamily="34" charset="-120"/>
               </a:rPr>
-              <a:t>Fuente: Data_NCR.xlsx — hoja «Observaciones» · Corte 28-09-2026 · 514 registros desde 10-02-2023</a:t>
+              <a:t>Fuente: Data_NCR.xlsx — hoja «Observaciones» · Corte 05-10-2026 · 515 registros desde 10-02-2023</a:t>
             </a:r>
             <a:endParaRPr lang="en-US" sz="850" dirty="0"/>
           </a:p>
@@ -27546,7 +27881,7 @@
                 <a:ea typeface="Calibri" pitchFamily="34" charset="-122"/>
                 <a:cs typeface="Calibri" pitchFamily="34" charset="-120"/>
               </a:rPr>
-              <a:t>De los 33 hallazgos abiertos, 9 llevan más de 180 días desde que se levantaron y 0 más de un año. La mediana de cierre global es de 31 días.</a:t>
+              <a:t>De los 21 hallazgos abiertos, 8 llevan más de 180 días desde que se levantaron y 0 más de un año. La mediana de cierre global es de 33 días.</a:t>
             </a:r>
             <a:endParaRPr lang="en-US" sz="1350" dirty="0"/>
           </a:p>
@@ -27683,7 +28018,7 @@
                 <a:ea typeface="Calibri" pitchFamily="34" charset="-122"/>
                 <a:cs typeface="Calibri" pitchFamily="34" charset="-120"/>
               </a:rPr>
-              <a:t>Al corte hay 32 hallazgos fuera de plazo de los 33 abiertos.</a:t>
+              <a:t>Al corte hay 20 hallazgos fuera de plazo de los 21 abiertos.</a:t>
             </a:r>
             <a:endParaRPr lang="en-US" sz="1150" dirty="0"/>
           </a:p>
@@ -28479,7 +28814,7 @@
                 <a:ea typeface="Calibri" pitchFamily="34" charset="-122"/>
                 <a:cs typeface="Calibri" pitchFamily="34" charset="-120"/>
               </a:rPr>
-              <a:t>2</a:t>
+              <a:t>3</a:t>
             </a:r>
             <a:endParaRPr lang="en-US" sz="1150" dirty="0"/>
           </a:p>
@@ -28608,7 +28943,7 @@
                 <a:ea typeface="Calibri" pitchFamily="34" charset="-122"/>
                 <a:cs typeface="Calibri" pitchFamily="34" charset="-120"/>
               </a:rPr>
-              <a:t>142</a:t>
+              <a:t>155</a:t>
             </a:r>
             <a:endParaRPr lang="en-US" sz="1150" dirty="0"/>
           </a:p>
@@ -28647,7 +28982,7 @@
                 <a:ea typeface="Calibri" pitchFamily="34" charset="-122"/>
                 <a:cs typeface="Calibri" pitchFamily="34" charset="-120"/>
               </a:rPr>
-              <a:t>142 d</a:t>
+              <a:t>140 d</a:t>
             </a:r>
             <a:endParaRPr lang="en-US" sz="1150" dirty="0"/>
           </a:p>
@@ -28725,7 +29060,7 @@
                 <a:ea typeface="Calibri" pitchFamily="34" charset="-122"/>
                 <a:cs typeface="Calibri" pitchFamily="34" charset="-120"/>
               </a:rPr>
-              <a:t>30</a:t>
+              <a:t>17</a:t>
             </a:r>
             <a:endParaRPr lang="en-US" sz="1150" dirty="0"/>
           </a:p>
@@ -29103,7 +29438,7 @@
                 <a:ea typeface="Calibri" pitchFamily="34" charset="-122"/>
                 <a:cs typeface="Calibri" pitchFamily="34" charset="-120"/>
               </a:rPr>
-              <a:t>Fuente: Data_NCR.xlsx — hoja «Observaciones» · Corte 28-09-2026 · 514 registros desde 10-02-2023</a:t>
+              <a:t>Fuente: Data_NCR.xlsx — hoja «Observaciones» · Corte 05-10-2026 · 515 registros desde 10-02-2023</a:t>
             </a:r>
             <a:endParaRPr lang="en-US" sz="850" dirty="0"/>
           </a:p>
@@ -29354,7 +29689,7 @@
                 <a:ea typeface="Calibri" pitchFamily="34" charset="-122"/>
                 <a:cs typeface="Calibri" pitchFamily="34" charset="-120"/>
               </a:rPr>
-              <a:t>10.613 UF declaradas entre nov-24 y sep-26, imputadas al mes en que se levantó cada hallazgo. Las declaran 108 de 503 hallazgos del período.</a:t>
+              <a:t>10.613 UF declaradas entre nov-24 y sep-26, imputadas al mes en que se levantó cada hallazgo. Las declaran 108 de 504 hallazgos del período.</a:t>
             </a:r>
             <a:endParaRPr lang="en-US" sz="1350" dirty="0"/>
           </a:p>
@@ -46855,7 +47190,7 @@
                           <a:ea typeface="Calibri" pitchFamily="34" charset="-122"/>
                           <a:cs typeface="Calibri" pitchFamily="34" charset="-120"/>
                         </a:rPr>
-                        <a:t>0/12</a:t>
+                        <a:t>0/13</a:t>
                       </a:r>
                       <a:endParaRPr lang="en-US" sz="750" dirty="0">
                         <a:latin typeface="Calibri" charset="0"/>
@@ -46923,7 +47258,7 @@
                           <a:ea typeface="Calibri" pitchFamily="34" charset="-122"/>
                           <a:cs typeface="Calibri" pitchFamily="34" charset="-120"/>
                         </a:rPr>
-                        <a:t>108/503</a:t>
+                        <a:t>108/504</a:t>
                       </a:r>
                       <a:endParaRPr lang="en-US" sz="750" dirty="0">
                         <a:latin typeface="Calibri" charset="0"/>
@@ -47587,7 +47922,7 @@
                 <a:ea typeface="Cambria" pitchFamily="34" charset="-122"/>
                 <a:cs typeface="Cambria" pitchFamily="34" charset="-120"/>
               </a:rPr>
-              <a:t>263</a:t>
+              <a:t>264</a:t>
             </a:r>
             <a:endParaRPr lang="en-US" sz="2100" dirty="0"/>
           </a:p>
@@ -47704,7 +48039,7 @@
                 <a:ea typeface="Calibri" pitchFamily="34" charset="-122"/>
                 <a:cs typeface="Calibri" pitchFamily="34" charset="-120"/>
               </a:rPr>
-              <a:t>Fuente: Data_NCR.xlsx — hoja «Observaciones» · Corte 28-09-2026 · 514 registros desde 10-02-2023</a:t>
+              <a:t>Fuente: Data_NCR.xlsx — hoja «Observaciones» · Corte 05-10-2026 · 515 registros desde 10-02-2023</a:t>
             </a:r>
             <a:endParaRPr lang="en-US" sz="850" dirty="0"/>
           </a:p>
@@ -48078,7 +48413,7 @@
                 <a:ea typeface="Calibri" pitchFamily="34" charset="-122"/>
                 <a:cs typeface="Calibri" pitchFamily="34" charset="-120"/>
               </a:rPr>
-              <a:t>30 de los 33 hallazgos abiertos (90,9%) y 82,6% de cierre, contra 93,6% global. Es la ruta crítica del módulo.</a:t>
+              <a:t>17 de los 21 hallazgos abiertos (81%) y 90,1% de cierre, contra 95,9% global. Es la ruta crítica del módulo.</a:t>
             </a:r>
             <a:endParaRPr lang="en-US" sz="1100" dirty="0"/>
           </a:p>
@@ -48320,7 +48655,7 @@
                 <a:ea typeface="Calibri" pitchFamily="34" charset="-122"/>
                 <a:cs typeface="Calibri" pitchFamily="34" charset="-120"/>
               </a:rPr>
-              <a:t>Sacar los 9 hallazgos sobre 180 días</a:t>
+              <a:t>Sacar los 8 hallazgos sobre 180 días</a:t>
             </a:r>
             <a:endParaRPr lang="en-US" sz="1400" dirty="0"/>
           </a:p>
@@ -48362,7 +48697,7 @@
                 <a:ea typeface="Calibri" pitchFamily="34" charset="-122"/>
                 <a:cs typeface="Calibri" pitchFamily="34" charset="-120"/>
               </a:rPr>
-              <a:t>0 de ellos superan el año abiertos. Los tienen a cargo Sin asignar (9). Es deuda antigua que no se cierra sola.</a:t>
+              <a:t>0 de ellos superan el año abiertos. Los tienen a cargo Sin asignar (8). Es deuda antigua que no se cierra sola.</a:t>
             </a:r>
             <a:endParaRPr lang="en-US" sz="1100" dirty="0"/>
           </a:p>
@@ -48462,7 +48797,7 @@
                 <a:ea typeface="Calibri" pitchFamily="34" charset="-122"/>
                 <a:cs typeface="Calibri" pitchFamily="34" charset="-120"/>
               </a:rPr>
-              <a:t>Responder las 32 que pasaron el plazo</a:t>
+              <a:t>Responder las 20 que pasaron el plazo</a:t>
             </a:r>
             <a:endParaRPr lang="en-US" sz="1400" dirty="0"/>
           </a:p>
@@ -48504,7 +48839,7 @@
                 <a:ea typeface="Calibri" pitchFamily="34" charset="-122"/>
                 <a:cs typeface="Calibri" pitchFamily="34" charset="-120"/>
               </a:rPr>
-              <a:t>El plazo es de 10 días desde la emisión y hoy lo incumplen 97% de los abiertos. Solo 1 siguen dentro de plazo.</a:t>
+              <a:t>El plazo es de 10 días desde la emisión y hoy lo incumplen 95,2% de los abiertos. Solo 1 siguen dentro de plazo.</a:t>
             </a:r>
             <a:endParaRPr lang="en-US" sz="1100" dirty="0"/>
           </a:p>
@@ -48543,7 +48878,7 @@
                 <a:ea typeface="Calibri" pitchFamily="34" charset="-122"/>
                 <a:cs typeface="Calibri" pitchFamily="34" charset="-120"/>
               </a:rPr>
-              <a:t>Fuente: Data_NCR.xlsx — hoja «Observaciones» · Corte 28-09-2026 · 514 registros desde 10-02-2023</a:t>
+              <a:t>Fuente: Data_NCR.xlsx — hoja «Observaciones» · Corte 05-10-2026 · 515 registros desde 10-02-2023</a:t>
             </a:r>
             <a:endParaRPr lang="en-US" sz="850" dirty="0"/>
           </a:p>
@@ -49267,7 +49602,7 @@
                 <a:ea typeface="Calibri" pitchFamily="34" charset="-122"/>
                 <a:cs typeface="Calibri" pitchFamily="34" charset="-120"/>
               </a:rPr>
-              <a:t>Corte: 28-09-2026</a:t>
+              <a:t>Corte: 05-10-2026</a:t>
             </a:r>
             <a:endParaRPr lang="en-US" sz="1100" dirty="0"/>
           </a:p>
@@ -49306,7 +49641,7 @@
                 <a:ea typeface="Calibri" pitchFamily="34" charset="-122"/>
                 <a:cs typeface="Calibri" pitchFamily="34" charset="-120"/>
               </a:rPr>
-              <a:t>Fuente: Data_NCR.xlsx — hoja «Observaciones» · Corte 28-09-2026 · 514 registros desde 10-02-2023</a:t>
+              <a:t>Fuente: Data_NCR.xlsx — hoja «Observaciones» · Corte 05-10-2026 · 515 registros desde 10-02-2023</a:t>
             </a:r>
             <a:endParaRPr lang="en-US" sz="850" dirty="0"/>
           </a:p>

--- a/modulo_nc/Panel_No_Conformidades.pptx
+++ b/modulo_nc/Panel_No_Conformidades.pptx
@@ -220,19 +220,19 @@
                     <c:v>3 sem.</c:v>
                   </c:pt>
                   <c:pt idx="1">
-                    <c:v>31-08</c:v>
+                    <c:v>07-09</c:v>
                   </c:pt>
                   <c:pt idx="2">
-                    <c:v>07-09</c:v>
+                    <c:v>14-09</c:v>
                   </c:pt>
                   <c:pt idx="3">
-                    <c:v>14-09</c:v>
+                    <c:v>21-09</c:v>
                   </c:pt>
                   <c:pt idx="4">
-                    <c:v>21-09</c:v>
+                    <c:v>28-09</c:v>
                   </c:pt>
                   <c:pt idx="5">
-                    <c:v>28-09</c:v>
+                    <c:v>05-10</c:v>
                   </c:pt>
                 </c:lvl>
               </c:multiLvlStrCache>
@@ -245,22 +245,22 @@
                 <c:formatCode>General</c:formatCode>
                 <c:ptCount val="6"/>
                 <c:pt idx="0">
+                  <c:v>2</c:v>
+                </c:pt>
+                <c:pt idx="1">
                   <c:v/>
                 </c:pt>
-                <c:pt idx="1">
-                  <c:v>2</c:v>
-                </c:pt>
                 <c:pt idx="2">
-                  <c:v/>
+                  <c:v>1</c:v>
                 </c:pt>
                 <c:pt idx="3">
                   <c:v>1</c:v>
                 </c:pt>
                 <c:pt idx="4">
-                  <c:v>1</c:v>
+                  <c:v/>
                 </c:pt>
                 <c:pt idx="5">
-                  <c:v>1</c:v>
+                  <c:v/>
                 </c:pt>
               </c:numCache>
             </c:numRef>
@@ -322,19 +322,19 @@
                     <c:v>3 sem.</c:v>
                   </c:pt>
                   <c:pt idx="1">
-                    <c:v>31-08</c:v>
+                    <c:v>07-09</c:v>
                   </c:pt>
                   <c:pt idx="2">
-                    <c:v>07-09</c:v>
+                    <c:v>14-09</c:v>
                   </c:pt>
                   <c:pt idx="3">
-                    <c:v>14-09</c:v>
+                    <c:v>21-09</c:v>
                   </c:pt>
                   <c:pt idx="4">
-                    <c:v>21-09</c:v>
+                    <c:v>28-09</c:v>
                   </c:pt>
                   <c:pt idx="5">
-                    <c:v>28-09</c:v>
+                    <c:v>05-10</c:v>
                   </c:pt>
                 </c:lvl>
               </c:multiLvlStrCache>
@@ -347,19 +347,19 @@
                 <c:formatCode>General</c:formatCode>
                 <c:ptCount val="6"/>
                 <c:pt idx="0">
-                  <c:v>7</c:v>
+                  <c:v>9</c:v>
                 </c:pt>
                 <c:pt idx="1">
-                  <c:v>5</c:v>
+                  <c:v/>
                 </c:pt>
                 <c:pt idx="2">
+                  <c:v>3</c:v>
+                </c:pt>
+                <c:pt idx="3">
                   <c:v/>
                 </c:pt>
-                <c:pt idx="3">
-                  <c:v>3</c:v>
-                </c:pt>
                 <c:pt idx="4">
-                  <c:v/>
+                  <c:v>1</c:v>
                 </c:pt>
                 <c:pt idx="5">
                   <c:v/>
@@ -1202,7 +1202,7 @@
                   <c:v>311</c:v>
                 </c:pt>
                 <c:pt idx="1">
-                  <c:v>125</c:v>
+                  <c:v>126</c:v>
                 </c:pt>
                 <c:pt idx="2">
                   <c:v>57</c:v>
@@ -1292,7 +1292,7 @@
                   <c:v>17</c:v>
                 </c:pt>
                 <c:pt idx="1">
-                  <c:v>1</c:v>
+                  <c:v/>
                 </c:pt>
                 <c:pt idx="2">
                   <c:v>3</c:v>
@@ -1487,7 +1487,7 @@
                 </a:solidFill>
                 <a:latin typeface="Calibri"/>
               </a:rPr>
-              <a:t>Antigüedad de los 21 hallazgos abiertos</a:t>
+              <a:t>Antigüedad de los 20 hallazgos abiertos</a:t>
             </a:r>
           </a:p>
         </c:rich>
@@ -1568,7 +1568,7 @@
                 <c:formatCode>General</c:formatCode>
                 <c:ptCount val="1"/>
                 <c:pt idx="0">
-                  <c:v>3</c:v>
+                  <c:v>2</c:v>
                 </c:pt>
               </c:numCache>
             </c:numRef>
@@ -1712,7 +1712,7 @@
                 <c:formatCode>General</c:formatCode>
                 <c:ptCount val="1"/>
                 <c:pt idx="0">
-                  <c:v>7</c:v>
+                  <c:v>6</c:v>
                 </c:pt>
               </c:numCache>
             </c:numRef>
@@ -1784,7 +1784,7 @@
                 <c:formatCode>General</c:formatCode>
                 <c:ptCount val="1"/>
                 <c:pt idx="0">
-                  <c:v>8</c:v>
+                  <c:v>9</c:v>
                 </c:pt>
               </c:numCache>
             </c:numRef>
@@ -2501,7 +2501,7 @@
                 <c:formatCode>General</c:formatCode>
                 <c:ptCount val="8"/>
                 <c:pt idx="0">
-                  <c:v>146</c:v>
+                  <c:v>147</c:v>
                 </c:pt>
                 <c:pt idx="1">
                   <c:v>26</c:v>
@@ -2615,7 +2615,7 @@
                 <c:formatCode>General</c:formatCode>
                 <c:ptCount val="8"/>
                 <c:pt idx="0">
-                  <c:v>2</c:v>
+                  <c:v>1</c:v>
                 </c:pt>
                 <c:pt idx="1">
                   <c:v>1</c:v>
@@ -5697,7 +5697,7 @@
                 <a:ea typeface="Cambria" pitchFamily="34" charset="-122"/>
                 <a:cs typeface="Cambria" pitchFamily="34" charset="-120"/>
               </a:rPr>
-              <a:t>95,9%</a:t>
+              <a:t>96,1%</a:t>
             </a:r>
             <a:endParaRPr lang="en-US" sz="3400" dirty="0"/>
           </a:p>
@@ -5775,7 +5775,7 @@
                 <a:ea typeface="Cambria" pitchFamily="34" charset="-122"/>
                 <a:cs typeface="Cambria" pitchFamily="34" charset="-120"/>
               </a:rPr>
-              <a:t>21</a:t>
+              <a:t>20</a:t>
             </a:r>
             <a:endParaRPr lang="en-US" sz="3400" dirty="0"/>
           </a:p>
@@ -5853,7 +5853,7 @@
                 <a:ea typeface="Cambria" pitchFamily="34" charset="-122"/>
                 <a:cs typeface="Cambria" pitchFamily="34" charset="-120"/>
               </a:rPr>
-              <a:t>33 d</a:t>
+              <a:t>32 d</a:t>
             </a:r>
             <a:endParaRPr lang="en-US" sz="3400" dirty="0"/>
           </a:p>
@@ -6009,7 +6009,7 @@
                 <a:ea typeface="Calibri" pitchFamily="34" charset="-122"/>
                 <a:cs typeface="Calibri" pitchFamily="34" charset="-120"/>
               </a:rPr>
-              <a:t>Corte: 05-10-2026</a:t>
+              <a:t>Corte: 12-10-2026</a:t>
             </a:r>
             <a:endParaRPr lang="en-US" sz="1100" dirty="0"/>
           </a:p>
@@ -6048,7 +6048,7 @@
                 <a:ea typeface="Calibri" pitchFamily="34" charset="-122"/>
                 <a:cs typeface="Calibri" pitchFamily="34" charset="-120"/>
               </a:rPr>
-              <a:t>Fuente: Data_NCR.xlsx — hoja «Observaciones» · Corte 05-10-2026 · 515 registros desde 10-02-2023</a:t>
+              <a:t>Fuente: Data_NCR.xlsx — hoja «Observaciones» · Corte 12-10-2026 · 515 registros desde 10-02-2023</a:t>
             </a:r>
             <a:endParaRPr lang="en-US" sz="850" dirty="0"/>
           </a:p>
@@ -6641,7 +6641,7 @@
                 <a:ea typeface="Calibri" pitchFamily="34" charset="-122"/>
                 <a:cs typeface="Calibri" pitchFamily="34" charset="-120"/>
               </a:rPr>
-              <a:t>Global del módulo: 95,9%</a:t>
+              <a:t>Global del módulo: 96,1%</a:t>
             </a:r>
             <a:endParaRPr lang="en-US" sz="950" dirty="0"/>
           </a:p>
@@ -7849,7 +7849,7 @@
                 <a:ea typeface="Calibri" pitchFamily="34" charset="-122"/>
                 <a:cs typeface="Calibri" pitchFamily="34" charset="-120"/>
               </a:rPr>
-              <a:t>Fuente: Data_NCR.xlsx — hoja «Observaciones» · Corte 05-10-2026 · 515 registros desde 10-02-2023</a:t>
+              <a:t>Fuente: Data_NCR.xlsx — hoja «Observaciones» · Corte 12-10-2026 · 515 registros desde 10-02-2023</a:t>
             </a:r>
             <a:endParaRPr lang="en-US" sz="850" dirty="0"/>
           </a:p>
@@ -8708,7 +8708,7 @@
                 <a:ea typeface="Calibri" pitchFamily="34" charset="-122"/>
                 <a:cs typeface="Calibri" pitchFamily="34" charset="-120"/>
               </a:rPr>
-              <a:t>146</a:t>
+              <a:t>153</a:t>
             </a:r>
             <a:endParaRPr lang="en-US" sz="1050" dirty="0"/>
           </a:p>
@@ -8831,7 +8831,7 @@
                 <a:ea typeface="Calibri" pitchFamily="34" charset="-122"/>
                 <a:cs typeface="Calibri" pitchFamily="34" charset="-120"/>
               </a:rPr>
-              <a:t>SEMANA 28-09-2026 — 04-10-2026</a:t>
+              <a:t>SEMANA 05-10-2026 — 11-10-2026</a:t>
             </a:r>
             <a:endParaRPr lang="en-US" sz="1000" dirty="0"/>
           </a:p>
@@ -8909,7 +8909,7 @@
                 <a:ea typeface="Calibri" pitchFamily="34" charset="-122"/>
                 <a:cs typeface="Calibri" pitchFamily="34" charset="-120"/>
               </a:rPr>
-              <a:t>Fuente: Data_NCR.xlsx — hoja «Observaciones» · Corte 05-10-2026 · 515 registros desde 10-02-2023</a:t>
+              <a:t>Fuente: Data_NCR.xlsx — hoja «Observaciones» · Corte 12-10-2026 · 515 registros desde 10-02-2023</a:t>
             </a:r>
             <a:endParaRPr lang="en-US" sz="850" dirty="0"/>
           </a:p>
@@ -9321,7 +9321,7 @@
                 <a:ea typeface="Cambria" pitchFamily="34" charset="-122"/>
                 <a:cs typeface="Cambria" pitchFamily="34" charset="-120"/>
               </a:rPr>
-              <a:t>98,8%</a:t>
+              <a:t>99,2%</a:t>
             </a:r>
             <a:endParaRPr lang="en-US" sz="3400" dirty="0"/>
           </a:p>
@@ -9399,7 +9399,7 @@
                 <a:ea typeface="Cambria" pitchFamily="34" charset="-122"/>
                 <a:cs typeface="Cambria" pitchFamily="34" charset="-120"/>
               </a:rPr>
-              <a:t>3</a:t>
+              <a:t>2</a:t>
             </a:r>
             <a:endParaRPr lang="en-US" sz="3400" dirty="0"/>
           </a:p>
@@ -9633,7 +9633,7 @@
                 <a:ea typeface="Calibri" pitchFamily="34" charset="-122"/>
                 <a:cs typeface="Calibri" pitchFamily="34" charset="-120"/>
               </a:rPr>
-              <a:t>Corte: 05-10-2026</a:t>
+              <a:t>Corte: 12-10-2026</a:t>
             </a:r>
             <a:endParaRPr lang="en-US" sz="1100" dirty="0"/>
           </a:p>
@@ -9672,7 +9672,7 @@
                 <a:ea typeface="Calibri" pitchFamily="34" charset="-122"/>
                 <a:cs typeface="Calibri" pitchFamily="34" charset="-120"/>
               </a:rPr>
-              <a:t>Fuente: Data_NCR.xlsx — hoja «Observaciones» · Corte 05-10-2026 · 515 registros desde 10-02-2023</a:t>
+              <a:t>Fuente: Data_NCR.xlsx — hoja «Observaciones» · Corte 12-10-2026 · 515 registros desde 10-02-2023</a:t>
             </a:r>
             <a:endParaRPr lang="en-US" sz="850" dirty="0"/>
           </a:p>
@@ -9977,7 +9977,7 @@
                 <a:ea typeface="Calibri" pitchFamily="34" charset="-122"/>
                 <a:cs typeface="Calibri" pitchFamily="34" charset="-120"/>
               </a:rPr>
-              <a:t>250 cerrados</a:t>
+              <a:t>251 cerrados</a:t>
             </a:r>
             <a:endParaRPr lang="en-US" sz="1400" dirty="0"/>
           </a:p>
@@ -10148,7 +10148,7 @@
                 <a:ea typeface="Cambria" pitchFamily="34" charset="-122"/>
                 <a:cs typeface="Cambria" pitchFamily="34" charset="-120"/>
               </a:rPr>
-              <a:t>98,8%</a:t>
+              <a:t>99,2%</a:t>
             </a:r>
             <a:endParaRPr lang="en-US" sz="4000" dirty="0"/>
           </a:p>
@@ -10187,7 +10187,7 @@
                 <a:ea typeface="Calibri" pitchFamily="34" charset="-122"/>
                 <a:cs typeface="Calibri" pitchFamily="34" charset="-120"/>
               </a:rPr>
-              <a:t>250/253</a:t>
+              <a:t>251/253</a:t>
             </a:r>
             <a:endParaRPr lang="en-US" sz="1400" dirty="0"/>
           </a:p>
@@ -10265,7 +10265,7 @@
                 <a:ea typeface="Calibri" pitchFamily="34" charset="-122"/>
                 <a:cs typeface="Calibri" pitchFamily="34" charset="-120"/>
               </a:rPr>
-              <a:t>Global del módulo: 95,9%</a:t>
+              <a:t>Global del módulo: 96,1%</a:t>
             </a:r>
             <a:endParaRPr lang="en-US" sz="950" dirty="0"/>
           </a:p>
@@ -10358,7 +10358,7 @@
                 <a:ea typeface="Cambria" pitchFamily="34" charset="-122"/>
                 <a:cs typeface="Cambria" pitchFamily="34" charset="-120"/>
               </a:rPr>
-              <a:t>3</a:t>
+              <a:t>2</a:t>
             </a:r>
             <a:endParaRPr lang="en-US" sz="4000" dirty="0"/>
           </a:p>
@@ -10475,7 +10475,7 @@
                 <a:ea typeface="Calibri" pitchFamily="34" charset="-122"/>
                 <a:cs typeface="Calibri" pitchFamily="34" charset="-120"/>
               </a:rPr>
-              <a:t>1 listo para revisión · 2 iniciado</a:t>
+              <a:t>2 listo para revisión</a:t>
             </a:r>
             <a:endParaRPr lang="en-US" sz="950" dirty="0"/>
           </a:p>
@@ -11121,7 +11121,7 @@
                 <a:ea typeface="Calibri" pitchFamily="34" charset="-122"/>
                 <a:cs typeface="Calibri" pitchFamily="34" charset="-120"/>
               </a:rPr>
-              <a:t>3 ab.</a:t>
+              <a:t>2 ab.</a:t>
             </a:r>
             <a:endParaRPr lang="en-US" sz="950" dirty="0"/>
           </a:p>
@@ -11199,7 +11199,7 @@
                 <a:ea typeface="Calibri" pitchFamily="34" charset="-122"/>
                 <a:cs typeface="Calibri" pitchFamily="34" charset="-120"/>
               </a:rPr>
-              <a:t>Fuente: Data_NCR.xlsx — hoja «Observaciones» · Corte 05-10-2026 · 515 registros desde 10-02-2023</a:t>
+              <a:t>Fuente: Data_NCR.xlsx — hoja «Observaciones» · Corte 12-10-2026 · 515 registros desde 10-02-2023</a:t>
             </a:r>
             <a:endParaRPr lang="en-US" sz="850" dirty="0"/>
           </a:p>
@@ -11450,7 +11450,7 @@
                 <a:ea typeface="Calibri" pitchFamily="34" charset="-122"/>
                 <a:cs typeface="Calibri" pitchFamily="34" charset="-120"/>
               </a:rPr>
-              <a:t>3 hallazgos siguen abiertos; 0 con más de 180 días. Se listan del más antiguo al más reciente.</a:t>
+              <a:t>2 hallazgos siguen abiertos; 0 con más de 180 días. Se listan del más antiguo al más reciente.</a:t>
             </a:r>
             <a:endParaRPr lang="en-US" sz="1350" dirty="0"/>
           </a:p>
@@ -12058,7 +12058,7 @@
                 <a:ea typeface="Calibri" pitchFamily="34" charset="-122"/>
                 <a:cs typeface="Calibri" pitchFamily="34" charset="-120"/>
               </a:rPr>
-              <a:t>97</a:t>
+              <a:t>104</a:t>
             </a:r>
             <a:endParaRPr lang="en-US" sz="1050" dirty="0"/>
           </a:p>
@@ -12374,7 +12374,7 @@
                 <a:ea typeface="Calibri" pitchFamily="34" charset="-122"/>
                 <a:cs typeface="Calibri" pitchFamily="34" charset="-120"/>
               </a:rPr>
-              <a:t>Iniciado</a:t>
+              <a:t>Listo para revisi…</a:t>
             </a:r>
             <a:endParaRPr lang="en-US" sz="1050" dirty="0"/>
           </a:p>
@@ -12413,7 +12413,7 @@
                 <a:ea typeface="Calibri" pitchFamily="34" charset="-122"/>
                 <a:cs typeface="Calibri" pitchFamily="34" charset="-120"/>
               </a:rPr>
-              <a:t>12</a:t>
+              <a:t>19</a:t>
             </a:r>
             <a:endParaRPr lang="en-US" sz="1050" dirty="0"/>
           </a:p>
@@ -12483,342 +12483,7 @@
       </p:sp>
       <p:sp>
         <p:nvSpPr>
-          <p:cNvPr id="34" name="Text 31"/>
-          <p:cNvSpPr/>
-          <p:nvPr/>
-        </p:nvSpPr>
-        <p:spPr>
-          <a:xfrm>
-            <a:off x="502920" y="3008376"/>
-            <a:ext cx="822960" cy="256032"/>
-          </a:xfrm>
-          <a:prstGeom prst="rect">
-            <a:avLst/>
-          </a:prstGeom>
-          <a:noFill/>
-          <a:ln/>
-        </p:spPr>
-        <p:txBody>
-          <a:bodyPr wrap="square" lIns="0" tIns="0" rIns="0" bIns="0" rtlCol="0" anchor="ctr"/>
-          <a:lstStyle/>
-          <a:p>
-            <a:pPr algn="l" indent="0" marL="0">
-              <a:buNone/>
-            </a:pPr>
-            <a:r>
-              <a:rPr lang="en-US" sz="1050" dirty="0">
-                <a:solidFill>
-                  <a:srgbClr val="1A2433"/>
-                </a:solidFill>
-                <a:latin typeface="Calibri" pitchFamily="34" charset="0"/>
-                <a:ea typeface="Calibri" pitchFamily="34" charset="-122"/>
-                <a:cs typeface="Calibri" pitchFamily="34" charset="-120"/>
-              </a:rPr>
-              <a:t>254</a:t>
-            </a:r>
-            <a:endParaRPr lang="en-US" sz="1050" dirty="0"/>
-          </a:p>
-        </p:txBody>
-      </p:sp>
-      <p:sp>
-        <p:nvSpPr>
-          <p:cNvPr id="35" name="Text 32"/>
-          <p:cNvSpPr/>
-          <p:nvPr/>
-        </p:nvSpPr>
-        <p:spPr>
-          <a:xfrm>
-            <a:off x="1371600" y="3008376"/>
-            <a:ext cx="1508760" cy="256032"/>
-          </a:xfrm>
-          <a:prstGeom prst="rect">
-            <a:avLst/>
-          </a:prstGeom>
-          <a:noFill/>
-          <a:ln/>
-        </p:spPr>
-        <p:txBody>
-          <a:bodyPr wrap="square" lIns="0" tIns="0" rIns="0" bIns="0" rtlCol="0" anchor="ctr"/>
-          <a:lstStyle/>
-          <a:p>
-            <a:pPr algn="l" indent="0" marL="0">
-              <a:buNone/>
-            </a:pPr>
-            <a:r>
-              <a:rPr lang="en-US" sz="1050" dirty="0">
-                <a:solidFill>
-                  <a:srgbClr val="1A2433"/>
-                </a:solidFill>
-                <a:latin typeface="Calibri" pitchFamily="34" charset="0"/>
-                <a:ea typeface="Calibri" pitchFamily="34" charset="-122"/>
-                <a:cs typeface="Calibri" pitchFamily="34" charset="-120"/>
-              </a:rPr>
-              <a:t>Producto No Conforme</a:t>
-            </a:r>
-            <a:endParaRPr lang="en-US" sz="1050" dirty="0"/>
-          </a:p>
-        </p:txBody>
-      </p:sp>
-      <p:sp>
-        <p:nvSpPr>
-          <p:cNvPr id="36" name="Text 33"/>
-          <p:cNvSpPr/>
-          <p:nvPr/>
-        </p:nvSpPr>
-        <p:spPr>
-          <a:xfrm>
-            <a:off x="2926080" y="3008376"/>
-            <a:ext cx="1463040" cy="256032"/>
-          </a:xfrm>
-          <a:prstGeom prst="rect">
-            <a:avLst/>
-          </a:prstGeom>
-          <a:noFill/>
-          <a:ln/>
-        </p:spPr>
-        <p:txBody>
-          <a:bodyPr wrap="square" lIns="0" tIns="0" rIns="0" bIns="0" rtlCol="0" anchor="ctr"/>
-          <a:lstStyle/>
-          <a:p>
-            <a:pPr algn="l" indent="0" marL="0">
-              <a:buNone/>
-            </a:pPr>
-            <a:r>
-              <a:rPr lang="en-US" sz="1050" b="1" dirty="0">
-                <a:solidFill>
-                  <a:srgbClr val="C87A32"/>
-                </a:solidFill>
-                <a:latin typeface="Calibri" pitchFamily="34" charset="0"/>
-                <a:ea typeface="Calibri" pitchFamily="34" charset="-122"/>
-                <a:cs typeface="Calibri" pitchFamily="34" charset="-120"/>
-              </a:rPr>
-              <a:t>Externa · Cliente</a:t>
-            </a:r>
-            <a:endParaRPr lang="en-US" sz="1050" dirty="0"/>
-          </a:p>
-        </p:txBody>
-      </p:sp>
-      <p:sp>
-        <p:nvSpPr>
-          <p:cNvPr id="37" name="Text 34"/>
-          <p:cNvSpPr/>
-          <p:nvPr/>
-        </p:nvSpPr>
-        <p:spPr>
-          <a:xfrm>
-            <a:off x="4434840" y="3008376"/>
-            <a:ext cx="1280160" cy="256032"/>
-          </a:xfrm>
-          <a:prstGeom prst="rect">
-            <a:avLst/>
-          </a:prstGeom>
-          <a:noFill/>
-          <a:ln/>
-        </p:spPr>
-        <p:txBody>
-          <a:bodyPr wrap="square" lIns="0" tIns="0" rIns="0" bIns="0" rtlCol="0" anchor="ctr"/>
-          <a:lstStyle/>
-          <a:p>
-            <a:pPr algn="l" indent="0" marL="0">
-              <a:buNone/>
-            </a:pPr>
-            <a:r>
-              <a:rPr lang="en-US" sz="1050" dirty="0">
-                <a:solidFill>
-                  <a:srgbClr val="1A2433"/>
-                </a:solidFill>
-                <a:latin typeface="Calibri" pitchFamily="34" charset="0"/>
-                <a:ea typeface="Calibri" pitchFamily="34" charset="-122"/>
-                <a:cs typeface="Calibri" pitchFamily="34" charset="-120"/>
-              </a:rPr>
-              <a:t>OO.CC</a:t>
-            </a:r>
-            <a:endParaRPr lang="en-US" sz="1050" dirty="0"/>
-          </a:p>
-        </p:txBody>
-      </p:sp>
-      <p:sp>
-        <p:nvSpPr>
-          <p:cNvPr id="38" name="Text 35"/>
-          <p:cNvSpPr/>
-          <p:nvPr/>
-        </p:nvSpPr>
-        <p:spPr>
-          <a:xfrm>
-            <a:off x="5760720" y="3008376"/>
-            <a:ext cx="1508760" cy="256032"/>
-          </a:xfrm>
-          <a:prstGeom prst="rect">
-            <a:avLst/>
-          </a:prstGeom>
-          <a:noFill/>
-          <a:ln/>
-        </p:spPr>
-        <p:txBody>
-          <a:bodyPr wrap="square" lIns="0" tIns="0" rIns="0" bIns="0" rtlCol="0" anchor="ctr"/>
-          <a:lstStyle/>
-          <a:p>
-            <a:pPr algn="l" indent="0" marL="0">
-              <a:buNone/>
-            </a:pPr>
-            <a:r>
-              <a:rPr lang="en-US" sz="1050" dirty="0">
-                <a:solidFill>
-                  <a:srgbClr val="1A2433"/>
-                </a:solidFill>
-                <a:latin typeface="Calibri" pitchFamily="34" charset="0"/>
-                <a:ea typeface="Calibri" pitchFamily="34" charset="-122"/>
-                <a:cs typeface="Calibri" pitchFamily="34" charset="-120"/>
-              </a:rPr>
-              <a:t>Wladimir Carvajal …</a:t>
-            </a:r>
-            <a:endParaRPr lang="en-US" sz="1050" dirty="0"/>
-          </a:p>
-        </p:txBody>
-      </p:sp>
-      <p:sp>
-        <p:nvSpPr>
-          <p:cNvPr id="39" name="Text 36"/>
-          <p:cNvSpPr/>
-          <p:nvPr/>
-        </p:nvSpPr>
-        <p:spPr>
-          <a:xfrm>
-            <a:off x="7315200" y="3008376"/>
-            <a:ext cx="1325880" cy="256032"/>
-          </a:xfrm>
-          <a:prstGeom prst="rect">
-            <a:avLst/>
-          </a:prstGeom>
-          <a:noFill/>
-          <a:ln/>
-        </p:spPr>
-        <p:txBody>
-          <a:bodyPr wrap="square" lIns="0" tIns="0" rIns="0" bIns="0" rtlCol="0" anchor="ctr"/>
-          <a:lstStyle/>
-          <a:p>
-            <a:pPr algn="l" indent="0" marL="0">
-              <a:buNone/>
-            </a:pPr>
-            <a:r>
-              <a:rPr lang="en-US" sz="1050" dirty="0">
-                <a:solidFill>
-                  <a:srgbClr val="1A2433"/>
-                </a:solidFill>
-                <a:latin typeface="Calibri" pitchFamily="34" charset="0"/>
-                <a:ea typeface="Calibri" pitchFamily="34" charset="-122"/>
-                <a:cs typeface="Calibri" pitchFamily="34" charset="-120"/>
-              </a:rPr>
-              <a:t>Iniciado</a:t>
-            </a:r>
-            <a:endParaRPr lang="en-US" sz="1050" dirty="0"/>
-          </a:p>
-        </p:txBody>
-      </p:sp>
-      <p:sp>
-        <p:nvSpPr>
-          <p:cNvPr id="40" name="Text 37"/>
-          <p:cNvSpPr/>
-          <p:nvPr/>
-        </p:nvSpPr>
-        <p:spPr>
-          <a:xfrm>
-            <a:off x="8686800" y="3008376"/>
-            <a:ext cx="640080" cy="256032"/>
-          </a:xfrm>
-          <a:prstGeom prst="rect">
-            <a:avLst/>
-          </a:prstGeom>
-          <a:noFill/>
-          <a:ln/>
-        </p:spPr>
-        <p:txBody>
-          <a:bodyPr wrap="square" lIns="0" tIns="0" rIns="0" bIns="0" rtlCol="0" anchor="ctr"/>
-          <a:lstStyle/>
-          <a:p>
-            <a:pPr algn="r" indent="0" marL="0">
-              <a:buNone/>
-            </a:pPr>
-            <a:r>
-              <a:rPr lang="en-US" sz="1050" dirty="0">
-                <a:solidFill>
-                  <a:srgbClr val="1A2433"/>
-                </a:solidFill>
-                <a:latin typeface="Calibri" pitchFamily="34" charset="0"/>
-                <a:ea typeface="Calibri" pitchFamily="34" charset="-122"/>
-                <a:cs typeface="Calibri" pitchFamily="34" charset="-120"/>
-              </a:rPr>
-              <a:t>5</a:t>
-            </a:r>
-            <a:endParaRPr lang="en-US" sz="1050" dirty="0"/>
-          </a:p>
-        </p:txBody>
-      </p:sp>
-      <p:sp>
-        <p:nvSpPr>
-          <p:cNvPr id="41" name="Text 38"/>
-          <p:cNvSpPr/>
-          <p:nvPr/>
-        </p:nvSpPr>
-        <p:spPr>
-          <a:xfrm>
-            <a:off x="9464040" y="3008376"/>
-            <a:ext cx="2286000" cy="256032"/>
-          </a:xfrm>
-          <a:prstGeom prst="rect">
-            <a:avLst/>
-          </a:prstGeom>
-          <a:noFill/>
-          <a:ln/>
-        </p:spPr>
-        <p:txBody>
-          <a:bodyPr wrap="square" lIns="0" tIns="0" rIns="0" bIns="0" rtlCol="0" anchor="ctr"/>
-          <a:lstStyle/>
-          <a:p>
-            <a:pPr algn="l" indent="0" marL="0">
-              <a:buNone/>
-            </a:pPr>
-            <a:r>
-              <a:rPr lang="en-US" sz="1000" dirty="0">
-                <a:solidFill>
-                  <a:srgbClr val="1A2433"/>
-                </a:solidFill>
-                <a:latin typeface="Calibri" pitchFamily="34" charset="0"/>
-                <a:ea typeface="Calibri" pitchFamily="34" charset="-122"/>
-                <a:cs typeface="Calibri" pitchFamily="34" charset="-120"/>
-              </a:rPr>
-              <a:t>Cortes no autorizados en la lámina …</a:t>
-            </a:r>
-            <a:endParaRPr lang="en-US" sz="1000" dirty="0"/>
-          </a:p>
-        </p:txBody>
-      </p:sp>
-      <p:sp>
-        <p:nvSpPr>
-          <p:cNvPr id="42" name="Shape 39"/>
-          <p:cNvSpPr/>
-          <p:nvPr/>
-        </p:nvSpPr>
-        <p:spPr>
-          <a:xfrm>
-            <a:off x="502920" y="3300984"/>
-            <a:ext cx="11247120" cy="0"/>
-          </a:xfrm>
-          <a:prstGeom prst="line">
-            <a:avLst/>
-          </a:prstGeom>
-          <a:noFill/>
-          <a:ln w="9525">
-            <a:solidFill>
-              <a:srgbClr val="D9DFE6"/>
-            </a:solidFill>
-            <a:prstDash val="solid"/>
-          </a:ln>
-        </p:spPr>
-      </p:sp>
-      <p:sp>
-        <p:nvSpPr>
-          <p:cNvPr id="43" name="Shape 40"/>
+          <p:cNvPr id="34" name="Shape 31"/>
           <p:cNvSpPr/>
           <p:nvPr/>
         </p:nvSpPr>
@@ -12833,14 +12498,14 @@
             </a:avLst>
           </a:prstGeom>
           <a:solidFill>
-            <a:srgbClr val="12233B"/>
+            <a:srgbClr val="E9EDF2"/>
           </a:solidFill>
           <a:ln/>
         </p:spPr>
       </p:sp>
       <p:sp>
         <p:nvSpPr>
-          <p:cNvPr id="44" name="Text 41"/>
+          <p:cNvPr id="35" name="Text 32"/>
           <p:cNvSpPr/>
           <p:nvPr/>
         </p:nvSpPr>
@@ -12865,13 +12530,13 @@
             <a:r>
               <a:rPr lang="en-US" sz="1000" b="1" spc="100" kern="0" dirty="0">
                 <a:solidFill>
-                  <a:srgbClr val="E3A55B"/>
+                  <a:srgbClr val="56606E"/>
                 </a:solidFill>
                 <a:latin typeface="Calibri" pitchFamily="34" charset="0"/>
                 <a:ea typeface="Calibri" pitchFamily="34" charset="-122"/>
                 <a:cs typeface="Calibri" pitchFamily="34" charset="-120"/>
               </a:rPr>
-              <a:t>SEMANA 28-09-2026 — 04-10-2026</a:t>
+              <a:t>SEMANA 05-10-2026 — 11-10-2026</a:t>
             </a:r>
             <a:endParaRPr lang="en-US" sz="1000" dirty="0"/>
           </a:p>
@@ -12879,7 +12544,7 @@
       </p:sp>
       <p:sp>
         <p:nvSpPr>
-          <p:cNvPr id="45" name="Text 42"/>
+          <p:cNvPr id="36" name="Text 33"/>
           <p:cNvSpPr/>
           <p:nvPr/>
         </p:nvSpPr>
@@ -12904,13 +12569,13 @@
             <a:r>
               <a:rPr lang="en-US" sz="1150" dirty="0">
                 <a:solidFill>
-                  <a:srgbClr val="FFFFFF"/>
+                  <a:srgbClr val="56606E"/>
                 </a:solidFill>
                 <a:latin typeface="Calibri" pitchFamily="34" charset="0"/>
                 <a:ea typeface="Calibri" pitchFamily="34" charset="-122"/>
                 <a:cs typeface="Calibri" pitchFamily="34" charset="-120"/>
               </a:rPr>
-              <a:t>1 hallazgo nuevo · 0 internas · 1 del cliente · OO.CC 1 · 1 sigue abierto</a:t>
+              <a:t>Sin hallazgos nuevos en el período.</a:t>
             </a:r>
             <a:endParaRPr lang="en-US" sz="1150" dirty="0"/>
           </a:p>
@@ -12918,7 +12583,7 @@
       </p:sp>
       <p:sp>
         <p:nvSpPr>
-          <p:cNvPr id="46" name="Text 43"/>
+          <p:cNvPr id="37" name="Text 34"/>
           <p:cNvSpPr/>
           <p:nvPr/>
         </p:nvSpPr>
@@ -12949,7 +12614,7 @@
                 <a:ea typeface="Calibri" pitchFamily="34" charset="-122"/>
                 <a:cs typeface="Calibri" pitchFamily="34" charset="-120"/>
               </a:rPr>
-              <a:t>Fuente: Data_NCR.xlsx — hoja «Observaciones» · Corte 05-10-2026 · 515 registros desde 10-02-2023</a:t>
+              <a:t>Fuente: Data_NCR.xlsx — hoja «Observaciones» · Corte 12-10-2026 · 515 registros desde 10-02-2023</a:t>
             </a:r>
             <a:endParaRPr lang="en-US" sz="850" dirty="0"/>
           </a:p>
@@ -12957,7 +12622,7 @@
       </p:sp>
       <p:sp>
         <p:nvSpPr>
-          <p:cNvPr id="47" name="Text 44"/>
+          <p:cNvPr id="38" name="Text 35"/>
           <p:cNvSpPr/>
           <p:nvPr/>
         </p:nvSpPr>
@@ -12996,7 +12661,7 @@
       </p:sp>
       <p:sp>
         <p:nvSpPr>
-          <p:cNvPr id="48" name="Text 45"/>
+          <p:cNvPr id="39" name="Text 36"/>
           <p:cNvSpPr/>
           <p:nvPr/>
         </p:nvSpPr>
@@ -13673,7 +13338,7 @@
                 <a:ea typeface="Calibri" pitchFamily="34" charset="-122"/>
                 <a:cs typeface="Calibri" pitchFamily="34" charset="-120"/>
               </a:rPr>
-              <a:t>Corte: 05-10-2026</a:t>
+              <a:t>Corte: 12-10-2026</a:t>
             </a:r>
             <a:endParaRPr lang="en-US" sz="1100" dirty="0"/>
           </a:p>
@@ -13712,7 +13377,7 @@
                 <a:ea typeface="Calibri" pitchFamily="34" charset="-122"/>
                 <a:cs typeface="Calibri" pitchFamily="34" charset="-120"/>
               </a:rPr>
-              <a:t>Fuente: Data_NCR.xlsx — hoja «Observaciones» · Corte 05-10-2026 · 515 registros desde 10-02-2023</a:t>
+              <a:t>Fuente: Data_NCR.xlsx — hoja «Observaciones» · Corte 12-10-2026 · 515 registros desde 10-02-2023</a:t>
             </a:r>
             <a:endParaRPr lang="en-US" sz="850" dirty="0"/>
           </a:p>
@@ -14305,7 +13970,7 @@
                 <a:ea typeface="Calibri" pitchFamily="34" charset="-122"/>
                 <a:cs typeface="Calibri" pitchFamily="34" charset="-120"/>
               </a:rPr>
-              <a:t>Global del módulo: 95,9%</a:t>
+              <a:t>Global del módulo: 96,1%</a:t>
             </a:r>
             <a:endParaRPr lang="en-US" sz="950" dirty="0"/>
           </a:p>
@@ -14725,7 +14390,7 @@
                 <a:ea typeface="Calibri" pitchFamily="34" charset="-122"/>
                 <a:cs typeface="Calibri" pitchFamily="34" charset="-120"/>
               </a:rPr>
-              <a:t>el más lento tomó 419 días</a:t>
+              <a:t>el más lento tomó 427 días</a:t>
             </a:r>
             <a:endParaRPr lang="en-US" sz="950" dirty="0"/>
           </a:p>
@@ -15376,7 +15041,7 @@
                 <a:ea typeface="Calibri" pitchFamily="34" charset="-122"/>
                 <a:cs typeface="Calibri" pitchFamily="34" charset="-120"/>
               </a:rPr>
-              <a:t>Fuente: Data_NCR.xlsx — hoja «Observaciones» · Corte 05-10-2026 · 515 registros desde 10-02-2023</a:t>
+              <a:t>Fuente: Data_NCR.xlsx — hoja «Observaciones» · Corte 12-10-2026 · 515 registros desde 10-02-2023</a:t>
             </a:r>
             <a:endParaRPr lang="en-US" sz="850" dirty="0"/>
           </a:p>
@@ -15627,7 +15292,7 @@
                 <a:ea typeface="Calibri" pitchFamily="34" charset="-122"/>
                 <a:cs typeface="Calibri" pitchFamily="34" charset="-120"/>
               </a:rPr>
-              <a:t>17 hallazgos siguen abiertos; 8 con más de 180 días. Se listan del más antiguo al más reciente.</a:t>
+              <a:t>17 hallazgos siguen abiertos; 9 con más de 180 días. Se listan del más antiguo al más reciente.</a:t>
             </a:r>
             <a:endParaRPr lang="en-US" sz="1350" dirty="0"/>
           </a:p>
@@ -16235,7 +15900,7 @@
                 <a:ea typeface="Calibri" pitchFamily="34" charset="-122"/>
                 <a:cs typeface="Calibri" pitchFamily="34" charset="-120"/>
               </a:rPr>
-              <a:t>354</a:t>
+              <a:t>361</a:t>
             </a:r>
             <a:endParaRPr lang="en-US" sz="1050" dirty="0"/>
           </a:p>
@@ -16590,7 +16255,7 @@
                 <a:ea typeface="Calibri" pitchFamily="34" charset="-122"/>
                 <a:cs typeface="Calibri" pitchFamily="34" charset="-120"/>
               </a:rPr>
-              <a:t>292</a:t>
+              <a:t>299</a:t>
             </a:r>
             <a:endParaRPr lang="en-US" sz="1050" dirty="0"/>
           </a:p>
@@ -16925,7 +16590,7 @@
                 <a:ea typeface="Calibri" pitchFamily="34" charset="-122"/>
                 <a:cs typeface="Calibri" pitchFamily="34" charset="-120"/>
               </a:rPr>
-              <a:t>263</a:t>
+              <a:t>270</a:t>
             </a:r>
             <a:endParaRPr lang="en-US" sz="1050" dirty="0"/>
           </a:p>
@@ -17280,7 +16945,7 @@
                 <a:ea typeface="Calibri" pitchFamily="34" charset="-122"/>
                 <a:cs typeface="Calibri" pitchFamily="34" charset="-120"/>
               </a:rPr>
-              <a:t>263</a:t>
+              <a:t>270</a:t>
             </a:r>
             <a:endParaRPr lang="en-US" sz="1050" dirty="0"/>
           </a:p>
@@ -17615,7 +17280,7 @@
                 <a:ea typeface="Calibri" pitchFamily="34" charset="-122"/>
                 <a:cs typeface="Calibri" pitchFamily="34" charset="-120"/>
               </a:rPr>
-              <a:t>242</a:t>
+              <a:t>249</a:t>
             </a:r>
             <a:endParaRPr lang="en-US" sz="1050" dirty="0"/>
           </a:p>
@@ -17970,7 +17635,7 @@
                 <a:ea typeface="Calibri" pitchFamily="34" charset="-122"/>
                 <a:cs typeface="Calibri" pitchFamily="34" charset="-120"/>
               </a:rPr>
-              <a:t>213</a:t>
+              <a:t>220</a:t>
             </a:r>
             <a:endParaRPr lang="en-US" sz="1050" dirty="0"/>
           </a:p>
@@ -18305,7 +17970,7 @@
                 <a:ea typeface="Calibri" pitchFamily="34" charset="-122"/>
                 <a:cs typeface="Calibri" pitchFamily="34" charset="-120"/>
               </a:rPr>
-              <a:t>209</a:t>
+              <a:t>216</a:t>
             </a:r>
             <a:endParaRPr lang="en-US" sz="1050" dirty="0"/>
           </a:p>
@@ -18660,7 +18325,7 @@
                 <a:ea typeface="Calibri" pitchFamily="34" charset="-122"/>
                 <a:cs typeface="Calibri" pitchFamily="34" charset="-120"/>
               </a:rPr>
-              <a:t>209</a:t>
+              <a:t>216</a:t>
             </a:r>
             <a:endParaRPr lang="en-US" sz="1050" dirty="0"/>
           </a:p>
@@ -18987,15 +18652,15 @@
               <a:buNone/>
             </a:pPr>
             <a:r>
-              <a:rPr lang="en-US" sz="1050" dirty="0">
-                <a:solidFill>
-                  <a:srgbClr val="1A2433"/>
+              <a:rPr lang="en-US" sz="1050" b="1" dirty="0">
+                <a:solidFill>
+                  <a:srgbClr val="C0392B"/>
                 </a:solidFill>
                 <a:latin typeface="Calibri" pitchFamily="34" charset="0"/>
                 <a:ea typeface="Calibri" pitchFamily="34" charset="-122"/>
                 <a:cs typeface="Calibri" pitchFamily="34" charset="-120"/>
               </a:rPr>
-              <a:t>179</a:t>
+              <a:t>186</a:t>
             </a:r>
             <a:endParaRPr lang="en-US" sz="1050" dirty="0"/>
           </a:p>
@@ -19157,7 +18822,7 @@
                 <a:ea typeface="Calibri" pitchFamily="34" charset="-122"/>
                 <a:cs typeface="Calibri" pitchFamily="34" charset="-120"/>
               </a:rPr>
-              <a:t>SEMANA 28-09-2026 — 04-10-2026</a:t>
+              <a:t>SEMANA 05-10-2026 — 11-10-2026</a:t>
             </a:r>
             <a:endParaRPr lang="en-US" sz="1000" dirty="0"/>
           </a:p>
@@ -19235,7 +18900,7 @@
                 <a:ea typeface="Calibri" pitchFamily="34" charset="-122"/>
                 <a:cs typeface="Calibri" pitchFamily="34" charset="-120"/>
               </a:rPr>
-              <a:t>Fuente: Data_NCR.xlsx — hoja «Observaciones» · Corte 05-10-2026 · 515 registros desde 10-02-2023</a:t>
+              <a:t>Fuente: Data_NCR.xlsx — hoja «Observaciones» · Corte 12-10-2026 · 515 registros desde 10-02-2023</a:t>
             </a:r>
             <a:endParaRPr lang="en-US" sz="850" dirty="0"/>
           </a:p>
@@ -19540,7 +19205,7 @@
                 <a:ea typeface="Cambria" pitchFamily="34" charset="-122"/>
                 <a:cs typeface="Cambria" pitchFamily="34" charset="-120"/>
               </a:rPr>
-              <a:t>95,9%</a:t>
+              <a:t>96,1%</a:t>
             </a:r>
             <a:endParaRPr lang="en-US" sz="4000" dirty="0"/>
           </a:p>
@@ -19579,7 +19244,7 @@
                 <a:ea typeface="Calibri" pitchFamily="34" charset="-122"/>
                 <a:cs typeface="Calibri" pitchFamily="34" charset="-120"/>
               </a:rPr>
-              <a:t>494/515</a:t>
+              <a:t>495/515</a:t>
             </a:r>
             <a:endParaRPr lang="en-US" sz="1400" dirty="0"/>
           </a:p>
@@ -19657,7 +19322,7 @@
                 <a:ea typeface="Calibri" pitchFamily="34" charset="-122"/>
                 <a:cs typeface="Calibri" pitchFamily="34" charset="-120"/>
               </a:rPr>
-              <a:t>21 abiertos · 8 con más de 180 días</a:t>
+              <a:t>20 abiertos · 9 con más de 180 días</a:t>
             </a:r>
             <a:endParaRPr lang="en-US" sz="950" dirty="0"/>
           </a:p>
@@ -19750,7 +19415,7 @@
                 <a:ea typeface="Cambria" pitchFamily="34" charset="-122"/>
                 <a:cs typeface="Cambria" pitchFamily="34" charset="-120"/>
               </a:rPr>
-              <a:t>21</a:t>
+              <a:t>20</a:t>
             </a:r>
             <a:endParaRPr lang="en-US" sz="4000" dirty="0"/>
           </a:p>
@@ -19867,7 +19532,7 @@
                 <a:ea typeface="Calibri" pitchFamily="34" charset="-122"/>
                 <a:cs typeface="Calibri" pitchFamily="34" charset="-120"/>
               </a:rPr>
-              <a:t>10 listo para revisión · 3 iniciado · 6 observada · 2 pendiente</a:t>
+              <a:t>11 listo para revisión · 1 iniciado · 6 observada · 2 pendiente</a:t>
             </a:r>
             <a:endParaRPr lang="en-US" sz="950" dirty="0"/>
           </a:p>
@@ -20427,7 +20092,7 @@
                 <a:ea typeface="Calibri" pitchFamily="34" charset="-122"/>
                 <a:cs typeface="Calibri" pitchFamily="34" charset="-120"/>
               </a:rPr>
-              <a:t>17 de los 21 hallazgos abiertos (81%), y es uno de los frentes donde el cliente levanta más de lo que detecta Besalco (79 del cliente contra 53 internas).</a:t>
+              <a:t>17 de los 20 hallazgos abiertos (85%), y es uno de los frentes donde el cliente levanta más de lo que detecta Besalco (79 del cliente contra 53 internas).</a:t>
             </a:r>
             <a:endParaRPr lang="en-US" sz="1250" dirty="0"/>
           </a:p>
@@ -20489,7 +20154,7 @@
                 <a:ea typeface="Calibri" pitchFamily="34" charset="-122"/>
                 <a:cs typeface="Calibri" pitchFamily="34" charset="-120"/>
               </a:rPr>
-              <a:t>La semana trajo 1 hallazgo nuevo, ninguno de autodetección.  </a:t>
+              <a:t>La semana cerró sin hallazgos nuevos.  </a:t>
             </a:r>
             <a:pPr indent="0" marL="0">
               <a:lnSpc>
@@ -20506,7 +20171,7 @@
                 <a:ea typeface="Calibri" pitchFamily="34" charset="-122"/>
                 <a:cs typeface="Calibri" pitchFamily="34" charset="-120"/>
               </a:rPr>
-              <a:t>28-09-2026 al 04-10-2026: 1 del cliente en OO.CC (1). Todos siguen abiertos; la semana anterior entraron 1.</a:t>
+              <a:t>Entre el 05-10-2026 y el 11-10-2026 no se levantó ningún hallazgo en ningún frente.</a:t>
             </a:r>
             <a:endParaRPr lang="en-US" sz="1250" dirty="0"/>
           </a:p>
@@ -20568,7 +20233,7 @@
                 <a:ea typeface="Calibri" pitchFamily="34" charset="-122"/>
                 <a:cs typeface="Calibri" pitchFamily="34" charset="-120"/>
               </a:rPr>
-              <a:t>20 de los 21 abiertos están fuera del plazo de respuesta.  </a:t>
+              <a:t>20 de los 20 abiertos están fuera del plazo de respuesta.  </a:t>
             </a:r>
             <a:pPr indent="0" marL="0">
               <a:lnSpc>
@@ -20585,7 +20250,7 @@
                 <a:ea typeface="Calibri" pitchFamily="34" charset="-122"/>
                 <a:cs typeface="Calibri" pitchFamily="34" charset="-120"/>
               </a:rPr>
-              <a:t>El plazo es de 10 días desde que se emite la NC. De los atrasados, 8 llevan más de 180 días abiertos y 0 más de un año: no es atraso de días, es deuda vieja.</a:t>
+              <a:t>El plazo es de 10 días desde que se emite la NC. De los atrasados, 9 llevan más de 180 días abiertos y 0 más de un año: no es atraso de días, es deuda vieja.</a:t>
             </a:r>
             <a:endParaRPr lang="en-US" sz="1250" dirty="0"/>
           </a:p>
@@ -20624,7 +20289,7 @@
                 <a:ea typeface="Calibri" pitchFamily="34" charset="-122"/>
                 <a:cs typeface="Calibri" pitchFamily="34" charset="-120"/>
               </a:rPr>
-              <a:t>Fuente: Data_NCR.xlsx — hoja «Observaciones» · Corte 05-10-2026 · 515 registros desde 10-02-2023</a:t>
+              <a:t>Fuente: Data_NCR.xlsx — hoja «Observaciones» · Corte 12-10-2026 · 515 registros desde 10-02-2023</a:t>
             </a:r>
             <a:endParaRPr lang="en-US" sz="850" dirty="0"/>
           </a:p>
@@ -21938,7 +21603,7 @@
                 <a:ea typeface="Calibri" pitchFamily="34" charset="-122"/>
                 <a:cs typeface="Calibri" pitchFamily="34" charset="-120"/>
               </a:rPr>
-              <a:t>250</a:t>
+              <a:t>251</a:t>
             </a:r>
             <a:endParaRPr lang="en-US" sz="1300" dirty="0"/>
           </a:p>
@@ -21977,7 +21642,7 @@
                 <a:ea typeface="Calibri" pitchFamily="34" charset="-122"/>
                 <a:cs typeface="Calibri" pitchFamily="34" charset="-120"/>
               </a:rPr>
-              <a:t>3</a:t>
+              <a:t>2</a:t>
             </a:r>
             <a:endParaRPr lang="en-US" sz="1300" dirty="0"/>
           </a:p>
@@ -22016,7 +21681,7 @@
                 <a:ea typeface="Calibri" pitchFamily="34" charset="-122"/>
                 <a:cs typeface="Calibri" pitchFamily="34" charset="-120"/>
               </a:rPr>
-              <a:t>98,8%</a:t>
+              <a:t>99,2%</a:t>
             </a:r>
             <a:endParaRPr lang="en-US" sz="1300" dirty="0"/>
           </a:p>
@@ -23380,7 +23045,7 @@
                 <a:ea typeface="Calibri" pitchFamily="34" charset="-122"/>
                 <a:cs typeface="Calibri" pitchFamily="34" charset="-120"/>
               </a:rPr>
-              <a:t>486</a:t>
+              <a:t>487</a:t>
             </a:r>
             <a:endParaRPr lang="en-US" sz="1300" dirty="0"/>
           </a:p>
@@ -23419,7 +23084,7 @@
                 <a:ea typeface="Calibri" pitchFamily="34" charset="-122"/>
                 <a:cs typeface="Calibri" pitchFamily="34" charset="-120"/>
               </a:rPr>
-              <a:t>21</a:t>
+              <a:t>20</a:t>
             </a:r>
             <a:endParaRPr lang="en-US" sz="1300" dirty="0"/>
           </a:p>
@@ -23458,7 +23123,7 @@
                 <a:ea typeface="Calibri" pitchFamily="34" charset="-122"/>
                 <a:cs typeface="Calibri" pitchFamily="34" charset="-120"/>
               </a:rPr>
-              <a:t>95,9%</a:t>
+              <a:t>96,1%</a:t>
             </a:r>
             <a:endParaRPr lang="en-US" sz="1300" dirty="0"/>
           </a:p>
@@ -23653,7 +23318,7 @@
                 <a:ea typeface="Calibri" pitchFamily="34" charset="-122"/>
                 <a:cs typeface="Calibri" pitchFamily="34" charset="-120"/>
               </a:rPr>
-              <a:t>Mediana de cierre global 33 días · el hallazgo más lento tomó 419 días · 8 hallazgos sin especialidad declarada.</a:t>
+              <a:t>Mediana de cierre global 32 días · el hallazgo más lento tomó 427 días · 8 hallazgos sin especialidad declarada.</a:t>
             </a:r>
             <a:endParaRPr lang="en-US" sz="950" dirty="0"/>
           </a:p>
@@ -23692,7 +23357,7 @@
                 <a:ea typeface="Calibri" pitchFamily="34" charset="-122"/>
                 <a:cs typeface="Calibri" pitchFamily="34" charset="-120"/>
               </a:rPr>
-              <a:t>Fuente: Data_NCR.xlsx — hoja «Observaciones» · Corte 05-10-2026 · 515 registros desde 10-02-2023</a:t>
+              <a:t>Fuente: Data_NCR.xlsx — hoja «Observaciones» · Corte 12-10-2026 · 515 registros desde 10-02-2023</a:t>
             </a:r>
             <a:endParaRPr lang="en-US" sz="850" dirty="0"/>
           </a:p>
@@ -23943,7 +23608,7 @@
                 <a:ea typeface="Calibri" pitchFamily="34" charset="-122"/>
                 <a:cs typeface="Calibri" pitchFamily="34" charset="-120"/>
               </a:rPr>
-              <a:t>Entre el 28-09-2026 y el 04-10-2026 se levantó 1 hallazgo: 0 internas · 1 del cliente. Sigue abierto.</a:t>
+              <a:t>Entre el 05-10-2026 y el 11-10-2026 no se levantó ningún hallazgo en ningún frente.</a:t>
             </a:r>
             <a:endParaRPr lang="en-US" sz="1350" dirty="0"/>
           </a:p>
@@ -24098,7 +23763,7 @@
                 <a:ea typeface="Calibri" pitchFamily="34" charset="-122"/>
                 <a:cs typeface="Calibri" pitchFamily="34" charset="-120"/>
               </a:rPr>
-              <a:t>OO.CC 1</a:t>
+              <a:t>—</a:t>
             </a:r>
             <a:endParaRPr lang="en-US" sz="1100" dirty="0"/>
           </a:p>
@@ -24176,7 +23841,7 @@
                 <a:ea typeface="Calibri" pitchFamily="34" charset="-122"/>
                 <a:cs typeface="Calibri" pitchFamily="34" charset="-120"/>
               </a:rPr>
-              <a:t>Talabre 1</a:t>
+              <a:t>—</a:t>
             </a:r>
             <a:endParaRPr lang="en-US" sz="1100" dirty="0"/>
           </a:p>
@@ -24254,7 +23919,7 @@
                 <a:ea typeface="Calibri" pitchFamily="34" charset="-122"/>
                 <a:cs typeface="Calibri" pitchFamily="34" charset="-120"/>
               </a:rPr>
-              <a:t>Externa · Cliente 1</a:t>
+              <a:t>—</a:t>
             </a:r>
             <a:endParaRPr lang="en-US" sz="1100" dirty="0"/>
           </a:p>
@@ -24332,7 +23997,7 @@
                 <a:ea typeface="Calibri" pitchFamily="34" charset="-122"/>
                 <a:cs typeface="Calibri" pitchFamily="34" charset="-120"/>
               </a:rPr>
-              <a:t>Producto No Conforme 1</a:t>
+              <a:t>—</a:t>
             </a:r>
             <a:endParaRPr lang="en-US" sz="1100" dirty="0"/>
           </a:p>
@@ -24371,7 +24036,7 @@
                 <a:ea typeface="Calibri" pitchFamily="34" charset="-122"/>
                 <a:cs typeface="Calibri" pitchFamily="34" charset="-120"/>
               </a:rPr>
-              <a:t>DETALLE DE LOS HALLAZGOS NUEVOS</a:t>
+              <a:t>SIN HALLAZGOS NUEVOS EN EL PERÍODO</a:t>
             </a:r>
             <a:endParaRPr lang="en-US" sz="1050" dirty="0"/>
           </a:p>
@@ -24385,24 +24050,24 @@
         </p:nvSpPr>
         <p:spPr>
           <a:xfrm>
-            <a:off x="502920" y="3986784"/>
-            <a:ext cx="822960" cy="274320"/>
-          </a:xfrm>
-          <a:prstGeom prst="rect">
-            <a:avLst/>
-          </a:prstGeom>
-          <a:noFill/>
-          <a:ln/>
-        </p:spPr>
-        <p:txBody>
-          <a:bodyPr wrap="square" lIns="0" tIns="0" rIns="0" bIns="0" rtlCol="0" anchor="ctr"/>
-          <a:lstStyle/>
-          <a:p>
-            <a:pPr algn="l" indent="0" marL="0">
-              <a:buNone/>
-            </a:pPr>
-            <a:r>
-              <a:rPr lang="en-US" sz="950" b="1" spc="50" kern="0" dirty="0">
+            <a:off x="502920" y="4069080"/>
+            <a:ext cx="9144000" cy="365760"/>
+          </a:xfrm>
+          <a:prstGeom prst="rect">
+            <a:avLst/>
+          </a:prstGeom>
+          <a:noFill/>
+          <a:ln/>
+        </p:spPr>
+        <p:txBody>
+          <a:bodyPr wrap="square" lIns="0" tIns="0" rIns="0" bIns="0" rtlCol="0" anchor="ctr"/>
+          <a:lstStyle/>
+          <a:p>
+            <a:pPr indent="0" marL="0">
+              <a:buNone/>
+            </a:pPr>
+            <a:r>
+              <a:rPr lang="en-US" sz="1300" dirty="0">
                 <a:solidFill>
                   <a:srgbClr val="56606E"/>
                 </a:solidFill>
@@ -24410,9 +24075,9 @@
                 <a:ea typeface="Calibri" pitchFamily="34" charset="-122"/>
                 <a:cs typeface="Calibri" pitchFamily="34" charset="-120"/>
               </a:rPr>
-              <a:t>FECHA</a:t>
-            </a:r>
-            <a:endParaRPr lang="en-US" sz="950" dirty="0"/>
+              <a:t>No se levantó ningún hallazgo entre el 05-10-2026 y el 11-10-2026 en ningún frente.</a:t>
+            </a:r>
+            <a:endParaRPr lang="en-US" sz="1300" dirty="0"/>
           </a:p>
         </p:txBody>
       </p:sp>
@@ -24424,8 +24089,8 @@
         </p:nvSpPr>
         <p:spPr>
           <a:xfrm>
-            <a:off x="1371600" y="3986784"/>
-            <a:ext cx="1051560" cy="274320"/>
+            <a:off x="457200" y="6473952"/>
+            <a:ext cx="9692640" cy="274320"/>
           </a:xfrm>
           <a:prstGeom prst="rect">
             <a:avLst/>
@@ -24441,7 +24106,7 @@
               <a:buNone/>
             </a:pPr>
             <a:r>
-              <a:rPr lang="en-US" sz="950" b="1" spc="50" kern="0" dirty="0">
+              <a:rPr lang="en-US" sz="850" dirty="0">
                 <a:solidFill>
                   <a:srgbClr val="56606E"/>
                 </a:solidFill>
@@ -24449,9 +24114,9 @@
                 <a:ea typeface="Calibri" pitchFamily="34" charset="-122"/>
                 <a:cs typeface="Calibri" pitchFamily="34" charset="-120"/>
               </a:rPr>
-              <a:t>FRENTE</a:t>
-            </a:r>
-            <a:endParaRPr lang="en-US" sz="950" dirty="0"/>
+              <a:t>Fuente: Data_NCR.xlsx — hoja «Observaciones» · Corte 12-10-2026 · 515 registros desde 10-02-2023</a:t>
+            </a:r>
+            <a:endParaRPr lang="en-US" sz="850" dirty="0"/>
           </a:p>
         </p:txBody>
       </p:sp>
@@ -24463,24 +24128,24 @@
         </p:nvSpPr>
         <p:spPr>
           <a:xfrm>
-            <a:off x="2468880" y="3986784"/>
-            <a:ext cx="1051560" cy="274320"/>
-          </a:xfrm>
-          <a:prstGeom prst="rect">
-            <a:avLst/>
-          </a:prstGeom>
-          <a:noFill/>
-          <a:ln/>
-        </p:spPr>
-        <p:txBody>
-          <a:bodyPr wrap="square" lIns="0" tIns="0" rIns="0" bIns="0" rtlCol="0" anchor="ctr"/>
-          <a:lstStyle/>
-          <a:p>
-            <a:pPr algn="l" indent="0" marL="0">
-              <a:buNone/>
-            </a:pPr>
-            <a:r>
-              <a:rPr lang="en-US" sz="950" b="1" spc="50" kern="0" dirty="0">
+            <a:off x="1828800" y="6483096"/>
+            <a:ext cx="9756648" cy="274320"/>
+          </a:xfrm>
+          <a:prstGeom prst="rect">
+            <a:avLst/>
+          </a:prstGeom>
+          <a:noFill/>
+          <a:ln/>
+        </p:spPr>
+        <p:txBody>
+          <a:bodyPr wrap="square" lIns="0" tIns="0" rIns="0" bIns="0" rtlCol="0" anchor="ctr"/>
+          <a:lstStyle/>
+          <a:p>
+            <a:pPr algn="r" indent="0" marL="0">
+              <a:buNone/>
+            </a:pPr>
+            <a:r>
+              <a:rPr lang="en-US" sz="850" dirty="0">
                 <a:solidFill>
                   <a:srgbClr val="56606E"/>
                 </a:solidFill>
@@ -24488,724 +24153,15 @@
                 <a:ea typeface="Calibri" pitchFamily="34" charset="-122"/>
                 <a:cs typeface="Calibri" pitchFamily="34" charset="-120"/>
               </a:rPr>
-              <a:t>N°</a:t>
-            </a:r>
-            <a:endParaRPr lang="en-US" sz="950" dirty="0"/>
+              <a:t>PROYECTO CONSOLIDADO</a:t>
+            </a:r>
+            <a:endParaRPr lang="en-US" sz="850" dirty="0"/>
           </a:p>
         </p:txBody>
       </p:sp>
       <p:sp>
         <p:nvSpPr>
           <p:cNvPr id="21" name="Text 17"/>
-          <p:cNvSpPr/>
-          <p:nvPr/>
-        </p:nvSpPr>
-        <p:spPr>
-          <a:xfrm>
-            <a:off x="3566160" y="3986784"/>
-            <a:ext cx="1371600" cy="274320"/>
-          </a:xfrm>
-          <a:prstGeom prst="rect">
-            <a:avLst/>
-          </a:prstGeom>
-          <a:noFill/>
-          <a:ln/>
-        </p:spPr>
-        <p:txBody>
-          <a:bodyPr wrap="square" lIns="0" tIns="0" rIns="0" bIns="0" rtlCol="0" anchor="ctr"/>
-          <a:lstStyle/>
-          <a:p>
-            <a:pPr algn="l" indent="0" marL="0">
-              <a:buNone/>
-            </a:pPr>
-            <a:r>
-              <a:rPr lang="en-US" sz="950" b="1" spc="50" kern="0" dirty="0">
-                <a:solidFill>
-                  <a:srgbClr val="56606E"/>
-                </a:solidFill>
-                <a:latin typeface="Calibri" pitchFamily="34" charset="0"/>
-                <a:ea typeface="Calibri" pitchFamily="34" charset="-122"/>
-                <a:cs typeface="Calibri" pitchFamily="34" charset="-120"/>
-              </a:rPr>
-              <a:t>TIPO</a:t>
-            </a:r>
-            <a:endParaRPr lang="en-US" sz="950" dirty="0"/>
-          </a:p>
-        </p:txBody>
-      </p:sp>
-      <p:sp>
-        <p:nvSpPr>
-          <p:cNvPr id="22" name="Text 18"/>
-          <p:cNvSpPr/>
-          <p:nvPr/>
-        </p:nvSpPr>
-        <p:spPr>
-          <a:xfrm>
-            <a:off x="4983480" y="3986784"/>
-            <a:ext cx="1417320" cy="274320"/>
-          </a:xfrm>
-          <a:prstGeom prst="rect">
-            <a:avLst/>
-          </a:prstGeom>
-          <a:noFill/>
-          <a:ln/>
-        </p:spPr>
-        <p:txBody>
-          <a:bodyPr wrap="square" lIns="0" tIns="0" rIns="0" bIns="0" rtlCol="0" anchor="ctr"/>
-          <a:lstStyle/>
-          <a:p>
-            <a:pPr algn="l" indent="0" marL="0">
-              <a:buNone/>
-            </a:pPr>
-            <a:r>
-              <a:rPr lang="en-US" sz="950" b="1" spc="50" kern="0" dirty="0">
-                <a:solidFill>
-                  <a:srgbClr val="56606E"/>
-                </a:solidFill>
-                <a:latin typeface="Calibri" pitchFamily="34" charset="0"/>
-                <a:ea typeface="Calibri" pitchFamily="34" charset="-122"/>
-                <a:cs typeface="Calibri" pitchFamily="34" charset="-120"/>
-              </a:rPr>
-              <a:t>ORIGEN</a:t>
-            </a:r>
-            <a:endParaRPr lang="en-US" sz="950" dirty="0"/>
-          </a:p>
-        </p:txBody>
-      </p:sp>
-      <p:sp>
-        <p:nvSpPr>
-          <p:cNvPr id="23" name="Text 19"/>
-          <p:cNvSpPr/>
-          <p:nvPr/>
-        </p:nvSpPr>
-        <p:spPr>
-          <a:xfrm>
-            <a:off x="6446520" y="3986784"/>
-            <a:ext cx="1097280" cy="274320"/>
-          </a:xfrm>
-          <a:prstGeom prst="rect">
-            <a:avLst/>
-          </a:prstGeom>
-          <a:noFill/>
-          <a:ln/>
-        </p:spPr>
-        <p:txBody>
-          <a:bodyPr wrap="square" lIns="0" tIns="0" rIns="0" bIns="0" rtlCol="0" anchor="ctr"/>
-          <a:lstStyle/>
-          <a:p>
-            <a:pPr algn="l" indent="0" marL="0">
-              <a:buNone/>
-            </a:pPr>
-            <a:r>
-              <a:rPr lang="en-US" sz="950" b="1" spc="50" kern="0" dirty="0">
-                <a:solidFill>
-                  <a:srgbClr val="56606E"/>
-                </a:solidFill>
-                <a:latin typeface="Calibri" pitchFamily="34" charset="0"/>
-                <a:ea typeface="Calibri" pitchFamily="34" charset="-122"/>
-                <a:cs typeface="Calibri" pitchFamily="34" charset="-120"/>
-              </a:rPr>
-              <a:t>DISCIPLINA</a:t>
-            </a:r>
-            <a:endParaRPr lang="en-US" sz="950" dirty="0"/>
-          </a:p>
-        </p:txBody>
-      </p:sp>
-      <p:sp>
-        <p:nvSpPr>
-          <p:cNvPr id="24" name="Text 20"/>
-          <p:cNvSpPr/>
-          <p:nvPr/>
-        </p:nvSpPr>
-        <p:spPr>
-          <a:xfrm>
-            <a:off x="7589520" y="3986784"/>
-            <a:ext cx="1371600" cy="274320"/>
-          </a:xfrm>
-          <a:prstGeom prst="rect">
-            <a:avLst/>
-          </a:prstGeom>
-          <a:noFill/>
-          <a:ln/>
-        </p:spPr>
-        <p:txBody>
-          <a:bodyPr wrap="square" lIns="0" tIns="0" rIns="0" bIns="0" rtlCol="0" anchor="ctr"/>
-          <a:lstStyle/>
-          <a:p>
-            <a:pPr algn="l" indent="0" marL="0">
-              <a:buNone/>
-            </a:pPr>
-            <a:r>
-              <a:rPr lang="en-US" sz="950" b="1" spc="50" kern="0" dirty="0">
-                <a:solidFill>
-                  <a:srgbClr val="56606E"/>
-                </a:solidFill>
-                <a:latin typeface="Calibri" pitchFamily="34" charset="0"/>
-                <a:ea typeface="Calibri" pitchFamily="34" charset="-122"/>
-                <a:cs typeface="Calibri" pitchFamily="34" charset="-120"/>
-              </a:rPr>
-              <a:t>RESPONSABLE</a:t>
-            </a:r>
-            <a:endParaRPr lang="en-US" sz="950" dirty="0"/>
-          </a:p>
-        </p:txBody>
-      </p:sp>
-      <p:sp>
-        <p:nvSpPr>
-          <p:cNvPr id="25" name="Text 21"/>
-          <p:cNvSpPr/>
-          <p:nvPr/>
-        </p:nvSpPr>
-        <p:spPr>
-          <a:xfrm>
-            <a:off x="9006840" y="3986784"/>
-            <a:ext cx="868680" cy="274320"/>
-          </a:xfrm>
-          <a:prstGeom prst="rect">
-            <a:avLst/>
-          </a:prstGeom>
-          <a:noFill/>
-          <a:ln/>
-        </p:spPr>
-        <p:txBody>
-          <a:bodyPr wrap="square" lIns="0" tIns="0" rIns="0" bIns="0" rtlCol="0" anchor="ctr"/>
-          <a:lstStyle/>
-          <a:p>
-            <a:pPr algn="l" indent="0" marL="0">
-              <a:buNone/>
-            </a:pPr>
-            <a:r>
-              <a:rPr lang="en-US" sz="950" b="1" spc="50" kern="0" dirty="0">
-                <a:solidFill>
-                  <a:srgbClr val="56606E"/>
-                </a:solidFill>
-                <a:latin typeface="Calibri" pitchFamily="34" charset="0"/>
-                <a:ea typeface="Calibri" pitchFamily="34" charset="-122"/>
-                <a:cs typeface="Calibri" pitchFamily="34" charset="-120"/>
-              </a:rPr>
-              <a:t>ESTADO</a:t>
-            </a:r>
-            <a:endParaRPr lang="en-US" sz="950" dirty="0"/>
-          </a:p>
-        </p:txBody>
-      </p:sp>
-      <p:sp>
-        <p:nvSpPr>
-          <p:cNvPr id="26" name="Text 22"/>
-          <p:cNvSpPr/>
-          <p:nvPr/>
-        </p:nvSpPr>
-        <p:spPr>
-          <a:xfrm>
-            <a:off x="9921240" y="3986784"/>
-            <a:ext cx="1828800" cy="274320"/>
-          </a:xfrm>
-          <a:prstGeom prst="rect">
-            <a:avLst/>
-          </a:prstGeom>
-          <a:noFill/>
-          <a:ln/>
-        </p:spPr>
-        <p:txBody>
-          <a:bodyPr wrap="square" lIns="0" tIns="0" rIns="0" bIns="0" rtlCol="0" anchor="ctr"/>
-          <a:lstStyle/>
-          <a:p>
-            <a:pPr algn="l" indent="0" marL="0">
-              <a:buNone/>
-            </a:pPr>
-            <a:r>
-              <a:rPr lang="en-US" sz="950" b="1" spc="50" kern="0" dirty="0">
-                <a:solidFill>
-                  <a:srgbClr val="56606E"/>
-                </a:solidFill>
-                <a:latin typeface="Calibri" pitchFamily="34" charset="0"/>
-                <a:ea typeface="Calibri" pitchFamily="34" charset="-122"/>
-                <a:cs typeface="Calibri" pitchFamily="34" charset="-120"/>
-              </a:rPr>
-              <a:t>TÍTULO</a:t>
-            </a:r>
-            <a:endParaRPr lang="en-US" sz="950" dirty="0"/>
-          </a:p>
-        </p:txBody>
-      </p:sp>
-      <p:sp>
-        <p:nvSpPr>
-          <p:cNvPr id="27" name="Shape 23"/>
-          <p:cNvSpPr/>
-          <p:nvPr/>
-        </p:nvSpPr>
-        <p:spPr>
-          <a:xfrm>
-            <a:off x="502920" y="4297680"/>
-            <a:ext cx="11247120" cy="0"/>
-          </a:xfrm>
-          <a:prstGeom prst="line">
-            <a:avLst/>
-          </a:prstGeom>
-          <a:noFill/>
-          <a:ln w="12700">
-            <a:solidFill>
-              <a:srgbClr val="6E8CA8"/>
-            </a:solidFill>
-            <a:prstDash val="solid"/>
-          </a:ln>
-        </p:spPr>
-      </p:sp>
-      <p:sp>
-        <p:nvSpPr>
-          <p:cNvPr id="28" name="Text 24"/>
-          <p:cNvSpPr/>
-          <p:nvPr/>
-        </p:nvSpPr>
-        <p:spPr>
-          <a:xfrm>
-            <a:off x="502920" y="4425696"/>
-            <a:ext cx="822960" cy="237744"/>
-          </a:xfrm>
-          <a:prstGeom prst="rect">
-            <a:avLst/>
-          </a:prstGeom>
-          <a:noFill/>
-          <a:ln/>
-        </p:spPr>
-        <p:txBody>
-          <a:bodyPr wrap="square" lIns="0" tIns="0" rIns="0" bIns="0" rtlCol="0" anchor="ctr"/>
-          <a:lstStyle/>
-          <a:p>
-            <a:pPr algn="l" indent="0" marL="0">
-              <a:buNone/>
-            </a:pPr>
-            <a:r>
-              <a:rPr lang="en-US" sz="1050" dirty="0">
-                <a:solidFill>
-                  <a:srgbClr val="1A2433"/>
-                </a:solidFill>
-                <a:latin typeface="Calibri" pitchFamily="34" charset="0"/>
-                <a:ea typeface="Calibri" pitchFamily="34" charset="-122"/>
-                <a:cs typeface="Calibri" pitchFamily="34" charset="-120"/>
-              </a:rPr>
-              <a:t>30-09-2026</a:t>
-            </a:r>
-            <a:endParaRPr lang="en-US" sz="1050" dirty="0"/>
-          </a:p>
-        </p:txBody>
-      </p:sp>
-      <p:sp>
-        <p:nvSpPr>
-          <p:cNvPr id="29" name="Text 25"/>
-          <p:cNvSpPr/>
-          <p:nvPr/>
-        </p:nvSpPr>
-        <p:spPr>
-          <a:xfrm>
-            <a:off x="1371600" y="4425696"/>
-            <a:ext cx="1051560" cy="237744"/>
-          </a:xfrm>
-          <a:prstGeom prst="rect">
-            <a:avLst/>
-          </a:prstGeom>
-          <a:noFill/>
-          <a:ln/>
-        </p:spPr>
-        <p:txBody>
-          <a:bodyPr wrap="square" lIns="0" tIns="0" rIns="0" bIns="0" rtlCol="0" anchor="ctr"/>
-          <a:lstStyle/>
-          <a:p>
-            <a:pPr algn="l" indent="0" marL="0">
-              <a:buNone/>
-            </a:pPr>
-            <a:r>
-              <a:rPr lang="en-US" sz="1050" dirty="0">
-                <a:solidFill>
-                  <a:srgbClr val="1A2433"/>
-                </a:solidFill>
-                <a:latin typeface="Calibri" pitchFamily="34" charset="0"/>
-                <a:ea typeface="Calibri" pitchFamily="34" charset="-122"/>
-                <a:cs typeface="Calibri" pitchFamily="34" charset="-120"/>
-              </a:rPr>
-              <a:t>Talabre</a:t>
-            </a:r>
-            <a:endParaRPr lang="en-US" sz="1050" dirty="0"/>
-          </a:p>
-        </p:txBody>
-      </p:sp>
-      <p:sp>
-        <p:nvSpPr>
-          <p:cNvPr id="30" name="Text 26"/>
-          <p:cNvSpPr/>
-          <p:nvPr/>
-        </p:nvSpPr>
-        <p:spPr>
-          <a:xfrm>
-            <a:off x="2468880" y="4425696"/>
-            <a:ext cx="1051560" cy="237744"/>
-          </a:xfrm>
-          <a:prstGeom prst="rect">
-            <a:avLst/>
-          </a:prstGeom>
-          <a:noFill/>
-          <a:ln/>
-        </p:spPr>
-        <p:txBody>
-          <a:bodyPr wrap="square" lIns="0" tIns="0" rIns="0" bIns="0" rtlCol="0" anchor="ctr"/>
-          <a:lstStyle/>
-          <a:p>
-            <a:pPr algn="l" indent="0" marL="0">
-              <a:buNone/>
-            </a:pPr>
-            <a:r>
-              <a:rPr lang="en-US" sz="1050" dirty="0">
-                <a:solidFill>
-                  <a:srgbClr val="1A2433"/>
-                </a:solidFill>
-                <a:latin typeface="Calibri" pitchFamily="34" charset="0"/>
-                <a:ea typeface="Calibri" pitchFamily="34" charset="-122"/>
-                <a:cs typeface="Calibri" pitchFamily="34" charset="-120"/>
-              </a:rPr>
-              <a:t>254 · PNC N°202</a:t>
-            </a:r>
-            <a:endParaRPr lang="en-US" sz="1050" dirty="0"/>
-          </a:p>
-        </p:txBody>
-      </p:sp>
-      <p:sp>
-        <p:nvSpPr>
-          <p:cNvPr id="31" name="Text 27"/>
-          <p:cNvSpPr/>
-          <p:nvPr/>
-        </p:nvSpPr>
-        <p:spPr>
-          <a:xfrm>
-            <a:off x="3566160" y="4425696"/>
-            <a:ext cx="1371600" cy="237744"/>
-          </a:xfrm>
-          <a:prstGeom prst="rect">
-            <a:avLst/>
-          </a:prstGeom>
-          <a:noFill/>
-          <a:ln/>
-        </p:spPr>
-        <p:txBody>
-          <a:bodyPr wrap="square" lIns="0" tIns="0" rIns="0" bIns="0" rtlCol="0" anchor="ctr"/>
-          <a:lstStyle/>
-          <a:p>
-            <a:pPr algn="l" indent="0" marL="0">
-              <a:buNone/>
-            </a:pPr>
-            <a:r>
-              <a:rPr lang="en-US" sz="1050" dirty="0">
-                <a:solidFill>
-                  <a:srgbClr val="1A2433"/>
-                </a:solidFill>
-                <a:latin typeface="Calibri" pitchFamily="34" charset="0"/>
-                <a:ea typeface="Calibri" pitchFamily="34" charset="-122"/>
-                <a:cs typeface="Calibri" pitchFamily="34" charset="-120"/>
-              </a:rPr>
-              <a:t>Producto No Confor…</a:t>
-            </a:r>
-            <a:endParaRPr lang="en-US" sz="1050" dirty="0"/>
-          </a:p>
-        </p:txBody>
-      </p:sp>
-      <p:sp>
-        <p:nvSpPr>
-          <p:cNvPr id="32" name="Text 28"/>
-          <p:cNvSpPr/>
-          <p:nvPr/>
-        </p:nvSpPr>
-        <p:spPr>
-          <a:xfrm>
-            <a:off x="4983480" y="4425696"/>
-            <a:ext cx="1417320" cy="237744"/>
-          </a:xfrm>
-          <a:prstGeom prst="rect">
-            <a:avLst/>
-          </a:prstGeom>
-          <a:noFill/>
-          <a:ln/>
-        </p:spPr>
-        <p:txBody>
-          <a:bodyPr wrap="square" lIns="0" tIns="0" rIns="0" bIns="0" rtlCol="0" anchor="ctr"/>
-          <a:lstStyle/>
-          <a:p>
-            <a:pPr algn="l" indent="0" marL="0">
-              <a:buNone/>
-            </a:pPr>
-            <a:r>
-              <a:rPr lang="en-US" sz="1050" b="1" dirty="0">
-                <a:solidFill>
-                  <a:srgbClr val="C87A32"/>
-                </a:solidFill>
-                <a:latin typeface="Calibri" pitchFamily="34" charset="0"/>
-                <a:ea typeface="Calibri" pitchFamily="34" charset="-122"/>
-                <a:cs typeface="Calibri" pitchFamily="34" charset="-120"/>
-              </a:rPr>
-              <a:t>Externa · Cliente</a:t>
-            </a:r>
-            <a:endParaRPr lang="en-US" sz="1050" dirty="0"/>
-          </a:p>
-        </p:txBody>
-      </p:sp>
-      <p:sp>
-        <p:nvSpPr>
-          <p:cNvPr id="33" name="Text 29"/>
-          <p:cNvSpPr/>
-          <p:nvPr/>
-        </p:nvSpPr>
-        <p:spPr>
-          <a:xfrm>
-            <a:off x="6446520" y="4425696"/>
-            <a:ext cx="1097280" cy="237744"/>
-          </a:xfrm>
-          <a:prstGeom prst="rect">
-            <a:avLst/>
-          </a:prstGeom>
-          <a:noFill/>
-          <a:ln/>
-        </p:spPr>
-        <p:txBody>
-          <a:bodyPr wrap="square" lIns="0" tIns="0" rIns="0" bIns="0" rtlCol="0" anchor="ctr"/>
-          <a:lstStyle/>
-          <a:p>
-            <a:pPr algn="l" indent="0" marL="0">
-              <a:buNone/>
-            </a:pPr>
-            <a:r>
-              <a:rPr lang="en-US" sz="1050" dirty="0">
-                <a:solidFill>
-                  <a:srgbClr val="1A2433"/>
-                </a:solidFill>
-                <a:latin typeface="Calibri" pitchFamily="34" charset="0"/>
-                <a:ea typeface="Calibri" pitchFamily="34" charset="-122"/>
-                <a:cs typeface="Calibri" pitchFamily="34" charset="-120"/>
-              </a:rPr>
-              <a:t>OO.CC</a:t>
-            </a:r>
-            <a:endParaRPr lang="en-US" sz="1050" dirty="0"/>
-          </a:p>
-        </p:txBody>
-      </p:sp>
-      <p:sp>
-        <p:nvSpPr>
-          <p:cNvPr id="34" name="Text 30"/>
-          <p:cNvSpPr/>
-          <p:nvPr/>
-        </p:nvSpPr>
-        <p:spPr>
-          <a:xfrm>
-            <a:off x="7589520" y="4425696"/>
-            <a:ext cx="1371600" cy="237744"/>
-          </a:xfrm>
-          <a:prstGeom prst="rect">
-            <a:avLst/>
-          </a:prstGeom>
-          <a:noFill/>
-          <a:ln/>
-        </p:spPr>
-        <p:txBody>
-          <a:bodyPr wrap="square" lIns="0" tIns="0" rIns="0" bIns="0" rtlCol="0" anchor="ctr"/>
-          <a:lstStyle/>
-          <a:p>
-            <a:pPr algn="l" indent="0" marL="0">
-              <a:buNone/>
-            </a:pPr>
-            <a:r>
-              <a:rPr lang="en-US" sz="1050" dirty="0">
-                <a:solidFill>
-                  <a:srgbClr val="1A2433"/>
-                </a:solidFill>
-                <a:latin typeface="Calibri" pitchFamily="34" charset="0"/>
-                <a:ea typeface="Calibri" pitchFamily="34" charset="-122"/>
-                <a:cs typeface="Calibri" pitchFamily="34" charset="-120"/>
-              </a:rPr>
-              <a:t>Wladimir Carvaja…</a:t>
-            </a:r>
-            <a:endParaRPr lang="en-US" sz="1050" dirty="0"/>
-          </a:p>
-        </p:txBody>
-      </p:sp>
-      <p:sp>
-        <p:nvSpPr>
-          <p:cNvPr id="35" name="Text 31"/>
-          <p:cNvSpPr/>
-          <p:nvPr/>
-        </p:nvSpPr>
-        <p:spPr>
-          <a:xfrm>
-            <a:off x="9006840" y="4425696"/>
-            <a:ext cx="868680" cy="237744"/>
-          </a:xfrm>
-          <a:prstGeom prst="rect">
-            <a:avLst/>
-          </a:prstGeom>
-          <a:noFill/>
-          <a:ln/>
-        </p:spPr>
-        <p:txBody>
-          <a:bodyPr wrap="square" lIns="0" tIns="0" rIns="0" bIns="0" rtlCol="0" anchor="ctr"/>
-          <a:lstStyle/>
-          <a:p>
-            <a:pPr algn="l" indent="0" marL="0">
-              <a:buNone/>
-            </a:pPr>
-            <a:r>
-              <a:rPr lang="en-US" sz="1050" dirty="0">
-                <a:solidFill>
-                  <a:srgbClr val="C0392B"/>
-                </a:solidFill>
-                <a:latin typeface="Calibri" pitchFamily="34" charset="0"/>
-                <a:ea typeface="Calibri" pitchFamily="34" charset="-122"/>
-                <a:cs typeface="Calibri" pitchFamily="34" charset="-120"/>
-              </a:rPr>
-              <a:t>Iniciado</a:t>
-            </a:r>
-            <a:endParaRPr lang="en-US" sz="1050" dirty="0"/>
-          </a:p>
-        </p:txBody>
-      </p:sp>
-      <p:sp>
-        <p:nvSpPr>
-          <p:cNvPr id="36" name="Text 32"/>
-          <p:cNvSpPr/>
-          <p:nvPr/>
-        </p:nvSpPr>
-        <p:spPr>
-          <a:xfrm>
-            <a:off x="9921240" y="4425696"/>
-            <a:ext cx="1828800" cy="237744"/>
-          </a:xfrm>
-          <a:prstGeom prst="rect">
-            <a:avLst/>
-          </a:prstGeom>
-          <a:noFill/>
-          <a:ln/>
-        </p:spPr>
-        <p:txBody>
-          <a:bodyPr wrap="square" lIns="0" tIns="0" rIns="0" bIns="0" rtlCol="0" anchor="ctr"/>
-          <a:lstStyle/>
-          <a:p>
-            <a:pPr algn="l" indent="0" marL="0">
-              <a:buNone/>
-            </a:pPr>
-            <a:r>
-              <a:rPr lang="en-US" sz="1000" dirty="0">
-                <a:solidFill>
-                  <a:srgbClr val="1A2433"/>
-                </a:solidFill>
-                <a:latin typeface="Calibri" pitchFamily="34" charset="0"/>
-                <a:ea typeface="Calibri" pitchFamily="34" charset="-122"/>
-                <a:cs typeface="Calibri" pitchFamily="34" charset="-120"/>
-              </a:rPr>
-              <a:t>Cortes no autorizados en la…</a:t>
-            </a:r>
-            <a:endParaRPr lang="en-US" sz="1000" dirty="0"/>
-          </a:p>
-        </p:txBody>
-      </p:sp>
-      <p:sp>
-        <p:nvSpPr>
-          <p:cNvPr id="37" name="Shape 33"/>
-          <p:cNvSpPr/>
-          <p:nvPr/>
-        </p:nvSpPr>
-        <p:spPr>
-          <a:xfrm>
-            <a:off x="502920" y="4700016"/>
-            <a:ext cx="11247120" cy="0"/>
-          </a:xfrm>
-          <a:prstGeom prst="line">
-            <a:avLst/>
-          </a:prstGeom>
-          <a:noFill/>
-          <a:ln w="9525">
-            <a:solidFill>
-              <a:srgbClr val="D9DFE6"/>
-            </a:solidFill>
-            <a:prstDash val="solid"/>
-          </a:ln>
-        </p:spPr>
-      </p:sp>
-      <p:sp>
-        <p:nvSpPr>
-          <p:cNvPr id="38" name="Text 34"/>
-          <p:cNvSpPr/>
-          <p:nvPr/>
-        </p:nvSpPr>
-        <p:spPr>
-          <a:xfrm>
-            <a:off x="457200" y="6473952"/>
-            <a:ext cx="9692640" cy="274320"/>
-          </a:xfrm>
-          <a:prstGeom prst="rect">
-            <a:avLst/>
-          </a:prstGeom>
-          <a:noFill/>
-          <a:ln/>
-        </p:spPr>
-        <p:txBody>
-          <a:bodyPr wrap="square" lIns="0" tIns="0" rIns="0" bIns="0" rtlCol="0" anchor="ctr"/>
-          <a:lstStyle/>
-          <a:p>
-            <a:pPr algn="l" indent="0" marL="0">
-              <a:buNone/>
-            </a:pPr>
-            <a:r>
-              <a:rPr lang="en-US" sz="850" dirty="0">
-                <a:solidFill>
-                  <a:srgbClr val="56606E"/>
-                </a:solidFill>
-                <a:latin typeface="Calibri" pitchFamily="34" charset="0"/>
-                <a:ea typeface="Calibri" pitchFamily="34" charset="-122"/>
-                <a:cs typeface="Calibri" pitchFamily="34" charset="-120"/>
-              </a:rPr>
-              <a:t>Fuente: Data_NCR.xlsx — hoja «Observaciones» · Corte 05-10-2026 · 515 registros desde 10-02-2023</a:t>
-            </a:r>
-            <a:endParaRPr lang="en-US" sz="850" dirty="0"/>
-          </a:p>
-        </p:txBody>
-      </p:sp>
-      <p:sp>
-        <p:nvSpPr>
-          <p:cNvPr id="39" name="Text 35"/>
-          <p:cNvSpPr/>
-          <p:nvPr/>
-        </p:nvSpPr>
-        <p:spPr>
-          <a:xfrm>
-            <a:off x="1828800" y="6483096"/>
-            <a:ext cx="9756648" cy="274320"/>
-          </a:xfrm>
-          <a:prstGeom prst="rect">
-            <a:avLst/>
-          </a:prstGeom>
-          <a:noFill/>
-          <a:ln/>
-        </p:spPr>
-        <p:txBody>
-          <a:bodyPr wrap="square" lIns="0" tIns="0" rIns="0" bIns="0" rtlCol="0" anchor="ctr"/>
-          <a:lstStyle/>
-          <a:p>
-            <a:pPr algn="r" indent="0" marL="0">
-              <a:buNone/>
-            </a:pPr>
-            <a:r>
-              <a:rPr lang="en-US" sz="850" dirty="0">
-                <a:solidFill>
-                  <a:srgbClr val="56606E"/>
-                </a:solidFill>
-                <a:latin typeface="Calibri" pitchFamily="34" charset="0"/>
-                <a:ea typeface="Calibri" pitchFamily="34" charset="-122"/>
-                <a:cs typeface="Calibri" pitchFamily="34" charset="-120"/>
-              </a:rPr>
-              <a:t>PROYECTO CONSOLIDADO</a:t>
-            </a:r>
-            <a:endParaRPr lang="en-US" sz="850" dirty="0"/>
-          </a:p>
-        </p:txBody>
-      </p:sp>
-      <p:sp>
-        <p:nvSpPr>
-          <p:cNvPr id="40" name="Text 36"/>
           <p:cNvSpPr/>
           <p:nvPr/>
         </p:nvSpPr>
@@ -26193,7 +25149,7 @@
                 <a:ea typeface="Calibri" pitchFamily="34" charset="-122"/>
                 <a:cs typeface="Calibri" pitchFamily="34" charset="-120"/>
               </a:rPr>
-              <a:t>280</a:t>
+              <a:t>281</a:t>
             </a:r>
             <a:endParaRPr lang="en-US" sz="1050" dirty="0"/>
           </a:p>
@@ -26232,7 +25188,7 @@
                 <a:ea typeface="Calibri" pitchFamily="34" charset="-122"/>
                 <a:cs typeface="Calibri" pitchFamily="34" charset="-120"/>
               </a:rPr>
-              <a:t>93,6%</a:t>
+              <a:t>94%</a:t>
             </a:r>
             <a:endParaRPr lang="en-US" sz="1050" dirty="0"/>
           </a:p>
@@ -26271,7 +25227,7 @@
                 <a:ea typeface="Calibri" pitchFamily="34" charset="-122"/>
                 <a:cs typeface="Calibri" pitchFamily="34" charset="-120"/>
               </a:rPr>
-              <a:t>19</a:t>
+              <a:t>18</a:t>
             </a:r>
             <a:endParaRPr lang="en-US" sz="1050" dirty="0"/>
           </a:p>
@@ -27101,7 +26057,7 @@
                 <a:ea typeface="Calibri" pitchFamily="34" charset="-122"/>
                 <a:cs typeface="Calibri" pitchFamily="34" charset="-120"/>
               </a:rPr>
-              <a:t>494</a:t>
+              <a:t>495</a:t>
             </a:r>
             <a:endParaRPr lang="en-US" sz="1050" dirty="0"/>
           </a:p>
@@ -27140,7 +26096,7 @@
                 <a:ea typeface="Calibri" pitchFamily="34" charset="-122"/>
                 <a:cs typeface="Calibri" pitchFamily="34" charset="-120"/>
               </a:rPr>
-              <a:t>95,9%</a:t>
+              <a:t>96,1%</a:t>
             </a:r>
             <a:endParaRPr lang="en-US" sz="1050" dirty="0"/>
           </a:p>
@@ -27179,7 +26135,7 @@
                 <a:ea typeface="Calibri" pitchFamily="34" charset="-122"/>
                 <a:cs typeface="Calibri" pitchFamily="34" charset="-120"/>
               </a:rPr>
-              <a:t>21</a:t>
+              <a:t>20</a:t>
             </a:r>
             <a:endParaRPr lang="en-US" sz="1050" dirty="0"/>
           </a:p>
@@ -27630,7 +26586,7 @@
                 <a:ea typeface="Calibri" pitchFamily="34" charset="-122"/>
                 <a:cs typeface="Calibri" pitchFamily="34" charset="-120"/>
               </a:rPr>
-              <a:t>Fuente: Data_NCR.xlsx — hoja «Observaciones» · Corte 05-10-2026 · 515 registros desde 10-02-2023</a:t>
+              <a:t>Fuente: Data_NCR.xlsx — hoja «Observaciones» · Corte 12-10-2026 · 515 registros desde 10-02-2023</a:t>
             </a:r>
             <a:endParaRPr lang="en-US" sz="850" dirty="0"/>
           </a:p>
@@ -27881,7 +26837,7 @@
                 <a:ea typeface="Calibri" pitchFamily="34" charset="-122"/>
                 <a:cs typeface="Calibri" pitchFamily="34" charset="-120"/>
               </a:rPr>
-              <a:t>De los 21 hallazgos abiertos, 8 llevan más de 180 días desde que se levantaron y 0 más de un año. La mediana de cierre global es de 33 días.</a:t>
+              <a:t>De los 20 hallazgos abiertos, 9 llevan más de 180 días desde que se levantaron y 0 más de un año. La mediana de cierre global es de 32 días.</a:t>
             </a:r>
             <a:endParaRPr lang="en-US" sz="1350" dirty="0"/>
           </a:p>
@@ -28018,7 +26974,7 @@
                 <a:ea typeface="Calibri" pitchFamily="34" charset="-122"/>
                 <a:cs typeface="Calibri" pitchFamily="34" charset="-120"/>
               </a:rPr>
-              <a:t>Al corte hay 20 hallazgos fuera de plazo de los 21 abiertos.</a:t>
+              <a:t>Al corte hay 20 hallazgos fuera de plazo de los 20 abiertos.</a:t>
             </a:r>
             <a:endParaRPr lang="en-US" sz="1150" dirty="0"/>
           </a:p>
@@ -28697,7 +27653,7 @@
                 <a:ea typeface="Calibri" pitchFamily="34" charset="-122"/>
                 <a:cs typeface="Calibri" pitchFamily="34" charset="-120"/>
               </a:rPr>
-              <a:t>250</a:t>
+              <a:t>251</a:t>
             </a:r>
             <a:endParaRPr lang="en-US" sz="1150" dirty="0"/>
           </a:p>
@@ -28814,7 +27770,7 @@
                 <a:ea typeface="Calibri" pitchFamily="34" charset="-122"/>
                 <a:cs typeface="Calibri" pitchFamily="34" charset="-120"/>
               </a:rPr>
-              <a:t>3</a:t>
+              <a:t>2</a:t>
             </a:r>
             <a:endParaRPr lang="en-US" sz="1150" dirty="0"/>
           </a:p>
@@ -29021,7 +27977,7 @@
                 <a:ea typeface="Calibri" pitchFamily="34" charset="-122"/>
                 <a:cs typeface="Calibri" pitchFamily="34" charset="-120"/>
               </a:rPr>
-              <a:t>419 d</a:t>
+              <a:t>427 d</a:t>
             </a:r>
             <a:endParaRPr lang="en-US" sz="1150" dirty="0"/>
           </a:p>
@@ -29438,7 +28394,7 @@
                 <a:ea typeface="Calibri" pitchFamily="34" charset="-122"/>
                 <a:cs typeface="Calibri" pitchFamily="34" charset="-120"/>
               </a:rPr>
-              <a:t>Fuente: Data_NCR.xlsx — hoja «Observaciones» · Corte 05-10-2026 · 515 registros desde 10-02-2023</a:t>
+              <a:t>Fuente: Data_NCR.xlsx — hoja «Observaciones» · Corte 12-10-2026 · 515 registros desde 10-02-2023</a:t>
             </a:r>
             <a:endParaRPr lang="en-US" sz="850" dirty="0"/>
           </a:p>
@@ -48039,7 +46995,7 @@
                 <a:ea typeface="Calibri" pitchFamily="34" charset="-122"/>
                 <a:cs typeface="Calibri" pitchFamily="34" charset="-120"/>
               </a:rPr>
-              <a:t>Fuente: Data_NCR.xlsx — hoja «Observaciones» · Corte 05-10-2026 · 515 registros desde 10-02-2023</a:t>
+              <a:t>Fuente: Data_NCR.xlsx — hoja «Observaciones» · Corte 12-10-2026 · 515 registros desde 10-02-2023</a:t>
             </a:r>
             <a:endParaRPr lang="en-US" sz="850" dirty="0"/>
           </a:p>
@@ -48413,7 +47369,7 @@
                 <a:ea typeface="Calibri" pitchFamily="34" charset="-122"/>
                 <a:cs typeface="Calibri" pitchFamily="34" charset="-120"/>
               </a:rPr>
-              <a:t>17 de los 21 hallazgos abiertos (81%) y 90,1% de cierre, contra 95,9% global. Es la ruta crítica del módulo.</a:t>
+              <a:t>17 de los 20 hallazgos abiertos (85%) y 90,1% de cierre, contra 96,1% global. Es la ruta crítica del módulo.</a:t>
             </a:r>
             <a:endParaRPr lang="en-US" sz="1100" dirty="0"/>
           </a:p>
@@ -48655,7 +47611,7 @@
                 <a:ea typeface="Calibri" pitchFamily="34" charset="-122"/>
                 <a:cs typeface="Calibri" pitchFamily="34" charset="-120"/>
               </a:rPr>
-              <a:t>Sacar los 8 hallazgos sobre 180 días</a:t>
+              <a:t>Sacar los 9 hallazgos sobre 180 días</a:t>
             </a:r>
             <a:endParaRPr lang="en-US" sz="1400" dirty="0"/>
           </a:p>
@@ -48697,7 +47653,7 @@
                 <a:ea typeface="Calibri" pitchFamily="34" charset="-122"/>
                 <a:cs typeface="Calibri" pitchFamily="34" charset="-120"/>
               </a:rPr>
-              <a:t>0 de ellos superan el año abiertos. Los tienen a cargo Sin asignar (8). Es deuda antigua que no se cierra sola.</a:t>
+              <a:t>0 de ellos superan el año abiertos. Los tienen a cargo Sin asignar (9). Es deuda antigua que no se cierra sola.</a:t>
             </a:r>
             <a:endParaRPr lang="en-US" sz="1100" dirty="0"/>
           </a:p>
@@ -48839,7 +47795,7 @@
                 <a:ea typeface="Calibri" pitchFamily="34" charset="-122"/>
                 <a:cs typeface="Calibri" pitchFamily="34" charset="-120"/>
               </a:rPr>
-              <a:t>El plazo es de 10 días desde la emisión y hoy lo incumplen 95,2% de los abiertos. Solo 1 siguen dentro de plazo.</a:t>
+              <a:t>El plazo es de 10 días desde la emisión y hoy lo incumplen 100% de los abiertos. Solo 0 siguen dentro de plazo.</a:t>
             </a:r>
             <a:endParaRPr lang="en-US" sz="1100" dirty="0"/>
           </a:p>
@@ -48878,7 +47834,7 @@
                 <a:ea typeface="Calibri" pitchFamily="34" charset="-122"/>
                 <a:cs typeface="Calibri" pitchFamily="34" charset="-120"/>
               </a:rPr>
-              <a:t>Fuente: Data_NCR.xlsx — hoja «Observaciones» · Corte 05-10-2026 · 515 registros desde 10-02-2023</a:t>
+              <a:t>Fuente: Data_NCR.xlsx — hoja «Observaciones» · Corte 12-10-2026 · 515 registros desde 10-02-2023</a:t>
             </a:r>
             <a:endParaRPr lang="en-US" sz="850" dirty="0"/>
           </a:p>
@@ -49602,7 +48558,7 @@
                 <a:ea typeface="Calibri" pitchFamily="34" charset="-122"/>
                 <a:cs typeface="Calibri" pitchFamily="34" charset="-120"/>
               </a:rPr>
-              <a:t>Corte: 05-10-2026</a:t>
+              <a:t>Corte: 12-10-2026</a:t>
             </a:r>
             <a:endParaRPr lang="en-US" sz="1100" dirty="0"/>
           </a:p>
@@ -49641,7 +48597,7 @@
                 <a:ea typeface="Calibri" pitchFamily="34" charset="-122"/>
                 <a:cs typeface="Calibri" pitchFamily="34" charset="-120"/>
               </a:rPr>
-              <a:t>Fuente: Data_NCR.xlsx — hoja «Observaciones» · Corte 05-10-2026 · 515 registros desde 10-02-2023</a:t>
+              <a:t>Fuente: Data_NCR.xlsx — hoja «Observaciones» · Corte 12-10-2026 · 515 registros desde 10-02-2023</a:t>
             </a:r>
             <a:endParaRPr lang="en-US" sz="850" dirty="0"/>
           </a:p>

--- a/modulo_nc/Panel_No_Conformidades.pptx
+++ b/modulo_nc/Panel_No_Conformidades.pptx
@@ -220,19 +220,19 @@
                     <c:v>3 sem.</c:v>
                   </c:pt>
                   <c:pt idx="1">
-                    <c:v>07-09</c:v>
+                    <c:v>14-09</c:v>
                   </c:pt>
                   <c:pt idx="2">
-                    <c:v>14-09</c:v>
+                    <c:v>21-09</c:v>
                   </c:pt>
                   <c:pt idx="3">
-                    <c:v>21-09</c:v>
+                    <c:v>28-09</c:v>
                   </c:pt>
                   <c:pt idx="4">
-                    <c:v>28-09</c:v>
+                    <c:v>05-10</c:v>
                   </c:pt>
                   <c:pt idx="5">
-                    <c:v>05-10</c:v>
+                    <c:v>12-10</c:v>
                   </c:pt>
                 </c:lvl>
               </c:multiLvlStrCache>
@@ -248,19 +248,19 @@
                   <c:v>2</c:v>
                 </c:pt>
                 <c:pt idx="1">
-                  <c:v/>
+                  <c:v>1</c:v>
                 </c:pt>
                 <c:pt idx="2">
                   <c:v>1</c:v>
                 </c:pt>
                 <c:pt idx="3">
-                  <c:v>1</c:v>
+                  <c:v/>
                 </c:pt>
                 <c:pt idx="4">
                   <c:v/>
                 </c:pt>
                 <c:pt idx="5">
-                  <c:v/>
+                  <c:v>1</c:v>
                 </c:pt>
               </c:numCache>
             </c:numRef>
@@ -322,19 +322,19 @@
                     <c:v>3 sem.</c:v>
                   </c:pt>
                   <c:pt idx="1">
-                    <c:v>07-09</c:v>
+                    <c:v>14-09</c:v>
                   </c:pt>
                   <c:pt idx="2">
-                    <c:v>14-09</c:v>
+                    <c:v>21-09</c:v>
                   </c:pt>
                   <c:pt idx="3">
-                    <c:v>21-09</c:v>
+                    <c:v>28-09</c:v>
                   </c:pt>
                   <c:pt idx="4">
-                    <c:v>28-09</c:v>
+                    <c:v>05-10</c:v>
                   </c:pt>
                   <c:pt idx="5">
-                    <c:v>05-10</c:v>
+                    <c:v>12-10</c:v>
                   </c:pt>
                 </c:lvl>
               </c:multiLvlStrCache>
@@ -347,19 +347,19 @@
                 <c:formatCode>General</c:formatCode>
                 <c:ptCount val="6"/>
                 <c:pt idx="0">
-                  <c:v>9</c:v>
+                  <c:v>6</c:v>
                 </c:pt>
                 <c:pt idx="1">
+                  <c:v>3</c:v>
+                </c:pt>
+                <c:pt idx="2">
                   <c:v/>
                 </c:pt>
-                <c:pt idx="2">
-                  <c:v>3</c:v>
-                </c:pt>
                 <c:pt idx="3">
-                  <c:v/>
+                  <c:v>1</c:v>
                 </c:pt>
                 <c:pt idx="4">
-                  <c:v>1</c:v>
+                  <c:v/>
                 </c:pt>
                 <c:pt idx="5">
                   <c:v/>
@@ -734,7 +734,7 @@
                   <c:v>19</c:v>
                 </c:pt>
                 <c:pt idx="1">
-                  <c:v>201</c:v>
+                  <c:v>202</c:v>
                 </c:pt>
                 <c:pt idx="2">
                   <c:v>79</c:v>
@@ -1199,7 +1199,7 @@
                 <c:formatCode>General</c:formatCode>
                 <c:ptCount val="4"/>
                 <c:pt idx="0">
-                  <c:v>311</c:v>
+                  <c:v>314</c:v>
                 </c:pt>
                 <c:pt idx="1">
                   <c:v>126</c:v>
@@ -1289,10 +1289,10 @@
                 <c:formatCode>General</c:formatCode>
                 <c:ptCount val="4"/>
                 <c:pt idx="0">
-                  <c:v>17</c:v>
+                  <c:v>14</c:v>
                 </c:pt>
                 <c:pt idx="1">
-                  <c:v/>
+                  <c:v>1</c:v>
                 </c:pt>
                 <c:pt idx="2">
                   <c:v>3</c:v>
@@ -1487,7 +1487,7 @@
                 </a:solidFill>
                 <a:latin typeface="Calibri"/>
               </a:rPr>
-              <a:t>Antigüedad de los 20 hallazgos abiertos</a:t>
+              <a:t>Antigüedad de los 18 hallazgos abiertos</a:t>
             </a:r>
           </a:p>
         </c:rich>
@@ -1640,7 +1640,7 @@
                 <c:formatCode>General</c:formatCode>
                 <c:ptCount val="1"/>
                 <c:pt idx="0">
-                  <c:v>3</c:v>
+                  <c:v>4</c:v>
                 </c:pt>
               </c:numCache>
             </c:numRef>
@@ -1712,7 +1712,7 @@
                 <c:formatCode>General</c:formatCode>
                 <c:ptCount val="1"/>
                 <c:pt idx="0">
-                  <c:v>6</c:v>
+                  <c:v>3</c:v>
                 </c:pt>
               </c:numCache>
             </c:numRef>
@@ -1784,7 +1784,79 @@
                 <c:formatCode>General</c:formatCode>
                 <c:ptCount val="1"/>
                 <c:pt idx="0">
-                  <c:v>9</c:v>
+                  <c:v>8</c:v>
+                </c:pt>
+              </c:numCache>
+            </c:numRef>
+          </c:val>
+        </c:ser>
+        <c:ser>
+          <c:idx val="4"/>
+          <c:order val="4"/>
+          <c:tx>
+            <c:strRef>
+              <c:f>Sheet1!$F$1</c:f>
+              <c:strCache>
+                <c:ptCount val="1"/>
+                <c:pt idx="0">
+                  <c:v>Más de un año</c:v>
+                </c:pt>
+              </c:strCache>
+            </c:strRef>
+          </c:tx>
+          <c:spPr>
+            <a:solidFill>
+              <a:srgbClr val="C0392B"/>
+            </a:solidFill>
+            <a:effectLst/>
+          </c:spPr>
+          <c:invertIfNegative val="0"/>
+          <c:dLbls>
+            <c:numFmt formatCode="#,##0" sourceLinked="0"/>
+            <c:txPr>
+              <a:bodyPr/>
+              <a:lstStyle/>
+              <a:p>
+                <a:pPr>
+                  <a:defRPr b="1" i="0" strike="noStrike" sz="1100" u="none">
+                    <a:solidFill>
+                      <a:srgbClr val="FFFFFF"/>
+                    </a:solidFill>
+                    <a:latin typeface="Calibri"/>
+                  </a:defRPr>
+                </a:pPr>
+              </a:p>
+            </c:txPr>
+            <c:dLblPos val="ctr"/>
+            <c:showLegendKey val="0"/>
+            <c:showVal val="1"/>
+            <c:showCatName val="0"/>
+            <c:showSerName val="0"/>
+            <c:showPercent val="0"/>
+            <c:showBubbleSize val="0"/>
+            <c:showLeaderLines val="0"/>
+          </c:dLbls>
+          <c:cat>
+            <c:multiLvlStrRef>
+              <c:f>Sheet1!$A$2:$A$2</c:f>
+              <c:multiLvlStrCache>
+                <c:ptCount val="1"/>
+                <c:lvl>
+                  <c:pt idx="0">
+                    <c:v>Abiertos</c:v>
+                  </c:pt>
+                </c:lvl>
+              </c:multiLvlStrCache>
+            </c:multiLvlStrRef>
+          </c:cat>
+          <c:val>
+            <c:numRef>
+              <c:f>Sheet1!$F$2:$F$2</c:f>
+              <c:numCache>
+                <c:formatCode>General</c:formatCode>
+                <c:ptCount val="1"/>
+                <c:pt idx="0">
+                  <c:v>1</c:v>
                 </c:pt>
               </c:numCache>
             </c:numRef>
@@ -2615,7 +2687,7 @@
                 <c:formatCode>General</c:formatCode>
                 <c:ptCount val="8"/>
                 <c:pt idx="0">
-                  <c:v>1</c:v>
+                  <c:v>2</c:v>
                 </c:pt>
                 <c:pt idx="1">
                   <c:v>1</c:v>
@@ -2933,13 +3005,13 @@
                   <c:v>32</c:v>
                 </c:pt>
                 <c:pt idx="2">
-                  <c:v>21</c:v>
+                  <c:v>23</c:v>
                 </c:pt>
                 <c:pt idx="3">
                   <c:v>18</c:v>
                 </c:pt>
                 <c:pt idx="4">
-                  <c:v>8</c:v>
+                  <c:v>9</c:v>
                 </c:pt>
                 <c:pt idx="5">
                   <c:v>7</c:v>
@@ -3047,13 +3119,13 @@
                   <c:v>5</c:v>
                 </c:pt>
                 <c:pt idx="2">
-                  <c:v>5</c:v>
+                  <c:v>3</c:v>
                 </c:pt>
                 <c:pt idx="3">
                   <c:v>1</c:v>
                 </c:pt>
                 <c:pt idx="4">
-                  <c:v>6</c:v>
+                  <c:v>5</c:v>
                 </c:pt>
                 <c:pt idx="5">
                   <c:v/>
@@ -5638,7 +5710,7 @@
                 <a:ea typeface="Calibri" pitchFamily="34" charset="-122"/>
                 <a:cs typeface="Calibri" pitchFamily="34" charset="-120"/>
               </a:rPr>
-              <a:t>515 hallazgos levantados entre 10-02-2023 y 30-09-2026 (Desaladora 82 · Talabre 253 · Arqueros 172 · Oficina Central 8).</a:t>
+              <a:t>516 hallazgos levantados entre 10-02-2023 y 14-10-2026 (Desaladora 82 · Talabre 254 · Arqueros 172 · Oficina Central 8).</a:t>
             </a:r>
             <a:endParaRPr lang="en-US" sz="1350" dirty="0"/>
           </a:p>
@@ -5697,7 +5769,7 @@
                 <a:ea typeface="Cambria" pitchFamily="34" charset="-122"/>
                 <a:cs typeface="Cambria" pitchFamily="34" charset="-120"/>
               </a:rPr>
-              <a:t>96,1%</a:t>
+              <a:t>96,5%</a:t>
             </a:r>
             <a:endParaRPr lang="en-US" sz="3400" dirty="0"/>
           </a:p>
@@ -5775,7 +5847,7 @@
                 <a:ea typeface="Cambria" pitchFamily="34" charset="-122"/>
                 <a:cs typeface="Cambria" pitchFamily="34" charset="-120"/>
               </a:rPr>
-              <a:t>20</a:t>
+              <a:t>18</a:t>
             </a:r>
             <a:endParaRPr lang="en-US" sz="3400" dirty="0"/>
           </a:p>
@@ -5853,7 +5925,7 @@
                 <a:ea typeface="Cambria" pitchFamily="34" charset="-122"/>
                 <a:cs typeface="Cambria" pitchFamily="34" charset="-120"/>
               </a:rPr>
-              <a:t>32 d</a:t>
+              <a:t>33 d</a:t>
             </a:r>
             <a:endParaRPr lang="en-US" sz="3400" dirty="0"/>
           </a:p>
@@ -6009,7 +6081,7 @@
                 <a:ea typeface="Calibri" pitchFamily="34" charset="-122"/>
                 <a:cs typeface="Calibri" pitchFamily="34" charset="-120"/>
               </a:rPr>
-              <a:t>Corte: 12-10-2026</a:t>
+              <a:t>Corte: 19-10-2026</a:t>
             </a:r>
             <a:endParaRPr lang="en-US" sz="1100" dirty="0"/>
           </a:p>
@@ -6048,7 +6120,7 @@
                 <a:ea typeface="Calibri" pitchFamily="34" charset="-122"/>
                 <a:cs typeface="Calibri" pitchFamily="34" charset="-120"/>
               </a:rPr>
-              <a:t>Fuente: Data_NCR.xlsx — hoja «Observaciones» · Corte 12-10-2026 · 515 registros desde 10-02-2023</a:t>
+              <a:t>Fuente: Data_NCR.xlsx — hoja «Observaciones» · Corte 19-10-2026 · 516 registros desde 10-02-2023</a:t>
             </a:r>
             <a:endParaRPr lang="en-US" sz="850" dirty="0"/>
           </a:p>
@@ -6641,7 +6713,7 @@
                 <a:ea typeface="Calibri" pitchFamily="34" charset="-122"/>
                 <a:cs typeface="Calibri" pitchFamily="34" charset="-120"/>
               </a:rPr>
-              <a:t>Global del módulo: 96,1%</a:t>
+              <a:t>Global del módulo: 96,5%</a:t>
             </a:r>
             <a:endParaRPr lang="en-US" sz="950" dirty="0"/>
           </a:p>
@@ -7849,7 +7921,7 @@
                 <a:ea typeface="Calibri" pitchFamily="34" charset="-122"/>
                 <a:cs typeface="Calibri" pitchFamily="34" charset="-120"/>
               </a:rPr>
-              <a:t>Fuente: Data_NCR.xlsx — hoja «Observaciones» · Corte 12-10-2026 · 515 registros desde 10-02-2023</a:t>
+              <a:t>Fuente: Data_NCR.xlsx — hoja «Observaciones» · Corte 19-10-2026 · 516 registros desde 10-02-2023</a:t>
             </a:r>
             <a:endParaRPr lang="en-US" sz="850" dirty="0"/>
           </a:p>
@@ -8708,7 +8780,7 @@
                 <a:ea typeface="Calibri" pitchFamily="34" charset="-122"/>
                 <a:cs typeface="Calibri" pitchFamily="34" charset="-120"/>
               </a:rPr>
-              <a:t>153</a:t>
+              <a:t>160</a:t>
             </a:r>
             <a:endParaRPr lang="en-US" sz="1050" dirty="0"/>
           </a:p>
@@ -8831,7 +8903,7 @@
                 <a:ea typeface="Calibri" pitchFamily="34" charset="-122"/>
                 <a:cs typeface="Calibri" pitchFamily="34" charset="-120"/>
               </a:rPr>
-              <a:t>SEMANA 05-10-2026 — 11-10-2026</a:t>
+              <a:t>SEMANA 12-10-2026 — 18-10-2026</a:t>
             </a:r>
             <a:endParaRPr lang="en-US" sz="1000" dirty="0"/>
           </a:p>
@@ -8909,7 +8981,7 @@
                 <a:ea typeface="Calibri" pitchFamily="34" charset="-122"/>
                 <a:cs typeface="Calibri" pitchFamily="34" charset="-120"/>
               </a:rPr>
-              <a:t>Fuente: Data_NCR.xlsx — hoja «Observaciones» · Corte 12-10-2026 · 515 registros desde 10-02-2023</a:t>
+              <a:t>Fuente: Data_NCR.xlsx — hoja «Observaciones» · Corte 19-10-2026 · 516 registros desde 10-02-2023</a:t>
             </a:r>
             <a:endParaRPr lang="en-US" sz="850" dirty="0"/>
           </a:p>
@@ -9262,7 +9334,7 @@
                 <a:ea typeface="Calibri" pitchFamily="34" charset="-122"/>
                 <a:cs typeface="Calibri" pitchFamily="34" charset="-120"/>
               </a:rPr>
-              <a:t>253 hallazgos levantados · 52 internas · 201 del cliente · 12 especialidades involucradas.</a:t>
+              <a:t>254 hallazgos levantados · 52 internas · 202 del cliente · 12 especialidades involucradas.</a:t>
             </a:r>
             <a:endParaRPr lang="en-US" sz="1350" dirty="0"/>
           </a:p>
@@ -9321,7 +9393,7 @@
                 <a:ea typeface="Cambria" pitchFamily="34" charset="-122"/>
                 <a:cs typeface="Cambria" pitchFamily="34" charset="-120"/>
               </a:rPr>
-              <a:t>99,2%</a:t>
+              <a:t>98,8%</a:t>
             </a:r>
             <a:endParaRPr lang="en-US" sz="3400" dirty="0"/>
           </a:p>
@@ -9399,7 +9471,7 @@
                 <a:ea typeface="Cambria" pitchFamily="34" charset="-122"/>
                 <a:cs typeface="Cambria" pitchFamily="34" charset="-120"/>
               </a:rPr>
-              <a:t>2</a:t>
+              <a:t>3</a:t>
             </a:r>
             <a:endParaRPr lang="en-US" sz="3400" dirty="0"/>
           </a:p>
@@ -9555,7 +9627,7 @@
                 <a:ea typeface="Cambria" pitchFamily="34" charset="-122"/>
                 <a:cs typeface="Cambria" pitchFamily="34" charset="-120"/>
               </a:rPr>
-              <a:t>20,6%</a:t>
+              <a:t>20,5%</a:t>
             </a:r>
             <a:endParaRPr lang="en-US" sz="3400" dirty="0"/>
           </a:p>
@@ -9633,7 +9705,7 @@
                 <a:ea typeface="Calibri" pitchFamily="34" charset="-122"/>
                 <a:cs typeface="Calibri" pitchFamily="34" charset="-120"/>
               </a:rPr>
-              <a:t>Corte: 12-10-2026</a:t>
+              <a:t>Corte: 19-10-2026</a:t>
             </a:r>
             <a:endParaRPr lang="en-US" sz="1100" dirty="0"/>
           </a:p>
@@ -9672,7 +9744,7 @@
                 <a:ea typeface="Calibri" pitchFamily="34" charset="-122"/>
                 <a:cs typeface="Calibri" pitchFamily="34" charset="-120"/>
               </a:rPr>
-              <a:t>Fuente: Data_NCR.xlsx — hoja «Observaciones» · Corte 12-10-2026 · 515 registros desde 10-02-2023</a:t>
+              <a:t>Fuente: Data_NCR.xlsx — hoja «Observaciones» · Corte 19-10-2026 · 516 registros desde 10-02-2023</a:t>
             </a:r>
             <a:endParaRPr lang="en-US" sz="850" dirty="0"/>
           </a:p>
@@ -9938,7 +10010,7 @@
                 <a:ea typeface="Cambria" pitchFamily="34" charset="-122"/>
                 <a:cs typeface="Cambria" pitchFamily="34" charset="-120"/>
               </a:rPr>
-              <a:t>253</a:t>
+              <a:t>254</a:t>
             </a:r>
             <a:endParaRPr lang="en-US" sz="4000" dirty="0"/>
           </a:p>
@@ -10055,7 +10127,7 @@
                 <a:ea typeface="Calibri" pitchFamily="34" charset="-122"/>
                 <a:cs typeface="Calibri" pitchFamily="34" charset="-120"/>
               </a:rPr>
-              <a:t>52 internas · 201 del cliente</a:t>
+              <a:t>52 internas · 202 del cliente</a:t>
             </a:r>
             <a:endParaRPr lang="en-US" sz="950" dirty="0"/>
           </a:p>
@@ -10148,7 +10220,7 @@
                 <a:ea typeface="Cambria" pitchFamily="34" charset="-122"/>
                 <a:cs typeface="Cambria" pitchFamily="34" charset="-120"/>
               </a:rPr>
-              <a:t>99,2%</a:t>
+              <a:t>98,8%</a:t>
             </a:r>
             <a:endParaRPr lang="en-US" sz="4000" dirty="0"/>
           </a:p>
@@ -10187,7 +10259,7 @@
                 <a:ea typeface="Calibri" pitchFamily="34" charset="-122"/>
                 <a:cs typeface="Calibri" pitchFamily="34" charset="-120"/>
               </a:rPr>
-              <a:t>251/253</a:t>
+              <a:t>251/254</a:t>
             </a:r>
             <a:endParaRPr lang="en-US" sz="1400" dirty="0"/>
           </a:p>
@@ -10265,7 +10337,7 @@
                 <a:ea typeface="Calibri" pitchFamily="34" charset="-122"/>
                 <a:cs typeface="Calibri" pitchFamily="34" charset="-120"/>
               </a:rPr>
-              <a:t>Global del módulo: 96,1%</a:t>
+              <a:t>Global del módulo: 96,5%</a:t>
             </a:r>
             <a:endParaRPr lang="en-US" sz="950" dirty="0"/>
           </a:p>
@@ -10358,7 +10430,7 @@
                 <a:ea typeface="Cambria" pitchFamily="34" charset="-122"/>
                 <a:cs typeface="Cambria" pitchFamily="34" charset="-120"/>
               </a:rPr>
-              <a:t>2</a:t>
+              <a:t>3</a:t>
             </a:r>
             <a:endParaRPr lang="en-US" sz="4000" dirty="0"/>
           </a:p>
@@ -10475,7 +10547,7 @@
                 <a:ea typeface="Calibri" pitchFamily="34" charset="-122"/>
                 <a:cs typeface="Calibri" pitchFamily="34" charset="-120"/>
               </a:rPr>
-              <a:t>2 listo para revisión</a:t>
+              <a:t>3 listo para revisión</a:t>
             </a:r>
             <a:endParaRPr lang="en-US" sz="950" dirty="0"/>
           </a:p>
@@ -10801,7 +10873,7 @@
                 <a:ea typeface="Cambria" pitchFamily="34" charset="-122"/>
                 <a:cs typeface="Cambria" pitchFamily="34" charset="-120"/>
               </a:rPr>
-              <a:t>20,6%</a:t>
+              <a:t>20,5%</a:t>
             </a:r>
             <a:endParaRPr lang="en-US" sz="2600" dirty="0"/>
           </a:p>
@@ -11121,7 +11193,7 @@
                 <a:ea typeface="Calibri" pitchFamily="34" charset="-122"/>
                 <a:cs typeface="Calibri" pitchFamily="34" charset="-120"/>
               </a:rPr>
-              <a:t>2 ab.</a:t>
+              <a:t>3 ab.</a:t>
             </a:r>
             <a:endParaRPr lang="en-US" sz="950" dirty="0"/>
           </a:p>
@@ -11160,7 +11232,7 @@
                 <a:ea typeface="Cambria" pitchFamily="34" charset="-122"/>
                 <a:cs typeface="Cambria" pitchFamily="34" charset="-120"/>
               </a:rPr>
-              <a:t>201</a:t>
+              <a:t>202</a:t>
             </a:r>
             <a:endParaRPr lang="en-US" sz="1600" dirty="0"/>
           </a:p>
@@ -11199,7 +11271,7 @@
                 <a:ea typeface="Calibri" pitchFamily="34" charset="-122"/>
                 <a:cs typeface="Calibri" pitchFamily="34" charset="-120"/>
               </a:rPr>
-              <a:t>Fuente: Data_NCR.xlsx — hoja «Observaciones» · Corte 12-10-2026 · 515 registros desde 10-02-2023</a:t>
+              <a:t>Fuente: Data_NCR.xlsx — hoja «Observaciones» · Corte 19-10-2026 · 516 registros desde 10-02-2023</a:t>
             </a:r>
             <a:endParaRPr lang="en-US" sz="850" dirty="0"/>
           </a:p>
@@ -11450,7 +11522,7 @@
                 <a:ea typeface="Calibri" pitchFamily="34" charset="-122"/>
                 <a:cs typeface="Calibri" pitchFamily="34" charset="-120"/>
               </a:rPr>
-              <a:t>2 hallazgos siguen abiertos; 0 con más de 180 días. Se listan del más antiguo al más reciente.</a:t>
+              <a:t>3 hallazgos siguen abiertos; 0 con más de 180 días. Se listan del más antiguo al más reciente.</a:t>
             </a:r>
             <a:endParaRPr lang="en-US" sz="1350" dirty="0"/>
           </a:p>
@@ -12058,7 +12130,7 @@
                 <a:ea typeface="Calibri" pitchFamily="34" charset="-122"/>
                 <a:cs typeface="Calibri" pitchFamily="34" charset="-120"/>
               </a:rPr>
-              <a:t>104</a:t>
+              <a:t>111</a:t>
             </a:r>
             <a:endParaRPr lang="en-US" sz="1050" dirty="0"/>
           </a:p>
@@ -12413,7 +12485,7 @@
                 <a:ea typeface="Calibri" pitchFamily="34" charset="-122"/>
                 <a:cs typeface="Calibri" pitchFamily="34" charset="-120"/>
               </a:rPr>
-              <a:t>19</a:t>
+              <a:t>26</a:t>
             </a:r>
             <a:endParaRPr lang="en-US" sz="1050" dirty="0"/>
           </a:p>
@@ -12483,7 +12555,342 @@
       </p:sp>
       <p:sp>
         <p:nvSpPr>
-          <p:cNvPr id="34" name="Shape 31"/>
+          <p:cNvPr id="34" name="Text 31"/>
+          <p:cNvSpPr/>
+          <p:nvPr/>
+        </p:nvSpPr>
+        <p:spPr>
+          <a:xfrm>
+            <a:off x="502920" y="3008376"/>
+            <a:ext cx="822960" cy="256032"/>
+          </a:xfrm>
+          <a:prstGeom prst="rect">
+            <a:avLst/>
+          </a:prstGeom>
+          <a:noFill/>
+          <a:ln/>
+        </p:spPr>
+        <p:txBody>
+          <a:bodyPr wrap="square" lIns="0" tIns="0" rIns="0" bIns="0" rtlCol="0" anchor="ctr"/>
+          <a:lstStyle/>
+          <a:p>
+            <a:pPr algn="l" indent="0" marL="0">
+              <a:buNone/>
+            </a:pPr>
+            <a:r>
+              <a:rPr lang="en-US" sz="1050" dirty="0">
+                <a:solidFill>
+                  <a:srgbClr val="1A2433"/>
+                </a:solidFill>
+                <a:latin typeface="Calibri" pitchFamily="34" charset="0"/>
+                <a:ea typeface="Calibri" pitchFamily="34" charset="-122"/>
+                <a:cs typeface="Calibri" pitchFamily="34" charset="-120"/>
+              </a:rPr>
+              <a:t>255</a:t>
+            </a:r>
+            <a:endParaRPr lang="en-US" sz="1050" dirty="0"/>
+          </a:p>
+        </p:txBody>
+      </p:sp>
+      <p:sp>
+        <p:nvSpPr>
+          <p:cNvPr id="35" name="Text 32"/>
+          <p:cNvSpPr/>
+          <p:nvPr/>
+        </p:nvSpPr>
+        <p:spPr>
+          <a:xfrm>
+            <a:off x="1371600" y="3008376"/>
+            <a:ext cx="1508760" cy="256032"/>
+          </a:xfrm>
+          <a:prstGeom prst="rect">
+            <a:avLst/>
+          </a:prstGeom>
+          <a:noFill/>
+          <a:ln/>
+        </p:spPr>
+        <p:txBody>
+          <a:bodyPr wrap="square" lIns="0" tIns="0" rIns="0" bIns="0" rtlCol="0" anchor="ctr"/>
+          <a:lstStyle/>
+          <a:p>
+            <a:pPr algn="l" indent="0" marL="0">
+              <a:buNone/>
+            </a:pPr>
+            <a:r>
+              <a:rPr lang="en-US" sz="1050" dirty="0">
+                <a:solidFill>
+                  <a:srgbClr val="1A2433"/>
+                </a:solidFill>
+                <a:latin typeface="Calibri" pitchFamily="34" charset="0"/>
+                <a:ea typeface="Calibri" pitchFamily="34" charset="-122"/>
+                <a:cs typeface="Calibri" pitchFamily="34" charset="-120"/>
+              </a:rPr>
+              <a:t>Producto No Conforme</a:t>
+            </a:r>
+            <a:endParaRPr lang="en-US" sz="1050" dirty="0"/>
+          </a:p>
+        </p:txBody>
+      </p:sp>
+      <p:sp>
+        <p:nvSpPr>
+          <p:cNvPr id="36" name="Text 33"/>
+          <p:cNvSpPr/>
+          <p:nvPr/>
+        </p:nvSpPr>
+        <p:spPr>
+          <a:xfrm>
+            <a:off x="2926080" y="3008376"/>
+            <a:ext cx="1463040" cy="256032"/>
+          </a:xfrm>
+          <a:prstGeom prst="rect">
+            <a:avLst/>
+          </a:prstGeom>
+          <a:noFill/>
+          <a:ln/>
+        </p:spPr>
+        <p:txBody>
+          <a:bodyPr wrap="square" lIns="0" tIns="0" rIns="0" bIns="0" rtlCol="0" anchor="ctr"/>
+          <a:lstStyle/>
+          <a:p>
+            <a:pPr algn="l" indent="0" marL="0">
+              <a:buNone/>
+            </a:pPr>
+            <a:r>
+              <a:rPr lang="en-US" sz="1050" b="1" dirty="0">
+                <a:solidFill>
+                  <a:srgbClr val="C87A32"/>
+                </a:solidFill>
+                <a:latin typeface="Calibri" pitchFamily="34" charset="0"/>
+                <a:ea typeface="Calibri" pitchFamily="34" charset="-122"/>
+                <a:cs typeface="Calibri" pitchFamily="34" charset="-120"/>
+              </a:rPr>
+              <a:t>Externa · Cliente</a:t>
+            </a:r>
+            <a:endParaRPr lang="en-US" sz="1050" dirty="0"/>
+          </a:p>
+        </p:txBody>
+      </p:sp>
+      <p:sp>
+        <p:nvSpPr>
+          <p:cNvPr id="37" name="Text 34"/>
+          <p:cNvSpPr/>
+          <p:nvPr/>
+        </p:nvSpPr>
+        <p:spPr>
+          <a:xfrm>
+            <a:off x="4434840" y="3008376"/>
+            <a:ext cx="1280160" cy="256032"/>
+          </a:xfrm>
+          <a:prstGeom prst="rect">
+            <a:avLst/>
+          </a:prstGeom>
+          <a:noFill/>
+          <a:ln/>
+        </p:spPr>
+        <p:txBody>
+          <a:bodyPr wrap="square" lIns="0" tIns="0" rIns="0" bIns="0" rtlCol="0" anchor="ctr"/>
+          <a:lstStyle/>
+          <a:p>
+            <a:pPr algn="l" indent="0" marL="0">
+              <a:buNone/>
+            </a:pPr>
+            <a:r>
+              <a:rPr lang="en-US" sz="1050" dirty="0">
+                <a:solidFill>
+                  <a:srgbClr val="1A2433"/>
+                </a:solidFill>
+                <a:latin typeface="Calibri" pitchFamily="34" charset="0"/>
+                <a:ea typeface="Calibri" pitchFamily="34" charset="-122"/>
+                <a:cs typeface="Calibri" pitchFamily="34" charset="-120"/>
+              </a:rPr>
+              <a:t>OO.CC</a:t>
+            </a:r>
+            <a:endParaRPr lang="en-US" sz="1050" dirty="0"/>
+          </a:p>
+        </p:txBody>
+      </p:sp>
+      <p:sp>
+        <p:nvSpPr>
+          <p:cNvPr id="38" name="Text 35"/>
+          <p:cNvSpPr/>
+          <p:nvPr/>
+        </p:nvSpPr>
+        <p:spPr>
+          <a:xfrm>
+            <a:off x="5760720" y="3008376"/>
+            <a:ext cx="1508760" cy="256032"/>
+          </a:xfrm>
+          <a:prstGeom prst="rect">
+            <a:avLst/>
+          </a:prstGeom>
+          <a:noFill/>
+          <a:ln/>
+        </p:spPr>
+        <p:txBody>
+          <a:bodyPr wrap="square" lIns="0" tIns="0" rIns="0" bIns="0" rtlCol="0" anchor="ctr"/>
+          <a:lstStyle/>
+          <a:p>
+            <a:pPr algn="l" indent="0" marL="0">
+              <a:buNone/>
+            </a:pPr>
+            <a:r>
+              <a:rPr lang="en-US" sz="1050" dirty="0">
+                <a:solidFill>
+                  <a:srgbClr val="1A2433"/>
+                </a:solidFill>
+                <a:latin typeface="Calibri" pitchFamily="34" charset="0"/>
+                <a:ea typeface="Calibri" pitchFamily="34" charset="-122"/>
+                <a:cs typeface="Calibri" pitchFamily="34" charset="-120"/>
+              </a:rPr>
+              <a:t>Wladimir Carvajal …</a:t>
+            </a:r>
+            <a:endParaRPr lang="en-US" sz="1050" dirty="0"/>
+          </a:p>
+        </p:txBody>
+      </p:sp>
+      <p:sp>
+        <p:nvSpPr>
+          <p:cNvPr id="39" name="Text 36"/>
+          <p:cNvSpPr/>
+          <p:nvPr/>
+        </p:nvSpPr>
+        <p:spPr>
+          <a:xfrm>
+            <a:off x="7315200" y="3008376"/>
+            <a:ext cx="1325880" cy="256032"/>
+          </a:xfrm>
+          <a:prstGeom prst="rect">
+            <a:avLst/>
+          </a:prstGeom>
+          <a:noFill/>
+          <a:ln/>
+        </p:spPr>
+        <p:txBody>
+          <a:bodyPr wrap="square" lIns="0" tIns="0" rIns="0" bIns="0" rtlCol="0" anchor="ctr"/>
+          <a:lstStyle/>
+          <a:p>
+            <a:pPr algn="l" indent="0" marL="0">
+              <a:buNone/>
+            </a:pPr>
+            <a:r>
+              <a:rPr lang="en-US" sz="1050" dirty="0">
+                <a:solidFill>
+                  <a:srgbClr val="1A2433"/>
+                </a:solidFill>
+                <a:latin typeface="Calibri" pitchFamily="34" charset="0"/>
+                <a:ea typeface="Calibri" pitchFamily="34" charset="-122"/>
+                <a:cs typeface="Calibri" pitchFamily="34" charset="-120"/>
+              </a:rPr>
+              <a:t>Listo para revisi…</a:t>
+            </a:r>
+            <a:endParaRPr lang="en-US" sz="1050" dirty="0"/>
+          </a:p>
+        </p:txBody>
+      </p:sp>
+      <p:sp>
+        <p:nvSpPr>
+          <p:cNvPr id="40" name="Text 37"/>
+          <p:cNvSpPr/>
+          <p:nvPr/>
+        </p:nvSpPr>
+        <p:spPr>
+          <a:xfrm>
+            <a:off x="8686800" y="3008376"/>
+            <a:ext cx="640080" cy="256032"/>
+          </a:xfrm>
+          <a:prstGeom prst="rect">
+            <a:avLst/>
+          </a:prstGeom>
+          <a:noFill/>
+          <a:ln/>
+        </p:spPr>
+        <p:txBody>
+          <a:bodyPr wrap="square" lIns="0" tIns="0" rIns="0" bIns="0" rtlCol="0" anchor="ctr"/>
+          <a:lstStyle/>
+          <a:p>
+            <a:pPr algn="r" indent="0" marL="0">
+              <a:buNone/>
+            </a:pPr>
+            <a:r>
+              <a:rPr lang="en-US" sz="1050" dirty="0">
+                <a:solidFill>
+                  <a:srgbClr val="1A2433"/>
+                </a:solidFill>
+                <a:latin typeface="Calibri" pitchFamily="34" charset="0"/>
+                <a:ea typeface="Calibri" pitchFamily="34" charset="-122"/>
+                <a:cs typeface="Calibri" pitchFamily="34" charset="-120"/>
+              </a:rPr>
+              <a:t>5</a:t>
+            </a:r>
+            <a:endParaRPr lang="en-US" sz="1050" dirty="0"/>
+          </a:p>
+        </p:txBody>
+      </p:sp>
+      <p:sp>
+        <p:nvSpPr>
+          <p:cNvPr id="41" name="Text 38"/>
+          <p:cNvSpPr/>
+          <p:nvPr/>
+        </p:nvSpPr>
+        <p:spPr>
+          <a:xfrm>
+            <a:off x="9464040" y="3008376"/>
+            <a:ext cx="2286000" cy="256032"/>
+          </a:xfrm>
+          <a:prstGeom prst="rect">
+            <a:avLst/>
+          </a:prstGeom>
+          <a:noFill/>
+          <a:ln/>
+        </p:spPr>
+        <p:txBody>
+          <a:bodyPr wrap="square" lIns="0" tIns="0" rIns="0" bIns="0" rtlCol="0" anchor="ctr"/>
+          <a:lstStyle/>
+          <a:p>
+            <a:pPr algn="l" indent="0" marL="0">
+              <a:buNone/>
+            </a:pPr>
+            <a:r>
+              <a:rPr lang="en-US" sz="1000" dirty="0">
+                <a:solidFill>
+                  <a:srgbClr val="1A2433"/>
+                </a:solidFill>
+                <a:latin typeface="Calibri" pitchFamily="34" charset="0"/>
+                <a:ea typeface="Calibri" pitchFamily="34" charset="-122"/>
+                <a:cs typeface="Calibri" pitchFamily="34" charset="-120"/>
+              </a:rPr>
+              <a:t>Arrugas en piscina QS.</a:t>
+            </a:r>
+            <a:endParaRPr lang="en-US" sz="1000" dirty="0"/>
+          </a:p>
+        </p:txBody>
+      </p:sp>
+      <p:sp>
+        <p:nvSpPr>
+          <p:cNvPr id="42" name="Shape 39"/>
+          <p:cNvSpPr/>
+          <p:nvPr/>
+        </p:nvSpPr>
+        <p:spPr>
+          <a:xfrm>
+            <a:off x="502920" y="3300984"/>
+            <a:ext cx="11247120" cy="0"/>
+          </a:xfrm>
+          <a:prstGeom prst="line">
+            <a:avLst/>
+          </a:prstGeom>
+          <a:noFill/>
+          <a:ln w="9525">
+            <a:solidFill>
+              <a:srgbClr val="D9DFE6"/>
+            </a:solidFill>
+            <a:prstDash val="solid"/>
+          </a:ln>
+        </p:spPr>
+      </p:sp>
+      <p:sp>
+        <p:nvSpPr>
+          <p:cNvPr id="43" name="Shape 40"/>
           <p:cNvSpPr/>
           <p:nvPr/>
         </p:nvSpPr>
@@ -12498,14 +12905,14 @@
             </a:avLst>
           </a:prstGeom>
           <a:solidFill>
-            <a:srgbClr val="E9EDF2"/>
+            <a:srgbClr val="12233B"/>
           </a:solidFill>
           <a:ln/>
         </p:spPr>
       </p:sp>
       <p:sp>
         <p:nvSpPr>
-          <p:cNvPr id="35" name="Text 32"/>
+          <p:cNvPr id="44" name="Text 41"/>
           <p:cNvSpPr/>
           <p:nvPr/>
         </p:nvSpPr>
@@ -12530,13 +12937,13 @@
             <a:r>
               <a:rPr lang="en-US" sz="1000" b="1" spc="100" kern="0" dirty="0">
                 <a:solidFill>
-                  <a:srgbClr val="56606E"/>
-                </a:solidFill>
-                <a:latin typeface="Calibri" pitchFamily="34" charset="0"/>
-                <a:ea typeface="Calibri" pitchFamily="34" charset="-122"/>
-                <a:cs typeface="Calibri" pitchFamily="34" charset="-120"/>
-              </a:rPr>
-              <a:t>SEMANA 05-10-2026 — 11-10-2026</a:t>
+                  <a:srgbClr val="E3A55B"/>
+                </a:solidFill>
+                <a:latin typeface="Calibri" pitchFamily="34" charset="0"/>
+                <a:ea typeface="Calibri" pitchFamily="34" charset="-122"/>
+                <a:cs typeface="Calibri" pitchFamily="34" charset="-120"/>
+              </a:rPr>
+              <a:t>SEMANA 12-10-2026 — 18-10-2026</a:t>
             </a:r>
             <a:endParaRPr lang="en-US" sz="1000" dirty="0"/>
           </a:p>
@@ -12544,7 +12951,7 @@
       </p:sp>
       <p:sp>
         <p:nvSpPr>
-          <p:cNvPr id="36" name="Text 33"/>
+          <p:cNvPr id="45" name="Text 42"/>
           <p:cNvSpPr/>
           <p:nvPr/>
         </p:nvSpPr>
@@ -12569,13 +12976,13 @@
             <a:r>
               <a:rPr lang="en-US" sz="1150" dirty="0">
                 <a:solidFill>
-                  <a:srgbClr val="56606E"/>
-                </a:solidFill>
-                <a:latin typeface="Calibri" pitchFamily="34" charset="0"/>
-                <a:ea typeface="Calibri" pitchFamily="34" charset="-122"/>
-                <a:cs typeface="Calibri" pitchFamily="34" charset="-120"/>
-              </a:rPr>
-              <a:t>Sin hallazgos nuevos en el período.</a:t>
+                  <a:srgbClr val="FFFFFF"/>
+                </a:solidFill>
+                <a:latin typeface="Calibri" pitchFamily="34" charset="0"/>
+                <a:ea typeface="Calibri" pitchFamily="34" charset="-122"/>
+                <a:cs typeface="Calibri" pitchFamily="34" charset="-120"/>
+              </a:rPr>
+              <a:t>1 hallazgo nuevo · 0 internas · 1 del cliente · OO.CC 1 · 1 sigue abierto</a:t>
             </a:r>
             <a:endParaRPr lang="en-US" sz="1150" dirty="0"/>
           </a:p>
@@ -12583,7 +12990,7 @@
       </p:sp>
       <p:sp>
         <p:nvSpPr>
-          <p:cNvPr id="37" name="Text 34"/>
+          <p:cNvPr id="46" name="Text 43"/>
           <p:cNvSpPr/>
           <p:nvPr/>
         </p:nvSpPr>
@@ -12614,7 +13021,7 @@
                 <a:ea typeface="Calibri" pitchFamily="34" charset="-122"/>
                 <a:cs typeface="Calibri" pitchFamily="34" charset="-120"/>
               </a:rPr>
-              <a:t>Fuente: Data_NCR.xlsx — hoja «Observaciones» · Corte 12-10-2026 · 515 registros desde 10-02-2023</a:t>
+              <a:t>Fuente: Data_NCR.xlsx — hoja «Observaciones» · Corte 19-10-2026 · 516 registros desde 10-02-2023</a:t>
             </a:r>
             <a:endParaRPr lang="en-US" sz="850" dirty="0"/>
           </a:p>
@@ -12622,7 +13029,7 @@
       </p:sp>
       <p:sp>
         <p:nvSpPr>
-          <p:cNvPr id="38" name="Text 35"/>
+          <p:cNvPr id="47" name="Text 44"/>
           <p:cNvSpPr/>
           <p:nvPr/>
         </p:nvSpPr>
@@ -12661,7 +13068,7 @@
       </p:sp>
       <p:sp>
         <p:nvSpPr>
-          <p:cNvPr id="39" name="Text 36"/>
+          <p:cNvPr id="48" name="Text 45"/>
           <p:cNvSpPr/>
           <p:nvPr/>
         </p:nvSpPr>
@@ -13026,7 +13433,7 @@
                 <a:ea typeface="Cambria" pitchFamily="34" charset="-122"/>
                 <a:cs typeface="Cambria" pitchFamily="34" charset="-120"/>
               </a:rPr>
-              <a:t>90,1%</a:t>
+              <a:t>91,9%</a:t>
             </a:r>
             <a:endParaRPr lang="en-US" sz="3400" dirty="0"/>
           </a:p>
@@ -13104,7 +13511,7 @@
                 <a:ea typeface="Cambria" pitchFamily="34" charset="-122"/>
                 <a:cs typeface="Cambria" pitchFamily="34" charset="-120"/>
               </a:rPr>
-              <a:t>17</a:t>
+              <a:t>14</a:t>
             </a:r>
             <a:endParaRPr lang="en-US" sz="3400" dirty="0"/>
           </a:p>
@@ -13338,7 +13745,7 @@
                 <a:ea typeface="Calibri" pitchFamily="34" charset="-122"/>
                 <a:cs typeface="Calibri" pitchFamily="34" charset="-120"/>
               </a:rPr>
-              <a:t>Corte: 12-10-2026</a:t>
+              <a:t>Corte: 19-10-2026</a:t>
             </a:r>
             <a:endParaRPr lang="en-US" sz="1100" dirty="0"/>
           </a:p>
@@ -13377,7 +13784,7 @@
                 <a:ea typeface="Calibri" pitchFamily="34" charset="-122"/>
                 <a:cs typeface="Calibri" pitchFamily="34" charset="-120"/>
               </a:rPr>
-              <a:t>Fuente: Data_NCR.xlsx — hoja «Observaciones» · Corte 12-10-2026 · 515 registros desde 10-02-2023</a:t>
+              <a:t>Fuente: Data_NCR.xlsx — hoja «Observaciones» · Corte 19-10-2026 · 516 registros desde 10-02-2023</a:t>
             </a:r>
             <a:endParaRPr lang="en-US" sz="850" dirty="0"/>
           </a:p>
@@ -13682,7 +14089,7 @@
                 <a:ea typeface="Calibri" pitchFamily="34" charset="-122"/>
                 <a:cs typeface="Calibri" pitchFamily="34" charset="-120"/>
               </a:rPr>
-              <a:t>155 cerrados</a:t>
+              <a:t>158 cerrados</a:t>
             </a:r>
             <a:endParaRPr lang="en-US" sz="1400" dirty="0"/>
           </a:p>
@@ -13853,7 +14260,7 @@
                 <a:ea typeface="Cambria" pitchFamily="34" charset="-122"/>
                 <a:cs typeface="Cambria" pitchFamily="34" charset="-120"/>
               </a:rPr>
-              <a:t>90,1%</a:t>
+              <a:t>91,9%</a:t>
             </a:r>
             <a:endParaRPr lang="en-US" sz="4000" dirty="0"/>
           </a:p>
@@ -13892,7 +14299,7 @@
                 <a:ea typeface="Calibri" pitchFamily="34" charset="-122"/>
                 <a:cs typeface="Calibri" pitchFamily="34" charset="-120"/>
               </a:rPr>
-              <a:t>155/172</a:t>
+              <a:t>158/172</a:t>
             </a:r>
             <a:endParaRPr lang="en-US" sz="1400" dirty="0"/>
           </a:p>
@@ -13970,7 +14377,7 @@
                 <a:ea typeface="Calibri" pitchFamily="34" charset="-122"/>
                 <a:cs typeface="Calibri" pitchFamily="34" charset="-120"/>
               </a:rPr>
-              <a:t>Global del módulo: 96,1%</a:t>
+              <a:t>Global del módulo: 96,5%</a:t>
             </a:r>
             <a:endParaRPr lang="en-US" sz="950" dirty="0"/>
           </a:p>
@@ -14063,7 +14470,7 @@
                 <a:ea typeface="Cambria" pitchFamily="34" charset="-122"/>
                 <a:cs typeface="Cambria" pitchFamily="34" charset="-120"/>
               </a:rPr>
-              <a:t>17</a:t>
+              <a:t>14</a:t>
             </a:r>
             <a:endParaRPr lang="en-US" sz="4000" dirty="0"/>
           </a:p>
@@ -14180,7 +14587,7 @@
                 <a:ea typeface="Calibri" pitchFamily="34" charset="-122"/>
                 <a:cs typeface="Calibri" pitchFamily="34" charset="-120"/>
               </a:rPr>
-              <a:t>1 iniciado · 6 observada · 8 listo para revisión · 2 pendiente</a:t>
+              <a:t>1 iniciado · 5 observada · 6 listo para revisión · 2 pendiente</a:t>
             </a:r>
             <a:endParaRPr lang="en-US" sz="950" dirty="0"/>
           </a:p>
@@ -14390,7 +14797,7 @@
                 <a:ea typeface="Calibri" pitchFamily="34" charset="-122"/>
                 <a:cs typeface="Calibri" pitchFamily="34" charset="-120"/>
               </a:rPr>
-              <a:t>el más lento tomó 427 días</a:t>
+              <a:t>el más lento tomó 438 días</a:t>
             </a:r>
             <a:endParaRPr lang="en-US" sz="950" dirty="0"/>
           </a:p>
@@ -14826,7 +15233,7 @@
                 <a:ea typeface="Calibri" pitchFamily="34" charset="-122"/>
                 <a:cs typeface="Calibri" pitchFamily="34" charset="-120"/>
               </a:rPr>
-              <a:t>16 ab.</a:t>
+              <a:t>13 ab.</a:t>
             </a:r>
             <a:endParaRPr lang="en-US" sz="950" dirty="0"/>
           </a:p>
@@ -15041,7 +15448,7 @@
                 <a:ea typeface="Calibri" pitchFamily="34" charset="-122"/>
                 <a:cs typeface="Calibri" pitchFamily="34" charset="-120"/>
               </a:rPr>
-              <a:t>Fuente: Data_NCR.xlsx — hoja «Observaciones» · Corte 12-10-2026 · 515 registros desde 10-02-2023</a:t>
+              <a:t>Fuente: Data_NCR.xlsx — hoja «Observaciones» · Corte 19-10-2026 · 516 registros desde 10-02-2023</a:t>
             </a:r>
             <a:endParaRPr lang="en-US" sz="850" dirty="0"/>
           </a:p>
@@ -15292,7 +15699,7 @@
                 <a:ea typeface="Calibri" pitchFamily="34" charset="-122"/>
                 <a:cs typeface="Calibri" pitchFamily="34" charset="-120"/>
               </a:rPr>
-              <a:t>17 hallazgos siguen abiertos; 9 con más de 180 días. Se listan del más antiguo al más reciente.</a:t>
+              <a:t>14 hallazgos siguen abiertos; 9 con más de 180 días. Se listan del más antiguo al más reciente.</a:t>
             </a:r>
             <a:endParaRPr lang="en-US" sz="1350" dirty="0"/>
           </a:p>
@@ -15900,7 +16307,7 @@
                 <a:ea typeface="Calibri" pitchFamily="34" charset="-122"/>
                 <a:cs typeface="Calibri" pitchFamily="34" charset="-120"/>
               </a:rPr>
-              <a:t>361</a:t>
+              <a:t>368</a:t>
             </a:r>
             <a:endParaRPr lang="en-US" sz="1050" dirty="0"/>
           </a:p>
@@ -16255,7 +16662,7 @@
                 <a:ea typeface="Calibri" pitchFamily="34" charset="-122"/>
                 <a:cs typeface="Calibri" pitchFamily="34" charset="-120"/>
               </a:rPr>
-              <a:t>299</a:t>
+              <a:t>306</a:t>
             </a:r>
             <a:endParaRPr lang="en-US" sz="1050" dirty="0"/>
           </a:p>
@@ -16590,7 +16997,7 @@
                 <a:ea typeface="Calibri" pitchFamily="34" charset="-122"/>
                 <a:cs typeface="Calibri" pitchFamily="34" charset="-120"/>
               </a:rPr>
-              <a:t>270</a:t>
+              <a:t>277</a:t>
             </a:r>
             <a:endParaRPr lang="en-US" sz="1050" dirty="0"/>
           </a:p>
@@ -16945,7 +17352,7 @@
                 <a:ea typeface="Calibri" pitchFamily="34" charset="-122"/>
                 <a:cs typeface="Calibri" pitchFamily="34" charset="-120"/>
               </a:rPr>
-              <a:t>270</a:t>
+              <a:t>277</a:t>
             </a:r>
             <a:endParaRPr lang="en-US" sz="1050" dirty="0"/>
           </a:p>
@@ -17280,7 +17687,7 @@
                 <a:ea typeface="Calibri" pitchFamily="34" charset="-122"/>
                 <a:cs typeface="Calibri" pitchFamily="34" charset="-120"/>
               </a:rPr>
-              <a:t>249</a:t>
+              <a:t>256</a:t>
             </a:r>
             <a:endParaRPr lang="en-US" sz="1050" dirty="0"/>
           </a:p>
@@ -17635,7 +18042,7 @@
                 <a:ea typeface="Calibri" pitchFamily="34" charset="-122"/>
                 <a:cs typeface="Calibri" pitchFamily="34" charset="-120"/>
               </a:rPr>
-              <a:t>220</a:t>
+              <a:t>227</a:t>
             </a:r>
             <a:endParaRPr lang="en-US" sz="1050" dirty="0"/>
           </a:p>
@@ -17970,7 +18377,7 @@
                 <a:ea typeface="Calibri" pitchFamily="34" charset="-122"/>
                 <a:cs typeface="Calibri" pitchFamily="34" charset="-120"/>
               </a:rPr>
-              <a:t>216</a:t>
+              <a:t>223</a:t>
             </a:r>
             <a:endParaRPr lang="en-US" sz="1050" dirty="0"/>
           </a:p>
@@ -18325,7 +18732,7 @@
                 <a:ea typeface="Calibri" pitchFamily="34" charset="-122"/>
                 <a:cs typeface="Calibri" pitchFamily="34" charset="-120"/>
               </a:rPr>
-              <a:t>216</a:t>
+              <a:t>223</a:t>
             </a:r>
             <a:endParaRPr lang="en-US" sz="1050" dirty="0"/>
           </a:p>
@@ -18660,7 +19067,7 @@
                 <a:ea typeface="Calibri" pitchFamily="34" charset="-122"/>
                 <a:cs typeface="Calibri" pitchFamily="34" charset="-120"/>
               </a:rPr>
-              <a:t>186</a:t>
+              <a:t>193</a:t>
             </a:r>
             <a:endParaRPr lang="en-US" sz="1050" dirty="0"/>
           </a:p>
@@ -18761,7 +19168,7 @@
                 <a:ea typeface="Calibri" pitchFamily="34" charset="-122"/>
                 <a:cs typeface="Calibri" pitchFamily="34" charset="-120"/>
               </a:rPr>
-              <a:t>Se listan los 9 más antiguos de 17 abiertos; el detalle completo está en el panel.</a:t>
+              <a:t>Se listan los 9 más antiguos de 14 abiertos; el detalle completo está en el panel.</a:t>
             </a:r>
             <a:endParaRPr lang="en-US" sz="950" dirty="0"/>
           </a:p>
@@ -18822,7 +19229,7 @@
                 <a:ea typeface="Calibri" pitchFamily="34" charset="-122"/>
                 <a:cs typeface="Calibri" pitchFamily="34" charset="-120"/>
               </a:rPr>
-              <a:t>SEMANA 05-10-2026 — 11-10-2026</a:t>
+              <a:t>SEMANA 12-10-2026 — 18-10-2026</a:t>
             </a:r>
             <a:endParaRPr lang="en-US" sz="1000" dirty="0"/>
           </a:p>
@@ -18900,7 +19307,7 @@
                 <a:ea typeface="Calibri" pitchFamily="34" charset="-122"/>
                 <a:cs typeface="Calibri" pitchFamily="34" charset="-120"/>
               </a:rPr>
-              <a:t>Fuente: Data_NCR.xlsx — hoja «Observaciones» · Corte 12-10-2026 · 515 registros desde 10-02-2023</a:t>
+              <a:t>Fuente: Data_NCR.xlsx — hoja «Observaciones» · Corte 19-10-2026 · 516 registros desde 10-02-2023</a:t>
             </a:r>
             <a:endParaRPr lang="en-US" sz="850" dirty="0"/>
           </a:p>
@@ -19205,7 +19612,7 @@
                 <a:ea typeface="Cambria" pitchFamily="34" charset="-122"/>
                 <a:cs typeface="Cambria" pitchFamily="34" charset="-120"/>
               </a:rPr>
-              <a:t>96,1%</a:t>
+              <a:t>96,5%</a:t>
             </a:r>
             <a:endParaRPr lang="en-US" sz="4000" dirty="0"/>
           </a:p>
@@ -19244,7 +19651,7 @@
                 <a:ea typeface="Calibri" pitchFamily="34" charset="-122"/>
                 <a:cs typeface="Calibri" pitchFamily="34" charset="-120"/>
               </a:rPr>
-              <a:t>495/515</a:t>
+              <a:t>498/516</a:t>
             </a:r>
             <a:endParaRPr lang="en-US" sz="1400" dirty="0"/>
           </a:p>
@@ -19322,7 +19729,7 @@
                 <a:ea typeface="Calibri" pitchFamily="34" charset="-122"/>
                 <a:cs typeface="Calibri" pitchFamily="34" charset="-120"/>
               </a:rPr>
-              <a:t>20 abiertos · 9 con más de 180 días</a:t>
+              <a:t>18 abiertos · 9 con más de 180 días</a:t>
             </a:r>
             <a:endParaRPr lang="en-US" sz="950" dirty="0"/>
           </a:p>
@@ -19415,7 +19822,7 @@
                 <a:ea typeface="Cambria" pitchFamily="34" charset="-122"/>
                 <a:cs typeface="Cambria" pitchFamily="34" charset="-120"/>
               </a:rPr>
-              <a:t>20</a:t>
+              <a:t>18</a:t>
             </a:r>
             <a:endParaRPr lang="en-US" sz="4000" dirty="0"/>
           </a:p>
@@ -19454,7 +19861,7 @@
                 <a:ea typeface="Calibri" pitchFamily="34" charset="-122"/>
                 <a:cs typeface="Calibri" pitchFamily="34" charset="-120"/>
               </a:rPr>
-              <a:t>de 515 levantados</a:t>
+              <a:t>de 516 levantados</a:t>
             </a:r>
             <a:endParaRPr lang="en-US" sz="1400" dirty="0"/>
           </a:p>
@@ -19532,7 +19939,7 @@
                 <a:ea typeface="Calibri" pitchFamily="34" charset="-122"/>
                 <a:cs typeface="Calibri" pitchFamily="34" charset="-120"/>
               </a:rPr>
-              <a:t>11 listo para revisión · 1 iniciado · 6 observada · 2 pendiente</a:t>
+              <a:t>10 listo para revisión · 1 iniciado · 5 observada · 2 pendiente</a:t>
             </a:r>
             <a:endParaRPr lang="en-US" sz="950" dirty="0"/>
           </a:p>
@@ -19664,7 +20071,7 @@
                 <a:ea typeface="Calibri" pitchFamily="34" charset="-122"/>
                 <a:cs typeface="Calibri" pitchFamily="34" charset="-120"/>
               </a:rPr>
-              <a:t>159/506 clasificados</a:t>
+              <a:t>159/507 clasificados</a:t>
             </a:r>
             <a:endParaRPr lang="en-US" sz="1400" dirty="0"/>
           </a:p>
@@ -19874,7 +20281,7 @@
                 <a:ea typeface="Calibri" pitchFamily="34" charset="-122"/>
                 <a:cs typeface="Calibri" pitchFamily="34" charset="-120"/>
               </a:rPr>
-              <a:t>251 de 515 con costo</a:t>
+              <a:t>251 de 516 con costo</a:t>
             </a:r>
             <a:endParaRPr lang="en-US" sz="1400" dirty="0"/>
           </a:p>
@@ -19952,7 +20359,7 @@
                 <a:ea typeface="Calibri" pitchFamily="34" charset="-122"/>
                 <a:cs typeface="Calibri" pitchFamily="34" charset="-120"/>
               </a:rPr>
-              <a:t>264 hallazgos no declaran costo: la cifra es un piso</a:t>
+              <a:t>265 hallazgos no declaran costo: la cifra es un piso</a:t>
             </a:r>
             <a:endParaRPr lang="en-US" sz="950" dirty="0"/>
           </a:p>
@@ -20092,7 +20499,7 @@
                 <a:ea typeface="Calibri" pitchFamily="34" charset="-122"/>
                 <a:cs typeface="Calibri" pitchFamily="34" charset="-120"/>
               </a:rPr>
-              <a:t>17 de los 20 hallazgos abiertos (85%), y es uno de los frentes donde el cliente levanta más de lo que detecta Besalco (79 del cliente contra 53 internas).</a:t>
+              <a:t>14 de los 18 hallazgos abiertos (77,8%), y es uno de los frentes donde el cliente levanta más de lo que detecta Besalco (79 del cliente contra 53 internas).</a:t>
             </a:r>
             <a:endParaRPr lang="en-US" sz="1250" dirty="0"/>
           </a:p>
@@ -20154,7 +20561,7 @@
                 <a:ea typeface="Calibri" pitchFamily="34" charset="-122"/>
                 <a:cs typeface="Calibri" pitchFamily="34" charset="-120"/>
               </a:rPr>
-              <a:t>La semana cerró sin hallazgos nuevos.  </a:t>
+              <a:t>La semana trajo 1 hallazgo nuevo, ninguno de autodetección.  </a:t>
             </a:r>
             <a:pPr indent="0" marL="0">
               <a:lnSpc>
@@ -20171,7 +20578,7 @@
                 <a:ea typeface="Calibri" pitchFamily="34" charset="-122"/>
                 <a:cs typeface="Calibri" pitchFamily="34" charset="-120"/>
               </a:rPr>
-              <a:t>Entre el 05-10-2026 y el 11-10-2026 no se levantó ningún hallazgo en ningún frente.</a:t>
+              <a:t>12-10-2026 al 18-10-2026: 1 del cliente en OO.CC (1). Todos siguen abiertos; la semana anterior entraron 0.</a:t>
             </a:r>
             <a:endParaRPr lang="en-US" sz="1250" dirty="0"/>
           </a:p>
@@ -20233,7 +20640,7 @@
                 <a:ea typeface="Calibri" pitchFamily="34" charset="-122"/>
                 <a:cs typeface="Calibri" pitchFamily="34" charset="-120"/>
               </a:rPr>
-              <a:t>20 de los 20 abiertos están fuera del plazo de respuesta.  </a:t>
+              <a:t>17 de los 18 abiertos están fuera del plazo de respuesta.  </a:t>
             </a:r>
             <a:pPr indent="0" marL="0">
               <a:lnSpc>
@@ -20250,7 +20657,7 @@
                 <a:ea typeface="Calibri" pitchFamily="34" charset="-122"/>
                 <a:cs typeface="Calibri" pitchFamily="34" charset="-120"/>
               </a:rPr>
-              <a:t>El plazo es de 10 días desde que se emite la NC. De los atrasados, 9 llevan más de 180 días abiertos y 0 más de un año: no es atraso de días, es deuda vieja.</a:t>
+              <a:t>El plazo es de 10 días desde que se emite la NC. De los atrasados, 9 llevan más de 180 días abiertos y 1 más de un año: no es atraso de días, es deuda vieja.</a:t>
             </a:r>
             <a:endParaRPr lang="en-US" sz="1250" dirty="0"/>
           </a:p>
@@ -20289,7 +20696,7 @@
                 <a:ea typeface="Calibri" pitchFamily="34" charset="-122"/>
                 <a:cs typeface="Calibri" pitchFamily="34" charset="-120"/>
               </a:rPr>
-              <a:t>Fuente: Data_NCR.xlsx — hoja «Observaciones» · Corte 12-10-2026 · 515 registros desde 10-02-2023</a:t>
+              <a:t>Fuente: Data_NCR.xlsx — hoja «Observaciones» · Corte 19-10-2026 · 516 registros desde 10-02-2023</a:t>
             </a:r>
             <a:endParaRPr lang="en-US" sz="850" dirty="0"/>
           </a:p>
@@ -21564,7 +21971,7 @@
                 <a:ea typeface="Calibri" pitchFamily="34" charset="-122"/>
                 <a:cs typeface="Calibri" pitchFamily="34" charset="-120"/>
               </a:rPr>
-              <a:t>253</a:t>
+              <a:t>254</a:t>
             </a:r>
             <a:endParaRPr lang="en-US" sz="1300" dirty="0"/>
           </a:p>
@@ -21642,7 +22049,7 @@
                 <a:ea typeface="Calibri" pitchFamily="34" charset="-122"/>
                 <a:cs typeface="Calibri" pitchFamily="34" charset="-120"/>
               </a:rPr>
-              <a:t>2</a:t>
+              <a:t>3</a:t>
             </a:r>
             <a:endParaRPr lang="en-US" sz="1300" dirty="0"/>
           </a:p>
@@ -21681,7 +22088,7 @@
                 <a:ea typeface="Calibri" pitchFamily="34" charset="-122"/>
                 <a:cs typeface="Calibri" pitchFamily="34" charset="-120"/>
               </a:rPr>
-              <a:t>99,2%</a:t>
+              <a:t>98,8%</a:t>
             </a:r>
             <a:endParaRPr lang="en-US" sz="1300" dirty="0"/>
           </a:p>
@@ -21759,7 +22166,7 @@
                 <a:ea typeface="Calibri" pitchFamily="34" charset="-122"/>
                 <a:cs typeface="Calibri" pitchFamily="34" charset="-120"/>
               </a:rPr>
-              <a:t>201</a:t>
+              <a:t>202</a:t>
             </a:r>
             <a:endParaRPr lang="en-US" sz="1300" dirty="0"/>
           </a:p>
@@ -22077,7 +22484,7 @@
                 <a:ea typeface="Calibri" pitchFamily="34" charset="-122"/>
                 <a:cs typeface="Calibri" pitchFamily="34" charset="-120"/>
               </a:rPr>
-              <a:t>155</a:t>
+              <a:t>158</a:t>
             </a:r>
             <a:endParaRPr lang="en-US" sz="1300" dirty="0"/>
           </a:p>
@@ -22110,13 +22517,13 @@
             <a:r>
               <a:rPr lang="en-US" sz="1300" dirty="0">
                 <a:solidFill>
-                  <a:srgbClr val="C0392B"/>
-                </a:solidFill>
-                <a:latin typeface="Calibri" pitchFamily="34" charset="0"/>
-                <a:ea typeface="Calibri" pitchFamily="34" charset="-122"/>
-                <a:cs typeface="Calibri" pitchFamily="34" charset="-120"/>
-              </a:rPr>
-              <a:t>17</a:t>
+                  <a:srgbClr val="1A2433"/>
+                </a:solidFill>
+                <a:latin typeface="Calibri" pitchFamily="34" charset="0"/>
+                <a:ea typeface="Calibri" pitchFamily="34" charset="-122"/>
+                <a:cs typeface="Calibri" pitchFamily="34" charset="-120"/>
+              </a:rPr>
+              <a:t>14</a:t>
             </a:r>
             <a:endParaRPr lang="en-US" sz="1300" dirty="0"/>
           </a:p>
@@ -22155,7 +22562,7 @@
                 <a:ea typeface="Calibri" pitchFamily="34" charset="-122"/>
                 <a:cs typeface="Calibri" pitchFamily="34" charset="-120"/>
               </a:rPr>
-              <a:t>90,1%</a:t>
+              <a:t>91,9%</a:t>
             </a:r>
             <a:endParaRPr lang="en-US" sz="1300" dirty="0"/>
           </a:p>
@@ -22334,7 +22741,7 @@
             </a:avLst>
           </a:prstGeom>
           <a:solidFill>
-            <a:srgbClr val="C0392B"/>
+            <a:srgbClr val="E0A32E"/>
           </a:solidFill>
           <a:ln/>
         </p:spPr>
@@ -22372,7 +22779,7 @@
                 <a:ea typeface="Calibri" pitchFamily="34" charset="-122"/>
                 <a:cs typeface="Calibri" pitchFamily="34" charset="-120"/>
               </a:rPr>
-              <a:t>Crítico</a:t>
+              <a:t>Atención</a:t>
             </a:r>
             <a:endParaRPr lang="en-US" sz="1050" dirty="0"/>
           </a:p>
@@ -23006,7 +23413,7 @@
                 <a:ea typeface="Calibri" pitchFamily="34" charset="-122"/>
                 <a:cs typeface="Calibri" pitchFamily="34" charset="-120"/>
               </a:rPr>
-              <a:t>507</a:t>
+              <a:t>508</a:t>
             </a:r>
             <a:endParaRPr lang="en-US" sz="1300" dirty="0"/>
           </a:p>
@@ -23045,7 +23452,7 @@
                 <a:ea typeface="Calibri" pitchFamily="34" charset="-122"/>
                 <a:cs typeface="Calibri" pitchFamily="34" charset="-120"/>
               </a:rPr>
-              <a:t>487</a:t>
+              <a:t>490</a:t>
             </a:r>
             <a:endParaRPr lang="en-US" sz="1300" dirty="0"/>
           </a:p>
@@ -23084,7 +23491,7 @@
                 <a:ea typeface="Calibri" pitchFamily="34" charset="-122"/>
                 <a:cs typeface="Calibri" pitchFamily="34" charset="-120"/>
               </a:rPr>
-              <a:t>20</a:t>
+              <a:t>18</a:t>
             </a:r>
             <a:endParaRPr lang="en-US" sz="1300" dirty="0"/>
           </a:p>
@@ -23123,7 +23530,7 @@
                 <a:ea typeface="Calibri" pitchFamily="34" charset="-122"/>
                 <a:cs typeface="Calibri" pitchFamily="34" charset="-120"/>
               </a:rPr>
-              <a:t>96,1%</a:t>
+              <a:t>96,5%</a:t>
             </a:r>
             <a:endParaRPr lang="en-US" sz="1300" dirty="0"/>
           </a:p>
@@ -23201,7 +23608,7 @@
                 <a:ea typeface="Calibri" pitchFamily="34" charset="-122"/>
                 <a:cs typeface="Calibri" pitchFamily="34" charset="-120"/>
               </a:rPr>
-              <a:t>299</a:t>
+              <a:t>300</a:t>
             </a:r>
             <a:endParaRPr lang="en-US" sz="1300" dirty="0"/>
           </a:p>
@@ -23318,7 +23725,7 @@
                 <a:ea typeface="Calibri" pitchFamily="34" charset="-122"/>
                 <a:cs typeface="Calibri" pitchFamily="34" charset="-120"/>
               </a:rPr>
-              <a:t>Mediana de cierre global 32 días · el hallazgo más lento tomó 427 días · 8 hallazgos sin especialidad declarada.</a:t>
+              <a:t>Mediana de cierre global 33 días · el hallazgo más lento tomó 438 días · 8 hallazgos sin especialidad declarada.</a:t>
             </a:r>
             <a:endParaRPr lang="en-US" sz="950" dirty="0"/>
           </a:p>
@@ -23357,7 +23764,7 @@
                 <a:ea typeface="Calibri" pitchFamily="34" charset="-122"/>
                 <a:cs typeface="Calibri" pitchFamily="34" charset="-120"/>
               </a:rPr>
-              <a:t>Fuente: Data_NCR.xlsx — hoja «Observaciones» · Corte 12-10-2026 · 515 registros desde 10-02-2023</a:t>
+              <a:t>Fuente: Data_NCR.xlsx — hoja «Observaciones» · Corte 19-10-2026 · 516 registros desde 10-02-2023</a:t>
             </a:r>
             <a:endParaRPr lang="en-US" sz="850" dirty="0"/>
           </a:p>
@@ -23608,7 +24015,7 @@
                 <a:ea typeface="Calibri" pitchFamily="34" charset="-122"/>
                 <a:cs typeface="Calibri" pitchFamily="34" charset="-120"/>
               </a:rPr>
-              <a:t>Entre el 05-10-2026 y el 11-10-2026 no se levantó ningún hallazgo en ningún frente.</a:t>
+              <a:t>Entre el 12-10-2026 y el 18-10-2026 se levantó 1 hallazgo: 0 internas · 1 del cliente. Sigue abierto.</a:t>
             </a:r>
             <a:endParaRPr lang="en-US" sz="1350" dirty="0"/>
           </a:p>
@@ -23763,7 +24170,7 @@
                 <a:ea typeface="Calibri" pitchFamily="34" charset="-122"/>
                 <a:cs typeface="Calibri" pitchFamily="34" charset="-120"/>
               </a:rPr>
-              <a:t>—</a:t>
+              <a:t>OO.CC 1</a:t>
             </a:r>
             <a:endParaRPr lang="en-US" sz="1100" dirty="0"/>
           </a:p>
@@ -23841,7 +24248,7 @@
                 <a:ea typeface="Calibri" pitchFamily="34" charset="-122"/>
                 <a:cs typeface="Calibri" pitchFamily="34" charset="-120"/>
               </a:rPr>
-              <a:t>—</a:t>
+              <a:t>Talabre 1</a:t>
             </a:r>
             <a:endParaRPr lang="en-US" sz="1100" dirty="0"/>
           </a:p>
@@ -23919,7 +24326,7 @@
                 <a:ea typeface="Calibri" pitchFamily="34" charset="-122"/>
                 <a:cs typeface="Calibri" pitchFamily="34" charset="-120"/>
               </a:rPr>
-              <a:t>—</a:t>
+              <a:t>Externa · Cliente 1</a:t>
             </a:r>
             <a:endParaRPr lang="en-US" sz="1100" dirty="0"/>
           </a:p>
@@ -23997,7 +24404,7 @@
                 <a:ea typeface="Calibri" pitchFamily="34" charset="-122"/>
                 <a:cs typeface="Calibri" pitchFamily="34" charset="-120"/>
               </a:rPr>
-              <a:t>—</a:t>
+              <a:t>Producto No Conforme 1</a:t>
             </a:r>
             <a:endParaRPr lang="en-US" sz="1100" dirty="0"/>
           </a:p>
@@ -24036,7 +24443,7 @@
                 <a:ea typeface="Calibri" pitchFamily="34" charset="-122"/>
                 <a:cs typeface="Calibri" pitchFamily="34" charset="-120"/>
               </a:rPr>
-              <a:t>SIN HALLAZGOS NUEVOS EN EL PERÍODO</a:t>
+              <a:t>DETALLE DE LOS HALLAZGOS NUEVOS</a:t>
             </a:r>
             <a:endParaRPr lang="en-US" sz="1050" dirty="0"/>
           </a:p>
@@ -24050,24 +24457,24 @@
         </p:nvSpPr>
         <p:spPr>
           <a:xfrm>
-            <a:off x="502920" y="4069080"/>
-            <a:ext cx="9144000" cy="365760"/>
-          </a:xfrm>
-          <a:prstGeom prst="rect">
-            <a:avLst/>
-          </a:prstGeom>
-          <a:noFill/>
-          <a:ln/>
-        </p:spPr>
-        <p:txBody>
-          <a:bodyPr wrap="square" lIns="0" tIns="0" rIns="0" bIns="0" rtlCol="0" anchor="ctr"/>
-          <a:lstStyle/>
-          <a:p>
-            <a:pPr indent="0" marL="0">
-              <a:buNone/>
-            </a:pPr>
-            <a:r>
-              <a:rPr lang="en-US" sz="1300" dirty="0">
+            <a:off x="502920" y="3986784"/>
+            <a:ext cx="822960" cy="274320"/>
+          </a:xfrm>
+          <a:prstGeom prst="rect">
+            <a:avLst/>
+          </a:prstGeom>
+          <a:noFill/>
+          <a:ln/>
+        </p:spPr>
+        <p:txBody>
+          <a:bodyPr wrap="square" lIns="0" tIns="0" rIns="0" bIns="0" rtlCol="0" anchor="ctr"/>
+          <a:lstStyle/>
+          <a:p>
+            <a:pPr algn="l" indent="0" marL="0">
+              <a:buNone/>
+            </a:pPr>
+            <a:r>
+              <a:rPr lang="en-US" sz="950" b="1" spc="50" kern="0" dirty="0">
                 <a:solidFill>
                   <a:srgbClr val="56606E"/>
                 </a:solidFill>
@@ -24075,15 +24482,724 @@
                 <a:ea typeface="Calibri" pitchFamily="34" charset="-122"/>
                 <a:cs typeface="Calibri" pitchFamily="34" charset="-120"/>
               </a:rPr>
-              <a:t>No se levantó ningún hallazgo entre el 05-10-2026 y el 11-10-2026 en ningún frente.</a:t>
-            </a:r>
-            <a:endParaRPr lang="en-US" sz="1300" dirty="0"/>
+              <a:t>FECHA</a:t>
+            </a:r>
+            <a:endParaRPr lang="en-US" sz="950" dirty="0"/>
           </a:p>
         </p:txBody>
       </p:sp>
       <p:sp>
         <p:nvSpPr>
           <p:cNvPr id="19" name="Text 15"/>
+          <p:cNvSpPr/>
+          <p:nvPr/>
+        </p:nvSpPr>
+        <p:spPr>
+          <a:xfrm>
+            <a:off x="1371600" y="3986784"/>
+            <a:ext cx="1051560" cy="274320"/>
+          </a:xfrm>
+          <a:prstGeom prst="rect">
+            <a:avLst/>
+          </a:prstGeom>
+          <a:noFill/>
+          <a:ln/>
+        </p:spPr>
+        <p:txBody>
+          <a:bodyPr wrap="square" lIns="0" tIns="0" rIns="0" bIns="0" rtlCol="0" anchor="ctr"/>
+          <a:lstStyle/>
+          <a:p>
+            <a:pPr algn="l" indent="0" marL="0">
+              <a:buNone/>
+            </a:pPr>
+            <a:r>
+              <a:rPr lang="en-US" sz="950" b="1" spc="50" kern="0" dirty="0">
+                <a:solidFill>
+                  <a:srgbClr val="56606E"/>
+                </a:solidFill>
+                <a:latin typeface="Calibri" pitchFamily="34" charset="0"/>
+                <a:ea typeface="Calibri" pitchFamily="34" charset="-122"/>
+                <a:cs typeface="Calibri" pitchFamily="34" charset="-120"/>
+              </a:rPr>
+              <a:t>FRENTE</a:t>
+            </a:r>
+            <a:endParaRPr lang="en-US" sz="950" dirty="0"/>
+          </a:p>
+        </p:txBody>
+      </p:sp>
+      <p:sp>
+        <p:nvSpPr>
+          <p:cNvPr id="20" name="Text 16"/>
+          <p:cNvSpPr/>
+          <p:nvPr/>
+        </p:nvSpPr>
+        <p:spPr>
+          <a:xfrm>
+            <a:off x="2468880" y="3986784"/>
+            <a:ext cx="1051560" cy="274320"/>
+          </a:xfrm>
+          <a:prstGeom prst="rect">
+            <a:avLst/>
+          </a:prstGeom>
+          <a:noFill/>
+          <a:ln/>
+        </p:spPr>
+        <p:txBody>
+          <a:bodyPr wrap="square" lIns="0" tIns="0" rIns="0" bIns="0" rtlCol="0" anchor="ctr"/>
+          <a:lstStyle/>
+          <a:p>
+            <a:pPr algn="l" indent="0" marL="0">
+              <a:buNone/>
+            </a:pPr>
+            <a:r>
+              <a:rPr lang="en-US" sz="950" b="1" spc="50" kern="0" dirty="0">
+                <a:solidFill>
+                  <a:srgbClr val="56606E"/>
+                </a:solidFill>
+                <a:latin typeface="Calibri" pitchFamily="34" charset="0"/>
+                <a:ea typeface="Calibri" pitchFamily="34" charset="-122"/>
+                <a:cs typeface="Calibri" pitchFamily="34" charset="-120"/>
+              </a:rPr>
+              <a:t>N°</a:t>
+            </a:r>
+            <a:endParaRPr lang="en-US" sz="950" dirty="0"/>
+          </a:p>
+        </p:txBody>
+      </p:sp>
+      <p:sp>
+        <p:nvSpPr>
+          <p:cNvPr id="21" name="Text 17"/>
+          <p:cNvSpPr/>
+          <p:nvPr/>
+        </p:nvSpPr>
+        <p:spPr>
+          <a:xfrm>
+            <a:off x="3566160" y="3986784"/>
+            <a:ext cx="1371600" cy="274320"/>
+          </a:xfrm>
+          <a:prstGeom prst="rect">
+            <a:avLst/>
+          </a:prstGeom>
+          <a:noFill/>
+          <a:ln/>
+        </p:spPr>
+        <p:txBody>
+          <a:bodyPr wrap="square" lIns="0" tIns="0" rIns="0" bIns="0" rtlCol="0" anchor="ctr"/>
+          <a:lstStyle/>
+          <a:p>
+            <a:pPr algn="l" indent="0" marL="0">
+              <a:buNone/>
+            </a:pPr>
+            <a:r>
+              <a:rPr lang="en-US" sz="950" b="1" spc="50" kern="0" dirty="0">
+                <a:solidFill>
+                  <a:srgbClr val="56606E"/>
+                </a:solidFill>
+                <a:latin typeface="Calibri" pitchFamily="34" charset="0"/>
+                <a:ea typeface="Calibri" pitchFamily="34" charset="-122"/>
+                <a:cs typeface="Calibri" pitchFamily="34" charset="-120"/>
+              </a:rPr>
+              <a:t>TIPO</a:t>
+            </a:r>
+            <a:endParaRPr lang="en-US" sz="950" dirty="0"/>
+          </a:p>
+        </p:txBody>
+      </p:sp>
+      <p:sp>
+        <p:nvSpPr>
+          <p:cNvPr id="22" name="Text 18"/>
+          <p:cNvSpPr/>
+          <p:nvPr/>
+        </p:nvSpPr>
+        <p:spPr>
+          <a:xfrm>
+            <a:off x="4983480" y="3986784"/>
+            <a:ext cx="1417320" cy="274320"/>
+          </a:xfrm>
+          <a:prstGeom prst="rect">
+            <a:avLst/>
+          </a:prstGeom>
+          <a:noFill/>
+          <a:ln/>
+        </p:spPr>
+        <p:txBody>
+          <a:bodyPr wrap="square" lIns="0" tIns="0" rIns="0" bIns="0" rtlCol="0" anchor="ctr"/>
+          <a:lstStyle/>
+          <a:p>
+            <a:pPr algn="l" indent="0" marL="0">
+              <a:buNone/>
+            </a:pPr>
+            <a:r>
+              <a:rPr lang="en-US" sz="950" b="1" spc="50" kern="0" dirty="0">
+                <a:solidFill>
+                  <a:srgbClr val="56606E"/>
+                </a:solidFill>
+                <a:latin typeface="Calibri" pitchFamily="34" charset="0"/>
+                <a:ea typeface="Calibri" pitchFamily="34" charset="-122"/>
+                <a:cs typeface="Calibri" pitchFamily="34" charset="-120"/>
+              </a:rPr>
+              <a:t>ORIGEN</a:t>
+            </a:r>
+            <a:endParaRPr lang="en-US" sz="950" dirty="0"/>
+          </a:p>
+        </p:txBody>
+      </p:sp>
+      <p:sp>
+        <p:nvSpPr>
+          <p:cNvPr id="23" name="Text 19"/>
+          <p:cNvSpPr/>
+          <p:nvPr/>
+        </p:nvSpPr>
+        <p:spPr>
+          <a:xfrm>
+            <a:off x="6446520" y="3986784"/>
+            <a:ext cx="1097280" cy="274320"/>
+          </a:xfrm>
+          <a:prstGeom prst="rect">
+            <a:avLst/>
+          </a:prstGeom>
+          <a:noFill/>
+          <a:ln/>
+        </p:spPr>
+        <p:txBody>
+          <a:bodyPr wrap="square" lIns="0" tIns="0" rIns="0" bIns="0" rtlCol="0" anchor="ctr"/>
+          <a:lstStyle/>
+          <a:p>
+            <a:pPr algn="l" indent="0" marL="0">
+              <a:buNone/>
+            </a:pPr>
+            <a:r>
+              <a:rPr lang="en-US" sz="950" b="1" spc="50" kern="0" dirty="0">
+                <a:solidFill>
+                  <a:srgbClr val="56606E"/>
+                </a:solidFill>
+                <a:latin typeface="Calibri" pitchFamily="34" charset="0"/>
+                <a:ea typeface="Calibri" pitchFamily="34" charset="-122"/>
+                <a:cs typeface="Calibri" pitchFamily="34" charset="-120"/>
+              </a:rPr>
+              <a:t>DISCIPLINA</a:t>
+            </a:r>
+            <a:endParaRPr lang="en-US" sz="950" dirty="0"/>
+          </a:p>
+        </p:txBody>
+      </p:sp>
+      <p:sp>
+        <p:nvSpPr>
+          <p:cNvPr id="24" name="Text 20"/>
+          <p:cNvSpPr/>
+          <p:nvPr/>
+        </p:nvSpPr>
+        <p:spPr>
+          <a:xfrm>
+            <a:off x="7589520" y="3986784"/>
+            <a:ext cx="1371600" cy="274320"/>
+          </a:xfrm>
+          <a:prstGeom prst="rect">
+            <a:avLst/>
+          </a:prstGeom>
+          <a:noFill/>
+          <a:ln/>
+        </p:spPr>
+        <p:txBody>
+          <a:bodyPr wrap="square" lIns="0" tIns="0" rIns="0" bIns="0" rtlCol="0" anchor="ctr"/>
+          <a:lstStyle/>
+          <a:p>
+            <a:pPr algn="l" indent="0" marL="0">
+              <a:buNone/>
+            </a:pPr>
+            <a:r>
+              <a:rPr lang="en-US" sz="950" b="1" spc="50" kern="0" dirty="0">
+                <a:solidFill>
+                  <a:srgbClr val="56606E"/>
+                </a:solidFill>
+                <a:latin typeface="Calibri" pitchFamily="34" charset="0"/>
+                <a:ea typeface="Calibri" pitchFamily="34" charset="-122"/>
+                <a:cs typeface="Calibri" pitchFamily="34" charset="-120"/>
+              </a:rPr>
+              <a:t>RESPONSABLE</a:t>
+            </a:r>
+            <a:endParaRPr lang="en-US" sz="950" dirty="0"/>
+          </a:p>
+        </p:txBody>
+      </p:sp>
+      <p:sp>
+        <p:nvSpPr>
+          <p:cNvPr id="25" name="Text 21"/>
+          <p:cNvSpPr/>
+          <p:nvPr/>
+        </p:nvSpPr>
+        <p:spPr>
+          <a:xfrm>
+            <a:off x="9006840" y="3986784"/>
+            <a:ext cx="868680" cy="274320"/>
+          </a:xfrm>
+          <a:prstGeom prst="rect">
+            <a:avLst/>
+          </a:prstGeom>
+          <a:noFill/>
+          <a:ln/>
+        </p:spPr>
+        <p:txBody>
+          <a:bodyPr wrap="square" lIns="0" tIns="0" rIns="0" bIns="0" rtlCol="0" anchor="ctr"/>
+          <a:lstStyle/>
+          <a:p>
+            <a:pPr algn="l" indent="0" marL="0">
+              <a:buNone/>
+            </a:pPr>
+            <a:r>
+              <a:rPr lang="en-US" sz="950" b="1" spc="50" kern="0" dirty="0">
+                <a:solidFill>
+                  <a:srgbClr val="56606E"/>
+                </a:solidFill>
+                <a:latin typeface="Calibri" pitchFamily="34" charset="0"/>
+                <a:ea typeface="Calibri" pitchFamily="34" charset="-122"/>
+                <a:cs typeface="Calibri" pitchFamily="34" charset="-120"/>
+              </a:rPr>
+              <a:t>ESTADO</a:t>
+            </a:r>
+            <a:endParaRPr lang="en-US" sz="950" dirty="0"/>
+          </a:p>
+        </p:txBody>
+      </p:sp>
+      <p:sp>
+        <p:nvSpPr>
+          <p:cNvPr id="26" name="Text 22"/>
+          <p:cNvSpPr/>
+          <p:nvPr/>
+        </p:nvSpPr>
+        <p:spPr>
+          <a:xfrm>
+            <a:off x="9921240" y="3986784"/>
+            <a:ext cx="1828800" cy="274320"/>
+          </a:xfrm>
+          <a:prstGeom prst="rect">
+            <a:avLst/>
+          </a:prstGeom>
+          <a:noFill/>
+          <a:ln/>
+        </p:spPr>
+        <p:txBody>
+          <a:bodyPr wrap="square" lIns="0" tIns="0" rIns="0" bIns="0" rtlCol="0" anchor="ctr"/>
+          <a:lstStyle/>
+          <a:p>
+            <a:pPr algn="l" indent="0" marL="0">
+              <a:buNone/>
+            </a:pPr>
+            <a:r>
+              <a:rPr lang="en-US" sz="950" b="1" spc="50" kern="0" dirty="0">
+                <a:solidFill>
+                  <a:srgbClr val="56606E"/>
+                </a:solidFill>
+                <a:latin typeface="Calibri" pitchFamily="34" charset="0"/>
+                <a:ea typeface="Calibri" pitchFamily="34" charset="-122"/>
+                <a:cs typeface="Calibri" pitchFamily="34" charset="-120"/>
+              </a:rPr>
+              <a:t>TÍTULO</a:t>
+            </a:r>
+            <a:endParaRPr lang="en-US" sz="950" dirty="0"/>
+          </a:p>
+        </p:txBody>
+      </p:sp>
+      <p:sp>
+        <p:nvSpPr>
+          <p:cNvPr id="27" name="Shape 23"/>
+          <p:cNvSpPr/>
+          <p:nvPr/>
+        </p:nvSpPr>
+        <p:spPr>
+          <a:xfrm>
+            <a:off x="502920" y="4297680"/>
+            <a:ext cx="11247120" cy="0"/>
+          </a:xfrm>
+          <a:prstGeom prst="line">
+            <a:avLst/>
+          </a:prstGeom>
+          <a:noFill/>
+          <a:ln w="12700">
+            <a:solidFill>
+              <a:srgbClr val="6E8CA8"/>
+            </a:solidFill>
+            <a:prstDash val="solid"/>
+          </a:ln>
+        </p:spPr>
+      </p:sp>
+      <p:sp>
+        <p:nvSpPr>
+          <p:cNvPr id="28" name="Text 24"/>
+          <p:cNvSpPr/>
+          <p:nvPr/>
+        </p:nvSpPr>
+        <p:spPr>
+          <a:xfrm>
+            <a:off x="502920" y="4425696"/>
+            <a:ext cx="822960" cy="237744"/>
+          </a:xfrm>
+          <a:prstGeom prst="rect">
+            <a:avLst/>
+          </a:prstGeom>
+          <a:noFill/>
+          <a:ln/>
+        </p:spPr>
+        <p:txBody>
+          <a:bodyPr wrap="square" lIns="0" tIns="0" rIns="0" bIns="0" rtlCol="0" anchor="ctr"/>
+          <a:lstStyle/>
+          <a:p>
+            <a:pPr algn="l" indent="0" marL="0">
+              <a:buNone/>
+            </a:pPr>
+            <a:r>
+              <a:rPr lang="en-US" sz="1050" dirty="0">
+                <a:solidFill>
+                  <a:srgbClr val="1A2433"/>
+                </a:solidFill>
+                <a:latin typeface="Calibri" pitchFamily="34" charset="0"/>
+                <a:ea typeface="Calibri" pitchFamily="34" charset="-122"/>
+                <a:cs typeface="Calibri" pitchFamily="34" charset="-120"/>
+              </a:rPr>
+              <a:t>14-10-2026</a:t>
+            </a:r>
+            <a:endParaRPr lang="en-US" sz="1050" dirty="0"/>
+          </a:p>
+        </p:txBody>
+      </p:sp>
+      <p:sp>
+        <p:nvSpPr>
+          <p:cNvPr id="29" name="Text 25"/>
+          <p:cNvSpPr/>
+          <p:nvPr/>
+        </p:nvSpPr>
+        <p:spPr>
+          <a:xfrm>
+            <a:off x="1371600" y="4425696"/>
+            <a:ext cx="1051560" cy="237744"/>
+          </a:xfrm>
+          <a:prstGeom prst="rect">
+            <a:avLst/>
+          </a:prstGeom>
+          <a:noFill/>
+          <a:ln/>
+        </p:spPr>
+        <p:txBody>
+          <a:bodyPr wrap="square" lIns="0" tIns="0" rIns="0" bIns="0" rtlCol="0" anchor="ctr"/>
+          <a:lstStyle/>
+          <a:p>
+            <a:pPr algn="l" indent="0" marL="0">
+              <a:buNone/>
+            </a:pPr>
+            <a:r>
+              <a:rPr lang="en-US" sz="1050" dirty="0">
+                <a:solidFill>
+                  <a:srgbClr val="1A2433"/>
+                </a:solidFill>
+                <a:latin typeface="Calibri" pitchFamily="34" charset="0"/>
+                <a:ea typeface="Calibri" pitchFamily="34" charset="-122"/>
+                <a:cs typeface="Calibri" pitchFamily="34" charset="-120"/>
+              </a:rPr>
+              <a:t>Talabre</a:t>
+            </a:r>
+            <a:endParaRPr lang="en-US" sz="1050" dirty="0"/>
+          </a:p>
+        </p:txBody>
+      </p:sp>
+      <p:sp>
+        <p:nvSpPr>
+          <p:cNvPr id="30" name="Text 26"/>
+          <p:cNvSpPr/>
+          <p:nvPr/>
+        </p:nvSpPr>
+        <p:spPr>
+          <a:xfrm>
+            <a:off x="2468880" y="4425696"/>
+            <a:ext cx="1051560" cy="237744"/>
+          </a:xfrm>
+          <a:prstGeom prst="rect">
+            <a:avLst/>
+          </a:prstGeom>
+          <a:noFill/>
+          <a:ln/>
+        </p:spPr>
+        <p:txBody>
+          <a:bodyPr wrap="square" lIns="0" tIns="0" rIns="0" bIns="0" rtlCol="0" anchor="ctr"/>
+          <a:lstStyle/>
+          <a:p>
+            <a:pPr algn="l" indent="0" marL="0">
+              <a:buNone/>
+            </a:pPr>
+            <a:r>
+              <a:rPr lang="en-US" sz="1050" dirty="0">
+                <a:solidFill>
+                  <a:srgbClr val="1A2433"/>
+                </a:solidFill>
+                <a:latin typeface="Calibri" pitchFamily="34" charset="0"/>
+                <a:ea typeface="Calibri" pitchFamily="34" charset="-122"/>
+                <a:cs typeface="Calibri" pitchFamily="34" charset="-120"/>
+              </a:rPr>
+              <a:t>255 · PNC N°203</a:t>
+            </a:r>
+            <a:endParaRPr lang="en-US" sz="1050" dirty="0"/>
+          </a:p>
+        </p:txBody>
+      </p:sp>
+      <p:sp>
+        <p:nvSpPr>
+          <p:cNvPr id="31" name="Text 27"/>
+          <p:cNvSpPr/>
+          <p:nvPr/>
+        </p:nvSpPr>
+        <p:spPr>
+          <a:xfrm>
+            <a:off x="3566160" y="4425696"/>
+            <a:ext cx="1371600" cy="237744"/>
+          </a:xfrm>
+          <a:prstGeom prst="rect">
+            <a:avLst/>
+          </a:prstGeom>
+          <a:noFill/>
+          <a:ln/>
+        </p:spPr>
+        <p:txBody>
+          <a:bodyPr wrap="square" lIns="0" tIns="0" rIns="0" bIns="0" rtlCol="0" anchor="ctr"/>
+          <a:lstStyle/>
+          <a:p>
+            <a:pPr algn="l" indent="0" marL="0">
+              <a:buNone/>
+            </a:pPr>
+            <a:r>
+              <a:rPr lang="en-US" sz="1050" dirty="0">
+                <a:solidFill>
+                  <a:srgbClr val="1A2433"/>
+                </a:solidFill>
+                <a:latin typeface="Calibri" pitchFamily="34" charset="0"/>
+                <a:ea typeface="Calibri" pitchFamily="34" charset="-122"/>
+                <a:cs typeface="Calibri" pitchFamily="34" charset="-120"/>
+              </a:rPr>
+              <a:t>Producto No Confor…</a:t>
+            </a:r>
+            <a:endParaRPr lang="en-US" sz="1050" dirty="0"/>
+          </a:p>
+        </p:txBody>
+      </p:sp>
+      <p:sp>
+        <p:nvSpPr>
+          <p:cNvPr id="32" name="Text 28"/>
+          <p:cNvSpPr/>
+          <p:nvPr/>
+        </p:nvSpPr>
+        <p:spPr>
+          <a:xfrm>
+            <a:off x="4983480" y="4425696"/>
+            <a:ext cx="1417320" cy="237744"/>
+          </a:xfrm>
+          <a:prstGeom prst="rect">
+            <a:avLst/>
+          </a:prstGeom>
+          <a:noFill/>
+          <a:ln/>
+        </p:spPr>
+        <p:txBody>
+          <a:bodyPr wrap="square" lIns="0" tIns="0" rIns="0" bIns="0" rtlCol="0" anchor="ctr"/>
+          <a:lstStyle/>
+          <a:p>
+            <a:pPr algn="l" indent="0" marL="0">
+              <a:buNone/>
+            </a:pPr>
+            <a:r>
+              <a:rPr lang="en-US" sz="1050" b="1" dirty="0">
+                <a:solidFill>
+                  <a:srgbClr val="C87A32"/>
+                </a:solidFill>
+                <a:latin typeface="Calibri" pitchFamily="34" charset="0"/>
+                <a:ea typeface="Calibri" pitchFamily="34" charset="-122"/>
+                <a:cs typeface="Calibri" pitchFamily="34" charset="-120"/>
+              </a:rPr>
+              <a:t>Externa · Cliente</a:t>
+            </a:r>
+            <a:endParaRPr lang="en-US" sz="1050" dirty="0"/>
+          </a:p>
+        </p:txBody>
+      </p:sp>
+      <p:sp>
+        <p:nvSpPr>
+          <p:cNvPr id="33" name="Text 29"/>
+          <p:cNvSpPr/>
+          <p:nvPr/>
+        </p:nvSpPr>
+        <p:spPr>
+          <a:xfrm>
+            <a:off x="6446520" y="4425696"/>
+            <a:ext cx="1097280" cy="237744"/>
+          </a:xfrm>
+          <a:prstGeom prst="rect">
+            <a:avLst/>
+          </a:prstGeom>
+          <a:noFill/>
+          <a:ln/>
+        </p:spPr>
+        <p:txBody>
+          <a:bodyPr wrap="square" lIns="0" tIns="0" rIns="0" bIns="0" rtlCol="0" anchor="ctr"/>
+          <a:lstStyle/>
+          <a:p>
+            <a:pPr algn="l" indent="0" marL="0">
+              <a:buNone/>
+            </a:pPr>
+            <a:r>
+              <a:rPr lang="en-US" sz="1050" dirty="0">
+                <a:solidFill>
+                  <a:srgbClr val="1A2433"/>
+                </a:solidFill>
+                <a:latin typeface="Calibri" pitchFamily="34" charset="0"/>
+                <a:ea typeface="Calibri" pitchFamily="34" charset="-122"/>
+                <a:cs typeface="Calibri" pitchFamily="34" charset="-120"/>
+              </a:rPr>
+              <a:t>OO.CC</a:t>
+            </a:r>
+            <a:endParaRPr lang="en-US" sz="1050" dirty="0"/>
+          </a:p>
+        </p:txBody>
+      </p:sp>
+      <p:sp>
+        <p:nvSpPr>
+          <p:cNvPr id="34" name="Text 30"/>
+          <p:cNvSpPr/>
+          <p:nvPr/>
+        </p:nvSpPr>
+        <p:spPr>
+          <a:xfrm>
+            <a:off x="7589520" y="4425696"/>
+            <a:ext cx="1371600" cy="237744"/>
+          </a:xfrm>
+          <a:prstGeom prst="rect">
+            <a:avLst/>
+          </a:prstGeom>
+          <a:noFill/>
+          <a:ln/>
+        </p:spPr>
+        <p:txBody>
+          <a:bodyPr wrap="square" lIns="0" tIns="0" rIns="0" bIns="0" rtlCol="0" anchor="ctr"/>
+          <a:lstStyle/>
+          <a:p>
+            <a:pPr algn="l" indent="0" marL="0">
+              <a:buNone/>
+            </a:pPr>
+            <a:r>
+              <a:rPr lang="en-US" sz="1050" dirty="0">
+                <a:solidFill>
+                  <a:srgbClr val="1A2433"/>
+                </a:solidFill>
+                <a:latin typeface="Calibri" pitchFamily="34" charset="0"/>
+                <a:ea typeface="Calibri" pitchFamily="34" charset="-122"/>
+                <a:cs typeface="Calibri" pitchFamily="34" charset="-120"/>
+              </a:rPr>
+              <a:t>Wladimir Carvaja…</a:t>
+            </a:r>
+            <a:endParaRPr lang="en-US" sz="1050" dirty="0"/>
+          </a:p>
+        </p:txBody>
+      </p:sp>
+      <p:sp>
+        <p:nvSpPr>
+          <p:cNvPr id="35" name="Text 31"/>
+          <p:cNvSpPr/>
+          <p:nvPr/>
+        </p:nvSpPr>
+        <p:spPr>
+          <a:xfrm>
+            <a:off x="9006840" y="4425696"/>
+            <a:ext cx="868680" cy="237744"/>
+          </a:xfrm>
+          <a:prstGeom prst="rect">
+            <a:avLst/>
+          </a:prstGeom>
+          <a:noFill/>
+          <a:ln/>
+        </p:spPr>
+        <p:txBody>
+          <a:bodyPr wrap="square" lIns="0" tIns="0" rIns="0" bIns="0" rtlCol="0" anchor="ctr"/>
+          <a:lstStyle/>
+          <a:p>
+            <a:pPr algn="l" indent="0" marL="0">
+              <a:buNone/>
+            </a:pPr>
+            <a:r>
+              <a:rPr lang="en-US" sz="1050" dirty="0">
+                <a:solidFill>
+                  <a:srgbClr val="C0392B"/>
+                </a:solidFill>
+                <a:latin typeface="Calibri" pitchFamily="34" charset="0"/>
+                <a:ea typeface="Calibri" pitchFamily="34" charset="-122"/>
+                <a:cs typeface="Calibri" pitchFamily="34" charset="-120"/>
+              </a:rPr>
+              <a:t>Listo para…</a:t>
+            </a:r>
+            <a:endParaRPr lang="en-US" sz="1050" dirty="0"/>
+          </a:p>
+        </p:txBody>
+      </p:sp>
+      <p:sp>
+        <p:nvSpPr>
+          <p:cNvPr id="36" name="Text 32"/>
+          <p:cNvSpPr/>
+          <p:nvPr/>
+        </p:nvSpPr>
+        <p:spPr>
+          <a:xfrm>
+            <a:off x="9921240" y="4425696"/>
+            <a:ext cx="1828800" cy="237744"/>
+          </a:xfrm>
+          <a:prstGeom prst="rect">
+            <a:avLst/>
+          </a:prstGeom>
+          <a:noFill/>
+          <a:ln/>
+        </p:spPr>
+        <p:txBody>
+          <a:bodyPr wrap="square" lIns="0" tIns="0" rIns="0" bIns="0" rtlCol="0" anchor="ctr"/>
+          <a:lstStyle/>
+          <a:p>
+            <a:pPr algn="l" indent="0" marL="0">
+              <a:buNone/>
+            </a:pPr>
+            <a:r>
+              <a:rPr lang="en-US" sz="1000" dirty="0">
+                <a:solidFill>
+                  <a:srgbClr val="1A2433"/>
+                </a:solidFill>
+                <a:latin typeface="Calibri" pitchFamily="34" charset="0"/>
+                <a:ea typeface="Calibri" pitchFamily="34" charset="-122"/>
+                <a:cs typeface="Calibri" pitchFamily="34" charset="-120"/>
+              </a:rPr>
+              <a:t>Arrugas en piscina QS.</a:t>
+            </a:r>
+            <a:endParaRPr lang="en-US" sz="1000" dirty="0"/>
+          </a:p>
+        </p:txBody>
+      </p:sp>
+      <p:sp>
+        <p:nvSpPr>
+          <p:cNvPr id="37" name="Shape 33"/>
+          <p:cNvSpPr/>
+          <p:nvPr/>
+        </p:nvSpPr>
+        <p:spPr>
+          <a:xfrm>
+            <a:off x="502920" y="4700016"/>
+            <a:ext cx="11247120" cy="0"/>
+          </a:xfrm>
+          <a:prstGeom prst="line">
+            <a:avLst/>
+          </a:prstGeom>
+          <a:noFill/>
+          <a:ln w="9525">
+            <a:solidFill>
+              <a:srgbClr val="D9DFE6"/>
+            </a:solidFill>
+            <a:prstDash val="solid"/>
+          </a:ln>
+        </p:spPr>
+      </p:sp>
+      <p:sp>
+        <p:nvSpPr>
+          <p:cNvPr id="38" name="Text 34"/>
           <p:cNvSpPr/>
           <p:nvPr/>
         </p:nvSpPr>
@@ -24114,7 +25230,7 @@
                 <a:ea typeface="Calibri" pitchFamily="34" charset="-122"/>
                 <a:cs typeface="Calibri" pitchFamily="34" charset="-120"/>
               </a:rPr>
-              <a:t>Fuente: Data_NCR.xlsx — hoja «Observaciones» · Corte 12-10-2026 · 515 registros desde 10-02-2023</a:t>
+              <a:t>Fuente: Data_NCR.xlsx — hoja «Observaciones» · Corte 19-10-2026 · 516 registros desde 10-02-2023</a:t>
             </a:r>
             <a:endParaRPr lang="en-US" sz="850" dirty="0"/>
           </a:p>
@@ -24122,7 +25238,7 @@
       </p:sp>
       <p:sp>
         <p:nvSpPr>
-          <p:cNvPr id="20" name="Text 16"/>
+          <p:cNvPr id="39" name="Text 35"/>
           <p:cNvSpPr/>
           <p:nvPr/>
         </p:nvSpPr>
@@ -24161,7 +25277,7 @@
       </p:sp>
       <p:sp>
         <p:nvSpPr>
-          <p:cNvPr id="21" name="Text 17"/>
+          <p:cNvPr id="40" name="Text 36"/>
           <p:cNvSpPr/>
           <p:nvPr/>
         </p:nvSpPr>
@@ -25110,7 +26226,7 @@
                 <a:ea typeface="Calibri" pitchFamily="34" charset="-122"/>
                 <a:cs typeface="Calibri" pitchFamily="34" charset="-120"/>
               </a:rPr>
-              <a:t>299</a:t>
+              <a:t>300</a:t>
             </a:r>
             <a:endParaRPr lang="en-US" sz="1050" dirty="0"/>
           </a:p>
@@ -25149,7 +26265,7 @@
                 <a:ea typeface="Calibri" pitchFamily="34" charset="-122"/>
                 <a:cs typeface="Calibri" pitchFamily="34" charset="-120"/>
               </a:rPr>
-              <a:t>281</a:t>
+              <a:t>284</a:t>
             </a:r>
             <a:endParaRPr lang="en-US" sz="1050" dirty="0"/>
           </a:p>
@@ -25188,7 +26304,7 @@
                 <a:ea typeface="Calibri" pitchFamily="34" charset="-122"/>
                 <a:cs typeface="Calibri" pitchFamily="34" charset="-120"/>
               </a:rPr>
-              <a:t>94%</a:t>
+              <a:t>94,7%</a:t>
             </a:r>
             <a:endParaRPr lang="en-US" sz="1050" dirty="0"/>
           </a:p>
@@ -25227,7 +26343,7 @@
                 <a:ea typeface="Calibri" pitchFamily="34" charset="-122"/>
                 <a:cs typeface="Calibri" pitchFamily="34" charset="-120"/>
               </a:rPr>
-              <a:t>18</a:t>
+              <a:t>16</a:t>
             </a:r>
             <a:endParaRPr lang="en-US" sz="1050" dirty="0"/>
           </a:p>
@@ -25266,7 +26382,7 @@
                 <a:ea typeface="Calibri" pitchFamily="34" charset="-122"/>
                 <a:cs typeface="Calibri" pitchFamily="34" charset="-120"/>
               </a:rPr>
-              <a:t>18</a:t>
+              <a:t>15</a:t>
             </a:r>
             <a:endParaRPr lang="en-US" sz="1050" dirty="0"/>
           </a:p>
@@ -25305,7 +26421,7 @@
                 <a:ea typeface="Calibri" pitchFamily="34" charset="-122"/>
                 <a:cs typeface="Calibri" pitchFamily="34" charset="-120"/>
               </a:rPr>
-              <a:t>65 días</a:t>
+              <a:t>66 días</a:t>
             </a:r>
             <a:endParaRPr lang="en-US" sz="1050" dirty="0"/>
           </a:p>
@@ -26018,7 +27134,7 @@
                 <a:ea typeface="Calibri" pitchFamily="34" charset="-122"/>
                 <a:cs typeface="Calibri" pitchFamily="34" charset="-120"/>
               </a:rPr>
-              <a:t>515</a:t>
+              <a:t>516</a:t>
             </a:r>
             <a:endParaRPr lang="en-US" sz="1050" dirty="0"/>
           </a:p>
@@ -26057,7 +27173,7 @@
                 <a:ea typeface="Calibri" pitchFamily="34" charset="-122"/>
                 <a:cs typeface="Calibri" pitchFamily="34" charset="-120"/>
               </a:rPr>
-              <a:t>495</a:t>
+              <a:t>498</a:t>
             </a:r>
             <a:endParaRPr lang="en-US" sz="1050" dirty="0"/>
           </a:p>
@@ -26096,7 +27212,7 @@
                 <a:ea typeface="Calibri" pitchFamily="34" charset="-122"/>
                 <a:cs typeface="Calibri" pitchFamily="34" charset="-120"/>
               </a:rPr>
-              <a:t>96,1%</a:t>
+              <a:t>96,5%</a:t>
             </a:r>
             <a:endParaRPr lang="en-US" sz="1050" dirty="0"/>
           </a:p>
@@ -26135,7 +27251,7 @@
                 <a:ea typeface="Calibri" pitchFamily="34" charset="-122"/>
                 <a:cs typeface="Calibri" pitchFamily="34" charset="-120"/>
               </a:rPr>
-              <a:t>20</a:t>
+              <a:t>18</a:t>
             </a:r>
             <a:endParaRPr lang="en-US" sz="1050" dirty="0"/>
           </a:p>
@@ -26174,7 +27290,7 @@
                 <a:ea typeface="Calibri" pitchFamily="34" charset="-122"/>
                 <a:cs typeface="Calibri" pitchFamily="34" charset="-120"/>
               </a:rPr>
-              <a:t>20</a:t>
+              <a:t>17</a:t>
             </a:r>
             <a:endParaRPr lang="en-US" sz="1050" dirty="0"/>
           </a:p>
@@ -26213,7 +27329,7 @@
                 <a:ea typeface="Calibri" pitchFamily="34" charset="-122"/>
                 <a:cs typeface="Calibri" pitchFamily="34" charset="-120"/>
               </a:rPr>
-              <a:t>77 días</a:t>
+              <a:t>78 días</a:t>
             </a:r>
             <a:endParaRPr lang="en-US" sz="1050" dirty="0"/>
           </a:p>
@@ -26430,7 +27546,7 @@
                 <a:ea typeface="Cambria" pitchFamily="34" charset="-122"/>
                 <a:cs typeface="Cambria" pitchFamily="34" charset="-120"/>
               </a:rPr>
-              <a:t>20,6%</a:t>
+              <a:t>20,5%</a:t>
             </a:r>
             <a:endParaRPr lang="en-US" sz="2400" dirty="0"/>
           </a:p>
@@ -26586,7 +27702,7 @@
                 <a:ea typeface="Calibri" pitchFamily="34" charset="-122"/>
                 <a:cs typeface="Calibri" pitchFamily="34" charset="-120"/>
               </a:rPr>
-              <a:t>Fuente: Data_NCR.xlsx — hoja «Observaciones» · Corte 12-10-2026 · 515 registros desde 10-02-2023</a:t>
+              <a:t>Fuente: Data_NCR.xlsx — hoja «Observaciones» · Corte 19-10-2026 · 516 registros desde 10-02-2023</a:t>
             </a:r>
             <a:endParaRPr lang="en-US" sz="850" dirty="0"/>
           </a:p>
@@ -26837,7 +27953,7 @@
                 <a:ea typeface="Calibri" pitchFamily="34" charset="-122"/>
                 <a:cs typeface="Calibri" pitchFamily="34" charset="-120"/>
               </a:rPr>
-              <a:t>De los 20 hallazgos abiertos, 9 llevan más de 180 días desde que se levantaron y 0 más de un año. La mediana de cierre global es de 32 días.</a:t>
+              <a:t>De los 18 hallazgos abiertos, 9 llevan más de 180 días desde que se levantaron y 1 más de un año. La mediana de cierre global es de 33 días.</a:t>
             </a:r>
             <a:endParaRPr lang="en-US" sz="1350" dirty="0"/>
           </a:p>
@@ -26974,7 +28090,7 @@
                 <a:ea typeface="Calibri" pitchFamily="34" charset="-122"/>
                 <a:cs typeface="Calibri" pitchFamily="34" charset="-120"/>
               </a:rPr>
-              <a:t>Al corte hay 20 hallazgos fuera de plazo de los 20 abiertos.</a:t>
+              <a:t>Al corte hay 17 hallazgos fuera de plazo de los 18 abiertos.</a:t>
             </a:r>
             <a:endParaRPr lang="en-US" sz="1150" dirty="0"/>
           </a:p>
@@ -27770,7 +28886,7 @@
                 <a:ea typeface="Calibri" pitchFamily="34" charset="-122"/>
                 <a:cs typeface="Calibri" pitchFamily="34" charset="-120"/>
               </a:rPr>
-              <a:t>2</a:t>
+              <a:t>3</a:t>
             </a:r>
             <a:endParaRPr lang="en-US" sz="1150" dirty="0"/>
           </a:p>
@@ -27899,7 +29015,7 @@
                 <a:ea typeface="Calibri" pitchFamily="34" charset="-122"/>
                 <a:cs typeface="Calibri" pitchFamily="34" charset="-120"/>
               </a:rPr>
-              <a:t>155</a:t>
+              <a:t>158</a:t>
             </a:r>
             <a:endParaRPr lang="en-US" sz="1150" dirty="0"/>
           </a:p>
@@ -27977,7 +29093,7 @@
                 <a:ea typeface="Calibri" pitchFamily="34" charset="-122"/>
                 <a:cs typeface="Calibri" pitchFamily="34" charset="-120"/>
               </a:rPr>
-              <a:t>427 d</a:t>
+              <a:t>438 d</a:t>
             </a:r>
             <a:endParaRPr lang="en-US" sz="1150" dirty="0"/>
           </a:p>
@@ -28010,13 +29126,13 @@
             <a:r>
               <a:rPr lang="en-US" sz="1150" dirty="0">
                 <a:solidFill>
-                  <a:srgbClr val="C0392B"/>
-                </a:solidFill>
-                <a:latin typeface="Calibri" pitchFamily="34" charset="0"/>
-                <a:ea typeface="Calibri" pitchFamily="34" charset="-122"/>
-                <a:cs typeface="Calibri" pitchFamily="34" charset="-120"/>
-              </a:rPr>
-              <a:t>17</a:t>
+                  <a:srgbClr val="1A2433"/>
+                </a:solidFill>
+                <a:latin typeface="Calibri" pitchFamily="34" charset="0"/>
+                <a:ea typeface="Calibri" pitchFamily="34" charset="-122"/>
+                <a:cs typeface="Calibri" pitchFamily="34" charset="-120"/>
+              </a:rPr>
+              <a:t>14</a:t>
             </a:r>
             <a:endParaRPr lang="en-US" sz="1150" dirty="0"/>
           </a:p>
@@ -28394,7 +29510,7 @@
                 <a:ea typeface="Calibri" pitchFamily="34" charset="-122"/>
                 <a:cs typeface="Calibri" pitchFamily="34" charset="-120"/>
               </a:rPr>
-              <a:t>Fuente: Data_NCR.xlsx — hoja «Observaciones» · Corte 12-10-2026 · 515 registros desde 10-02-2023</a:t>
+              <a:t>Fuente: Data_NCR.xlsx — hoja «Observaciones» · Corte 19-10-2026 · 516 registros desde 10-02-2023</a:t>
             </a:r>
             <a:endParaRPr lang="en-US" sz="850" dirty="0"/>
           </a:p>
@@ -28645,7 +29761,7 @@
                 <a:ea typeface="Calibri" pitchFamily="34" charset="-122"/>
                 <a:cs typeface="Calibri" pitchFamily="34" charset="-120"/>
               </a:rPr>
-              <a:t>10.613 UF declaradas entre nov-24 y sep-26, imputadas al mes en que se levantó cada hallazgo. Las declaran 108 de 504 hallazgos del período.</a:t>
+              <a:t>10.613 UF declaradas entre nov-24 y oct-26, imputadas al mes en que se levantó cada hallazgo. Las declaran 108 de 505 hallazgos del período.</a:t>
             </a:r>
             <a:endParaRPr lang="en-US" sz="1350" dirty="0"/>
           </a:p>
@@ -28667,7 +29783,7 @@
         </p:nvGraphicFramePr>
         <p:xfrm>
           <a:off x="411480" y="1810512"/>
-          <a:ext cx="11996928" cy="914400"/>
+          <a:ext cx="12399264" cy="914400"/>
         </p:xfrm>
         <a:graphic>
           <a:graphicData uri="http://schemas.openxmlformats.org/drawingml/2006/table">
@@ -28675,6 +29791,7 @@
               <a:tblPr/>
               <a:tblGrid>
                 <a:gridCol w="1920240"/>
+                <a:gridCol w="402336"/>
                 <a:gridCol w="402336"/>
                 <a:gridCol w="402336"/>
                 <a:gridCol w="402336"/>
@@ -30833,6 +31950,95 @@
                           <a:ea typeface="Calibri" pitchFamily="34" charset="-122"/>
                           <a:cs typeface="Calibri" pitchFamily="34" charset="-120"/>
                         </a:rPr>
+                        <a:t>oct</a:t>
+                      </a:r>
+                      <a:endParaRPr lang="en-US" sz="750" dirty="0">
+                        <a:latin typeface="Calibri" charset="0"/>
+                        <a:ea typeface="Calibri" charset="0"/>
+                        <a:cs typeface="Calibri" charset="0"/>
+                      </a:endParaRPr>
+                    </a:p>
+                    <a:p>
+                      <a:pPr algn="r" indent="0" marL="0">
+                        <a:buNone/>
+                      </a:pPr>
+                      <a:r>
+                        <a:rPr lang="en-US" sz="750" b="1" dirty="0">
+                          <a:solidFill>
+                            <a:srgbClr val="56606E"/>
+                          </a:solidFill>
+                          <a:latin typeface="Calibri" pitchFamily="34" charset="0"/>
+                          <a:ea typeface="Calibri" pitchFamily="34" charset="-122"/>
+                          <a:cs typeface="Calibri" pitchFamily="34" charset="-120"/>
+                        </a:rPr>
+                        <a:t>26</a:t>
+                      </a:r>
+                      <a:endParaRPr lang="en-US" sz="750" dirty="0">
+                        <a:latin typeface="Calibri" charset="0"/>
+                        <a:ea typeface="Calibri" charset="0"/>
+                        <a:cs typeface="Calibri" charset="0"/>
+                      </a:endParaRPr>
+                    </a:p>
+                  </a:txBody>
+                  <a:tcPr marL="25400" marR="25400" marT="25400" marB="25400" anchor="b">
+                    <a:lnL w="12700" cap="flat" cmpd="sng" algn="ctr">
+                      <a:solidFill>
+                        <a:srgbClr val="F4F6F9"/>
+                      </a:solidFill>
+                      <a:prstDash val="solid"/>
+                      <a:round/>
+                      <a:headEnd type="none" w="med" len="med"/>
+                      <a:tailEnd type="none" w="med" len="med"/>
+                    </a:lnL>
+                    <a:lnR w="12700" cap="flat" cmpd="sng" algn="ctr">
+                      <a:solidFill>
+                        <a:srgbClr val="F4F6F9"/>
+                      </a:solidFill>
+                      <a:prstDash val="solid"/>
+                      <a:round/>
+                      <a:headEnd type="none" w="med" len="med"/>
+                      <a:tailEnd type="none" w="med" len="med"/>
+                    </a:lnR>
+                    <a:lnT w="12700" cap="flat" cmpd="sng" algn="ctr">
+                      <a:solidFill>
+                        <a:srgbClr val="F4F6F9"/>
+                      </a:solidFill>
+                      <a:prstDash val="solid"/>
+                      <a:round/>
+                      <a:headEnd type="none" w="med" len="med"/>
+                      <a:tailEnd type="none" w="med" len="med"/>
+                    </a:lnT>
+                    <a:lnB w="12700" cap="flat" cmpd="sng" algn="ctr">
+                      <a:solidFill>
+                        <a:srgbClr val="F4F6F9"/>
+                      </a:solidFill>
+                      <a:prstDash val="solid"/>
+                      <a:round/>
+                      <a:headEnd type="none" w="med" len="med"/>
+                      <a:tailEnd type="none" w="med" len="med"/>
+                    </a:lnB>
+                    <a:solidFill>
+                      <a:srgbClr val="F4F6F9"/>
+                    </a:solidFill>
+                  </a:tcPr>
+                </a:tc>
+                <a:tc>
+                  <a:txBody>
+                    <a:bodyPr/>
+                    <a:lstStyle/>
+                    <a:p>
+                      <a:pPr algn="r" indent="0" marL="0">
+                        <a:buNone/>
+                      </a:pPr>
+                      <a:r>
+                        <a:rPr lang="en-US" sz="750" b="1" dirty="0">
+                          <a:solidFill>
+                            <a:srgbClr val="56606E"/>
+                          </a:solidFill>
+                          <a:latin typeface="Calibri" pitchFamily="34" charset="0"/>
+                          <a:ea typeface="Calibri" pitchFamily="34" charset="-122"/>
+                          <a:cs typeface="Calibri" pitchFamily="34" charset="-120"/>
+                        </a:rPr>
                         <a:t>TOTAL UF</a:t>
                       </a:r>
                       <a:endParaRPr lang="en-US" sz="750" dirty="0">
@@ -32284,6 +33490,63 @@
                       <a:pPr algn="r" indent="0" marL="0">
                         <a:buNone/>
                       </a:pPr>
+                      <a:endParaRPr lang="en-US" sz="750" dirty="0">
+                        <a:latin typeface="Calibri" charset="0"/>
+                        <a:ea typeface="Calibri" charset="0"/>
+                        <a:cs typeface="Calibri" charset="0"/>
+                      </a:endParaRPr>
+                    </a:p>
+                  </a:txBody>
+                  <a:tcPr marL="25400" marR="25400" marT="25400" marB="25400" anchor="ctr">
+                    <a:lnL w="12700" cap="flat" cmpd="sng" algn="ctr">
+                      <a:solidFill>
+                        <a:srgbClr val="F4F6F9"/>
+                      </a:solidFill>
+                      <a:prstDash val="solid"/>
+                      <a:round/>
+                      <a:headEnd type="none" w="med" len="med"/>
+                      <a:tailEnd type="none" w="med" len="med"/>
+                    </a:lnL>
+                    <a:lnR w="12700" cap="flat" cmpd="sng" algn="ctr">
+                      <a:solidFill>
+                        <a:srgbClr val="F4F6F9"/>
+                      </a:solidFill>
+                      <a:prstDash val="solid"/>
+                      <a:round/>
+                      <a:headEnd type="none" w="med" len="med"/>
+                      <a:tailEnd type="none" w="med" len="med"/>
+                    </a:lnR>
+                    <a:lnT w="12700" cap="flat" cmpd="sng" algn="ctr">
+                      <a:solidFill>
+                        <a:srgbClr val="F4F6F9"/>
+                      </a:solidFill>
+                      <a:prstDash val="solid"/>
+                      <a:round/>
+                      <a:headEnd type="none" w="med" len="med"/>
+                      <a:tailEnd type="none" w="med" len="med"/>
+                    </a:lnT>
+                    <a:lnB w="12700" cap="flat" cmpd="sng" algn="ctr">
+                      <a:solidFill>
+                        <a:srgbClr val="F4F6F9"/>
+                      </a:solidFill>
+                      <a:prstDash val="solid"/>
+                      <a:round/>
+                      <a:headEnd type="none" w="med" len="med"/>
+                      <a:tailEnd type="none" w="med" len="med"/>
+                    </a:lnB>
+                    <a:solidFill>
+                      <a:srgbClr val="EFF2F6"/>
+                    </a:solidFill>
+                  </a:tcPr>
+                </a:tc>
+                <a:tc>
+                  <a:txBody>
+                    <a:bodyPr/>
+                    <a:lstStyle/>
+                    <a:p>
+                      <a:pPr algn="r" indent="0" marL="0">
+                        <a:buNone/>
+                      </a:pPr>
                       <a:r>
                         <a:rPr lang="en-US" sz="750" b="1" dirty="0">
                           <a:solidFill>
@@ -33887,6 +35150,63 @@
                       <a:pPr algn="r" indent="0" marL="0">
                         <a:buNone/>
                       </a:pPr>
+                      <a:endParaRPr lang="en-US" sz="750" dirty="0">
+                        <a:latin typeface="Calibri" charset="0"/>
+                        <a:ea typeface="Calibri" charset="0"/>
+                        <a:cs typeface="Calibri" charset="0"/>
+                      </a:endParaRPr>
+                    </a:p>
+                  </a:txBody>
+                  <a:tcPr marL="25400" marR="25400" marT="25400" marB="25400" anchor="ctr">
+                    <a:lnL w="12700" cap="flat" cmpd="sng" algn="ctr">
+                      <a:solidFill>
+                        <a:srgbClr val="F4F6F9"/>
+                      </a:solidFill>
+                      <a:prstDash val="solid"/>
+                      <a:round/>
+                      <a:headEnd type="none" w="med" len="med"/>
+                      <a:tailEnd type="none" w="med" len="med"/>
+                    </a:lnL>
+                    <a:lnR w="12700" cap="flat" cmpd="sng" algn="ctr">
+                      <a:solidFill>
+                        <a:srgbClr val="F4F6F9"/>
+                      </a:solidFill>
+                      <a:prstDash val="solid"/>
+                      <a:round/>
+                      <a:headEnd type="none" w="med" len="med"/>
+                      <a:tailEnd type="none" w="med" len="med"/>
+                    </a:lnR>
+                    <a:lnT w="12700" cap="flat" cmpd="sng" algn="ctr">
+                      <a:solidFill>
+                        <a:srgbClr val="F4F6F9"/>
+                      </a:solidFill>
+                      <a:prstDash val="solid"/>
+                      <a:round/>
+                      <a:headEnd type="none" w="med" len="med"/>
+                      <a:tailEnd type="none" w="med" len="med"/>
+                    </a:lnT>
+                    <a:lnB w="12700" cap="flat" cmpd="sng" algn="ctr">
+                      <a:solidFill>
+                        <a:srgbClr val="F4F6F9"/>
+                      </a:solidFill>
+                      <a:prstDash val="solid"/>
+                      <a:round/>
+                      <a:headEnd type="none" w="med" len="med"/>
+                      <a:tailEnd type="none" w="med" len="med"/>
+                    </a:lnB>
+                    <a:solidFill>
+                      <a:srgbClr val="EFF2F6"/>
+                    </a:solidFill>
+                  </a:tcPr>
+                </a:tc>
+                <a:tc>
+                  <a:txBody>
+                    <a:bodyPr/>
+                    <a:lstStyle/>
+                    <a:p>
+                      <a:pPr algn="r" indent="0" marL="0">
+                        <a:buNone/>
+                      </a:pPr>
                       <a:r>
                         <a:rPr lang="en-US" sz="750" b="1" dirty="0">
                           <a:solidFill>
@@ -35446,6 +36766,63 @@
                       <a:pPr algn="r" indent="0" marL="0">
                         <a:buNone/>
                       </a:pPr>
+                      <a:endParaRPr lang="en-US" sz="750" dirty="0">
+                        <a:latin typeface="Calibri" charset="0"/>
+                        <a:ea typeface="Calibri" charset="0"/>
+                        <a:cs typeface="Calibri" charset="0"/>
+                      </a:endParaRPr>
+                    </a:p>
+                  </a:txBody>
+                  <a:tcPr marL="25400" marR="25400" marT="25400" marB="25400" anchor="ctr">
+                    <a:lnL w="12700" cap="flat" cmpd="sng" algn="ctr">
+                      <a:solidFill>
+                        <a:srgbClr val="F4F6F9"/>
+                      </a:solidFill>
+                      <a:prstDash val="solid"/>
+                      <a:round/>
+                      <a:headEnd type="none" w="med" len="med"/>
+                      <a:tailEnd type="none" w="med" len="med"/>
+                    </a:lnL>
+                    <a:lnR w="12700" cap="flat" cmpd="sng" algn="ctr">
+                      <a:solidFill>
+                        <a:srgbClr val="F4F6F9"/>
+                      </a:solidFill>
+                      <a:prstDash val="solid"/>
+                      <a:round/>
+                      <a:headEnd type="none" w="med" len="med"/>
+                      <a:tailEnd type="none" w="med" len="med"/>
+                    </a:lnR>
+                    <a:lnT w="12700" cap="flat" cmpd="sng" algn="ctr">
+                      <a:solidFill>
+                        <a:srgbClr val="F4F6F9"/>
+                      </a:solidFill>
+                      <a:prstDash val="solid"/>
+                      <a:round/>
+                      <a:headEnd type="none" w="med" len="med"/>
+                      <a:tailEnd type="none" w="med" len="med"/>
+                    </a:lnT>
+                    <a:lnB w="12700" cap="flat" cmpd="sng" algn="ctr">
+                      <a:solidFill>
+                        <a:srgbClr val="F4F6F9"/>
+                      </a:solidFill>
+                      <a:prstDash val="solid"/>
+                      <a:round/>
+                      <a:headEnd type="none" w="med" len="med"/>
+                      <a:tailEnd type="none" w="med" len="med"/>
+                    </a:lnB>
+                    <a:solidFill>
+                      <a:srgbClr val="EFF2F6"/>
+                    </a:solidFill>
+                  </a:tcPr>
+                </a:tc>
+                <a:tc>
+                  <a:txBody>
+                    <a:bodyPr/>
+                    <a:lstStyle/>
+                    <a:p>
+                      <a:pPr algn="r" indent="0" marL="0">
+                        <a:buNone/>
+                      </a:pPr>
                       <a:r>
                         <a:rPr lang="en-US" sz="750" b="1" dirty="0">
                           <a:solidFill>
@@ -36950,6 +38327,63 @@
                       <a:pPr algn="r" indent="0" marL="0">
                         <a:buNone/>
                       </a:pPr>
+                      <a:endParaRPr lang="en-US" sz="750" dirty="0">
+                        <a:latin typeface="Calibri" charset="0"/>
+                        <a:ea typeface="Calibri" charset="0"/>
+                        <a:cs typeface="Calibri" charset="0"/>
+                      </a:endParaRPr>
+                    </a:p>
+                  </a:txBody>
+                  <a:tcPr marL="25400" marR="25400" marT="25400" marB="25400" anchor="ctr">
+                    <a:lnL w="12700" cap="flat" cmpd="sng" algn="ctr">
+                      <a:solidFill>
+                        <a:srgbClr val="F4F6F9"/>
+                      </a:solidFill>
+                      <a:prstDash val="solid"/>
+                      <a:round/>
+                      <a:headEnd type="none" w="med" len="med"/>
+                      <a:tailEnd type="none" w="med" len="med"/>
+                    </a:lnL>
+                    <a:lnR w="12700" cap="flat" cmpd="sng" algn="ctr">
+                      <a:solidFill>
+                        <a:srgbClr val="F4F6F9"/>
+                      </a:solidFill>
+                      <a:prstDash val="solid"/>
+                      <a:round/>
+                      <a:headEnd type="none" w="med" len="med"/>
+                      <a:tailEnd type="none" w="med" len="med"/>
+                    </a:lnR>
+                    <a:lnT w="12700" cap="flat" cmpd="sng" algn="ctr">
+                      <a:solidFill>
+                        <a:srgbClr val="F4F6F9"/>
+                      </a:solidFill>
+                      <a:prstDash val="solid"/>
+                      <a:round/>
+                      <a:headEnd type="none" w="med" len="med"/>
+                      <a:tailEnd type="none" w="med" len="med"/>
+                    </a:lnT>
+                    <a:lnB w="12700" cap="flat" cmpd="sng" algn="ctr">
+                      <a:solidFill>
+                        <a:srgbClr val="F4F6F9"/>
+                      </a:solidFill>
+                      <a:prstDash val="solid"/>
+                      <a:round/>
+                      <a:headEnd type="none" w="med" len="med"/>
+                      <a:tailEnd type="none" w="med" len="med"/>
+                    </a:lnB>
+                    <a:solidFill>
+                      <a:srgbClr val="EFF2F6"/>
+                    </a:solidFill>
+                  </a:tcPr>
+                </a:tc>
+                <a:tc>
+                  <a:txBody>
+                    <a:bodyPr/>
+                    <a:lstStyle/>
+                    <a:p>
+                      <a:pPr algn="r" indent="0" marL="0">
+                        <a:buNone/>
+                      </a:pPr>
                       <a:r>
                         <a:rPr lang="en-US" sz="750" b="1" dirty="0">
                           <a:solidFill>
@@ -38454,6 +39888,63 @@
                       <a:pPr algn="r" indent="0" marL="0">
                         <a:buNone/>
                       </a:pPr>
+                      <a:endParaRPr lang="en-US" sz="750" dirty="0">
+                        <a:latin typeface="Calibri" charset="0"/>
+                        <a:ea typeface="Calibri" charset="0"/>
+                        <a:cs typeface="Calibri" charset="0"/>
+                      </a:endParaRPr>
+                    </a:p>
+                  </a:txBody>
+                  <a:tcPr marL="25400" marR="25400" marT="25400" marB="25400" anchor="ctr">
+                    <a:lnL w="12700" cap="flat" cmpd="sng" algn="ctr">
+                      <a:solidFill>
+                        <a:srgbClr val="F4F6F9"/>
+                      </a:solidFill>
+                      <a:prstDash val="solid"/>
+                      <a:round/>
+                      <a:headEnd type="none" w="med" len="med"/>
+                      <a:tailEnd type="none" w="med" len="med"/>
+                    </a:lnL>
+                    <a:lnR w="12700" cap="flat" cmpd="sng" algn="ctr">
+                      <a:solidFill>
+                        <a:srgbClr val="F4F6F9"/>
+                      </a:solidFill>
+                      <a:prstDash val="solid"/>
+                      <a:round/>
+                      <a:headEnd type="none" w="med" len="med"/>
+                      <a:tailEnd type="none" w="med" len="med"/>
+                    </a:lnR>
+                    <a:lnT w="12700" cap="flat" cmpd="sng" algn="ctr">
+                      <a:solidFill>
+                        <a:srgbClr val="F4F6F9"/>
+                      </a:solidFill>
+                      <a:prstDash val="solid"/>
+                      <a:round/>
+                      <a:headEnd type="none" w="med" len="med"/>
+                      <a:tailEnd type="none" w="med" len="med"/>
+                    </a:lnT>
+                    <a:lnB w="12700" cap="flat" cmpd="sng" algn="ctr">
+                      <a:solidFill>
+                        <a:srgbClr val="F4F6F9"/>
+                      </a:solidFill>
+                      <a:prstDash val="solid"/>
+                      <a:round/>
+                      <a:headEnd type="none" w="med" len="med"/>
+                      <a:tailEnd type="none" w="med" len="med"/>
+                    </a:lnB>
+                    <a:solidFill>
+                      <a:srgbClr val="EFF2F6"/>
+                    </a:solidFill>
+                  </a:tcPr>
+                </a:tc>
+                <a:tc>
+                  <a:txBody>
+                    <a:bodyPr/>
+                    <a:lstStyle/>
+                    <a:p>
+                      <a:pPr algn="r" indent="0" marL="0">
+                        <a:buNone/>
+                      </a:pPr>
                       <a:r>
                         <a:rPr lang="en-US" sz="750" b="1" dirty="0">
                           <a:solidFill>
@@ -39925,6 +41416,63 @@
                       <a:pPr algn="r" indent="0" marL="0">
                         <a:buNone/>
                       </a:pPr>
+                      <a:endParaRPr lang="en-US" sz="750" dirty="0">
+                        <a:latin typeface="Calibri" charset="0"/>
+                        <a:ea typeface="Calibri" charset="0"/>
+                        <a:cs typeface="Calibri" charset="0"/>
+                      </a:endParaRPr>
+                    </a:p>
+                  </a:txBody>
+                  <a:tcPr marL="25400" marR="25400" marT="25400" marB="25400" anchor="ctr">
+                    <a:lnL w="12700" cap="flat" cmpd="sng" algn="ctr">
+                      <a:solidFill>
+                        <a:srgbClr val="F4F6F9"/>
+                      </a:solidFill>
+                      <a:prstDash val="solid"/>
+                      <a:round/>
+                      <a:headEnd type="none" w="med" len="med"/>
+                      <a:tailEnd type="none" w="med" len="med"/>
+                    </a:lnL>
+                    <a:lnR w="12700" cap="flat" cmpd="sng" algn="ctr">
+                      <a:solidFill>
+                        <a:srgbClr val="F4F6F9"/>
+                      </a:solidFill>
+                      <a:prstDash val="solid"/>
+                      <a:round/>
+                      <a:headEnd type="none" w="med" len="med"/>
+                      <a:tailEnd type="none" w="med" len="med"/>
+                    </a:lnR>
+                    <a:lnT w="12700" cap="flat" cmpd="sng" algn="ctr">
+                      <a:solidFill>
+                        <a:srgbClr val="F4F6F9"/>
+                      </a:solidFill>
+                      <a:prstDash val="solid"/>
+                      <a:round/>
+                      <a:headEnd type="none" w="med" len="med"/>
+                      <a:tailEnd type="none" w="med" len="med"/>
+                    </a:lnT>
+                    <a:lnB w="12700" cap="flat" cmpd="sng" algn="ctr">
+                      <a:solidFill>
+                        <a:srgbClr val="F4F6F9"/>
+                      </a:solidFill>
+                      <a:prstDash val="solid"/>
+                      <a:round/>
+                      <a:headEnd type="none" w="med" len="med"/>
+                      <a:tailEnd type="none" w="med" len="med"/>
+                    </a:lnB>
+                    <a:solidFill>
+                      <a:srgbClr val="EFF2F6"/>
+                    </a:solidFill>
+                  </a:tcPr>
+                </a:tc>
+                <a:tc>
+                  <a:txBody>
+                    <a:bodyPr/>
+                    <a:lstStyle/>
+                    <a:p>
+                      <a:pPr algn="r" indent="0" marL="0">
+                        <a:buNone/>
+                      </a:pPr>
                       <a:r>
                         <a:rPr lang="en-US" sz="750" b="1" dirty="0">
                           <a:solidFill>
@@ -41396,6 +42944,63 @@
                       <a:pPr algn="r" indent="0" marL="0">
                         <a:buNone/>
                       </a:pPr>
+                      <a:endParaRPr lang="en-US" sz="750" dirty="0">
+                        <a:latin typeface="Calibri" charset="0"/>
+                        <a:ea typeface="Calibri" charset="0"/>
+                        <a:cs typeface="Calibri" charset="0"/>
+                      </a:endParaRPr>
+                    </a:p>
+                  </a:txBody>
+                  <a:tcPr marL="25400" marR="25400" marT="25400" marB="25400" anchor="ctr">
+                    <a:lnL w="12700" cap="flat" cmpd="sng" algn="ctr">
+                      <a:solidFill>
+                        <a:srgbClr val="F4F6F9"/>
+                      </a:solidFill>
+                      <a:prstDash val="solid"/>
+                      <a:round/>
+                      <a:headEnd type="none" w="med" len="med"/>
+                      <a:tailEnd type="none" w="med" len="med"/>
+                    </a:lnL>
+                    <a:lnR w="12700" cap="flat" cmpd="sng" algn="ctr">
+                      <a:solidFill>
+                        <a:srgbClr val="F4F6F9"/>
+                      </a:solidFill>
+                      <a:prstDash val="solid"/>
+                      <a:round/>
+                      <a:headEnd type="none" w="med" len="med"/>
+                      <a:tailEnd type="none" w="med" len="med"/>
+                    </a:lnR>
+                    <a:lnT w="12700" cap="flat" cmpd="sng" algn="ctr">
+                      <a:solidFill>
+                        <a:srgbClr val="F4F6F9"/>
+                      </a:solidFill>
+                      <a:prstDash val="solid"/>
+                      <a:round/>
+                      <a:headEnd type="none" w="med" len="med"/>
+                      <a:tailEnd type="none" w="med" len="med"/>
+                    </a:lnT>
+                    <a:lnB w="12700" cap="flat" cmpd="sng" algn="ctr">
+                      <a:solidFill>
+                        <a:srgbClr val="F4F6F9"/>
+                      </a:solidFill>
+                      <a:prstDash val="solid"/>
+                      <a:round/>
+                      <a:headEnd type="none" w="med" len="med"/>
+                      <a:tailEnd type="none" w="med" len="med"/>
+                    </a:lnB>
+                    <a:solidFill>
+                      <a:srgbClr val="EFF2F6"/>
+                    </a:solidFill>
+                  </a:tcPr>
+                </a:tc>
+                <a:tc>
+                  <a:txBody>
+                    <a:bodyPr/>
+                    <a:lstStyle/>
+                    <a:p>
+                      <a:pPr algn="r" indent="0" marL="0">
+                        <a:buNone/>
+                      </a:pPr>
                       <a:r>
                         <a:rPr lang="en-US" sz="750" b="1" dirty="0">
                           <a:solidFill>
@@ -42878,6 +44483,63 @@
                       <a:pPr algn="r" indent="0" marL="0">
                         <a:buNone/>
                       </a:pPr>
+                      <a:endParaRPr lang="en-US" sz="750" dirty="0">
+                        <a:latin typeface="Calibri" charset="0"/>
+                        <a:ea typeface="Calibri" charset="0"/>
+                        <a:cs typeface="Calibri" charset="0"/>
+                      </a:endParaRPr>
+                    </a:p>
+                  </a:txBody>
+                  <a:tcPr marL="25400" marR="25400" marT="25400" marB="25400" anchor="ctr">
+                    <a:lnL w="12700" cap="flat" cmpd="sng" algn="ctr">
+                      <a:solidFill>
+                        <a:srgbClr val="F4F6F9"/>
+                      </a:solidFill>
+                      <a:prstDash val="solid"/>
+                      <a:round/>
+                      <a:headEnd type="none" w="med" len="med"/>
+                      <a:tailEnd type="none" w="med" len="med"/>
+                    </a:lnL>
+                    <a:lnR w="12700" cap="flat" cmpd="sng" algn="ctr">
+                      <a:solidFill>
+                        <a:srgbClr val="F4F6F9"/>
+                      </a:solidFill>
+                      <a:prstDash val="solid"/>
+                      <a:round/>
+                      <a:headEnd type="none" w="med" len="med"/>
+                      <a:tailEnd type="none" w="med" len="med"/>
+                    </a:lnR>
+                    <a:lnT w="12700" cap="flat" cmpd="sng" algn="ctr">
+                      <a:solidFill>
+                        <a:srgbClr val="F4F6F9"/>
+                      </a:solidFill>
+                      <a:prstDash val="solid"/>
+                      <a:round/>
+                      <a:headEnd type="none" w="med" len="med"/>
+                      <a:tailEnd type="none" w="med" len="med"/>
+                    </a:lnT>
+                    <a:lnB w="12700" cap="flat" cmpd="sng" algn="ctr">
+                      <a:solidFill>
+                        <a:srgbClr val="F4F6F9"/>
+                      </a:solidFill>
+                      <a:prstDash val="solid"/>
+                      <a:round/>
+                      <a:headEnd type="none" w="med" len="med"/>
+                      <a:tailEnd type="none" w="med" len="med"/>
+                    </a:lnB>
+                    <a:solidFill>
+                      <a:srgbClr val="EFF2F6"/>
+                    </a:solidFill>
+                  </a:tcPr>
+                </a:tc>
+                <a:tc>
+                  <a:txBody>
+                    <a:bodyPr/>
+                    <a:lstStyle/>
+                    <a:p>
+                      <a:pPr algn="r" indent="0" marL="0">
+                        <a:buNone/>
+                      </a:pPr>
                       <a:r>
                         <a:rPr lang="en-US" sz="750" b="1" dirty="0">
                           <a:solidFill>
@@ -44503,6 +46165,63 @@
                       <a:pPr algn="r" indent="0" marL="0">
                         <a:buNone/>
                       </a:pPr>
+                      <a:endParaRPr lang="en-US" sz="750" dirty="0">
+                        <a:latin typeface="Calibri" charset="0"/>
+                        <a:ea typeface="Calibri" charset="0"/>
+                        <a:cs typeface="Calibri" charset="0"/>
+                      </a:endParaRPr>
+                    </a:p>
+                  </a:txBody>
+                  <a:tcPr marL="25400" marR="25400" marT="25400" marB="25400" anchor="ctr">
+                    <a:lnL w="12700" cap="flat" cmpd="sng" algn="ctr">
+                      <a:solidFill>
+                        <a:srgbClr val="F4F6F9"/>
+                      </a:solidFill>
+                      <a:prstDash val="solid"/>
+                      <a:round/>
+                      <a:headEnd type="none" w="med" len="med"/>
+                      <a:tailEnd type="none" w="med" len="med"/>
+                    </a:lnL>
+                    <a:lnR w="12700" cap="flat" cmpd="sng" algn="ctr">
+                      <a:solidFill>
+                        <a:srgbClr val="F4F6F9"/>
+                      </a:solidFill>
+                      <a:prstDash val="solid"/>
+                      <a:round/>
+                      <a:headEnd type="none" w="med" len="med"/>
+                      <a:tailEnd type="none" w="med" len="med"/>
+                    </a:lnR>
+                    <a:lnT w="12700" cap="flat" cmpd="sng" algn="ctr">
+                      <a:solidFill>
+                        <a:srgbClr val="F4F6F9"/>
+                      </a:solidFill>
+                      <a:prstDash val="solid"/>
+                      <a:round/>
+                      <a:headEnd type="none" w="med" len="med"/>
+                      <a:tailEnd type="none" w="med" len="med"/>
+                    </a:lnT>
+                    <a:lnB w="12700" cap="flat" cmpd="sng" algn="ctr">
+                      <a:solidFill>
+                        <a:srgbClr val="F4F6F9"/>
+                      </a:solidFill>
+                      <a:prstDash val="solid"/>
+                      <a:round/>
+                      <a:headEnd type="none" w="med" len="med"/>
+                      <a:tailEnd type="none" w="med" len="med"/>
+                    </a:lnB>
+                    <a:solidFill>
+                      <a:srgbClr val="EFF2F6"/>
+                    </a:solidFill>
+                  </a:tcPr>
+                </a:tc>
+                <a:tc>
+                  <a:txBody>
+                    <a:bodyPr/>
+                    <a:lstStyle/>
+                    <a:p>
+                      <a:pPr algn="r" indent="0" marL="0">
+                        <a:buNone/>
+                      </a:pPr>
                       <a:r>
                         <a:rPr lang="en-US" sz="750" b="1" dirty="0">
                           <a:solidFill>
@@ -46208,13 +47927,81 @@
                       <a:r>
                         <a:rPr lang="en-US" sz="750" b="1" dirty="0">
                           <a:solidFill>
+                            <a:srgbClr val="C0392B"/>
+                          </a:solidFill>
+                          <a:latin typeface="Calibri" pitchFamily="34" charset="0"/>
+                          <a:ea typeface="Calibri" pitchFamily="34" charset="-122"/>
+                          <a:cs typeface="Calibri" pitchFamily="34" charset="-120"/>
+                        </a:rPr>
+                        <a:t>0/1</a:t>
+                      </a:r>
+                      <a:endParaRPr lang="en-US" sz="750" dirty="0">
+                        <a:latin typeface="Calibri" charset="0"/>
+                        <a:ea typeface="Calibri" charset="0"/>
+                        <a:cs typeface="Calibri" charset="0"/>
+                      </a:endParaRPr>
+                    </a:p>
+                  </a:txBody>
+                  <a:tcPr marL="25400" marR="25400" marT="25400" marB="25400" anchor="ctr">
+                    <a:lnL w="12700" cap="flat" cmpd="sng" algn="ctr">
+                      <a:solidFill>
+                        <a:srgbClr val="F4F6F9"/>
+                      </a:solidFill>
+                      <a:prstDash val="solid"/>
+                      <a:round/>
+                      <a:headEnd type="none" w="med" len="med"/>
+                      <a:tailEnd type="none" w="med" len="med"/>
+                    </a:lnL>
+                    <a:lnR w="12700" cap="flat" cmpd="sng" algn="ctr">
+                      <a:solidFill>
+                        <a:srgbClr val="F4F6F9"/>
+                      </a:solidFill>
+                      <a:prstDash val="solid"/>
+                      <a:round/>
+                      <a:headEnd type="none" w="med" len="med"/>
+                      <a:tailEnd type="none" w="med" len="med"/>
+                    </a:lnR>
+                    <a:lnT w="12700" cap="flat" cmpd="sng" algn="ctr">
+                      <a:solidFill>
+                        <a:srgbClr val="F4F6F9"/>
+                      </a:solidFill>
+                      <a:prstDash val="solid"/>
+                      <a:round/>
+                      <a:headEnd type="none" w="med" len="med"/>
+                      <a:tailEnd type="none" w="med" len="med"/>
+                    </a:lnT>
+                    <a:lnB w="12700" cap="flat" cmpd="sng" algn="ctr">
+                      <a:solidFill>
+                        <a:srgbClr val="F4F6F9"/>
+                      </a:solidFill>
+                      <a:prstDash val="solid"/>
+                      <a:round/>
+                      <a:headEnd type="none" w="med" len="med"/>
+                      <a:tailEnd type="none" w="med" len="med"/>
+                    </a:lnB>
+                    <a:solidFill>
+                      <a:srgbClr val="F4F6F9"/>
+                    </a:solidFill>
+                  </a:tcPr>
+                </a:tc>
+                <a:tc>
+                  <a:txBody>
+                    <a:bodyPr/>
+                    <a:lstStyle/>
+                    <a:p>
+                      <a:pPr algn="r" indent="0" marL="0">
+                        <a:buNone/>
+                      </a:pPr>
+                      <a:r>
+                        <a:rPr lang="en-US" sz="750" b="1" dirty="0">
+                          <a:solidFill>
                             <a:srgbClr val="56606E"/>
                           </a:solidFill>
                           <a:latin typeface="Calibri" pitchFamily="34" charset="0"/>
                           <a:ea typeface="Calibri" pitchFamily="34" charset="-122"/>
                           <a:cs typeface="Calibri" pitchFamily="34" charset="-120"/>
                         </a:rPr>
-                        <a:t>108/504</a:t>
+                        <a:t>108/505</a:t>
                       </a:r>
                       <a:endParaRPr lang="en-US" sz="750" dirty="0">
                         <a:latin typeface="Calibri" charset="0"/>
@@ -46878,7 +48665,7 @@
                 <a:ea typeface="Cambria" pitchFamily="34" charset="-122"/>
                 <a:cs typeface="Cambria" pitchFamily="34" charset="-120"/>
               </a:rPr>
-              <a:t>264</a:t>
+              <a:t>265</a:t>
             </a:r>
             <a:endParaRPr lang="en-US" sz="2100" dirty="0"/>
           </a:p>
@@ -46956,7 +48743,7 @@
                 <a:ea typeface="Calibri" pitchFamily="34" charset="-122"/>
                 <a:cs typeface="Calibri" pitchFamily="34" charset="-120"/>
               </a:rPr>
-              <a:t>El costo se imputa al mes de emisión: la columna «Costo De La No Conformidad» no trae fecha propia. El mes más caro es jul-25 con 4.382 UF. Los últimos 5 meses no traen ningún monto declarado —un mes en blanco es «sin declarar», no «sin costo»—. La cifra es un piso del costo real.</a:t>
+              <a:t>El costo se imputa al mes de emisión: la columna «Costo De La No Conformidad» no trae fecha propia. El mes más caro es jul-25 con 4.382 UF. Los últimos 6 meses no traen ningún monto declarado —un mes en blanco es «sin declarar», no «sin costo»—. La cifra es un piso del costo real.</a:t>
             </a:r>
             <a:endParaRPr lang="en-US" sz="950" dirty="0"/>
           </a:p>
@@ -46995,7 +48782,7 @@
                 <a:ea typeface="Calibri" pitchFamily="34" charset="-122"/>
                 <a:cs typeface="Calibri" pitchFamily="34" charset="-120"/>
               </a:rPr>
-              <a:t>Fuente: Data_NCR.xlsx — hoja «Observaciones» · Corte 12-10-2026 · 515 registros desde 10-02-2023</a:t>
+              <a:t>Fuente: Data_NCR.xlsx — hoja «Observaciones» · Corte 19-10-2026 · 516 registros desde 10-02-2023</a:t>
             </a:r>
             <a:endParaRPr lang="en-US" sz="850" dirty="0"/>
           </a:p>
@@ -47369,7 +49156,7 @@
                 <a:ea typeface="Calibri" pitchFamily="34" charset="-122"/>
                 <a:cs typeface="Calibri" pitchFamily="34" charset="-120"/>
               </a:rPr>
-              <a:t>17 de los 20 hallazgos abiertos (85%) y 90,1% de cierre, contra 96,1% global. Es la ruta crítica del módulo.</a:t>
+              <a:t>14 de los 18 hallazgos abiertos (77,8%) y 91,9% de cierre, contra 96,5% global. Es la ruta crítica del módulo.</a:t>
             </a:r>
             <a:endParaRPr lang="en-US" sz="1100" dirty="0"/>
           </a:p>
@@ -47511,7 +49298,7 @@
                 <a:ea typeface="Calibri" pitchFamily="34" charset="-122"/>
                 <a:cs typeface="Calibri" pitchFamily="34" charset="-120"/>
               </a:rPr>
-              <a:t>Solo 20,6% de sus hallazgos los detecta Besalco; el mejor frente va en 66,7%. Lo que no se detecta adentro llega como observación del cliente.</a:t>
+              <a:t>Solo 20,5% de sus hallazgos los detecta Besalco; el mejor frente va en 66,7%. Lo que no se detecta adentro llega como observación del cliente.</a:t>
             </a:r>
             <a:endParaRPr lang="en-US" sz="1100" dirty="0"/>
           </a:p>
@@ -47653,7 +49440,7 @@
                 <a:ea typeface="Calibri" pitchFamily="34" charset="-122"/>
                 <a:cs typeface="Calibri" pitchFamily="34" charset="-120"/>
               </a:rPr>
-              <a:t>0 de ellos superan el año abiertos. Los tienen a cargo Sin asignar (9). Es deuda antigua que no se cierra sola.</a:t>
+              <a:t>1 de ellos superan el año abiertos. Los tienen a cargo Sin asignar (9). Es deuda antigua que no se cierra sola.</a:t>
             </a:r>
             <a:endParaRPr lang="en-US" sz="1100" dirty="0"/>
           </a:p>
@@ -47753,7 +49540,7 @@
                 <a:ea typeface="Calibri" pitchFamily="34" charset="-122"/>
                 <a:cs typeface="Calibri" pitchFamily="34" charset="-120"/>
               </a:rPr>
-              <a:t>Responder las 20 que pasaron el plazo</a:t>
+              <a:t>Responder las 17 que pasaron el plazo</a:t>
             </a:r>
             <a:endParaRPr lang="en-US" sz="1400" dirty="0"/>
           </a:p>
@@ -47795,7 +49582,7 @@
                 <a:ea typeface="Calibri" pitchFamily="34" charset="-122"/>
                 <a:cs typeface="Calibri" pitchFamily="34" charset="-120"/>
               </a:rPr>
-              <a:t>El plazo es de 10 días desde la emisión y hoy lo incumplen 100% de los abiertos. Solo 0 siguen dentro de plazo.</a:t>
+              <a:t>El plazo es de 10 días desde la emisión y hoy lo incumplen 94,4% de los abiertos. Solo 1 siguen dentro de plazo.</a:t>
             </a:r>
             <a:endParaRPr lang="en-US" sz="1100" dirty="0"/>
           </a:p>
@@ -47834,7 +49621,7 @@
                 <a:ea typeface="Calibri" pitchFamily="34" charset="-122"/>
                 <a:cs typeface="Calibri" pitchFamily="34" charset="-120"/>
               </a:rPr>
-              <a:t>Fuente: Data_NCR.xlsx — hoja «Observaciones» · Corte 12-10-2026 · 515 registros desde 10-02-2023</a:t>
+              <a:t>Fuente: Data_NCR.xlsx — hoja «Observaciones» · Corte 19-10-2026 · 516 registros desde 10-02-2023</a:t>
             </a:r>
             <a:endParaRPr lang="en-US" sz="850" dirty="0"/>
           </a:p>
@@ -48558,7 +50345,7 @@
                 <a:ea typeface="Calibri" pitchFamily="34" charset="-122"/>
                 <a:cs typeface="Calibri" pitchFamily="34" charset="-120"/>
               </a:rPr>
-              <a:t>Corte: 12-10-2026</a:t>
+              <a:t>Corte: 19-10-2026</a:t>
             </a:r>
             <a:endParaRPr lang="en-US" sz="1100" dirty="0"/>
           </a:p>
@@ -48597,7 +50384,7 @@
                 <a:ea typeface="Calibri" pitchFamily="34" charset="-122"/>
                 <a:cs typeface="Calibri" pitchFamily="34" charset="-120"/>
               </a:rPr>
-              <a:t>Fuente: Data_NCR.xlsx — hoja «Observaciones» · Corte 12-10-2026 · 515 registros desde 10-02-2023</a:t>
+              <a:t>Fuente: Data_NCR.xlsx — hoja «Observaciones» · Corte 19-10-2026 · 516 registros desde 10-02-2023</a:t>
             </a:r>
             <a:endParaRPr lang="en-US" sz="850" dirty="0"/>
           </a:p>

--- a/modulo_nc/Panel_No_Conformidades.pptx
+++ b/modulo_nc/Panel_No_Conformidades.pptx
@@ -220,19 +220,19 @@
                     <c:v>3 sem.</c:v>
                   </c:pt>
                   <c:pt idx="1">
-                    <c:v>14-09</c:v>
+                    <c:v>21-09</c:v>
                   </c:pt>
                   <c:pt idx="2">
-                    <c:v>21-09</c:v>
+                    <c:v>28-09</c:v>
                   </c:pt>
                   <c:pt idx="3">
-                    <c:v>28-09</c:v>
+                    <c:v>05-10</c:v>
                   </c:pt>
                   <c:pt idx="4">
-                    <c:v>05-10</c:v>
+                    <c:v>12-10</c:v>
                   </c:pt>
                   <c:pt idx="5">
-                    <c:v>12-10</c:v>
+                    <c:v>19-10</c:v>
                   </c:pt>
                 </c:lvl>
               </c:multiLvlStrCache>
@@ -251,7 +251,7 @@
                   <c:v>1</c:v>
                 </c:pt>
                 <c:pt idx="2">
-                  <c:v>1</c:v>
+                  <c:v/>
                 </c:pt>
                 <c:pt idx="3">
                   <c:v/>
@@ -260,7 +260,7 @@
                   <c:v/>
                 </c:pt>
                 <c:pt idx="5">
-                  <c:v>1</c:v>
+                  <c:v>3</c:v>
                 </c:pt>
               </c:numCache>
             </c:numRef>
@@ -322,19 +322,19 @@
                     <c:v>3 sem.</c:v>
                   </c:pt>
                   <c:pt idx="1">
-                    <c:v>14-09</c:v>
+                    <c:v>21-09</c:v>
                   </c:pt>
                   <c:pt idx="2">
-                    <c:v>21-09</c:v>
+                    <c:v>28-09</c:v>
                   </c:pt>
                   <c:pt idx="3">
-                    <c:v>28-09</c:v>
+                    <c:v>05-10</c:v>
                   </c:pt>
                   <c:pt idx="4">
-                    <c:v>05-10</c:v>
+                    <c:v>12-10</c:v>
                   </c:pt>
                   <c:pt idx="5">
-                    <c:v>12-10</c:v>
+                    <c:v>19-10</c:v>
                   </c:pt>
                 </c:lvl>
               </c:multiLvlStrCache>
@@ -347,19 +347,19 @@
                 <c:formatCode>General</c:formatCode>
                 <c:ptCount val="6"/>
                 <c:pt idx="0">
-                  <c:v>6</c:v>
+                  <c:v>9</c:v>
                 </c:pt>
                 <c:pt idx="1">
-                  <c:v>3</c:v>
+                  <c:v/>
                 </c:pt>
                 <c:pt idx="2">
+                  <c:v>1</c:v>
+                </c:pt>
+                <c:pt idx="3">
                   <c:v/>
                 </c:pt>
-                <c:pt idx="3">
+                <c:pt idx="4">
                   <c:v>1</c:v>
-                </c:pt>
-                <c:pt idx="4">
-                  <c:v/>
                 </c:pt>
                 <c:pt idx="5">
                   <c:v/>
@@ -641,7 +641,7 @@
                 <c:formatCode>General</c:formatCode>
                 <c:ptCount val="4"/>
                 <c:pt idx="0">
-                  <c:v>54</c:v>
+                  <c:v>55</c:v>
                 </c:pt>
                 <c:pt idx="1">
                   <c:v>52</c:v>
@@ -737,7 +737,7 @@
                   <c:v>202</c:v>
                 </c:pt>
                 <c:pt idx="2">
-                  <c:v>79</c:v>
+                  <c:v>81</c:v>
                 </c:pt>
                 <c:pt idx="3">
                   <c:v/>
@@ -1199,10 +1199,10 @@
                 <c:formatCode>General</c:formatCode>
                 <c:ptCount val="4"/>
                 <c:pt idx="0">
-                  <c:v>314</c:v>
+                  <c:v>316</c:v>
                 </c:pt>
                 <c:pt idx="1">
-                  <c:v>126</c:v>
+                  <c:v>127</c:v>
                 </c:pt>
                 <c:pt idx="2">
                   <c:v>57</c:v>
@@ -1289,10 +1289,10 @@
                 <c:formatCode>General</c:formatCode>
                 <c:ptCount val="4"/>
                 <c:pt idx="0">
-                  <c:v>14</c:v>
+                  <c:v>15</c:v>
                 </c:pt>
                 <c:pt idx="1">
-                  <c:v>1</c:v>
+                  <c:v/>
                 </c:pt>
                 <c:pt idx="2">
                   <c:v>3</c:v>
@@ -1568,7 +1568,7 @@
                 <c:formatCode>General</c:formatCode>
                 <c:ptCount val="1"/>
                 <c:pt idx="0">
-                  <c:v>2</c:v>
+                  <c:v>3</c:v>
                 </c:pt>
               </c:numCache>
             </c:numRef>
@@ -1712,7 +1712,7 @@
                 <c:formatCode>General</c:formatCode>
                 <c:ptCount val="1"/>
                 <c:pt idx="0">
-                  <c:v>3</c:v>
+                  <c:v>2</c:v>
                 </c:pt>
               </c:numCache>
             </c:numRef>
@@ -2162,7 +2162,7 @@
                   <c:v>7</c:v>
                 </c:pt>
                 <c:pt idx="5">
-                  <c:v>4</c:v>
+                  <c:v>5</c:v>
                 </c:pt>
                 <c:pt idx="6">
                   <c:v>4</c:v>
@@ -2261,7 +2261,7 @@
                 <c:formatCode>General</c:formatCode>
                 <c:ptCount val="8"/>
                 <c:pt idx="0">
-                  <c:v/>
+                  <c:v>1</c:v>
                 </c:pt>
                 <c:pt idx="1">
                   <c:v/>
@@ -2276,7 +2276,7 @@
                   <c:v/>
                 </c:pt>
                 <c:pt idx="5">
-                  <c:v>1</c:v>
+                  <c:v/>
                 </c:pt>
                 <c:pt idx="6">
                   <c:v/>
@@ -2573,7 +2573,7 @@
                 <c:formatCode>General</c:formatCode>
                 <c:ptCount val="8"/>
                 <c:pt idx="0">
-                  <c:v>147</c:v>
+                  <c:v>148</c:v>
                 </c:pt>
                 <c:pt idx="1">
                   <c:v>26</c:v>
@@ -2687,7 +2687,7 @@
                 <c:formatCode>General</c:formatCode>
                 <c:ptCount val="8"/>
                 <c:pt idx="0">
-                  <c:v>2</c:v>
+                  <c:v>1</c:v>
                 </c:pt>
                 <c:pt idx="1">
                   <c:v>1</c:v>
@@ -3005,7 +3005,7 @@
                   <c:v>32</c:v>
                 </c:pt>
                 <c:pt idx="2">
-                  <c:v>23</c:v>
+                  <c:v>24</c:v>
                 </c:pt>
                 <c:pt idx="3">
                   <c:v>18</c:v>
@@ -3119,7 +3119,7 @@
                   <c:v>5</c:v>
                 </c:pt>
                 <c:pt idx="2">
-                  <c:v>3</c:v>
+                  <c:v>4</c:v>
                 </c:pt>
                 <c:pt idx="3">
                   <c:v>1</c:v>
@@ -5515,7 +5515,7 @@
       </p:sp>
       <p:pic>
         <p:nvPicPr>
-          <p:cNvPr id="4" name="Image 0" descr="/workspace/dashboard-hseq/panel_control_TOP_P1/besalco_logo.png">    </p:cNvPr>
+          <p:cNvPr id="4" name="Image 0" descr="/home/user/dashboard-hseq/panel_control_TOP_P1/besalco_logo.png">    </p:cNvPr>
           <p:cNvPicPr>
             <a:picLocks noChangeAspect="1"/>
           </p:cNvPicPr>
@@ -5710,7 +5710,7 @@
                 <a:ea typeface="Calibri" pitchFamily="34" charset="-122"/>
                 <a:cs typeface="Calibri" pitchFamily="34" charset="-120"/>
               </a:rPr>
-              <a:t>516 hallazgos levantados entre 10-02-2023 y 14-10-2026 (Desaladora 82 · Talabre 254 · Arqueros 172 · Oficina Central 8).</a:t>
+              <a:t>519 hallazgos levantados entre 10-02-2023 y 23-10-2026 (Desaladora 83 · Talabre 254 · Arqueros 174 · Oficina Central 8).</a:t>
             </a:r>
             <a:endParaRPr lang="en-US" sz="1350" dirty="0"/>
           </a:p>
@@ -6003,7 +6003,7 @@
                 <a:ea typeface="Cambria" pitchFamily="34" charset="-122"/>
                 <a:cs typeface="Cambria" pitchFamily="34" charset="-120"/>
               </a:rPr>
-              <a:t>10.613</a:t>
+              <a:t>10.628</a:t>
             </a:r>
             <a:endParaRPr lang="en-US" sz="3400" dirty="0"/>
           </a:p>
@@ -6081,7 +6081,7 @@
                 <a:ea typeface="Calibri" pitchFamily="34" charset="-122"/>
                 <a:cs typeface="Calibri" pitchFamily="34" charset="-120"/>
               </a:rPr>
-              <a:t>Corte: 19-10-2026</a:t>
+              <a:t>Corte: 26-10-2026</a:t>
             </a:r>
             <a:endParaRPr lang="en-US" sz="1100" dirty="0"/>
           </a:p>
@@ -6120,7 +6120,7 @@
                 <a:ea typeface="Calibri" pitchFamily="34" charset="-122"/>
                 <a:cs typeface="Calibri" pitchFamily="34" charset="-120"/>
               </a:rPr>
-              <a:t>Fuente: Data_NCR.xlsx — hoja «Observaciones» · Corte 19-10-2026 · 516 registros desde 10-02-2023</a:t>
+              <a:t>Fuente: Data_NCR.xlsx — hoja «Observaciones» · Corte 26-10-2026 · 519 registros desde 10-02-2023</a:t>
             </a:r>
             <a:endParaRPr lang="en-US" sz="850" dirty="0"/>
           </a:p>
@@ -6199,7 +6199,7 @@
       </p:grpSpPr>
       <p:pic>
         <p:nvPicPr>
-          <p:cNvPr id="2" name="Image 0" descr="/workspace/dashboard-hseq/panel_control_TOP_P1/besalco_logo.png">    </p:cNvPr>
+          <p:cNvPr id="2" name="Image 0" descr="/home/user/dashboard-hseq/panel_control_TOP_P1/besalco_logo.png">    </p:cNvPr>
           <p:cNvPicPr>
             <a:picLocks noChangeAspect="1"/>
           </p:cNvPicPr>
@@ -6386,7 +6386,7 @@
                 <a:ea typeface="Cambria" pitchFamily="34" charset="-122"/>
                 <a:cs typeface="Cambria" pitchFamily="34" charset="-120"/>
               </a:rPr>
-              <a:t>82</a:t>
+              <a:t>83</a:t>
             </a:r>
             <a:endParaRPr lang="en-US" sz="4000" dirty="0"/>
           </a:p>
@@ -6425,7 +6425,7 @@
                 <a:ea typeface="Calibri" pitchFamily="34" charset="-122"/>
                 <a:cs typeface="Calibri" pitchFamily="34" charset="-120"/>
               </a:rPr>
-              <a:t>81 cerrados</a:t>
+              <a:t>82 cerrados</a:t>
             </a:r>
             <a:endParaRPr lang="en-US" sz="1400" dirty="0"/>
           </a:p>
@@ -6503,7 +6503,7 @@
                 <a:ea typeface="Calibri" pitchFamily="34" charset="-122"/>
                 <a:cs typeface="Calibri" pitchFamily="34" charset="-120"/>
               </a:rPr>
-              <a:t>54 internas · 19 del cliente · 8 de subcontrato</a:t>
+              <a:t>55 internas · 19 del cliente · 8 de subcontrato</a:t>
             </a:r>
             <a:endParaRPr lang="en-US" sz="950" dirty="0"/>
           </a:p>
@@ -6635,7 +6635,7 @@
                 <a:ea typeface="Calibri" pitchFamily="34" charset="-122"/>
                 <a:cs typeface="Calibri" pitchFamily="34" charset="-120"/>
               </a:rPr>
-              <a:t>81/82</a:t>
+              <a:t>82/83</a:t>
             </a:r>
             <a:endParaRPr lang="en-US" sz="1400" dirty="0"/>
           </a:p>
@@ -6923,7 +6923,7 @@
                 <a:ea typeface="Calibri" pitchFamily="34" charset="-122"/>
                 <a:cs typeface="Calibri" pitchFamily="34" charset="-120"/>
               </a:rPr>
-              <a:t>1 listo para revisión</a:t>
+              <a:t>1 iniciado</a:t>
             </a:r>
             <a:endParaRPr lang="en-US" sz="950" dirty="0"/>
           </a:p>
@@ -7016,7 +7016,7 @@
                 <a:ea typeface="Cambria" pitchFamily="34" charset="-122"/>
                 <a:cs typeface="Cambria" pitchFamily="34" charset="-120"/>
               </a:rPr>
-              <a:t>18</a:t>
+              <a:t>19</a:t>
             </a:r>
             <a:endParaRPr lang="en-US" sz="4000" dirty="0"/>
           </a:p>
@@ -7249,7 +7249,7 @@
                 <a:ea typeface="Cambria" pitchFamily="34" charset="-122"/>
                 <a:cs typeface="Cambria" pitchFamily="34" charset="-120"/>
               </a:rPr>
-              <a:t>66,7%</a:t>
+              <a:t>67,1%</a:t>
             </a:r>
             <a:endParaRPr lang="en-US" sz="2600" dirty="0"/>
           </a:p>
@@ -7471,7 +7471,7 @@
                 <a:ea typeface="Cambria" pitchFamily="34" charset="-122"/>
                 <a:cs typeface="Cambria" pitchFamily="34" charset="-120"/>
               </a:rPr>
-              <a:t>54</a:t>
+              <a:t>55</a:t>
             </a:r>
             <a:endParaRPr lang="en-US" sz="1600" dirty="0"/>
           </a:p>
@@ -7921,7 +7921,7 @@
                 <a:ea typeface="Calibri" pitchFamily="34" charset="-122"/>
                 <a:cs typeface="Calibri" pitchFamily="34" charset="-120"/>
               </a:rPr>
-              <a:t>Fuente: Data_NCR.xlsx — hoja «Observaciones» · Corte 19-10-2026 · 516 registros desde 10-02-2023</a:t>
+              <a:t>Fuente: Data_NCR.xlsx — hoja «Observaciones» · Corte 26-10-2026 · 519 registros desde 10-02-2023</a:t>
             </a:r>
             <a:endParaRPr lang="en-US" sz="850" dirty="0"/>
           </a:p>
@@ -8039,7 +8039,7 @@
       </p:grpSpPr>
       <p:pic>
         <p:nvPicPr>
-          <p:cNvPr id="2" name="Image 0" descr="/workspace/dashboard-hseq/panel_control_TOP_P1/besalco_logo.png">    </p:cNvPr>
+          <p:cNvPr id="2" name="Image 0" descr="/home/user/dashboard-hseq/panel_control_TOP_P1/besalco_logo.png">    </p:cNvPr>
           <p:cNvPicPr>
             <a:picLocks noChangeAspect="1"/>
           </p:cNvPicPr>
@@ -8546,7 +8546,7 @@
                 <a:ea typeface="Calibri" pitchFamily="34" charset="-122"/>
                 <a:cs typeface="Calibri" pitchFamily="34" charset="-120"/>
               </a:rPr>
-              <a:t>89</a:t>
+              <a:t>96</a:t>
             </a:r>
             <a:endParaRPr lang="en-US" sz="1050" dirty="0"/>
           </a:p>
@@ -8663,7 +8663,7 @@
                 <a:ea typeface="Calibri" pitchFamily="34" charset="-122"/>
                 <a:cs typeface="Calibri" pitchFamily="34" charset="-120"/>
               </a:rPr>
-              <a:t>EXPEDITORÍA</a:t>
+              <a:t>ELÉCTRICA</a:t>
             </a:r>
             <a:endParaRPr lang="en-US" sz="1050" dirty="0"/>
           </a:p>
@@ -8702,7 +8702,7 @@
                 <a:ea typeface="Calibri" pitchFamily="34" charset="-122"/>
                 <a:cs typeface="Calibri" pitchFamily="34" charset="-120"/>
               </a:rPr>
-              <a:t>Ariel Flores U.</a:t>
+              <a:t>Luis Carrasco</a:t>
             </a:r>
             <a:endParaRPr lang="en-US" sz="1050" dirty="0"/>
           </a:p>
@@ -8741,7 +8741,7 @@
                 <a:ea typeface="Calibri" pitchFamily="34" charset="-122"/>
                 <a:cs typeface="Calibri" pitchFamily="34" charset="-120"/>
               </a:rPr>
-              <a:t>Listo para revisi…</a:t>
+              <a:t>Iniciado</a:t>
             </a:r>
             <a:endParaRPr lang="en-US" sz="1050" dirty="0"/>
           </a:p>
@@ -8780,7 +8780,7 @@
                 <a:ea typeface="Calibri" pitchFamily="34" charset="-122"/>
                 <a:cs typeface="Calibri" pitchFamily="34" charset="-120"/>
               </a:rPr>
-              <a:t>160</a:t>
+              <a:t>3</a:t>
             </a:r>
             <a:endParaRPr lang="en-US" sz="1050" dirty="0"/>
           </a:p>
@@ -8819,7 +8819,7 @@
                 <a:ea typeface="Calibri" pitchFamily="34" charset="-122"/>
                 <a:cs typeface="Calibri" pitchFamily="34" charset="-120"/>
               </a:rPr>
-              <a:t>Daño en manilla de válvula 4515-HV-…</a:t>
+              <a:t>Inconsistencias en los registros de…</a:t>
             </a:r>
             <a:endParaRPr lang="en-US" sz="1000" dirty="0"/>
           </a:p>
@@ -8865,7 +8865,7 @@
             </a:avLst>
           </a:prstGeom>
           <a:solidFill>
-            <a:srgbClr val="E9EDF2"/>
+            <a:srgbClr val="12233B"/>
           </a:solidFill>
           <a:ln/>
         </p:spPr>
@@ -8897,13 +8897,13 @@
             <a:r>
               <a:rPr lang="en-US" sz="1000" b="1" spc="100" kern="0" dirty="0">
                 <a:solidFill>
-                  <a:srgbClr val="56606E"/>
-                </a:solidFill>
-                <a:latin typeface="Calibri" pitchFamily="34" charset="0"/>
-                <a:ea typeface="Calibri" pitchFamily="34" charset="-122"/>
-                <a:cs typeface="Calibri" pitchFamily="34" charset="-120"/>
-              </a:rPr>
-              <a:t>SEMANA 12-10-2026 — 18-10-2026</a:t>
+                  <a:srgbClr val="E3A55B"/>
+                </a:solidFill>
+                <a:latin typeface="Calibri" pitchFamily="34" charset="0"/>
+                <a:ea typeface="Calibri" pitchFamily="34" charset="-122"/>
+                <a:cs typeface="Calibri" pitchFamily="34" charset="-120"/>
+              </a:rPr>
+              <a:t>SEMANA 19-10-2026 — 25-10-2026</a:t>
             </a:r>
             <a:endParaRPr lang="en-US" sz="1000" dirty="0"/>
           </a:p>
@@ -8936,13 +8936,13 @@
             <a:r>
               <a:rPr lang="en-US" sz="1150" dirty="0">
                 <a:solidFill>
-                  <a:srgbClr val="56606E"/>
-                </a:solidFill>
-                <a:latin typeface="Calibri" pitchFamily="34" charset="0"/>
-                <a:ea typeface="Calibri" pitchFamily="34" charset="-122"/>
-                <a:cs typeface="Calibri" pitchFamily="34" charset="-120"/>
-              </a:rPr>
-              <a:t>Sin hallazgos nuevos en el período.</a:t>
+                  <a:srgbClr val="FFFFFF"/>
+                </a:solidFill>
+                <a:latin typeface="Calibri" pitchFamily="34" charset="0"/>
+                <a:ea typeface="Calibri" pitchFamily="34" charset="-122"/>
+                <a:cs typeface="Calibri" pitchFamily="34" charset="-120"/>
+              </a:rPr>
+              <a:t>1 hallazgo nuevo · 1 interna · ELÉCTRICA 1 · 1 sigue abierto</a:t>
             </a:r>
             <a:endParaRPr lang="en-US" sz="1150" dirty="0"/>
           </a:p>
@@ -8981,7 +8981,7 @@
                 <a:ea typeface="Calibri" pitchFamily="34" charset="-122"/>
                 <a:cs typeface="Calibri" pitchFamily="34" charset="-120"/>
               </a:rPr>
-              <a:t>Fuente: Data_NCR.xlsx — hoja «Observaciones» · Corte 19-10-2026 · 516 registros desde 10-02-2023</a:t>
+              <a:t>Fuente: Data_NCR.xlsx — hoja «Observaciones» · Corte 26-10-2026 · 519 registros desde 10-02-2023</a:t>
             </a:r>
             <a:endParaRPr lang="en-US" sz="850" dirty="0"/>
           </a:p>
@@ -9139,7 +9139,7 @@
       </p:sp>
       <p:pic>
         <p:nvPicPr>
-          <p:cNvPr id="4" name="Image 0" descr="/workspace/dashboard-hseq/panel_control_TOP_P1/besalco_logo.png">    </p:cNvPr>
+          <p:cNvPr id="4" name="Image 0" descr="/home/user/dashboard-hseq/panel_control_TOP_P1/besalco_logo.png">    </p:cNvPr>
           <p:cNvPicPr>
             <a:picLocks noChangeAspect="1"/>
           </p:cNvPicPr>
@@ -9393,7 +9393,7 @@
                 <a:ea typeface="Cambria" pitchFamily="34" charset="-122"/>
                 <a:cs typeface="Cambria" pitchFamily="34" charset="-120"/>
               </a:rPr>
-              <a:t>98,8%</a:t>
+              <a:t>99,2%</a:t>
             </a:r>
             <a:endParaRPr lang="en-US" sz="3400" dirty="0"/>
           </a:p>
@@ -9471,7 +9471,7 @@
                 <a:ea typeface="Cambria" pitchFamily="34" charset="-122"/>
                 <a:cs typeface="Cambria" pitchFamily="34" charset="-120"/>
               </a:rPr>
-              <a:t>3</a:t>
+              <a:t>2</a:t>
             </a:r>
             <a:endParaRPr lang="en-US" sz="3400" dirty="0"/>
           </a:p>
@@ -9705,7 +9705,7 @@
                 <a:ea typeface="Calibri" pitchFamily="34" charset="-122"/>
                 <a:cs typeface="Calibri" pitchFamily="34" charset="-120"/>
               </a:rPr>
-              <a:t>Corte: 19-10-2026</a:t>
+              <a:t>Corte: 26-10-2026</a:t>
             </a:r>
             <a:endParaRPr lang="en-US" sz="1100" dirty="0"/>
           </a:p>
@@ -9744,7 +9744,7 @@
                 <a:ea typeface="Calibri" pitchFamily="34" charset="-122"/>
                 <a:cs typeface="Calibri" pitchFamily="34" charset="-120"/>
               </a:rPr>
-              <a:t>Fuente: Data_NCR.xlsx — hoja «Observaciones» · Corte 19-10-2026 · 516 registros desde 10-02-2023</a:t>
+              <a:t>Fuente: Data_NCR.xlsx — hoja «Observaciones» · Corte 26-10-2026 · 519 registros desde 10-02-2023</a:t>
             </a:r>
             <a:endParaRPr lang="en-US" sz="850" dirty="0"/>
           </a:p>
@@ -9823,7 +9823,7 @@
       </p:grpSpPr>
       <p:pic>
         <p:nvPicPr>
-          <p:cNvPr id="2" name="Image 0" descr="/workspace/dashboard-hseq/panel_control_TOP_P1/besalco_logo.png">    </p:cNvPr>
+          <p:cNvPr id="2" name="Image 0" descr="/home/user/dashboard-hseq/panel_control_TOP_P1/besalco_logo.png">    </p:cNvPr>
           <p:cNvPicPr>
             <a:picLocks noChangeAspect="1"/>
           </p:cNvPicPr>
@@ -10049,7 +10049,7 @@
                 <a:ea typeface="Calibri" pitchFamily="34" charset="-122"/>
                 <a:cs typeface="Calibri" pitchFamily="34" charset="-120"/>
               </a:rPr>
-              <a:t>251 cerrados</a:t>
+              <a:t>252 cerrados</a:t>
             </a:r>
             <a:endParaRPr lang="en-US" sz="1400" dirty="0"/>
           </a:p>
@@ -10220,7 +10220,7 @@
                 <a:ea typeface="Cambria" pitchFamily="34" charset="-122"/>
                 <a:cs typeface="Cambria" pitchFamily="34" charset="-120"/>
               </a:rPr>
-              <a:t>98,8%</a:t>
+              <a:t>99,2%</a:t>
             </a:r>
             <a:endParaRPr lang="en-US" sz="4000" dirty="0"/>
           </a:p>
@@ -10259,7 +10259,7 @@
                 <a:ea typeface="Calibri" pitchFamily="34" charset="-122"/>
                 <a:cs typeface="Calibri" pitchFamily="34" charset="-120"/>
               </a:rPr>
-              <a:t>251/254</a:t>
+              <a:t>252/254</a:t>
             </a:r>
             <a:endParaRPr lang="en-US" sz="1400" dirty="0"/>
           </a:p>
@@ -10430,7 +10430,7 @@
                 <a:ea typeface="Cambria" pitchFamily="34" charset="-122"/>
                 <a:cs typeface="Cambria" pitchFamily="34" charset="-120"/>
               </a:rPr>
-              <a:t>3</a:t>
+              <a:t>2</a:t>
             </a:r>
             <a:endParaRPr lang="en-US" sz="4000" dirty="0"/>
           </a:p>
@@ -10547,7 +10547,7 @@
                 <a:ea typeface="Calibri" pitchFamily="34" charset="-122"/>
                 <a:cs typeface="Calibri" pitchFamily="34" charset="-120"/>
               </a:rPr>
-              <a:t>3 listo para revisión</a:t>
+              <a:t>2 listo para revisión</a:t>
             </a:r>
             <a:endParaRPr lang="en-US" sz="950" dirty="0"/>
           </a:p>
@@ -11193,7 +11193,7 @@
                 <a:ea typeface="Calibri" pitchFamily="34" charset="-122"/>
                 <a:cs typeface="Calibri" pitchFamily="34" charset="-120"/>
               </a:rPr>
-              <a:t>3 ab.</a:t>
+              <a:t>2 ab.</a:t>
             </a:r>
             <a:endParaRPr lang="en-US" sz="950" dirty="0"/>
           </a:p>
@@ -11271,7 +11271,7 @@
                 <a:ea typeface="Calibri" pitchFamily="34" charset="-122"/>
                 <a:cs typeface="Calibri" pitchFamily="34" charset="-120"/>
               </a:rPr>
-              <a:t>Fuente: Data_NCR.xlsx — hoja «Observaciones» · Corte 19-10-2026 · 516 registros desde 10-02-2023</a:t>
+              <a:t>Fuente: Data_NCR.xlsx — hoja «Observaciones» · Corte 26-10-2026 · 519 registros desde 10-02-2023</a:t>
             </a:r>
             <a:endParaRPr lang="en-US" sz="850" dirty="0"/>
           </a:p>
@@ -11389,7 +11389,7 @@
       </p:grpSpPr>
       <p:pic>
         <p:nvPicPr>
-          <p:cNvPr id="2" name="Image 0" descr="/workspace/dashboard-hseq/panel_control_TOP_P1/besalco_logo.png">    </p:cNvPr>
+          <p:cNvPr id="2" name="Image 0" descr="/home/user/dashboard-hseq/panel_control_TOP_P1/besalco_logo.png">    </p:cNvPr>
           <p:cNvPicPr>
             <a:picLocks noChangeAspect="1"/>
           </p:cNvPicPr>
@@ -11522,7 +11522,7 @@
                 <a:ea typeface="Calibri" pitchFamily="34" charset="-122"/>
                 <a:cs typeface="Calibri" pitchFamily="34" charset="-120"/>
               </a:rPr>
-              <a:t>3 hallazgos siguen abiertos; 0 con más de 180 días. Se listan del más antiguo al más reciente.</a:t>
+              <a:t>2 hallazgos siguen abiertos; 0 con más de 180 días. Se listan del más antiguo al más reciente.</a:t>
             </a:r>
             <a:endParaRPr lang="en-US" sz="1350" dirty="0"/>
           </a:p>
@@ -12130,7 +12130,7 @@
                 <a:ea typeface="Calibri" pitchFamily="34" charset="-122"/>
                 <a:cs typeface="Calibri" pitchFamily="34" charset="-120"/>
               </a:rPr>
-              <a:t>111</a:t>
+              <a:t>118</a:t>
             </a:r>
             <a:endParaRPr lang="en-US" sz="1050" dirty="0"/>
           </a:p>
@@ -12485,7 +12485,7 @@
                 <a:ea typeface="Calibri" pitchFamily="34" charset="-122"/>
                 <a:cs typeface="Calibri" pitchFamily="34" charset="-120"/>
               </a:rPr>
-              <a:t>26</a:t>
+              <a:t>33</a:t>
             </a:r>
             <a:endParaRPr lang="en-US" sz="1050" dirty="0"/>
           </a:p>
@@ -12555,342 +12555,7 @@
       </p:sp>
       <p:sp>
         <p:nvSpPr>
-          <p:cNvPr id="34" name="Text 31"/>
-          <p:cNvSpPr/>
-          <p:nvPr/>
-        </p:nvSpPr>
-        <p:spPr>
-          <a:xfrm>
-            <a:off x="502920" y="3008376"/>
-            <a:ext cx="822960" cy="256032"/>
-          </a:xfrm>
-          <a:prstGeom prst="rect">
-            <a:avLst/>
-          </a:prstGeom>
-          <a:noFill/>
-          <a:ln/>
-        </p:spPr>
-        <p:txBody>
-          <a:bodyPr wrap="square" lIns="0" tIns="0" rIns="0" bIns="0" rtlCol="0" anchor="ctr"/>
-          <a:lstStyle/>
-          <a:p>
-            <a:pPr algn="l" indent="0" marL="0">
-              <a:buNone/>
-            </a:pPr>
-            <a:r>
-              <a:rPr lang="en-US" sz="1050" dirty="0">
-                <a:solidFill>
-                  <a:srgbClr val="1A2433"/>
-                </a:solidFill>
-                <a:latin typeface="Calibri" pitchFamily="34" charset="0"/>
-                <a:ea typeface="Calibri" pitchFamily="34" charset="-122"/>
-                <a:cs typeface="Calibri" pitchFamily="34" charset="-120"/>
-              </a:rPr>
-              <a:t>255</a:t>
-            </a:r>
-            <a:endParaRPr lang="en-US" sz="1050" dirty="0"/>
-          </a:p>
-        </p:txBody>
-      </p:sp>
-      <p:sp>
-        <p:nvSpPr>
-          <p:cNvPr id="35" name="Text 32"/>
-          <p:cNvSpPr/>
-          <p:nvPr/>
-        </p:nvSpPr>
-        <p:spPr>
-          <a:xfrm>
-            <a:off x="1371600" y="3008376"/>
-            <a:ext cx="1508760" cy="256032"/>
-          </a:xfrm>
-          <a:prstGeom prst="rect">
-            <a:avLst/>
-          </a:prstGeom>
-          <a:noFill/>
-          <a:ln/>
-        </p:spPr>
-        <p:txBody>
-          <a:bodyPr wrap="square" lIns="0" tIns="0" rIns="0" bIns="0" rtlCol="0" anchor="ctr"/>
-          <a:lstStyle/>
-          <a:p>
-            <a:pPr algn="l" indent="0" marL="0">
-              <a:buNone/>
-            </a:pPr>
-            <a:r>
-              <a:rPr lang="en-US" sz="1050" dirty="0">
-                <a:solidFill>
-                  <a:srgbClr val="1A2433"/>
-                </a:solidFill>
-                <a:latin typeface="Calibri" pitchFamily="34" charset="0"/>
-                <a:ea typeface="Calibri" pitchFamily="34" charset="-122"/>
-                <a:cs typeface="Calibri" pitchFamily="34" charset="-120"/>
-              </a:rPr>
-              <a:t>Producto No Conforme</a:t>
-            </a:r>
-            <a:endParaRPr lang="en-US" sz="1050" dirty="0"/>
-          </a:p>
-        </p:txBody>
-      </p:sp>
-      <p:sp>
-        <p:nvSpPr>
-          <p:cNvPr id="36" name="Text 33"/>
-          <p:cNvSpPr/>
-          <p:nvPr/>
-        </p:nvSpPr>
-        <p:spPr>
-          <a:xfrm>
-            <a:off x="2926080" y="3008376"/>
-            <a:ext cx="1463040" cy="256032"/>
-          </a:xfrm>
-          <a:prstGeom prst="rect">
-            <a:avLst/>
-          </a:prstGeom>
-          <a:noFill/>
-          <a:ln/>
-        </p:spPr>
-        <p:txBody>
-          <a:bodyPr wrap="square" lIns="0" tIns="0" rIns="0" bIns="0" rtlCol="0" anchor="ctr"/>
-          <a:lstStyle/>
-          <a:p>
-            <a:pPr algn="l" indent="0" marL="0">
-              <a:buNone/>
-            </a:pPr>
-            <a:r>
-              <a:rPr lang="en-US" sz="1050" b="1" dirty="0">
-                <a:solidFill>
-                  <a:srgbClr val="C87A32"/>
-                </a:solidFill>
-                <a:latin typeface="Calibri" pitchFamily="34" charset="0"/>
-                <a:ea typeface="Calibri" pitchFamily="34" charset="-122"/>
-                <a:cs typeface="Calibri" pitchFamily="34" charset="-120"/>
-              </a:rPr>
-              <a:t>Externa · Cliente</a:t>
-            </a:r>
-            <a:endParaRPr lang="en-US" sz="1050" dirty="0"/>
-          </a:p>
-        </p:txBody>
-      </p:sp>
-      <p:sp>
-        <p:nvSpPr>
-          <p:cNvPr id="37" name="Text 34"/>
-          <p:cNvSpPr/>
-          <p:nvPr/>
-        </p:nvSpPr>
-        <p:spPr>
-          <a:xfrm>
-            <a:off x="4434840" y="3008376"/>
-            <a:ext cx="1280160" cy="256032"/>
-          </a:xfrm>
-          <a:prstGeom prst="rect">
-            <a:avLst/>
-          </a:prstGeom>
-          <a:noFill/>
-          <a:ln/>
-        </p:spPr>
-        <p:txBody>
-          <a:bodyPr wrap="square" lIns="0" tIns="0" rIns="0" bIns="0" rtlCol="0" anchor="ctr"/>
-          <a:lstStyle/>
-          <a:p>
-            <a:pPr algn="l" indent="0" marL="0">
-              <a:buNone/>
-            </a:pPr>
-            <a:r>
-              <a:rPr lang="en-US" sz="1050" dirty="0">
-                <a:solidFill>
-                  <a:srgbClr val="1A2433"/>
-                </a:solidFill>
-                <a:latin typeface="Calibri" pitchFamily="34" charset="0"/>
-                <a:ea typeface="Calibri" pitchFamily="34" charset="-122"/>
-                <a:cs typeface="Calibri" pitchFamily="34" charset="-120"/>
-              </a:rPr>
-              <a:t>OO.CC</a:t>
-            </a:r>
-            <a:endParaRPr lang="en-US" sz="1050" dirty="0"/>
-          </a:p>
-        </p:txBody>
-      </p:sp>
-      <p:sp>
-        <p:nvSpPr>
-          <p:cNvPr id="38" name="Text 35"/>
-          <p:cNvSpPr/>
-          <p:nvPr/>
-        </p:nvSpPr>
-        <p:spPr>
-          <a:xfrm>
-            <a:off x="5760720" y="3008376"/>
-            <a:ext cx="1508760" cy="256032"/>
-          </a:xfrm>
-          <a:prstGeom prst="rect">
-            <a:avLst/>
-          </a:prstGeom>
-          <a:noFill/>
-          <a:ln/>
-        </p:spPr>
-        <p:txBody>
-          <a:bodyPr wrap="square" lIns="0" tIns="0" rIns="0" bIns="0" rtlCol="0" anchor="ctr"/>
-          <a:lstStyle/>
-          <a:p>
-            <a:pPr algn="l" indent="0" marL="0">
-              <a:buNone/>
-            </a:pPr>
-            <a:r>
-              <a:rPr lang="en-US" sz="1050" dirty="0">
-                <a:solidFill>
-                  <a:srgbClr val="1A2433"/>
-                </a:solidFill>
-                <a:latin typeface="Calibri" pitchFamily="34" charset="0"/>
-                <a:ea typeface="Calibri" pitchFamily="34" charset="-122"/>
-                <a:cs typeface="Calibri" pitchFamily="34" charset="-120"/>
-              </a:rPr>
-              <a:t>Wladimir Carvajal …</a:t>
-            </a:r>
-            <a:endParaRPr lang="en-US" sz="1050" dirty="0"/>
-          </a:p>
-        </p:txBody>
-      </p:sp>
-      <p:sp>
-        <p:nvSpPr>
-          <p:cNvPr id="39" name="Text 36"/>
-          <p:cNvSpPr/>
-          <p:nvPr/>
-        </p:nvSpPr>
-        <p:spPr>
-          <a:xfrm>
-            <a:off x="7315200" y="3008376"/>
-            <a:ext cx="1325880" cy="256032"/>
-          </a:xfrm>
-          <a:prstGeom prst="rect">
-            <a:avLst/>
-          </a:prstGeom>
-          <a:noFill/>
-          <a:ln/>
-        </p:spPr>
-        <p:txBody>
-          <a:bodyPr wrap="square" lIns="0" tIns="0" rIns="0" bIns="0" rtlCol="0" anchor="ctr"/>
-          <a:lstStyle/>
-          <a:p>
-            <a:pPr algn="l" indent="0" marL="0">
-              <a:buNone/>
-            </a:pPr>
-            <a:r>
-              <a:rPr lang="en-US" sz="1050" dirty="0">
-                <a:solidFill>
-                  <a:srgbClr val="1A2433"/>
-                </a:solidFill>
-                <a:latin typeface="Calibri" pitchFamily="34" charset="0"/>
-                <a:ea typeface="Calibri" pitchFamily="34" charset="-122"/>
-                <a:cs typeface="Calibri" pitchFamily="34" charset="-120"/>
-              </a:rPr>
-              <a:t>Listo para revisi…</a:t>
-            </a:r>
-            <a:endParaRPr lang="en-US" sz="1050" dirty="0"/>
-          </a:p>
-        </p:txBody>
-      </p:sp>
-      <p:sp>
-        <p:nvSpPr>
-          <p:cNvPr id="40" name="Text 37"/>
-          <p:cNvSpPr/>
-          <p:nvPr/>
-        </p:nvSpPr>
-        <p:spPr>
-          <a:xfrm>
-            <a:off x="8686800" y="3008376"/>
-            <a:ext cx="640080" cy="256032"/>
-          </a:xfrm>
-          <a:prstGeom prst="rect">
-            <a:avLst/>
-          </a:prstGeom>
-          <a:noFill/>
-          <a:ln/>
-        </p:spPr>
-        <p:txBody>
-          <a:bodyPr wrap="square" lIns="0" tIns="0" rIns="0" bIns="0" rtlCol="0" anchor="ctr"/>
-          <a:lstStyle/>
-          <a:p>
-            <a:pPr algn="r" indent="0" marL="0">
-              <a:buNone/>
-            </a:pPr>
-            <a:r>
-              <a:rPr lang="en-US" sz="1050" dirty="0">
-                <a:solidFill>
-                  <a:srgbClr val="1A2433"/>
-                </a:solidFill>
-                <a:latin typeface="Calibri" pitchFamily="34" charset="0"/>
-                <a:ea typeface="Calibri" pitchFamily="34" charset="-122"/>
-                <a:cs typeface="Calibri" pitchFamily="34" charset="-120"/>
-              </a:rPr>
-              <a:t>5</a:t>
-            </a:r>
-            <a:endParaRPr lang="en-US" sz="1050" dirty="0"/>
-          </a:p>
-        </p:txBody>
-      </p:sp>
-      <p:sp>
-        <p:nvSpPr>
-          <p:cNvPr id="41" name="Text 38"/>
-          <p:cNvSpPr/>
-          <p:nvPr/>
-        </p:nvSpPr>
-        <p:spPr>
-          <a:xfrm>
-            <a:off x="9464040" y="3008376"/>
-            <a:ext cx="2286000" cy="256032"/>
-          </a:xfrm>
-          <a:prstGeom prst="rect">
-            <a:avLst/>
-          </a:prstGeom>
-          <a:noFill/>
-          <a:ln/>
-        </p:spPr>
-        <p:txBody>
-          <a:bodyPr wrap="square" lIns="0" tIns="0" rIns="0" bIns="0" rtlCol="0" anchor="ctr"/>
-          <a:lstStyle/>
-          <a:p>
-            <a:pPr algn="l" indent="0" marL="0">
-              <a:buNone/>
-            </a:pPr>
-            <a:r>
-              <a:rPr lang="en-US" sz="1000" dirty="0">
-                <a:solidFill>
-                  <a:srgbClr val="1A2433"/>
-                </a:solidFill>
-                <a:latin typeface="Calibri" pitchFamily="34" charset="0"/>
-                <a:ea typeface="Calibri" pitchFamily="34" charset="-122"/>
-                <a:cs typeface="Calibri" pitchFamily="34" charset="-120"/>
-              </a:rPr>
-              <a:t>Arrugas en piscina QS.</a:t>
-            </a:r>
-            <a:endParaRPr lang="en-US" sz="1000" dirty="0"/>
-          </a:p>
-        </p:txBody>
-      </p:sp>
-      <p:sp>
-        <p:nvSpPr>
-          <p:cNvPr id="42" name="Shape 39"/>
-          <p:cNvSpPr/>
-          <p:nvPr/>
-        </p:nvSpPr>
-        <p:spPr>
-          <a:xfrm>
-            <a:off x="502920" y="3300984"/>
-            <a:ext cx="11247120" cy="0"/>
-          </a:xfrm>
-          <a:prstGeom prst="line">
-            <a:avLst/>
-          </a:prstGeom>
-          <a:noFill/>
-          <a:ln w="9525">
-            <a:solidFill>
-              <a:srgbClr val="D9DFE6"/>
-            </a:solidFill>
-            <a:prstDash val="solid"/>
-          </a:ln>
-        </p:spPr>
-      </p:sp>
-      <p:sp>
-        <p:nvSpPr>
-          <p:cNvPr id="43" name="Shape 40"/>
+          <p:cNvPr id="34" name="Shape 31"/>
           <p:cNvSpPr/>
           <p:nvPr/>
         </p:nvSpPr>
@@ -12905,14 +12570,14 @@
             </a:avLst>
           </a:prstGeom>
           <a:solidFill>
-            <a:srgbClr val="12233B"/>
+            <a:srgbClr val="E9EDF2"/>
           </a:solidFill>
           <a:ln/>
         </p:spPr>
       </p:sp>
       <p:sp>
         <p:nvSpPr>
-          <p:cNvPr id="44" name="Text 41"/>
+          <p:cNvPr id="35" name="Text 32"/>
           <p:cNvSpPr/>
           <p:nvPr/>
         </p:nvSpPr>
@@ -12937,13 +12602,13 @@
             <a:r>
               <a:rPr lang="en-US" sz="1000" b="1" spc="100" kern="0" dirty="0">
                 <a:solidFill>
-                  <a:srgbClr val="E3A55B"/>
-                </a:solidFill>
-                <a:latin typeface="Calibri" pitchFamily="34" charset="0"/>
-                <a:ea typeface="Calibri" pitchFamily="34" charset="-122"/>
-                <a:cs typeface="Calibri" pitchFamily="34" charset="-120"/>
-              </a:rPr>
-              <a:t>SEMANA 12-10-2026 — 18-10-2026</a:t>
+                  <a:srgbClr val="56606E"/>
+                </a:solidFill>
+                <a:latin typeface="Calibri" pitchFamily="34" charset="0"/>
+                <a:ea typeface="Calibri" pitchFamily="34" charset="-122"/>
+                <a:cs typeface="Calibri" pitchFamily="34" charset="-120"/>
+              </a:rPr>
+              <a:t>SEMANA 19-10-2026 — 25-10-2026</a:t>
             </a:r>
             <a:endParaRPr lang="en-US" sz="1000" dirty="0"/>
           </a:p>
@@ -12951,7 +12616,7 @@
       </p:sp>
       <p:sp>
         <p:nvSpPr>
-          <p:cNvPr id="45" name="Text 42"/>
+          <p:cNvPr id="36" name="Text 33"/>
           <p:cNvSpPr/>
           <p:nvPr/>
         </p:nvSpPr>
@@ -12976,13 +12641,13 @@
             <a:r>
               <a:rPr lang="en-US" sz="1150" dirty="0">
                 <a:solidFill>
-                  <a:srgbClr val="FFFFFF"/>
-                </a:solidFill>
-                <a:latin typeface="Calibri" pitchFamily="34" charset="0"/>
-                <a:ea typeface="Calibri" pitchFamily="34" charset="-122"/>
-                <a:cs typeface="Calibri" pitchFamily="34" charset="-120"/>
-              </a:rPr>
-              <a:t>1 hallazgo nuevo · 0 internas · 1 del cliente · OO.CC 1 · 1 sigue abierto</a:t>
+                  <a:srgbClr val="56606E"/>
+                </a:solidFill>
+                <a:latin typeface="Calibri" pitchFamily="34" charset="0"/>
+                <a:ea typeface="Calibri" pitchFamily="34" charset="-122"/>
+                <a:cs typeface="Calibri" pitchFamily="34" charset="-120"/>
+              </a:rPr>
+              <a:t>Sin hallazgos nuevos en el período.</a:t>
             </a:r>
             <a:endParaRPr lang="en-US" sz="1150" dirty="0"/>
           </a:p>
@@ -12990,7 +12655,7 @@
       </p:sp>
       <p:sp>
         <p:nvSpPr>
-          <p:cNvPr id="46" name="Text 43"/>
+          <p:cNvPr id="37" name="Text 34"/>
           <p:cNvSpPr/>
           <p:nvPr/>
         </p:nvSpPr>
@@ -13021,7 +12686,7 @@
                 <a:ea typeface="Calibri" pitchFamily="34" charset="-122"/>
                 <a:cs typeface="Calibri" pitchFamily="34" charset="-120"/>
               </a:rPr>
-              <a:t>Fuente: Data_NCR.xlsx — hoja «Observaciones» · Corte 19-10-2026 · 516 registros desde 10-02-2023</a:t>
+              <a:t>Fuente: Data_NCR.xlsx — hoja «Observaciones» · Corte 26-10-2026 · 519 registros desde 10-02-2023</a:t>
             </a:r>
             <a:endParaRPr lang="en-US" sz="850" dirty="0"/>
           </a:p>
@@ -13029,7 +12694,7 @@
       </p:sp>
       <p:sp>
         <p:nvSpPr>
-          <p:cNvPr id="47" name="Text 44"/>
+          <p:cNvPr id="38" name="Text 35"/>
           <p:cNvSpPr/>
           <p:nvPr/>
         </p:nvSpPr>
@@ -13068,7 +12733,7 @@
       </p:sp>
       <p:sp>
         <p:nvSpPr>
-          <p:cNvPr id="48" name="Text 45"/>
+          <p:cNvPr id="39" name="Text 36"/>
           <p:cNvSpPr/>
           <p:nvPr/>
         </p:nvSpPr>
@@ -13179,7 +12844,7 @@
       </p:sp>
       <p:pic>
         <p:nvPicPr>
-          <p:cNvPr id="4" name="Image 0" descr="/workspace/dashboard-hseq/panel_control_TOP_P1/besalco_logo.png">    </p:cNvPr>
+          <p:cNvPr id="4" name="Image 0" descr="/home/user/dashboard-hseq/panel_control_TOP_P1/besalco_logo.png">    </p:cNvPr>
           <p:cNvPicPr>
             <a:picLocks noChangeAspect="1"/>
           </p:cNvPicPr>
@@ -13374,7 +13039,7 @@
                 <a:ea typeface="Calibri" pitchFamily="34" charset="-122"/>
                 <a:cs typeface="Calibri" pitchFamily="34" charset="-120"/>
               </a:rPr>
-              <a:t>172 hallazgos levantados · 53 internas · 79 del cliente · 40 de subcontrato · 19 especialidades involucradas.</a:t>
+              <a:t>174 hallazgos levantados · 53 internas · 81 del cliente · 40 de subcontrato · 19 especialidades involucradas.</a:t>
             </a:r>
             <a:endParaRPr lang="en-US" sz="1350" dirty="0"/>
           </a:p>
@@ -13433,7 +13098,7 @@
                 <a:ea typeface="Cambria" pitchFamily="34" charset="-122"/>
                 <a:cs typeface="Cambria" pitchFamily="34" charset="-120"/>
               </a:rPr>
-              <a:t>91,9%</a:t>
+              <a:t>91,4%</a:t>
             </a:r>
             <a:endParaRPr lang="en-US" sz="3400" dirty="0"/>
           </a:p>
@@ -13511,7 +13176,7 @@
                 <a:ea typeface="Cambria" pitchFamily="34" charset="-122"/>
                 <a:cs typeface="Cambria" pitchFamily="34" charset="-120"/>
               </a:rPr>
-              <a:t>14</a:t>
+              <a:t>15</a:t>
             </a:r>
             <a:endParaRPr lang="en-US" sz="3400" dirty="0"/>
           </a:p>
@@ -13667,7 +13332,7 @@
                 <a:ea typeface="Cambria" pitchFamily="34" charset="-122"/>
                 <a:cs typeface="Cambria" pitchFamily="34" charset="-120"/>
               </a:rPr>
-              <a:t>30,8%</a:t>
+              <a:t>30,5%</a:t>
             </a:r>
             <a:endParaRPr lang="en-US" sz="3400" dirty="0"/>
           </a:p>
@@ -13745,7 +13410,7 @@
                 <a:ea typeface="Calibri" pitchFamily="34" charset="-122"/>
                 <a:cs typeface="Calibri" pitchFamily="34" charset="-120"/>
               </a:rPr>
-              <a:t>Corte: 19-10-2026</a:t>
+              <a:t>Corte: 26-10-2026</a:t>
             </a:r>
             <a:endParaRPr lang="en-US" sz="1100" dirty="0"/>
           </a:p>
@@ -13784,7 +13449,7 @@
                 <a:ea typeface="Calibri" pitchFamily="34" charset="-122"/>
                 <a:cs typeface="Calibri" pitchFamily="34" charset="-120"/>
               </a:rPr>
-              <a:t>Fuente: Data_NCR.xlsx — hoja «Observaciones» · Corte 19-10-2026 · 516 registros desde 10-02-2023</a:t>
+              <a:t>Fuente: Data_NCR.xlsx — hoja «Observaciones» · Corte 26-10-2026 · 519 registros desde 10-02-2023</a:t>
             </a:r>
             <a:endParaRPr lang="en-US" sz="850" dirty="0"/>
           </a:p>
@@ -13863,7 +13528,7 @@
       </p:grpSpPr>
       <p:pic>
         <p:nvPicPr>
-          <p:cNvPr id="2" name="Image 0" descr="/workspace/dashboard-hseq/panel_control_TOP_P1/besalco_logo.png">    </p:cNvPr>
+          <p:cNvPr id="2" name="Image 0" descr="/home/user/dashboard-hseq/panel_control_TOP_P1/besalco_logo.png">    </p:cNvPr>
           <p:cNvPicPr>
             <a:picLocks noChangeAspect="1"/>
           </p:cNvPicPr>
@@ -14050,7 +13715,7 @@
                 <a:ea typeface="Cambria" pitchFamily="34" charset="-122"/>
                 <a:cs typeface="Cambria" pitchFamily="34" charset="-120"/>
               </a:rPr>
-              <a:t>172</a:t>
+              <a:t>174</a:t>
             </a:r>
             <a:endParaRPr lang="en-US" sz="4000" dirty="0"/>
           </a:p>
@@ -14089,7 +13754,7 @@
                 <a:ea typeface="Calibri" pitchFamily="34" charset="-122"/>
                 <a:cs typeface="Calibri" pitchFamily="34" charset="-120"/>
               </a:rPr>
-              <a:t>158 cerrados</a:t>
+              <a:t>159 cerrados</a:t>
             </a:r>
             <a:endParaRPr lang="en-US" sz="1400" dirty="0"/>
           </a:p>
@@ -14167,7 +13832,7 @@
                 <a:ea typeface="Calibri" pitchFamily="34" charset="-122"/>
                 <a:cs typeface="Calibri" pitchFamily="34" charset="-120"/>
               </a:rPr>
-              <a:t>53 internas · 79 del cliente · 40 de subcontrato</a:t>
+              <a:t>53 internas · 81 del cliente · 40 de subcontrato</a:t>
             </a:r>
             <a:endParaRPr lang="en-US" sz="950" dirty="0"/>
           </a:p>
@@ -14260,7 +13925,7 @@
                 <a:ea typeface="Cambria" pitchFamily="34" charset="-122"/>
                 <a:cs typeface="Cambria" pitchFamily="34" charset="-120"/>
               </a:rPr>
-              <a:t>91,9%</a:t>
+              <a:t>91,4%</a:t>
             </a:r>
             <a:endParaRPr lang="en-US" sz="4000" dirty="0"/>
           </a:p>
@@ -14299,7 +13964,7 @@
                 <a:ea typeface="Calibri" pitchFamily="34" charset="-122"/>
                 <a:cs typeface="Calibri" pitchFamily="34" charset="-120"/>
               </a:rPr>
-              <a:t>158/172</a:t>
+              <a:t>159/174</a:t>
             </a:r>
             <a:endParaRPr lang="en-US" sz="1400" dirty="0"/>
           </a:p>
@@ -14470,7 +14135,7 @@
                 <a:ea typeface="Cambria" pitchFamily="34" charset="-122"/>
                 <a:cs typeface="Cambria" pitchFamily="34" charset="-120"/>
               </a:rPr>
-              <a:t>14</a:t>
+              <a:t>15</a:t>
             </a:r>
             <a:endParaRPr lang="en-US" sz="4000" dirty="0"/>
           </a:p>
@@ -14587,7 +14252,7 @@
                 <a:ea typeface="Calibri" pitchFamily="34" charset="-122"/>
                 <a:cs typeface="Calibri" pitchFamily="34" charset="-120"/>
               </a:rPr>
-              <a:t>1 iniciado · 5 observada · 6 listo para revisión · 2 pendiente</a:t>
+              <a:t>1 iniciado · 7 observada · 3 listo para revisión · 4 pendiente</a:t>
             </a:r>
             <a:endParaRPr lang="en-US" sz="950" dirty="0"/>
           </a:p>
@@ -14797,7 +14462,7 @@
                 <a:ea typeface="Calibri" pitchFamily="34" charset="-122"/>
                 <a:cs typeface="Calibri" pitchFamily="34" charset="-120"/>
               </a:rPr>
-              <a:t>el más lento tomó 438 días</a:t>
+              <a:t>el más lento tomó 445 días</a:t>
             </a:r>
             <a:endParaRPr lang="en-US" sz="950" dirty="0"/>
           </a:p>
@@ -14913,7 +14578,7 @@
                 <a:ea typeface="Cambria" pitchFamily="34" charset="-122"/>
                 <a:cs typeface="Cambria" pitchFamily="34" charset="-120"/>
               </a:rPr>
-              <a:t>30,8%</a:t>
+              <a:t>30,5%</a:t>
             </a:r>
             <a:endParaRPr lang="en-US" sz="2600" dirty="0"/>
           </a:p>
@@ -15233,7 +14898,7 @@
                 <a:ea typeface="Calibri" pitchFamily="34" charset="-122"/>
                 <a:cs typeface="Calibri" pitchFamily="34" charset="-120"/>
               </a:rPr>
-              <a:t>13 ab.</a:t>
+              <a:t>14 ab.</a:t>
             </a:r>
             <a:endParaRPr lang="en-US" sz="950" dirty="0"/>
           </a:p>
@@ -15272,7 +14937,7 @@
                 <a:ea typeface="Cambria" pitchFamily="34" charset="-122"/>
                 <a:cs typeface="Cambria" pitchFamily="34" charset="-120"/>
               </a:rPr>
-              <a:t>79</a:t>
+              <a:t>81</a:t>
             </a:r>
             <a:endParaRPr lang="en-US" sz="1600" dirty="0"/>
           </a:p>
@@ -15448,7 +15113,7 @@
                 <a:ea typeface="Calibri" pitchFamily="34" charset="-122"/>
                 <a:cs typeface="Calibri" pitchFamily="34" charset="-120"/>
               </a:rPr>
-              <a:t>Fuente: Data_NCR.xlsx — hoja «Observaciones» · Corte 19-10-2026 · 516 registros desde 10-02-2023</a:t>
+              <a:t>Fuente: Data_NCR.xlsx — hoja «Observaciones» · Corte 26-10-2026 · 519 registros desde 10-02-2023</a:t>
             </a:r>
             <a:endParaRPr lang="en-US" sz="850" dirty="0"/>
           </a:p>
@@ -15566,7 +15231,7 @@
       </p:grpSpPr>
       <p:pic>
         <p:nvPicPr>
-          <p:cNvPr id="2" name="Image 0" descr="/workspace/dashboard-hseq/panel_control_TOP_P1/besalco_logo.png">    </p:cNvPr>
+          <p:cNvPr id="2" name="Image 0" descr="/home/user/dashboard-hseq/panel_control_TOP_P1/besalco_logo.png">    </p:cNvPr>
           <p:cNvPicPr>
             <a:picLocks noChangeAspect="1"/>
           </p:cNvPicPr>
@@ -15699,7 +15364,7 @@
                 <a:ea typeface="Calibri" pitchFamily="34" charset="-122"/>
                 <a:cs typeface="Calibri" pitchFamily="34" charset="-120"/>
               </a:rPr>
-              <a:t>14 hallazgos siguen abiertos; 9 con más de 180 días. Se listan del más antiguo al más reciente.</a:t>
+              <a:t>15 hallazgos siguen abiertos; 9 con más de 180 días. Se listan del más antiguo al más reciente.</a:t>
             </a:r>
             <a:endParaRPr lang="en-US" sz="1350" dirty="0"/>
           </a:p>
@@ -16307,7 +15972,7 @@
                 <a:ea typeface="Calibri" pitchFamily="34" charset="-122"/>
                 <a:cs typeface="Calibri" pitchFamily="34" charset="-120"/>
               </a:rPr>
-              <a:t>368</a:t>
+              <a:t>375</a:t>
             </a:r>
             <a:endParaRPr lang="en-US" sz="1050" dirty="0"/>
           </a:p>
@@ -16662,7 +16327,7 @@
                 <a:ea typeface="Calibri" pitchFamily="34" charset="-122"/>
                 <a:cs typeface="Calibri" pitchFamily="34" charset="-120"/>
               </a:rPr>
-              <a:t>306</a:t>
+              <a:t>313</a:t>
             </a:r>
             <a:endParaRPr lang="en-US" sz="1050" dirty="0"/>
           </a:p>
@@ -16997,7 +16662,7 @@
                 <a:ea typeface="Calibri" pitchFamily="34" charset="-122"/>
                 <a:cs typeface="Calibri" pitchFamily="34" charset="-120"/>
               </a:rPr>
-              <a:t>277</a:t>
+              <a:t>284</a:t>
             </a:r>
             <a:endParaRPr lang="en-US" sz="1050" dirty="0"/>
           </a:p>
@@ -17352,7 +17017,7 @@
                 <a:ea typeface="Calibri" pitchFamily="34" charset="-122"/>
                 <a:cs typeface="Calibri" pitchFamily="34" charset="-120"/>
               </a:rPr>
-              <a:t>277</a:t>
+              <a:t>284</a:t>
             </a:r>
             <a:endParaRPr lang="en-US" sz="1050" dirty="0"/>
           </a:p>
@@ -17687,7 +17352,7 @@
                 <a:ea typeface="Calibri" pitchFamily="34" charset="-122"/>
                 <a:cs typeface="Calibri" pitchFamily="34" charset="-120"/>
               </a:rPr>
-              <a:t>256</a:t>
+              <a:t>263</a:t>
             </a:r>
             <a:endParaRPr lang="en-US" sz="1050" dirty="0"/>
           </a:p>
@@ -18042,7 +17707,7 @@
                 <a:ea typeface="Calibri" pitchFamily="34" charset="-122"/>
                 <a:cs typeface="Calibri" pitchFamily="34" charset="-120"/>
               </a:rPr>
-              <a:t>227</a:t>
+              <a:t>234</a:t>
             </a:r>
             <a:endParaRPr lang="en-US" sz="1050" dirty="0"/>
           </a:p>
@@ -18377,7 +18042,7 @@
                 <a:ea typeface="Calibri" pitchFamily="34" charset="-122"/>
                 <a:cs typeface="Calibri" pitchFamily="34" charset="-120"/>
               </a:rPr>
-              <a:t>223</a:t>
+              <a:t>230</a:t>
             </a:r>
             <a:endParaRPr lang="en-US" sz="1050" dirty="0"/>
           </a:p>
@@ -18732,7 +18397,7 @@
                 <a:ea typeface="Calibri" pitchFamily="34" charset="-122"/>
                 <a:cs typeface="Calibri" pitchFamily="34" charset="-120"/>
               </a:rPr>
-              <a:t>223</a:t>
+              <a:t>230</a:t>
             </a:r>
             <a:endParaRPr lang="en-US" sz="1050" dirty="0"/>
           </a:p>
@@ -19067,7 +18732,7 @@
                 <a:ea typeface="Calibri" pitchFamily="34" charset="-122"/>
                 <a:cs typeface="Calibri" pitchFamily="34" charset="-120"/>
               </a:rPr>
-              <a:t>193</a:t>
+              <a:t>200</a:t>
             </a:r>
             <a:endParaRPr lang="en-US" sz="1050" dirty="0"/>
           </a:p>
@@ -19168,7 +18833,7 @@
                 <a:ea typeface="Calibri" pitchFamily="34" charset="-122"/>
                 <a:cs typeface="Calibri" pitchFamily="34" charset="-120"/>
               </a:rPr>
-              <a:t>Se listan los 9 más antiguos de 14 abiertos; el detalle completo está en el panel.</a:t>
+              <a:t>Se listan los 9 más antiguos de 15 abiertos; el detalle completo está en el panel.</a:t>
             </a:r>
             <a:endParaRPr lang="en-US" sz="950" dirty="0"/>
           </a:p>
@@ -19191,7 +18856,7 @@
             </a:avLst>
           </a:prstGeom>
           <a:solidFill>
-            <a:srgbClr val="E9EDF2"/>
+            <a:srgbClr val="12233B"/>
           </a:solidFill>
           <a:ln/>
         </p:spPr>
@@ -19223,13 +18888,13 @@
             <a:r>
               <a:rPr lang="en-US" sz="1000" b="1" spc="100" kern="0" dirty="0">
                 <a:solidFill>
-                  <a:srgbClr val="56606E"/>
-                </a:solidFill>
-                <a:latin typeface="Calibri" pitchFamily="34" charset="0"/>
-                <a:ea typeface="Calibri" pitchFamily="34" charset="-122"/>
-                <a:cs typeface="Calibri" pitchFamily="34" charset="-120"/>
-              </a:rPr>
-              <a:t>SEMANA 12-10-2026 — 18-10-2026</a:t>
+                  <a:srgbClr val="E3A55B"/>
+                </a:solidFill>
+                <a:latin typeface="Calibri" pitchFamily="34" charset="0"/>
+                <a:ea typeface="Calibri" pitchFamily="34" charset="-122"/>
+                <a:cs typeface="Calibri" pitchFamily="34" charset="-120"/>
+              </a:rPr>
+              <a:t>SEMANA 19-10-2026 — 25-10-2026</a:t>
             </a:r>
             <a:endParaRPr lang="en-US" sz="1000" dirty="0"/>
           </a:p>
@@ -19262,13 +18927,13 @@
             <a:r>
               <a:rPr lang="en-US" sz="1150" dirty="0">
                 <a:solidFill>
-                  <a:srgbClr val="56606E"/>
-                </a:solidFill>
-                <a:latin typeface="Calibri" pitchFamily="34" charset="0"/>
-                <a:ea typeface="Calibri" pitchFamily="34" charset="-122"/>
-                <a:cs typeface="Calibri" pitchFamily="34" charset="-120"/>
-              </a:rPr>
-              <a:t>Sin hallazgos nuevos en el período.</a:t>
+                  <a:srgbClr val="FFFFFF"/>
+                </a:solidFill>
+                <a:latin typeface="Calibri" pitchFamily="34" charset="0"/>
+                <a:ea typeface="Calibri" pitchFamily="34" charset="-122"/>
+                <a:cs typeface="Calibri" pitchFamily="34" charset="-120"/>
+              </a:rPr>
+              <a:t>2 hallazgos nuevos · 0 internas · 2 del cliente · MECÁNICA 2 · 2 siguen abiertos</a:t>
             </a:r>
             <a:endParaRPr lang="en-US" sz="1150" dirty="0"/>
           </a:p>
@@ -19307,7 +18972,7 @@
                 <a:ea typeface="Calibri" pitchFamily="34" charset="-122"/>
                 <a:cs typeface="Calibri" pitchFamily="34" charset="-120"/>
               </a:rPr>
-              <a:t>Fuente: Data_NCR.xlsx — hoja «Observaciones» · Corte 19-10-2026 · 516 registros desde 10-02-2023</a:t>
+              <a:t>Fuente: Data_NCR.xlsx — hoja «Observaciones» · Corte 26-10-2026 · 519 registros desde 10-02-2023</a:t>
             </a:r>
             <a:endParaRPr lang="en-US" sz="850" dirty="0"/>
           </a:p>
@@ -19425,7 +19090,7 @@
       </p:grpSpPr>
       <p:pic>
         <p:nvPicPr>
-          <p:cNvPr id="2" name="Image 0" descr="/workspace/dashboard-hseq/panel_control_TOP_P1/besalco_logo.png">    </p:cNvPr>
+          <p:cNvPr id="2" name="Image 0" descr="/home/user/dashboard-hseq/panel_control_TOP_P1/besalco_logo.png">    </p:cNvPr>
           <p:cNvPicPr>
             <a:picLocks noChangeAspect="1"/>
           </p:cNvPicPr>
@@ -19651,7 +19316,7 @@
                 <a:ea typeface="Calibri" pitchFamily="34" charset="-122"/>
                 <a:cs typeface="Calibri" pitchFamily="34" charset="-120"/>
               </a:rPr>
-              <a:t>498/516</a:t>
+              <a:t>501/519</a:t>
             </a:r>
             <a:endParaRPr lang="en-US" sz="1400" dirty="0"/>
           </a:p>
@@ -19861,7 +19526,7 @@
                 <a:ea typeface="Calibri" pitchFamily="34" charset="-122"/>
                 <a:cs typeface="Calibri" pitchFamily="34" charset="-120"/>
               </a:rPr>
-              <a:t>de 516 levantados</a:t>
+              <a:t>de 519 levantados</a:t>
             </a:r>
             <a:endParaRPr lang="en-US" sz="1400" dirty="0"/>
           </a:p>
@@ -19939,7 +19604,7 @@
                 <a:ea typeface="Calibri" pitchFamily="34" charset="-122"/>
                 <a:cs typeface="Calibri" pitchFamily="34" charset="-120"/>
               </a:rPr>
-              <a:t>10 listo para revisión · 1 iniciado · 5 observada · 2 pendiente</a:t>
+              <a:t>5 listo para revisión · 2 iniciado · 7 observada · 4 pendiente</a:t>
             </a:r>
             <a:endParaRPr lang="en-US" sz="950" dirty="0"/>
           </a:p>
@@ -20071,7 +19736,7 @@
                 <a:ea typeface="Calibri" pitchFamily="34" charset="-122"/>
                 <a:cs typeface="Calibri" pitchFamily="34" charset="-120"/>
               </a:rPr>
-              <a:t>159/507 clasificados</a:t>
+              <a:t>160/510 clasificados</a:t>
             </a:r>
             <a:endParaRPr lang="en-US" sz="1400" dirty="0"/>
           </a:p>
@@ -20242,7 +19907,7 @@
                 <a:ea typeface="Cambria" pitchFamily="34" charset="-122"/>
                 <a:cs typeface="Cambria" pitchFamily="34" charset="-120"/>
               </a:rPr>
-              <a:t>10.613</a:t>
+              <a:t>10.628</a:t>
             </a:r>
             <a:endParaRPr lang="en-US" sz="4000" dirty="0"/>
           </a:p>
@@ -20281,7 +19946,7 @@
                 <a:ea typeface="Calibri" pitchFamily="34" charset="-122"/>
                 <a:cs typeface="Calibri" pitchFamily="34" charset="-120"/>
               </a:rPr>
-              <a:t>251 de 516 con costo</a:t>
+              <a:t>252 de 519 con costo</a:t>
             </a:r>
             <a:endParaRPr lang="en-US" sz="1400" dirty="0"/>
           </a:p>
@@ -20359,7 +20024,7 @@
                 <a:ea typeface="Calibri" pitchFamily="34" charset="-122"/>
                 <a:cs typeface="Calibri" pitchFamily="34" charset="-120"/>
               </a:rPr>
-              <a:t>265 hallazgos no declaran costo: la cifra es un piso</a:t>
+              <a:t>267 hallazgos no declaran costo: la cifra es un piso</a:t>
             </a:r>
             <a:endParaRPr lang="en-US" sz="950" dirty="0"/>
           </a:p>
@@ -20499,7 +20164,7 @@
                 <a:ea typeface="Calibri" pitchFamily="34" charset="-122"/>
                 <a:cs typeface="Calibri" pitchFamily="34" charset="-120"/>
               </a:rPr>
-              <a:t>14 de los 18 hallazgos abiertos (77,8%), y es uno de los frentes donde el cliente levanta más de lo que detecta Besalco (79 del cliente contra 53 internas).</a:t>
+              <a:t>15 de los 18 hallazgos abiertos (83,3%), y es uno de los frentes donde el cliente levanta más de lo que detecta Besalco (81 del cliente contra 53 internas).</a:t>
             </a:r>
             <a:endParaRPr lang="en-US" sz="1250" dirty="0"/>
           </a:p>
@@ -20561,7 +20226,7 @@
                 <a:ea typeface="Calibri" pitchFamily="34" charset="-122"/>
                 <a:cs typeface="Calibri" pitchFamily="34" charset="-120"/>
               </a:rPr>
-              <a:t>La semana trajo 1 hallazgo nuevo, ninguno de autodetección.  </a:t>
+              <a:t>La semana trajo 3 hallazgos nuevos.  </a:t>
             </a:r>
             <a:pPr indent="0" marL="0">
               <a:lnSpc>
@@ -20578,7 +20243,7 @@
                 <a:ea typeface="Calibri" pitchFamily="34" charset="-122"/>
                 <a:cs typeface="Calibri" pitchFamily="34" charset="-120"/>
               </a:rPr>
-              <a:t>12-10-2026 al 18-10-2026: 1 del cliente en OO.CC (1). Todos siguen abiertos; la semana anterior entraron 0.</a:t>
+              <a:t>19-10-2026 al 25-10-2026: 2 del cliente · 1 de Besalco en MECÁNICA (2) y ELÉCTRICA (1). Todos siguen abiertos; la semana anterior entraron 1.</a:t>
             </a:r>
             <a:endParaRPr lang="en-US" sz="1250" dirty="0"/>
           </a:p>
@@ -20640,7 +20305,7 @@
                 <a:ea typeface="Calibri" pitchFamily="34" charset="-122"/>
                 <a:cs typeface="Calibri" pitchFamily="34" charset="-120"/>
               </a:rPr>
-              <a:t>17 de los 18 abiertos están fuera del plazo de respuesta.  </a:t>
+              <a:t>15 de los 18 abiertos están fuera del plazo de respuesta.  </a:t>
             </a:r>
             <a:pPr indent="0" marL="0">
               <a:lnSpc>
@@ -20696,7 +20361,7 @@
                 <a:ea typeface="Calibri" pitchFamily="34" charset="-122"/>
                 <a:cs typeface="Calibri" pitchFamily="34" charset="-120"/>
               </a:rPr>
-              <a:t>Fuente: Data_NCR.xlsx — hoja «Observaciones» · Corte 19-10-2026 · 516 registros desde 10-02-2023</a:t>
+              <a:t>Fuente: Data_NCR.xlsx — hoja «Observaciones» · Corte 26-10-2026 · 519 registros desde 10-02-2023</a:t>
             </a:r>
             <a:endParaRPr lang="en-US" sz="850" dirty="0"/>
           </a:p>
@@ -20814,7 +20479,7 @@
       </p:grpSpPr>
       <p:pic>
         <p:nvPicPr>
-          <p:cNvPr id="2" name="Image 0" descr="/workspace/dashboard-hseq/panel_control_TOP_P1/besalco_logo.png">    </p:cNvPr>
+          <p:cNvPr id="2" name="Image 0" descr="/home/user/dashboard-hseq/panel_control_TOP_P1/besalco_logo.png">    </p:cNvPr>
           <p:cNvPicPr>
             <a:picLocks noChangeAspect="1"/>
           </p:cNvPicPr>
@@ -21477,7 +21142,7 @@
                 <a:ea typeface="Calibri" pitchFamily="34" charset="-122"/>
                 <a:cs typeface="Calibri" pitchFamily="34" charset="-120"/>
               </a:rPr>
-              <a:t>82</a:t>
+              <a:t>83</a:t>
             </a:r>
             <a:endParaRPr lang="en-US" sz="1300" dirty="0"/>
           </a:p>
@@ -21516,7 +21181,7 @@
                 <a:ea typeface="Calibri" pitchFamily="34" charset="-122"/>
                 <a:cs typeface="Calibri" pitchFamily="34" charset="-120"/>
               </a:rPr>
-              <a:t>81</a:t>
+              <a:t>82</a:t>
             </a:r>
             <a:endParaRPr lang="en-US" sz="1300" dirty="0"/>
           </a:p>
@@ -21633,7 +21298,7 @@
                 <a:ea typeface="Calibri" pitchFamily="34" charset="-122"/>
                 <a:cs typeface="Calibri" pitchFamily="34" charset="-120"/>
               </a:rPr>
-              <a:t>54</a:t>
+              <a:t>55</a:t>
             </a:r>
             <a:endParaRPr lang="en-US" sz="1300" dirty="0"/>
           </a:p>
@@ -21750,7 +21415,7 @@
                 <a:ea typeface="Calibri" pitchFamily="34" charset="-122"/>
                 <a:cs typeface="Calibri" pitchFamily="34" charset="-120"/>
               </a:rPr>
-              <a:t>1.403</a:t>
+              <a:t>1.418</a:t>
             </a:r>
             <a:endParaRPr lang="en-US" sz="1300" dirty="0"/>
           </a:p>
@@ -22010,7 +21675,7 @@
                 <a:ea typeface="Calibri" pitchFamily="34" charset="-122"/>
                 <a:cs typeface="Calibri" pitchFamily="34" charset="-120"/>
               </a:rPr>
-              <a:t>251</a:t>
+              <a:t>252</a:t>
             </a:r>
             <a:endParaRPr lang="en-US" sz="1300" dirty="0"/>
           </a:p>
@@ -22049,7 +21714,7 @@
                 <a:ea typeface="Calibri" pitchFamily="34" charset="-122"/>
                 <a:cs typeface="Calibri" pitchFamily="34" charset="-120"/>
               </a:rPr>
-              <a:t>3</a:t>
+              <a:t>2</a:t>
             </a:r>
             <a:endParaRPr lang="en-US" sz="1300" dirty="0"/>
           </a:p>
@@ -22088,7 +21753,7 @@
                 <a:ea typeface="Calibri" pitchFamily="34" charset="-122"/>
                 <a:cs typeface="Calibri" pitchFamily="34" charset="-120"/>
               </a:rPr>
-              <a:t>98,8%</a:t>
+              <a:t>99,2%</a:t>
             </a:r>
             <a:endParaRPr lang="en-US" sz="1300" dirty="0"/>
           </a:p>
@@ -22445,7 +22110,7 @@
                 <a:ea typeface="Calibri" pitchFamily="34" charset="-122"/>
                 <a:cs typeface="Calibri" pitchFamily="34" charset="-120"/>
               </a:rPr>
-              <a:t>172</a:t>
+              <a:t>174</a:t>
             </a:r>
             <a:endParaRPr lang="en-US" sz="1300" dirty="0"/>
           </a:p>
@@ -22484,7 +22149,7 @@
                 <a:ea typeface="Calibri" pitchFamily="34" charset="-122"/>
                 <a:cs typeface="Calibri" pitchFamily="34" charset="-120"/>
               </a:rPr>
-              <a:t>158</a:t>
+              <a:t>159</a:t>
             </a:r>
             <a:endParaRPr lang="en-US" sz="1300" dirty="0"/>
           </a:p>
@@ -22523,7 +22188,7 @@
                 <a:ea typeface="Calibri" pitchFamily="34" charset="-122"/>
                 <a:cs typeface="Calibri" pitchFamily="34" charset="-120"/>
               </a:rPr>
-              <a:t>14</a:t>
+              <a:t>15</a:t>
             </a:r>
             <a:endParaRPr lang="en-US" sz="1300" dirty="0"/>
           </a:p>
@@ -22562,7 +22227,7 @@
                 <a:ea typeface="Calibri" pitchFamily="34" charset="-122"/>
                 <a:cs typeface="Calibri" pitchFamily="34" charset="-120"/>
               </a:rPr>
-              <a:t>91,9%</a:t>
+              <a:t>91,4%</a:t>
             </a:r>
             <a:endParaRPr lang="en-US" sz="1300" dirty="0"/>
           </a:p>
@@ -22640,7 +22305,7 @@
                 <a:ea typeface="Calibri" pitchFamily="34" charset="-122"/>
                 <a:cs typeface="Calibri" pitchFamily="34" charset="-120"/>
               </a:rPr>
-              <a:t>79</a:t>
+              <a:t>81</a:t>
             </a:r>
             <a:endParaRPr lang="en-US" sz="1300" dirty="0"/>
           </a:p>
@@ -23413,7 +23078,7 @@
                 <a:ea typeface="Calibri" pitchFamily="34" charset="-122"/>
                 <a:cs typeface="Calibri" pitchFamily="34" charset="-120"/>
               </a:rPr>
-              <a:t>508</a:t>
+              <a:t>511</a:t>
             </a:r>
             <a:endParaRPr lang="en-US" sz="1300" dirty="0"/>
           </a:p>
@@ -23452,7 +23117,7 @@
                 <a:ea typeface="Calibri" pitchFamily="34" charset="-122"/>
                 <a:cs typeface="Calibri" pitchFamily="34" charset="-120"/>
               </a:rPr>
-              <a:t>490</a:t>
+              <a:t>493</a:t>
             </a:r>
             <a:endParaRPr lang="en-US" sz="1300" dirty="0"/>
           </a:p>
@@ -23569,7 +23234,7 @@
                 <a:ea typeface="Calibri" pitchFamily="34" charset="-122"/>
                 <a:cs typeface="Calibri" pitchFamily="34" charset="-120"/>
               </a:rPr>
-              <a:t>159</a:t>
+              <a:t>160</a:t>
             </a:r>
             <a:endParaRPr lang="en-US" sz="1300" dirty="0"/>
           </a:p>
@@ -23608,7 +23273,7 @@
                 <a:ea typeface="Calibri" pitchFamily="34" charset="-122"/>
                 <a:cs typeface="Calibri" pitchFamily="34" charset="-120"/>
               </a:rPr>
-              <a:t>300</a:t>
+              <a:t>302</a:t>
             </a:r>
             <a:endParaRPr lang="en-US" sz="1300" dirty="0"/>
           </a:p>
@@ -23686,7 +23351,7 @@
                 <a:ea typeface="Calibri" pitchFamily="34" charset="-122"/>
                 <a:cs typeface="Calibri" pitchFamily="34" charset="-120"/>
               </a:rPr>
-              <a:t>10.613</a:t>
+              <a:t>10.628</a:t>
             </a:r>
             <a:endParaRPr lang="en-US" sz="1300" dirty="0"/>
           </a:p>
@@ -23725,7 +23390,7 @@
                 <a:ea typeface="Calibri" pitchFamily="34" charset="-122"/>
                 <a:cs typeface="Calibri" pitchFamily="34" charset="-120"/>
               </a:rPr>
-              <a:t>Mediana de cierre global 33 días · el hallazgo más lento tomó 438 días · 8 hallazgos sin especialidad declarada.</a:t>
+              <a:t>Mediana de cierre global 33 días · el hallazgo más lento tomó 445 días · 8 hallazgos sin especialidad declarada.</a:t>
             </a:r>
             <a:endParaRPr lang="en-US" sz="950" dirty="0"/>
           </a:p>
@@ -23764,7 +23429,7 @@
                 <a:ea typeface="Calibri" pitchFamily="34" charset="-122"/>
                 <a:cs typeface="Calibri" pitchFamily="34" charset="-120"/>
               </a:rPr>
-              <a:t>Fuente: Data_NCR.xlsx — hoja «Observaciones» · Corte 19-10-2026 · 516 registros desde 10-02-2023</a:t>
+              <a:t>Fuente: Data_NCR.xlsx — hoja «Observaciones» · Corte 26-10-2026 · 519 registros desde 10-02-2023</a:t>
             </a:r>
             <a:endParaRPr lang="en-US" sz="850" dirty="0"/>
           </a:p>
@@ -23882,7 +23547,7 @@
       </p:grpSpPr>
       <p:pic>
         <p:nvPicPr>
-          <p:cNvPr id="2" name="Image 0" descr="/workspace/dashboard-hseq/panel_control_TOP_P1/besalco_logo.png">    </p:cNvPr>
+          <p:cNvPr id="2" name="Image 0" descr="/home/user/dashboard-hseq/panel_control_TOP_P1/besalco_logo.png">    </p:cNvPr>
           <p:cNvPicPr>
             <a:picLocks noChangeAspect="1"/>
           </p:cNvPicPr>
@@ -24015,7 +23680,7 @@
                 <a:ea typeface="Calibri" pitchFamily="34" charset="-122"/>
                 <a:cs typeface="Calibri" pitchFamily="34" charset="-120"/>
               </a:rPr>
-              <a:t>Entre el 12-10-2026 y el 18-10-2026 se levantó 1 hallazgo: 0 internas · 1 del cliente. Sigue abierto.</a:t>
+              <a:t>Entre el 19-10-2026 y el 25-10-2026 se levantaron 3 hallazgos: 1 interna · 2 del cliente. Todos siguen abiertos.</a:t>
             </a:r>
             <a:endParaRPr lang="en-US" sz="1350" dirty="0"/>
           </a:p>
@@ -24170,7 +23835,7 @@
                 <a:ea typeface="Calibri" pitchFamily="34" charset="-122"/>
                 <a:cs typeface="Calibri" pitchFamily="34" charset="-120"/>
               </a:rPr>
-              <a:t>OO.CC 1</a:t>
+              <a:t>MECÁNICA 2  ·  ELÉCTRICA 1</a:t>
             </a:r>
             <a:endParaRPr lang="en-US" sz="1100" dirty="0"/>
           </a:p>
@@ -24248,7 +23913,7 @@
                 <a:ea typeface="Calibri" pitchFamily="34" charset="-122"/>
                 <a:cs typeface="Calibri" pitchFamily="34" charset="-120"/>
               </a:rPr>
-              <a:t>Talabre 1</a:t>
+              <a:t>Arqueros 2  ·  Desaladora 1</a:t>
             </a:r>
             <a:endParaRPr lang="en-US" sz="1100" dirty="0"/>
           </a:p>
@@ -24326,7 +23991,7 @@
                 <a:ea typeface="Calibri" pitchFamily="34" charset="-122"/>
                 <a:cs typeface="Calibri" pitchFamily="34" charset="-120"/>
               </a:rPr>
-              <a:t>Externa · Cliente 1</a:t>
+              <a:t>Externa · Cliente 2  ·  Interna (Besalco) 1</a:t>
             </a:r>
             <a:endParaRPr lang="en-US" sz="1100" dirty="0"/>
           </a:p>
@@ -24404,7 +24069,7 @@
                 <a:ea typeface="Calibri" pitchFamily="34" charset="-122"/>
                 <a:cs typeface="Calibri" pitchFamily="34" charset="-120"/>
               </a:rPr>
-              <a:t>Producto No Conforme 1</a:t>
+              <a:t>No Conformidad 3</a:t>
             </a:r>
             <a:endParaRPr lang="en-US" sz="1100" dirty="0"/>
           </a:p>
@@ -24856,7 +24521,7 @@
                 <a:ea typeface="Calibri" pitchFamily="34" charset="-122"/>
                 <a:cs typeface="Calibri" pitchFamily="34" charset="-120"/>
               </a:rPr>
-              <a:t>14-10-2026</a:t>
+              <a:t>21-10-2026</a:t>
             </a:r>
             <a:endParaRPr lang="en-US" sz="1050" dirty="0"/>
           </a:p>
@@ -24895,7 +24560,7 @@
                 <a:ea typeface="Calibri" pitchFamily="34" charset="-122"/>
                 <a:cs typeface="Calibri" pitchFamily="34" charset="-120"/>
               </a:rPr>
-              <a:t>Talabre</a:t>
+              <a:t>Arqueros</a:t>
             </a:r>
             <a:endParaRPr lang="en-US" sz="1050" dirty="0"/>
           </a:p>
@@ -24934,7 +24599,7 @@
                 <a:ea typeface="Calibri" pitchFamily="34" charset="-122"/>
                 <a:cs typeface="Calibri" pitchFamily="34" charset="-120"/>
               </a:rPr>
-              <a:t>255 · PNC N°203</a:t>
+              <a:t>MASA-94 · EB-NE-1449</a:t>
             </a:r>
             <a:endParaRPr lang="en-US" sz="1050" dirty="0"/>
           </a:p>
@@ -24973,7 +24638,7 @@
                 <a:ea typeface="Calibri" pitchFamily="34" charset="-122"/>
                 <a:cs typeface="Calibri" pitchFamily="34" charset="-120"/>
               </a:rPr>
-              <a:t>Producto No Confor…</a:t>
+              <a:t>No Conformidad</a:t>
             </a:r>
             <a:endParaRPr lang="en-US" sz="1050" dirty="0"/>
           </a:p>
@@ -25051,7 +24716,7 @@
                 <a:ea typeface="Calibri" pitchFamily="34" charset="-122"/>
                 <a:cs typeface="Calibri" pitchFamily="34" charset="-120"/>
               </a:rPr>
-              <a:t>OO.CC</a:t>
+              <a:t>MECÁNICA</a:t>
             </a:r>
             <a:endParaRPr lang="en-US" sz="1050" dirty="0"/>
           </a:p>
@@ -25090,7 +24755,7 @@
                 <a:ea typeface="Calibri" pitchFamily="34" charset="-122"/>
                 <a:cs typeface="Calibri" pitchFamily="34" charset="-120"/>
               </a:rPr>
-              <a:t>Wladimir Carvaja…</a:t>
+              <a:t>Sin asignar</a:t>
             </a:r>
             <a:endParaRPr lang="en-US" sz="1050" dirty="0"/>
           </a:p>
@@ -25129,7 +24794,7 @@
                 <a:ea typeface="Calibri" pitchFamily="34" charset="-122"/>
                 <a:cs typeface="Calibri" pitchFamily="34" charset="-120"/>
               </a:rPr>
-              <a:t>Listo para…</a:t>
+              <a:t>Pendiente</a:t>
             </a:r>
             <a:endParaRPr lang="en-US" sz="1050" dirty="0"/>
           </a:p>
@@ -25168,7 +24833,7 @@
                 <a:ea typeface="Calibri" pitchFamily="34" charset="-122"/>
                 <a:cs typeface="Calibri" pitchFamily="34" charset="-120"/>
               </a:rPr>
-              <a:t>Arrugas en piscina QS.</a:t>
+              <a:t>Desviación en plano As-Built</a:t>
             </a:r>
             <a:endParaRPr lang="en-US" sz="1000" dirty="0"/>
           </a:p>
@@ -25199,7 +24864,775 @@
       </p:sp>
       <p:sp>
         <p:nvSpPr>
-          <p:cNvPr id="38" name="Text 34"/>
+          <p:cNvPr id="38" name="Shape 34"/>
+          <p:cNvSpPr/>
+          <p:nvPr/>
+        </p:nvSpPr>
+        <p:spPr>
+          <a:xfrm>
+            <a:off x="457200" y="4709160"/>
+            <a:ext cx="11292840" cy="329184"/>
+          </a:xfrm>
+          <a:prstGeom prst="rect">
+            <a:avLst/>
+          </a:prstGeom>
+          <a:solidFill>
+            <a:srgbClr val="FFFFFF"/>
+          </a:solidFill>
+          <a:ln/>
+        </p:spPr>
+      </p:sp>
+      <p:sp>
+        <p:nvSpPr>
+          <p:cNvPr id="39" name="Text 35"/>
+          <p:cNvSpPr/>
+          <p:nvPr/>
+        </p:nvSpPr>
+        <p:spPr>
+          <a:xfrm>
+            <a:off x="502920" y="4754880"/>
+            <a:ext cx="822960" cy="237744"/>
+          </a:xfrm>
+          <a:prstGeom prst="rect">
+            <a:avLst/>
+          </a:prstGeom>
+          <a:noFill/>
+          <a:ln/>
+        </p:spPr>
+        <p:txBody>
+          <a:bodyPr wrap="square" lIns="0" tIns="0" rIns="0" bIns="0" rtlCol="0" anchor="ctr"/>
+          <a:lstStyle/>
+          <a:p>
+            <a:pPr algn="l" indent="0" marL="0">
+              <a:buNone/>
+            </a:pPr>
+            <a:r>
+              <a:rPr lang="en-US" sz="1050" dirty="0">
+                <a:solidFill>
+                  <a:srgbClr val="1A2433"/>
+                </a:solidFill>
+                <a:latin typeface="Calibri" pitchFamily="34" charset="0"/>
+                <a:ea typeface="Calibri" pitchFamily="34" charset="-122"/>
+                <a:cs typeface="Calibri" pitchFamily="34" charset="-120"/>
+              </a:rPr>
+              <a:t>21-10-2026</a:t>
+            </a:r>
+            <a:endParaRPr lang="en-US" sz="1050" dirty="0"/>
+          </a:p>
+        </p:txBody>
+      </p:sp>
+      <p:sp>
+        <p:nvSpPr>
+          <p:cNvPr id="40" name="Text 36"/>
+          <p:cNvSpPr/>
+          <p:nvPr/>
+        </p:nvSpPr>
+        <p:spPr>
+          <a:xfrm>
+            <a:off x="1371600" y="4754880"/>
+            <a:ext cx="1051560" cy="237744"/>
+          </a:xfrm>
+          <a:prstGeom prst="rect">
+            <a:avLst/>
+          </a:prstGeom>
+          <a:noFill/>
+          <a:ln/>
+        </p:spPr>
+        <p:txBody>
+          <a:bodyPr wrap="square" lIns="0" tIns="0" rIns="0" bIns="0" rtlCol="0" anchor="ctr"/>
+          <a:lstStyle/>
+          <a:p>
+            <a:pPr algn="l" indent="0" marL="0">
+              <a:buNone/>
+            </a:pPr>
+            <a:r>
+              <a:rPr lang="en-US" sz="1050" dirty="0">
+                <a:solidFill>
+                  <a:srgbClr val="1A2433"/>
+                </a:solidFill>
+                <a:latin typeface="Calibri" pitchFamily="34" charset="0"/>
+                <a:ea typeface="Calibri" pitchFamily="34" charset="-122"/>
+                <a:cs typeface="Calibri" pitchFamily="34" charset="-120"/>
+              </a:rPr>
+              <a:t>Arqueros</a:t>
+            </a:r>
+            <a:endParaRPr lang="en-US" sz="1050" dirty="0"/>
+          </a:p>
+        </p:txBody>
+      </p:sp>
+      <p:sp>
+        <p:nvSpPr>
+          <p:cNvPr id="41" name="Text 37"/>
+          <p:cNvSpPr/>
+          <p:nvPr/>
+        </p:nvSpPr>
+        <p:spPr>
+          <a:xfrm>
+            <a:off x="2468880" y="4754880"/>
+            <a:ext cx="1051560" cy="237744"/>
+          </a:xfrm>
+          <a:prstGeom prst="rect">
+            <a:avLst/>
+          </a:prstGeom>
+          <a:noFill/>
+          <a:ln/>
+        </p:spPr>
+        <p:txBody>
+          <a:bodyPr wrap="square" lIns="0" tIns="0" rIns="0" bIns="0" rtlCol="0" anchor="ctr"/>
+          <a:lstStyle/>
+          <a:p>
+            <a:pPr algn="l" indent="0" marL="0">
+              <a:buNone/>
+            </a:pPr>
+            <a:r>
+              <a:rPr lang="en-US" sz="1050" dirty="0">
+                <a:solidFill>
+                  <a:srgbClr val="1A2433"/>
+                </a:solidFill>
+                <a:latin typeface="Calibri" pitchFamily="34" charset="0"/>
+                <a:ea typeface="Calibri" pitchFamily="34" charset="-122"/>
+                <a:cs typeface="Calibri" pitchFamily="34" charset="-120"/>
+              </a:rPr>
+              <a:t>MASA-95 · EB-NE-1449</a:t>
+            </a:r>
+            <a:endParaRPr lang="en-US" sz="1050" dirty="0"/>
+          </a:p>
+        </p:txBody>
+      </p:sp>
+      <p:sp>
+        <p:nvSpPr>
+          <p:cNvPr id="42" name="Text 38"/>
+          <p:cNvSpPr/>
+          <p:nvPr/>
+        </p:nvSpPr>
+        <p:spPr>
+          <a:xfrm>
+            <a:off x="3566160" y="4754880"/>
+            <a:ext cx="1371600" cy="237744"/>
+          </a:xfrm>
+          <a:prstGeom prst="rect">
+            <a:avLst/>
+          </a:prstGeom>
+          <a:noFill/>
+          <a:ln/>
+        </p:spPr>
+        <p:txBody>
+          <a:bodyPr wrap="square" lIns="0" tIns="0" rIns="0" bIns="0" rtlCol="0" anchor="ctr"/>
+          <a:lstStyle/>
+          <a:p>
+            <a:pPr algn="l" indent="0" marL="0">
+              <a:buNone/>
+            </a:pPr>
+            <a:r>
+              <a:rPr lang="en-US" sz="1050" dirty="0">
+                <a:solidFill>
+                  <a:srgbClr val="1A2433"/>
+                </a:solidFill>
+                <a:latin typeface="Calibri" pitchFamily="34" charset="0"/>
+                <a:ea typeface="Calibri" pitchFamily="34" charset="-122"/>
+                <a:cs typeface="Calibri" pitchFamily="34" charset="-120"/>
+              </a:rPr>
+              <a:t>No Conformidad</a:t>
+            </a:r>
+            <a:endParaRPr lang="en-US" sz="1050" dirty="0"/>
+          </a:p>
+        </p:txBody>
+      </p:sp>
+      <p:sp>
+        <p:nvSpPr>
+          <p:cNvPr id="43" name="Text 39"/>
+          <p:cNvSpPr/>
+          <p:nvPr/>
+        </p:nvSpPr>
+        <p:spPr>
+          <a:xfrm>
+            <a:off x="4983480" y="4754880"/>
+            <a:ext cx="1417320" cy="237744"/>
+          </a:xfrm>
+          <a:prstGeom prst="rect">
+            <a:avLst/>
+          </a:prstGeom>
+          <a:noFill/>
+          <a:ln/>
+        </p:spPr>
+        <p:txBody>
+          <a:bodyPr wrap="square" lIns="0" tIns="0" rIns="0" bIns="0" rtlCol="0" anchor="ctr"/>
+          <a:lstStyle/>
+          <a:p>
+            <a:pPr algn="l" indent="0" marL="0">
+              <a:buNone/>
+            </a:pPr>
+            <a:r>
+              <a:rPr lang="en-US" sz="1050" b="1" dirty="0">
+                <a:solidFill>
+                  <a:srgbClr val="C87A32"/>
+                </a:solidFill>
+                <a:latin typeface="Calibri" pitchFamily="34" charset="0"/>
+                <a:ea typeface="Calibri" pitchFamily="34" charset="-122"/>
+                <a:cs typeface="Calibri" pitchFamily="34" charset="-120"/>
+              </a:rPr>
+              <a:t>Externa · Cliente</a:t>
+            </a:r>
+            <a:endParaRPr lang="en-US" sz="1050" dirty="0"/>
+          </a:p>
+        </p:txBody>
+      </p:sp>
+      <p:sp>
+        <p:nvSpPr>
+          <p:cNvPr id="44" name="Text 40"/>
+          <p:cNvSpPr/>
+          <p:nvPr/>
+        </p:nvSpPr>
+        <p:spPr>
+          <a:xfrm>
+            <a:off x="6446520" y="4754880"/>
+            <a:ext cx="1097280" cy="237744"/>
+          </a:xfrm>
+          <a:prstGeom prst="rect">
+            <a:avLst/>
+          </a:prstGeom>
+          <a:noFill/>
+          <a:ln/>
+        </p:spPr>
+        <p:txBody>
+          <a:bodyPr wrap="square" lIns="0" tIns="0" rIns="0" bIns="0" rtlCol="0" anchor="ctr"/>
+          <a:lstStyle/>
+          <a:p>
+            <a:pPr algn="l" indent="0" marL="0">
+              <a:buNone/>
+            </a:pPr>
+            <a:r>
+              <a:rPr lang="en-US" sz="1050" dirty="0">
+                <a:solidFill>
+                  <a:srgbClr val="1A2433"/>
+                </a:solidFill>
+                <a:latin typeface="Calibri" pitchFamily="34" charset="0"/>
+                <a:ea typeface="Calibri" pitchFamily="34" charset="-122"/>
+                <a:cs typeface="Calibri" pitchFamily="34" charset="-120"/>
+              </a:rPr>
+              <a:t>MECÁNICA</a:t>
+            </a:r>
+            <a:endParaRPr lang="en-US" sz="1050" dirty="0"/>
+          </a:p>
+        </p:txBody>
+      </p:sp>
+      <p:sp>
+        <p:nvSpPr>
+          <p:cNvPr id="45" name="Text 41"/>
+          <p:cNvSpPr/>
+          <p:nvPr/>
+        </p:nvSpPr>
+        <p:spPr>
+          <a:xfrm>
+            <a:off x="7589520" y="4754880"/>
+            <a:ext cx="1371600" cy="237744"/>
+          </a:xfrm>
+          <a:prstGeom prst="rect">
+            <a:avLst/>
+          </a:prstGeom>
+          <a:noFill/>
+          <a:ln/>
+        </p:spPr>
+        <p:txBody>
+          <a:bodyPr wrap="square" lIns="0" tIns="0" rIns="0" bIns="0" rtlCol="0" anchor="ctr"/>
+          <a:lstStyle/>
+          <a:p>
+            <a:pPr algn="l" indent="0" marL="0">
+              <a:buNone/>
+            </a:pPr>
+            <a:r>
+              <a:rPr lang="en-US" sz="1050" dirty="0">
+                <a:solidFill>
+                  <a:srgbClr val="1A2433"/>
+                </a:solidFill>
+                <a:latin typeface="Calibri" pitchFamily="34" charset="0"/>
+                <a:ea typeface="Calibri" pitchFamily="34" charset="-122"/>
+                <a:cs typeface="Calibri" pitchFamily="34" charset="-120"/>
+              </a:rPr>
+              <a:t>Sin asignar</a:t>
+            </a:r>
+            <a:endParaRPr lang="en-US" sz="1050" dirty="0"/>
+          </a:p>
+        </p:txBody>
+      </p:sp>
+      <p:sp>
+        <p:nvSpPr>
+          <p:cNvPr id="46" name="Text 42"/>
+          <p:cNvSpPr/>
+          <p:nvPr/>
+        </p:nvSpPr>
+        <p:spPr>
+          <a:xfrm>
+            <a:off x="9006840" y="4754880"/>
+            <a:ext cx="868680" cy="237744"/>
+          </a:xfrm>
+          <a:prstGeom prst="rect">
+            <a:avLst/>
+          </a:prstGeom>
+          <a:noFill/>
+          <a:ln/>
+        </p:spPr>
+        <p:txBody>
+          <a:bodyPr wrap="square" lIns="0" tIns="0" rIns="0" bIns="0" rtlCol="0" anchor="ctr"/>
+          <a:lstStyle/>
+          <a:p>
+            <a:pPr algn="l" indent="0" marL="0">
+              <a:buNone/>
+            </a:pPr>
+            <a:r>
+              <a:rPr lang="en-US" sz="1050" dirty="0">
+                <a:solidFill>
+                  <a:srgbClr val="C0392B"/>
+                </a:solidFill>
+                <a:latin typeface="Calibri" pitchFamily="34" charset="0"/>
+                <a:ea typeface="Calibri" pitchFamily="34" charset="-122"/>
+                <a:cs typeface="Calibri" pitchFamily="34" charset="-120"/>
+              </a:rPr>
+              <a:t>Pendiente</a:t>
+            </a:r>
+            <a:endParaRPr lang="en-US" sz="1050" dirty="0"/>
+          </a:p>
+        </p:txBody>
+      </p:sp>
+      <p:sp>
+        <p:nvSpPr>
+          <p:cNvPr id="47" name="Text 43"/>
+          <p:cNvSpPr/>
+          <p:nvPr/>
+        </p:nvSpPr>
+        <p:spPr>
+          <a:xfrm>
+            <a:off x="9921240" y="4754880"/>
+            <a:ext cx="1828800" cy="237744"/>
+          </a:xfrm>
+          <a:prstGeom prst="rect">
+            <a:avLst/>
+          </a:prstGeom>
+          <a:noFill/>
+          <a:ln/>
+        </p:spPr>
+        <p:txBody>
+          <a:bodyPr wrap="square" lIns="0" tIns="0" rIns="0" bIns="0" rtlCol="0" anchor="ctr"/>
+          <a:lstStyle/>
+          <a:p>
+            <a:pPr algn="l" indent="0" marL="0">
+              <a:buNone/>
+            </a:pPr>
+            <a:r>
+              <a:rPr lang="en-US" sz="1000" dirty="0">
+                <a:solidFill>
+                  <a:srgbClr val="1A2433"/>
+                </a:solidFill>
+                <a:latin typeface="Calibri" pitchFamily="34" charset="0"/>
+                <a:ea typeface="Calibri" pitchFamily="34" charset="-122"/>
+                <a:cs typeface="Calibri" pitchFamily="34" charset="-120"/>
+              </a:rPr>
+              <a:t>Pruebas 2400-CV-001</a:t>
+            </a:r>
+            <a:endParaRPr lang="en-US" sz="1000" dirty="0"/>
+          </a:p>
+        </p:txBody>
+      </p:sp>
+      <p:sp>
+        <p:nvSpPr>
+          <p:cNvPr id="48" name="Shape 44"/>
+          <p:cNvSpPr/>
+          <p:nvPr/>
+        </p:nvSpPr>
+        <p:spPr>
+          <a:xfrm>
+            <a:off x="502920" y="5029200"/>
+            <a:ext cx="11247120" cy="0"/>
+          </a:xfrm>
+          <a:prstGeom prst="line">
+            <a:avLst/>
+          </a:prstGeom>
+          <a:noFill/>
+          <a:ln w="9525">
+            <a:solidFill>
+              <a:srgbClr val="D9DFE6"/>
+            </a:solidFill>
+            <a:prstDash val="solid"/>
+          </a:ln>
+        </p:spPr>
+      </p:sp>
+      <p:sp>
+        <p:nvSpPr>
+          <p:cNvPr id="49" name="Text 45"/>
+          <p:cNvSpPr/>
+          <p:nvPr/>
+        </p:nvSpPr>
+        <p:spPr>
+          <a:xfrm>
+            <a:off x="502920" y="5084064"/>
+            <a:ext cx="822960" cy="237744"/>
+          </a:xfrm>
+          <a:prstGeom prst="rect">
+            <a:avLst/>
+          </a:prstGeom>
+          <a:noFill/>
+          <a:ln/>
+        </p:spPr>
+        <p:txBody>
+          <a:bodyPr wrap="square" lIns="0" tIns="0" rIns="0" bIns="0" rtlCol="0" anchor="ctr"/>
+          <a:lstStyle/>
+          <a:p>
+            <a:pPr algn="l" indent="0" marL="0">
+              <a:buNone/>
+            </a:pPr>
+            <a:r>
+              <a:rPr lang="en-US" sz="1050" dirty="0">
+                <a:solidFill>
+                  <a:srgbClr val="1A2433"/>
+                </a:solidFill>
+                <a:latin typeface="Calibri" pitchFamily="34" charset="0"/>
+                <a:ea typeface="Calibri" pitchFamily="34" charset="-122"/>
+                <a:cs typeface="Calibri" pitchFamily="34" charset="-120"/>
+              </a:rPr>
+              <a:t>23-10-2026</a:t>
+            </a:r>
+            <a:endParaRPr lang="en-US" sz="1050" dirty="0"/>
+          </a:p>
+        </p:txBody>
+      </p:sp>
+      <p:sp>
+        <p:nvSpPr>
+          <p:cNvPr id="50" name="Text 46"/>
+          <p:cNvSpPr/>
+          <p:nvPr/>
+        </p:nvSpPr>
+        <p:spPr>
+          <a:xfrm>
+            <a:off x="1371600" y="5084064"/>
+            <a:ext cx="1051560" cy="237744"/>
+          </a:xfrm>
+          <a:prstGeom prst="rect">
+            <a:avLst/>
+          </a:prstGeom>
+          <a:noFill/>
+          <a:ln/>
+        </p:spPr>
+        <p:txBody>
+          <a:bodyPr wrap="square" lIns="0" tIns="0" rIns="0" bIns="0" rtlCol="0" anchor="ctr"/>
+          <a:lstStyle/>
+          <a:p>
+            <a:pPr algn="l" indent="0" marL="0">
+              <a:buNone/>
+            </a:pPr>
+            <a:r>
+              <a:rPr lang="en-US" sz="1050" dirty="0">
+                <a:solidFill>
+                  <a:srgbClr val="1A2433"/>
+                </a:solidFill>
+                <a:latin typeface="Calibri" pitchFamily="34" charset="0"/>
+                <a:ea typeface="Calibri" pitchFamily="34" charset="-122"/>
+                <a:cs typeface="Calibri" pitchFamily="34" charset="-120"/>
+              </a:rPr>
+              <a:t>Desaladora</a:t>
+            </a:r>
+            <a:endParaRPr lang="en-US" sz="1050" dirty="0"/>
+          </a:p>
+        </p:txBody>
+      </p:sp>
+      <p:sp>
+        <p:nvSpPr>
+          <p:cNvPr id="51" name="Text 47"/>
+          <p:cNvSpPr/>
+          <p:nvPr/>
+        </p:nvSpPr>
+        <p:spPr>
+          <a:xfrm>
+            <a:off x="2468880" y="5084064"/>
+            <a:ext cx="1051560" cy="237744"/>
+          </a:xfrm>
+          <a:prstGeom prst="rect">
+            <a:avLst/>
+          </a:prstGeom>
+          <a:noFill/>
+          <a:ln/>
+        </p:spPr>
+        <p:txBody>
+          <a:bodyPr wrap="square" lIns="0" tIns="0" rIns="0" bIns="0" rtlCol="0" anchor="ctr"/>
+          <a:lstStyle/>
+          <a:p>
+            <a:pPr algn="l" indent="0" marL="0">
+              <a:buNone/>
+            </a:pPr>
+            <a:r>
+              <a:rPr lang="en-US" sz="1050" dirty="0">
+                <a:solidFill>
+                  <a:srgbClr val="1A2433"/>
+                </a:solidFill>
+                <a:latin typeface="Calibri" pitchFamily="34" charset="0"/>
+                <a:ea typeface="Calibri" pitchFamily="34" charset="-122"/>
+                <a:cs typeface="Calibri" pitchFamily="34" charset="-120"/>
+              </a:rPr>
+              <a:t>96</a:t>
+            </a:r>
+            <a:endParaRPr lang="en-US" sz="1050" dirty="0"/>
+          </a:p>
+        </p:txBody>
+      </p:sp>
+      <p:sp>
+        <p:nvSpPr>
+          <p:cNvPr id="52" name="Text 48"/>
+          <p:cNvSpPr/>
+          <p:nvPr/>
+        </p:nvSpPr>
+        <p:spPr>
+          <a:xfrm>
+            <a:off x="3566160" y="5084064"/>
+            <a:ext cx="1371600" cy="237744"/>
+          </a:xfrm>
+          <a:prstGeom prst="rect">
+            <a:avLst/>
+          </a:prstGeom>
+          <a:noFill/>
+          <a:ln/>
+        </p:spPr>
+        <p:txBody>
+          <a:bodyPr wrap="square" lIns="0" tIns="0" rIns="0" bIns="0" rtlCol="0" anchor="ctr"/>
+          <a:lstStyle/>
+          <a:p>
+            <a:pPr algn="l" indent="0" marL="0">
+              <a:buNone/>
+            </a:pPr>
+            <a:r>
+              <a:rPr lang="en-US" sz="1050" dirty="0">
+                <a:solidFill>
+                  <a:srgbClr val="1A2433"/>
+                </a:solidFill>
+                <a:latin typeface="Calibri" pitchFamily="34" charset="0"/>
+                <a:ea typeface="Calibri" pitchFamily="34" charset="-122"/>
+                <a:cs typeface="Calibri" pitchFamily="34" charset="-120"/>
+              </a:rPr>
+              <a:t>No Conformidad</a:t>
+            </a:r>
+            <a:endParaRPr lang="en-US" sz="1050" dirty="0"/>
+          </a:p>
+        </p:txBody>
+      </p:sp>
+      <p:sp>
+        <p:nvSpPr>
+          <p:cNvPr id="53" name="Text 49"/>
+          <p:cNvSpPr/>
+          <p:nvPr/>
+        </p:nvSpPr>
+        <p:spPr>
+          <a:xfrm>
+            <a:off x="4983480" y="5084064"/>
+            <a:ext cx="1417320" cy="237744"/>
+          </a:xfrm>
+          <a:prstGeom prst="rect">
+            <a:avLst/>
+          </a:prstGeom>
+          <a:noFill/>
+          <a:ln/>
+        </p:spPr>
+        <p:txBody>
+          <a:bodyPr wrap="square" lIns="0" tIns="0" rIns="0" bIns="0" rtlCol="0" anchor="ctr"/>
+          <a:lstStyle/>
+          <a:p>
+            <a:pPr algn="l" indent="0" marL="0">
+              <a:buNone/>
+            </a:pPr>
+            <a:r>
+              <a:rPr lang="en-US" sz="1050" b="1" dirty="0">
+                <a:solidFill>
+                  <a:srgbClr val="2E6FB5"/>
+                </a:solidFill>
+                <a:latin typeface="Calibri" pitchFamily="34" charset="0"/>
+                <a:ea typeface="Calibri" pitchFamily="34" charset="-122"/>
+                <a:cs typeface="Calibri" pitchFamily="34" charset="-120"/>
+              </a:rPr>
+              <a:t>Interna (Besalco)</a:t>
+            </a:r>
+            <a:endParaRPr lang="en-US" sz="1050" dirty="0"/>
+          </a:p>
+        </p:txBody>
+      </p:sp>
+      <p:sp>
+        <p:nvSpPr>
+          <p:cNvPr id="54" name="Text 50"/>
+          <p:cNvSpPr/>
+          <p:nvPr/>
+        </p:nvSpPr>
+        <p:spPr>
+          <a:xfrm>
+            <a:off x="6446520" y="5084064"/>
+            <a:ext cx="1097280" cy="237744"/>
+          </a:xfrm>
+          <a:prstGeom prst="rect">
+            <a:avLst/>
+          </a:prstGeom>
+          <a:noFill/>
+          <a:ln/>
+        </p:spPr>
+        <p:txBody>
+          <a:bodyPr wrap="square" lIns="0" tIns="0" rIns="0" bIns="0" rtlCol="0" anchor="ctr"/>
+          <a:lstStyle/>
+          <a:p>
+            <a:pPr algn="l" indent="0" marL="0">
+              <a:buNone/>
+            </a:pPr>
+            <a:r>
+              <a:rPr lang="en-US" sz="1050" dirty="0">
+                <a:solidFill>
+                  <a:srgbClr val="1A2433"/>
+                </a:solidFill>
+                <a:latin typeface="Calibri" pitchFamily="34" charset="0"/>
+                <a:ea typeface="Calibri" pitchFamily="34" charset="-122"/>
+                <a:cs typeface="Calibri" pitchFamily="34" charset="-120"/>
+              </a:rPr>
+              <a:t>ELÉCTRICA</a:t>
+            </a:r>
+            <a:endParaRPr lang="en-US" sz="1050" dirty="0"/>
+          </a:p>
+        </p:txBody>
+      </p:sp>
+      <p:sp>
+        <p:nvSpPr>
+          <p:cNvPr id="55" name="Text 51"/>
+          <p:cNvSpPr/>
+          <p:nvPr/>
+        </p:nvSpPr>
+        <p:spPr>
+          <a:xfrm>
+            <a:off x="7589520" y="5084064"/>
+            <a:ext cx="1371600" cy="237744"/>
+          </a:xfrm>
+          <a:prstGeom prst="rect">
+            <a:avLst/>
+          </a:prstGeom>
+          <a:noFill/>
+          <a:ln/>
+        </p:spPr>
+        <p:txBody>
+          <a:bodyPr wrap="square" lIns="0" tIns="0" rIns="0" bIns="0" rtlCol="0" anchor="ctr"/>
+          <a:lstStyle/>
+          <a:p>
+            <a:pPr algn="l" indent="0" marL="0">
+              <a:buNone/>
+            </a:pPr>
+            <a:r>
+              <a:rPr lang="en-US" sz="1050" dirty="0">
+                <a:solidFill>
+                  <a:srgbClr val="1A2433"/>
+                </a:solidFill>
+                <a:latin typeface="Calibri" pitchFamily="34" charset="0"/>
+                <a:ea typeface="Calibri" pitchFamily="34" charset="-122"/>
+                <a:cs typeface="Calibri" pitchFamily="34" charset="-120"/>
+              </a:rPr>
+              <a:t>Luis Carrasco</a:t>
+            </a:r>
+            <a:endParaRPr lang="en-US" sz="1050" dirty="0"/>
+          </a:p>
+        </p:txBody>
+      </p:sp>
+      <p:sp>
+        <p:nvSpPr>
+          <p:cNvPr id="56" name="Text 52"/>
+          <p:cNvSpPr/>
+          <p:nvPr/>
+        </p:nvSpPr>
+        <p:spPr>
+          <a:xfrm>
+            <a:off x="9006840" y="5084064"/>
+            <a:ext cx="868680" cy="237744"/>
+          </a:xfrm>
+          <a:prstGeom prst="rect">
+            <a:avLst/>
+          </a:prstGeom>
+          <a:noFill/>
+          <a:ln/>
+        </p:spPr>
+        <p:txBody>
+          <a:bodyPr wrap="square" lIns="0" tIns="0" rIns="0" bIns="0" rtlCol="0" anchor="ctr"/>
+          <a:lstStyle/>
+          <a:p>
+            <a:pPr algn="l" indent="0" marL="0">
+              <a:buNone/>
+            </a:pPr>
+            <a:r>
+              <a:rPr lang="en-US" sz="1050" dirty="0">
+                <a:solidFill>
+                  <a:srgbClr val="C0392B"/>
+                </a:solidFill>
+                <a:latin typeface="Calibri" pitchFamily="34" charset="0"/>
+                <a:ea typeface="Calibri" pitchFamily="34" charset="-122"/>
+                <a:cs typeface="Calibri" pitchFamily="34" charset="-120"/>
+              </a:rPr>
+              <a:t>Iniciado</a:t>
+            </a:r>
+            <a:endParaRPr lang="en-US" sz="1050" dirty="0"/>
+          </a:p>
+        </p:txBody>
+      </p:sp>
+      <p:sp>
+        <p:nvSpPr>
+          <p:cNvPr id="57" name="Text 53"/>
+          <p:cNvSpPr/>
+          <p:nvPr/>
+        </p:nvSpPr>
+        <p:spPr>
+          <a:xfrm>
+            <a:off x="9921240" y="5084064"/>
+            <a:ext cx="1828800" cy="237744"/>
+          </a:xfrm>
+          <a:prstGeom prst="rect">
+            <a:avLst/>
+          </a:prstGeom>
+          <a:noFill/>
+          <a:ln/>
+        </p:spPr>
+        <p:txBody>
+          <a:bodyPr wrap="square" lIns="0" tIns="0" rIns="0" bIns="0" rtlCol="0" anchor="ctr"/>
+          <a:lstStyle/>
+          <a:p>
+            <a:pPr algn="l" indent="0" marL="0">
+              <a:buNone/>
+            </a:pPr>
+            <a:r>
+              <a:rPr lang="en-US" sz="1000" dirty="0">
+                <a:solidFill>
+                  <a:srgbClr val="1A2433"/>
+                </a:solidFill>
+                <a:latin typeface="Calibri" pitchFamily="34" charset="0"/>
+                <a:ea typeface="Calibri" pitchFamily="34" charset="-122"/>
+                <a:cs typeface="Calibri" pitchFamily="34" charset="-120"/>
+              </a:rPr>
+              <a:t>Inconsistencias en los regi…</a:t>
+            </a:r>
+            <a:endParaRPr lang="en-US" sz="1000" dirty="0"/>
+          </a:p>
+        </p:txBody>
+      </p:sp>
+      <p:sp>
+        <p:nvSpPr>
+          <p:cNvPr id="58" name="Shape 54"/>
+          <p:cNvSpPr/>
+          <p:nvPr/>
+        </p:nvSpPr>
+        <p:spPr>
+          <a:xfrm>
+            <a:off x="502920" y="5358384"/>
+            <a:ext cx="11247120" cy="0"/>
+          </a:xfrm>
+          <a:prstGeom prst="line">
+            <a:avLst/>
+          </a:prstGeom>
+          <a:noFill/>
+          <a:ln w="9525">
+            <a:solidFill>
+              <a:srgbClr val="D9DFE6"/>
+            </a:solidFill>
+            <a:prstDash val="solid"/>
+          </a:ln>
+        </p:spPr>
+      </p:sp>
+      <p:sp>
+        <p:nvSpPr>
+          <p:cNvPr id="59" name="Text 55"/>
           <p:cNvSpPr/>
           <p:nvPr/>
         </p:nvSpPr>
@@ -25230,7 +25663,7 @@
                 <a:ea typeface="Calibri" pitchFamily="34" charset="-122"/>
                 <a:cs typeface="Calibri" pitchFamily="34" charset="-120"/>
               </a:rPr>
-              <a:t>Fuente: Data_NCR.xlsx — hoja «Observaciones» · Corte 19-10-2026 · 516 registros desde 10-02-2023</a:t>
+              <a:t>Fuente: Data_NCR.xlsx — hoja «Observaciones» · Corte 26-10-2026 · 519 registros desde 10-02-2023</a:t>
             </a:r>
             <a:endParaRPr lang="en-US" sz="850" dirty="0"/>
           </a:p>
@@ -25238,7 +25671,7 @@
       </p:sp>
       <p:sp>
         <p:nvSpPr>
-          <p:cNvPr id="39" name="Text 35"/>
+          <p:cNvPr id="60" name="Text 56"/>
           <p:cNvSpPr/>
           <p:nvPr/>
         </p:nvSpPr>
@@ -25277,7 +25710,7 @@
       </p:sp>
       <p:sp>
         <p:nvSpPr>
-          <p:cNvPr id="40" name="Text 36"/>
+          <p:cNvPr id="61" name="Text 57"/>
           <p:cNvSpPr/>
           <p:nvPr/>
         </p:nvSpPr>
@@ -25348,7 +25781,7 @@
       </p:grpSpPr>
       <p:pic>
         <p:nvPicPr>
-          <p:cNvPr id="2" name="Image 0" descr="/workspace/dashboard-hseq/panel_control_TOP_P1/besalco_logo.png">    </p:cNvPr>
+          <p:cNvPr id="2" name="Image 0" descr="/home/user/dashboard-hseq/panel_control_TOP_P1/besalco_logo.png">    </p:cNvPr>
           <p:cNvPicPr>
             <a:picLocks noChangeAspect="1"/>
           </p:cNvPicPr>
@@ -25910,7 +26343,7 @@
                 <a:ea typeface="Calibri" pitchFamily="34" charset="-122"/>
                 <a:cs typeface="Calibri" pitchFamily="34" charset="-120"/>
               </a:rPr>
-              <a:t>159</a:t>
+              <a:t>160</a:t>
             </a:r>
             <a:endParaRPr lang="en-US" sz="1050" dirty="0"/>
           </a:p>
@@ -25949,7 +26382,7 @@
                 <a:ea typeface="Calibri" pitchFamily="34" charset="-122"/>
                 <a:cs typeface="Calibri" pitchFamily="34" charset="-120"/>
               </a:rPr>
-              <a:t>157</a:t>
+              <a:t>158</a:t>
             </a:r>
             <a:endParaRPr lang="en-US" sz="1050" dirty="0"/>
           </a:p>
@@ -25988,7 +26421,7 @@
                 <a:ea typeface="Calibri" pitchFamily="34" charset="-122"/>
                 <a:cs typeface="Calibri" pitchFamily="34" charset="-120"/>
               </a:rPr>
-              <a:t>98,7%</a:t>
+              <a:t>98,8%</a:t>
             </a:r>
             <a:endParaRPr lang="en-US" sz="1050" dirty="0"/>
           </a:p>
@@ -26066,7 +26499,7 @@
                 <a:ea typeface="Calibri" pitchFamily="34" charset="-122"/>
                 <a:cs typeface="Calibri" pitchFamily="34" charset="-120"/>
               </a:rPr>
-              <a:t>2</a:t>
+              <a:t>1</a:t>
             </a:r>
             <a:endParaRPr lang="en-US" sz="1050" dirty="0"/>
           </a:p>
@@ -26105,7 +26538,7 @@
                 <a:ea typeface="Calibri" pitchFamily="34" charset="-122"/>
                 <a:cs typeface="Calibri" pitchFamily="34" charset="-120"/>
               </a:rPr>
-              <a:t>69 días</a:t>
+              <a:t>70 días</a:t>
             </a:r>
             <a:endParaRPr lang="en-US" sz="1050" dirty="0"/>
           </a:p>
@@ -26226,7 +26659,7 @@
                 <a:ea typeface="Calibri" pitchFamily="34" charset="-122"/>
                 <a:cs typeface="Calibri" pitchFamily="34" charset="-120"/>
               </a:rPr>
-              <a:t>300</a:t>
+              <a:t>302</a:t>
             </a:r>
             <a:endParaRPr lang="en-US" sz="1050" dirty="0"/>
           </a:p>
@@ -26265,7 +26698,7 @@
                 <a:ea typeface="Calibri" pitchFamily="34" charset="-122"/>
                 <a:cs typeface="Calibri" pitchFamily="34" charset="-120"/>
               </a:rPr>
-              <a:t>284</a:t>
+              <a:t>286</a:t>
             </a:r>
             <a:endParaRPr lang="en-US" sz="1050" dirty="0"/>
           </a:p>
@@ -26382,7 +26815,7 @@
                 <a:ea typeface="Calibri" pitchFamily="34" charset="-122"/>
                 <a:cs typeface="Calibri" pitchFamily="34" charset="-120"/>
               </a:rPr>
-              <a:t>15</a:t>
+              <a:t>14</a:t>
             </a:r>
             <a:endParaRPr lang="en-US" sz="1050" dirty="0"/>
           </a:p>
@@ -27134,7 +27567,7 @@
                 <a:ea typeface="Calibri" pitchFamily="34" charset="-122"/>
                 <a:cs typeface="Calibri" pitchFamily="34" charset="-120"/>
               </a:rPr>
-              <a:t>516</a:t>
+              <a:t>519</a:t>
             </a:r>
             <a:endParaRPr lang="en-US" sz="1050" dirty="0"/>
           </a:p>
@@ -27173,7 +27606,7 @@
                 <a:ea typeface="Calibri" pitchFamily="34" charset="-122"/>
                 <a:cs typeface="Calibri" pitchFamily="34" charset="-120"/>
               </a:rPr>
-              <a:t>498</a:t>
+              <a:t>501</a:t>
             </a:r>
             <a:endParaRPr lang="en-US" sz="1050" dirty="0"/>
           </a:p>
@@ -27290,7 +27723,7 @@
                 <a:ea typeface="Calibri" pitchFamily="34" charset="-122"/>
                 <a:cs typeface="Calibri" pitchFamily="34" charset="-120"/>
               </a:rPr>
-              <a:t>17</a:t>
+              <a:t>15</a:t>
             </a:r>
             <a:endParaRPr lang="en-US" sz="1050" dirty="0"/>
           </a:p>
@@ -27468,7 +27901,7 @@
                 <a:ea typeface="Cambria" pitchFamily="34" charset="-122"/>
                 <a:cs typeface="Cambria" pitchFamily="34" charset="-120"/>
               </a:rPr>
-              <a:t>66,7%</a:t>
+              <a:t>67,1%</a:t>
             </a:r>
             <a:endParaRPr lang="en-US" sz="2400" dirty="0"/>
           </a:p>
@@ -27624,7 +28057,7 @@
                 <a:ea typeface="Cambria" pitchFamily="34" charset="-122"/>
                 <a:cs typeface="Cambria" pitchFamily="34" charset="-120"/>
               </a:rPr>
-              <a:t>30,8%</a:t>
+              <a:t>30,5%</a:t>
             </a:r>
             <a:endParaRPr lang="en-US" sz="2400" dirty="0"/>
           </a:p>
@@ -27702,7 +28135,7 @@
                 <a:ea typeface="Calibri" pitchFamily="34" charset="-122"/>
                 <a:cs typeface="Calibri" pitchFamily="34" charset="-120"/>
               </a:rPr>
-              <a:t>Fuente: Data_NCR.xlsx — hoja «Observaciones» · Corte 19-10-2026 · 516 registros desde 10-02-2023</a:t>
+              <a:t>Fuente: Data_NCR.xlsx — hoja «Observaciones» · Corte 26-10-2026 · 519 registros desde 10-02-2023</a:t>
             </a:r>
             <a:endParaRPr lang="en-US" sz="850" dirty="0"/>
           </a:p>
@@ -27820,7 +28253,7 @@
       </p:grpSpPr>
       <p:pic>
         <p:nvPicPr>
-          <p:cNvPr id="2" name="Image 0" descr="/workspace/dashboard-hseq/panel_control_TOP_P1/besalco_logo.png">    </p:cNvPr>
+          <p:cNvPr id="2" name="Image 0" descr="/home/user/dashboard-hseq/panel_control_TOP_P1/besalco_logo.png">    </p:cNvPr>
           <p:cNvPicPr>
             <a:picLocks noChangeAspect="1"/>
           </p:cNvPicPr>
@@ -28090,7 +28523,7 @@
                 <a:ea typeface="Calibri" pitchFamily="34" charset="-122"/>
                 <a:cs typeface="Calibri" pitchFamily="34" charset="-120"/>
               </a:rPr>
-              <a:t>Al corte hay 17 hallazgos fuera de plazo de los 18 abiertos.</a:t>
+              <a:t>Al corte hay 15 hallazgos fuera de plazo de los 18 abiertos.</a:t>
             </a:r>
             <a:endParaRPr lang="en-US" sz="1150" dirty="0"/>
           </a:p>
@@ -28503,7 +28936,7 @@
                 <a:ea typeface="Calibri" pitchFamily="34" charset="-122"/>
                 <a:cs typeface="Calibri" pitchFamily="34" charset="-120"/>
               </a:rPr>
-              <a:t>81</a:t>
+              <a:t>82</a:t>
             </a:r>
             <a:endParaRPr lang="en-US" sz="1150" dirty="0"/>
           </a:p>
@@ -28542,7 +28975,7 @@
                 <a:ea typeface="Calibri" pitchFamily="34" charset="-122"/>
                 <a:cs typeface="Calibri" pitchFamily="34" charset="-120"/>
               </a:rPr>
-              <a:t>18 d</a:t>
+              <a:t>19 d</a:t>
             </a:r>
             <a:endParaRPr lang="en-US" sz="1150" dirty="0"/>
           </a:p>
@@ -28769,7 +29202,7 @@
                 <a:ea typeface="Calibri" pitchFamily="34" charset="-122"/>
                 <a:cs typeface="Calibri" pitchFamily="34" charset="-120"/>
               </a:rPr>
-              <a:t>251</a:t>
+              <a:t>252</a:t>
             </a:r>
             <a:endParaRPr lang="en-US" sz="1150" dirty="0"/>
           </a:p>
@@ -28886,7 +29319,7 @@
                 <a:ea typeface="Calibri" pitchFamily="34" charset="-122"/>
                 <a:cs typeface="Calibri" pitchFamily="34" charset="-120"/>
               </a:rPr>
-              <a:t>3</a:t>
+              <a:t>2</a:t>
             </a:r>
             <a:endParaRPr lang="en-US" sz="1150" dirty="0"/>
           </a:p>
@@ -29015,7 +29448,7 @@
                 <a:ea typeface="Calibri" pitchFamily="34" charset="-122"/>
                 <a:cs typeface="Calibri" pitchFamily="34" charset="-120"/>
               </a:rPr>
-              <a:t>158</a:t>
+              <a:t>159</a:t>
             </a:r>
             <a:endParaRPr lang="en-US" sz="1150" dirty="0"/>
           </a:p>
@@ -29093,7 +29526,7 @@
                 <a:ea typeface="Calibri" pitchFamily="34" charset="-122"/>
                 <a:cs typeface="Calibri" pitchFamily="34" charset="-120"/>
               </a:rPr>
-              <a:t>438 d</a:t>
+              <a:t>445 d</a:t>
             </a:r>
             <a:endParaRPr lang="en-US" sz="1150" dirty="0"/>
           </a:p>
@@ -29132,7 +29565,7 @@
                 <a:ea typeface="Calibri" pitchFamily="34" charset="-122"/>
                 <a:cs typeface="Calibri" pitchFamily="34" charset="-120"/>
               </a:rPr>
-              <a:t>14</a:t>
+              <a:t>15</a:t>
             </a:r>
             <a:endParaRPr lang="en-US" sz="1150" dirty="0"/>
           </a:p>
@@ -29171,7 +29604,7 @@
                 <a:ea typeface="Calibri" pitchFamily="34" charset="-122"/>
                 <a:cs typeface="Calibri" pitchFamily="34" charset="-120"/>
               </a:rPr>
-              <a:t>8× más lento que el mejor frente</a:t>
+              <a:t>7× más lento que el mejor frente</a:t>
             </a:r>
             <a:endParaRPr lang="en-US" sz="1150" dirty="0"/>
           </a:p>
@@ -29510,7 +29943,7 @@
                 <a:ea typeface="Calibri" pitchFamily="34" charset="-122"/>
                 <a:cs typeface="Calibri" pitchFamily="34" charset="-120"/>
               </a:rPr>
-              <a:t>Fuente: Data_NCR.xlsx — hoja «Observaciones» · Corte 19-10-2026 · 516 registros desde 10-02-2023</a:t>
+              <a:t>Fuente: Data_NCR.xlsx — hoja «Observaciones» · Corte 26-10-2026 · 519 registros desde 10-02-2023</a:t>
             </a:r>
             <a:endParaRPr lang="en-US" sz="850" dirty="0"/>
           </a:p>
@@ -29628,7 +30061,7 @@
       </p:grpSpPr>
       <p:pic>
         <p:nvPicPr>
-          <p:cNvPr id="2" name="Image 0" descr="/workspace/dashboard-hseq/panel_control_TOP_P1/besalco_logo.png">    </p:cNvPr>
+          <p:cNvPr id="2" name="Image 0" descr="/home/user/dashboard-hseq/panel_control_TOP_P1/besalco_logo.png">    </p:cNvPr>
           <p:cNvPicPr>
             <a:picLocks noChangeAspect="1"/>
           </p:cNvPicPr>
@@ -29761,7 +30194,7 @@
                 <a:ea typeface="Calibri" pitchFamily="34" charset="-122"/>
                 <a:cs typeface="Calibri" pitchFamily="34" charset="-120"/>
               </a:rPr>
-              <a:t>10.613 UF declaradas entre nov-24 y oct-26, imputadas al mes en que se levantó cada hallazgo. Las declaran 108 de 505 hallazgos del período.</a:t>
+              <a:t>10.628 UF declaradas entre nov-24 y oct-26, imputadas al mes en que se levantó cada hallazgo. Las declaran 109 de 508 hallazgos del período.</a:t>
             </a:r>
             <a:endParaRPr lang="en-US" sz="1350" dirty="0"/>
           </a:p>
@@ -36481,6 +36914,74 @@
                       <a:pPr algn="r" indent="0" marL="0">
                         <a:buNone/>
                       </a:pPr>
+                      <a:r>
+                        <a:rPr lang="en-US" sz="750" dirty="0">
+                          <a:solidFill>
+                            <a:srgbClr val="1A2433"/>
+                          </a:solidFill>
+                          <a:latin typeface="Calibri" pitchFamily="34" charset="0"/>
+                          <a:ea typeface="Calibri" pitchFamily="34" charset="-122"/>
+                          <a:cs typeface="Calibri" pitchFamily="34" charset="-120"/>
+                        </a:rPr>
+                        <a:t>15</a:t>
+                      </a:r>
+                      <a:endParaRPr lang="en-US" sz="750" dirty="0">
+                        <a:latin typeface="Calibri" charset="0"/>
+                        <a:ea typeface="Calibri" charset="0"/>
+                        <a:cs typeface="Calibri" charset="0"/>
+                      </a:endParaRPr>
+                    </a:p>
+                  </a:txBody>
+                  <a:tcPr marL="25400" marR="25400" marT="25400" marB="25400" anchor="ctr">
+                    <a:lnL w="12700" cap="flat" cmpd="sng" algn="ctr">
+                      <a:solidFill>
+                        <a:srgbClr val="F4F6F9"/>
+                      </a:solidFill>
+                      <a:prstDash val="solid"/>
+                      <a:round/>
+                      <a:headEnd type="none" w="med" len="med"/>
+                      <a:tailEnd type="none" w="med" len="med"/>
+                    </a:lnL>
+                    <a:lnR w="12700" cap="flat" cmpd="sng" algn="ctr">
+                      <a:solidFill>
+                        <a:srgbClr val="F4F6F9"/>
+                      </a:solidFill>
+                      <a:prstDash val="solid"/>
+                      <a:round/>
+                      <a:headEnd type="none" w="med" len="med"/>
+                      <a:tailEnd type="none" w="med" len="med"/>
+                    </a:lnR>
+                    <a:lnT w="12700" cap="flat" cmpd="sng" algn="ctr">
+                      <a:solidFill>
+                        <a:srgbClr val="F4F6F9"/>
+                      </a:solidFill>
+                      <a:prstDash val="solid"/>
+                      <a:round/>
+                      <a:headEnd type="none" w="med" len="med"/>
+                      <a:tailEnd type="none" w="med" len="med"/>
+                    </a:lnT>
+                    <a:lnB w="12700" cap="flat" cmpd="sng" algn="ctr">
+                      <a:solidFill>
+                        <a:srgbClr val="F4F6F9"/>
+                      </a:solidFill>
+                      <a:prstDash val="solid"/>
+                      <a:round/>
+                      <a:headEnd type="none" w="med" len="med"/>
+                      <a:tailEnd type="none" w="med" len="med"/>
+                    </a:lnB>
+                    <a:solidFill>
+                      <a:srgbClr val="BFDBFE"/>
+                    </a:solidFill>
+                  </a:tcPr>
+                </a:tc>
+                <a:tc>
+                  <a:txBody>
+                    <a:bodyPr/>
+                    <a:lstStyle/>
+                    <a:p>
+                      <a:pPr algn="r" indent="0" marL="0">
+                        <a:buNone/>
+                      </a:pPr>
                       <a:endParaRPr lang="en-US" sz="750" dirty="0">
                         <a:latin typeface="Calibri" charset="0"/>
                         <a:ea typeface="Calibri" charset="0"/>
@@ -36766,63 +37267,6 @@
                       <a:pPr algn="r" indent="0" marL="0">
                         <a:buNone/>
                       </a:pPr>
-                      <a:endParaRPr lang="en-US" sz="750" dirty="0">
-                        <a:latin typeface="Calibri" charset="0"/>
-                        <a:ea typeface="Calibri" charset="0"/>
-                        <a:cs typeface="Calibri" charset="0"/>
-                      </a:endParaRPr>
-                    </a:p>
-                  </a:txBody>
-                  <a:tcPr marL="25400" marR="25400" marT="25400" marB="25400" anchor="ctr">
-                    <a:lnL w="12700" cap="flat" cmpd="sng" algn="ctr">
-                      <a:solidFill>
-                        <a:srgbClr val="F4F6F9"/>
-                      </a:solidFill>
-                      <a:prstDash val="solid"/>
-                      <a:round/>
-                      <a:headEnd type="none" w="med" len="med"/>
-                      <a:tailEnd type="none" w="med" len="med"/>
-                    </a:lnL>
-                    <a:lnR w="12700" cap="flat" cmpd="sng" algn="ctr">
-                      <a:solidFill>
-                        <a:srgbClr val="F4F6F9"/>
-                      </a:solidFill>
-                      <a:prstDash val="solid"/>
-                      <a:round/>
-                      <a:headEnd type="none" w="med" len="med"/>
-                      <a:tailEnd type="none" w="med" len="med"/>
-                    </a:lnR>
-                    <a:lnT w="12700" cap="flat" cmpd="sng" algn="ctr">
-                      <a:solidFill>
-                        <a:srgbClr val="F4F6F9"/>
-                      </a:solidFill>
-                      <a:prstDash val="solid"/>
-                      <a:round/>
-                      <a:headEnd type="none" w="med" len="med"/>
-                      <a:tailEnd type="none" w="med" len="med"/>
-                    </a:lnT>
-                    <a:lnB w="12700" cap="flat" cmpd="sng" algn="ctr">
-                      <a:solidFill>
-                        <a:srgbClr val="F4F6F9"/>
-                      </a:solidFill>
-                      <a:prstDash val="solid"/>
-                      <a:round/>
-                      <a:headEnd type="none" w="med" len="med"/>
-                      <a:tailEnd type="none" w="med" len="med"/>
-                    </a:lnB>
-                    <a:solidFill>
-                      <a:srgbClr val="EFF2F6"/>
-                    </a:solidFill>
-                  </a:tcPr>
-                </a:tc>
-                <a:tc>
-                  <a:txBody>
-                    <a:bodyPr/>
-                    <a:lstStyle/>
-                    <a:p>
-                      <a:pPr algn="r" indent="0" marL="0">
-                        <a:buNone/>
-                      </a:pPr>
                       <a:r>
                         <a:rPr lang="en-US" sz="750" b="1" dirty="0">
                           <a:solidFill>
@@ -36832,7 +37276,7 @@
                           <a:ea typeface="Calibri" pitchFamily="34" charset="-122"/>
                           <a:cs typeface="Calibri" pitchFamily="34" charset="-120"/>
                         </a:rPr>
-                        <a:t>2.176</a:t>
+                        <a:t>2.191</a:t>
                       </a:r>
                       <a:endParaRPr lang="en-US" sz="750" dirty="0">
                         <a:latin typeface="Calibri" charset="0"/>
@@ -45880,6 +46324,74 @@
                       <a:pPr algn="r" indent="0" marL="0">
                         <a:buNone/>
                       </a:pPr>
+                      <a:r>
+                        <a:rPr lang="en-US" sz="750" b="1" dirty="0">
+                          <a:solidFill>
+                            <a:srgbClr val="1A2433"/>
+                          </a:solidFill>
+                          <a:latin typeface="Calibri" pitchFamily="34" charset="0"/>
+                          <a:ea typeface="Calibri" pitchFamily="34" charset="-122"/>
+                          <a:cs typeface="Calibri" pitchFamily="34" charset="-120"/>
+                        </a:rPr>
+                        <a:t>15</a:t>
+                      </a:r>
+                      <a:endParaRPr lang="en-US" sz="750" dirty="0">
+                        <a:latin typeface="Calibri" charset="0"/>
+                        <a:ea typeface="Calibri" charset="0"/>
+                        <a:cs typeface="Calibri" charset="0"/>
+                      </a:endParaRPr>
+                    </a:p>
+                  </a:txBody>
+                  <a:tcPr marL="25400" marR="25400" marT="25400" marB="25400" anchor="ctr">
+                    <a:lnL w="12700" cap="flat" cmpd="sng" algn="ctr">
+                      <a:solidFill>
+                        <a:srgbClr val="F4F6F9"/>
+                      </a:solidFill>
+                      <a:prstDash val="solid"/>
+                      <a:round/>
+                      <a:headEnd type="none" w="med" len="med"/>
+                      <a:tailEnd type="none" w="med" len="med"/>
+                    </a:lnL>
+                    <a:lnR w="12700" cap="flat" cmpd="sng" algn="ctr">
+                      <a:solidFill>
+                        <a:srgbClr val="F4F6F9"/>
+                      </a:solidFill>
+                      <a:prstDash val="solid"/>
+                      <a:round/>
+                      <a:headEnd type="none" w="med" len="med"/>
+                      <a:tailEnd type="none" w="med" len="med"/>
+                    </a:lnR>
+                    <a:lnT w="12700" cap="flat" cmpd="sng" algn="ctr">
+                      <a:solidFill>
+                        <a:srgbClr val="F4F6F9"/>
+                      </a:solidFill>
+                      <a:prstDash val="solid"/>
+                      <a:round/>
+                      <a:headEnd type="none" w="med" len="med"/>
+                      <a:tailEnd type="none" w="med" len="med"/>
+                    </a:lnT>
+                    <a:lnB w="12700" cap="flat" cmpd="sng" algn="ctr">
+                      <a:solidFill>
+                        <a:srgbClr val="F4F6F9"/>
+                      </a:solidFill>
+                      <a:prstDash val="solid"/>
+                      <a:round/>
+                      <a:headEnd type="none" w="med" len="med"/>
+                      <a:tailEnd type="none" w="med" len="med"/>
+                    </a:lnB>
+                    <a:solidFill>
+                      <a:srgbClr val="BFDBFE"/>
+                    </a:solidFill>
+                  </a:tcPr>
+                </a:tc>
+                <a:tc>
+                  <a:txBody>
+                    <a:bodyPr/>
+                    <a:lstStyle/>
+                    <a:p>
+                      <a:pPr algn="r" indent="0" marL="0">
+                        <a:buNone/>
+                      </a:pPr>
                       <a:endParaRPr lang="en-US" sz="750" dirty="0">
                         <a:latin typeface="Calibri" charset="0"/>
                         <a:ea typeface="Calibri" charset="0"/>
@@ -46165,63 +46677,6 @@
                       <a:pPr algn="r" indent="0" marL="0">
                         <a:buNone/>
                       </a:pPr>
-                      <a:endParaRPr lang="en-US" sz="750" dirty="0">
-                        <a:latin typeface="Calibri" charset="0"/>
-                        <a:ea typeface="Calibri" charset="0"/>
-                        <a:cs typeface="Calibri" charset="0"/>
-                      </a:endParaRPr>
-                    </a:p>
-                  </a:txBody>
-                  <a:tcPr marL="25400" marR="25400" marT="25400" marB="25400" anchor="ctr">
-                    <a:lnL w="12700" cap="flat" cmpd="sng" algn="ctr">
-                      <a:solidFill>
-                        <a:srgbClr val="F4F6F9"/>
-                      </a:solidFill>
-                      <a:prstDash val="solid"/>
-                      <a:round/>
-                      <a:headEnd type="none" w="med" len="med"/>
-                      <a:tailEnd type="none" w="med" len="med"/>
-                    </a:lnL>
-                    <a:lnR w="12700" cap="flat" cmpd="sng" algn="ctr">
-                      <a:solidFill>
-                        <a:srgbClr val="F4F6F9"/>
-                      </a:solidFill>
-                      <a:prstDash val="solid"/>
-                      <a:round/>
-                      <a:headEnd type="none" w="med" len="med"/>
-                      <a:tailEnd type="none" w="med" len="med"/>
-                    </a:lnR>
-                    <a:lnT w="12700" cap="flat" cmpd="sng" algn="ctr">
-                      <a:solidFill>
-                        <a:srgbClr val="F4F6F9"/>
-                      </a:solidFill>
-                      <a:prstDash val="solid"/>
-                      <a:round/>
-                      <a:headEnd type="none" w="med" len="med"/>
-                      <a:tailEnd type="none" w="med" len="med"/>
-                    </a:lnT>
-                    <a:lnB w="12700" cap="flat" cmpd="sng" algn="ctr">
-                      <a:solidFill>
-                        <a:srgbClr val="F4F6F9"/>
-                      </a:solidFill>
-                      <a:prstDash val="solid"/>
-                      <a:round/>
-                      <a:headEnd type="none" w="med" len="med"/>
-                      <a:tailEnd type="none" w="med" len="med"/>
-                    </a:lnB>
-                    <a:solidFill>
-                      <a:srgbClr val="EFF2F6"/>
-                    </a:solidFill>
-                  </a:tcPr>
-                </a:tc>
-                <a:tc>
-                  <a:txBody>
-                    <a:bodyPr/>
-                    <a:lstStyle/>
-                    <a:p>
-                      <a:pPr algn="r" indent="0" marL="0">
-                        <a:buNone/>
-                      </a:pPr>
                       <a:r>
                         <a:rPr lang="en-US" sz="750" b="1" dirty="0">
                           <a:solidFill>
@@ -46231,7 +46686,7 @@
                           <a:ea typeface="Calibri" pitchFamily="34" charset="-122"/>
                           <a:cs typeface="Calibri" pitchFamily="34" charset="-120"/>
                         </a:rPr>
-                        <a:t>10.613</a:t>
+                        <a:t>10.628</a:t>
                       </a:r>
                       <a:endParaRPr lang="en-US" sz="750" dirty="0">
                         <a:latin typeface="Calibri" charset="0"/>
@@ -47585,15 +48040,15 @@
                         <a:buNone/>
                       </a:pPr>
                       <a:r>
-                        <a:rPr lang="en-US" sz="750" b="1" dirty="0">
+                        <a:rPr lang="en-US" sz="750" dirty="0">
                           <a:solidFill>
-                            <a:srgbClr val="C0392B"/>
+                            <a:srgbClr val="56606E"/>
                           </a:solidFill>
                           <a:latin typeface="Calibri" pitchFamily="34" charset="0"/>
                           <a:ea typeface="Calibri" pitchFamily="34" charset="-122"/>
                           <a:cs typeface="Calibri" pitchFamily="34" charset="-120"/>
                         </a:rPr>
-                        <a:t>0/19</a:t>
+                        <a:t>1/19</a:t>
                       </a:r>
                       <a:endParaRPr lang="en-US" sz="750" dirty="0">
                         <a:latin typeface="Calibri" charset="0"/>
@@ -47933,7 +48388,7 @@
                           <a:ea typeface="Calibri" pitchFamily="34" charset="-122"/>
                           <a:cs typeface="Calibri" pitchFamily="34" charset="-120"/>
                         </a:rPr>
-                        <a:t>0/1</a:t>
+                        <a:t>0/4</a:t>
                       </a:r>
                       <a:endParaRPr lang="en-US" sz="750" dirty="0">
                         <a:latin typeface="Calibri" charset="0"/>
@@ -48001,7 +48456,7 @@
                           <a:ea typeface="Calibri" pitchFamily="34" charset="-122"/>
                           <a:cs typeface="Calibri" pitchFamily="34" charset="-120"/>
                         </a:rPr>
-                        <a:t>108/505</a:t>
+                        <a:t>109/508</a:t>
                       </a:r>
                       <a:endParaRPr lang="en-US" sz="750" dirty="0">
                         <a:latin typeface="Calibri" charset="0"/>
@@ -48469,7 +48924,7 @@
                 <a:ea typeface="Cambria" pitchFamily="34" charset="-122"/>
                 <a:cs typeface="Cambria" pitchFamily="34" charset="-120"/>
               </a:rPr>
-              <a:t>108</a:t>
+              <a:t>109</a:t>
             </a:r>
             <a:endParaRPr lang="en-US" sz="2100" dirty="0"/>
           </a:p>
@@ -48665,7 +49120,7 @@
                 <a:ea typeface="Cambria" pitchFamily="34" charset="-122"/>
                 <a:cs typeface="Cambria" pitchFamily="34" charset="-120"/>
               </a:rPr>
-              <a:t>265</a:t>
+              <a:t>267</a:t>
             </a:r>
             <a:endParaRPr lang="en-US" sz="2100" dirty="0"/>
           </a:p>
@@ -48743,7 +49198,7 @@
                 <a:ea typeface="Calibri" pitchFamily="34" charset="-122"/>
                 <a:cs typeface="Calibri" pitchFamily="34" charset="-120"/>
               </a:rPr>
-              <a:t>El costo se imputa al mes de emisión: la columna «Costo De La No Conformidad» no trae fecha propia. El mes más caro es jul-25 con 4.382 UF. Los últimos 6 meses no traen ningún monto declarado —un mes en blanco es «sin declarar», no «sin costo»—. La cifra es un piso del costo real.</a:t>
+              <a:t>El costo se imputa al mes de emisión: la columna «Costo De La No Conformidad» no trae fecha propia. El mes más caro es jul-25 con 4.382 UF. Los últimos 5 meses no traen ningún monto declarado —un mes en blanco es «sin declarar», no «sin costo»—. La cifra es un piso del costo real.</a:t>
             </a:r>
             <a:endParaRPr lang="en-US" sz="950" dirty="0"/>
           </a:p>
@@ -48782,7 +49237,7 @@
                 <a:ea typeface="Calibri" pitchFamily="34" charset="-122"/>
                 <a:cs typeface="Calibri" pitchFamily="34" charset="-120"/>
               </a:rPr>
-              <a:t>Fuente: Data_NCR.xlsx — hoja «Observaciones» · Corte 19-10-2026 · 516 registros desde 10-02-2023</a:t>
+              <a:t>Fuente: Data_NCR.xlsx — hoja «Observaciones» · Corte 26-10-2026 · 519 registros desde 10-02-2023</a:t>
             </a:r>
             <a:endParaRPr lang="en-US" sz="850" dirty="0"/>
           </a:p>
@@ -48900,7 +49355,7 @@
       </p:grpSpPr>
       <p:pic>
         <p:nvPicPr>
-          <p:cNvPr id="2" name="Image 0" descr="/workspace/dashboard-hseq/panel_control_TOP_P1/besalco_logo.png">    </p:cNvPr>
+          <p:cNvPr id="2" name="Image 0" descr="/home/user/dashboard-hseq/panel_control_TOP_P1/besalco_logo.png">    </p:cNvPr>
           <p:cNvPicPr>
             <a:picLocks noChangeAspect="1"/>
           </p:cNvPicPr>
@@ -49156,7 +49611,7 @@
                 <a:ea typeface="Calibri" pitchFamily="34" charset="-122"/>
                 <a:cs typeface="Calibri" pitchFamily="34" charset="-120"/>
               </a:rPr>
-              <a:t>14 de los 18 hallazgos abiertos (77,8%) y 91,9% de cierre, contra 96,5% global. Es la ruta crítica del módulo.</a:t>
+              <a:t>15 de los 18 hallazgos abiertos (83,3%) y 91,4% de cierre, contra 96,5% global. Es la ruta crítica del módulo.</a:t>
             </a:r>
             <a:endParaRPr lang="en-US" sz="1100" dirty="0"/>
           </a:p>
@@ -49298,7 +49753,7 @@
                 <a:ea typeface="Calibri" pitchFamily="34" charset="-122"/>
                 <a:cs typeface="Calibri" pitchFamily="34" charset="-120"/>
               </a:rPr>
-              <a:t>Solo 20,5% de sus hallazgos los detecta Besalco; el mejor frente va en 66,7%. Lo que no se detecta adentro llega como observación del cliente.</a:t>
+              <a:t>Solo 20,5% de sus hallazgos los detecta Besalco; el mejor frente va en 67,1%. Lo que no se detecta adentro llega como observación del cliente.</a:t>
             </a:r>
             <a:endParaRPr lang="en-US" sz="1100" dirty="0"/>
           </a:p>
@@ -49540,7 +49995,7 @@
                 <a:ea typeface="Calibri" pitchFamily="34" charset="-122"/>
                 <a:cs typeface="Calibri" pitchFamily="34" charset="-120"/>
               </a:rPr>
-              <a:t>Responder las 17 que pasaron el plazo</a:t>
+              <a:t>Responder las 15 que pasaron el plazo</a:t>
             </a:r>
             <a:endParaRPr lang="en-US" sz="1400" dirty="0"/>
           </a:p>
@@ -49582,7 +50037,7 @@
                 <a:ea typeface="Calibri" pitchFamily="34" charset="-122"/>
                 <a:cs typeface="Calibri" pitchFamily="34" charset="-120"/>
               </a:rPr>
-              <a:t>El plazo es de 10 días desde la emisión y hoy lo incumplen 94,4% de los abiertos. Solo 1 siguen dentro de plazo.</a:t>
+              <a:t>El plazo es de 10 días desde la emisión y hoy lo incumplen 83,3% de los abiertos. Solo 3 siguen dentro de plazo.</a:t>
             </a:r>
             <a:endParaRPr lang="en-US" sz="1100" dirty="0"/>
           </a:p>
@@ -49621,7 +50076,7 @@
                 <a:ea typeface="Calibri" pitchFamily="34" charset="-122"/>
                 <a:cs typeface="Calibri" pitchFamily="34" charset="-120"/>
               </a:rPr>
-              <a:t>Fuente: Data_NCR.xlsx — hoja «Observaciones» · Corte 19-10-2026 · 516 registros desde 10-02-2023</a:t>
+              <a:t>Fuente: Data_NCR.xlsx — hoja «Observaciones» · Corte 26-10-2026 · 519 registros desde 10-02-2023</a:t>
             </a:r>
             <a:endParaRPr lang="en-US" sz="850" dirty="0"/>
           </a:p>
@@ -49779,7 +50234,7 @@
       </p:sp>
       <p:pic>
         <p:nvPicPr>
-          <p:cNvPr id="4" name="Image 0" descr="/workspace/dashboard-hseq/panel_control_TOP_P1/besalco_logo.png">    </p:cNvPr>
+          <p:cNvPr id="4" name="Image 0" descr="/home/user/dashboard-hseq/panel_control_TOP_P1/besalco_logo.png">    </p:cNvPr>
           <p:cNvPicPr>
             <a:picLocks noChangeAspect="1"/>
           </p:cNvPicPr>
@@ -49974,7 +50429,7 @@
                 <a:ea typeface="Calibri" pitchFamily="34" charset="-122"/>
                 <a:cs typeface="Calibri" pitchFamily="34" charset="-120"/>
               </a:rPr>
-              <a:t>82 hallazgos levantados · 54 internas · 19 del cliente · 8 de subcontrato · 18 especialidades involucradas.</a:t>
+              <a:t>83 hallazgos levantados · 55 internas · 19 del cliente · 8 de subcontrato · 18 especialidades involucradas.</a:t>
             </a:r>
             <a:endParaRPr lang="en-US" sz="1350" dirty="0"/>
           </a:p>
@@ -50189,7 +50644,7 @@
                 <a:ea typeface="Cambria" pitchFamily="34" charset="-122"/>
                 <a:cs typeface="Cambria" pitchFamily="34" charset="-120"/>
               </a:rPr>
-              <a:t>18 d</a:t>
+              <a:t>19 d</a:t>
             </a:r>
             <a:endParaRPr lang="en-US" sz="3400" dirty="0"/>
           </a:p>
@@ -50267,7 +50722,7 @@
                 <a:ea typeface="Cambria" pitchFamily="34" charset="-122"/>
                 <a:cs typeface="Cambria" pitchFamily="34" charset="-120"/>
               </a:rPr>
-              <a:t>66,7%</a:t>
+              <a:t>67,1%</a:t>
             </a:r>
             <a:endParaRPr lang="en-US" sz="3400" dirty="0"/>
           </a:p>
@@ -50345,7 +50800,7 @@
                 <a:ea typeface="Calibri" pitchFamily="34" charset="-122"/>
                 <a:cs typeface="Calibri" pitchFamily="34" charset="-120"/>
               </a:rPr>
-              <a:t>Corte: 19-10-2026</a:t>
+              <a:t>Corte: 26-10-2026</a:t>
             </a:r>
             <a:endParaRPr lang="en-US" sz="1100" dirty="0"/>
           </a:p>
@@ -50384,7 +50839,7 @@
                 <a:ea typeface="Calibri" pitchFamily="34" charset="-122"/>
                 <a:cs typeface="Calibri" pitchFamily="34" charset="-120"/>
               </a:rPr>
-              <a:t>Fuente: Data_NCR.xlsx — hoja «Observaciones» · Corte 19-10-2026 · 516 registros desde 10-02-2023</a:t>
+              <a:t>Fuente: Data_NCR.xlsx — hoja «Observaciones» · Corte 26-10-2026 · 519 registros desde 10-02-2023</a:t>
             </a:r>
             <a:endParaRPr lang="en-US" sz="850" dirty="0"/>
           </a:p>
